--- a/static/reports/agent-design-patterns-book-intro.pptx
+++ b/static/reports/agent-design-patterns-book-intro.pptx
@@ -26,6 +26,10 @@
     <p:sldId id="274" r:id="rId25"/>
     <p:sldId id="275" r:id="rId26"/>
     <p:sldId id="276" r:id="rId27"/>
+    <p:sldId id="277" r:id="rId28"/>
+    <p:sldId id="278" r:id="rId29"/>
+    <p:sldId id="279" r:id="rId30"/>
+    <p:sldId id="280" r:id="rId31"/>
   </p:sldIdLst>
   <p:sldSz cx="12188952" cy="6858000" type="screen4x3"/>
   <p:notesSz cx="6858000" cy="9144000"/>
@@ -3159,8 +3163,8 @@
         </p:nvSpPr>
         <p:spPr>
           <a:xfrm>
-            <a:off x="457200" y="2286000"/>
-            <a:ext cx="11274552" cy="1371600"/>
+            <a:off x="457200" y="1645920"/>
+            <a:ext cx="11274552" cy="1828800"/>
           </a:xfrm>
           <a:prstGeom prst="rect">
             <a:avLst/>
@@ -3174,14 +3178,14 @@
           <a:lstStyle/>
           <a:p>
             <a:pPr algn="ctr">
-              <a:defRPr sz="4400" b="1">
-                <a:solidFill>
-                  <a:srgbClr val="FFFFFF"/>
-                </a:solidFill>
-              </a:defRPr>
-            </a:pPr>
-            <a:r>
-              <a:t>《Agent设计模式》读书笔记</a:t>
+              <a:defRPr sz="4000" i="0">
+                <a:solidFill>
+                  <a:srgbClr val="E94560"/>
+                </a:solidFill>
+              </a:defRPr>
+            </a:pPr>
+            <a:r>
+              <a:t>为什么学习 Agent 设计模式？</a:t>
             </a:r>
           </a:p>
         </p:txBody>
@@ -3194,8 +3198,8 @@
         </p:nvSpPr>
         <p:spPr>
           <a:xfrm>
-            <a:off x="457200" y="3840480"/>
-            <a:ext cx="11274552" cy="914400"/>
+            <a:off x="457200" y="2926080"/>
+            <a:ext cx="11274552" cy="1828800"/>
           </a:xfrm>
           <a:prstGeom prst="rect">
             <a:avLst/>
@@ -3203,20 +3207,24 @@
           <a:noFill/>
         </p:spPr>
         <p:txBody>
-          <a:bodyPr wrap="none">
+          <a:bodyPr wrap="square">
             <a:spAutoFit/>
           </a:bodyPr>
           <a:lstStyle/>
           <a:p>
             <a:pPr algn="ctr">
-              <a:defRPr sz="2400">
+              <a:defRPr sz="2400" i="0">
                 <a:solidFill>
                   <a:srgbClr val="A0AEC0"/>
                 </a:solidFill>
               </a:defRPr>
             </a:pPr>
             <a:r>
-              <a:t>21个架构范式与智能体的演化之路 | 黄佳 著</a:t>
+              <a:t>大模型很强大，但用它构建可靠系统却是另一回事。</a:t>
+            </a:r>
+            <a:br/>
+            <a:r>
+              <a:t>这本书回答了一个核心问题：如何在不确定性上构建可靠性？</a:t>
             </a:r>
           </a:p>
         </p:txBody>
@@ -3254,7 +3262,7 @@
             <a:avLst/>
           </a:prstGeom>
           <a:solidFill>
-            <a:srgbClr val="553C9A"/>
+            <a:srgbClr val="FFFFFF"/>
           </a:solidFill>
           <a:ln>
             <a:noFill/>
@@ -3284,14 +3292,57 @@
       </p:sp>
       <p:sp>
         <p:nvSpPr>
-          <p:cNvPr id="3" name="TextBox 2"/>
+          <p:cNvPr id="3" name="Rectangle 2"/>
+          <p:cNvSpPr/>
+          <p:nvPr/>
+        </p:nvSpPr>
+        <p:spPr>
+          <a:xfrm>
+            <a:off x="0" y="0"/>
+            <a:ext cx="12188952" cy="1097280"/>
+          </a:xfrm>
+          <a:prstGeom prst="rect">
+            <a:avLst/>
+          </a:prstGeom>
+          <a:solidFill>
+            <a:srgbClr val="1A1A2E"/>
+          </a:solidFill>
+          <a:ln>
+            <a:noFill/>
+          </a:ln>
+        </p:spPr>
+        <p:style>
+          <a:lnRef idx="1">
+            <a:schemeClr val="accent1"/>
+          </a:lnRef>
+          <a:fillRef idx="3">
+            <a:schemeClr val="accent1"/>
+          </a:fillRef>
+          <a:effectRef idx="2">
+            <a:schemeClr val="accent1"/>
+          </a:effectRef>
+          <a:fontRef idx="minor">
+            <a:schemeClr val="lt1"/>
+          </a:fontRef>
+        </p:style>
+        <p:txBody>
+          <a:bodyPr rtlCol="0" anchor="ctr"/>
+          <a:lstStyle/>
+          <a:p>
+            <a:pPr algn="ctr"/>
+          </a:p>
+        </p:txBody>
+      </p:sp>
+      <p:sp>
+        <p:nvSpPr>
+          <p:cNvPr id="4" name="TextBox 3"/>
           <p:cNvSpPr txBox="1"/>
           <p:nvPr/>
         </p:nvSpPr>
         <p:spPr>
           <a:xfrm>
-            <a:off x="457200" y="2743200"/>
-            <a:ext cx="11274552" cy="1371600"/>
+            <a:off x="457200" y="228600"/>
+            <a:ext cx="11274552" cy="731520"/>
           </a:xfrm>
           <a:prstGeom prst="rect">
             <a:avLst/>
@@ -3304,15 +3355,98 @@
           </a:bodyPr>
           <a:lstStyle/>
           <a:p>
-            <a:pPr algn="ctr">
-              <a:defRPr sz="4800" b="1">
+            <a:pPr>
+              <a:defRPr sz="3200" b="1">
                 <a:solidFill>
                   <a:srgbClr val="FFFFFF"/>
                 </a:solidFill>
               </a:defRPr>
             </a:pPr>
             <a:r>
-              <a:t>🔮 下篇：六大类 21 个核心设计模式</a:t>
+              <a:t>ReAct：Agent 行动的标准心智模型</a:t>
+            </a:r>
+          </a:p>
+        </p:txBody>
+      </p:sp>
+      <p:sp>
+        <p:nvSpPr>
+          <p:cNvPr id="5" name="TextBox 4"/>
+          <p:cNvSpPr txBox="1"/>
+          <p:nvPr/>
+        </p:nvSpPr>
+        <p:spPr>
+          <a:xfrm>
+            <a:off x="640080" y="1371600"/>
+            <a:ext cx="10972800" cy="5029200"/>
+          </a:xfrm>
+          <a:prstGeom prst="rect">
+            <a:avLst/>
+          </a:prstGeom>
+          <a:noFill/>
+        </p:spPr>
+        <p:txBody>
+          <a:bodyPr wrap="square">
+            <a:spAutoFit/>
+          </a:bodyPr>
+          <a:lstStyle/>
+          <a:p>
+            <a:pPr>
+              <a:spcAft>
+                <a:spcPts val="1400"/>
+              </a:spcAft>
+              <a:defRPr sz="2100" b="0">
+                <a:solidFill>
+                  <a:srgbClr val="1A1A2E"/>
+                </a:solidFill>
+              </a:defRPr>
+            </a:pPr>
+            <a:r>
+              <a:t>• ReAct = Thought → Action → Observation — 推理与行动交织的循环</a:t>
+            </a:r>
+          </a:p>
+          <a:p>
+            <a:pPr>
+              <a:spcAft>
+                <a:spcPts val="1400"/>
+              </a:spcAft>
+              <a:defRPr sz="2100" b="1">
+                <a:solidFill>
+                  <a:srgbClr val="553C9A"/>
+                </a:solidFill>
+              </a:defRPr>
+            </a:pPr>
+            <a:r>
+              <a:t>• 看图规划（Thought）→ 采取行动（Action）→ 观察反馈（Observation）→ 循环</a:t>
+            </a:r>
+          </a:p>
+          <a:p>
+            <a:pPr>
+              <a:spcAft>
+                <a:spcPts val="1400"/>
+              </a:spcAft>
+              <a:defRPr sz="2100" b="0">
+                <a:solidFill>
+                  <a:srgbClr val="1A1A2E"/>
+                </a:solidFill>
+              </a:defRPr>
+            </a:pPr>
+            <a:r>
+              <a:t>• 核心价值：推理轨迹追踪中间决策，行动赋予探索环境获取外部信息的能力</a:t>
+            </a:r>
+          </a:p>
+          <a:p>
+            <a:pPr>
+              <a:spcAft>
+                <a:spcPts val="1400"/>
+              </a:spcAft>
+              <a:defRPr sz="2100" b="0">
+                <a:solidFill>
+                  <a:srgbClr val="1A1A2E"/>
+                </a:solidFill>
+              </a:defRPr>
+            </a:pPr>
+            <a:r>
+              <a:t>• 这是 Agent 与传统程序的核心区别：输出不再是终点，而是环境改变的起点</a:t>
             </a:r>
           </a:p>
         </p:txBody>
@@ -3451,99 +3585,21 @@
               </a:defRPr>
             </a:pPr>
             <a:r>
-              <a:t>六大类 21 个模式，构建完整智能体</a:t>
-            </a:r>
-          </a:p>
-        </p:txBody>
-      </p:sp>
-      <p:sp>
-        <p:nvSpPr>
-          <p:cNvPr id="5" name="Rounded Rectangle 4"/>
-          <p:cNvSpPr/>
+              <a:t>MCP + A2A：双轨制协议</a:t>
+            </a:r>
+          </a:p>
+        </p:txBody>
+      </p:sp>
+      <p:sp>
+        <p:nvSpPr>
+          <p:cNvPr id="5" name="TextBox 4"/>
+          <p:cNvSpPr txBox="1"/>
           <p:nvPr/>
         </p:nvSpPr>
         <p:spPr>
           <a:xfrm>
             <a:off x="640080" y="1371600"/>
-            <a:ext cx="3453383" cy="1188720"/>
-          </a:xfrm>
-          <a:prstGeom prst="roundRect">
-            <a:avLst/>
-          </a:prstGeom>
-          <a:solidFill>
-            <a:srgbClr val="1A1A2E"/>
-          </a:solidFill>
-          <a:ln>
-            <a:noFill/>
-          </a:ln>
-        </p:spPr>
-        <p:style>
-          <a:lnRef idx="1">
-            <a:schemeClr val="accent1"/>
-          </a:lnRef>
-          <a:fillRef idx="3">
-            <a:schemeClr val="accent1"/>
-          </a:fillRef>
-          <a:effectRef idx="2">
-            <a:schemeClr val="accent1"/>
-          </a:effectRef>
-          <a:fontRef idx="minor">
-            <a:schemeClr val="lt1"/>
-          </a:fontRef>
-        </p:style>
-        <p:txBody>
-          <a:bodyPr rtlCol="0" anchor="ctr"/>
-          <a:lstStyle/>
-          <a:p>
-            <a:pPr algn="ctr"/>
-          </a:p>
-        </p:txBody>
-      </p:sp>
-      <p:sp>
-        <p:nvSpPr>
-          <p:cNvPr id="6" name="TextBox 5"/>
-          <p:cNvSpPr txBox="1"/>
-          <p:nvPr/>
-        </p:nvSpPr>
-        <p:spPr>
-          <a:xfrm>
-            <a:off x="640080" y="1463040"/>
-            <a:ext cx="3361944" cy="365760"/>
-          </a:xfrm>
-          <a:prstGeom prst="rect">
-            <a:avLst/>
-          </a:prstGeom>
-          <a:noFill/>
-        </p:spPr>
-        <p:txBody>
-          <a:bodyPr wrap="none">
-            <a:spAutoFit/>
-          </a:bodyPr>
-          <a:lstStyle/>
-          <a:p>
-            <a:pPr>
-              <a:defRPr sz="1600" b="1">
-                <a:solidFill>
-                  <a:srgbClr val="553C9A"/>
-                </a:solidFill>
-              </a:defRPr>
-            </a:pPr>
-            <a:r>
-              <a:t>👁️ 感知模式</a:t>
-            </a:r>
-          </a:p>
-        </p:txBody>
-      </p:sp>
-      <p:sp>
-        <p:nvSpPr>
-          <p:cNvPr id="7" name="TextBox 6"/>
-          <p:cNvSpPr txBox="1"/>
-          <p:nvPr/>
-        </p:nvSpPr>
-        <p:spPr>
-          <a:xfrm>
-            <a:off x="640080" y="1828800"/>
-            <a:ext cx="3361944" cy="731520"/>
+            <a:ext cx="10972800" cy="5029200"/>
           </a:xfrm>
           <a:prstGeom prst="rect">
             <a:avLst/>
@@ -3557,579 +3613,77 @@
           <a:lstStyle/>
           <a:p>
             <a:pPr>
-              <a:defRPr sz="1200">
-                <a:solidFill>
-                  <a:srgbClr val="A0AEC0"/>
-                </a:solidFill>
-              </a:defRPr>
-            </a:pPr>
-            <a:r>
-              <a:t>注意力聚焦 · 多模态融合 · 主动感知</a:t>
-            </a:r>
-          </a:p>
-        </p:txBody>
-      </p:sp>
-      <p:sp>
-        <p:nvSpPr>
-          <p:cNvPr id="8" name="Rounded Rectangle 7"/>
-          <p:cNvSpPr/>
-          <p:nvPr/>
-        </p:nvSpPr>
-        <p:spPr>
-          <a:xfrm>
-            <a:off x="4276344" y="1371600"/>
-            <a:ext cx="3453383" cy="1188720"/>
-          </a:xfrm>
-          <a:prstGeom prst="roundRect">
-            <a:avLst/>
-          </a:prstGeom>
-          <a:solidFill>
-            <a:srgbClr val="1A1A2E"/>
-          </a:solidFill>
-          <a:ln>
-            <a:noFill/>
-          </a:ln>
-        </p:spPr>
-        <p:style>
-          <a:lnRef idx="1">
-            <a:schemeClr val="accent1"/>
-          </a:lnRef>
-          <a:fillRef idx="3">
-            <a:schemeClr val="accent1"/>
-          </a:fillRef>
-          <a:effectRef idx="2">
-            <a:schemeClr val="accent1"/>
-          </a:effectRef>
-          <a:fontRef idx="minor">
-            <a:schemeClr val="lt1"/>
-          </a:fontRef>
-        </p:style>
-        <p:txBody>
-          <a:bodyPr rtlCol="0" anchor="ctr"/>
-          <a:lstStyle/>
-          <a:p>
-            <a:pPr algn="ctr"/>
-          </a:p>
-        </p:txBody>
-      </p:sp>
-      <p:sp>
-        <p:nvSpPr>
-          <p:cNvPr id="9" name="TextBox 8"/>
-          <p:cNvSpPr txBox="1"/>
-          <p:nvPr/>
-        </p:nvSpPr>
-        <p:spPr>
-          <a:xfrm>
-            <a:off x="4276344" y="1463040"/>
-            <a:ext cx="3361944" cy="365760"/>
-          </a:xfrm>
-          <a:prstGeom prst="rect">
-            <a:avLst/>
-          </a:prstGeom>
-          <a:noFill/>
-        </p:spPr>
-        <p:txBody>
-          <a:bodyPr wrap="none">
-            <a:spAutoFit/>
-          </a:bodyPr>
-          <a:lstStyle/>
-          <a:p>
-            <a:pPr>
-              <a:defRPr sz="1600" b="1">
+              <a:spcAft>
+                <a:spcPts val="1400"/>
+              </a:spcAft>
+              <a:defRPr sz="2100" b="1">
                 <a:solidFill>
                   <a:srgbClr val="553C9A"/>
                 </a:solidFill>
               </a:defRPr>
             </a:pPr>
             <a:r>
-              <a:t>🧠 记忆模式</a:t>
-            </a:r>
-          </a:p>
-        </p:txBody>
-      </p:sp>
-      <p:sp>
-        <p:nvSpPr>
-          <p:cNvPr id="10" name="TextBox 9"/>
-          <p:cNvSpPr txBox="1"/>
-          <p:nvPr/>
-        </p:nvSpPr>
-        <p:spPr>
-          <a:xfrm>
-            <a:off x="4276344" y="1828800"/>
-            <a:ext cx="3361944" cy="731520"/>
-          </a:xfrm>
-          <a:prstGeom prst="rect">
-            <a:avLst/>
-          </a:prstGeom>
-          <a:noFill/>
-        </p:spPr>
-        <p:txBody>
-          <a:bodyPr wrap="square">
-            <a:spAutoFit/>
-          </a:bodyPr>
-          <a:lstStyle/>
-          <a:p>
-            <a:pPr>
-              <a:defRPr sz="1200">
-                <a:solidFill>
-                  <a:srgbClr val="A0AEC0"/>
-                </a:solidFill>
-              </a:defRPr>
-            </a:pPr>
-            <a:r>
-              <a:t>分层记忆 · RAG · 情节记忆</a:t>
-            </a:r>
-          </a:p>
-        </p:txBody>
-      </p:sp>
-      <p:sp>
-        <p:nvSpPr>
-          <p:cNvPr id="11" name="Rounded Rectangle 10"/>
-          <p:cNvSpPr/>
-          <p:nvPr/>
-        </p:nvSpPr>
-        <p:spPr>
-          <a:xfrm>
-            <a:off x="7912607" y="1371600"/>
-            <a:ext cx="3453383" cy="1188720"/>
-          </a:xfrm>
-          <a:prstGeom prst="roundRect">
-            <a:avLst/>
-          </a:prstGeom>
-          <a:solidFill>
-            <a:srgbClr val="1A1A2E"/>
-          </a:solidFill>
-          <a:ln>
-            <a:noFill/>
-          </a:ln>
-        </p:spPr>
-        <p:style>
-          <a:lnRef idx="1">
-            <a:schemeClr val="accent1"/>
-          </a:lnRef>
-          <a:fillRef idx="3">
-            <a:schemeClr val="accent1"/>
-          </a:fillRef>
-          <a:effectRef idx="2">
-            <a:schemeClr val="accent1"/>
-          </a:effectRef>
-          <a:fontRef idx="minor">
-            <a:schemeClr val="lt1"/>
-          </a:fontRef>
-        </p:style>
-        <p:txBody>
-          <a:bodyPr rtlCol="0" anchor="ctr"/>
-          <a:lstStyle/>
-          <a:p>
-            <a:pPr algn="ctr"/>
-          </a:p>
-        </p:txBody>
-      </p:sp>
-      <p:sp>
-        <p:nvSpPr>
-          <p:cNvPr id="12" name="TextBox 11"/>
-          <p:cNvSpPr txBox="1"/>
-          <p:nvPr/>
-        </p:nvSpPr>
-        <p:spPr>
-          <a:xfrm>
-            <a:off x="7912607" y="1463040"/>
-            <a:ext cx="3361944" cy="365760"/>
-          </a:xfrm>
-          <a:prstGeom prst="rect">
-            <a:avLst/>
-          </a:prstGeom>
-          <a:noFill/>
-        </p:spPr>
-        <p:txBody>
-          <a:bodyPr wrap="none">
-            <a:spAutoFit/>
-          </a:bodyPr>
-          <a:lstStyle/>
-          <a:p>
-            <a:pPr>
-              <a:defRPr sz="1600" b="1">
-                <a:solidFill>
-                  <a:srgbClr val="553C9A"/>
-                </a:solidFill>
-              </a:defRPr>
-            </a:pPr>
-            <a:r>
-              <a:t>⚙️ 推理模式</a:t>
-            </a:r>
-          </a:p>
-        </p:txBody>
-      </p:sp>
-      <p:sp>
-        <p:nvSpPr>
-          <p:cNvPr id="13" name="TextBox 12"/>
-          <p:cNvSpPr txBox="1"/>
-          <p:nvPr/>
-        </p:nvSpPr>
-        <p:spPr>
-          <a:xfrm>
-            <a:off x="7912607" y="1828800"/>
-            <a:ext cx="3361944" cy="731520"/>
-          </a:xfrm>
-          <a:prstGeom prst="rect">
-            <a:avLst/>
-          </a:prstGeom>
-          <a:noFill/>
-        </p:spPr>
-        <p:txBody>
-          <a:bodyPr wrap="square">
-            <a:spAutoFit/>
-          </a:bodyPr>
-          <a:lstStyle/>
-          <a:p>
-            <a:pPr>
-              <a:defRPr sz="1200">
-                <a:solidFill>
-                  <a:srgbClr val="A0AEC0"/>
-                </a:solidFill>
-              </a:defRPr>
-            </a:pPr>
-            <a:r>
-              <a:t>思维链 · 思维树 · 思维图</a:t>
-            </a:r>
-          </a:p>
-        </p:txBody>
-      </p:sp>
-      <p:sp>
-        <p:nvSpPr>
-          <p:cNvPr id="14" name="Rounded Rectangle 13"/>
-          <p:cNvSpPr/>
-          <p:nvPr/>
-        </p:nvSpPr>
-        <p:spPr>
-          <a:xfrm>
-            <a:off x="640080" y="2743200"/>
-            <a:ext cx="3453383" cy="1188720"/>
-          </a:xfrm>
-          <a:prstGeom prst="roundRect">
-            <a:avLst/>
-          </a:prstGeom>
-          <a:solidFill>
-            <a:srgbClr val="1A1A2E"/>
-          </a:solidFill>
-          <a:ln>
-            <a:noFill/>
-          </a:ln>
-        </p:spPr>
-        <p:style>
-          <a:lnRef idx="1">
-            <a:schemeClr val="accent1"/>
-          </a:lnRef>
-          <a:fillRef idx="3">
-            <a:schemeClr val="accent1"/>
-          </a:fillRef>
-          <a:effectRef idx="2">
-            <a:schemeClr val="accent1"/>
-          </a:effectRef>
-          <a:fontRef idx="minor">
-            <a:schemeClr val="lt1"/>
-          </a:fontRef>
-        </p:style>
-        <p:txBody>
-          <a:bodyPr rtlCol="0" anchor="ctr"/>
-          <a:lstStyle/>
-          <a:p>
-            <a:pPr algn="ctr"/>
-          </a:p>
-        </p:txBody>
-      </p:sp>
-      <p:sp>
-        <p:nvSpPr>
-          <p:cNvPr id="15" name="TextBox 14"/>
-          <p:cNvSpPr txBox="1"/>
-          <p:nvPr/>
-        </p:nvSpPr>
-        <p:spPr>
-          <a:xfrm>
-            <a:off x="640080" y="2834640"/>
-            <a:ext cx="3361944" cy="365760"/>
-          </a:xfrm>
-          <a:prstGeom prst="rect">
-            <a:avLst/>
-          </a:prstGeom>
-          <a:noFill/>
-        </p:spPr>
-        <p:txBody>
-          <a:bodyPr wrap="none">
-            <a:spAutoFit/>
-          </a:bodyPr>
-          <a:lstStyle/>
-          <a:p>
-            <a:pPr>
-              <a:defRPr sz="1600" b="1">
-                <a:solidFill>
-                  <a:srgbClr val="553C9A"/>
-                </a:solidFill>
-              </a:defRPr>
-            </a:pPr>
-            <a:r>
-              <a:t>💪 行动模式</a:t>
-            </a:r>
-          </a:p>
-        </p:txBody>
-      </p:sp>
-      <p:sp>
-        <p:nvSpPr>
-          <p:cNvPr id="16" name="TextBox 15"/>
-          <p:cNvSpPr txBox="1"/>
-          <p:nvPr/>
-        </p:nvSpPr>
-        <p:spPr>
-          <a:xfrm>
-            <a:off x="640080" y="3200400"/>
-            <a:ext cx="3361944" cy="731520"/>
-          </a:xfrm>
-          <a:prstGeom prst="rect">
-            <a:avLst/>
-          </a:prstGeom>
-          <a:noFill/>
-        </p:spPr>
-        <p:txBody>
-          <a:bodyPr wrap="square">
-            <a:spAutoFit/>
-          </a:bodyPr>
-          <a:lstStyle/>
-          <a:p>
-            <a:pPr>
-              <a:defRPr sz="1200">
-                <a:solidFill>
-                  <a:srgbClr val="A0AEC0"/>
-                </a:solidFill>
-              </a:defRPr>
-            </a:pPr>
-            <a:r>
-              <a:t>ReAct · 规划-执行 · 工具编排</a:t>
-            </a:r>
-          </a:p>
-        </p:txBody>
-      </p:sp>
-      <p:sp>
-        <p:nvSpPr>
-          <p:cNvPr id="17" name="Rounded Rectangle 16"/>
-          <p:cNvSpPr/>
-          <p:nvPr/>
-        </p:nvSpPr>
-        <p:spPr>
-          <a:xfrm>
-            <a:off x="4276344" y="2743200"/>
-            <a:ext cx="3453383" cy="1188720"/>
-          </a:xfrm>
-          <a:prstGeom prst="roundRect">
-            <a:avLst/>
-          </a:prstGeom>
-          <a:solidFill>
-            <a:srgbClr val="1A1A2E"/>
-          </a:solidFill>
-          <a:ln>
-            <a:noFill/>
-          </a:ln>
-        </p:spPr>
-        <p:style>
-          <a:lnRef idx="1">
-            <a:schemeClr val="accent1"/>
-          </a:lnRef>
-          <a:fillRef idx="3">
-            <a:schemeClr val="accent1"/>
-          </a:fillRef>
-          <a:effectRef idx="2">
-            <a:schemeClr val="accent1"/>
-          </a:effectRef>
-          <a:fontRef idx="minor">
-            <a:schemeClr val="lt1"/>
-          </a:fontRef>
-        </p:style>
-        <p:txBody>
-          <a:bodyPr rtlCol="0" anchor="ctr"/>
-          <a:lstStyle/>
-          <a:p>
-            <a:pPr algn="ctr"/>
-          </a:p>
-        </p:txBody>
-      </p:sp>
-      <p:sp>
-        <p:nvSpPr>
-          <p:cNvPr id="18" name="TextBox 17"/>
-          <p:cNvSpPr txBox="1"/>
-          <p:nvPr/>
-        </p:nvSpPr>
-        <p:spPr>
-          <a:xfrm>
-            <a:off x="4276344" y="2834640"/>
-            <a:ext cx="3361944" cy="365760"/>
-          </a:xfrm>
-          <a:prstGeom prst="rect">
-            <a:avLst/>
-          </a:prstGeom>
-          <a:noFill/>
-        </p:spPr>
-        <p:txBody>
-          <a:bodyPr wrap="none">
-            <a:spAutoFit/>
-          </a:bodyPr>
-          <a:lstStyle/>
-          <a:p>
-            <a:pPr>
-              <a:defRPr sz="1600" b="1">
-                <a:solidFill>
-                  <a:srgbClr val="553C9A"/>
-                </a:solidFill>
-              </a:defRPr>
-            </a:pPr>
-            <a:r>
-              <a:t>🔮 反思模式</a:t>
-            </a:r>
-          </a:p>
-        </p:txBody>
-      </p:sp>
-      <p:sp>
-        <p:nvSpPr>
-          <p:cNvPr id="19" name="TextBox 18"/>
-          <p:cNvSpPr txBox="1"/>
-          <p:nvPr/>
-        </p:nvSpPr>
-        <p:spPr>
-          <a:xfrm>
-            <a:off x="4276344" y="3200400"/>
-            <a:ext cx="3361944" cy="731520"/>
-          </a:xfrm>
-          <a:prstGeom prst="rect">
-            <a:avLst/>
-          </a:prstGeom>
-          <a:noFill/>
-        </p:spPr>
-        <p:txBody>
-          <a:bodyPr wrap="square">
-            <a:spAutoFit/>
-          </a:bodyPr>
-          <a:lstStyle/>
-          <a:p>
-            <a:pPr>
-              <a:defRPr sz="1200">
-                <a:solidFill>
-                  <a:srgbClr val="A0AEC0"/>
-                </a:solidFill>
-              </a:defRPr>
-            </a:pPr>
-            <a:r>
-              <a:t>自我修正 · 反思记忆 · 元学习</a:t>
-            </a:r>
-          </a:p>
-        </p:txBody>
-      </p:sp>
-      <p:sp>
-        <p:nvSpPr>
-          <p:cNvPr id="20" name="Rounded Rectangle 19"/>
-          <p:cNvSpPr/>
-          <p:nvPr/>
-        </p:nvSpPr>
-        <p:spPr>
-          <a:xfrm>
-            <a:off x="7912607" y="2743200"/>
-            <a:ext cx="3453383" cy="1188720"/>
-          </a:xfrm>
-          <a:prstGeom prst="roundRect">
-            <a:avLst/>
-          </a:prstGeom>
-          <a:solidFill>
-            <a:srgbClr val="1A1A2E"/>
-          </a:solidFill>
-          <a:ln>
-            <a:noFill/>
-          </a:ln>
-        </p:spPr>
-        <p:style>
-          <a:lnRef idx="1">
-            <a:schemeClr val="accent1"/>
-          </a:lnRef>
-          <a:fillRef idx="3">
-            <a:schemeClr val="accent1"/>
-          </a:fillRef>
-          <a:effectRef idx="2">
-            <a:schemeClr val="accent1"/>
-          </a:effectRef>
-          <a:fontRef idx="minor">
-            <a:schemeClr val="lt1"/>
-          </a:fontRef>
-        </p:style>
-        <p:txBody>
-          <a:bodyPr rtlCol="0" anchor="ctr"/>
-          <a:lstStyle/>
-          <a:p>
-            <a:pPr algn="ctr"/>
-          </a:p>
-        </p:txBody>
-      </p:sp>
-      <p:sp>
-        <p:nvSpPr>
-          <p:cNvPr id="21" name="TextBox 20"/>
-          <p:cNvSpPr txBox="1"/>
-          <p:nvPr/>
-        </p:nvSpPr>
-        <p:spPr>
-          <a:xfrm>
-            <a:off x="7912607" y="2834640"/>
-            <a:ext cx="3361944" cy="365760"/>
-          </a:xfrm>
-          <a:prstGeom prst="rect">
-            <a:avLst/>
-          </a:prstGeom>
-          <a:noFill/>
-        </p:spPr>
-        <p:txBody>
-          <a:bodyPr wrap="none">
-            <a:spAutoFit/>
-          </a:bodyPr>
-          <a:lstStyle/>
-          <a:p>
-            <a:pPr>
-              <a:defRPr sz="1600" b="1">
-                <a:solidFill>
-                  <a:srgbClr val="553C9A"/>
-                </a:solidFill>
-              </a:defRPr>
-            </a:pPr>
-            <a:r>
-              <a:t>🤝 协作模式</a:t>
-            </a:r>
-          </a:p>
-        </p:txBody>
-      </p:sp>
-      <p:sp>
-        <p:nvSpPr>
-          <p:cNvPr id="22" name="TextBox 21"/>
-          <p:cNvSpPr txBox="1"/>
-          <p:nvPr/>
-        </p:nvSpPr>
-        <p:spPr>
-          <a:xfrm>
-            <a:off x="7912607" y="3200400"/>
-            <a:ext cx="3361944" cy="731520"/>
-          </a:xfrm>
-          <a:prstGeom prst="rect">
-            <a:avLst/>
-          </a:prstGeom>
-          <a:noFill/>
-        </p:spPr>
-        <p:txBody>
-          <a:bodyPr wrap="square">
-            <a:spAutoFit/>
-          </a:bodyPr>
-          <a:lstStyle/>
-          <a:p>
-            <a:pPr>
-              <a:defRPr sz="1200">
-                <a:solidFill>
-                  <a:srgbClr val="A0AEC0"/>
-                </a:solidFill>
-              </a:defRPr>
-            </a:pPr>
-            <a:r>
-              <a:t>辩论 · 委托 · 群体</a:t>
+              <a:t>• MCP（Model Context Protocol）— AI 的 USB-C 接口：标准化 Agent 与工具/数据的连接</a:t>
+            </a:r>
+          </a:p>
+          <a:p>
+            <a:pPr>
+              <a:spcAft>
+                <a:spcPts val="1400"/>
+              </a:spcAft>
+              <a:defRPr sz="2100" b="0">
+                <a:solidFill>
+                  <a:srgbClr val="1A1A2E"/>
+                </a:solidFill>
+              </a:defRPr>
+            </a:pPr>
+            <a:r>
+              <a:t>• A2A — Agent 之间的「对讲机协议」：多个 Agent 相互协作</a:t>
+            </a:r>
+          </a:p>
+          <a:p>
+            <a:pPr>
+              <a:spcAft>
+                <a:spcPts val="1400"/>
+              </a:spcAft>
+              <a:defRPr sz="2100" b="0">
+                <a:solidFill>
+                  <a:srgbClr val="1A1A2E"/>
+                </a:solidFill>
+              </a:defRPr>
+            </a:pPr>
+            <a:r>
+              <a:t>• 工具(Tool) = Agent 的「手」— 原子化操作（执行SQL、发送HTTP）</a:t>
+            </a:r>
+          </a:p>
+          <a:p>
+            <a:pPr>
+              <a:spcAft>
+                <a:spcPts val="1400"/>
+              </a:spcAft>
+              <a:defRPr sz="2100" b="0">
+                <a:solidFill>
+                  <a:srgbClr val="1A1A2E"/>
+                </a:solidFill>
+              </a:defRPr>
+            </a:pPr>
+            <a:r>
+              <a:t>• 技能(Skill) = Agent 的「技能书」— 工具 + 领域知识 + SOP</a:t>
+            </a:r>
+          </a:p>
+          <a:p>
+            <a:pPr>
+              <a:spcAft>
+                <a:spcPts val="1400"/>
+              </a:spcAft>
+              <a:defRPr sz="2100" b="0">
+                <a:solidFill>
+                  <a:srgbClr val="1A1A2E"/>
+                </a:solidFill>
+              </a:defRPr>
+            </a:pPr>
+            <a:r>
+              <a:t>• 编排器（Orchestrator）：当 Agent 数量增加，系统需要「大脑」维持秩序</a:t>
             </a:r>
           </a:p>
         </p:txBody>
@@ -4197,92 +3751,14 @@
       </p:sp>
       <p:sp>
         <p:nvSpPr>
-          <p:cNvPr id="3" name="Rectangle 2"/>
-          <p:cNvSpPr/>
-          <p:nvPr/>
-        </p:nvSpPr>
-        <p:spPr>
-          <a:xfrm>
-            <a:off x="0" y="0"/>
-            <a:ext cx="12188952" cy="1097280"/>
-          </a:xfrm>
-          <a:prstGeom prst="rect">
-            <a:avLst/>
-          </a:prstGeom>
-          <a:solidFill>
-            <a:srgbClr val="1A1A2E"/>
-          </a:solidFill>
-          <a:ln>
-            <a:noFill/>
-          </a:ln>
-        </p:spPr>
-        <p:style>
-          <a:lnRef idx="1">
-            <a:schemeClr val="accent1"/>
-          </a:lnRef>
-          <a:fillRef idx="3">
-            <a:schemeClr val="accent1"/>
-          </a:fillRef>
-          <a:effectRef idx="2">
-            <a:schemeClr val="accent1"/>
-          </a:effectRef>
-          <a:fontRef idx="minor">
-            <a:schemeClr val="lt1"/>
-          </a:fontRef>
-        </p:style>
-        <p:txBody>
-          <a:bodyPr rtlCol="0" anchor="ctr"/>
-          <a:lstStyle/>
-          <a:p>
-            <a:pPr algn="ctr"/>
-          </a:p>
-        </p:txBody>
-      </p:sp>
-      <p:sp>
-        <p:nvSpPr>
-          <p:cNvPr id="4" name="TextBox 3"/>
+          <p:cNvPr id="3" name="TextBox 2"/>
           <p:cNvSpPr txBox="1"/>
           <p:nvPr/>
         </p:nvSpPr>
         <p:spPr>
           <a:xfrm>
-            <a:off x="457200" y="228600"/>
-            <a:ext cx="11274552" cy="731520"/>
-          </a:xfrm>
-          <a:prstGeom prst="rect">
-            <a:avLst/>
-          </a:prstGeom>
-          <a:noFill/>
-        </p:spPr>
-        <p:txBody>
-          <a:bodyPr wrap="none">
-            <a:spAutoFit/>
-          </a:bodyPr>
-          <a:lstStyle/>
-          <a:p>
-            <a:pPr>
-              <a:defRPr sz="3200" b="1">
-                <a:solidFill>
-                  <a:srgbClr val="FFFFFF"/>
-                </a:solidFill>
-              </a:defRPr>
-            </a:pPr>
-            <a:r>
-              <a:t>感知模式：看世界</a:t>
-            </a:r>
-          </a:p>
-        </p:txBody>
-      </p:sp>
-      <p:sp>
-        <p:nvSpPr>
-          <p:cNvPr id="5" name="TextBox 4"/>
-          <p:cNvSpPr txBox="1"/>
-          <p:nvPr/>
-        </p:nvSpPr>
-        <p:spPr>
-          <a:xfrm>
-            <a:off x="640080" y="1371600"/>
-            <a:ext cx="10972800" cy="5029200"/>
+            <a:off x="457200" y="2011680"/>
+            <a:ext cx="11274552" cy="1828800"/>
           </a:xfrm>
           <a:prstGeom prst="rect">
             <a:avLst/>
@@ -4295,63 +3771,15 @@
           </a:bodyPr>
           <a:lstStyle/>
           <a:p>
-            <a:pPr>
-              <a:spcAft>
-                <a:spcPts val="1200"/>
-              </a:spcAft>
-              <a:defRPr sz="2200" b="1">
-                <a:solidFill>
-                  <a:srgbClr val="553C9A"/>
-                </a:solidFill>
-              </a:defRPr>
-            </a:pPr>
-            <a:r>
-              <a:t>• 注意力聚焦 — 构建认知漏斗，用最低 Token 成本换取最高上下文质量</a:t>
-            </a:r>
-          </a:p>
-          <a:p>
-            <a:pPr>
-              <a:spcAft>
-                <a:spcPts val="1200"/>
-              </a:spcAft>
-              <a:defRPr sz="2200">
+            <a:pPr algn="ctr">
+              <a:defRPr sz="2600" i="1">
                 <a:solidFill>
                   <a:srgbClr val="1A1A2E"/>
                 </a:solidFill>
               </a:defRPr>
             </a:pPr>
             <a:r>
-              <a:t>• 多模态融合 — 建立统一语义场，从"拼接式"向"原生式"演进</a:t>
-            </a:r>
-          </a:p>
-          <a:p>
-            <a:pPr>
-              <a:spcAft>
-                <a:spcPts val="1200"/>
-              </a:spcAft>
-              <a:defRPr sz="2200" b="1">
-                <a:solidFill>
-                  <a:srgbClr val="553C9A"/>
-                </a:solidFill>
-              </a:defRPr>
-            </a:pPr>
-            <a:r>
-              <a:t>• 主动感知 — Agent 从"被动的答题者"转变为"主动的调查员"</a:t>
-            </a:r>
-          </a:p>
-          <a:p>
-            <a:pPr>
-              <a:spcAft>
-                <a:spcPts val="1200"/>
-              </a:spcAft>
-              <a:defRPr sz="2200">
-                <a:solidFill>
-                  <a:srgbClr val="1A1A2E"/>
-                </a:solidFill>
-              </a:defRPr>
-            </a:pPr>
-            <a:r>
-              <a:t>• "不要以它能记住多少为荣，而要以它能精简多少为傲。"</a:t>
+              <a:t>"从 GoF 的 23 个设计模式到 Agent 的无限可能，我们跨越了软件工程的一个世纪：设计模式并未消亡，而是在进化；软件工程未曾终结，而是在重生；人类的角色没有消失，而是在升华。"</a:t>
             </a:r>
           </a:p>
         </p:txBody>
@@ -4389,7 +3817,7 @@
             <a:avLst/>
           </a:prstGeom>
           <a:solidFill>
-            <a:srgbClr val="FFFFFF"/>
+            <a:srgbClr val="553C9A"/>
           </a:solidFill>
           <a:ln>
             <a:noFill/>
@@ -4419,92 +3847,14 @@
       </p:sp>
       <p:sp>
         <p:nvSpPr>
-          <p:cNvPr id="3" name="Rectangle 2"/>
-          <p:cNvSpPr/>
-          <p:nvPr/>
-        </p:nvSpPr>
-        <p:spPr>
-          <a:xfrm>
-            <a:off x="0" y="0"/>
-            <a:ext cx="12188952" cy="1097280"/>
-          </a:xfrm>
-          <a:prstGeom prst="rect">
-            <a:avLst/>
-          </a:prstGeom>
-          <a:solidFill>
-            <a:srgbClr val="1A1A2E"/>
-          </a:solidFill>
-          <a:ln>
-            <a:noFill/>
-          </a:ln>
-        </p:spPr>
-        <p:style>
-          <a:lnRef idx="1">
-            <a:schemeClr val="accent1"/>
-          </a:lnRef>
-          <a:fillRef idx="3">
-            <a:schemeClr val="accent1"/>
-          </a:fillRef>
-          <a:effectRef idx="2">
-            <a:schemeClr val="accent1"/>
-          </a:effectRef>
-          <a:fontRef idx="minor">
-            <a:schemeClr val="lt1"/>
-          </a:fontRef>
-        </p:style>
-        <p:txBody>
-          <a:bodyPr rtlCol="0" anchor="ctr"/>
-          <a:lstStyle/>
-          <a:p>
-            <a:pPr algn="ctr"/>
-          </a:p>
-        </p:txBody>
-      </p:sp>
-      <p:sp>
-        <p:nvSpPr>
-          <p:cNvPr id="4" name="TextBox 3"/>
+          <p:cNvPr id="3" name="TextBox 2"/>
           <p:cNvSpPr txBox="1"/>
           <p:nvPr/>
         </p:nvSpPr>
         <p:spPr>
           <a:xfrm>
-            <a:off x="457200" y="228600"/>
-            <a:ext cx="11274552" cy="731520"/>
-          </a:xfrm>
-          <a:prstGeom prst="rect">
-            <a:avLst/>
-          </a:prstGeom>
-          <a:noFill/>
-        </p:spPr>
-        <p:txBody>
-          <a:bodyPr wrap="none">
-            <a:spAutoFit/>
-          </a:bodyPr>
-          <a:lstStyle/>
-          <a:p>
-            <a:pPr>
-              <a:defRPr sz="3200" b="1">
-                <a:solidFill>
-                  <a:srgbClr val="FFFFFF"/>
-                </a:solidFill>
-              </a:defRPr>
-            </a:pPr>
-            <a:r>
-              <a:t>记忆模式：连接时间</a:t>
-            </a:r>
-          </a:p>
-        </p:txBody>
-      </p:sp>
-      <p:sp>
-        <p:nvSpPr>
-          <p:cNvPr id="5" name="TextBox 4"/>
-          <p:cNvSpPr txBox="1"/>
-          <p:nvPr/>
-        </p:nvSpPr>
-        <p:spPr>
-          <a:xfrm>
-            <a:off x="640080" y="1371600"/>
-            <a:ext cx="10972800" cy="5029200"/>
+            <a:off x="457200" y="2743200"/>
+            <a:ext cx="11274552" cy="1828800"/>
           </a:xfrm>
           <a:prstGeom prst="rect">
             <a:avLst/>
@@ -4517,63 +3867,15 @@
           </a:bodyPr>
           <a:lstStyle/>
           <a:p>
-            <a:pPr>
-              <a:spcAft>
-                <a:spcPts val="1200"/>
-              </a:spcAft>
-              <a:defRPr sz="2200">
-                <a:solidFill>
-                  <a:srgbClr val="1A1A2E"/>
-                </a:solidFill>
-              </a:defRPr>
-            </a:pPr>
-            <a:r>
-              <a:t>• 分层记忆 — L1工作记忆(RAM) / L2短期缓存 / L3长期存储(Vector DB)</a:t>
-            </a:r>
-          </a:p>
-          <a:p>
-            <a:pPr>
-              <a:spcAft>
-                <a:spcPts val="1200"/>
-              </a:spcAft>
-              <a:defRPr sz="2200" b="1">
-                <a:solidFill>
-                  <a:srgbClr val="553C9A"/>
-                </a:solidFill>
-              </a:defRPr>
-            </a:pPr>
-            <a:r>
-              <a:t>• RAG — 将"推理能力"（CPU）与"知识存储"（磁盘）解耦，无需重新训练</a:t>
-            </a:r>
-          </a:p>
-          <a:p>
-            <a:pPr>
-              <a:spcAft>
-                <a:spcPts val="1200"/>
-              </a:spcAft>
-              <a:defRPr sz="2200">
-                <a:solidFill>
-                  <a:srgbClr val="1A1A2E"/>
-                </a:solidFill>
-              </a:defRPr>
-            </a:pPr>
-            <a:r>
-              <a:t>• 情节记忆 — 沉淀 Agent 自身交互产生的动态经验</a:t>
-            </a:r>
-          </a:p>
-          <a:p>
-            <a:pPr>
-              <a:spcAft>
-                <a:spcPts val="1200"/>
-              </a:spcAft>
-              <a:defRPr sz="2200">
-                <a:solidFill>
-                  <a:srgbClr val="1A1A2E"/>
-                </a:solidFill>
-              </a:defRPr>
-            </a:pPr>
-            <a:r>
-              <a:t>• "从上下文工程到 MaaS，记忆正从技巧升级为核心基础设施。"</a:t>
+            <a:pPr algn="ctr">
+              <a:defRPr sz="5000" i="0">
+                <a:solidFill>
+                  <a:srgbClr val="FFFFFF"/>
+                </a:solidFill>
+              </a:defRPr>
+            </a:pPr>
+            <a:r>
+              <a:t>🔮  下篇：六大类 21 个核心设计模式</a:t>
             </a:r>
           </a:p>
         </p:txBody>
@@ -4712,21 +4014,64 @@
               </a:defRPr>
             </a:pPr>
             <a:r>
-              <a:t>推理模式：编织逻辑</a:t>
-            </a:r>
-          </a:p>
-        </p:txBody>
-      </p:sp>
-      <p:sp>
-        <p:nvSpPr>
-          <p:cNvPr id="5" name="TextBox 4"/>
+              <a:t>完整 Agent = 感知 + 记忆 + 推理 + 行动 + 反思 + 协作</a:t>
+            </a:r>
+          </a:p>
+        </p:txBody>
+      </p:sp>
+      <p:sp>
+        <p:nvSpPr>
+          <p:cNvPr id="5" name="Rounded Rectangle 4"/>
+          <p:cNvSpPr/>
+          <p:nvPr/>
+        </p:nvSpPr>
+        <p:spPr>
+          <a:xfrm>
+            <a:off x="731520" y="1371600"/>
+            <a:ext cx="1650492" cy="4754880"/>
+          </a:xfrm>
+          <a:prstGeom prst="roundRect">
+            <a:avLst/>
+          </a:prstGeom>
+          <a:solidFill>
+            <a:srgbClr val="1A1A2E"/>
+          </a:solidFill>
+          <a:ln>
+            <a:noFill/>
+          </a:ln>
+        </p:spPr>
+        <p:style>
+          <a:lnRef idx="1">
+            <a:schemeClr val="accent1"/>
+          </a:lnRef>
+          <a:fillRef idx="3">
+            <a:schemeClr val="accent1"/>
+          </a:fillRef>
+          <a:effectRef idx="2">
+            <a:schemeClr val="accent1"/>
+          </a:effectRef>
+          <a:fontRef idx="minor">
+            <a:schemeClr val="lt1"/>
+          </a:fontRef>
+        </p:style>
+        <p:txBody>
+          <a:bodyPr rtlCol="0" anchor="ctr"/>
+          <a:lstStyle/>
+          <a:p>
+            <a:pPr algn="ctr"/>
+          </a:p>
+        </p:txBody>
+      </p:sp>
+      <p:sp>
+        <p:nvSpPr>
+          <p:cNvPr id="6" name="TextBox 5"/>
           <p:cNvSpPr txBox="1"/>
           <p:nvPr/>
         </p:nvSpPr>
         <p:spPr>
           <a:xfrm>
-            <a:off x="640080" y="1371600"/>
-            <a:ext cx="10972800" cy="5029200"/>
+            <a:off x="731520" y="1463040"/>
+            <a:ext cx="1604772" cy="822960"/>
           </a:xfrm>
           <a:prstGeom prst="rect">
             <a:avLst/>
@@ -4740,62 +4085,782 @@
           <a:lstStyle/>
           <a:p>
             <a:pPr>
-              <a:spcAft>
-                <a:spcPts val="1200"/>
-              </a:spcAft>
-              <a:defRPr sz="2200" b="1">
+              <a:defRPr sz="1500" b="1">
                 <a:solidFill>
                   <a:srgbClr val="553C9A"/>
                 </a:solidFill>
               </a:defRPr>
             </a:pPr>
             <a:r>
-              <a:t>• 思维链(CoT) — 线性逐步推进，适合数学与逻辑推导</a:t>
-            </a:r>
-          </a:p>
-          <a:p>
-            <a:pPr>
-              <a:spcAft>
-                <a:spcPts val="1200"/>
-              </a:spcAft>
-              <a:defRPr sz="2200" b="1">
+              <a:t>👁️ 感知</a:t>
+            </a:r>
+            <a:br/>
+            <a:r>
+              <a:t>看世界</a:t>
+            </a:r>
+          </a:p>
+        </p:txBody>
+      </p:sp>
+      <p:sp>
+        <p:nvSpPr>
+          <p:cNvPr id="7" name="TextBox 6"/>
+          <p:cNvSpPr txBox="1"/>
+          <p:nvPr/>
+        </p:nvSpPr>
+        <p:spPr>
+          <a:xfrm>
+            <a:off x="731520" y="2377440"/>
+            <a:ext cx="1604772" cy="3657600"/>
+          </a:xfrm>
+          <a:prstGeom prst="rect">
+            <a:avLst/>
+          </a:prstGeom>
+          <a:noFill/>
+        </p:spPr>
+        <p:txBody>
+          <a:bodyPr wrap="square">
+            <a:spAutoFit/>
+          </a:bodyPr>
+          <a:lstStyle/>
+          <a:p>
+            <a:pPr algn="ctr">
+              <a:defRPr sz="1200">
+                <a:solidFill>
+                  <a:srgbClr val="A0AEC0"/>
+                </a:solidFill>
+              </a:defRPr>
+            </a:pPr>
+            <a:r>
+              <a:t>注意力聚焦</a:t>
+            </a:r>
+          </a:p>
+          <a:p>
+            <a:pPr algn="ctr">
+              <a:defRPr sz="1200">
+                <a:solidFill>
+                  <a:srgbClr val="A0AEC0"/>
+                </a:solidFill>
+              </a:defRPr>
+            </a:pPr>
+            <a:r>
+              <a:t>多模态融合</a:t>
+            </a:r>
+          </a:p>
+          <a:p>
+            <a:pPr algn="ctr">
+              <a:defRPr sz="1200">
+                <a:solidFill>
+                  <a:srgbClr val="A0AEC0"/>
+                </a:solidFill>
+              </a:defRPr>
+            </a:pPr>
+            <a:r>
+              <a:t>主动感知</a:t>
+            </a:r>
+          </a:p>
+        </p:txBody>
+      </p:sp>
+      <p:sp>
+        <p:nvSpPr>
+          <p:cNvPr id="8" name="Rounded Rectangle 7"/>
+          <p:cNvSpPr/>
+          <p:nvPr/>
+        </p:nvSpPr>
+        <p:spPr>
+          <a:xfrm>
+            <a:off x="2519172" y="1371600"/>
+            <a:ext cx="1650492" cy="4754880"/>
+          </a:xfrm>
+          <a:prstGeom prst="roundRect">
+            <a:avLst/>
+          </a:prstGeom>
+          <a:solidFill>
+            <a:srgbClr val="1A1A2E"/>
+          </a:solidFill>
+          <a:ln>
+            <a:noFill/>
+          </a:ln>
+        </p:spPr>
+        <p:style>
+          <a:lnRef idx="1">
+            <a:schemeClr val="accent1"/>
+          </a:lnRef>
+          <a:fillRef idx="3">
+            <a:schemeClr val="accent1"/>
+          </a:fillRef>
+          <a:effectRef idx="2">
+            <a:schemeClr val="accent1"/>
+          </a:effectRef>
+          <a:fontRef idx="minor">
+            <a:schemeClr val="lt1"/>
+          </a:fontRef>
+        </p:style>
+        <p:txBody>
+          <a:bodyPr rtlCol="0" anchor="ctr"/>
+          <a:lstStyle/>
+          <a:p>
+            <a:pPr algn="ctr"/>
+          </a:p>
+        </p:txBody>
+      </p:sp>
+      <p:sp>
+        <p:nvSpPr>
+          <p:cNvPr id="9" name="TextBox 8"/>
+          <p:cNvSpPr txBox="1"/>
+          <p:nvPr/>
+        </p:nvSpPr>
+        <p:spPr>
+          <a:xfrm>
+            <a:off x="2519172" y="1463040"/>
+            <a:ext cx="1604772" cy="822960"/>
+          </a:xfrm>
+          <a:prstGeom prst="rect">
+            <a:avLst/>
+          </a:prstGeom>
+          <a:noFill/>
+        </p:spPr>
+        <p:txBody>
+          <a:bodyPr wrap="square">
+            <a:spAutoFit/>
+          </a:bodyPr>
+          <a:lstStyle/>
+          <a:p>
+            <a:pPr>
+              <a:defRPr sz="1500" b="1">
                 <a:solidFill>
                   <a:srgbClr val="553C9A"/>
                 </a:solidFill>
               </a:defRPr>
             </a:pPr>
             <a:r>
-              <a:t>• 思维树(ToT) — 启发式搜索+剪枝回溯，适合多分支权衡</a:t>
-            </a:r>
-          </a:p>
-          <a:p>
-            <a:pPr>
-              <a:spcAft>
-                <a:spcPts val="1200"/>
-              </a:spcAft>
-              <a:defRPr sz="2200" b="1">
+              <a:t>🧠 记忆</a:t>
+            </a:r>
+            <a:br/>
+            <a:r>
+              <a:t>连接时间</a:t>
+            </a:r>
+          </a:p>
+        </p:txBody>
+      </p:sp>
+      <p:sp>
+        <p:nvSpPr>
+          <p:cNvPr id="10" name="TextBox 9"/>
+          <p:cNvSpPr txBox="1"/>
+          <p:nvPr/>
+        </p:nvSpPr>
+        <p:spPr>
+          <a:xfrm>
+            <a:off x="2519172" y="2377440"/>
+            <a:ext cx="1604772" cy="3657600"/>
+          </a:xfrm>
+          <a:prstGeom prst="rect">
+            <a:avLst/>
+          </a:prstGeom>
+          <a:noFill/>
+        </p:spPr>
+        <p:txBody>
+          <a:bodyPr wrap="square">
+            <a:spAutoFit/>
+          </a:bodyPr>
+          <a:lstStyle/>
+          <a:p>
+            <a:pPr algn="ctr">
+              <a:defRPr sz="1200">
+                <a:solidFill>
+                  <a:srgbClr val="A0AEC0"/>
+                </a:solidFill>
+              </a:defRPr>
+            </a:pPr>
+            <a:r>
+              <a:t>分层记忆</a:t>
+            </a:r>
+          </a:p>
+          <a:p>
+            <a:pPr algn="ctr">
+              <a:defRPr sz="1200">
+                <a:solidFill>
+                  <a:srgbClr val="A0AEC0"/>
+                </a:solidFill>
+              </a:defRPr>
+            </a:pPr>
+            <a:r>
+              <a:t>RAG</a:t>
+            </a:r>
+          </a:p>
+          <a:p>
+            <a:pPr algn="ctr">
+              <a:defRPr sz="1200">
+                <a:solidFill>
+                  <a:srgbClr val="A0AEC0"/>
+                </a:solidFill>
+              </a:defRPr>
+            </a:pPr>
+            <a:r>
+              <a:t>情节记忆</a:t>
+            </a:r>
+          </a:p>
+        </p:txBody>
+      </p:sp>
+      <p:sp>
+        <p:nvSpPr>
+          <p:cNvPr id="11" name="Rounded Rectangle 10"/>
+          <p:cNvSpPr/>
+          <p:nvPr/>
+        </p:nvSpPr>
+        <p:spPr>
+          <a:xfrm>
+            <a:off x="4306824" y="1371600"/>
+            <a:ext cx="1650492" cy="4754880"/>
+          </a:xfrm>
+          <a:prstGeom prst="roundRect">
+            <a:avLst/>
+          </a:prstGeom>
+          <a:solidFill>
+            <a:srgbClr val="1A1A2E"/>
+          </a:solidFill>
+          <a:ln>
+            <a:noFill/>
+          </a:ln>
+        </p:spPr>
+        <p:style>
+          <a:lnRef idx="1">
+            <a:schemeClr val="accent1"/>
+          </a:lnRef>
+          <a:fillRef idx="3">
+            <a:schemeClr val="accent1"/>
+          </a:fillRef>
+          <a:effectRef idx="2">
+            <a:schemeClr val="accent1"/>
+          </a:effectRef>
+          <a:fontRef idx="minor">
+            <a:schemeClr val="lt1"/>
+          </a:fontRef>
+        </p:style>
+        <p:txBody>
+          <a:bodyPr rtlCol="0" anchor="ctr"/>
+          <a:lstStyle/>
+          <a:p>
+            <a:pPr algn="ctr"/>
+          </a:p>
+        </p:txBody>
+      </p:sp>
+      <p:sp>
+        <p:nvSpPr>
+          <p:cNvPr id="12" name="TextBox 11"/>
+          <p:cNvSpPr txBox="1"/>
+          <p:nvPr/>
+        </p:nvSpPr>
+        <p:spPr>
+          <a:xfrm>
+            <a:off x="4306824" y="1463040"/>
+            <a:ext cx="1604772" cy="822960"/>
+          </a:xfrm>
+          <a:prstGeom prst="rect">
+            <a:avLst/>
+          </a:prstGeom>
+          <a:noFill/>
+        </p:spPr>
+        <p:txBody>
+          <a:bodyPr wrap="square">
+            <a:spAutoFit/>
+          </a:bodyPr>
+          <a:lstStyle/>
+          <a:p>
+            <a:pPr>
+              <a:defRPr sz="1500" b="1">
                 <a:solidFill>
                   <a:srgbClr val="553C9A"/>
                 </a:solidFill>
               </a:defRPr>
             </a:pPr>
             <a:r>
-              <a:t>• 思维图(GoT) — 图结构编织+多轮迭代，适合复杂依赖整合</a:t>
-            </a:r>
-          </a:p>
-          <a:p>
-            <a:pPr>
-              <a:spcAft>
-                <a:spcPts val="1200"/>
-              </a:spcAft>
-              <a:defRPr sz="2200">
-                <a:solidFill>
-                  <a:srgbClr val="1A1A2E"/>
-                </a:solidFill>
-              </a:defRPr>
-            </a:pPr>
-            <a:r>
-              <a:t>• "Agent 架构师应善于指挥整支认知乐团，而非迷信单一推理模式。"</a:t>
+              <a:t>⚙️ 推理</a:t>
+            </a:r>
+            <a:br/>
+            <a:r>
+              <a:t>编织逻辑</a:t>
+            </a:r>
+          </a:p>
+        </p:txBody>
+      </p:sp>
+      <p:sp>
+        <p:nvSpPr>
+          <p:cNvPr id="13" name="TextBox 12"/>
+          <p:cNvSpPr txBox="1"/>
+          <p:nvPr/>
+        </p:nvSpPr>
+        <p:spPr>
+          <a:xfrm>
+            <a:off x="4306824" y="2377440"/>
+            <a:ext cx="1604772" cy="3657600"/>
+          </a:xfrm>
+          <a:prstGeom prst="rect">
+            <a:avLst/>
+          </a:prstGeom>
+          <a:noFill/>
+        </p:spPr>
+        <p:txBody>
+          <a:bodyPr wrap="square">
+            <a:spAutoFit/>
+          </a:bodyPr>
+          <a:lstStyle/>
+          <a:p>
+            <a:pPr algn="ctr">
+              <a:defRPr sz="1200">
+                <a:solidFill>
+                  <a:srgbClr val="A0AEC0"/>
+                </a:solidFill>
+              </a:defRPr>
+            </a:pPr>
+            <a:r>
+              <a:t>思维链</a:t>
+            </a:r>
+          </a:p>
+          <a:p>
+            <a:pPr algn="ctr">
+              <a:defRPr sz="1200">
+                <a:solidFill>
+                  <a:srgbClr val="A0AEC0"/>
+                </a:solidFill>
+              </a:defRPr>
+            </a:pPr>
+            <a:r>
+              <a:t>思维树</a:t>
+            </a:r>
+          </a:p>
+          <a:p>
+            <a:pPr algn="ctr">
+              <a:defRPr sz="1200">
+                <a:solidFill>
+                  <a:srgbClr val="A0AEC0"/>
+                </a:solidFill>
+              </a:defRPr>
+            </a:pPr>
+            <a:r>
+              <a:t>思维图</a:t>
+            </a:r>
+          </a:p>
+        </p:txBody>
+      </p:sp>
+      <p:sp>
+        <p:nvSpPr>
+          <p:cNvPr id="14" name="Rounded Rectangle 13"/>
+          <p:cNvSpPr/>
+          <p:nvPr/>
+        </p:nvSpPr>
+        <p:spPr>
+          <a:xfrm>
+            <a:off x="6094476" y="1371600"/>
+            <a:ext cx="1650492" cy="4754880"/>
+          </a:xfrm>
+          <a:prstGeom prst="roundRect">
+            <a:avLst/>
+          </a:prstGeom>
+          <a:solidFill>
+            <a:srgbClr val="1A1A2E"/>
+          </a:solidFill>
+          <a:ln>
+            <a:noFill/>
+          </a:ln>
+        </p:spPr>
+        <p:style>
+          <a:lnRef idx="1">
+            <a:schemeClr val="accent1"/>
+          </a:lnRef>
+          <a:fillRef idx="3">
+            <a:schemeClr val="accent1"/>
+          </a:fillRef>
+          <a:effectRef idx="2">
+            <a:schemeClr val="accent1"/>
+          </a:effectRef>
+          <a:fontRef idx="minor">
+            <a:schemeClr val="lt1"/>
+          </a:fontRef>
+        </p:style>
+        <p:txBody>
+          <a:bodyPr rtlCol="0" anchor="ctr"/>
+          <a:lstStyle/>
+          <a:p>
+            <a:pPr algn="ctr"/>
+          </a:p>
+        </p:txBody>
+      </p:sp>
+      <p:sp>
+        <p:nvSpPr>
+          <p:cNvPr id="15" name="TextBox 14"/>
+          <p:cNvSpPr txBox="1"/>
+          <p:nvPr/>
+        </p:nvSpPr>
+        <p:spPr>
+          <a:xfrm>
+            <a:off x="6094476" y="1463040"/>
+            <a:ext cx="1604772" cy="822960"/>
+          </a:xfrm>
+          <a:prstGeom prst="rect">
+            <a:avLst/>
+          </a:prstGeom>
+          <a:noFill/>
+        </p:spPr>
+        <p:txBody>
+          <a:bodyPr wrap="square">
+            <a:spAutoFit/>
+          </a:bodyPr>
+          <a:lstStyle/>
+          <a:p>
+            <a:pPr>
+              <a:defRPr sz="1500" b="1">
+                <a:solidFill>
+                  <a:srgbClr val="553C9A"/>
+                </a:solidFill>
+              </a:defRPr>
+            </a:pPr>
+            <a:r>
+              <a:t>💪 行动</a:t>
+            </a:r>
+            <a:br/>
+            <a:r>
+              <a:t>付诸实施</a:t>
+            </a:r>
+          </a:p>
+        </p:txBody>
+      </p:sp>
+      <p:sp>
+        <p:nvSpPr>
+          <p:cNvPr id="16" name="TextBox 15"/>
+          <p:cNvSpPr txBox="1"/>
+          <p:nvPr/>
+        </p:nvSpPr>
+        <p:spPr>
+          <a:xfrm>
+            <a:off x="6094476" y="2377440"/>
+            <a:ext cx="1604772" cy="3657600"/>
+          </a:xfrm>
+          <a:prstGeom prst="rect">
+            <a:avLst/>
+          </a:prstGeom>
+          <a:noFill/>
+        </p:spPr>
+        <p:txBody>
+          <a:bodyPr wrap="square">
+            <a:spAutoFit/>
+          </a:bodyPr>
+          <a:lstStyle/>
+          <a:p>
+            <a:pPr algn="ctr">
+              <a:defRPr sz="1200">
+                <a:solidFill>
+                  <a:srgbClr val="A0AEC0"/>
+                </a:solidFill>
+              </a:defRPr>
+            </a:pPr>
+            <a:r>
+              <a:t>ReAct</a:t>
+            </a:r>
+          </a:p>
+          <a:p>
+            <a:pPr algn="ctr">
+              <a:defRPr sz="1200">
+                <a:solidFill>
+                  <a:srgbClr val="A0AEC0"/>
+                </a:solidFill>
+              </a:defRPr>
+            </a:pPr>
+            <a:r>
+              <a:t>规划-执行</a:t>
+            </a:r>
+          </a:p>
+          <a:p>
+            <a:pPr algn="ctr">
+              <a:defRPr sz="1200">
+                <a:solidFill>
+                  <a:srgbClr val="A0AEC0"/>
+                </a:solidFill>
+              </a:defRPr>
+            </a:pPr>
+            <a:r>
+              <a:t>工具编排</a:t>
+            </a:r>
+          </a:p>
+        </p:txBody>
+      </p:sp>
+      <p:sp>
+        <p:nvSpPr>
+          <p:cNvPr id="17" name="Rounded Rectangle 16"/>
+          <p:cNvSpPr/>
+          <p:nvPr/>
+        </p:nvSpPr>
+        <p:spPr>
+          <a:xfrm>
+            <a:off x="7882128" y="1371600"/>
+            <a:ext cx="1650492" cy="4754880"/>
+          </a:xfrm>
+          <a:prstGeom prst="roundRect">
+            <a:avLst/>
+          </a:prstGeom>
+          <a:solidFill>
+            <a:srgbClr val="1A1A2E"/>
+          </a:solidFill>
+          <a:ln>
+            <a:noFill/>
+          </a:ln>
+        </p:spPr>
+        <p:style>
+          <a:lnRef idx="1">
+            <a:schemeClr val="accent1"/>
+          </a:lnRef>
+          <a:fillRef idx="3">
+            <a:schemeClr val="accent1"/>
+          </a:fillRef>
+          <a:effectRef idx="2">
+            <a:schemeClr val="accent1"/>
+          </a:effectRef>
+          <a:fontRef idx="minor">
+            <a:schemeClr val="lt1"/>
+          </a:fontRef>
+        </p:style>
+        <p:txBody>
+          <a:bodyPr rtlCol="0" anchor="ctr"/>
+          <a:lstStyle/>
+          <a:p>
+            <a:pPr algn="ctr"/>
+          </a:p>
+        </p:txBody>
+      </p:sp>
+      <p:sp>
+        <p:nvSpPr>
+          <p:cNvPr id="18" name="TextBox 17"/>
+          <p:cNvSpPr txBox="1"/>
+          <p:nvPr/>
+        </p:nvSpPr>
+        <p:spPr>
+          <a:xfrm>
+            <a:off x="7882128" y="1463040"/>
+            <a:ext cx="1604772" cy="822960"/>
+          </a:xfrm>
+          <a:prstGeom prst="rect">
+            <a:avLst/>
+          </a:prstGeom>
+          <a:noFill/>
+        </p:spPr>
+        <p:txBody>
+          <a:bodyPr wrap="square">
+            <a:spAutoFit/>
+          </a:bodyPr>
+          <a:lstStyle/>
+          <a:p>
+            <a:pPr>
+              <a:defRPr sz="1500" b="1">
+                <a:solidFill>
+                  <a:srgbClr val="553C9A"/>
+                </a:solidFill>
+              </a:defRPr>
+            </a:pPr>
+            <a:r>
+              <a:t>🔮 反思</a:t>
+            </a:r>
+            <a:br/>
+            <a:r>
+              <a:t>判断对错</a:t>
+            </a:r>
+          </a:p>
+        </p:txBody>
+      </p:sp>
+      <p:sp>
+        <p:nvSpPr>
+          <p:cNvPr id="19" name="TextBox 18"/>
+          <p:cNvSpPr txBox="1"/>
+          <p:nvPr/>
+        </p:nvSpPr>
+        <p:spPr>
+          <a:xfrm>
+            <a:off x="7882128" y="2377440"/>
+            <a:ext cx="1604772" cy="3657600"/>
+          </a:xfrm>
+          <a:prstGeom prst="rect">
+            <a:avLst/>
+          </a:prstGeom>
+          <a:noFill/>
+        </p:spPr>
+        <p:txBody>
+          <a:bodyPr wrap="square">
+            <a:spAutoFit/>
+          </a:bodyPr>
+          <a:lstStyle/>
+          <a:p>
+            <a:pPr algn="ctr">
+              <a:defRPr sz="1200">
+                <a:solidFill>
+                  <a:srgbClr val="A0AEC0"/>
+                </a:solidFill>
+              </a:defRPr>
+            </a:pPr>
+            <a:r>
+              <a:t>自我修正</a:t>
+            </a:r>
+          </a:p>
+          <a:p>
+            <a:pPr algn="ctr">
+              <a:defRPr sz="1200">
+                <a:solidFill>
+                  <a:srgbClr val="A0AEC0"/>
+                </a:solidFill>
+              </a:defRPr>
+            </a:pPr>
+            <a:r>
+              <a:t>反思记忆</a:t>
+            </a:r>
+          </a:p>
+          <a:p>
+            <a:pPr algn="ctr">
+              <a:defRPr sz="1200">
+                <a:solidFill>
+                  <a:srgbClr val="A0AEC0"/>
+                </a:solidFill>
+              </a:defRPr>
+            </a:pPr>
+            <a:r>
+              <a:t>元学习</a:t>
+            </a:r>
+          </a:p>
+        </p:txBody>
+      </p:sp>
+      <p:sp>
+        <p:nvSpPr>
+          <p:cNvPr id="20" name="Rounded Rectangle 19"/>
+          <p:cNvSpPr/>
+          <p:nvPr/>
+        </p:nvSpPr>
+        <p:spPr>
+          <a:xfrm>
+            <a:off x="9669780" y="1371600"/>
+            <a:ext cx="1650492" cy="4754880"/>
+          </a:xfrm>
+          <a:prstGeom prst="roundRect">
+            <a:avLst/>
+          </a:prstGeom>
+          <a:solidFill>
+            <a:srgbClr val="1A1A2E"/>
+          </a:solidFill>
+          <a:ln>
+            <a:noFill/>
+          </a:ln>
+        </p:spPr>
+        <p:style>
+          <a:lnRef idx="1">
+            <a:schemeClr val="accent1"/>
+          </a:lnRef>
+          <a:fillRef idx="3">
+            <a:schemeClr val="accent1"/>
+          </a:fillRef>
+          <a:effectRef idx="2">
+            <a:schemeClr val="accent1"/>
+          </a:effectRef>
+          <a:fontRef idx="minor">
+            <a:schemeClr val="lt1"/>
+          </a:fontRef>
+        </p:style>
+        <p:txBody>
+          <a:bodyPr rtlCol="0" anchor="ctr"/>
+          <a:lstStyle/>
+          <a:p>
+            <a:pPr algn="ctr"/>
+          </a:p>
+        </p:txBody>
+      </p:sp>
+      <p:sp>
+        <p:nvSpPr>
+          <p:cNvPr id="21" name="TextBox 20"/>
+          <p:cNvSpPr txBox="1"/>
+          <p:nvPr/>
+        </p:nvSpPr>
+        <p:spPr>
+          <a:xfrm>
+            <a:off x="9669780" y="1463040"/>
+            <a:ext cx="1604772" cy="822960"/>
+          </a:xfrm>
+          <a:prstGeom prst="rect">
+            <a:avLst/>
+          </a:prstGeom>
+          <a:noFill/>
+        </p:spPr>
+        <p:txBody>
+          <a:bodyPr wrap="square">
+            <a:spAutoFit/>
+          </a:bodyPr>
+          <a:lstStyle/>
+          <a:p>
+            <a:pPr>
+              <a:defRPr sz="1500" b="1">
+                <a:solidFill>
+                  <a:srgbClr val="553C9A"/>
+                </a:solidFill>
+              </a:defRPr>
+            </a:pPr>
+            <a:r>
+              <a:t>🤝 协作</a:t>
+            </a:r>
+            <a:br/>
+            <a:r>
+              <a:t>共同进化</a:t>
+            </a:r>
+          </a:p>
+        </p:txBody>
+      </p:sp>
+      <p:sp>
+        <p:nvSpPr>
+          <p:cNvPr id="22" name="TextBox 21"/>
+          <p:cNvSpPr txBox="1"/>
+          <p:nvPr/>
+        </p:nvSpPr>
+        <p:spPr>
+          <a:xfrm>
+            <a:off x="9669780" y="2377440"/>
+            <a:ext cx="1604772" cy="3657600"/>
+          </a:xfrm>
+          <a:prstGeom prst="rect">
+            <a:avLst/>
+          </a:prstGeom>
+          <a:noFill/>
+        </p:spPr>
+        <p:txBody>
+          <a:bodyPr wrap="square">
+            <a:spAutoFit/>
+          </a:bodyPr>
+          <a:lstStyle/>
+          <a:p>
+            <a:pPr algn="ctr">
+              <a:defRPr sz="1200">
+                <a:solidFill>
+                  <a:srgbClr val="A0AEC0"/>
+                </a:solidFill>
+              </a:defRPr>
+            </a:pPr>
+            <a:r>
+              <a:t>辩论</a:t>
+            </a:r>
+          </a:p>
+          <a:p>
+            <a:pPr algn="ctr">
+              <a:defRPr sz="1200">
+                <a:solidFill>
+                  <a:srgbClr val="A0AEC0"/>
+                </a:solidFill>
+              </a:defRPr>
+            </a:pPr>
+            <a:r>
+              <a:t>委托</a:t>
+            </a:r>
+          </a:p>
+          <a:p>
+            <a:pPr algn="ctr">
+              <a:defRPr sz="1200">
+                <a:solidFill>
+                  <a:srgbClr val="A0AEC0"/>
+                </a:solidFill>
+              </a:defRPr>
+            </a:pPr>
+            <a:r>
+              <a:t>群体</a:t>
             </a:r>
           </a:p>
         </p:txBody>
@@ -4934,7 +4999,7 @@
               </a:defRPr>
             </a:pPr>
             <a:r>
-              <a:t>行动模式：付诸实施</a:t>
+              <a:t>感知模式：看世界</a:t>
             </a:r>
           </a:p>
         </p:txBody>
@@ -4963,61 +5028,76 @@
           <a:p>
             <a:pPr>
               <a:spcAft>
-                <a:spcPts val="1200"/>
+                <a:spcPts val="1400"/>
               </a:spcAft>
-              <a:defRPr sz="2200" b="1">
+              <a:defRPr sz="2100" b="1">
                 <a:solidFill>
                   <a:srgbClr val="553C9A"/>
                 </a:solidFill>
               </a:defRPr>
             </a:pPr>
             <a:r>
-              <a:t>• ReAct — 边想边做：看图规划 → 采取行动 → 观察反馈</a:t>
+              <a:t>• 注意力聚焦 — 构建认知漏斗，用最低 Token 成本换取最高上下文质量</a:t>
             </a:r>
           </a:p>
           <a:p>
             <a:pPr>
               <a:spcAft>
-                <a:spcPts val="1200"/>
+                <a:spcPts val="1400"/>
               </a:spcAft>
-              <a:defRPr sz="2200">
+              <a:defRPr sz="2100" b="0">
                 <a:solidFill>
                   <a:srgbClr val="1A1A2E"/>
                 </a:solidFill>
               </a:defRPr>
             </a:pPr>
             <a:r>
-              <a:t>• 规划-执行 — 制订全局战略，分解为可执行步骤</a:t>
+              <a:t>• 多模态融合 — 建立统一语义场，从「拼接式」向「原生式」演进</a:t>
             </a:r>
           </a:p>
           <a:p>
             <a:pPr>
               <a:spcAft>
-                <a:spcPts val="1200"/>
+                <a:spcPts val="1400"/>
               </a:spcAft>
-              <a:defRPr sz="2200">
+              <a:defRPr sz="2100" b="1">
+                <a:solidFill>
+                  <a:srgbClr val="553C9A"/>
+                </a:solidFill>
+              </a:defRPr>
+            </a:pPr>
+            <a:r>
+              <a:t>• 主动感知 — Agent 从「被动的答题者」转变为「主动的调查员」</a:t>
+            </a:r>
+          </a:p>
+          <a:p>
+            <a:pPr>
+              <a:spcAft>
+                <a:spcPts val="1400"/>
+              </a:spcAft>
+              <a:defRPr sz="2100" b="0">
                 <a:solidFill>
                   <a:srgbClr val="1A1A2E"/>
                 </a:solidFill>
               </a:defRPr>
             </a:pPr>
             <a:r>
-              <a:t>• 工具编排 — 精准选择、协同调配海量外部工具</a:t>
+              <a:t>• 本质：不是「看到所有」，而是「看到关键」并「主动寻找未知」</a:t>
             </a:r>
           </a:p>
           <a:p>
             <a:pPr>
               <a:spcAft>
-                <a:spcPts val="1200"/>
+                <a:spcPts val="1400"/>
               </a:spcAft>
-              <a:defRPr sz="2200">
+              <a:defRPr sz="2100" b="0">
                 <a:solidFill>
                   <a:srgbClr val="1A1A2E"/>
                 </a:solidFill>
               </a:defRPr>
             </a:pPr>
             <a:r>
-              <a:t>• 自适应策略 — 从进化论角度，通过试错+反馈+选择演化出最优决策</a:t>
+              <a:t>• "不要以它能记住多少为荣，而要以它能精简多少为傲。"</a:t>
             </a:r>
           </a:p>
         </p:txBody>
@@ -5156,7 +5236,7 @@
               </a:defRPr>
             </a:pPr>
             <a:r>
-              <a:t>反思模式：AI 的灵魂工程学</a:t>
+              <a:t>记忆模式：连接时间</a:t>
             </a:r>
           </a:p>
         </p:txBody>
@@ -5185,61 +5265,76 @@
           <a:p>
             <a:pPr>
               <a:spcAft>
-                <a:spcPts val="1200"/>
+                <a:spcPts val="1400"/>
               </a:spcAft>
-              <a:defRPr sz="2200">
+              <a:defRPr sz="2100" b="0">
                 <a:solidFill>
                   <a:srgbClr val="1A1A2E"/>
                 </a:solidFill>
               </a:defRPr>
             </a:pPr>
             <a:r>
-              <a:t>• 自我修正 — 当下毫秒级，像橡皮擦一样擦除错误</a:t>
+              <a:t>• 分层记忆 — L1工作记忆(Context Window) / L2短期缓存(摘要) / L3长期存储(Vector DB+知识图谱)</a:t>
             </a:r>
           </a:p>
           <a:p>
             <a:pPr>
               <a:spcAft>
-                <a:spcPts val="1200"/>
+                <a:spcPts val="1400"/>
               </a:spcAft>
-              <a:defRPr sz="2200">
+              <a:defRPr sz="2100" b="1">
+                <a:solidFill>
+                  <a:srgbClr val="553C9A"/>
+                </a:solidFill>
+              </a:defRPr>
+            </a:pPr>
+            <a:r>
+              <a:t>• RAG — 将「推理能力」(CPU) 与「知识存储」(磁盘) 解耦，极低成本保持时效性</a:t>
+            </a:r>
+          </a:p>
+          <a:p>
+            <a:pPr>
+              <a:spcAft>
+                <a:spcPts val="1400"/>
+              </a:spcAft>
+              <a:defRPr sz="2100" b="1">
+                <a:solidFill>
+                  <a:srgbClr val="553C9A"/>
+                </a:solidFill>
+              </a:defRPr>
+            </a:pPr>
+            <a:r>
+              <a:t>• 情节记忆 — 沉淀 Agent 自身交互产生的动态经验，Agent 不需要微调即可进化</a:t>
+            </a:r>
+          </a:p>
+          <a:p>
+            <a:pPr>
+              <a:spcAft>
+                <a:spcPts val="1400"/>
+              </a:spcAft>
+              <a:defRPr sz="2100" b="0">
                 <a:solidFill>
                   <a:srgbClr val="1A1A2E"/>
                 </a:solidFill>
               </a:defRPr>
             </a:pPr>
             <a:r>
-              <a:t>• 反思记忆 — 下次分钟级，像错题本一样沉淀经验</a:t>
+              <a:t>• 两种流转：「溢出与巩固」(热→冷) + 「检索与唤醒」(冷→热)</a:t>
             </a:r>
           </a:p>
           <a:p>
             <a:pPr>
               <a:spcAft>
-                <a:spcPts val="1200"/>
+                <a:spcPts val="1400"/>
               </a:spcAft>
-              <a:defRPr sz="2200" b="1">
-                <a:solidFill>
-                  <a:srgbClr val="553C9A"/>
-                </a:solidFill>
-              </a:defRPr>
-            </a:pPr>
-            <a:r>
-              <a:t>• 元学习 — 长远日/周级，像修订教科书一样迭代方法</a:t>
-            </a:r>
-          </a:p>
-          <a:p>
-            <a:pPr>
-              <a:spcAft>
-                <a:spcPts val="1200"/>
-              </a:spcAft>
-              <a:defRPr sz="2200">
+              <a:defRPr sz="2100" b="0">
                 <a:solidFill>
                   <a:srgbClr val="1A1A2E"/>
                 </a:solidFill>
               </a:defRPr>
             </a:pPr>
             <a:r>
-              <a:t>• "机器何时拥有灵魂？当它开始为自己的错误感到不安时。"</a:t>
+              <a:t>• "从上下文工程到 MaaS，记忆正从技巧升级为核心基础设施。"</a:t>
             </a:r>
           </a:p>
         </p:txBody>
@@ -5378,7 +5473,7 @@
               </a:defRPr>
             </a:pPr>
             <a:r>
-              <a:t>协作模式：共同进化</a:t>
+              <a:t>推理模式：编织逻辑</a:t>
             </a:r>
           </a:p>
         </p:txBody>
@@ -5407,61 +5502,76 @@
           <a:p>
             <a:pPr>
               <a:spcAft>
-                <a:spcPts val="1200"/>
+                <a:spcPts val="1400"/>
               </a:spcAft>
-              <a:defRPr sz="2200">
+              <a:defRPr sz="2100" b="0">
                 <a:solidFill>
                   <a:srgbClr val="1A1A2E"/>
                 </a:solidFill>
               </a:defRPr>
             </a:pPr>
             <a:r>
-              <a:t>• 辩论 — 对抗性推演，真理在多角度交锋中清晰</a:t>
+              <a:t>• System 1 / System 2：快直觉 vs 慢刻意，Agent 需要两者兼顾</a:t>
             </a:r>
           </a:p>
           <a:p>
             <a:pPr>
               <a:spcAft>
-                <a:spcPts val="1200"/>
+                <a:spcPts val="1400"/>
               </a:spcAft>
-              <a:defRPr sz="2200">
+              <a:defRPr sz="2100" b="1">
+                <a:solidFill>
+                  <a:srgbClr val="553C9A"/>
+                </a:solidFill>
+              </a:defRPr>
+            </a:pPr>
+            <a:r>
+              <a:t>• 思维链(CoT) — 线性逐步推进，适合数学与逻辑推导（走钢丝）</a:t>
+            </a:r>
+          </a:p>
+          <a:p>
+            <a:pPr>
+              <a:spcAft>
+                <a:spcPts val="1400"/>
+              </a:spcAft>
+              <a:defRPr sz="2100" b="1">
+                <a:solidFill>
+                  <a:srgbClr val="553C9A"/>
+                </a:solidFill>
+              </a:defRPr>
+            </a:pPr>
+            <a:r>
+              <a:t>• 思维树(ToT) — 启发式搜索+剪枝回溯，适合多分支权衡（迷宫探路）</a:t>
+            </a:r>
+          </a:p>
+          <a:p>
+            <a:pPr>
+              <a:spcAft>
+                <a:spcPts val="1400"/>
+              </a:spcAft>
+              <a:defRPr sz="2100" b="0">
                 <a:solidFill>
                   <a:srgbClr val="1A1A2E"/>
                 </a:solidFill>
               </a:defRPr>
             </a:pPr>
             <a:r>
-              <a:t>• 委托 — 层级目标分解，经理指挥工人的高效执行</a:t>
+              <a:t>• 思维图(GoT) — 图结构编织+多轮迭代，适合复杂依赖整合（织布机）</a:t>
             </a:r>
           </a:p>
           <a:p>
             <a:pPr>
               <a:spcAft>
-                <a:spcPts val="1200"/>
+                <a:spcPts val="1400"/>
               </a:spcAft>
-              <a:defRPr sz="2200">
+              <a:defRPr sz="2100" b="0">
                 <a:solidFill>
                   <a:srgbClr val="1A1A2E"/>
                 </a:solidFill>
               </a:defRPr>
             </a:pPr>
             <a:r>
-              <a:t>• 路由 — 精准分发，像医院分诊台将任务分配给最适合的 Agent</a:t>
-            </a:r>
-          </a:p>
-          <a:p>
-            <a:pPr>
-              <a:spcAft>
-                <a:spcPts val="1200"/>
-              </a:spcAft>
-              <a:defRPr sz="2200" b="1">
-                <a:solidFill>
-                  <a:srgbClr val="553C9A"/>
-                </a:solidFill>
-              </a:defRPr>
-            </a:pPr>
-            <a:r>
-              <a:t>• 群体 — 自组织涌现，像蚁群迁徙无需明确指挥者</a:t>
+              <a:t>• "Agent 架构师应善于指挥整支认知乐团，而非迷信单一推理模式。"</a:t>
             </a:r>
           </a:p>
         </p:txBody>
@@ -5499,7 +5609,7 @@
             <a:avLst/>
           </a:prstGeom>
           <a:solidFill>
-            <a:srgbClr val="F7F7F7"/>
+            <a:srgbClr val="FFFFFF"/>
           </a:solidFill>
           <a:ln>
             <a:noFill/>
@@ -5529,14 +5639,92 @@
       </p:sp>
       <p:sp>
         <p:nvSpPr>
-          <p:cNvPr id="3" name="TextBox 2"/>
+          <p:cNvPr id="3" name="Rectangle 2"/>
+          <p:cNvSpPr/>
+          <p:nvPr/>
+        </p:nvSpPr>
+        <p:spPr>
+          <a:xfrm>
+            <a:off x="0" y="0"/>
+            <a:ext cx="12188952" cy="1097280"/>
+          </a:xfrm>
+          <a:prstGeom prst="rect">
+            <a:avLst/>
+          </a:prstGeom>
+          <a:solidFill>
+            <a:srgbClr val="1A1A2E"/>
+          </a:solidFill>
+          <a:ln>
+            <a:noFill/>
+          </a:ln>
+        </p:spPr>
+        <p:style>
+          <a:lnRef idx="1">
+            <a:schemeClr val="accent1"/>
+          </a:lnRef>
+          <a:fillRef idx="3">
+            <a:schemeClr val="accent1"/>
+          </a:fillRef>
+          <a:effectRef idx="2">
+            <a:schemeClr val="accent1"/>
+          </a:effectRef>
+          <a:fontRef idx="minor">
+            <a:schemeClr val="lt1"/>
+          </a:fontRef>
+        </p:style>
+        <p:txBody>
+          <a:bodyPr rtlCol="0" anchor="ctr"/>
+          <a:lstStyle/>
+          <a:p>
+            <a:pPr algn="ctr"/>
+          </a:p>
+        </p:txBody>
+      </p:sp>
+      <p:sp>
+        <p:nvSpPr>
+          <p:cNvPr id="4" name="TextBox 3"/>
           <p:cNvSpPr txBox="1"/>
           <p:nvPr/>
         </p:nvSpPr>
         <p:spPr>
           <a:xfrm>
-            <a:off x="457200" y="1828800"/>
-            <a:ext cx="11274552" cy="1828800"/>
+            <a:off x="457200" y="228600"/>
+            <a:ext cx="11274552" cy="731520"/>
+          </a:xfrm>
+          <a:prstGeom prst="rect">
+            <a:avLst/>
+          </a:prstGeom>
+          <a:noFill/>
+        </p:spPr>
+        <p:txBody>
+          <a:bodyPr wrap="none">
+            <a:spAutoFit/>
+          </a:bodyPr>
+          <a:lstStyle/>
+          <a:p>
+            <a:pPr>
+              <a:defRPr sz="3200" b="1">
+                <a:solidFill>
+                  <a:srgbClr val="FFFFFF"/>
+                </a:solidFill>
+              </a:defRPr>
+            </a:pPr>
+            <a:r>
+              <a:t>行动模式：付诸实施</a:t>
+            </a:r>
+          </a:p>
+        </p:txBody>
+      </p:sp>
+      <p:sp>
+        <p:nvSpPr>
+          <p:cNvPr id="5" name="TextBox 4"/>
+          <p:cNvSpPr txBox="1"/>
+          <p:nvPr/>
+        </p:nvSpPr>
+        <p:spPr>
+          <a:xfrm>
+            <a:off x="640080" y="1371600"/>
+            <a:ext cx="10972800" cy="5029200"/>
           </a:xfrm>
           <a:prstGeom prst="rect">
             <a:avLst/>
@@ -5549,15 +5737,63 @@
           </a:bodyPr>
           <a:lstStyle/>
           <a:p>
-            <a:pPr algn="ctr">
-              <a:defRPr sz="2800" i="1">
+            <a:pPr>
+              <a:spcAft>
+                <a:spcPts val="1400"/>
+              </a:spcAft>
+              <a:defRPr sz="2100" b="1">
+                <a:solidFill>
+                  <a:srgbClr val="553C9A"/>
+                </a:solidFill>
+              </a:defRPr>
+            </a:pPr>
+            <a:r>
+              <a:t>• ReAct — 边想边做：Thought → Action → Observation 循环，实时获取环境反馈</a:t>
+            </a:r>
+          </a:p>
+          <a:p>
+            <a:pPr>
+              <a:spcAft>
+                <a:spcPts val="1400"/>
+              </a:spcAft>
+              <a:defRPr sz="2100" b="0">
                 <a:solidFill>
                   <a:srgbClr val="1A1A2E"/>
                 </a:solidFill>
               </a:defRPr>
             </a:pPr>
             <a:r>
-              <a:t>"智能的最高形态，不在于独立思考，而在于共同进化。"</a:t>
+              <a:t>• 规划-执行 — 先制订全局战略，再分解为可执行步骤（运筹帷幄）</a:t>
+            </a:r>
+          </a:p>
+          <a:p>
+            <a:pPr>
+              <a:spcAft>
+                <a:spcPts val="1400"/>
+              </a:spcAft>
+              <a:defRPr sz="2100" b="0">
+                <a:solidFill>
+                  <a:srgbClr val="1A1A2E"/>
+                </a:solidFill>
+              </a:defRPr>
+            </a:pPr>
+            <a:r>
+              <a:t>• 工具编排 — 精准选择、协同调配海量外部工具（调兵遣将）</a:t>
+            </a:r>
+          </a:p>
+          <a:p>
+            <a:pPr>
+              <a:spcAft>
+                <a:spcPts val="1400"/>
+              </a:spcAft>
+              <a:defRPr sz="2100" b="0">
+                <a:solidFill>
+                  <a:srgbClr val="1A1A2E"/>
+                </a:solidFill>
+              </a:defRPr>
+            </a:pPr>
+            <a:r>
+              <a:t>• 自适应策略 — 从「进化论」角度，通过试错+反馈+选择演化出最优决策</a:t>
             </a:r>
           </a:p>
         </p:txBody>
@@ -5696,99 +5932,21 @@
               </a:defRPr>
             </a:pPr>
             <a:r>
-              <a:t>新范式：架构师 = 熵的园丁</a:t>
-            </a:r>
-          </a:p>
-        </p:txBody>
-      </p:sp>
-      <p:sp>
-        <p:nvSpPr>
-          <p:cNvPr id="5" name="Rounded Rectangle 4"/>
-          <p:cNvSpPr/>
+              <a:t>反思模式：AI 的灵魂工程学</a:t>
+            </a:r>
+          </a:p>
+        </p:txBody>
+      </p:sp>
+      <p:sp>
+        <p:nvSpPr>
+          <p:cNvPr id="5" name="TextBox 4"/>
+          <p:cNvSpPr txBox="1"/>
           <p:nvPr/>
         </p:nvSpPr>
         <p:spPr>
           <a:xfrm>
             <a:off x="640080" y="1371600"/>
-            <a:ext cx="3453383" cy="1188720"/>
-          </a:xfrm>
-          <a:prstGeom prst="roundRect">
-            <a:avLst/>
-          </a:prstGeom>
-          <a:solidFill>
-            <a:srgbClr val="1A1A2E"/>
-          </a:solidFill>
-          <a:ln>
-            <a:noFill/>
-          </a:ln>
-        </p:spPr>
-        <p:style>
-          <a:lnRef idx="1">
-            <a:schemeClr val="accent1"/>
-          </a:lnRef>
-          <a:fillRef idx="3">
-            <a:schemeClr val="accent1"/>
-          </a:fillRef>
-          <a:effectRef idx="2">
-            <a:schemeClr val="accent1"/>
-          </a:effectRef>
-          <a:fontRef idx="minor">
-            <a:schemeClr val="lt1"/>
-          </a:fontRef>
-        </p:style>
-        <p:txBody>
-          <a:bodyPr rtlCol="0" anchor="ctr"/>
-          <a:lstStyle/>
-          <a:p>
-            <a:pPr algn="ctr"/>
-          </a:p>
-        </p:txBody>
-      </p:sp>
-      <p:sp>
-        <p:nvSpPr>
-          <p:cNvPr id="6" name="TextBox 5"/>
-          <p:cNvSpPr txBox="1"/>
-          <p:nvPr/>
-        </p:nvSpPr>
-        <p:spPr>
-          <a:xfrm>
-            <a:off x="640080" y="1463040"/>
-            <a:ext cx="3361944" cy="365760"/>
-          </a:xfrm>
-          <a:prstGeom prst="rect">
-            <a:avLst/>
-          </a:prstGeom>
-          <a:noFill/>
-        </p:spPr>
-        <p:txBody>
-          <a:bodyPr wrap="none">
-            <a:spAutoFit/>
-          </a:bodyPr>
-          <a:lstStyle/>
-          <a:p>
-            <a:pPr>
-              <a:defRPr sz="1600" b="1">
-                <a:solidFill>
-                  <a:srgbClr val="553C9A"/>
-                </a:solidFill>
-              </a:defRPr>
-            </a:pPr>
-            <a:r>
-              <a:t>🌱 浇水施肥</a:t>
-            </a:r>
-          </a:p>
-        </p:txBody>
-      </p:sp>
-      <p:sp>
-        <p:nvSpPr>
-          <p:cNvPr id="7" name="TextBox 6"/>
-          <p:cNvSpPr txBox="1"/>
-          <p:nvPr/>
-        </p:nvSpPr>
-        <p:spPr>
-          <a:xfrm>
-            <a:off x="640080" y="1828800"/>
-            <a:ext cx="3361944" cy="731520"/>
+            <a:ext cx="10972800" cy="5029200"/>
           </a:xfrm>
           <a:prstGeom prst="rect">
             <a:avLst/>
@@ -5802,240 +5960,77 @@
           <a:lstStyle/>
           <a:p>
             <a:pPr>
-              <a:defRPr sz="1200">
-                <a:solidFill>
-                  <a:srgbClr val="A0AEC0"/>
-                </a:solidFill>
-              </a:defRPr>
-            </a:pPr>
-            <a:r>
-              <a:t>优化数据质量，提供知识滋养系统</a:t>
-            </a:r>
-          </a:p>
-        </p:txBody>
-      </p:sp>
-      <p:sp>
-        <p:nvSpPr>
-          <p:cNvPr id="8" name="Rounded Rectangle 7"/>
-          <p:cNvSpPr/>
-          <p:nvPr/>
-        </p:nvSpPr>
-        <p:spPr>
-          <a:xfrm>
-            <a:off x="4276344" y="1371600"/>
-            <a:ext cx="3453383" cy="1188720"/>
-          </a:xfrm>
-          <a:prstGeom prst="roundRect">
-            <a:avLst/>
-          </a:prstGeom>
-          <a:solidFill>
-            <a:srgbClr val="1A1A2E"/>
-          </a:solidFill>
-          <a:ln>
-            <a:noFill/>
-          </a:ln>
-        </p:spPr>
-        <p:style>
-          <a:lnRef idx="1">
-            <a:schemeClr val="accent1"/>
-          </a:lnRef>
-          <a:fillRef idx="3">
-            <a:schemeClr val="accent1"/>
-          </a:fillRef>
-          <a:effectRef idx="2">
-            <a:schemeClr val="accent1"/>
-          </a:effectRef>
-          <a:fontRef idx="minor">
-            <a:schemeClr val="lt1"/>
-          </a:fontRef>
-        </p:style>
-        <p:txBody>
-          <a:bodyPr rtlCol="0" anchor="ctr"/>
-          <a:lstStyle/>
-          <a:p>
-            <a:pPr algn="ctr"/>
-          </a:p>
-        </p:txBody>
-      </p:sp>
-      <p:sp>
-        <p:nvSpPr>
-          <p:cNvPr id="9" name="TextBox 8"/>
-          <p:cNvSpPr txBox="1"/>
-          <p:nvPr/>
-        </p:nvSpPr>
-        <p:spPr>
-          <a:xfrm>
-            <a:off x="4276344" y="1463040"/>
-            <a:ext cx="3361944" cy="365760"/>
-          </a:xfrm>
-          <a:prstGeom prst="rect">
-            <a:avLst/>
-          </a:prstGeom>
-          <a:noFill/>
-        </p:spPr>
-        <p:txBody>
-          <a:bodyPr wrap="none">
-            <a:spAutoFit/>
-          </a:bodyPr>
-          <a:lstStyle/>
-          <a:p>
-            <a:pPr>
-              <a:defRPr sz="1600" b="1">
+              <a:spcAft>
+                <a:spcPts val="1400"/>
+              </a:spcAft>
+              <a:defRPr sz="2100" b="0">
+                <a:solidFill>
+                  <a:srgbClr val="1A1A2E"/>
+                </a:solidFill>
+              </a:defRPr>
+            </a:pPr>
+            <a:r>
+              <a:t>• 自我修正 — 当下毫秒级，像橡皮擦一样擦除错误（仅限当前任务）</a:t>
+            </a:r>
+          </a:p>
+          <a:p>
+            <a:pPr>
+              <a:spcAft>
+                <a:spcPts val="1400"/>
+              </a:spcAft>
+              <a:defRPr sz="2100" b="0">
+                <a:solidFill>
+                  <a:srgbClr val="1A1A2E"/>
+                </a:solidFill>
+              </a:defRPr>
+            </a:pPr>
+            <a:r>
+              <a:t>• 反思记忆 — 下次分钟级，像错题本一样生成「语言形式的教训」存入长期记忆</a:t>
+            </a:r>
+          </a:p>
+          <a:p>
+            <a:pPr>
+              <a:spcAft>
+                <a:spcPts val="1400"/>
+              </a:spcAft>
+              <a:defRPr sz="2100" b="1">
                 <a:solidFill>
                   <a:srgbClr val="553C9A"/>
                 </a:solidFill>
               </a:defRPr>
             </a:pPr>
             <a:r>
-              <a:t>✂️ 修剪枝叶</a:t>
-            </a:r>
-          </a:p>
-        </p:txBody>
-      </p:sp>
-      <p:sp>
-        <p:nvSpPr>
-          <p:cNvPr id="10" name="TextBox 9"/>
-          <p:cNvSpPr txBox="1"/>
-          <p:nvPr/>
-        </p:nvSpPr>
-        <p:spPr>
-          <a:xfrm>
-            <a:off x="4276344" y="1828800"/>
-            <a:ext cx="3361944" cy="731520"/>
-          </a:xfrm>
-          <a:prstGeom prst="rect">
-            <a:avLst/>
-          </a:prstGeom>
-          <a:noFill/>
-        </p:spPr>
-        <p:txBody>
-          <a:bodyPr wrap="square">
-            <a:spAutoFit/>
-          </a:bodyPr>
-          <a:lstStyle/>
-          <a:p>
-            <a:pPr>
-              <a:defRPr sz="1200">
-                <a:solidFill>
-                  <a:srgbClr val="A0AEC0"/>
-                </a:solidFill>
-              </a:defRPr>
-            </a:pPr>
-            <a:r>
-              <a:t>设置护栏，引入批判机制应对幻觉</a:t>
-            </a:r>
-          </a:p>
-        </p:txBody>
-      </p:sp>
-      <p:sp>
-        <p:nvSpPr>
-          <p:cNvPr id="11" name="Rounded Rectangle 10"/>
-          <p:cNvSpPr/>
-          <p:nvPr/>
-        </p:nvSpPr>
-        <p:spPr>
-          <a:xfrm>
-            <a:off x="7912607" y="1371600"/>
-            <a:ext cx="3453383" cy="1188720"/>
-          </a:xfrm>
-          <a:prstGeom prst="roundRect">
-            <a:avLst/>
-          </a:prstGeom>
-          <a:solidFill>
-            <a:srgbClr val="1A1A2E"/>
-          </a:solidFill>
-          <a:ln>
-            <a:noFill/>
-          </a:ln>
-        </p:spPr>
-        <p:style>
-          <a:lnRef idx="1">
-            <a:schemeClr val="accent1"/>
-          </a:lnRef>
-          <a:fillRef idx="3">
-            <a:schemeClr val="accent1"/>
-          </a:fillRef>
-          <a:effectRef idx="2">
-            <a:schemeClr val="accent1"/>
-          </a:effectRef>
-          <a:fontRef idx="minor">
-            <a:schemeClr val="lt1"/>
-          </a:fontRef>
-        </p:style>
-        <p:txBody>
-          <a:bodyPr rtlCol="0" anchor="ctr"/>
-          <a:lstStyle/>
-          <a:p>
-            <a:pPr algn="ctr"/>
-          </a:p>
-        </p:txBody>
-      </p:sp>
-      <p:sp>
-        <p:nvSpPr>
-          <p:cNvPr id="12" name="TextBox 11"/>
-          <p:cNvSpPr txBox="1"/>
-          <p:nvPr/>
-        </p:nvSpPr>
-        <p:spPr>
-          <a:xfrm>
-            <a:off x="7912607" y="1463040"/>
-            <a:ext cx="3361944" cy="365760"/>
-          </a:xfrm>
-          <a:prstGeom prst="rect">
-            <a:avLst/>
-          </a:prstGeom>
-          <a:noFill/>
-        </p:spPr>
-        <p:txBody>
-          <a:bodyPr wrap="none">
-            <a:spAutoFit/>
-          </a:bodyPr>
-          <a:lstStyle/>
-          <a:p>
-            <a:pPr>
-              <a:defRPr sz="1600" b="1">
+              <a:t>• 元学习 — 长远日/周级，像修订教科书一样借助优化器自动迭代 Prompt</a:t>
+            </a:r>
+          </a:p>
+          <a:p>
+            <a:pPr>
+              <a:spcAft>
+                <a:spcPts val="1400"/>
+              </a:spcAft>
+              <a:defRPr sz="2100" b="1">
                 <a:solidFill>
                   <a:srgbClr val="553C9A"/>
                 </a:solidFill>
               </a:defRPr>
             </a:pPr>
             <a:r>
-              <a:t>🌍 营造环境</a:t>
-            </a:r>
-          </a:p>
-        </p:txBody>
-      </p:sp>
-      <p:sp>
-        <p:nvSpPr>
-          <p:cNvPr id="13" name="TextBox 12"/>
-          <p:cNvSpPr txBox="1"/>
-          <p:nvPr/>
-        </p:nvSpPr>
-        <p:spPr>
-          <a:xfrm>
-            <a:off x="7912607" y="1828800"/>
-            <a:ext cx="3361944" cy="731520"/>
-          </a:xfrm>
-          <a:prstGeom prst="rect">
-            <a:avLst/>
-          </a:prstGeom>
-          <a:noFill/>
-        </p:spPr>
-        <p:txBody>
-          <a:bodyPr wrap="square">
-            <a:spAutoFit/>
-          </a:bodyPr>
-          <a:lstStyle/>
-          <a:p>
-            <a:pPr>
-              <a:defRPr sz="1200">
-                <a:solidFill>
-                  <a:srgbClr val="A0AEC0"/>
-                </a:solidFill>
-              </a:defRPr>
-            </a:pPr>
-            <a:r>
-              <a:t>设计A2A协议，搭建Swarm平台</a:t>
+              <a:t>• 感知/记忆/推理/行动/反思 = 眼睛/神经/大脑/肌肉/灵魂</a:t>
+            </a:r>
+          </a:p>
+          <a:p>
+            <a:pPr>
+              <a:spcAft>
+                <a:spcPts val="1400"/>
+              </a:spcAft>
+              <a:defRPr sz="2100" b="0">
+                <a:solidFill>
+                  <a:srgbClr val="1A1A2E"/>
+                </a:solidFill>
+              </a:defRPr>
+            </a:pPr>
+            <a:r>
+              <a:t>• "机器何时拥有灵魂？当它开始为自己的错误感到不安时。"</a:t>
             </a:r>
           </a:p>
         </p:txBody>
@@ -6073,7 +6068,7 @@
             <a:avLst/>
           </a:prstGeom>
           <a:solidFill>
-            <a:srgbClr val="FFFFFF"/>
+            <a:srgbClr val="1A1A2E"/>
           </a:solidFill>
           <a:ln>
             <a:noFill/>
@@ -6103,92 +6098,14 @@
       </p:sp>
       <p:sp>
         <p:nvSpPr>
-          <p:cNvPr id="3" name="Rectangle 2"/>
-          <p:cNvSpPr/>
-          <p:nvPr/>
-        </p:nvSpPr>
-        <p:spPr>
-          <a:xfrm>
-            <a:off x="0" y="0"/>
-            <a:ext cx="12188952" cy="1097280"/>
-          </a:xfrm>
-          <a:prstGeom prst="rect">
-            <a:avLst/>
-          </a:prstGeom>
-          <a:solidFill>
-            <a:srgbClr val="1A1A2E"/>
-          </a:solidFill>
-          <a:ln>
-            <a:noFill/>
-          </a:ln>
-        </p:spPr>
-        <p:style>
-          <a:lnRef idx="1">
-            <a:schemeClr val="accent1"/>
-          </a:lnRef>
-          <a:fillRef idx="3">
-            <a:schemeClr val="accent1"/>
-          </a:fillRef>
-          <a:effectRef idx="2">
-            <a:schemeClr val="accent1"/>
-          </a:effectRef>
-          <a:fontRef idx="minor">
-            <a:schemeClr val="lt1"/>
-          </a:fontRef>
-        </p:style>
-        <p:txBody>
-          <a:bodyPr rtlCol="0" anchor="ctr"/>
-          <a:lstStyle/>
-          <a:p>
-            <a:pPr algn="ctr"/>
-          </a:p>
-        </p:txBody>
-      </p:sp>
-      <p:sp>
-        <p:nvSpPr>
-          <p:cNvPr id="4" name="TextBox 3"/>
+          <p:cNvPr id="3" name="TextBox 2"/>
           <p:cNvSpPr txBox="1"/>
           <p:nvPr/>
         </p:nvSpPr>
         <p:spPr>
           <a:xfrm>
-            <a:off x="457200" y="228600"/>
-            <a:ext cx="11274552" cy="731520"/>
-          </a:xfrm>
-          <a:prstGeom prst="rect">
-            <a:avLst/>
-          </a:prstGeom>
-          <a:noFill/>
-        </p:spPr>
-        <p:txBody>
-          <a:bodyPr wrap="none">
-            <a:spAutoFit/>
-          </a:bodyPr>
-          <a:lstStyle/>
-          <a:p>
-            <a:pPr>
-              <a:defRPr sz="3200" b="1">
-                <a:solidFill>
-                  <a:srgbClr val="FFFFFF"/>
-                </a:solidFill>
-              </a:defRPr>
-            </a:pPr>
-            <a:r>
-              <a:t>这本书在讲什么</a:t>
-            </a:r>
-          </a:p>
-        </p:txBody>
-      </p:sp>
-      <p:sp>
-        <p:nvSpPr>
-          <p:cNvPr id="5" name="TextBox 4"/>
-          <p:cNvSpPr txBox="1"/>
-          <p:nvPr/>
-        </p:nvSpPr>
-        <p:spPr>
-          <a:xfrm>
-            <a:off x="640080" y="1371600"/>
-            <a:ext cx="10972800" cy="5029200"/>
+            <a:off x="457200" y="2011680"/>
+            <a:ext cx="11274552" cy="1828800"/>
           </a:xfrm>
           <a:prstGeom prst="rect">
             <a:avLst/>
@@ -6201,78 +6118,85 @@
           </a:bodyPr>
           <a:lstStyle/>
           <a:p>
-            <a:pPr>
-              <a:spcAft>
-                <a:spcPts val="1200"/>
-              </a:spcAft>
-              <a:defRPr sz="2200">
-                <a:solidFill>
-                  <a:srgbClr val="1A1A2E"/>
-                </a:solidFill>
-              </a:defRPr>
-            </a:pPr>
-            <a:r>
-              <a:t>• Agent 时代的架构设计与工程实践指南</a:t>
-            </a:r>
-          </a:p>
-          <a:p>
-            <a:pPr>
-              <a:spcAft>
-                <a:spcPts val="1200"/>
-              </a:spcAft>
-              <a:defRPr sz="2200">
-                <a:solidFill>
-                  <a:srgbClr val="1A1A2E"/>
-                </a:solidFill>
-              </a:defRPr>
-            </a:pPr>
-            <a:r>
-              <a:t>• 连接传统软件工程与大模型应用</a:t>
-            </a:r>
-          </a:p>
-          <a:p>
-            <a:pPr>
-              <a:spcAft>
-                <a:spcPts val="1200"/>
-              </a:spcAft>
-              <a:defRPr sz="2200">
-                <a:solidFill>
-                  <a:srgbClr val="1A1A2E"/>
-                </a:solidFill>
-              </a:defRPr>
-            </a:pPr>
-            <a:r>
-              <a:t>• 核心问题：如何在不确定的大模型上构建可靠的系统？</a:t>
-            </a:r>
-          </a:p>
-          <a:p>
-            <a:pPr>
-              <a:spcAft>
-                <a:spcPts val="1200"/>
-              </a:spcAft>
-              <a:defRPr sz="2200">
-                <a:solidFill>
-                  <a:srgbClr val="1A1A2E"/>
-                </a:solidFill>
-              </a:defRPr>
-            </a:pPr>
-            <a:r>
-              <a:t>• 上篇：智能设计的哲学 — 从历史演进揭示 Agent 诞生的必然性</a:t>
-            </a:r>
-          </a:p>
-          <a:p>
-            <a:pPr>
-              <a:spcAft>
-                <a:spcPts val="1200"/>
-              </a:spcAft>
-              <a:defRPr sz="2200">
-                <a:solidFill>
-                  <a:srgbClr val="1A1A2E"/>
-                </a:solidFill>
-              </a:defRPr>
-            </a:pPr>
-            <a:r>
-              <a:t>• 下篇：六大类 21 个核心设计模式 — 感知、记忆、推理、行动、反思、协作</a:t>
+            <a:pPr algn="ctr">
+              <a:defRPr sz="4800" i="0">
+                <a:solidFill>
+                  <a:srgbClr val="FFFFFF"/>
+                </a:solidFill>
+              </a:defRPr>
+            </a:pPr>
+            <a:r>
+              <a:t>《Agent设计模式》读书笔记</a:t>
+            </a:r>
+          </a:p>
+        </p:txBody>
+      </p:sp>
+      <p:sp>
+        <p:nvSpPr>
+          <p:cNvPr id="4" name="TextBox 3"/>
+          <p:cNvSpPr txBox="1"/>
+          <p:nvPr/>
+        </p:nvSpPr>
+        <p:spPr>
+          <a:xfrm>
+            <a:off x="457200" y="3108960"/>
+            <a:ext cx="11274552" cy="1828800"/>
+          </a:xfrm>
+          <a:prstGeom prst="rect">
+            <a:avLst/>
+          </a:prstGeom>
+          <a:noFill/>
+        </p:spPr>
+        <p:txBody>
+          <a:bodyPr wrap="square">
+            <a:spAutoFit/>
+          </a:bodyPr>
+          <a:lstStyle/>
+          <a:p>
+            <a:pPr algn="ctr">
+              <a:defRPr sz="2800" i="0">
+                <a:solidFill>
+                  <a:srgbClr val="E94560"/>
+                </a:solidFill>
+              </a:defRPr>
+            </a:pPr>
+            <a:r>
+              <a:t>21个架构范式与智能体的演化之路</a:t>
+            </a:r>
+          </a:p>
+        </p:txBody>
+      </p:sp>
+      <p:sp>
+        <p:nvSpPr>
+          <p:cNvPr id="5" name="TextBox 4"/>
+          <p:cNvSpPr txBox="1"/>
+          <p:nvPr/>
+        </p:nvSpPr>
+        <p:spPr>
+          <a:xfrm>
+            <a:off x="457200" y="3931920"/>
+            <a:ext cx="11274552" cy="1828800"/>
+          </a:xfrm>
+          <a:prstGeom prst="rect">
+            <a:avLst/>
+          </a:prstGeom>
+          <a:noFill/>
+        </p:spPr>
+        <p:txBody>
+          <a:bodyPr wrap="square">
+            <a:spAutoFit/>
+          </a:bodyPr>
+          <a:lstStyle/>
+          <a:p>
+            <a:pPr algn="ctr">
+              <a:defRPr sz="1800" i="0">
+                <a:solidFill>
+                  <a:srgbClr val="A0AEC0"/>
+                </a:solidFill>
+              </a:defRPr>
+            </a:pPr>
+            <a:r>
+              <a:t>黄佳 著 | 人民邮电出版社</a:t>
             </a:r>
           </a:p>
         </p:txBody>
@@ -6310,7 +6234,7 @@
             <a:avLst/>
           </a:prstGeom>
           <a:solidFill>
-            <a:srgbClr val="F7F7F7"/>
+            <a:srgbClr val="FFFFFF"/>
           </a:solidFill>
           <a:ln>
             <a:noFill/>
@@ -6340,14 +6264,92 @@
       </p:sp>
       <p:sp>
         <p:nvSpPr>
-          <p:cNvPr id="3" name="TextBox 2"/>
+          <p:cNvPr id="3" name="Rectangle 2"/>
+          <p:cNvSpPr/>
+          <p:nvPr/>
+        </p:nvSpPr>
+        <p:spPr>
+          <a:xfrm>
+            <a:off x="0" y="0"/>
+            <a:ext cx="12188952" cy="1097280"/>
+          </a:xfrm>
+          <a:prstGeom prst="rect">
+            <a:avLst/>
+          </a:prstGeom>
+          <a:solidFill>
+            <a:srgbClr val="1A1A2E"/>
+          </a:solidFill>
+          <a:ln>
+            <a:noFill/>
+          </a:ln>
+        </p:spPr>
+        <p:style>
+          <a:lnRef idx="1">
+            <a:schemeClr val="accent1"/>
+          </a:lnRef>
+          <a:fillRef idx="3">
+            <a:schemeClr val="accent1"/>
+          </a:fillRef>
+          <a:effectRef idx="2">
+            <a:schemeClr val="accent1"/>
+          </a:effectRef>
+          <a:fontRef idx="minor">
+            <a:schemeClr val="lt1"/>
+          </a:fontRef>
+        </p:style>
+        <p:txBody>
+          <a:bodyPr rtlCol="0" anchor="ctr"/>
+          <a:lstStyle/>
+          <a:p>
+            <a:pPr algn="ctr"/>
+          </a:p>
+        </p:txBody>
+      </p:sp>
+      <p:sp>
+        <p:nvSpPr>
+          <p:cNvPr id="4" name="TextBox 3"/>
           <p:cNvSpPr txBox="1"/>
           <p:nvPr/>
         </p:nvSpPr>
         <p:spPr>
           <a:xfrm>
-            <a:off x="457200" y="1828800"/>
-            <a:ext cx="11274552" cy="1828800"/>
+            <a:off x="457200" y="228600"/>
+            <a:ext cx="11274552" cy="731520"/>
+          </a:xfrm>
+          <a:prstGeom prst="rect">
+            <a:avLst/>
+          </a:prstGeom>
+          <a:noFill/>
+        </p:spPr>
+        <p:txBody>
+          <a:bodyPr wrap="none">
+            <a:spAutoFit/>
+          </a:bodyPr>
+          <a:lstStyle/>
+          <a:p>
+            <a:pPr>
+              <a:defRPr sz="3200" b="1">
+                <a:solidFill>
+                  <a:srgbClr val="FFFFFF"/>
+                </a:solidFill>
+              </a:defRPr>
+            </a:pPr>
+            <a:r>
+              <a:t>协作模式：共同进化</a:t>
+            </a:r>
+          </a:p>
+        </p:txBody>
+      </p:sp>
+      <p:sp>
+        <p:nvSpPr>
+          <p:cNvPr id="5" name="TextBox 4"/>
+          <p:cNvSpPr txBox="1"/>
+          <p:nvPr/>
+        </p:nvSpPr>
+        <p:spPr>
+          <a:xfrm>
+            <a:off x="640080" y="1371600"/>
+            <a:ext cx="10972800" cy="5029200"/>
           </a:xfrm>
           <a:prstGeom prst="rect">
             <a:avLst/>
@@ -6360,15 +6362,63 @@
           </a:bodyPr>
           <a:lstStyle/>
           <a:p>
-            <a:pPr algn="ctr">
-              <a:defRPr sz="2800" i="1">
+            <a:pPr>
+              <a:spcAft>
+                <a:spcPts val="1400"/>
+              </a:spcAft>
+              <a:defRPr sz="2100" b="0">
                 <a:solidFill>
                   <a:srgbClr val="1A1A2E"/>
                 </a:solidFill>
               </a:defRPr>
             </a:pPr>
             <a:r>
-              <a:t>"园丁的智慧，在于懂得"适度失控"。唯有在混沌的边缘，智能才会真正涌现。"</a:t>
+              <a:t>• 辩论 — 对抗性推演，真理在多角度交锋中清晰（法庭正反双方）</a:t>
+            </a:r>
+          </a:p>
+          <a:p>
+            <a:pPr>
+              <a:spcAft>
+                <a:spcPts val="1400"/>
+              </a:spcAft>
+              <a:defRPr sz="2100" b="0">
+                <a:solidFill>
+                  <a:srgbClr val="1A1A2E"/>
+                </a:solidFill>
+              </a:defRPr>
+            </a:pPr>
+            <a:r>
+              <a:t>• 委托 — 层级目标分解，经理指挥工人的高效执行</a:t>
+            </a:r>
+          </a:p>
+          <a:p>
+            <a:pPr>
+              <a:spcAft>
+                <a:spcPts val="1400"/>
+              </a:spcAft>
+              <a:defRPr sz="2100" b="0">
+                <a:solidFill>
+                  <a:srgbClr val="1A1A2E"/>
+                </a:solidFill>
+              </a:defRPr>
+            </a:pPr>
+            <a:r>
+              <a:t>• 路由 — 精准分发，像医院分诊台将任务分配给最适合的 Agent</a:t>
+            </a:r>
+          </a:p>
+          <a:p>
+            <a:pPr>
+              <a:spcAft>
+                <a:spcPts val="1400"/>
+              </a:spcAft>
+              <a:defRPr sz="2100" b="1">
+                <a:solidFill>
+                  <a:srgbClr val="553C9A"/>
+                </a:solidFill>
+              </a:defRPr>
+            </a:pPr>
+            <a:r>
+              <a:t>• 群体 — 自组织涌现，像蚁群迁徙无需明确指挥者，展现惊人集体效率</a:t>
             </a:r>
           </a:p>
         </p:txBody>
@@ -6406,6 +6456,367 @@
             <a:avLst/>
           </a:prstGeom>
           <a:solidFill>
+            <a:srgbClr val="FFFFFF"/>
+          </a:solidFill>
+          <a:ln>
+            <a:noFill/>
+          </a:ln>
+        </p:spPr>
+        <p:style>
+          <a:lnRef idx="1">
+            <a:schemeClr val="accent1"/>
+          </a:lnRef>
+          <a:fillRef idx="3">
+            <a:schemeClr val="accent1"/>
+          </a:fillRef>
+          <a:effectRef idx="2">
+            <a:schemeClr val="accent1"/>
+          </a:effectRef>
+          <a:fontRef idx="minor">
+            <a:schemeClr val="lt1"/>
+          </a:fontRef>
+        </p:style>
+        <p:txBody>
+          <a:bodyPr rtlCol="0" anchor="ctr"/>
+          <a:lstStyle/>
+          <a:p>
+            <a:pPr algn="ctr"/>
+          </a:p>
+        </p:txBody>
+      </p:sp>
+      <p:sp>
+        <p:nvSpPr>
+          <p:cNvPr id="3" name="TextBox 2"/>
+          <p:cNvSpPr txBox="1"/>
+          <p:nvPr/>
+        </p:nvSpPr>
+        <p:spPr>
+          <a:xfrm>
+            <a:off x="457200" y="2011680"/>
+            <a:ext cx="11274552" cy="1828800"/>
+          </a:xfrm>
+          <a:prstGeom prst="rect">
+            <a:avLst/>
+          </a:prstGeom>
+          <a:noFill/>
+        </p:spPr>
+        <p:txBody>
+          <a:bodyPr wrap="square">
+            <a:spAutoFit/>
+          </a:bodyPr>
+          <a:lstStyle/>
+          <a:p>
+            <a:pPr algn="ctr">
+              <a:defRPr sz="2600" i="1">
+                <a:solidFill>
+                  <a:srgbClr val="1A1A2E"/>
+                </a:solidFill>
+              </a:defRPr>
+            </a:pPr>
+            <a:r>
+              <a:t>"智能的最高形态，不在于独立思考，而在于共同进化。"</a:t>
+            </a:r>
+          </a:p>
+        </p:txBody>
+      </p:sp>
+    </p:spTree>
+  </p:cSld>
+  <p:clrMapOvr>
+    <a:masterClrMapping/>
+  </p:clrMapOvr>
+</p:sld>
+</file>
+
+<file path=ppt/slides/slide22.xml><?xml version="1.0" encoding="utf-8"?>
+<p:sld xmlns:a="http://schemas.openxmlformats.org/drawingml/2006/main" xmlns:p="http://schemas.openxmlformats.org/presentationml/2006/main" xmlns:r="http://schemas.openxmlformats.org/officeDocument/2006/relationships">
+  <p:cSld>
+    <p:spTree>
+      <p:nvGrpSpPr>
+        <p:cNvPr id="1" name=""/>
+        <p:cNvGrpSpPr/>
+        <p:nvPr/>
+      </p:nvGrpSpPr>
+      <p:grpSpPr/>
+      <p:sp>
+        <p:nvSpPr>
+          <p:cNvPr id="2" name="Rectangle 1"/>
+          <p:cNvSpPr/>
+          <p:nvPr/>
+        </p:nvSpPr>
+        <p:spPr>
+          <a:xfrm>
+            <a:off x="0" y="0"/>
+            <a:ext cx="12188952" cy="6858000"/>
+          </a:xfrm>
+          <a:prstGeom prst="rect">
+            <a:avLst/>
+          </a:prstGeom>
+          <a:solidFill>
+            <a:srgbClr val="FFFFFF"/>
+          </a:solidFill>
+          <a:ln>
+            <a:noFill/>
+          </a:ln>
+        </p:spPr>
+        <p:style>
+          <a:lnRef idx="1">
+            <a:schemeClr val="accent1"/>
+          </a:lnRef>
+          <a:fillRef idx="3">
+            <a:schemeClr val="accent1"/>
+          </a:fillRef>
+          <a:effectRef idx="2">
+            <a:schemeClr val="accent1"/>
+          </a:effectRef>
+          <a:fontRef idx="minor">
+            <a:schemeClr val="lt1"/>
+          </a:fontRef>
+        </p:style>
+        <p:txBody>
+          <a:bodyPr rtlCol="0" anchor="ctr"/>
+          <a:lstStyle/>
+          <a:p>
+            <a:pPr algn="ctr"/>
+          </a:p>
+        </p:txBody>
+      </p:sp>
+      <p:sp>
+        <p:nvSpPr>
+          <p:cNvPr id="3" name="Rectangle 2"/>
+          <p:cNvSpPr/>
+          <p:nvPr/>
+        </p:nvSpPr>
+        <p:spPr>
+          <a:xfrm>
+            <a:off x="0" y="0"/>
+            <a:ext cx="12188952" cy="1097280"/>
+          </a:xfrm>
+          <a:prstGeom prst="rect">
+            <a:avLst/>
+          </a:prstGeom>
+          <a:solidFill>
+            <a:srgbClr val="553C9A"/>
+          </a:solidFill>
+          <a:ln>
+            <a:noFill/>
+          </a:ln>
+        </p:spPr>
+        <p:style>
+          <a:lnRef idx="1">
+            <a:schemeClr val="accent1"/>
+          </a:lnRef>
+          <a:fillRef idx="3">
+            <a:schemeClr val="accent1"/>
+          </a:fillRef>
+          <a:effectRef idx="2">
+            <a:schemeClr val="accent1"/>
+          </a:effectRef>
+          <a:fontRef idx="minor">
+            <a:schemeClr val="lt1"/>
+          </a:fontRef>
+        </p:style>
+        <p:txBody>
+          <a:bodyPr rtlCol="0" anchor="ctr"/>
+          <a:lstStyle/>
+          <a:p>
+            <a:pPr algn="ctr"/>
+          </a:p>
+        </p:txBody>
+      </p:sp>
+      <p:sp>
+        <p:nvSpPr>
+          <p:cNvPr id="4" name="TextBox 3"/>
+          <p:cNvSpPr txBox="1"/>
+          <p:nvPr/>
+        </p:nvSpPr>
+        <p:spPr>
+          <a:xfrm>
+            <a:off x="457200" y="228600"/>
+            <a:ext cx="11274552" cy="731520"/>
+          </a:xfrm>
+          <a:prstGeom prst="rect">
+            <a:avLst/>
+          </a:prstGeom>
+          <a:noFill/>
+        </p:spPr>
+        <p:txBody>
+          <a:bodyPr wrap="none">
+            <a:spAutoFit/>
+          </a:bodyPr>
+          <a:lstStyle/>
+          <a:p>
+            <a:pPr>
+              <a:defRPr sz="2800" b="1">
+                <a:solidFill>
+                  <a:srgbClr val="FFFFFF"/>
+                </a:solidFill>
+              </a:defRPr>
+            </a:pPr>
+            <a:r>
+              <a:t>后记：从确定性工程到概率性工程</a:t>
+            </a:r>
+          </a:p>
+        </p:txBody>
+      </p:sp>
+      <p:sp>
+        <p:nvSpPr>
+          <p:cNvPr id="5" name="TextBox 4"/>
+          <p:cNvSpPr txBox="1"/>
+          <p:nvPr/>
+        </p:nvSpPr>
+        <p:spPr>
+          <a:xfrm>
+            <a:off x="640080" y="1371600"/>
+            <a:ext cx="10972800" cy="5029200"/>
+          </a:xfrm>
+          <a:prstGeom prst="rect">
+            <a:avLst/>
+          </a:prstGeom>
+          <a:noFill/>
+        </p:spPr>
+        <p:txBody>
+          <a:bodyPr wrap="square">
+            <a:spAutoFit/>
+          </a:bodyPr>
+          <a:lstStyle/>
+          <a:p>
+            <a:pPr>
+              <a:spcAft>
+                <a:spcPts val="1400"/>
+              </a:spcAft>
+              <a:defRPr sz="2100" b="0">
+                <a:solidFill>
+                  <a:srgbClr val="1A1A2E"/>
+                </a:solidFill>
+              </a:defRPr>
+            </a:pPr>
+            <a:r>
+              <a:t>• 传统软件 = 牛顿力学隐喻：世界如精密钟表，追求零熵，将不确定性视为 bug</a:t>
+            </a:r>
+          </a:p>
+          <a:p>
+            <a:pPr>
+              <a:spcAft>
+                <a:spcPts val="1400"/>
+              </a:spcAft>
+              <a:defRPr sz="2100" b="0">
+                <a:solidFill>
+                  <a:srgbClr val="1A1A2E"/>
+                </a:solidFill>
+              </a:defRPr>
+            </a:pPr>
+            <a:r>
+              <a:t>• Agent 时代 = 达尔文逻辑：软件展现生长性（通过 RAG 积累）、适应性（动态调整）、繁殖性（生成新 Prompt）</a:t>
+            </a:r>
+          </a:p>
+          <a:p>
+            <a:pPr>
+              <a:spcAft>
+                <a:spcPts val="1400"/>
+              </a:spcAft>
+              <a:defRPr sz="2100" b="1">
+                <a:solidFill>
+                  <a:srgbClr val="553C9A"/>
+                </a:solidFill>
+              </a:defRPr>
+            </a:pPr>
+            <a:r>
+              <a:t>• 我们正见证硅基生命的「寒武纪大爆发」</a:t>
+            </a:r>
+          </a:p>
+          <a:p>
+            <a:pPr>
+              <a:spcAft>
+                <a:spcPts val="1400"/>
+              </a:spcAft>
+              <a:defRPr sz="2100" b="0">
+                <a:solidFill>
+                  <a:srgbClr val="1A1A2E"/>
+                </a:solidFill>
+              </a:defRPr>
+            </a:pPr>
+            <a:r>
+              <a:t>• 架构师的新角色 = 熵的园丁：无法命令植物长多高，但可以优化土壤</a:t>
+            </a:r>
+          </a:p>
+        </p:txBody>
+      </p:sp>
+    </p:spTree>
+  </p:cSld>
+  <p:clrMapOvr>
+    <a:masterClrMapping/>
+  </p:clrMapOvr>
+</p:sld>
+</file>
+
+<file path=ppt/slides/slide23.xml><?xml version="1.0" encoding="utf-8"?>
+<p:sld xmlns:a="http://schemas.openxmlformats.org/drawingml/2006/main" xmlns:p="http://schemas.openxmlformats.org/presentationml/2006/main" xmlns:r="http://schemas.openxmlformats.org/officeDocument/2006/relationships">
+  <p:cSld>
+    <p:spTree>
+      <p:nvGrpSpPr>
+        <p:cNvPr id="1" name=""/>
+        <p:cNvGrpSpPr/>
+        <p:nvPr/>
+      </p:nvGrpSpPr>
+      <p:grpSpPr/>
+      <p:sp>
+        <p:nvSpPr>
+          <p:cNvPr id="2" name="Rectangle 1"/>
+          <p:cNvSpPr/>
+          <p:nvPr/>
+        </p:nvSpPr>
+        <p:spPr>
+          <a:xfrm>
+            <a:off x="0" y="0"/>
+            <a:ext cx="12188952" cy="6858000"/>
+          </a:xfrm>
+          <a:prstGeom prst="rect">
+            <a:avLst/>
+          </a:prstGeom>
+          <a:solidFill>
+            <a:srgbClr val="FFFFFF"/>
+          </a:solidFill>
+          <a:ln>
+            <a:noFill/>
+          </a:ln>
+        </p:spPr>
+        <p:style>
+          <a:lnRef idx="1">
+            <a:schemeClr val="accent1"/>
+          </a:lnRef>
+          <a:fillRef idx="3">
+            <a:schemeClr val="accent1"/>
+          </a:fillRef>
+          <a:effectRef idx="2">
+            <a:schemeClr val="accent1"/>
+          </a:effectRef>
+          <a:fontRef idx="minor">
+            <a:schemeClr val="lt1"/>
+          </a:fontRef>
+        </p:style>
+        <p:txBody>
+          <a:bodyPr rtlCol="0" anchor="ctr"/>
+          <a:lstStyle/>
+          <a:p>
+            <a:pPr algn="ctr"/>
+          </a:p>
+        </p:txBody>
+      </p:sp>
+      <p:sp>
+        <p:nvSpPr>
+          <p:cNvPr id="3" name="Rectangle 2"/>
+          <p:cNvSpPr/>
+          <p:nvPr/>
+        </p:nvSpPr>
+        <p:spPr>
+          <a:xfrm>
+            <a:off x="0" y="0"/>
+            <a:ext cx="12188952" cy="1097280"/>
+          </a:xfrm>
+          <a:prstGeom prst="rect">
+            <a:avLst/>
+          </a:prstGeom>
+          <a:solidFill>
             <a:srgbClr val="1A1A2E"/>
           </a:solidFill>
           <a:ln>
@@ -6436,14 +6847,127 @@
       </p:sp>
       <p:sp>
         <p:nvSpPr>
-          <p:cNvPr id="3" name="TextBox 2"/>
+          <p:cNvPr id="4" name="TextBox 3"/>
           <p:cNvSpPr txBox="1"/>
           <p:nvPr/>
         </p:nvSpPr>
         <p:spPr>
           <a:xfrm>
-            <a:off x="457200" y="2286000"/>
-            <a:ext cx="11274552" cy="1371600"/>
+            <a:off x="457200" y="228600"/>
+            <a:ext cx="11274552" cy="731520"/>
+          </a:xfrm>
+          <a:prstGeom prst="rect">
+            <a:avLst/>
+          </a:prstGeom>
+          <a:noFill/>
+        </p:spPr>
+        <p:txBody>
+          <a:bodyPr wrap="none">
+            <a:spAutoFit/>
+          </a:bodyPr>
+          <a:lstStyle/>
+          <a:p>
+            <a:pPr>
+              <a:defRPr sz="3200" b="1">
+                <a:solidFill>
+                  <a:srgbClr val="FFFFFF"/>
+                </a:solidFill>
+              </a:defRPr>
+            </a:pPr>
+            <a:r>
+              <a:t>园丁的智慧：懂得「适度失控」</a:t>
+            </a:r>
+          </a:p>
+        </p:txBody>
+      </p:sp>
+      <p:sp>
+        <p:nvSpPr>
+          <p:cNvPr id="5" name="Rounded Rectangle 4"/>
+          <p:cNvSpPr/>
+          <p:nvPr/>
+        </p:nvSpPr>
+        <p:spPr>
+          <a:xfrm>
+            <a:off x="640080" y="1463040"/>
+            <a:ext cx="5271516" cy="1325880"/>
+          </a:xfrm>
+          <a:prstGeom prst="roundRect">
+            <a:avLst/>
+          </a:prstGeom>
+          <a:solidFill>
+            <a:srgbClr val="1A1A2E"/>
+          </a:solidFill>
+          <a:ln>
+            <a:noFill/>
+          </a:ln>
+        </p:spPr>
+        <p:style>
+          <a:lnRef idx="1">
+            <a:schemeClr val="accent1"/>
+          </a:lnRef>
+          <a:fillRef idx="3">
+            <a:schemeClr val="accent1"/>
+          </a:fillRef>
+          <a:effectRef idx="2">
+            <a:schemeClr val="accent1"/>
+          </a:effectRef>
+          <a:fontRef idx="minor">
+            <a:schemeClr val="lt1"/>
+          </a:fontRef>
+        </p:style>
+        <p:txBody>
+          <a:bodyPr rtlCol="0" anchor="ctr"/>
+          <a:lstStyle/>
+          <a:p>
+            <a:pPr algn="ctr"/>
+          </a:p>
+        </p:txBody>
+      </p:sp>
+      <p:sp>
+        <p:nvSpPr>
+          <p:cNvPr id="6" name="TextBox 5"/>
+          <p:cNvSpPr txBox="1"/>
+          <p:nvPr/>
+        </p:nvSpPr>
+        <p:spPr>
+          <a:xfrm>
+            <a:off x="640080" y="1536192"/>
+            <a:ext cx="5180076" cy="365760"/>
+          </a:xfrm>
+          <a:prstGeom prst="rect">
+            <a:avLst/>
+          </a:prstGeom>
+          <a:noFill/>
+        </p:spPr>
+        <p:txBody>
+          <a:bodyPr wrap="none">
+            <a:spAutoFit/>
+          </a:bodyPr>
+          <a:lstStyle/>
+          <a:p>
+            <a:pPr>
+              <a:defRPr sz="1500" b="1">
+                <a:solidFill>
+                  <a:srgbClr val="553C9A"/>
+                </a:solidFill>
+              </a:defRPr>
+            </a:pPr>
+            <a:r>
+              <a:t>🌱 浇水施肥</a:t>
+            </a:r>
+          </a:p>
+        </p:txBody>
+      </p:sp>
+      <p:sp>
+        <p:nvSpPr>
+          <p:cNvPr id="7" name="TextBox 6"/>
+          <p:cNvSpPr txBox="1"/>
+          <p:nvPr/>
+        </p:nvSpPr>
+        <p:spPr>
+          <a:xfrm>
+            <a:off x="640080" y="1901952"/>
+            <a:ext cx="5180076" cy="914400"/>
           </a:xfrm>
           <a:prstGeom prst="rect">
             <a:avLst/>
@@ -6456,29 +6980,72 @@
           </a:bodyPr>
           <a:lstStyle/>
           <a:p>
-            <a:pPr algn="ctr">
-              <a:defRPr sz="4400" b="1">
-                <a:solidFill>
-                  <a:srgbClr val="FFFFFF"/>
-                </a:solidFill>
-              </a:defRPr>
-            </a:pPr>
-            <a:r>
-              <a:t>谢谢观看</a:t>
-            </a:r>
-          </a:p>
-        </p:txBody>
-      </p:sp>
-      <p:sp>
-        <p:nvSpPr>
-          <p:cNvPr id="4" name="TextBox 3"/>
+            <a:pPr>
+              <a:defRPr sz="1100">
+                <a:solidFill>
+                  <a:srgbClr val="A0AEC0"/>
+                </a:solidFill>
+              </a:defRPr>
+            </a:pPr>
+            <a:r>
+              <a:t>优化数据质量，提供知识滋养系统</a:t>
+            </a:r>
+          </a:p>
+        </p:txBody>
+      </p:sp>
+      <p:sp>
+        <p:nvSpPr>
+          <p:cNvPr id="8" name="Rounded Rectangle 7"/>
+          <p:cNvSpPr/>
+          <p:nvPr/>
+        </p:nvSpPr>
+        <p:spPr>
+          <a:xfrm>
+            <a:off x="6094476" y="1463040"/>
+            <a:ext cx="5271516" cy="1325880"/>
+          </a:xfrm>
+          <a:prstGeom prst="roundRect">
+            <a:avLst/>
+          </a:prstGeom>
+          <a:solidFill>
+            <a:srgbClr val="1A1A2E"/>
+          </a:solidFill>
+          <a:ln>
+            <a:noFill/>
+          </a:ln>
+        </p:spPr>
+        <p:style>
+          <a:lnRef idx="1">
+            <a:schemeClr val="accent1"/>
+          </a:lnRef>
+          <a:fillRef idx="3">
+            <a:schemeClr val="accent1"/>
+          </a:fillRef>
+          <a:effectRef idx="2">
+            <a:schemeClr val="accent1"/>
+          </a:effectRef>
+          <a:fontRef idx="minor">
+            <a:schemeClr val="lt1"/>
+          </a:fontRef>
+        </p:style>
+        <p:txBody>
+          <a:bodyPr rtlCol="0" anchor="ctr"/>
+          <a:lstStyle/>
+          <a:p>
+            <a:pPr algn="ctr"/>
+          </a:p>
+        </p:txBody>
+      </p:sp>
+      <p:sp>
+        <p:nvSpPr>
+          <p:cNvPr id="9" name="TextBox 8"/>
           <p:cNvSpPr txBox="1"/>
           <p:nvPr/>
         </p:nvSpPr>
         <p:spPr>
           <a:xfrm>
-            <a:off x="457200" y="3840480"/>
-            <a:ext cx="11274552" cy="914400"/>
+            <a:off x="6094476" y="1536192"/>
+            <a:ext cx="5180076" cy="365760"/>
           </a:xfrm>
           <a:prstGeom prst="rect">
             <a:avLst/>
@@ -6491,8 +7058,496 @@
           </a:bodyPr>
           <a:lstStyle/>
           <a:p>
+            <a:pPr>
+              <a:defRPr sz="1500" b="1">
+                <a:solidFill>
+                  <a:srgbClr val="553C9A"/>
+                </a:solidFill>
+              </a:defRPr>
+            </a:pPr>
+            <a:r>
+              <a:t>✂️ 修剪枝叶</a:t>
+            </a:r>
+          </a:p>
+        </p:txBody>
+      </p:sp>
+      <p:sp>
+        <p:nvSpPr>
+          <p:cNvPr id="10" name="TextBox 9"/>
+          <p:cNvSpPr txBox="1"/>
+          <p:nvPr/>
+        </p:nvSpPr>
+        <p:spPr>
+          <a:xfrm>
+            <a:off x="6094476" y="1901952"/>
+            <a:ext cx="5180076" cy="914400"/>
+          </a:xfrm>
+          <a:prstGeom prst="rect">
+            <a:avLst/>
+          </a:prstGeom>
+          <a:noFill/>
+        </p:spPr>
+        <p:txBody>
+          <a:bodyPr wrap="square">
+            <a:spAutoFit/>
+          </a:bodyPr>
+          <a:lstStyle/>
+          <a:p>
+            <a:pPr>
+              <a:defRPr sz="1100">
+                <a:solidFill>
+                  <a:srgbClr val="A0AEC0"/>
+                </a:solidFill>
+              </a:defRPr>
+            </a:pPr>
+            <a:r>
+              <a:t>设置护栏，引入批判机制应对幻觉</a:t>
+            </a:r>
+          </a:p>
+        </p:txBody>
+      </p:sp>
+      <p:sp>
+        <p:nvSpPr>
+          <p:cNvPr id="11" name="Rounded Rectangle 10"/>
+          <p:cNvSpPr/>
+          <p:nvPr/>
+        </p:nvSpPr>
+        <p:spPr>
+          <a:xfrm>
+            <a:off x="640080" y="2926080"/>
+            <a:ext cx="5271516" cy="1325880"/>
+          </a:xfrm>
+          <a:prstGeom prst="roundRect">
+            <a:avLst/>
+          </a:prstGeom>
+          <a:solidFill>
+            <a:srgbClr val="1A1A2E"/>
+          </a:solidFill>
+          <a:ln>
+            <a:noFill/>
+          </a:ln>
+        </p:spPr>
+        <p:style>
+          <a:lnRef idx="1">
+            <a:schemeClr val="accent1"/>
+          </a:lnRef>
+          <a:fillRef idx="3">
+            <a:schemeClr val="accent1"/>
+          </a:fillRef>
+          <a:effectRef idx="2">
+            <a:schemeClr val="accent1"/>
+          </a:effectRef>
+          <a:fontRef idx="minor">
+            <a:schemeClr val="lt1"/>
+          </a:fontRef>
+        </p:style>
+        <p:txBody>
+          <a:bodyPr rtlCol="0" anchor="ctr"/>
+          <a:lstStyle/>
+          <a:p>
+            <a:pPr algn="ctr"/>
+          </a:p>
+        </p:txBody>
+      </p:sp>
+      <p:sp>
+        <p:nvSpPr>
+          <p:cNvPr id="12" name="TextBox 11"/>
+          <p:cNvSpPr txBox="1"/>
+          <p:nvPr/>
+        </p:nvSpPr>
+        <p:spPr>
+          <a:xfrm>
+            <a:off x="640080" y="2999232"/>
+            <a:ext cx="5180076" cy="365760"/>
+          </a:xfrm>
+          <a:prstGeom prst="rect">
+            <a:avLst/>
+          </a:prstGeom>
+          <a:noFill/>
+        </p:spPr>
+        <p:txBody>
+          <a:bodyPr wrap="none">
+            <a:spAutoFit/>
+          </a:bodyPr>
+          <a:lstStyle/>
+          <a:p>
+            <a:pPr>
+              <a:defRPr sz="1500" b="1">
+                <a:solidFill>
+                  <a:srgbClr val="553C9A"/>
+                </a:solidFill>
+              </a:defRPr>
+            </a:pPr>
+            <a:r>
+              <a:t>🌍 营造环境</a:t>
+            </a:r>
+          </a:p>
+        </p:txBody>
+      </p:sp>
+      <p:sp>
+        <p:nvSpPr>
+          <p:cNvPr id="13" name="TextBox 12"/>
+          <p:cNvSpPr txBox="1"/>
+          <p:nvPr/>
+        </p:nvSpPr>
+        <p:spPr>
+          <a:xfrm>
+            <a:off x="640080" y="3364992"/>
+            <a:ext cx="5180076" cy="914400"/>
+          </a:xfrm>
+          <a:prstGeom prst="rect">
+            <a:avLst/>
+          </a:prstGeom>
+          <a:noFill/>
+        </p:spPr>
+        <p:txBody>
+          <a:bodyPr wrap="square">
+            <a:spAutoFit/>
+          </a:bodyPr>
+          <a:lstStyle/>
+          <a:p>
+            <a:pPr>
+              <a:defRPr sz="1100">
+                <a:solidFill>
+                  <a:srgbClr val="A0AEC0"/>
+                </a:solidFill>
+              </a:defRPr>
+            </a:pPr>
+            <a:r>
+              <a:t>设计 A2A 协议，搭建 Swarm 平台</a:t>
+            </a:r>
+          </a:p>
+        </p:txBody>
+      </p:sp>
+      <p:sp>
+        <p:nvSpPr>
+          <p:cNvPr id="14" name="Rounded Rectangle 13"/>
+          <p:cNvSpPr/>
+          <p:nvPr/>
+        </p:nvSpPr>
+        <p:spPr>
+          <a:xfrm>
+            <a:off x="6094476" y="2926080"/>
+            <a:ext cx="5271516" cy="1325880"/>
+          </a:xfrm>
+          <a:prstGeom prst="roundRect">
+            <a:avLst/>
+          </a:prstGeom>
+          <a:solidFill>
+            <a:srgbClr val="1A1A2E"/>
+          </a:solidFill>
+          <a:ln>
+            <a:noFill/>
+          </a:ln>
+        </p:spPr>
+        <p:style>
+          <a:lnRef idx="1">
+            <a:schemeClr val="accent1"/>
+          </a:lnRef>
+          <a:fillRef idx="3">
+            <a:schemeClr val="accent1"/>
+          </a:fillRef>
+          <a:effectRef idx="2">
+            <a:schemeClr val="accent1"/>
+          </a:effectRef>
+          <a:fontRef idx="minor">
+            <a:schemeClr val="lt1"/>
+          </a:fontRef>
+        </p:style>
+        <p:txBody>
+          <a:bodyPr rtlCol="0" anchor="ctr"/>
+          <a:lstStyle/>
+          <a:p>
+            <a:pPr algn="ctr"/>
+          </a:p>
+        </p:txBody>
+      </p:sp>
+      <p:sp>
+        <p:nvSpPr>
+          <p:cNvPr id="15" name="TextBox 14"/>
+          <p:cNvSpPr txBox="1"/>
+          <p:nvPr/>
+        </p:nvSpPr>
+        <p:spPr>
+          <a:xfrm>
+            <a:off x="6094476" y="2999232"/>
+            <a:ext cx="5180076" cy="365760"/>
+          </a:xfrm>
+          <a:prstGeom prst="rect">
+            <a:avLst/>
+          </a:prstGeom>
+          <a:noFill/>
+        </p:spPr>
+        <p:txBody>
+          <a:bodyPr wrap="none">
+            <a:spAutoFit/>
+          </a:bodyPr>
+          <a:lstStyle/>
+          <a:p>
+            <a:pPr>
+              <a:defRPr sz="1500" b="1">
+                <a:solidFill>
+                  <a:srgbClr val="553C9A"/>
+                </a:solidFill>
+              </a:defRPr>
+            </a:pPr>
+            <a:r>
+              <a:t>💡 容忍混沌</a:t>
+            </a:r>
+          </a:p>
+        </p:txBody>
+      </p:sp>
+      <p:sp>
+        <p:nvSpPr>
+          <p:cNvPr id="16" name="TextBox 15"/>
+          <p:cNvSpPr txBox="1"/>
+          <p:nvPr/>
+        </p:nvSpPr>
+        <p:spPr>
+          <a:xfrm>
+            <a:off x="6094476" y="3364992"/>
+            <a:ext cx="5180076" cy="914400"/>
+          </a:xfrm>
+          <a:prstGeom prst="rect">
+            <a:avLst/>
+          </a:prstGeom>
+          <a:noFill/>
+        </p:spPr>
+        <p:txBody>
+          <a:bodyPr wrap="square">
+            <a:spAutoFit/>
+          </a:bodyPr>
+          <a:lstStyle/>
+          <a:p>
+            <a:pPr>
+              <a:defRPr sz="1100">
+                <a:solidFill>
+                  <a:srgbClr val="A0AEC0"/>
+                </a:solidFill>
+              </a:defRPr>
+            </a:pPr>
+            <a:r>
+              <a:t>唯有在混沌的边缘，智能才会真正涌现</a:t>
+            </a:r>
+          </a:p>
+        </p:txBody>
+      </p:sp>
+    </p:spTree>
+  </p:cSld>
+  <p:clrMapOvr>
+    <a:masterClrMapping/>
+  </p:clrMapOvr>
+</p:sld>
+</file>
+
+<file path=ppt/slides/slide24.xml><?xml version="1.0" encoding="utf-8"?>
+<p:sld xmlns:a="http://schemas.openxmlformats.org/drawingml/2006/main" xmlns:p="http://schemas.openxmlformats.org/presentationml/2006/main" xmlns:r="http://schemas.openxmlformats.org/officeDocument/2006/relationships">
+  <p:cSld>
+    <p:spTree>
+      <p:nvGrpSpPr>
+        <p:cNvPr id="1" name=""/>
+        <p:cNvGrpSpPr/>
+        <p:nvPr/>
+      </p:nvGrpSpPr>
+      <p:grpSpPr/>
+      <p:sp>
+        <p:nvSpPr>
+          <p:cNvPr id="2" name="Rectangle 1"/>
+          <p:cNvSpPr/>
+          <p:nvPr/>
+        </p:nvSpPr>
+        <p:spPr>
+          <a:xfrm>
+            <a:off x="0" y="0"/>
+            <a:ext cx="12188952" cy="6858000"/>
+          </a:xfrm>
+          <a:prstGeom prst="rect">
+            <a:avLst/>
+          </a:prstGeom>
+          <a:solidFill>
+            <a:srgbClr val="FFFFFF"/>
+          </a:solidFill>
+          <a:ln>
+            <a:noFill/>
+          </a:ln>
+        </p:spPr>
+        <p:style>
+          <a:lnRef idx="1">
+            <a:schemeClr val="accent1"/>
+          </a:lnRef>
+          <a:fillRef idx="3">
+            <a:schemeClr val="accent1"/>
+          </a:fillRef>
+          <a:effectRef idx="2">
+            <a:schemeClr val="accent1"/>
+          </a:effectRef>
+          <a:fontRef idx="minor">
+            <a:schemeClr val="lt1"/>
+          </a:fontRef>
+        </p:style>
+        <p:txBody>
+          <a:bodyPr rtlCol="0" anchor="ctr"/>
+          <a:lstStyle/>
+          <a:p>
+            <a:pPr algn="ctr"/>
+          </a:p>
+        </p:txBody>
+      </p:sp>
+      <p:sp>
+        <p:nvSpPr>
+          <p:cNvPr id="3" name="TextBox 2"/>
+          <p:cNvSpPr txBox="1"/>
+          <p:nvPr/>
+        </p:nvSpPr>
+        <p:spPr>
+          <a:xfrm>
+            <a:off x="457200" y="2011680"/>
+            <a:ext cx="11274552" cy="1828800"/>
+          </a:xfrm>
+          <a:prstGeom prst="rect">
+            <a:avLst/>
+          </a:prstGeom>
+          <a:noFill/>
+        </p:spPr>
+        <p:txBody>
+          <a:bodyPr wrap="square">
+            <a:spAutoFit/>
+          </a:bodyPr>
+          <a:lstStyle/>
+          <a:p>
             <a:pPr algn="ctr">
-              <a:defRPr sz="2400">
+              <a:defRPr sz="2600" i="1">
+                <a:solidFill>
+                  <a:srgbClr val="1A1A2E"/>
+                </a:solidFill>
+              </a:defRPr>
+            </a:pPr>
+            <a:r>
+              <a:t>"园丁的智慧，在于懂得「适度失控」。唯有在混沌的边缘，智能才会真正涌现。"</a:t>
+            </a:r>
+          </a:p>
+        </p:txBody>
+      </p:sp>
+    </p:spTree>
+  </p:cSld>
+  <p:clrMapOvr>
+    <a:masterClrMapping/>
+  </p:clrMapOvr>
+</p:sld>
+</file>
+
+<file path=ppt/slides/slide25.xml><?xml version="1.0" encoding="utf-8"?>
+<p:sld xmlns:a="http://schemas.openxmlformats.org/drawingml/2006/main" xmlns:p="http://schemas.openxmlformats.org/presentationml/2006/main" xmlns:r="http://schemas.openxmlformats.org/officeDocument/2006/relationships">
+  <p:cSld>
+    <p:spTree>
+      <p:nvGrpSpPr>
+        <p:cNvPr id="1" name=""/>
+        <p:cNvGrpSpPr/>
+        <p:nvPr/>
+      </p:nvGrpSpPr>
+      <p:grpSpPr/>
+      <p:sp>
+        <p:nvSpPr>
+          <p:cNvPr id="2" name="Rectangle 1"/>
+          <p:cNvSpPr/>
+          <p:nvPr/>
+        </p:nvSpPr>
+        <p:spPr>
+          <a:xfrm>
+            <a:off x="0" y="0"/>
+            <a:ext cx="12188952" cy="6858000"/>
+          </a:xfrm>
+          <a:prstGeom prst="rect">
+            <a:avLst/>
+          </a:prstGeom>
+          <a:solidFill>
+            <a:srgbClr val="1A1A2E"/>
+          </a:solidFill>
+          <a:ln>
+            <a:noFill/>
+          </a:ln>
+        </p:spPr>
+        <p:style>
+          <a:lnRef idx="1">
+            <a:schemeClr val="accent1"/>
+          </a:lnRef>
+          <a:fillRef idx="3">
+            <a:schemeClr val="accent1"/>
+          </a:fillRef>
+          <a:effectRef idx="2">
+            <a:schemeClr val="accent1"/>
+          </a:effectRef>
+          <a:fontRef idx="minor">
+            <a:schemeClr val="lt1"/>
+          </a:fontRef>
+        </p:style>
+        <p:txBody>
+          <a:bodyPr rtlCol="0" anchor="ctr"/>
+          <a:lstStyle/>
+          <a:p>
+            <a:pPr algn="ctr"/>
+          </a:p>
+        </p:txBody>
+      </p:sp>
+      <p:sp>
+        <p:nvSpPr>
+          <p:cNvPr id="3" name="TextBox 2"/>
+          <p:cNvSpPr txBox="1"/>
+          <p:nvPr/>
+        </p:nvSpPr>
+        <p:spPr>
+          <a:xfrm>
+            <a:off x="457200" y="2286000"/>
+            <a:ext cx="11274552" cy="1828800"/>
+          </a:xfrm>
+          <a:prstGeom prst="rect">
+            <a:avLst/>
+          </a:prstGeom>
+          <a:noFill/>
+        </p:spPr>
+        <p:txBody>
+          <a:bodyPr wrap="square">
+            <a:spAutoFit/>
+          </a:bodyPr>
+          <a:lstStyle/>
+          <a:p>
+            <a:pPr algn="ctr">
+              <a:defRPr sz="5200" i="0">
+                <a:solidFill>
+                  <a:srgbClr val="FFFFFF"/>
+                </a:solidFill>
+              </a:defRPr>
+            </a:pPr>
+            <a:r>
+              <a:t>谢谢观看</a:t>
+            </a:r>
+          </a:p>
+        </p:txBody>
+      </p:sp>
+      <p:sp>
+        <p:nvSpPr>
+          <p:cNvPr id="4" name="TextBox 3"/>
+          <p:cNvSpPr txBox="1"/>
+          <p:nvPr/>
+        </p:nvSpPr>
+        <p:spPr>
+          <a:xfrm>
+            <a:off x="457200" y="3657600"/>
+            <a:ext cx="11274552" cy="1828800"/>
+          </a:xfrm>
+          <a:prstGeom prst="rect">
+            <a:avLst/>
+          </a:prstGeom>
+          <a:noFill/>
+        </p:spPr>
+        <p:txBody>
+          <a:bodyPr wrap="square">
+            <a:spAutoFit/>
+          </a:bodyPr>
+          <a:lstStyle/>
+          <a:p>
+            <a:pPr algn="ctr">
+              <a:defRPr sz="2200" i="0">
                 <a:solidFill>
                   <a:srgbClr val="A0AEC0"/>
                 </a:solidFill>
@@ -6500,6 +7555,41 @@
             </a:pPr>
             <a:r>
               <a:t>《Agent设计模式》读书笔记 | Tony老师分享</a:t>
+            </a:r>
+          </a:p>
+        </p:txBody>
+      </p:sp>
+      <p:sp>
+        <p:nvSpPr>
+          <p:cNvPr id="5" name="TextBox 4"/>
+          <p:cNvSpPr txBox="1"/>
+          <p:nvPr/>
+        </p:nvSpPr>
+        <p:spPr>
+          <a:xfrm>
+            <a:off x="457200" y="4754880"/>
+            <a:ext cx="11274552" cy="1828800"/>
+          </a:xfrm>
+          <a:prstGeom prst="rect">
+            <a:avLst/>
+          </a:prstGeom>
+          <a:noFill/>
+        </p:spPr>
+        <p:txBody>
+          <a:bodyPr wrap="square">
+            <a:spAutoFit/>
+          </a:bodyPr>
+          <a:lstStyle/>
+          <a:p>
+            <a:pPr algn="ctr">
+              <a:defRPr sz="1800" i="0">
+                <a:solidFill>
+                  <a:srgbClr val="E94560"/>
+                </a:solidFill>
+              </a:defRPr>
+            </a:pPr>
+            <a:r>
+              <a:t>blog.tanteng.space</a:t>
             </a:r>
           </a:p>
         </p:txBody>
@@ -6638,7 +7728,7 @@
               </a:defRPr>
             </a:pPr>
             <a:r>
-              <a:t>五条 Agent 设计原则</a:t>
+              <a:t>一本书，两条主线</a:t>
             </a:r>
           </a:p>
         </p:txBody>
@@ -6667,76 +7757,61 @@
           <a:p>
             <a:pPr>
               <a:spcAft>
-                <a:spcPts val="1200"/>
+                <a:spcPts val="1400"/>
               </a:spcAft>
-              <a:defRPr sz="2200" b="1">
+              <a:defRPr sz="2100" b="0">
+                <a:solidFill>
+                  <a:srgbClr val="1A1A2E"/>
+                </a:solidFill>
+              </a:defRPr>
+            </a:pPr>
+            <a:r>
+              <a:t>• 上篇：智能设计的哲学 — 从历史演进揭示 Agent 诞生的必然性</a:t>
+            </a:r>
+          </a:p>
+          <a:p>
+            <a:pPr>
+              <a:spcAft>
+                <a:spcPts val="1400"/>
+              </a:spcAft>
+              <a:defRPr sz="2100" b="0">
+                <a:solidFill>
+                  <a:srgbClr val="1A1A2E"/>
+                </a:solidFill>
+              </a:defRPr>
+            </a:pPr>
+            <a:r>
+              <a:t>• 下篇：六大类 21 个核心设计模式 — 感知/记忆/推理/行动/反思/协作</a:t>
+            </a:r>
+          </a:p>
+          <a:p>
+            <a:pPr>
+              <a:spcAft>
+                <a:spcPts val="1400"/>
+              </a:spcAft>
+              <a:defRPr sz="2100" b="1">
                 <a:solidFill>
                   <a:srgbClr val="553C9A"/>
                 </a:solidFill>
               </a:defRPr>
             </a:pPr>
             <a:r>
-              <a:t>• 目标优先 — 从"要达成什么目标"出发，而非先考虑"能调用什么工具"</a:t>
+              <a:t>• 核心方法论：意图优先 + 上下文为王 + 涌现优于规定</a:t>
             </a:r>
           </a:p>
           <a:p>
             <a:pPr>
               <a:spcAft>
-                <a:spcPts val="1200"/>
+                <a:spcPts val="1400"/>
               </a:spcAft>
-              <a:defRPr sz="2200" b="1">
-                <a:solidFill>
-                  <a:srgbClr val="553C9A"/>
-                </a:solidFill>
-              </a:defRPr>
-            </a:pPr>
-            <a:r>
-              <a:t>• 上下文为王 — 提示只是冰山一角，上下文工程与记忆治理才是关键</a:t>
-            </a:r>
-          </a:p>
-          <a:p>
-            <a:pPr>
-              <a:spcAft>
-                <a:spcPts val="1200"/>
-              </a:spcAft>
-              <a:defRPr sz="2200">
+              <a:defRPr sz="2100" b="0">
                 <a:solidFill>
                   <a:srgbClr val="1A1A2E"/>
                 </a:solidFill>
               </a:defRPr>
             </a:pPr>
             <a:r>
-              <a:t>• 显式反馈 — 将反馈、反思与改进内建于系统设计之初</a:t>
-            </a:r>
-          </a:p>
-          <a:p>
-            <a:pPr>
-              <a:spcAft>
-                <a:spcPts val="1200"/>
-              </a:spcAft>
-              <a:defRPr sz="2200">
-                <a:solidFill>
-                  <a:srgbClr val="1A1A2E"/>
-                </a:solidFill>
-              </a:defRPr>
-            </a:pPr>
-            <a:r>
-              <a:t>• 渐进自治 — 在安全护栏内逐步提升自主决策能力</a:t>
-            </a:r>
-          </a:p>
-          <a:p>
-            <a:pPr>
-              <a:spcAft>
-                <a:spcPts val="1200"/>
-              </a:spcAft>
-              <a:defRPr sz="2200" b="1">
-                <a:solidFill>
-                  <a:srgbClr val="553C9A"/>
-                </a:solidFill>
-              </a:defRPr>
-            </a:pPr>
-            <a:r>
-              <a:t>• 涌现优于规定 — 设计让智能体自然涌现行为的机制</a:t>
+              <a:t>• 适合读者：想用大模型构建可靠系统的工程师 / 架构师</a:t>
             </a:r>
           </a:p>
         </p:txBody>
@@ -6811,7 +7886,7 @@
         <p:spPr>
           <a:xfrm>
             <a:off x="457200" y="2743200"/>
-            <a:ext cx="11274552" cy="1371600"/>
+            <a:ext cx="11274552" cy="1828800"/>
           </a:xfrm>
           <a:prstGeom prst="rect">
             <a:avLst/>
@@ -6819,20 +7894,20 @@
           <a:noFill/>
         </p:spPr>
         <p:txBody>
-          <a:bodyPr wrap="none">
+          <a:bodyPr wrap="square">
             <a:spAutoFit/>
           </a:bodyPr>
           <a:lstStyle/>
           <a:p>
             <a:pPr algn="ctr">
-              <a:defRPr sz="4800" b="1">
+              <a:defRPr sz="5000" i="0">
                 <a:solidFill>
                   <a:srgbClr val="FFFFFF"/>
                 </a:solidFill>
               </a:defRPr>
             </a:pPr>
             <a:r>
-              <a:t>📖 上篇：智能设计的哲学</a:t>
+              <a:t>📖  上篇：智能设计的哲学</a:t>
             </a:r>
           </a:p>
         </p:txBody>
@@ -6971,7 +8046,7 @@
               </a:defRPr>
             </a:pPr>
             <a:r>
-              <a:t>上篇核心：从确定性到概率性的范式跃迁</a:t>
+              <a:t>范式迁移：从确定性到概率性</a:t>
             </a:r>
           </a:p>
         </p:txBody>
@@ -7000,76 +8075,76 @@
           <a:p>
             <a:pPr>
               <a:spcAft>
-                <a:spcPts val="1200"/>
+                <a:spcPts val="1400"/>
               </a:spcAft>
-              <a:defRPr sz="2200">
+              <a:defRPr sz="2100" b="0">
                 <a:solidFill>
                   <a:srgbClr val="1A1A2E"/>
                 </a:solidFill>
               </a:defRPr>
             </a:pPr>
             <a:r>
-              <a:t>• GoF 设计模式诞生于"静态世界" — 系统边界清晰、需求可预测</a:t>
+              <a:t>• GoF 设计模式 — 诞生于「静态世界」：系统边界清晰、需求可预测</a:t>
             </a:r>
           </a:p>
           <a:p>
             <a:pPr>
               <a:spcAft>
-                <a:spcPts val="1200"/>
+                <a:spcPts val="1400"/>
               </a:spcAft>
-              <a:defRPr sz="2200">
+              <a:defRPr sz="2100" b="0">
                 <a:solidFill>
                   <a:srgbClr val="1A1A2E"/>
                 </a:solidFill>
               </a:defRPr>
             </a:pPr>
             <a:r>
-              <a:t>• 2012年关键转折点：Netflix Chaos Monkey + Google Datacenter as Computer</a:t>
+              <a:t>• 2012 转折点 — Netflix Chaos Monkey：故障不可避免，就让它进化出免疫力</a:t>
             </a:r>
           </a:p>
           <a:p>
             <a:pPr>
               <a:spcAft>
-                <a:spcPts val="1200"/>
+                <a:spcPts val="1400"/>
               </a:spcAft>
-              <a:defRPr sz="2200" b="1">
+              <a:defRPr sz="2100" b="0">
+                <a:solidFill>
+                  <a:srgbClr val="1A1A2E"/>
+                </a:solidFill>
+              </a:defRPr>
+            </a:pPr>
+            <a:r>
+              <a:t>• Google Datacenter as Computer：硬件故障是统计学必然，为「故障常态化」而设计</a:t>
+            </a:r>
+          </a:p>
+          <a:p>
+            <a:pPr>
+              <a:spcAft>
+                <a:spcPts val="1400"/>
+              </a:spcAft>
+              <a:defRPr sz="2100" b="1">
                 <a:solidFill>
                   <a:srgbClr val="553C9A"/>
                 </a:solidFill>
               </a:defRPr>
             </a:pPr>
             <a:r>
-              <a:t>• 确定性时代终结：软件不再是"瑞士手表"，而是"热带雨林"</a:t>
+              <a:t>• 确定性时代终结：软件不再是「瑞士手表」，而是「热带雨林」</a:t>
             </a:r>
           </a:p>
           <a:p>
             <a:pPr>
               <a:spcAft>
-                <a:spcPts val="1200"/>
+                <a:spcPts val="1400"/>
               </a:spcAft>
-              <a:defRPr sz="2200" b="1">
+              <a:defRPr sz="2100" b="1">
                 <a:solidFill>
                   <a:srgbClr val="553C9A"/>
                 </a:solidFill>
               </a:defRPr>
             </a:pPr>
             <a:r>
-              <a:t>• 意图比模式更重要 — Agent 首次将"意图"显式嵌入系统</a:t>
-            </a:r>
-          </a:p>
-          <a:p>
-            <a:pPr>
-              <a:spcAft>
-                <a:spcPts val="1200"/>
-              </a:spcAft>
-              <a:defRPr sz="2200">
-                <a:solidFill>
-                  <a:srgbClr val="1A1A2E"/>
-                </a:solidFill>
-              </a:defRPr>
-            </a:pPr>
-            <a:r>
-              <a:t>• 函数与流、分布式+Serverless、软件2.0 — 每一步都在为 Agent 铺路</a:t>
+              <a:t>• 意图比模式更重要 — Agent 首次将「意图」显式嵌入系统</a:t>
             </a:r>
           </a:p>
         </p:txBody>
@@ -7208,7 +8283,7 @@
               </a:defRPr>
             </a:pPr>
             <a:r>
-              <a:t>2012-2014：四次关键变革</a:t>
+              <a:t>2012-2014：四次关键技术演进，奠定 Agent 基石</a:t>
             </a:r>
           </a:p>
         </p:txBody>
@@ -7221,8 +8296,8 @@
         </p:nvSpPr>
         <p:spPr>
           <a:xfrm>
-            <a:off x="640080" y="1371600"/>
-            <a:ext cx="5271516" cy="1188720"/>
+            <a:off x="640080" y="1463040"/>
+            <a:ext cx="5271516" cy="1325880"/>
           </a:xfrm>
           <a:prstGeom prst="roundRect">
             <a:avLst/>
@@ -7264,7 +8339,7 @@
         </p:nvSpPr>
         <p:spPr>
           <a:xfrm>
-            <a:off x="640080" y="1463040"/>
+            <a:off x="640080" y="1536192"/>
             <a:ext cx="5180076" cy="365760"/>
           </a:xfrm>
           <a:prstGeom prst="rect">
@@ -7279,14 +8354,14 @@
           <a:lstStyle/>
           <a:p>
             <a:pPr>
-              <a:defRPr sz="1600" b="1">
+              <a:defRPr sz="1500" b="1">
                 <a:solidFill>
                   <a:srgbClr val="553C9A"/>
                 </a:solidFill>
               </a:defRPr>
             </a:pPr>
             <a:r>
-              <a:t>Google Datacenter as Computer</a:t>
+              <a:t>🌐 Google Datacenter as Computer</a:t>
             </a:r>
           </a:p>
         </p:txBody>
@@ -7299,8 +8374,8 @@
         </p:nvSpPr>
         <p:spPr>
           <a:xfrm>
-            <a:off x="640080" y="1828800"/>
-            <a:ext cx="5180076" cy="731520"/>
+            <a:off x="640080" y="1901952"/>
+            <a:ext cx="5180076" cy="914400"/>
           </a:xfrm>
           <a:prstGeom prst="rect">
             <a:avLst/>
@@ -7314,7 +8389,7 @@
           <a:lstStyle/>
           <a:p>
             <a:pPr>
-              <a:defRPr sz="1200">
+              <a:defRPr sz="1100">
                 <a:solidFill>
                   <a:srgbClr val="A0AEC0"/>
                 </a:solidFill>
@@ -7334,8 +8409,8 @@
         </p:nvSpPr>
         <p:spPr>
           <a:xfrm>
-            <a:off x="6094476" y="1371600"/>
-            <a:ext cx="5271516" cy="1188720"/>
+            <a:off x="6094476" y="1463040"/>
+            <a:ext cx="5271516" cy="1325880"/>
           </a:xfrm>
           <a:prstGeom prst="roundRect">
             <a:avLst/>
@@ -7377,7 +8452,7 @@
         </p:nvSpPr>
         <p:spPr>
           <a:xfrm>
-            <a:off x="6094476" y="1463040"/>
+            <a:off x="6094476" y="1536192"/>
             <a:ext cx="5180076" cy="365760"/>
           </a:xfrm>
           <a:prstGeom prst="rect">
@@ -7392,14 +8467,14 @@
           <a:lstStyle/>
           <a:p>
             <a:pPr>
-              <a:defRPr sz="1600" b="1">
+              <a:defRPr sz="1500" b="1">
                 <a:solidFill>
                   <a:srgbClr val="553C9A"/>
                 </a:solidFill>
               </a:defRPr>
             </a:pPr>
             <a:r>
-              <a:t>Netflix Chaos Monkey</a:t>
+              <a:t>🐵 Netflix Chaos Monkey</a:t>
             </a:r>
           </a:p>
         </p:txBody>
@@ -7412,8 +8487,8 @@
         </p:nvSpPr>
         <p:spPr>
           <a:xfrm>
-            <a:off x="6094476" y="1828800"/>
-            <a:ext cx="5180076" cy="731520"/>
+            <a:off x="6094476" y="1901952"/>
+            <a:ext cx="5180076" cy="914400"/>
           </a:xfrm>
           <a:prstGeom prst="rect">
             <a:avLst/>
@@ -7427,7 +8502,7 @@
           <a:lstStyle/>
           <a:p>
             <a:pPr>
-              <a:defRPr sz="1200">
+              <a:defRPr sz="1100">
                 <a:solidFill>
                   <a:srgbClr val="A0AEC0"/>
                 </a:solidFill>
@@ -7447,8 +8522,8 @@
         </p:nvSpPr>
         <p:spPr>
           <a:xfrm>
-            <a:off x="640080" y="2743200"/>
-            <a:ext cx="5271516" cy="1188720"/>
+            <a:off x="640080" y="2926080"/>
+            <a:ext cx="5271516" cy="1325880"/>
           </a:xfrm>
           <a:prstGeom prst="roundRect">
             <a:avLst/>
@@ -7490,7 +8565,7 @@
         </p:nvSpPr>
         <p:spPr>
           <a:xfrm>
-            <a:off x="640080" y="2834640"/>
+            <a:off x="640080" y="2999232"/>
             <a:ext cx="5180076" cy="365760"/>
           </a:xfrm>
           <a:prstGeom prst="rect">
@@ -7505,14 +8580,14 @@
           <a:lstStyle/>
           <a:p>
             <a:pPr>
-              <a:defRPr sz="1600" b="1">
+              <a:defRPr sz="1500" b="1">
                 <a:solidFill>
                   <a:srgbClr val="553C9A"/>
                 </a:solidFill>
               </a:defRPr>
             </a:pPr>
             <a:r>
-              <a:t>Docker</a:t>
+              <a:t>📦 Docker</a:t>
             </a:r>
           </a:p>
         </p:txBody>
@@ -7525,8 +8600,8 @@
         </p:nvSpPr>
         <p:spPr>
           <a:xfrm>
-            <a:off x="640080" y="3200400"/>
-            <a:ext cx="5180076" cy="731520"/>
+            <a:off x="640080" y="3364992"/>
+            <a:ext cx="5180076" cy="914400"/>
           </a:xfrm>
           <a:prstGeom prst="rect">
             <a:avLst/>
@@ -7540,7 +8615,7 @@
           <a:lstStyle/>
           <a:p>
             <a:pPr>
-              <a:defRPr sz="1200">
+              <a:defRPr sz="1100">
                 <a:solidFill>
                   <a:srgbClr val="A0AEC0"/>
                 </a:solidFill>
@@ -7560,8 +8635,8 @@
         </p:nvSpPr>
         <p:spPr>
           <a:xfrm>
-            <a:off x="6094476" y="2743200"/>
-            <a:ext cx="5271516" cy="1188720"/>
+            <a:off x="6094476" y="2926080"/>
+            <a:ext cx="5271516" cy="1325880"/>
           </a:xfrm>
           <a:prstGeom prst="roundRect">
             <a:avLst/>
@@ -7603,7 +8678,7 @@
         </p:nvSpPr>
         <p:spPr>
           <a:xfrm>
-            <a:off x="6094476" y="2834640"/>
+            <a:off x="6094476" y="2999232"/>
             <a:ext cx="5180076" cy="365760"/>
           </a:xfrm>
           <a:prstGeom prst="rect">
@@ -7618,14 +8693,14 @@
           <a:lstStyle/>
           <a:p>
             <a:pPr>
-              <a:defRPr sz="1600" b="1">
+              <a:defRPr sz="1500" b="1">
                 <a:solidFill>
                   <a:srgbClr val="553C9A"/>
                 </a:solidFill>
               </a:defRPr>
             </a:pPr>
             <a:r>
-              <a:t>Kubernetes</a:t>
+              <a:t>☸️ Kubernetes</a:t>
             </a:r>
           </a:p>
         </p:txBody>
@@ -7638,8 +8713,8 @@
         </p:nvSpPr>
         <p:spPr>
           <a:xfrm>
-            <a:off x="6094476" y="3200400"/>
-            <a:ext cx="5180076" cy="731520"/>
+            <a:off x="6094476" y="3364992"/>
+            <a:ext cx="5180076" cy="914400"/>
           </a:xfrm>
           <a:prstGeom prst="rect">
             <a:avLst/>
@@ -7653,7 +8728,7 @@
           <a:lstStyle/>
           <a:p>
             <a:pPr>
-              <a:defRPr sz="1200">
+              <a:defRPr sz="1100">
                 <a:solidFill>
                   <a:srgbClr val="A0AEC0"/>
                 </a:solidFill>
@@ -7799,7 +8874,7 @@
               </a:defRPr>
             </a:pPr>
             <a:r>
-              <a:t>Agent 的本质：从工具到伙伴</a:t>
+              <a:t>Software 2.0：概率性工程的崛起</a:t>
             </a:r>
           </a:p>
         </p:txBody>
@@ -7828,76 +8903,61 @@
           <a:p>
             <a:pPr>
               <a:spcAft>
-                <a:spcPts val="1200"/>
+                <a:spcPts val="1400"/>
               </a:spcAft>
-              <a:defRPr sz="2200">
+              <a:defRPr sz="2100" b="0">
                 <a:solidFill>
                   <a:srgbClr val="1A1A2E"/>
                 </a:solidFill>
               </a:defRPr>
             </a:pPr>
             <a:r>
-              <a:t>• 交互原语升维：命令与控制 → 意图与协作</a:t>
+              <a:t>• 2017年 Andrej Karpathy 提出：软件工程从消除不确定性 → 利用不确定性</a:t>
             </a:r>
           </a:p>
           <a:p>
             <a:pPr>
               <a:spcAft>
-                <a:spcPts val="1200"/>
+                <a:spcPts val="1400"/>
               </a:spcAft>
-              <a:defRPr sz="2200" b="1">
+              <a:defRPr sz="2100" b="1">
                 <a:solidFill>
                   <a:srgbClr val="553C9A"/>
                 </a:solidFill>
               </a:defRPr>
             </a:pPr>
             <a:r>
-              <a:t>• "模糊翻译器"：人类模糊的自然语言 → 机器精确的 API 调用</a:t>
+              <a:t>• 开发者角色转变：「建筑师」（精确控制每行逻辑）→「园丁」（提供土壤和栅栏）</a:t>
             </a:r>
           </a:p>
           <a:p>
             <a:pPr>
               <a:spcAft>
-                <a:spcPts val="1200"/>
+                <a:spcPts val="1400"/>
               </a:spcAft>
-              <a:defRPr sz="2200">
+              <a:defRPr sz="2100" b="0">
                 <a:solidFill>
                   <a:srgbClr val="1A1A2E"/>
                 </a:solidFill>
               </a:defRPr>
             </a:pPr>
             <a:r>
-              <a:t>• 记忆与身份：Agent 在对话之间延续"身份"</a:t>
+              <a:t>• 逻辑来源：人类写 if-else → 模型从海量数据中自行「涌现」</a:t>
             </a:r>
           </a:p>
           <a:p>
             <a:pPr>
               <a:spcAft>
-                <a:spcPts val="1200"/>
+                <a:spcPts val="1400"/>
               </a:spcAft>
-              <a:defRPr sz="2200">
+              <a:defRPr sz="2100" b="0">
                 <a:solidFill>
                   <a:srgbClr val="1A1A2E"/>
                 </a:solidFill>
               </a:defRPr>
             </a:pPr>
             <a:r>
-              <a:t>• 上下文工程：上下文就是 Agent 的整个世界</a:t>
-            </a:r>
-          </a:p>
-          <a:p>
-            <a:pPr>
-              <a:spcAft>
-                <a:spcPts val="1200"/>
-              </a:spcAft>
-              <a:defRPr sz="2200">
-                <a:solidFill>
-                  <a:srgbClr val="1A1A2E"/>
-                </a:solidFill>
-              </a:defRPr>
-            </a:pPr>
-            <a:r>
-              <a:t>• ReAct 范式（Thought → Action → Observation）已成为行动标准心智模型</a:t>
+              <a:t>• MLOps 为 AgentOps 铺路：当代码演变为数据（模型权重），DevOps 工具链力不从心</a:t>
             </a:r>
           </a:p>
         </p:txBody>
@@ -8036,7 +9096,7 @@
               </a:defRPr>
             </a:pPr>
             <a:r>
-              <a:t>MCP + A2A：双轨制协议</a:t>
+              <a:t>函数与流：让软件契合 AI 的思考节奏</a:t>
             </a:r>
           </a:p>
         </p:txBody>
@@ -8065,76 +9125,61 @@
           <a:p>
             <a:pPr>
               <a:spcAft>
-                <a:spcPts val="1200"/>
+                <a:spcPts val="1400"/>
               </a:spcAft>
-              <a:defRPr sz="2200" b="1">
+              <a:defRPr sz="2100" b="0">
+                <a:solidFill>
+                  <a:srgbClr val="1A1A2E"/>
+                </a:solidFill>
+              </a:defRPr>
+            </a:pPr>
+            <a:r>
+              <a:t>• LLM 本质是无状态的「纯函数」：输入 Prompt → 输出 Token 流</a:t>
+            </a:r>
+          </a:p>
+          <a:p>
+            <a:pPr>
+              <a:spcAft>
+                <a:spcPts val="1400"/>
+              </a:spcAft>
+              <a:defRPr sz="2100" b="0">
+                <a:solidFill>
+                  <a:srgbClr val="1A1A2E"/>
+                </a:solidFill>
+              </a:defRPr>
+            </a:pPr>
+            <a:r>
+              <a:t>• FP 思想（引用透明 + 管道）与 Agent 数据处理管道完全吻合</a:t>
+            </a:r>
+          </a:p>
+          <a:p>
+            <a:pPr>
+              <a:spcAft>
+                <a:spcPts val="1400"/>
+              </a:spcAft>
+              <a:defRPr sz="2100" b="1">
                 <a:solidFill>
                   <a:srgbClr val="553C9A"/>
                 </a:solidFill>
               </a:defRPr>
             </a:pPr>
             <a:r>
-              <a:t>• MCP（Model Context Protocol）— AI 的 USB-C 接口，标准化 Agent 与工具/数据的连接</a:t>
+              <a:t>• 背压机制（Backpressure）：多 Agent 协作中「搜索 Agent」不会压垮「写作 Agent」</a:t>
             </a:r>
           </a:p>
           <a:p>
             <a:pPr>
               <a:spcAft>
-                <a:spcPts val="1200"/>
+                <a:spcPts val="1400"/>
               </a:spcAft>
-              <a:defRPr sz="2200">
+              <a:defRPr sz="2100" b="0">
                 <a:solidFill>
                   <a:srgbClr val="1A1A2E"/>
                 </a:solidFill>
               </a:defRPr>
             </a:pPr>
             <a:r>
-              <a:t>• A2A — Agent 之间的"对讲机协议"，多个 Agent 相互协作</a:t>
-            </a:r>
-          </a:p>
-          <a:p>
-            <a:pPr>
-              <a:spcAft>
-                <a:spcPts val="1200"/>
-              </a:spcAft>
-              <a:defRPr sz="2200">
-                <a:solidFill>
-                  <a:srgbClr val="1A1A2E"/>
-                </a:solidFill>
-              </a:defRPr>
-            </a:pPr>
-            <a:r>
-              <a:t>• 工具(Tool) = Agent 的"手" — 原子化操作（执行SQL、发送HTTP）</a:t>
-            </a:r>
-          </a:p>
-          <a:p>
-            <a:pPr>
-              <a:spcAft>
-                <a:spcPts val="1200"/>
-              </a:spcAft>
-              <a:defRPr sz="2200">
-                <a:solidFill>
-                  <a:srgbClr val="1A1A2E"/>
-                </a:solidFill>
-              </a:defRPr>
-            </a:pPr>
-            <a:r>
-              <a:t>• 技能(Skill) = Agent 的"技能书" — 工具 + 领域知识 + SOP</a:t>
-            </a:r>
-          </a:p>
-          <a:p>
-            <a:pPr>
-              <a:spcAft>
-                <a:spcPts val="1200"/>
-              </a:spcAft>
-              <a:defRPr sz="2200">
-                <a:solidFill>
-                  <a:srgbClr val="1A1A2E"/>
-                </a:solidFill>
-              </a:defRPr>
-            </a:pPr>
-            <a:r>
-              <a:t>• 编排器（Orchestrator）：当 Agent 数量增加，系统需要"大脑"维持秩序</a:t>
+              <a:t>• Serverless：函数平时「沉睡」在云端，Agent 产生意图时通过 API 唤醒</a:t>
             </a:r>
           </a:p>
         </p:txBody>
@@ -8172,7 +9217,7 @@
             <a:avLst/>
           </a:prstGeom>
           <a:solidFill>
-            <a:srgbClr val="F7F7F7"/>
+            <a:srgbClr val="FFFFFF"/>
           </a:solidFill>
           <a:ln>
             <a:noFill/>
@@ -8202,14 +9247,92 @@
       </p:sp>
       <p:sp>
         <p:nvSpPr>
-          <p:cNvPr id="3" name="TextBox 2"/>
+          <p:cNvPr id="3" name="Rectangle 2"/>
+          <p:cNvSpPr/>
+          <p:nvPr/>
+        </p:nvSpPr>
+        <p:spPr>
+          <a:xfrm>
+            <a:off x="0" y="0"/>
+            <a:ext cx="12188952" cy="1097280"/>
+          </a:xfrm>
+          <a:prstGeom prst="rect">
+            <a:avLst/>
+          </a:prstGeom>
+          <a:solidFill>
+            <a:srgbClr val="1A1A2E"/>
+          </a:solidFill>
+          <a:ln>
+            <a:noFill/>
+          </a:ln>
+        </p:spPr>
+        <p:style>
+          <a:lnRef idx="1">
+            <a:schemeClr val="accent1"/>
+          </a:lnRef>
+          <a:fillRef idx="3">
+            <a:schemeClr val="accent1"/>
+          </a:fillRef>
+          <a:effectRef idx="2">
+            <a:schemeClr val="accent1"/>
+          </a:effectRef>
+          <a:fontRef idx="minor">
+            <a:schemeClr val="lt1"/>
+          </a:fontRef>
+        </p:style>
+        <p:txBody>
+          <a:bodyPr rtlCol="0" anchor="ctr"/>
+          <a:lstStyle/>
+          <a:p>
+            <a:pPr algn="ctr"/>
+          </a:p>
+        </p:txBody>
+      </p:sp>
+      <p:sp>
+        <p:nvSpPr>
+          <p:cNvPr id="4" name="TextBox 3"/>
           <p:cNvSpPr txBox="1"/>
           <p:nvPr/>
         </p:nvSpPr>
         <p:spPr>
           <a:xfrm>
-            <a:off x="457200" y="1828800"/>
-            <a:ext cx="11274552" cy="1828800"/>
+            <a:off x="457200" y="228600"/>
+            <a:ext cx="11274552" cy="731520"/>
+          </a:xfrm>
+          <a:prstGeom prst="rect">
+            <a:avLst/>
+          </a:prstGeom>
+          <a:noFill/>
+        </p:spPr>
+        <p:txBody>
+          <a:bodyPr wrap="none">
+            <a:spAutoFit/>
+          </a:bodyPr>
+          <a:lstStyle/>
+          <a:p>
+            <a:pPr>
+              <a:defRPr sz="3200" b="1">
+                <a:solidFill>
+                  <a:srgbClr val="FFFFFF"/>
+                </a:solidFill>
+              </a:defRPr>
+            </a:pPr>
+            <a:r>
+              <a:t>Agent 的本质：从工具到伙伴</a:t>
+            </a:r>
+          </a:p>
+        </p:txBody>
+      </p:sp>
+      <p:sp>
+        <p:nvSpPr>
+          <p:cNvPr id="5" name="TextBox 4"/>
+          <p:cNvSpPr txBox="1"/>
+          <p:nvPr/>
+        </p:nvSpPr>
+        <p:spPr>
+          <a:xfrm>
+            <a:off x="640080" y="1371600"/>
+            <a:ext cx="10972800" cy="5029200"/>
           </a:xfrm>
           <a:prstGeom prst="rect">
             <a:avLst/>
@@ -8222,15 +9345,78 @@
           </a:bodyPr>
           <a:lstStyle/>
           <a:p>
-            <a:pPr algn="ctr">
-              <a:defRPr sz="2800" i="1">
+            <a:pPr>
+              <a:spcAft>
+                <a:spcPts val="1400"/>
+              </a:spcAft>
+              <a:defRPr sz="2100" b="0">
                 <a:solidFill>
                   <a:srgbClr val="1A1A2E"/>
                 </a:solidFill>
               </a:defRPr>
             </a:pPr>
             <a:r>
-              <a:t>"从 GoF 的 23 个设计模式到 Agent 的无限可能，我们跨越了软件工程的一个世纪：设计模式并未消亡，而是在进化；软件工程未曾终结，而是在重生；人类的角色没有消失，而是在升华。"</a:t>
+              <a:t>• 交互原语升维：命令与控制 → 意图与协作</a:t>
+            </a:r>
+          </a:p>
+          <a:p>
+            <a:pPr>
+              <a:spcAft>
+                <a:spcPts val="1400"/>
+              </a:spcAft>
+              <a:defRPr sz="2100" b="1">
+                <a:solidFill>
+                  <a:srgbClr val="553C9A"/>
+                </a:solidFill>
+              </a:defRPr>
+            </a:pPr>
+            <a:r>
+              <a:t>• Agent =「模糊翻译器」：人类模糊的自然语言 → 机器精确的 API 调用</a:t>
+            </a:r>
+          </a:p>
+          <a:p>
+            <a:pPr>
+              <a:spcAft>
+                <a:spcPts val="1400"/>
+              </a:spcAft>
+              <a:defRPr sz="2100" b="1">
+                <a:solidFill>
+                  <a:srgbClr val="553C9A"/>
+                </a:solidFill>
+              </a:defRPr>
+            </a:pPr>
+            <a:r>
+              <a:t>• 记忆与身份：Agent 在对话之间延续「身份」，逐渐形成对用户的深入理解</a:t>
+            </a:r>
+          </a:p>
+          <a:p>
+            <a:pPr>
+              <a:spcAft>
+                <a:spcPts val="1400"/>
+              </a:spcAft>
+              <a:defRPr sz="2100" b="0">
+                <a:solidFill>
+                  <a:srgbClr val="1A1A2E"/>
+                </a:solidFill>
+              </a:defRPr>
+            </a:pPr>
+            <a:r>
+              <a:t>• 上下文工程：「上下文就是 Agent 的整个世界」，失败往往源于上下文有误</a:t>
+            </a:r>
+          </a:p>
+          <a:p>
+            <a:pPr>
+              <a:spcAft>
+                <a:spcPts val="1400"/>
+              </a:spcAft>
+              <a:defRPr sz="2100" b="0">
+                <a:solidFill>
+                  <a:srgbClr val="1A1A2E"/>
+                </a:solidFill>
+              </a:defRPr>
+            </a:pPr>
+            <a:r>
+              <a:t>• 任务分解（Task Decomposition）：把「目标」变为「计划」的能力</a:t>
             </a:r>
           </a:p>
         </p:txBody>

--- a/static/reports/agent-design-patterns-book-intro.pptx
+++ b/static/reports/agent-design-patterns-book-intro.pptx
@@ -30,6 +30,12 @@
     <p:sldId id="278" r:id="rId29"/>
     <p:sldId id="279" r:id="rId30"/>
     <p:sldId id="280" r:id="rId31"/>
+    <p:sldId id="281" r:id="rId32"/>
+    <p:sldId id="282" r:id="rId33"/>
+    <p:sldId id="283" r:id="rId34"/>
+    <p:sldId id="284" r:id="rId35"/>
+    <p:sldId id="285" r:id="rId36"/>
+    <p:sldId id="286" r:id="rId37"/>
   </p:sldIdLst>
   <p:sldSz cx="12188952" cy="6858000" type="screen4x3"/>
   <p:notesSz cx="6858000" cy="9144000"/>
@@ -3163,8 +3169,8 @@
         </p:nvSpPr>
         <p:spPr>
           <a:xfrm>
-            <a:off x="457200" y="1645920"/>
-            <a:ext cx="11274552" cy="1828800"/>
+            <a:off x="457200" y="1371600"/>
+            <a:ext cx="11274552" cy="2286000"/>
           </a:xfrm>
           <a:prstGeom prst="rect">
             <a:avLst/>
@@ -3178,7 +3184,7 @@
           <a:lstStyle/>
           <a:p>
             <a:pPr algn="ctr">
-              <a:defRPr sz="4000" i="0">
+              <a:defRPr sz="4200" i="0">
                 <a:solidFill>
                   <a:srgbClr val="E94560"/>
                 </a:solidFill>
@@ -3198,8 +3204,8 @@
         </p:nvSpPr>
         <p:spPr>
           <a:xfrm>
-            <a:off x="457200" y="2926080"/>
-            <a:ext cx="11274552" cy="1828800"/>
+            <a:off x="457200" y="2743200"/>
+            <a:ext cx="11274552" cy="2286000"/>
           </a:xfrm>
           <a:prstGeom prst="rect">
             <a:avLst/>
@@ -3342,7 +3348,7 @@
         <p:spPr>
           <a:xfrm>
             <a:off x="457200" y="228600"/>
-            <a:ext cx="11274552" cy="731520"/>
+            <a:ext cx="11274552" cy="822960"/>
           </a:xfrm>
           <a:prstGeom prst="rect">
             <a:avLst/>
@@ -3363,7 +3369,7 @@
               </a:defRPr>
             </a:pPr>
             <a:r>
-              <a:t>ReAct：Agent 行动的标准心智模型</a:t>
+              <a:t>GoF 模式之后：软件工程的象牙塔困境</a:t>
             </a:r>
           </a:p>
         </p:txBody>
@@ -3401,7 +3407,22 @@
               </a:defRPr>
             </a:pPr>
             <a:r>
-              <a:t>• ReAct = Thought → Action → Observation — 推理与行动交织的循环</a:t>
+              <a:t>• 模式思想源自建筑师克里斯托弗·亚历山大的《建筑模式语言》——优秀建筑是「永恒形式」的发现</a:t>
+            </a:r>
+          </a:p>
+          <a:p>
+            <a:pPr>
+              <a:spcAft>
+                <a:spcPts val="1400"/>
+              </a:spcAft>
+              <a:defRPr sz="2100" b="0">
+                <a:solidFill>
+                  <a:srgbClr val="1A1A2E"/>
+                </a:solidFill>
+              </a:defRPr>
+            </a:pPr>
+            <a:r>
+              <a:t>• 1994 年 GoF《设计模式》：提炼23种模式，构建系统化设计世界观</a:t>
             </a:r>
           </a:p>
           <a:p>
@@ -3416,7 +3437,22 @@
               </a:defRPr>
             </a:pPr>
             <a:r>
-              <a:t>• 看图规划（Thought）→ 采取行动（Action）→ 观察反馈（Observation）→ 循环</a:t>
+              <a:t>• 「模式病」(Patternitis)：过度设计让简单功能淹没在抽象海洋中</a:t>
+            </a:r>
+          </a:p>
+          <a:p>
+            <a:pPr>
+              <a:spcAft>
+                <a:spcPts val="1400"/>
+              </a:spcAft>
+              <a:defRPr sz="2100" b="1">
+                <a:solidFill>
+                  <a:srgbClr val="553C9A"/>
+                </a:solidFill>
+              </a:defRPr>
+            </a:pPr>
+            <a:r>
+              <a:t>• 追求代码「纯洁性」筑起高墙——开发者沉醉于打造完美的水晶球，却忽视了现实世界的灵活性</a:t>
             </a:r>
           </a:p>
           <a:p>
@@ -3431,22 +3467,7 @@
               </a:defRPr>
             </a:pPr>
             <a:r>
-              <a:t>• 核心价值：推理轨迹追踪中间决策，行动赋予探索环境获取外部信息的能力</a:t>
-            </a:r>
-          </a:p>
-          <a:p>
-            <a:pPr>
-              <a:spcAft>
-                <a:spcPts val="1400"/>
-              </a:spcAft>
-              <a:defRPr sz="2100" b="0">
-                <a:solidFill>
-                  <a:srgbClr val="1A1A2E"/>
-                </a:solidFill>
-              </a:defRPr>
-            </a:pPr>
-            <a:r>
-              <a:t>• 这是 Agent 与传统程序的核心区别：输出不再是终点，而是环境改变的起点</a:t>
+              <a:t>• 经典模式诞生于「静态世界」：系统边界清晰、需求可预测、运行环境稳定</a:t>
             </a:r>
           </a:p>
         </p:txBody>
@@ -3564,7 +3585,7 @@
         <p:spPr>
           <a:xfrm>
             <a:off x="457200" y="228600"/>
-            <a:ext cx="11274552" cy="731520"/>
+            <a:ext cx="11274552" cy="822960"/>
           </a:xfrm>
           <a:prstGeom prst="rect">
             <a:avLst/>
@@ -3585,7 +3606,7 @@
               </a:defRPr>
             </a:pPr>
             <a:r>
-              <a:t>MCP + A2A：双轨制协议</a:t>
+              <a:t>函数与流：让软件契合 AI 的思考节奏</a:t>
             </a:r>
           </a:p>
         </p:txBody>
@@ -3611,6 +3632,36 @@
             <a:spAutoFit/>
           </a:bodyPr>
           <a:lstStyle/>
+          <a:p>
+            <a:pPr>
+              <a:spcAft>
+                <a:spcPts val="1400"/>
+              </a:spcAft>
+              <a:defRPr sz="2100" b="0">
+                <a:solidFill>
+                  <a:srgbClr val="1A1A2E"/>
+                </a:solidFill>
+              </a:defRPr>
+            </a:pPr>
+            <a:r>
+              <a:t>• LLM 本质是无状态的「纯函数」：输入 Prompt → 输出 Token 流</a:t>
+            </a:r>
+          </a:p>
+          <a:p>
+            <a:pPr>
+              <a:spcAft>
+                <a:spcPts val="1400"/>
+              </a:spcAft>
+              <a:defRPr sz="2100" b="0">
+                <a:solidFill>
+                  <a:srgbClr val="1A1A2E"/>
+                </a:solidFill>
+              </a:defRPr>
+            </a:pPr>
+            <a:r>
+              <a:t>• FP 思想（引用透明 + 管道）与 Agent 数据处理管道完全吻合</a:t>
+            </a:r>
+          </a:p>
           <a:p>
             <a:pPr>
               <a:spcAft>
@@ -3623,7 +3674,7 @@
               </a:defRPr>
             </a:pPr>
             <a:r>
-              <a:t>• MCP（Model Context Protocol）— AI 的 USB-C 接口：标准化 Agent 与工具/数据的连接</a:t>
+              <a:t>• 背压机制（Backpressure）：多 Agent 协作中「搜索 Agent」不会压垮「写作 Agent」</a:t>
             </a:r>
           </a:p>
           <a:p>
@@ -3638,7 +3689,7 @@
               </a:defRPr>
             </a:pPr>
             <a:r>
-              <a:t>• A2A — Agent 之间的「对讲机协议」：多个 Agent 相互协作</a:t>
+              <a:t>• Serverless：函数平时「沉睡」在云端，Agent 产生意图时通过 API 唤醒</a:t>
             </a:r>
           </a:p>
           <a:p>
@@ -3653,37 +3704,7 @@
               </a:defRPr>
             </a:pPr>
             <a:r>
-              <a:t>• 工具(Tool) = Agent 的「手」— 原子化操作（执行SQL、发送HTTP）</a:t>
-            </a:r>
-          </a:p>
-          <a:p>
-            <a:pPr>
-              <a:spcAft>
-                <a:spcPts val="1400"/>
-              </a:spcAft>
-              <a:defRPr sz="2100" b="0">
-                <a:solidFill>
-                  <a:srgbClr val="1A1A2E"/>
-                </a:solidFill>
-              </a:defRPr>
-            </a:pPr>
-            <a:r>
-              <a:t>• 技能(Skill) = Agent 的「技能书」— 工具 + 领域知识 + SOP</a:t>
-            </a:r>
-          </a:p>
-          <a:p>
-            <a:pPr>
-              <a:spcAft>
-                <a:spcPts val="1400"/>
-              </a:spcAft>
-              <a:defRPr sz="2100" b="0">
-                <a:solidFill>
-                  <a:srgbClr val="1A1A2E"/>
-                </a:solidFill>
-              </a:defRPr>
-            </a:pPr>
-            <a:r>
-              <a:t>• 编排器（Orchestrator）：当 Agent 数量增加，系统需要「大脑」维持秩序</a:t>
+              <a:t>• "智能的本质，是对变化的响应。神经网络响应 Tensor 流，强化学习响应 Reward 流，LLM 响应 Token 流。"</a:t>
             </a:r>
           </a:p>
         </p:txBody>
@@ -3751,14 +3772,135 @@
       </p:sp>
       <p:sp>
         <p:nvSpPr>
-          <p:cNvPr id="3" name="TextBox 2"/>
+          <p:cNvPr id="3" name="Rectangle 2"/>
+          <p:cNvSpPr/>
+          <p:nvPr/>
+        </p:nvSpPr>
+        <p:spPr>
+          <a:xfrm>
+            <a:off x="0" y="0"/>
+            <a:ext cx="12188952" cy="1097280"/>
+          </a:xfrm>
+          <a:prstGeom prst="rect">
+            <a:avLst/>
+          </a:prstGeom>
+          <a:solidFill>
+            <a:srgbClr val="1A1A2E"/>
+          </a:solidFill>
+          <a:ln>
+            <a:noFill/>
+          </a:ln>
+        </p:spPr>
+        <p:style>
+          <a:lnRef idx="1">
+            <a:schemeClr val="accent1"/>
+          </a:lnRef>
+          <a:fillRef idx="3">
+            <a:schemeClr val="accent1"/>
+          </a:fillRef>
+          <a:effectRef idx="2">
+            <a:schemeClr val="accent1"/>
+          </a:effectRef>
+          <a:fontRef idx="minor">
+            <a:schemeClr val="lt1"/>
+          </a:fontRef>
+        </p:style>
+        <p:txBody>
+          <a:bodyPr rtlCol="0" anchor="ctr"/>
+          <a:lstStyle/>
+          <a:p>
+            <a:pPr algn="ctr"/>
+          </a:p>
+        </p:txBody>
+      </p:sp>
+      <p:sp>
+        <p:nvSpPr>
+          <p:cNvPr id="4" name="TextBox 3"/>
           <p:cNvSpPr txBox="1"/>
           <p:nvPr/>
         </p:nvSpPr>
         <p:spPr>
           <a:xfrm>
-            <a:off x="457200" y="2011680"/>
-            <a:ext cx="11274552" cy="1828800"/>
+            <a:off x="457200" y="228600"/>
+            <a:ext cx="11274552" cy="822960"/>
+          </a:xfrm>
+          <a:prstGeom prst="rect">
+            <a:avLst/>
+          </a:prstGeom>
+          <a:noFill/>
+        </p:spPr>
+        <p:txBody>
+          <a:bodyPr wrap="none">
+            <a:spAutoFit/>
+          </a:bodyPr>
+          <a:lstStyle/>
+          <a:p>
+            <a:pPr>
+              <a:defRPr sz="3200" b="1">
+                <a:solidFill>
+                  <a:srgbClr val="FFFFFF"/>
+                </a:solidFill>
+              </a:defRPr>
+            </a:pPr>
+            <a:r>
+              <a:t>K8s 与 LLM Agent：同一个心智模型，不同的管理对象</a:t>
+            </a:r>
+          </a:p>
+        </p:txBody>
+      </p:sp>
+      <p:sp>
+        <p:nvSpPr>
+          <p:cNvPr id="5" name="Rectangle 4"/>
+          <p:cNvSpPr/>
+          <p:nvPr/>
+        </p:nvSpPr>
+        <p:spPr>
+          <a:xfrm>
+            <a:off x="457200" y="1280160"/>
+            <a:ext cx="2560320" cy="1234440"/>
+          </a:xfrm>
+          <a:prstGeom prst="rect">
+            <a:avLst/>
+          </a:prstGeom>
+          <a:solidFill>
+            <a:srgbClr val="1A1A2E"/>
+          </a:solidFill>
+          <a:ln>
+            <a:noFill/>
+          </a:ln>
+        </p:spPr>
+        <p:style>
+          <a:lnRef idx="1">
+            <a:schemeClr val="accent1"/>
+          </a:lnRef>
+          <a:fillRef idx="3">
+            <a:schemeClr val="accent1"/>
+          </a:fillRef>
+          <a:effectRef idx="2">
+            <a:schemeClr val="accent1"/>
+          </a:effectRef>
+          <a:fontRef idx="minor">
+            <a:schemeClr val="lt1"/>
+          </a:fontRef>
+        </p:style>
+        <p:txBody>
+          <a:bodyPr rtlCol="0" anchor="ctr"/>
+          <a:lstStyle/>
+          <a:p>
+            <a:pPr algn="ctr"/>
+          </a:p>
+        </p:txBody>
+      </p:sp>
+      <p:sp>
+        <p:nvSpPr>
+          <p:cNvPr id="6" name="TextBox 5"/>
+          <p:cNvSpPr txBox="1"/>
+          <p:nvPr/>
+        </p:nvSpPr>
+        <p:spPr>
+          <a:xfrm>
+            <a:off x="548640" y="1371600"/>
+            <a:ext cx="2377440" cy="1097280"/>
           </a:xfrm>
           <a:prstGeom prst="rect">
             <a:avLst/>
@@ -3772,14 +3914,877 @@
           <a:lstStyle/>
           <a:p>
             <a:pPr algn="ctr">
-              <a:defRPr sz="2600" i="1">
-                <a:solidFill>
-                  <a:srgbClr val="1A1A2E"/>
-                </a:solidFill>
-              </a:defRPr>
-            </a:pPr>
-            <a:r>
-              <a:t>"从 GoF 的 23 个设计模式到 Agent 的无限可能，我们跨越了软件工程的一个世纪：设计模式并未消亡，而是在进化；软件工程未曾终结，而是在重生；人类的角色没有消失，而是在升华。"</a:t>
+              <a:defRPr sz="1300" b="1">
+                <a:solidFill>
+                  <a:srgbClr val="E94560"/>
+                </a:solidFill>
+              </a:defRPr>
+            </a:pPr>
+          </a:p>
+        </p:txBody>
+      </p:sp>
+      <p:sp>
+        <p:nvSpPr>
+          <p:cNvPr id="7" name="Rectangle 6"/>
+          <p:cNvSpPr/>
+          <p:nvPr/>
+        </p:nvSpPr>
+        <p:spPr>
+          <a:xfrm>
+            <a:off x="3200400" y="1280160"/>
+            <a:ext cx="4389120" cy="1234440"/>
+          </a:xfrm>
+          <a:prstGeom prst="rect">
+            <a:avLst/>
+          </a:prstGeom>
+          <a:solidFill>
+            <a:srgbClr val="1A1A2E"/>
+          </a:solidFill>
+          <a:ln>
+            <a:noFill/>
+          </a:ln>
+        </p:spPr>
+        <p:style>
+          <a:lnRef idx="1">
+            <a:schemeClr val="accent1"/>
+          </a:lnRef>
+          <a:fillRef idx="3">
+            <a:schemeClr val="accent1"/>
+          </a:fillRef>
+          <a:effectRef idx="2">
+            <a:schemeClr val="accent1"/>
+          </a:effectRef>
+          <a:fontRef idx="minor">
+            <a:schemeClr val="lt1"/>
+          </a:fontRef>
+        </p:style>
+        <p:txBody>
+          <a:bodyPr rtlCol="0" anchor="ctr"/>
+          <a:lstStyle/>
+          <a:p>
+            <a:pPr algn="ctr"/>
+          </a:p>
+        </p:txBody>
+      </p:sp>
+      <p:sp>
+        <p:nvSpPr>
+          <p:cNvPr id="8" name="TextBox 7"/>
+          <p:cNvSpPr txBox="1"/>
+          <p:nvPr/>
+        </p:nvSpPr>
+        <p:spPr>
+          <a:xfrm>
+            <a:off x="3291840" y="1371600"/>
+            <a:ext cx="4206240" cy="1097280"/>
+          </a:xfrm>
+          <a:prstGeom prst="rect">
+            <a:avLst/>
+          </a:prstGeom>
+          <a:noFill/>
+        </p:spPr>
+        <p:txBody>
+          <a:bodyPr wrap="square">
+            <a:spAutoFit/>
+          </a:bodyPr>
+          <a:lstStyle/>
+          <a:p>
+            <a:pPr algn="ctr">
+              <a:defRPr sz="1300" b="1">
+                <a:solidFill>
+                  <a:srgbClr val="553C9A"/>
+                </a:solidFill>
+              </a:defRPr>
+            </a:pPr>
+            <a:r>
+              <a:t>Kubernetes</a:t>
+            </a:r>
+          </a:p>
+        </p:txBody>
+      </p:sp>
+      <p:sp>
+        <p:nvSpPr>
+          <p:cNvPr id="9" name="Rectangle 8"/>
+          <p:cNvSpPr/>
+          <p:nvPr/>
+        </p:nvSpPr>
+        <p:spPr>
+          <a:xfrm>
+            <a:off x="7772400" y="1280160"/>
+            <a:ext cx="4114800" cy="1234440"/>
+          </a:xfrm>
+          <a:prstGeom prst="rect">
+            <a:avLst/>
+          </a:prstGeom>
+          <a:solidFill>
+            <a:srgbClr val="1A1A2E"/>
+          </a:solidFill>
+          <a:ln>
+            <a:noFill/>
+          </a:ln>
+        </p:spPr>
+        <p:style>
+          <a:lnRef idx="1">
+            <a:schemeClr val="accent1"/>
+          </a:lnRef>
+          <a:fillRef idx="3">
+            <a:schemeClr val="accent1"/>
+          </a:fillRef>
+          <a:effectRef idx="2">
+            <a:schemeClr val="accent1"/>
+          </a:effectRef>
+          <a:fontRef idx="minor">
+            <a:schemeClr val="lt1"/>
+          </a:fontRef>
+        </p:style>
+        <p:txBody>
+          <a:bodyPr rtlCol="0" anchor="ctr"/>
+          <a:lstStyle/>
+          <a:p>
+            <a:pPr algn="ctr"/>
+          </a:p>
+        </p:txBody>
+      </p:sp>
+      <p:sp>
+        <p:nvSpPr>
+          <p:cNvPr id="10" name="TextBox 9"/>
+          <p:cNvSpPr txBox="1"/>
+          <p:nvPr/>
+        </p:nvSpPr>
+        <p:spPr>
+          <a:xfrm>
+            <a:off x="7863840" y="1371600"/>
+            <a:ext cx="3931920" cy="1097280"/>
+          </a:xfrm>
+          <a:prstGeom prst="rect">
+            <a:avLst/>
+          </a:prstGeom>
+          <a:noFill/>
+        </p:spPr>
+        <p:txBody>
+          <a:bodyPr wrap="square">
+            <a:spAutoFit/>
+          </a:bodyPr>
+          <a:lstStyle/>
+          <a:p>
+            <a:pPr algn="ctr">
+              <a:defRPr sz="1300" b="1">
+                <a:solidFill>
+                  <a:srgbClr val="553C9A"/>
+                </a:solidFill>
+              </a:defRPr>
+            </a:pPr>
+            <a:r>
+              <a:t>LLM Agent</a:t>
+            </a:r>
+          </a:p>
+        </p:txBody>
+      </p:sp>
+      <p:sp>
+        <p:nvSpPr>
+          <p:cNvPr id="11" name="Rectangle 10"/>
+          <p:cNvSpPr/>
+          <p:nvPr/>
+        </p:nvSpPr>
+        <p:spPr>
+          <a:xfrm>
+            <a:off x="457200" y="2606039"/>
+            <a:ext cx="2560320" cy="1234440"/>
+          </a:xfrm>
+          <a:prstGeom prst="rect">
+            <a:avLst/>
+          </a:prstGeom>
+          <a:solidFill>
+            <a:srgbClr val="1A1A2E"/>
+          </a:solidFill>
+          <a:ln>
+            <a:noFill/>
+          </a:ln>
+        </p:spPr>
+        <p:style>
+          <a:lnRef idx="1">
+            <a:schemeClr val="accent1"/>
+          </a:lnRef>
+          <a:fillRef idx="3">
+            <a:schemeClr val="accent1"/>
+          </a:fillRef>
+          <a:effectRef idx="2">
+            <a:schemeClr val="accent1"/>
+          </a:effectRef>
+          <a:fontRef idx="minor">
+            <a:schemeClr val="lt1"/>
+          </a:fontRef>
+        </p:style>
+        <p:txBody>
+          <a:bodyPr rtlCol="0" anchor="ctr"/>
+          <a:lstStyle/>
+          <a:p>
+            <a:pPr algn="ctr"/>
+          </a:p>
+        </p:txBody>
+      </p:sp>
+      <p:sp>
+        <p:nvSpPr>
+          <p:cNvPr id="12" name="TextBox 11"/>
+          <p:cNvSpPr txBox="1"/>
+          <p:nvPr/>
+        </p:nvSpPr>
+        <p:spPr>
+          <a:xfrm>
+            <a:off x="548640" y="2697479"/>
+            <a:ext cx="2377440" cy="1097280"/>
+          </a:xfrm>
+          <a:prstGeom prst="rect">
+            <a:avLst/>
+          </a:prstGeom>
+          <a:noFill/>
+        </p:spPr>
+        <p:txBody>
+          <a:bodyPr wrap="square">
+            <a:spAutoFit/>
+          </a:bodyPr>
+          <a:lstStyle/>
+          <a:p>
+            <a:pPr algn="ctr">
+              <a:defRPr sz="1300" b="1">
+                <a:solidFill>
+                  <a:srgbClr val="E94560"/>
+                </a:solidFill>
+              </a:defRPr>
+            </a:pPr>
+            <a:r>
+              <a:t>输入</a:t>
+            </a:r>
+          </a:p>
+        </p:txBody>
+      </p:sp>
+      <p:sp>
+        <p:nvSpPr>
+          <p:cNvPr id="13" name="Rectangle 12"/>
+          <p:cNvSpPr/>
+          <p:nvPr/>
+        </p:nvSpPr>
+        <p:spPr>
+          <a:xfrm>
+            <a:off x="3200400" y="2606039"/>
+            <a:ext cx="4389120" cy="1234440"/>
+          </a:xfrm>
+          <a:prstGeom prst="rect">
+            <a:avLst/>
+          </a:prstGeom>
+          <a:solidFill>
+            <a:srgbClr val="1A1A2E"/>
+          </a:solidFill>
+          <a:ln>
+            <a:noFill/>
+          </a:ln>
+        </p:spPr>
+        <p:style>
+          <a:lnRef idx="1">
+            <a:schemeClr val="accent1"/>
+          </a:lnRef>
+          <a:fillRef idx="3">
+            <a:schemeClr val="accent1"/>
+          </a:fillRef>
+          <a:effectRef idx="2">
+            <a:schemeClr val="accent1"/>
+          </a:effectRef>
+          <a:fontRef idx="minor">
+            <a:schemeClr val="lt1"/>
+          </a:fontRef>
+        </p:style>
+        <p:txBody>
+          <a:bodyPr rtlCol="0" anchor="ctr"/>
+          <a:lstStyle/>
+          <a:p>
+            <a:pPr algn="ctr"/>
+          </a:p>
+        </p:txBody>
+      </p:sp>
+      <p:sp>
+        <p:nvSpPr>
+          <p:cNvPr id="14" name="TextBox 13"/>
+          <p:cNvSpPr txBox="1"/>
+          <p:nvPr/>
+        </p:nvSpPr>
+        <p:spPr>
+          <a:xfrm>
+            <a:off x="3291840" y="2697479"/>
+            <a:ext cx="4206240" cy="1097280"/>
+          </a:xfrm>
+          <a:prstGeom prst="rect">
+            <a:avLst/>
+          </a:prstGeom>
+          <a:noFill/>
+        </p:spPr>
+        <p:txBody>
+          <a:bodyPr wrap="square">
+            <a:spAutoFit/>
+          </a:bodyPr>
+          <a:lstStyle/>
+          <a:p>
+            <a:pPr algn="ctr">
+              <a:defRPr sz="1300" b="0">
+                <a:solidFill>
+                  <a:srgbClr val="FFFFFF"/>
+                </a:solidFill>
+              </a:defRPr>
+            </a:pPr>
+            <a:r>
+              <a:t>语法严格的 YAML</a:t>
+            </a:r>
+            <a:br/>
+            <a:r>
+              <a:t>（静态资源需求）</a:t>
+            </a:r>
+          </a:p>
+        </p:txBody>
+      </p:sp>
+      <p:sp>
+        <p:nvSpPr>
+          <p:cNvPr id="15" name="Rectangle 14"/>
+          <p:cNvSpPr/>
+          <p:nvPr/>
+        </p:nvSpPr>
+        <p:spPr>
+          <a:xfrm>
+            <a:off x="7772400" y="2606039"/>
+            <a:ext cx="4114800" cy="1234440"/>
+          </a:xfrm>
+          <a:prstGeom prst="rect">
+            <a:avLst/>
+          </a:prstGeom>
+          <a:solidFill>
+            <a:srgbClr val="1A1A2E"/>
+          </a:solidFill>
+          <a:ln>
+            <a:noFill/>
+          </a:ln>
+        </p:spPr>
+        <p:style>
+          <a:lnRef idx="1">
+            <a:schemeClr val="accent1"/>
+          </a:lnRef>
+          <a:fillRef idx="3">
+            <a:schemeClr val="accent1"/>
+          </a:fillRef>
+          <a:effectRef idx="2">
+            <a:schemeClr val="accent1"/>
+          </a:effectRef>
+          <a:fontRef idx="minor">
+            <a:schemeClr val="lt1"/>
+          </a:fontRef>
+        </p:style>
+        <p:txBody>
+          <a:bodyPr rtlCol="0" anchor="ctr"/>
+          <a:lstStyle/>
+          <a:p>
+            <a:pPr algn="ctr"/>
+          </a:p>
+        </p:txBody>
+      </p:sp>
+      <p:sp>
+        <p:nvSpPr>
+          <p:cNvPr id="16" name="TextBox 15"/>
+          <p:cNvSpPr txBox="1"/>
+          <p:nvPr/>
+        </p:nvSpPr>
+        <p:spPr>
+          <a:xfrm>
+            <a:off x="7863840" y="2697479"/>
+            <a:ext cx="3931920" cy="1097280"/>
+          </a:xfrm>
+          <a:prstGeom prst="rect">
+            <a:avLst/>
+          </a:prstGeom>
+          <a:noFill/>
+        </p:spPr>
+        <p:txBody>
+          <a:bodyPr wrap="square">
+            <a:spAutoFit/>
+          </a:bodyPr>
+          <a:lstStyle/>
+          <a:p>
+            <a:pPr algn="ctr">
+              <a:defRPr sz="1300" b="0">
+                <a:solidFill>
+                  <a:srgbClr val="FFFFFF"/>
+                </a:solidFill>
+              </a:defRPr>
+            </a:pPr>
+            <a:r>
+              <a:t>模糊多变的自然语言 Prompt</a:t>
+            </a:r>
+            <a:br/>
+            <a:r>
+              <a:t>（动态人类意图）</a:t>
+            </a:r>
+          </a:p>
+        </p:txBody>
+      </p:sp>
+      <p:sp>
+        <p:nvSpPr>
+          <p:cNvPr id="17" name="Rectangle 16"/>
+          <p:cNvSpPr/>
+          <p:nvPr/>
+        </p:nvSpPr>
+        <p:spPr>
+          <a:xfrm>
+            <a:off x="457200" y="3931920"/>
+            <a:ext cx="2560320" cy="1234440"/>
+          </a:xfrm>
+          <a:prstGeom prst="rect">
+            <a:avLst/>
+          </a:prstGeom>
+          <a:solidFill>
+            <a:srgbClr val="2D3748"/>
+          </a:solidFill>
+          <a:ln>
+            <a:noFill/>
+          </a:ln>
+        </p:spPr>
+        <p:style>
+          <a:lnRef idx="1">
+            <a:schemeClr val="accent1"/>
+          </a:lnRef>
+          <a:fillRef idx="3">
+            <a:schemeClr val="accent1"/>
+          </a:fillRef>
+          <a:effectRef idx="2">
+            <a:schemeClr val="accent1"/>
+          </a:effectRef>
+          <a:fontRef idx="minor">
+            <a:schemeClr val="lt1"/>
+          </a:fontRef>
+        </p:style>
+        <p:txBody>
+          <a:bodyPr rtlCol="0" anchor="ctr"/>
+          <a:lstStyle/>
+          <a:p>
+            <a:pPr algn="ctr"/>
+          </a:p>
+        </p:txBody>
+      </p:sp>
+      <p:sp>
+        <p:nvSpPr>
+          <p:cNvPr id="18" name="TextBox 17"/>
+          <p:cNvSpPr txBox="1"/>
+          <p:nvPr/>
+        </p:nvSpPr>
+        <p:spPr>
+          <a:xfrm>
+            <a:off x="548640" y="4023360"/>
+            <a:ext cx="2377440" cy="1097280"/>
+          </a:xfrm>
+          <a:prstGeom prst="rect">
+            <a:avLst/>
+          </a:prstGeom>
+          <a:noFill/>
+        </p:spPr>
+        <p:txBody>
+          <a:bodyPr wrap="square">
+            <a:spAutoFit/>
+          </a:bodyPr>
+          <a:lstStyle/>
+          <a:p>
+            <a:pPr algn="ctr">
+              <a:defRPr sz="1300" b="1">
+                <a:solidFill>
+                  <a:srgbClr val="E94560"/>
+                </a:solidFill>
+              </a:defRPr>
+            </a:pPr>
+            <a:r>
+              <a:t>职责</a:t>
+            </a:r>
+          </a:p>
+        </p:txBody>
+      </p:sp>
+      <p:sp>
+        <p:nvSpPr>
+          <p:cNvPr id="19" name="Rectangle 18"/>
+          <p:cNvSpPr/>
+          <p:nvPr/>
+        </p:nvSpPr>
+        <p:spPr>
+          <a:xfrm>
+            <a:off x="3200400" y="3931920"/>
+            <a:ext cx="4389120" cy="1234440"/>
+          </a:xfrm>
+          <a:prstGeom prst="rect">
+            <a:avLst/>
+          </a:prstGeom>
+          <a:solidFill>
+            <a:srgbClr val="2D3748"/>
+          </a:solidFill>
+          <a:ln>
+            <a:noFill/>
+          </a:ln>
+        </p:spPr>
+        <p:style>
+          <a:lnRef idx="1">
+            <a:schemeClr val="accent1"/>
+          </a:lnRef>
+          <a:fillRef idx="3">
+            <a:schemeClr val="accent1"/>
+          </a:fillRef>
+          <a:effectRef idx="2">
+            <a:schemeClr val="accent1"/>
+          </a:effectRef>
+          <a:fontRef idx="minor">
+            <a:schemeClr val="lt1"/>
+          </a:fontRef>
+        </p:style>
+        <p:txBody>
+          <a:bodyPr rtlCol="0" anchor="ctr"/>
+          <a:lstStyle/>
+          <a:p>
+            <a:pPr algn="ctr"/>
+          </a:p>
+        </p:txBody>
+      </p:sp>
+      <p:sp>
+        <p:nvSpPr>
+          <p:cNvPr id="20" name="TextBox 19"/>
+          <p:cNvSpPr txBox="1"/>
+          <p:nvPr/>
+        </p:nvSpPr>
+        <p:spPr>
+          <a:xfrm>
+            <a:off x="3291840" y="4023360"/>
+            <a:ext cx="4206240" cy="1097280"/>
+          </a:xfrm>
+          <a:prstGeom prst="rect">
+            <a:avLst/>
+          </a:prstGeom>
+          <a:noFill/>
+        </p:spPr>
+        <p:txBody>
+          <a:bodyPr wrap="square">
+            <a:spAutoFit/>
+          </a:bodyPr>
+          <a:lstStyle/>
+          <a:p>
+            <a:pPr algn="ctr">
+              <a:defRPr sz="1300" b="0">
+                <a:solidFill>
+                  <a:srgbClr val="FFFFFF"/>
+                </a:solidFill>
+              </a:defRPr>
+            </a:pPr>
+            <a:r>
+              <a:t>设计精确预设的流程图</a:t>
+            </a:r>
+          </a:p>
+        </p:txBody>
+      </p:sp>
+      <p:sp>
+        <p:nvSpPr>
+          <p:cNvPr id="21" name="Rectangle 20"/>
+          <p:cNvSpPr/>
+          <p:nvPr/>
+        </p:nvSpPr>
+        <p:spPr>
+          <a:xfrm>
+            <a:off x="7772400" y="3931920"/>
+            <a:ext cx="4114800" cy="1234440"/>
+          </a:xfrm>
+          <a:prstGeom prst="rect">
+            <a:avLst/>
+          </a:prstGeom>
+          <a:solidFill>
+            <a:srgbClr val="2D3748"/>
+          </a:solidFill>
+          <a:ln>
+            <a:noFill/>
+          </a:ln>
+        </p:spPr>
+        <p:style>
+          <a:lnRef idx="1">
+            <a:schemeClr val="accent1"/>
+          </a:lnRef>
+          <a:fillRef idx="3">
+            <a:schemeClr val="accent1"/>
+          </a:fillRef>
+          <a:effectRef idx="2">
+            <a:schemeClr val="accent1"/>
+          </a:effectRef>
+          <a:fontRef idx="minor">
+            <a:schemeClr val="lt1"/>
+          </a:fontRef>
+        </p:style>
+        <p:txBody>
+          <a:bodyPr rtlCol="0" anchor="ctr"/>
+          <a:lstStyle/>
+          <a:p>
+            <a:pPr algn="ctr"/>
+          </a:p>
+        </p:txBody>
+      </p:sp>
+      <p:sp>
+        <p:nvSpPr>
+          <p:cNvPr id="22" name="TextBox 21"/>
+          <p:cNvSpPr txBox="1"/>
+          <p:nvPr/>
+        </p:nvSpPr>
+        <p:spPr>
+          <a:xfrm>
+            <a:off x="7863840" y="4023360"/>
+            <a:ext cx="3931920" cy="1097280"/>
+          </a:xfrm>
+          <a:prstGeom prst="rect">
+            <a:avLst/>
+          </a:prstGeom>
+          <a:noFill/>
+        </p:spPr>
+        <p:txBody>
+          <a:bodyPr wrap="square">
+            <a:spAutoFit/>
+          </a:bodyPr>
+          <a:lstStyle/>
+          <a:p>
+            <a:pPr algn="ctr">
+              <a:defRPr sz="1300" b="0">
+                <a:solidFill>
+                  <a:srgbClr val="FFFFFF"/>
+                </a:solidFill>
+              </a:defRPr>
+            </a:pPr>
+            <a:r>
+              <a:t>设计目标函数 + 边界护栏</a:t>
+            </a:r>
+          </a:p>
+        </p:txBody>
+      </p:sp>
+      <p:sp>
+        <p:nvSpPr>
+          <p:cNvPr id="23" name="Rectangle 22"/>
+          <p:cNvSpPr/>
+          <p:nvPr/>
+        </p:nvSpPr>
+        <p:spPr>
+          <a:xfrm>
+            <a:off x="457200" y="5257800"/>
+            <a:ext cx="2560320" cy="1234440"/>
+          </a:xfrm>
+          <a:prstGeom prst="rect">
+            <a:avLst/>
+          </a:prstGeom>
+          <a:solidFill>
+            <a:srgbClr val="1A1A2E"/>
+          </a:solidFill>
+          <a:ln>
+            <a:noFill/>
+          </a:ln>
+        </p:spPr>
+        <p:style>
+          <a:lnRef idx="1">
+            <a:schemeClr val="accent1"/>
+          </a:lnRef>
+          <a:fillRef idx="3">
+            <a:schemeClr val="accent1"/>
+          </a:fillRef>
+          <a:effectRef idx="2">
+            <a:schemeClr val="accent1"/>
+          </a:effectRef>
+          <a:fontRef idx="minor">
+            <a:schemeClr val="lt1"/>
+          </a:fontRef>
+        </p:style>
+        <p:txBody>
+          <a:bodyPr rtlCol="0" anchor="ctr"/>
+          <a:lstStyle/>
+          <a:p>
+            <a:pPr algn="ctr"/>
+          </a:p>
+        </p:txBody>
+      </p:sp>
+      <p:sp>
+        <p:nvSpPr>
+          <p:cNvPr id="24" name="TextBox 23"/>
+          <p:cNvSpPr txBox="1"/>
+          <p:nvPr/>
+        </p:nvSpPr>
+        <p:spPr>
+          <a:xfrm>
+            <a:off x="548640" y="5349240"/>
+            <a:ext cx="2377440" cy="1097280"/>
+          </a:xfrm>
+          <a:prstGeom prst="rect">
+            <a:avLst/>
+          </a:prstGeom>
+          <a:noFill/>
+        </p:spPr>
+        <p:txBody>
+          <a:bodyPr wrap="square">
+            <a:spAutoFit/>
+          </a:bodyPr>
+          <a:lstStyle/>
+          <a:p>
+            <a:pPr algn="ctr">
+              <a:defRPr sz="1300" b="1">
+                <a:solidFill>
+                  <a:srgbClr val="E94560"/>
+                </a:solidFill>
+              </a:defRPr>
+            </a:pPr>
+            <a:r>
+              <a:t>本质</a:t>
+            </a:r>
+          </a:p>
+        </p:txBody>
+      </p:sp>
+      <p:sp>
+        <p:nvSpPr>
+          <p:cNvPr id="25" name="Rectangle 24"/>
+          <p:cNvSpPr/>
+          <p:nvPr/>
+        </p:nvSpPr>
+        <p:spPr>
+          <a:xfrm>
+            <a:off x="3200400" y="5257800"/>
+            <a:ext cx="4389120" cy="1234440"/>
+          </a:xfrm>
+          <a:prstGeom prst="rect">
+            <a:avLst/>
+          </a:prstGeom>
+          <a:solidFill>
+            <a:srgbClr val="1A1A2E"/>
+          </a:solidFill>
+          <a:ln>
+            <a:noFill/>
+          </a:ln>
+        </p:spPr>
+        <p:style>
+          <a:lnRef idx="1">
+            <a:schemeClr val="accent1"/>
+          </a:lnRef>
+          <a:fillRef idx="3">
+            <a:schemeClr val="accent1"/>
+          </a:fillRef>
+          <a:effectRef idx="2">
+            <a:schemeClr val="accent1"/>
+          </a:effectRef>
+          <a:fontRef idx="minor">
+            <a:schemeClr val="lt1"/>
+          </a:fontRef>
+        </p:style>
+        <p:txBody>
+          <a:bodyPr rtlCol="0" anchor="ctr"/>
+          <a:lstStyle/>
+          <a:p>
+            <a:pPr algn="ctr"/>
+          </a:p>
+        </p:txBody>
+      </p:sp>
+      <p:sp>
+        <p:nvSpPr>
+          <p:cNvPr id="26" name="TextBox 25"/>
+          <p:cNvSpPr txBox="1"/>
+          <p:nvPr/>
+        </p:nvSpPr>
+        <p:spPr>
+          <a:xfrm>
+            <a:off x="3291840" y="5349240"/>
+            <a:ext cx="4206240" cy="1097280"/>
+          </a:xfrm>
+          <a:prstGeom prst="rect">
+            <a:avLst/>
+          </a:prstGeom>
+          <a:noFill/>
+        </p:spPr>
+        <p:txBody>
+          <a:bodyPr wrap="square">
+            <a:spAutoFit/>
+          </a:bodyPr>
+          <a:lstStyle/>
+          <a:p>
+            <a:pPr algn="ctr">
+              <a:defRPr sz="1300" b="0">
+                <a:solidFill>
+                  <a:srgbClr val="FFFFFF"/>
+                </a:solidFill>
+              </a:defRPr>
+            </a:pPr>
+            <a:r>
+              <a:t>管理基础设施的 Agent</a:t>
+            </a:r>
+          </a:p>
+        </p:txBody>
+      </p:sp>
+      <p:sp>
+        <p:nvSpPr>
+          <p:cNvPr id="27" name="Rectangle 26"/>
+          <p:cNvSpPr/>
+          <p:nvPr/>
+        </p:nvSpPr>
+        <p:spPr>
+          <a:xfrm>
+            <a:off x="7772400" y="5257800"/>
+            <a:ext cx="4114800" cy="1234440"/>
+          </a:xfrm>
+          <a:prstGeom prst="rect">
+            <a:avLst/>
+          </a:prstGeom>
+          <a:solidFill>
+            <a:srgbClr val="1A1A2E"/>
+          </a:solidFill>
+          <a:ln>
+            <a:noFill/>
+          </a:ln>
+        </p:spPr>
+        <p:style>
+          <a:lnRef idx="1">
+            <a:schemeClr val="accent1"/>
+          </a:lnRef>
+          <a:fillRef idx="3">
+            <a:schemeClr val="accent1"/>
+          </a:fillRef>
+          <a:effectRef idx="2">
+            <a:schemeClr val="accent1"/>
+          </a:effectRef>
+          <a:fontRef idx="minor">
+            <a:schemeClr val="lt1"/>
+          </a:fontRef>
+        </p:style>
+        <p:txBody>
+          <a:bodyPr rtlCol="0" anchor="ctr"/>
+          <a:lstStyle/>
+          <a:p>
+            <a:pPr algn="ctr"/>
+          </a:p>
+        </p:txBody>
+      </p:sp>
+      <p:sp>
+        <p:nvSpPr>
+          <p:cNvPr id="28" name="TextBox 27"/>
+          <p:cNvSpPr txBox="1"/>
+          <p:nvPr/>
+        </p:nvSpPr>
+        <p:spPr>
+          <a:xfrm>
+            <a:off x="7863840" y="5349240"/>
+            <a:ext cx="3931920" cy="1097280"/>
+          </a:xfrm>
+          <a:prstGeom prst="rect">
+            <a:avLst/>
+          </a:prstGeom>
+          <a:noFill/>
+        </p:spPr>
+        <p:txBody>
+          <a:bodyPr wrap="square">
+            <a:spAutoFit/>
+          </a:bodyPr>
+          <a:lstStyle/>
+          <a:p>
+            <a:pPr algn="ctr">
+              <a:defRPr sz="1300" b="0">
+                <a:solidFill>
+                  <a:srgbClr val="FFFFFF"/>
+                </a:solidFill>
+              </a:defRPr>
+            </a:pPr>
+            <a:r>
+              <a:t>管理业务逻辑的 Agent</a:t>
             </a:r>
           </a:p>
         </p:txBody>
@@ -3817,7 +4822,7 @@
             <a:avLst/>
           </a:prstGeom>
           <a:solidFill>
-            <a:srgbClr val="553C9A"/>
+            <a:srgbClr val="FFFFFF"/>
           </a:solidFill>
           <a:ln>
             <a:noFill/>
@@ -3847,14 +4852,92 @@
       </p:sp>
       <p:sp>
         <p:nvSpPr>
-          <p:cNvPr id="3" name="TextBox 2"/>
+          <p:cNvPr id="3" name="Rectangle 2"/>
+          <p:cNvSpPr/>
+          <p:nvPr/>
+        </p:nvSpPr>
+        <p:spPr>
+          <a:xfrm>
+            <a:off x="0" y="0"/>
+            <a:ext cx="12188952" cy="1097280"/>
+          </a:xfrm>
+          <a:prstGeom prst="rect">
+            <a:avLst/>
+          </a:prstGeom>
+          <a:solidFill>
+            <a:srgbClr val="1A1A2E"/>
+          </a:solidFill>
+          <a:ln>
+            <a:noFill/>
+          </a:ln>
+        </p:spPr>
+        <p:style>
+          <a:lnRef idx="1">
+            <a:schemeClr val="accent1"/>
+          </a:lnRef>
+          <a:fillRef idx="3">
+            <a:schemeClr val="accent1"/>
+          </a:fillRef>
+          <a:effectRef idx="2">
+            <a:schemeClr val="accent1"/>
+          </a:effectRef>
+          <a:fontRef idx="minor">
+            <a:schemeClr val="lt1"/>
+          </a:fontRef>
+        </p:style>
+        <p:txBody>
+          <a:bodyPr rtlCol="0" anchor="ctr"/>
+          <a:lstStyle/>
+          <a:p>
+            <a:pPr algn="ctr"/>
+          </a:p>
+        </p:txBody>
+      </p:sp>
+      <p:sp>
+        <p:nvSpPr>
+          <p:cNvPr id="4" name="TextBox 3"/>
           <p:cNvSpPr txBox="1"/>
           <p:nvPr/>
         </p:nvSpPr>
         <p:spPr>
           <a:xfrm>
-            <a:off x="457200" y="2743200"/>
-            <a:ext cx="11274552" cy="1828800"/>
+            <a:off x="457200" y="228600"/>
+            <a:ext cx="11274552" cy="822960"/>
+          </a:xfrm>
+          <a:prstGeom prst="rect">
+            <a:avLst/>
+          </a:prstGeom>
+          <a:noFill/>
+        </p:spPr>
+        <p:txBody>
+          <a:bodyPr wrap="none">
+            <a:spAutoFit/>
+          </a:bodyPr>
+          <a:lstStyle/>
+          <a:p>
+            <a:pPr>
+              <a:defRPr sz="3200" b="1">
+                <a:solidFill>
+                  <a:srgbClr val="FFFFFF"/>
+                </a:solidFill>
+              </a:defRPr>
+            </a:pPr>
+            <a:r>
+              <a:t>Software 2.0：2017年 Karpathy 的预言</a:t>
+            </a:r>
+          </a:p>
+        </p:txBody>
+      </p:sp>
+      <p:sp>
+        <p:nvSpPr>
+          <p:cNvPr id="5" name="TextBox 4"/>
+          <p:cNvSpPr txBox="1"/>
+          <p:nvPr/>
+        </p:nvSpPr>
+        <p:spPr>
+          <a:xfrm>
+            <a:off x="640080" y="1371600"/>
+            <a:ext cx="10972800" cy="5029200"/>
           </a:xfrm>
           <a:prstGeom prst="rect">
             <a:avLst/>
@@ -3867,15 +4950,63 @@
           </a:bodyPr>
           <a:lstStyle/>
           <a:p>
-            <a:pPr algn="ctr">
-              <a:defRPr sz="5000" i="0">
-                <a:solidFill>
-                  <a:srgbClr val="FFFFFF"/>
-                </a:solidFill>
-              </a:defRPr>
-            </a:pPr>
-            <a:r>
-              <a:t>🔮  下篇：六大类 21 个核心设计模式</a:t>
+            <a:pPr>
+              <a:spcAft>
+                <a:spcPts val="1400"/>
+              </a:spcAft>
+              <a:defRPr sz="2100" b="0">
+                <a:solidFill>
+                  <a:srgbClr val="1A1A2E"/>
+                </a:solidFill>
+              </a:defRPr>
+            </a:pPr>
+            <a:r>
+              <a:t>• 2017年 Andrej Karpathy 提出：此前软件工程致力于消除不确定性；此后，软件工程开始学会利用不确定性</a:t>
+            </a:r>
+          </a:p>
+          <a:p>
+            <a:pPr>
+              <a:spcAft>
+                <a:spcPts val="1400"/>
+              </a:spcAft>
+              <a:defRPr sz="2100" b="1">
+                <a:solidFill>
+                  <a:srgbClr val="553C9A"/>
+                </a:solidFill>
+              </a:defRPr>
+            </a:pPr>
+            <a:r>
+              <a:t>• 开发者角色转变：「建筑师」（精确控制每行逻辑）→「园丁」（提供土壤和栅栏）</a:t>
+            </a:r>
+          </a:p>
+          <a:p>
+            <a:pPr>
+              <a:spcAft>
+                <a:spcPts val="1400"/>
+              </a:spcAft>
+              <a:defRPr sz="2100" b="0">
+                <a:solidFill>
+                  <a:srgbClr val="1A1A2E"/>
+                </a:solidFill>
+              </a:defRPr>
+            </a:pPr>
+            <a:r>
+              <a:t>• 逻辑来源：人类写 if-else → 模型从海量数据中自行「涌现」</a:t>
+            </a:r>
+          </a:p>
+          <a:p>
+            <a:pPr>
+              <a:spcAft>
+                <a:spcPts val="1400"/>
+              </a:spcAft>
+              <a:defRPr sz="2100" b="0">
+                <a:solidFill>
+                  <a:srgbClr val="1A1A2E"/>
+                </a:solidFill>
+              </a:defRPr>
+            </a:pPr>
+            <a:r>
+              <a:t>• MLOps：为 AgentOps 铺路——当代码演变为数据（模型权重），DevOps 工具链力不从心</a:t>
             </a:r>
           </a:p>
         </p:txBody>
@@ -3956,7 +5087,7 @@
             <a:avLst/>
           </a:prstGeom>
           <a:solidFill>
-            <a:srgbClr val="1A1A2E"/>
+            <a:srgbClr val="553C9A"/>
           </a:solidFill>
           <a:ln>
             <a:noFill/>
@@ -3993,7 +5124,7 @@
         <p:spPr>
           <a:xfrm>
             <a:off x="457200" y="228600"/>
-            <a:ext cx="11274552" cy="731520"/>
+            <a:ext cx="11274552" cy="822960"/>
           </a:xfrm>
           <a:prstGeom prst="rect">
             <a:avLst/>
@@ -4014,7 +5145,7 @@
               </a:defRPr>
             </a:pPr>
             <a:r>
-              <a:t>完整 Agent = 感知 + 记忆 + 推理 + 行动 + 反思 + 协作</a:t>
+              <a:t>范式迁移总览：三大技术演进为 Agent 奠定基石</a:t>
             </a:r>
           </a:p>
         </p:txBody>
@@ -4027,8 +5158,8 @@
         </p:nvSpPr>
         <p:spPr>
           <a:xfrm>
-            <a:off x="731520" y="1371600"/>
-            <a:ext cx="1650492" cy="4754880"/>
+            <a:off x="640080" y="1463040"/>
+            <a:ext cx="3453383" cy="1417320"/>
           </a:xfrm>
           <a:prstGeom prst="roundRect">
             <a:avLst/>
@@ -4070,8 +5201,43 @@
         </p:nvSpPr>
         <p:spPr>
           <a:xfrm>
-            <a:off x="731520" y="1463040"/>
-            <a:ext cx="1604772" cy="822960"/>
+            <a:off x="640080" y="1536192"/>
+            <a:ext cx="3361944" cy="365760"/>
+          </a:xfrm>
+          <a:prstGeom prst="rect">
+            <a:avLst/>
+          </a:prstGeom>
+          <a:noFill/>
+        </p:spPr>
+        <p:txBody>
+          <a:bodyPr wrap="none">
+            <a:spAutoFit/>
+          </a:bodyPr>
+          <a:lstStyle/>
+          <a:p>
+            <a:pPr>
+              <a:defRPr sz="1400" b="1">
+                <a:solidFill>
+                  <a:srgbClr val="553C9A"/>
+                </a:solidFill>
+              </a:defRPr>
+            </a:pPr>
+            <a:r>
+              <a:t>⚡ 函数与流</a:t>
+            </a:r>
+          </a:p>
+        </p:txBody>
+      </p:sp>
+      <p:sp>
+        <p:nvSpPr>
+          <p:cNvPr id="7" name="TextBox 6"/>
+          <p:cNvSpPr txBox="1"/>
+          <p:nvPr/>
+        </p:nvSpPr>
+        <p:spPr>
+          <a:xfrm>
+            <a:off x="640080" y="1920240"/>
+            <a:ext cx="3361944" cy="1005840"/>
           </a:xfrm>
           <a:prstGeom prst="rect">
             <a:avLst/>
@@ -4085,77 +5251,22 @@
           <a:lstStyle/>
           <a:p>
             <a:pPr>
-              <a:defRPr sz="1500" b="1">
-                <a:solidFill>
-                  <a:srgbClr val="553C9A"/>
-                </a:solidFill>
-              </a:defRPr>
-            </a:pPr>
-            <a:r>
-              <a:t>👁️ 感知</a:t>
+              <a:defRPr sz="1100">
+                <a:solidFill>
+                  <a:srgbClr val="A0AEC0"/>
+                </a:solidFill>
+              </a:defRPr>
+            </a:pPr>
+            <a:r>
+              <a:t>使软件契合 AI 的思考节奏</a:t>
             </a:r>
             <a:br/>
             <a:r>
-              <a:t>看世界</a:t>
-            </a:r>
-          </a:p>
-        </p:txBody>
-      </p:sp>
-      <p:sp>
-        <p:nvSpPr>
-          <p:cNvPr id="7" name="TextBox 6"/>
-          <p:cNvSpPr txBox="1"/>
-          <p:nvPr/>
-        </p:nvSpPr>
-        <p:spPr>
-          <a:xfrm>
-            <a:off x="731520" y="2377440"/>
-            <a:ext cx="1604772" cy="3657600"/>
-          </a:xfrm>
-          <a:prstGeom prst="rect">
-            <a:avLst/>
-          </a:prstGeom>
-          <a:noFill/>
-        </p:spPr>
-        <p:txBody>
-          <a:bodyPr wrap="square">
-            <a:spAutoFit/>
-          </a:bodyPr>
-          <a:lstStyle/>
-          <a:p>
-            <a:pPr algn="ctr">
-              <a:defRPr sz="1200">
-                <a:solidFill>
-                  <a:srgbClr val="A0AEC0"/>
-                </a:solidFill>
-              </a:defRPr>
-            </a:pPr>
-            <a:r>
-              <a:t>注意力聚焦</a:t>
-            </a:r>
-          </a:p>
-          <a:p>
-            <a:pPr algn="ctr">
-              <a:defRPr sz="1200">
-                <a:solidFill>
-                  <a:srgbClr val="A0AEC0"/>
-                </a:solidFill>
-              </a:defRPr>
-            </a:pPr>
-            <a:r>
-              <a:t>多模态融合</a:t>
-            </a:r>
-          </a:p>
-          <a:p>
-            <a:pPr algn="ctr">
-              <a:defRPr sz="1200">
-                <a:solidFill>
-                  <a:srgbClr val="A0AEC0"/>
-                </a:solidFill>
-              </a:defRPr>
-            </a:pPr>
-            <a:r>
-              <a:t>主动感知</a:t>
+              <a:t>LLM = 无状态纯函数</a:t>
+            </a:r>
+            <a:br/>
+            <a:r>
+              <a:t>背压机制保护协作</a:t>
             </a:r>
           </a:p>
         </p:txBody>
@@ -4168,8 +5279,8 @@
         </p:nvSpPr>
         <p:spPr>
           <a:xfrm>
-            <a:off x="2519172" y="1371600"/>
-            <a:ext cx="1650492" cy="4754880"/>
+            <a:off x="4276344" y="1463040"/>
+            <a:ext cx="3453383" cy="1417320"/>
           </a:xfrm>
           <a:prstGeom prst="roundRect">
             <a:avLst/>
@@ -4211,8 +5322,43 @@
         </p:nvSpPr>
         <p:spPr>
           <a:xfrm>
-            <a:off x="2519172" y="1463040"/>
-            <a:ext cx="1604772" cy="822960"/>
+            <a:off x="4276344" y="1536192"/>
+            <a:ext cx="3361944" cy="365760"/>
+          </a:xfrm>
+          <a:prstGeom prst="rect">
+            <a:avLst/>
+          </a:prstGeom>
+          <a:noFill/>
+        </p:spPr>
+        <p:txBody>
+          <a:bodyPr wrap="none">
+            <a:spAutoFit/>
+          </a:bodyPr>
+          <a:lstStyle/>
+          <a:p>
+            <a:pPr>
+              <a:defRPr sz="1400" b="1">
+                <a:solidFill>
+                  <a:srgbClr val="553C9A"/>
+                </a:solidFill>
+              </a:defRPr>
+            </a:pPr>
+            <a:r>
+              <a:t>🔌 分布式 + Serverless</a:t>
+            </a:r>
+          </a:p>
+        </p:txBody>
+      </p:sp>
+      <p:sp>
+        <p:nvSpPr>
+          <p:cNvPr id="10" name="TextBox 9"/>
+          <p:cNvSpPr txBox="1"/>
+          <p:nvPr/>
+        </p:nvSpPr>
+        <p:spPr>
+          <a:xfrm>
+            <a:off x="4276344" y="1920240"/>
+            <a:ext cx="3361944" cy="1005840"/>
           </a:xfrm>
           <a:prstGeom prst="rect">
             <a:avLst/>
@@ -4226,77 +5372,22 @@
           <a:lstStyle/>
           <a:p>
             <a:pPr>
-              <a:defRPr sz="1500" b="1">
-                <a:solidFill>
-                  <a:srgbClr val="553C9A"/>
-                </a:solidFill>
-              </a:defRPr>
-            </a:pPr>
-            <a:r>
-              <a:t>🧠 记忆</a:t>
+              <a:defRPr sz="1100">
+                <a:solidFill>
+                  <a:srgbClr val="A0AEC0"/>
+                </a:solidFill>
+              </a:defRPr>
+            </a:pPr>
+            <a:r>
+              <a:t>为 Agent 提供无限延展的「手脚」</a:t>
             </a:r>
             <a:br/>
             <a:r>
-              <a:t>连接时间</a:t>
-            </a:r>
-          </a:p>
-        </p:txBody>
-      </p:sp>
-      <p:sp>
-        <p:nvSpPr>
-          <p:cNvPr id="10" name="TextBox 9"/>
-          <p:cNvSpPr txBox="1"/>
-          <p:nvPr/>
-        </p:nvSpPr>
-        <p:spPr>
-          <a:xfrm>
-            <a:off x="2519172" y="2377440"/>
-            <a:ext cx="1604772" cy="3657600"/>
-          </a:xfrm>
-          <a:prstGeom prst="rect">
-            <a:avLst/>
-          </a:prstGeom>
-          <a:noFill/>
-        </p:spPr>
-        <p:txBody>
-          <a:bodyPr wrap="square">
-            <a:spAutoFit/>
-          </a:bodyPr>
-          <a:lstStyle/>
-          <a:p>
-            <a:pPr algn="ctr">
-              <a:defRPr sz="1200">
-                <a:solidFill>
-                  <a:srgbClr val="A0AEC0"/>
-                </a:solidFill>
-              </a:defRPr>
-            </a:pPr>
-            <a:r>
-              <a:t>分层记忆</a:t>
-            </a:r>
-          </a:p>
-          <a:p>
-            <a:pPr algn="ctr">
-              <a:defRPr sz="1200">
-                <a:solidFill>
-                  <a:srgbClr val="A0AEC0"/>
-                </a:solidFill>
-              </a:defRPr>
-            </a:pPr>
-            <a:r>
-              <a:t>RAG</a:t>
-            </a:r>
-          </a:p>
-          <a:p>
-            <a:pPr algn="ctr">
-              <a:defRPr sz="1200">
-                <a:solidFill>
-                  <a:srgbClr val="A0AEC0"/>
-                </a:solidFill>
-              </a:defRPr>
-            </a:pPr>
-            <a:r>
-              <a:t>情节记忆</a:t>
+              <a:t>微服务 API 铺平工具调用网络</a:t>
+            </a:r>
+            <a:br/>
+            <a:r>
+              <a:t>Serverless = 沉睡的技能</a:t>
             </a:r>
           </a:p>
         </p:txBody>
@@ -4309,8 +5400,8 @@
         </p:nvSpPr>
         <p:spPr>
           <a:xfrm>
-            <a:off x="4306824" y="1371600"/>
-            <a:ext cx="1650492" cy="4754880"/>
+            <a:off x="7912607" y="1463040"/>
+            <a:ext cx="3453383" cy="1417320"/>
           </a:xfrm>
           <a:prstGeom prst="roundRect">
             <a:avLst/>
@@ -4352,8 +5443,43 @@
         </p:nvSpPr>
         <p:spPr>
           <a:xfrm>
-            <a:off x="4306824" y="1463040"/>
-            <a:ext cx="1604772" cy="822960"/>
+            <a:off x="7912607" y="1536192"/>
+            <a:ext cx="3361944" cy="365760"/>
+          </a:xfrm>
+          <a:prstGeom prst="rect">
+            <a:avLst/>
+          </a:prstGeom>
+          <a:noFill/>
+        </p:spPr>
+        <p:txBody>
+          <a:bodyPr wrap="none">
+            <a:spAutoFit/>
+          </a:bodyPr>
+          <a:lstStyle/>
+          <a:p>
+            <a:pPr>
+              <a:defRPr sz="1400" b="1">
+                <a:solidFill>
+                  <a:srgbClr val="553C9A"/>
+                </a:solidFill>
+              </a:defRPr>
+            </a:pPr>
+            <a:r>
+              <a:t>🧠 软件 2.0</a:t>
+            </a:r>
+          </a:p>
+        </p:txBody>
+      </p:sp>
+      <p:sp>
+        <p:nvSpPr>
+          <p:cNvPr id="13" name="TextBox 12"/>
+          <p:cNvSpPr txBox="1"/>
+          <p:nvPr/>
+        </p:nvSpPr>
+        <p:spPr>
+          <a:xfrm>
+            <a:off x="7912607" y="1920240"/>
+            <a:ext cx="3361944" cy="1005840"/>
           </a:xfrm>
           <a:prstGeom prst="rect">
             <a:avLst/>
@@ -4367,500 +5493,22 @@
           <a:lstStyle/>
           <a:p>
             <a:pPr>
-              <a:defRPr sz="1500" b="1">
-                <a:solidFill>
-                  <a:srgbClr val="553C9A"/>
-                </a:solidFill>
-              </a:defRPr>
-            </a:pPr>
-            <a:r>
-              <a:t>⚙️ 推理</a:t>
+              <a:defRPr sz="1100">
+                <a:solidFill>
+                  <a:srgbClr val="A0AEC0"/>
+                </a:solidFill>
+              </a:defRPr>
+            </a:pPr>
+            <a:r>
+              <a:t>在不确定性中建立对确定性的信心</a:t>
             </a:r>
             <a:br/>
             <a:r>
-              <a:t>编织逻辑</a:t>
-            </a:r>
-          </a:p>
-        </p:txBody>
-      </p:sp>
-      <p:sp>
-        <p:nvSpPr>
-          <p:cNvPr id="13" name="TextBox 12"/>
-          <p:cNvSpPr txBox="1"/>
-          <p:nvPr/>
-        </p:nvSpPr>
-        <p:spPr>
-          <a:xfrm>
-            <a:off x="4306824" y="2377440"/>
-            <a:ext cx="1604772" cy="3657600"/>
-          </a:xfrm>
-          <a:prstGeom prst="rect">
-            <a:avLst/>
-          </a:prstGeom>
-          <a:noFill/>
-        </p:spPr>
-        <p:txBody>
-          <a:bodyPr wrap="square">
-            <a:spAutoFit/>
-          </a:bodyPr>
-          <a:lstStyle/>
-          <a:p>
-            <a:pPr algn="ctr">
-              <a:defRPr sz="1200">
-                <a:solidFill>
-                  <a:srgbClr val="A0AEC0"/>
-                </a:solidFill>
-              </a:defRPr>
-            </a:pPr>
-            <a:r>
-              <a:t>思维链</a:t>
-            </a:r>
-          </a:p>
-          <a:p>
-            <a:pPr algn="ctr">
-              <a:defRPr sz="1200">
-                <a:solidFill>
-                  <a:srgbClr val="A0AEC0"/>
-                </a:solidFill>
-              </a:defRPr>
-            </a:pPr>
-            <a:r>
-              <a:t>思维树</a:t>
-            </a:r>
-          </a:p>
-          <a:p>
-            <a:pPr algn="ctr">
-              <a:defRPr sz="1200">
-                <a:solidFill>
-                  <a:srgbClr val="A0AEC0"/>
-                </a:solidFill>
-              </a:defRPr>
-            </a:pPr>
-            <a:r>
-              <a:t>思维图</a:t>
-            </a:r>
-          </a:p>
-        </p:txBody>
-      </p:sp>
-      <p:sp>
-        <p:nvSpPr>
-          <p:cNvPr id="14" name="Rounded Rectangle 13"/>
-          <p:cNvSpPr/>
-          <p:nvPr/>
-        </p:nvSpPr>
-        <p:spPr>
-          <a:xfrm>
-            <a:off x="6094476" y="1371600"/>
-            <a:ext cx="1650492" cy="4754880"/>
-          </a:xfrm>
-          <a:prstGeom prst="roundRect">
-            <a:avLst/>
-          </a:prstGeom>
-          <a:solidFill>
-            <a:srgbClr val="1A1A2E"/>
-          </a:solidFill>
-          <a:ln>
-            <a:noFill/>
-          </a:ln>
-        </p:spPr>
-        <p:style>
-          <a:lnRef idx="1">
-            <a:schemeClr val="accent1"/>
-          </a:lnRef>
-          <a:fillRef idx="3">
-            <a:schemeClr val="accent1"/>
-          </a:fillRef>
-          <a:effectRef idx="2">
-            <a:schemeClr val="accent1"/>
-          </a:effectRef>
-          <a:fontRef idx="minor">
-            <a:schemeClr val="lt1"/>
-          </a:fontRef>
-        </p:style>
-        <p:txBody>
-          <a:bodyPr rtlCol="0" anchor="ctr"/>
-          <a:lstStyle/>
-          <a:p>
-            <a:pPr algn="ctr"/>
-          </a:p>
-        </p:txBody>
-      </p:sp>
-      <p:sp>
-        <p:nvSpPr>
-          <p:cNvPr id="15" name="TextBox 14"/>
-          <p:cNvSpPr txBox="1"/>
-          <p:nvPr/>
-        </p:nvSpPr>
-        <p:spPr>
-          <a:xfrm>
-            <a:off x="6094476" y="1463040"/>
-            <a:ext cx="1604772" cy="822960"/>
-          </a:xfrm>
-          <a:prstGeom prst="rect">
-            <a:avLst/>
-          </a:prstGeom>
-          <a:noFill/>
-        </p:spPr>
-        <p:txBody>
-          <a:bodyPr wrap="square">
-            <a:spAutoFit/>
-          </a:bodyPr>
-          <a:lstStyle/>
-          <a:p>
-            <a:pPr>
-              <a:defRPr sz="1500" b="1">
-                <a:solidFill>
-                  <a:srgbClr val="553C9A"/>
-                </a:solidFill>
-              </a:defRPr>
-            </a:pPr>
-            <a:r>
-              <a:t>💪 行动</a:t>
+              <a:t>从消除不确定到利用不确定</a:t>
             </a:r>
             <a:br/>
             <a:r>
-              <a:t>付诸实施</a:t>
-            </a:r>
-          </a:p>
-        </p:txBody>
-      </p:sp>
-      <p:sp>
-        <p:nvSpPr>
-          <p:cNvPr id="16" name="TextBox 15"/>
-          <p:cNvSpPr txBox="1"/>
-          <p:nvPr/>
-        </p:nvSpPr>
-        <p:spPr>
-          <a:xfrm>
-            <a:off x="6094476" y="2377440"/>
-            <a:ext cx="1604772" cy="3657600"/>
-          </a:xfrm>
-          <a:prstGeom prst="rect">
-            <a:avLst/>
-          </a:prstGeom>
-          <a:noFill/>
-        </p:spPr>
-        <p:txBody>
-          <a:bodyPr wrap="square">
-            <a:spAutoFit/>
-          </a:bodyPr>
-          <a:lstStyle/>
-          <a:p>
-            <a:pPr algn="ctr">
-              <a:defRPr sz="1200">
-                <a:solidFill>
-                  <a:srgbClr val="A0AEC0"/>
-                </a:solidFill>
-              </a:defRPr>
-            </a:pPr>
-            <a:r>
-              <a:t>ReAct</a:t>
-            </a:r>
-          </a:p>
-          <a:p>
-            <a:pPr algn="ctr">
-              <a:defRPr sz="1200">
-                <a:solidFill>
-                  <a:srgbClr val="A0AEC0"/>
-                </a:solidFill>
-              </a:defRPr>
-            </a:pPr>
-            <a:r>
-              <a:t>规划-执行</a:t>
-            </a:r>
-          </a:p>
-          <a:p>
-            <a:pPr algn="ctr">
-              <a:defRPr sz="1200">
-                <a:solidFill>
-                  <a:srgbClr val="A0AEC0"/>
-                </a:solidFill>
-              </a:defRPr>
-            </a:pPr>
-            <a:r>
-              <a:t>工具编排</a:t>
-            </a:r>
-          </a:p>
-        </p:txBody>
-      </p:sp>
-      <p:sp>
-        <p:nvSpPr>
-          <p:cNvPr id="17" name="Rounded Rectangle 16"/>
-          <p:cNvSpPr/>
-          <p:nvPr/>
-        </p:nvSpPr>
-        <p:spPr>
-          <a:xfrm>
-            <a:off x="7882128" y="1371600"/>
-            <a:ext cx="1650492" cy="4754880"/>
-          </a:xfrm>
-          <a:prstGeom prst="roundRect">
-            <a:avLst/>
-          </a:prstGeom>
-          <a:solidFill>
-            <a:srgbClr val="1A1A2E"/>
-          </a:solidFill>
-          <a:ln>
-            <a:noFill/>
-          </a:ln>
-        </p:spPr>
-        <p:style>
-          <a:lnRef idx="1">
-            <a:schemeClr val="accent1"/>
-          </a:lnRef>
-          <a:fillRef idx="3">
-            <a:schemeClr val="accent1"/>
-          </a:fillRef>
-          <a:effectRef idx="2">
-            <a:schemeClr val="accent1"/>
-          </a:effectRef>
-          <a:fontRef idx="minor">
-            <a:schemeClr val="lt1"/>
-          </a:fontRef>
-        </p:style>
-        <p:txBody>
-          <a:bodyPr rtlCol="0" anchor="ctr"/>
-          <a:lstStyle/>
-          <a:p>
-            <a:pPr algn="ctr"/>
-          </a:p>
-        </p:txBody>
-      </p:sp>
-      <p:sp>
-        <p:nvSpPr>
-          <p:cNvPr id="18" name="TextBox 17"/>
-          <p:cNvSpPr txBox="1"/>
-          <p:nvPr/>
-        </p:nvSpPr>
-        <p:spPr>
-          <a:xfrm>
-            <a:off x="7882128" y="1463040"/>
-            <a:ext cx="1604772" cy="822960"/>
-          </a:xfrm>
-          <a:prstGeom prst="rect">
-            <a:avLst/>
-          </a:prstGeom>
-          <a:noFill/>
-        </p:spPr>
-        <p:txBody>
-          <a:bodyPr wrap="square">
-            <a:spAutoFit/>
-          </a:bodyPr>
-          <a:lstStyle/>
-          <a:p>
-            <a:pPr>
-              <a:defRPr sz="1500" b="1">
-                <a:solidFill>
-                  <a:srgbClr val="553C9A"/>
-                </a:solidFill>
-              </a:defRPr>
-            </a:pPr>
-            <a:r>
-              <a:t>🔮 反思</a:t>
-            </a:r>
-            <a:br/>
-            <a:r>
-              <a:t>判断对错</a:t>
-            </a:r>
-          </a:p>
-        </p:txBody>
-      </p:sp>
-      <p:sp>
-        <p:nvSpPr>
-          <p:cNvPr id="19" name="TextBox 18"/>
-          <p:cNvSpPr txBox="1"/>
-          <p:nvPr/>
-        </p:nvSpPr>
-        <p:spPr>
-          <a:xfrm>
-            <a:off x="7882128" y="2377440"/>
-            <a:ext cx="1604772" cy="3657600"/>
-          </a:xfrm>
-          <a:prstGeom prst="rect">
-            <a:avLst/>
-          </a:prstGeom>
-          <a:noFill/>
-        </p:spPr>
-        <p:txBody>
-          <a:bodyPr wrap="square">
-            <a:spAutoFit/>
-          </a:bodyPr>
-          <a:lstStyle/>
-          <a:p>
-            <a:pPr algn="ctr">
-              <a:defRPr sz="1200">
-                <a:solidFill>
-                  <a:srgbClr val="A0AEC0"/>
-                </a:solidFill>
-              </a:defRPr>
-            </a:pPr>
-            <a:r>
-              <a:t>自我修正</a:t>
-            </a:r>
-          </a:p>
-          <a:p>
-            <a:pPr algn="ctr">
-              <a:defRPr sz="1200">
-                <a:solidFill>
-                  <a:srgbClr val="A0AEC0"/>
-                </a:solidFill>
-              </a:defRPr>
-            </a:pPr>
-            <a:r>
-              <a:t>反思记忆</a:t>
-            </a:r>
-          </a:p>
-          <a:p>
-            <a:pPr algn="ctr">
-              <a:defRPr sz="1200">
-                <a:solidFill>
-                  <a:srgbClr val="A0AEC0"/>
-                </a:solidFill>
-              </a:defRPr>
-            </a:pPr>
-            <a:r>
-              <a:t>元学习</a:t>
-            </a:r>
-          </a:p>
-        </p:txBody>
-      </p:sp>
-      <p:sp>
-        <p:nvSpPr>
-          <p:cNvPr id="20" name="Rounded Rectangle 19"/>
-          <p:cNvSpPr/>
-          <p:nvPr/>
-        </p:nvSpPr>
-        <p:spPr>
-          <a:xfrm>
-            <a:off x="9669780" y="1371600"/>
-            <a:ext cx="1650492" cy="4754880"/>
-          </a:xfrm>
-          <a:prstGeom prst="roundRect">
-            <a:avLst/>
-          </a:prstGeom>
-          <a:solidFill>
-            <a:srgbClr val="1A1A2E"/>
-          </a:solidFill>
-          <a:ln>
-            <a:noFill/>
-          </a:ln>
-        </p:spPr>
-        <p:style>
-          <a:lnRef idx="1">
-            <a:schemeClr val="accent1"/>
-          </a:lnRef>
-          <a:fillRef idx="3">
-            <a:schemeClr val="accent1"/>
-          </a:fillRef>
-          <a:effectRef idx="2">
-            <a:schemeClr val="accent1"/>
-          </a:effectRef>
-          <a:fontRef idx="minor">
-            <a:schemeClr val="lt1"/>
-          </a:fontRef>
-        </p:style>
-        <p:txBody>
-          <a:bodyPr rtlCol="0" anchor="ctr"/>
-          <a:lstStyle/>
-          <a:p>
-            <a:pPr algn="ctr"/>
-          </a:p>
-        </p:txBody>
-      </p:sp>
-      <p:sp>
-        <p:nvSpPr>
-          <p:cNvPr id="21" name="TextBox 20"/>
-          <p:cNvSpPr txBox="1"/>
-          <p:nvPr/>
-        </p:nvSpPr>
-        <p:spPr>
-          <a:xfrm>
-            <a:off x="9669780" y="1463040"/>
-            <a:ext cx="1604772" cy="822960"/>
-          </a:xfrm>
-          <a:prstGeom prst="rect">
-            <a:avLst/>
-          </a:prstGeom>
-          <a:noFill/>
-        </p:spPr>
-        <p:txBody>
-          <a:bodyPr wrap="square">
-            <a:spAutoFit/>
-          </a:bodyPr>
-          <a:lstStyle/>
-          <a:p>
-            <a:pPr>
-              <a:defRPr sz="1500" b="1">
-                <a:solidFill>
-                  <a:srgbClr val="553C9A"/>
-                </a:solidFill>
-              </a:defRPr>
-            </a:pPr>
-            <a:r>
-              <a:t>🤝 协作</a:t>
-            </a:r>
-            <a:br/>
-            <a:r>
-              <a:t>共同进化</a:t>
-            </a:r>
-          </a:p>
-        </p:txBody>
-      </p:sp>
-      <p:sp>
-        <p:nvSpPr>
-          <p:cNvPr id="22" name="TextBox 21"/>
-          <p:cNvSpPr txBox="1"/>
-          <p:nvPr/>
-        </p:nvSpPr>
-        <p:spPr>
-          <a:xfrm>
-            <a:off x="9669780" y="2377440"/>
-            <a:ext cx="1604772" cy="3657600"/>
-          </a:xfrm>
-          <a:prstGeom prst="rect">
-            <a:avLst/>
-          </a:prstGeom>
-          <a:noFill/>
-        </p:spPr>
-        <p:txBody>
-          <a:bodyPr wrap="square">
-            <a:spAutoFit/>
-          </a:bodyPr>
-          <a:lstStyle/>
-          <a:p>
-            <a:pPr algn="ctr">
-              <a:defRPr sz="1200">
-                <a:solidFill>
-                  <a:srgbClr val="A0AEC0"/>
-                </a:solidFill>
-              </a:defRPr>
-            </a:pPr>
-            <a:r>
-              <a:t>辩论</a:t>
-            </a:r>
-          </a:p>
-          <a:p>
-            <a:pPr algn="ctr">
-              <a:defRPr sz="1200">
-                <a:solidFill>
-                  <a:srgbClr val="A0AEC0"/>
-                </a:solidFill>
-              </a:defRPr>
-            </a:pPr>
-            <a:r>
-              <a:t>委托</a:t>
-            </a:r>
-          </a:p>
-          <a:p>
-            <a:pPr algn="ctr">
-              <a:defRPr sz="1200">
-                <a:solidFill>
-                  <a:srgbClr val="A0AEC0"/>
-                </a:solidFill>
-              </a:defRPr>
-            </a:pPr>
-            <a:r>
-              <a:t>群体</a:t>
+              <a:t>园丁 vs 建筑师</a:t>
             </a:r>
           </a:p>
         </p:txBody>
@@ -4978,7 +5626,7 @@
         <p:spPr>
           <a:xfrm>
             <a:off x="457200" y="228600"/>
-            <a:ext cx="11274552" cy="731520"/>
+            <a:ext cx="11274552" cy="822960"/>
           </a:xfrm>
           <a:prstGeom prst="rect">
             <a:avLst/>
@@ -4999,7 +5647,7 @@
               </a:defRPr>
             </a:pPr>
             <a:r>
-              <a:t>感知模式：看世界</a:t>
+              <a:t>Agent 的本质：从工具到伙伴</a:t>
             </a:r>
           </a:p>
         </p:txBody>
@@ -5025,6 +5673,21 @@
             <a:spAutoFit/>
           </a:bodyPr>
           <a:lstStyle/>
+          <a:p>
+            <a:pPr>
+              <a:spcAft>
+                <a:spcPts val="1400"/>
+              </a:spcAft>
+              <a:defRPr sz="2100" b="0">
+                <a:solidFill>
+                  <a:srgbClr val="1A1A2E"/>
+                </a:solidFill>
+              </a:defRPr>
+            </a:pPr>
+            <a:r>
+              <a:t>• 交互原语升维：命令与控制 → 意图与协作</a:t>
+            </a:r>
+          </a:p>
           <a:p>
             <a:pPr>
               <a:spcAft>
@@ -5037,7 +5700,22 @@
               </a:defRPr>
             </a:pPr>
             <a:r>
-              <a:t>• 注意力聚焦 — 构建认知漏斗，用最低 Token 成本换取最高上下文质量</a:t>
+              <a:t>• Agent =「模糊翻译器」：人类模糊的自然语言 → 机器精确的 API 调用（语义→目的→上下文→风险）</a:t>
+            </a:r>
+          </a:p>
+          <a:p>
+            <a:pPr>
+              <a:spcAft>
+                <a:spcPts val="1400"/>
+              </a:spcAft>
+              <a:defRPr sz="2100" b="1">
+                <a:solidFill>
+                  <a:srgbClr val="553C9A"/>
+                </a:solidFill>
+              </a:defRPr>
+            </a:pPr>
+            <a:r>
+              <a:t>• 记忆与身份：Agent 在对话之间延续「身份」，逐渐形成对用户的深入理解</a:t>
             </a:r>
           </a:p>
           <a:p>
@@ -5052,22 +5730,7 @@
               </a:defRPr>
             </a:pPr>
             <a:r>
-              <a:t>• 多模态融合 — 建立统一语义场，从「拼接式」向「原生式」演进</a:t>
-            </a:r>
-          </a:p>
-          <a:p>
-            <a:pPr>
-              <a:spcAft>
-                <a:spcPts val="1400"/>
-              </a:spcAft>
-              <a:defRPr sz="2100" b="1">
-                <a:solidFill>
-                  <a:srgbClr val="553C9A"/>
-                </a:solidFill>
-              </a:defRPr>
-            </a:pPr>
-            <a:r>
-              <a:t>• 主动感知 — Agent 从「被动的答题者」转变为「主动的调查员」</a:t>
+              <a:t>• 上下文工程：「上下文就是 Agent 的整个世界」，失败往往源于上下文有误</a:t>
             </a:r>
           </a:p>
           <a:p>
@@ -5082,22 +5745,7 @@
               </a:defRPr>
             </a:pPr>
             <a:r>
-              <a:t>• 本质：不是「看到所有」，而是「看到关键」并「主动寻找未知」</a:t>
-            </a:r>
-          </a:p>
-          <a:p>
-            <a:pPr>
-              <a:spcAft>
-                <a:spcPts val="1400"/>
-              </a:spcAft>
-              <a:defRPr sz="2100" b="0">
-                <a:solidFill>
-                  <a:srgbClr val="1A1A2E"/>
-                </a:solidFill>
-              </a:defRPr>
-            </a:pPr>
-            <a:r>
-              <a:t>• "不要以它能记住多少为荣，而要以它能精简多少为傲。"</a:t>
+              <a:t>• 任务分解（Task Decomposition）：把「目标」变为「计划」的能力——衡量 Agent 智能化水平的关键</a:t>
             </a:r>
           </a:p>
         </p:txBody>
@@ -5215,7 +5863,7 @@
         <p:spPr>
           <a:xfrm>
             <a:off x="457200" y="228600"/>
-            <a:ext cx="11274552" cy="731520"/>
+            <a:ext cx="11274552" cy="822960"/>
           </a:xfrm>
           <a:prstGeom prst="rect">
             <a:avLst/>
@@ -5236,7 +5884,7 @@
               </a:defRPr>
             </a:pPr>
             <a:r>
-              <a:t>记忆模式：连接时间</a:t>
+              <a:t>ReAct：Agent 行动的标准心智模型</a:t>
             </a:r>
           </a:p>
         </p:txBody>
@@ -5274,7 +5922,7 @@
               </a:defRPr>
             </a:pPr>
             <a:r>
-              <a:t>• 分层记忆 — L1工作记忆(Context Window) / L2短期缓存(摘要) / L3长期存储(Vector DB+知识图谱)</a:t>
+              <a:t>• ReAct = Thought → Action → Observation — 推理与行动交织的循环</a:t>
             </a:r>
           </a:p>
           <a:p>
@@ -5289,22 +5937,7 @@
               </a:defRPr>
             </a:pPr>
             <a:r>
-              <a:t>• RAG — 将「推理能力」(CPU) 与「知识存储」(磁盘) 解耦，极低成本保持时效性</a:t>
-            </a:r>
-          </a:p>
-          <a:p>
-            <a:pPr>
-              <a:spcAft>
-                <a:spcPts val="1400"/>
-              </a:spcAft>
-              <a:defRPr sz="2100" b="1">
-                <a:solidFill>
-                  <a:srgbClr val="553C9A"/>
-                </a:solidFill>
-              </a:defRPr>
-            </a:pPr>
-            <a:r>
-              <a:t>• 情节记忆 — 沉淀 Agent 自身交互产生的动态经验，Agent 不需要微调即可进化</a:t>
+              <a:t>• 看图规划（Thought）→ 采取行动（Action）→ 观察反馈（Observation）→ 循环往复</a:t>
             </a:r>
           </a:p>
           <a:p>
@@ -5319,7 +5952,7 @@
               </a:defRPr>
             </a:pPr>
             <a:r>
-              <a:t>• 两种流转：「溢出与巩固」(热→冷) + 「检索与唤醒」(冷→热)</a:t>
+              <a:t>• 核心价值：推理轨迹追踪中间决策，行动赋予探索环境获取外部信息的能力</a:t>
             </a:r>
           </a:p>
           <a:p>
@@ -5334,7 +5967,7 @@
               </a:defRPr>
             </a:pPr>
             <a:r>
-              <a:t>• "从上下文工程到 MaaS，记忆正从技巧升级为核心基础设施。"</a:t>
+              <a:t>• 这是 Agent 与传统程序的核心区别：输出不再是终点，而是环境改变的起点</a:t>
             </a:r>
           </a:p>
         </p:txBody>
@@ -5452,7 +6085,7 @@
         <p:spPr>
           <a:xfrm>
             <a:off x="457200" y="228600"/>
-            <a:ext cx="11274552" cy="731520"/>
+            <a:ext cx="11274552" cy="822960"/>
           </a:xfrm>
           <a:prstGeom prst="rect">
             <a:avLst/>
@@ -5473,7 +6106,7 @@
               </a:defRPr>
             </a:pPr>
             <a:r>
-              <a:t>推理模式：编织逻辑</a:t>
+              <a:t>MCP + A2A：双轨制协议</a:t>
             </a:r>
           </a:p>
         </p:txBody>
@@ -5499,6 +6132,21 @@
             <a:spAutoFit/>
           </a:bodyPr>
           <a:lstStyle/>
+          <a:p>
+            <a:pPr>
+              <a:spcAft>
+                <a:spcPts val="1400"/>
+              </a:spcAft>
+              <a:defRPr sz="2100" b="1">
+                <a:solidFill>
+                  <a:srgbClr val="553C9A"/>
+                </a:solidFill>
+              </a:defRPr>
+            </a:pPr>
+            <a:r>
+              <a:t>• MCP（Model Context Protocol）— AI 的 USB-C 接口：标准化 Agent 与工具/数据的连接</a:t>
+            </a:r>
+          </a:p>
           <a:p>
             <a:pPr>
               <a:spcAft>
@@ -5511,37 +6159,7 @@
               </a:defRPr>
             </a:pPr>
             <a:r>
-              <a:t>• System 1 / System 2：快直觉 vs 慢刻意，Agent 需要两者兼顾</a:t>
-            </a:r>
-          </a:p>
-          <a:p>
-            <a:pPr>
-              <a:spcAft>
-                <a:spcPts val="1400"/>
-              </a:spcAft>
-              <a:defRPr sz="2100" b="1">
-                <a:solidFill>
-                  <a:srgbClr val="553C9A"/>
-                </a:solidFill>
-              </a:defRPr>
-            </a:pPr>
-            <a:r>
-              <a:t>• 思维链(CoT) — 线性逐步推进，适合数学与逻辑推导（走钢丝）</a:t>
-            </a:r>
-          </a:p>
-          <a:p>
-            <a:pPr>
-              <a:spcAft>
-                <a:spcPts val="1400"/>
-              </a:spcAft>
-              <a:defRPr sz="2100" b="1">
-                <a:solidFill>
-                  <a:srgbClr val="553C9A"/>
-                </a:solidFill>
-              </a:defRPr>
-            </a:pPr>
-            <a:r>
-              <a:t>• 思维树(ToT) — 启发式搜索+剪枝回溯，适合多分支权衡（迷宫探路）</a:t>
+              <a:t>• A2A — Agent 之间的「对讲机协议」：多个 Agent 相互协作</a:t>
             </a:r>
           </a:p>
           <a:p>
@@ -5556,7 +6174,7 @@
               </a:defRPr>
             </a:pPr>
             <a:r>
-              <a:t>• 思维图(GoT) — 图结构编织+多轮迭代，适合复杂依赖整合（织布机）</a:t>
+              <a:t>• 工具(Tool) = Agent 的「手」— 原子化操作（执行SQL、发送HTTP）</a:t>
             </a:r>
           </a:p>
           <a:p>
@@ -5571,7 +6189,22 @@
               </a:defRPr>
             </a:pPr>
             <a:r>
-              <a:t>• "Agent 架构师应善于指挥整支认知乐团，而非迷信单一推理模式。"</a:t>
+              <a:t>• 技能(Skill) = Agent 的「技能书」— 工具 + 领域知识 + SOP</a:t>
+            </a:r>
+          </a:p>
+          <a:p>
+            <a:pPr>
+              <a:spcAft>
+                <a:spcPts val="1400"/>
+              </a:spcAft>
+              <a:defRPr sz="2100" b="0">
+                <a:solidFill>
+                  <a:srgbClr val="1A1A2E"/>
+                </a:solidFill>
+              </a:defRPr>
+            </a:pPr>
+            <a:r>
+              <a:t>• 编排器（Orchestrator）：当 Agent 数量增加，系统需要「大脑」维持秩序</a:t>
             </a:r>
           </a:p>
         </p:txBody>
@@ -5646,7 +6279,7 @@
         <p:spPr>
           <a:xfrm>
             <a:off x="0" y="0"/>
-            <a:ext cx="12188952" cy="1097280"/>
+            <a:ext cx="12188952" cy="137160"/>
           </a:xfrm>
           <a:prstGeom prst="rect">
             <a:avLst/>
@@ -5688,43 +6321,8 @@
         </p:nvSpPr>
         <p:spPr>
           <a:xfrm>
-            <a:off x="457200" y="228600"/>
-            <a:ext cx="11274552" cy="731520"/>
-          </a:xfrm>
-          <a:prstGeom prst="rect">
-            <a:avLst/>
-          </a:prstGeom>
-          <a:noFill/>
-        </p:spPr>
-        <p:txBody>
-          <a:bodyPr wrap="none">
-            <a:spAutoFit/>
-          </a:bodyPr>
-          <a:lstStyle/>
-          <a:p>
-            <a:pPr>
-              <a:defRPr sz="3200" b="1">
-                <a:solidFill>
-                  <a:srgbClr val="FFFFFF"/>
-                </a:solidFill>
-              </a:defRPr>
-            </a:pPr>
-            <a:r>
-              <a:t>行动模式：付诸实施</a:t>
-            </a:r>
-          </a:p>
-        </p:txBody>
-      </p:sp>
-      <p:sp>
-        <p:nvSpPr>
-          <p:cNvPr id="5" name="TextBox 4"/>
-          <p:cNvSpPr txBox="1"/>
-          <p:nvPr/>
-        </p:nvSpPr>
-        <p:spPr>
-          <a:xfrm>
-            <a:off x="640080" y="1371600"/>
-            <a:ext cx="10972800" cy="5029200"/>
+            <a:off x="457200" y="2011680"/>
+            <a:ext cx="11274552" cy="2286000"/>
           </a:xfrm>
           <a:prstGeom prst="rect">
             <a:avLst/>
@@ -5737,63 +6335,15 @@
           </a:bodyPr>
           <a:lstStyle/>
           <a:p>
-            <a:pPr>
-              <a:spcAft>
-                <a:spcPts val="1400"/>
-              </a:spcAft>
-              <a:defRPr sz="2100" b="1">
-                <a:solidFill>
-                  <a:srgbClr val="553C9A"/>
-                </a:solidFill>
-              </a:defRPr>
-            </a:pPr>
-            <a:r>
-              <a:t>• ReAct — 边想边做：Thought → Action → Observation 循环，实时获取环境反馈</a:t>
-            </a:r>
-          </a:p>
-          <a:p>
-            <a:pPr>
-              <a:spcAft>
-                <a:spcPts val="1400"/>
-              </a:spcAft>
-              <a:defRPr sz="2100" b="0">
+            <a:pPr algn="ctr">
+              <a:defRPr sz="2600" i="1">
                 <a:solidFill>
                   <a:srgbClr val="1A1A2E"/>
                 </a:solidFill>
               </a:defRPr>
             </a:pPr>
             <a:r>
-              <a:t>• 规划-执行 — 先制订全局战略，再分解为可执行步骤（运筹帷幄）</a:t>
-            </a:r>
-          </a:p>
-          <a:p>
-            <a:pPr>
-              <a:spcAft>
-                <a:spcPts val="1400"/>
-              </a:spcAft>
-              <a:defRPr sz="2100" b="0">
-                <a:solidFill>
-                  <a:srgbClr val="1A1A2E"/>
-                </a:solidFill>
-              </a:defRPr>
-            </a:pPr>
-            <a:r>
-              <a:t>• 工具编排 — 精准选择、协同调配海量外部工具（调兵遣将）</a:t>
-            </a:r>
-          </a:p>
-          <a:p>
-            <a:pPr>
-              <a:spcAft>
-                <a:spcPts val="1400"/>
-              </a:spcAft>
-              <a:defRPr sz="2100" b="0">
-                <a:solidFill>
-                  <a:srgbClr val="1A1A2E"/>
-                </a:solidFill>
-              </a:defRPr>
-            </a:pPr>
-            <a:r>
-              <a:t>• 自适应策略 — 从「进化论」角度，通过试错+反馈+选择演化出最优决策</a:t>
+              <a:t>"从 GoF 的 23 个设计模式到 Agent 的无限可能，我们跨越了软件工程的一个世纪：设计模式并未消亡，而是在进化；软件工程未曾终结，而是在重生；人类的角色没有消失，而是在升华。"</a:t>
             </a:r>
           </a:p>
         </p:txBody>
@@ -5831,7 +6381,7 @@
             <a:avLst/>
           </a:prstGeom>
           <a:solidFill>
-            <a:srgbClr val="FFFFFF"/>
+            <a:srgbClr val="553C9A"/>
           </a:solidFill>
           <a:ln>
             <a:noFill/>
@@ -5861,92 +6411,14 @@
       </p:sp>
       <p:sp>
         <p:nvSpPr>
-          <p:cNvPr id="3" name="Rectangle 2"/>
-          <p:cNvSpPr/>
-          <p:nvPr/>
-        </p:nvSpPr>
-        <p:spPr>
-          <a:xfrm>
-            <a:off x="0" y="0"/>
-            <a:ext cx="12188952" cy="1097280"/>
-          </a:xfrm>
-          <a:prstGeom prst="rect">
-            <a:avLst/>
-          </a:prstGeom>
-          <a:solidFill>
-            <a:srgbClr val="1A1A2E"/>
-          </a:solidFill>
-          <a:ln>
-            <a:noFill/>
-          </a:ln>
-        </p:spPr>
-        <p:style>
-          <a:lnRef idx="1">
-            <a:schemeClr val="accent1"/>
-          </a:lnRef>
-          <a:fillRef idx="3">
-            <a:schemeClr val="accent1"/>
-          </a:fillRef>
-          <a:effectRef idx="2">
-            <a:schemeClr val="accent1"/>
-          </a:effectRef>
-          <a:fontRef idx="minor">
-            <a:schemeClr val="lt1"/>
-          </a:fontRef>
-        </p:style>
-        <p:txBody>
-          <a:bodyPr rtlCol="0" anchor="ctr"/>
-          <a:lstStyle/>
-          <a:p>
-            <a:pPr algn="ctr"/>
-          </a:p>
-        </p:txBody>
-      </p:sp>
-      <p:sp>
-        <p:nvSpPr>
-          <p:cNvPr id="4" name="TextBox 3"/>
+          <p:cNvPr id="3" name="TextBox 2"/>
           <p:cNvSpPr txBox="1"/>
           <p:nvPr/>
         </p:nvSpPr>
         <p:spPr>
           <a:xfrm>
-            <a:off x="457200" y="228600"/>
-            <a:ext cx="11274552" cy="731520"/>
-          </a:xfrm>
-          <a:prstGeom prst="rect">
-            <a:avLst/>
-          </a:prstGeom>
-          <a:noFill/>
-        </p:spPr>
-        <p:txBody>
-          <a:bodyPr wrap="none">
-            <a:spAutoFit/>
-          </a:bodyPr>
-          <a:lstStyle/>
-          <a:p>
-            <a:pPr>
-              <a:defRPr sz="3200" b="1">
-                <a:solidFill>
-                  <a:srgbClr val="FFFFFF"/>
-                </a:solidFill>
-              </a:defRPr>
-            </a:pPr>
-            <a:r>
-              <a:t>反思模式：AI 的灵魂工程学</a:t>
-            </a:r>
-          </a:p>
-        </p:txBody>
-      </p:sp>
-      <p:sp>
-        <p:nvSpPr>
-          <p:cNvPr id="5" name="TextBox 4"/>
-          <p:cNvSpPr txBox="1"/>
-          <p:nvPr/>
-        </p:nvSpPr>
-        <p:spPr>
-          <a:xfrm>
-            <a:off x="640080" y="1371600"/>
-            <a:ext cx="10972800" cy="5029200"/>
+            <a:off x="457200" y="2743200"/>
+            <a:ext cx="11274552" cy="2286000"/>
           </a:xfrm>
           <a:prstGeom prst="rect">
             <a:avLst/>
@@ -5959,78 +6431,15 @@
           </a:bodyPr>
           <a:lstStyle/>
           <a:p>
-            <a:pPr>
-              <a:spcAft>
-                <a:spcPts val="1400"/>
-              </a:spcAft>
-              <a:defRPr sz="2100" b="0">
-                <a:solidFill>
-                  <a:srgbClr val="1A1A2E"/>
-                </a:solidFill>
-              </a:defRPr>
-            </a:pPr>
-            <a:r>
-              <a:t>• 自我修正 — 当下毫秒级，像橡皮擦一样擦除错误（仅限当前任务）</a:t>
-            </a:r>
-          </a:p>
-          <a:p>
-            <a:pPr>
-              <a:spcAft>
-                <a:spcPts val="1400"/>
-              </a:spcAft>
-              <a:defRPr sz="2100" b="0">
-                <a:solidFill>
-                  <a:srgbClr val="1A1A2E"/>
-                </a:solidFill>
-              </a:defRPr>
-            </a:pPr>
-            <a:r>
-              <a:t>• 反思记忆 — 下次分钟级，像错题本一样生成「语言形式的教训」存入长期记忆</a:t>
-            </a:r>
-          </a:p>
-          <a:p>
-            <a:pPr>
-              <a:spcAft>
-                <a:spcPts val="1400"/>
-              </a:spcAft>
-              <a:defRPr sz="2100" b="1">
-                <a:solidFill>
-                  <a:srgbClr val="553C9A"/>
-                </a:solidFill>
-              </a:defRPr>
-            </a:pPr>
-            <a:r>
-              <a:t>• 元学习 — 长远日/周级，像修订教科书一样借助优化器自动迭代 Prompt</a:t>
-            </a:r>
-          </a:p>
-          <a:p>
-            <a:pPr>
-              <a:spcAft>
-                <a:spcPts val="1400"/>
-              </a:spcAft>
-              <a:defRPr sz="2100" b="1">
-                <a:solidFill>
-                  <a:srgbClr val="553C9A"/>
-                </a:solidFill>
-              </a:defRPr>
-            </a:pPr>
-            <a:r>
-              <a:t>• 感知/记忆/推理/行动/反思 = 眼睛/神经/大脑/肌肉/灵魂</a:t>
-            </a:r>
-          </a:p>
-          <a:p>
-            <a:pPr>
-              <a:spcAft>
-                <a:spcPts val="1400"/>
-              </a:spcAft>
-              <a:defRPr sz="2100" b="0">
-                <a:solidFill>
-                  <a:srgbClr val="1A1A2E"/>
-                </a:solidFill>
-              </a:defRPr>
-            </a:pPr>
-            <a:r>
-              <a:t>• "机器何时拥有灵魂？当它开始为自己的错误感到不安时。"</a:t>
+            <a:pPr algn="ctr">
+              <a:defRPr sz="5000" i="0">
+                <a:solidFill>
+                  <a:srgbClr val="FFFFFF"/>
+                </a:solidFill>
+              </a:defRPr>
+            </a:pPr>
+            <a:r>
+              <a:t>🔮  下篇：六大类 21 个核心设计模式</a:t>
             </a:r>
           </a:p>
         </p:txBody>
@@ -6105,7 +6514,7 @@
         <p:spPr>
           <a:xfrm>
             <a:off x="457200" y="2011680"/>
-            <a:ext cx="11274552" cy="1828800"/>
+            <a:ext cx="11274552" cy="2286000"/>
           </a:xfrm>
           <a:prstGeom prst="rect">
             <a:avLst/>
@@ -6140,7 +6549,7 @@
         <p:spPr>
           <a:xfrm>
             <a:off x="457200" y="3108960"/>
-            <a:ext cx="11274552" cy="1828800"/>
+            <a:ext cx="11274552" cy="2286000"/>
           </a:xfrm>
           <a:prstGeom prst="rect">
             <a:avLst/>
@@ -6175,7 +6584,7 @@
         <p:spPr>
           <a:xfrm>
             <a:off x="457200" y="3931920"/>
-            <a:ext cx="11274552" cy="1828800"/>
+            <a:ext cx="11274552" cy="2286000"/>
           </a:xfrm>
           <a:prstGeom prst="rect">
             <a:avLst/>
@@ -6314,7 +6723,7 @@
         <p:spPr>
           <a:xfrm>
             <a:off x="457200" y="228600"/>
-            <a:ext cx="11274552" cy="731520"/>
+            <a:ext cx="11274552" cy="822960"/>
           </a:xfrm>
           <a:prstGeom prst="rect">
             <a:avLst/>
@@ -6335,21 +6744,64 @@
               </a:defRPr>
             </a:pPr>
             <a:r>
-              <a:t>协作模式：共同进化</a:t>
-            </a:r>
-          </a:p>
-        </p:txBody>
-      </p:sp>
-      <p:sp>
-        <p:nvSpPr>
-          <p:cNvPr id="5" name="TextBox 4"/>
+              <a:t>完整 Agent = 感知 + 记忆 + 推理 + 行动 + 反思 + 协作</a:t>
+            </a:r>
+          </a:p>
+        </p:txBody>
+      </p:sp>
+      <p:sp>
+        <p:nvSpPr>
+          <p:cNvPr id="5" name="Rounded Rectangle 4"/>
+          <p:cNvSpPr/>
+          <p:nvPr/>
+        </p:nvSpPr>
+        <p:spPr>
+          <a:xfrm>
+            <a:off x="731520" y="1371600"/>
+            <a:ext cx="1650492" cy="4754880"/>
+          </a:xfrm>
+          <a:prstGeom prst="roundRect">
+            <a:avLst/>
+          </a:prstGeom>
+          <a:solidFill>
+            <a:srgbClr val="1A1A2E"/>
+          </a:solidFill>
+          <a:ln>
+            <a:noFill/>
+          </a:ln>
+        </p:spPr>
+        <p:style>
+          <a:lnRef idx="1">
+            <a:schemeClr val="accent1"/>
+          </a:lnRef>
+          <a:fillRef idx="3">
+            <a:schemeClr val="accent1"/>
+          </a:fillRef>
+          <a:effectRef idx="2">
+            <a:schemeClr val="accent1"/>
+          </a:effectRef>
+          <a:fontRef idx="minor">
+            <a:schemeClr val="lt1"/>
+          </a:fontRef>
+        </p:style>
+        <p:txBody>
+          <a:bodyPr rtlCol="0" anchor="ctr"/>
+          <a:lstStyle/>
+          <a:p>
+            <a:pPr algn="ctr"/>
+          </a:p>
+        </p:txBody>
+      </p:sp>
+      <p:sp>
+        <p:nvSpPr>
+          <p:cNvPr id="6" name="TextBox 5"/>
           <p:cNvSpPr txBox="1"/>
           <p:nvPr/>
         </p:nvSpPr>
         <p:spPr>
           <a:xfrm>
-            <a:off x="640080" y="1371600"/>
-            <a:ext cx="10972800" cy="5029200"/>
+            <a:off x="731520" y="1463040"/>
+            <a:ext cx="1604772" cy="822960"/>
           </a:xfrm>
           <a:prstGeom prst="rect">
             <a:avLst/>
@@ -6363,62 +6815,782 @@
           <a:lstStyle/>
           <a:p>
             <a:pPr>
-              <a:spcAft>
-                <a:spcPts val="1400"/>
-              </a:spcAft>
-              <a:defRPr sz="2100" b="0">
-                <a:solidFill>
-                  <a:srgbClr val="1A1A2E"/>
-                </a:solidFill>
-              </a:defRPr>
-            </a:pPr>
-            <a:r>
-              <a:t>• 辩论 — 对抗性推演，真理在多角度交锋中清晰（法庭正反双方）</a:t>
-            </a:r>
-          </a:p>
+              <a:defRPr sz="1400" b="1">
+                <a:solidFill>
+                  <a:srgbClr val="553C9A"/>
+                </a:solidFill>
+              </a:defRPr>
+            </a:pPr>
+            <a:r>
+              <a:t>👁️ 感知</a:t>
+            </a:r>
+            <a:br/>
+            <a:r>
+              <a:t>看世界</a:t>
+            </a:r>
+          </a:p>
+        </p:txBody>
+      </p:sp>
+      <p:sp>
+        <p:nvSpPr>
+          <p:cNvPr id="7" name="TextBox 6"/>
+          <p:cNvSpPr txBox="1"/>
+          <p:nvPr/>
+        </p:nvSpPr>
+        <p:spPr>
+          <a:xfrm>
+            <a:off x="731520" y="2377440"/>
+            <a:ext cx="1604772" cy="3657600"/>
+          </a:xfrm>
+          <a:prstGeom prst="rect">
+            <a:avLst/>
+          </a:prstGeom>
+          <a:noFill/>
+        </p:spPr>
+        <p:txBody>
+          <a:bodyPr wrap="square">
+            <a:spAutoFit/>
+          </a:bodyPr>
+          <a:lstStyle/>
+          <a:p>
+            <a:pPr algn="ctr">
+              <a:defRPr sz="1200">
+                <a:solidFill>
+                  <a:srgbClr val="A0AEC0"/>
+                </a:solidFill>
+              </a:defRPr>
+            </a:pPr>
+            <a:r>
+              <a:t>注意力聚焦</a:t>
+            </a:r>
+          </a:p>
+          <a:p>
+            <a:pPr algn="ctr">
+              <a:defRPr sz="1200">
+                <a:solidFill>
+                  <a:srgbClr val="A0AEC0"/>
+                </a:solidFill>
+              </a:defRPr>
+            </a:pPr>
+            <a:r>
+              <a:t>多模态融合</a:t>
+            </a:r>
+          </a:p>
+          <a:p>
+            <a:pPr algn="ctr">
+              <a:defRPr sz="1200">
+                <a:solidFill>
+                  <a:srgbClr val="A0AEC0"/>
+                </a:solidFill>
+              </a:defRPr>
+            </a:pPr>
+            <a:r>
+              <a:t>主动感知</a:t>
+            </a:r>
+          </a:p>
+        </p:txBody>
+      </p:sp>
+      <p:sp>
+        <p:nvSpPr>
+          <p:cNvPr id="8" name="Rounded Rectangle 7"/>
+          <p:cNvSpPr/>
+          <p:nvPr/>
+        </p:nvSpPr>
+        <p:spPr>
+          <a:xfrm>
+            <a:off x="2519172" y="1371600"/>
+            <a:ext cx="1650492" cy="4754880"/>
+          </a:xfrm>
+          <a:prstGeom prst="roundRect">
+            <a:avLst/>
+          </a:prstGeom>
+          <a:solidFill>
+            <a:srgbClr val="1A1A2E"/>
+          </a:solidFill>
+          <a:ln>
+            <a:noFill/>
+          </a:ln>
+        </p:spPr>
+        <p:style>
+          <a:lnRef idx="1">
+            <a:schemeClr val="accent1"/>
+          </a:lnRef>
+          <a:fillRef idx="3">
+            <a:schemeClr val="accent1"/>
+          </a:fillRef>
+          <a:effectRef idx="2">
+            <a:schemeClr val="accent1"/>
+          </a:effectRef>
+          <a:fontRef idx="minor">
+            <a:schemeClr val="lt1"/>
+          </a:fontRef>
+        </p:style>
+        <p:txBody>
+          <a:bodyPr rtlCol="0" anchor="ctr"/>
+          <a:lstStyle/>
+          <a:p>
+            <a:pPr algn="ctr"/>
+          </a:p>
+        </p:txBody>
+      </p:sp>
+      <p:sp>
+        <p:nvSpPr>
+          <p:cNvPr id="9" name="TextBox 8"/>
+          <p:cNvSpPr txBox="1"/>
+          <p:nvPr/>
+        </p:nvSpPr>
+        <p:spPr>
+          <a:xfrm>
+            <a:off x="2519172" y="1463040"/>
+            <a:ext cx="1604772" cy="822960"/>
+          </a:xfrm>
+          <a:prstGeom prst="rect">
+            <a:avLst/>
+          </a:prstGeom>
+          <a:noFill/>
+        </p:spPr>
+        <p:txBody>
+          <a:bodyPr wrap="square">
+            <a:spAutoFit/>
+          </a:bodyPr>
+          <a:lstStyle/>
           <a:p>
             <a:pPr>
-              <a:spcAft>
-                <a:spcPts val="1400"/>
-              </a:spcAft>
-              <a:defRPr sz="2100" b="0">
-                <a:solidFill>
-                  <a:srgbClr val="1A1A2E"/>
-                </a:solidFill>
-              </a:defRPr>
-            </a:pPr>
-            <a:r>
-              <a:t>• 委托 — 层级目标分解，经理指挥工人的高效执行</a:t>
-            </a:r>
-          </a:p>
+              <a:defRPr sz="1400" b="1">
+                <a:solidFill>
+                  <a:srgbClr val="553C9A"/>
+                </a:solidFill>
+              </a:defRPr>
+            </a:pPr>
+            <a:r>
+              <a:t>🧠 记忆</a:t>
+            </a:r>
+            <a:br/>
+            <a:r>
+              <a:t>连接时间</a:t>
+            </a:r>
+          </a:p>
+        </p:txBody>
+      </p:sp>
+      <p:sp>
+        <p:nvSpPr>
+          <p:cNvPr id="10" name="TextBox 9"/>
+          <p:cNvSpPr txBox="1"/>
+          <p:nvPr/>
+        </p:nvSpPr>
+        <p:spPr>
+          <a:xfrm>
+            <a:off x="2519172" y="2377440"/>
+            <a:ext cx="1604772" cy="3657600"/>
+          </a:xfrm>
+          <a:prstGeom prst="rect">
+            <a:avLst/>
+          </a:prstGeom>
+          <a:noFill/>
+        </p:spPr>
+        <p:txBody>
+          <a:bodyPr wrap="square">
+            <a:spAutoFit/>
+          </a:bodyPr>
+          <a:lstStyle/>
+          <a:p>
+            <a:pPr algn="ctr">
+              <a:defRPr sz="1200">
+                <a:solidFill>
+                  <a:srgbClr val="A0AEC0"/>
+                </a:solidFill>
+              </a:defRPr>
+            </a:pPr>
+            <a:r>
+              <a:t>分层记忆</a:t>
+            </a:r>
+          </a:p>
+          <a:p>
+            <a:pPr algn="ctr">
+              <a:defRPr sz="1200">
+                <a:solidFill>
+                  <a:srgbClr val="A0AEC0"/>
+                </a:solidFill>
+              </a:defRPr>
+            </a:pPr>
+            <a:r>
+              <a:t>RAG</a:t>
+            </a:r>
+          </a:p>
+          <a:p>
+            <a:pPr algn="ctr">
+              <a:defRPr sz="1200">
+                <a:solidFill>
+                  <a:srgbClr val="A0AEC0"/>
+                </a:solidFill>
+              </a:defRPr>
+            </a:pPr>
+            <a:r>
+              <a:t>情节记忆</a:t>
+            </a:r>
+          </a:p>
+        </p:txBody>
+      </p:sp>
+      <p:sp>
+        <p:nvSpPr>
+          <p:cNvPr id="11" name="Rounded Rectangle 10"/>
+          <p:cNvSpPr/>
+          <p:nvPr/>
+        </p:nvSpPr>
+        <p:spPr>
+          <a:xfrm>
+            <a:off x="4306824" y="1371600"/>
+            <a:ext cx="1650492" cy="4754880"/>
+          </a:xfrm>
+          <a:prstGeom prst="roundRect">
+            <a:avLst/>
+          </a:prstGeom>
+          <a:solidFill>
+            <a:srgbClr val="1A1A2E"/>
+          </a:solidFill>
+          <a:ln>
+            <a:noFill/>
+          </a:ln>
+        </p:spPr>
+        <p:style>
+          <a:lnRef idx="1">
+            <a:schemeClr val="accent1"/>
+          </a:lnRef>
+          <a:fillRef idx="3">
+            <a:schemeClr val="accent1"/>
+          </a:fillRef>
+          <a:effectRef idx="2">
+            <a:schemeClr val="accent1"/>
+          </a:effectRef>
+          <a:fontRef idx="minor">
+            <a:schemeClr val="lt1"/>
+          </a:fontRef>
+        </p:style>
+        <p:txBody>
+          <a:bodyPr rtlCol="0" anchor="ctr"/>
+          <a:lstStyle/>
+          <a:p>
+            <a:pPr algn="ctr"/>
+          </a:p>
+        </p:txBody>
+      </p:sp>
+      <p:sp>
+        <p:nvSpPr>
+          <p:cNvPr id="12" name="TextBox 11"/>
+          <p:cNvSpPr txBox="1"/>
+          <p:nvPr/>
+        </p:nvSpPr>
+        <p:spPr>
+          <a:xfrm>
+            <a:off x="4306824" y="1463040"/>
+            <a:ext cx="1604772" cy="822960"/>
+          </a:xfrm>
+          <a:prstGeom prst="rect">
+            <a:avLst/>
+          </a:prstGeom>
+          <a:noFill/>
+        </p:spPr>
+        <p:txBody>
+          <a:bodyPr wrap="square">
+            <a:spAutoFit/>
+          </a:bodyPr>
+          <a:lstStyle/>
           <a:p>
             <a:pPr>
-              <a:spcAft>
-                <a:spcPts val="1400"/>
-              </a:spcAft>
-              <a:defRPr sz="2100" b="0">
-                <a:solidFill>
-                  <a:srgbClr val="1A1A2E"/>
-                </a:solidFill>
-              </a:defRPr>
-            </a:pPr>
-            <a:r>
-              <a:t>• 路由 — 精准分发，像医院分诊台将任务分配给最适合的 Agent</a:t>
-            </a:r>
-          </a:p>
+              <a:defRPr sz="1400" b="1">
+                <a:solidFill>
+                  <a:srgbClr val="553C9A"/>
+                </a:solidFill>
+              </a:defRPr>
+            </a:pPr>
+            <a:r>
+              <a:t>⚙️ 推理</a:t>
+            </a:r>
+            <a:br/>
+            <a:r>
+              <a:t>编织逻辑</a:t>
+            </a:r>
+          </a:p>
+        </p:txBody>
+      </p:sp>
+      <p:sp>
+        <p:nvSpPr>
+          <p:cNvPr id="13" name="TextBox 12"/>
+          <p:cNvSpPr txBox="1"/>
+          <p:nvPr/>
+        </p:nvSpPr>
+        <p:spPr>
+          <a:xfrm>
+            <a:off x="4306824" y="2377440"/>
+            <a:ext cx="1604772" cy="3657600"/>
+          </a:xfrm>
+          <a:prstGeom prst="rect">
+            <a:avLst/>
+          </a:prstGeom>
+          <a:noFill/>
+        </p:spPr>
+        <p:txBody>
+          <a:bodyPr wrap="square">
+            <a:spAutoFit/>
+          </a:bodyPr>
+          <a:lstStyle/>
+          <a:p>
+            <a:pPr algn="ctr">
+              <a:defRPr sz="1200">
+                <a:solidFill>
+                  <a:srgbClr val="A0AEC0"/>
+                </a:solidFill>
+              </a:defRPr>
+            </a:pPr>
+            <a:r>
+              <a:t>思维链</a:t>
+            </a:r>
+          </a:p>
+          <a:p>
+            <a:pPr algn="ctr">
+              <a:defRPr sz="1200">
+                <a:solidFill>
+                  <a:srgbClr val="A0AEC0"/>
+                </a:solidFill>
+              </a:defRPr>
+            </a:pPr>
+            <a:r>
+              <a:t>思维树</a:t>
+            </a:r>
+          </a:p>
+          <a:p>
+            <a:pPr algn="ctr">
+              <a:defRPr sz="1200">
+                <a:solidFill>
+                  <a:srgbClr val="A0AEC0"/>
+                </a:solidFill>
+              </a:defRPr>
+            </a:pPr>
+            <a:r>
+              <a:t>思维图</a:t>
+            </a:r>
+          </a:p>
+        </p:txBody>
+      </p:sp>
+      <p:sp>
+        <p:nvSpPr>
+          <p:cNvPr id="14" name="Rounded Rectangle 13"/>
+          <p:cNvSpPr/>
+          <p:nvPr/>
+        </p:nvSpPr>
+        <p:spPr>
+          <a:xfrm>
+            <a:off x="6094476" y="1371600"/>
+            <a:ext cx="1650492" cy="4754880"/>
+          </a:xfrm>
+          <a:prstGeom prst="roundRect">
+            <a:avLst/>
+          </a:prstGeom>
+          <a:solidFill>
+            <a:srgbClr val="1A1A2E"/>
+          </a:solidFill>
+          <a:ln>
+            <a:noFill/>
+          </a:ln>
+        </p:spPr>
+        <p:style>
+          <a:lnRef idx="1">
+            <a:schemeClr val="accent1"/>
+          </a:lnRef>
+          <a:fillRef idx="3">
+            <a:schemeClr val="accent1"/>
+          </a:fillRef>
+          <a:effectRef idx="2">
+            <a:schemeClr val="accent1"/>
+          </a:effectRef>
+          <a:fontRef idx="minor">
+            <a:schemeClr val="lt1"/>
+          </a:fontRef>
+        </p:style>
+        <p:txBody>
+          <a:bodyPr rtlCol="0" anchor="ctr"/>
+          <a:lstStyle/>
+          <a:p>
+            <a:pPr algn="ctr"/>
+          </a:p>
+        </p:txBody>
+      </p:sp>
+      <p:sp>
+        <p:nvSpPr>
+          <p:cNvPr id="15" name="TextBox 14"/>
+          <p:cNvSpPr txBox="1"/>
+          <p:nvPr/>
+        </p:nvSpPr>
+        <p:spPr>
+          <a:xfrm>
+            <a:off x="6094476" y="1463040"/>
+            <a:ext cx="1604772" cy="822960"/>
+          </a:xfrm>
+          <a:prstGeom prst="rect">
+            <a:avLst/>
+          </a:prstGeom>
+          <a:noFill/>
+        </p:spPr>
+        <p:txBody>
+          <a:bodyPr wrap="square">
+            <a:spAutoFit/>
+          </a:bodyPr>
+          <a:lstStyle/>
           <a:p>
             <a:pPr>
-              <a:spcAft>
-                <a:spcPts val="1400"/>
-              </a:spcAft>
-              <a:defRPr sz="2100" b="1">
+              <a:defRPr sz="1400" b="1">
                 <a:solidFill>
                   <a:srgbClr val="553C9A"/>
                 </a:solidFill>
               </a:defRPr>
             </a:pPr>
             <a:r>
-              <a:t>• 群体 — 自组织涌现，像蚁群迁徙无需明确指挥者，展现惊人集体效率</a:t>
+              <a:t>💪 行动</a:t>
+            </a:r>
+            <a:br/>
+            <a:r>
+              <a:t>付诸实施</a:t>
+            </a:r>
+          </a:p>
+        </p:txBody>
+      </p:sp>
+      <p:sp>
+        <p:nvSpPr>
+          <p:cNvPr id="16" name="TextBox 15"/>
+          <p:cNvSpPr txBox="1"/>
+          <p:nvPr/>
+        </p:nvSpPr>
+        <p:spPr>
+          <a:xfrm>
+            <a:off x="6094476" y="2377440"/>
+            <a:ext cx="1604772" cy="3657600"/>
+          </a:xfrm>
+          <a:prstGeom prst="rect">
+            <a:avLst/>
+          </a:prstGeom>
+          <a:noFill/>
+        </p:spPr>
+        <p:txBody>
+          <a:bodyPr wrap="square">
+            <a:spAutoFit/>
+          </a:bodyPr>
+          <a:lstStyle/>
+          <a:p>
+            <a:pPr algn="ctr">
+              <a:defRPr sz="1200">
+                <a:solidFill>
+                  <a:srgbClr val="A0AEC0"/>
+                </a:solidFill>
+              </a:defRPr>
+            </a:pPr>
+            <a:r>
+              <a:t>ReAct</a:t>
+            </a:r>
+          </a:p>
+          <a:p>
+            <a:pPr algn="ctr">
+              <a:defRPr sz="1200">
+                <a:solidFill>
+                  <a:srgbClr val="A0AEC0"/>
+                </a:solidFill>
+              </a:defRPr>
+            </a:pPr>
+            <a:r>
+              <a:t>规划-执行</a:t>
+            </a:r>
+          </a:p>
+          <a:p>
+            <a:pPr algn="ctr">
+              <a:defRPr sz="1200">
+                <a:solidFill>
+                  <a:srgbClr val="A0AEC0"/>
+                </a:solidFill>
+              </a:defRPr>
+            </a:pPr>
+            <a:r>
+              <a:t>工具编排</a:t>
+            </a:r>
+          </a:p>
+        </p:txBody>
+      </p:sp>
+      <p:sp>
+        <p:nvSpPr>
+          <p:cNvPr id="17" name="Rounded Rectangle 16"/>
+          <p:cNvSpPr/>
+          <p:nvPr/>
+        </p:nvSpPr>
+        <p:spPr>
+          <a:xfrm>
+            <a:off x="7882128" y="1371600"/>
+            <a:ext cx="1650492" cy="4754880"/>
+          </a:xfrm>
+          <a:prstGeom prst="roundRect">
+            <a:avLst/>
+          </a:prstGeom>
+          <a:solidFill>
+            <a:srgbClr val="1A1A2E"/>
+          </a:solidFill>
+          <a:ln>
+            <a:noFill/>
+          </a:ln>
+        </p:spPr>
+        <p:style>
+          <a:lnRef idx="1">
+            <a:schemeClr val="accent1"/>
+          </a:lnRef>
+          <a:fillRef idx="3">
+            <a:schemeClr val="accent1"/>
+          </a:fillRef>
+          <a:effectRef idx="2">
+            <a:schemeClr val="accent1"/>
+          </a:effectRef>
+          <a:fontRef idx="minor">
+            <a:schemeClr val="lt1"/>
+          </a:fontRef>
+        </p:style>
+        <p:txBody>
+          <a:bodyPr rtlCol="0" anchor="ctr"/>
+          <a:lstStyle/>
+          <a:p>
+            <a:pPr algn="ctr"/>
+          </a:p>
+        </p:txBody>
+      </p:sp>
+      <p:sp>
+        <p:nvSpPr>
+          <p:cNvPr id="18" name="TextBox 17"/>
+          <p:cNvSpPr txBox="1"/>
+          <p:nvPr/>
+        </p:nvSpPr>
+        <p:spPr>
+          <a:xfrm>
+            <a:off x="7882128" y="1463040"/>
+            <a:ext cx="1604772" cy="822960"/>
+          </a:xfrm>
+          <a:prstGeom prst="rect">
+            <a:avLst/>
+          </a:prstGeom>
+          <a:noFill/>
+        </p:spPr>
+        <p:txBody>
+          <a:bodyPr wrap="square">
+            <a:spAutoFit/>
+          </a:bodyPr>
+          <a:lstStyle/>
+          <a:p>
+            <a:pPr>
+              <a:defRPr sz="1400" b="1">
+                <a:solidFill>
+                  <a:srgbClr val="553C9A"/>
+                </a:solidFill>
+              </a:defRPr>
+            </a:pPr>
+            <a:r>
+              <a:t>🔮 反思</a:t>
+            </a:r>
+            <a:br/>
+            <a:r>
+              <a:t>判断对错</a:t>
+            </a:r>
+          </a:p>
+        </p:txBody>
+      </p:sp>
+      <p:sp>
+        <p:nvSpPr>
+          <p:cNvPr id="19" name="TextBox 18"/>
+          <p:cNvSpPr txBox="1"/>
+          <p:nvPr/>
+        </p:nvSpPr>
+        <p:spPr>
+          <a:xfrm>
+            <a:off x="7882128" y="2377440"/>
+            <a:ext cx="1604772" cy="3657600"/>
+          </a:xfrm>
+          <a:prstGeom prst="rect">
+            <a:avLst/>
+          </a:prstGeom>
+          <a:noFill/>
+        </p:spPr>
+        <p:txBody>
+          <a:bodyPr wrap="square">
+            <a:spAutoFit/>
+          </a:bodyPr>
+          <a:lstStyle/>
+          <a:p>
+            <a:pPr algn="ctr">
+              <a:defRPr sz="1200">
+                <a:solidFill>
+                  <a:srgbClr val="A0AEC0"/>
+                </a:solidFill>
+              </a:defRPr>
+            </a:pPr>
+            <a:r>
+              <a:t>自我修正</a:t>
+            </a:r>
+          </a:p>
+          <a:p>
+            <a:pPr algn="ctr">
+              <a:defRPr sz="1200">
+                <a:solidFill>
+                  <a:srgbClr val="A0AEC0"/>
+                </a:solidFill>
+              </a:defRPr>
+            </a:pPr>
+            <a:r>
+              <a:t>反思记忆</a:t>
+            </a:r>
+          </a:p>
+          <a:p>
+            <a:pPr algn="ctr">
+              <a:defRPr sz="1200">
+                <a:solidFill>
+                  <a:srgbClr val="A0AEC0"/>
+                </a:solidFill>
+              </a:defRPr>
+            </a:pPr>
+            <a:r>
+              <a:t>元学习</a:t>
+            </a:r>
+          </a:p>
+        </p:txBody>
+      </p:sp>
+      <p:sp>
+        <p:nvSpPr>
+          <p:cNvPr id="20" name="Rounded Rectangle 19"/>
+          <p:cNvSpPr/>
+          <p:nvPr/>
+        </p:nvSpPr>
+        <p:spPr>
+          <a:xfrm>
+            <a:off x="9669780" y="1371600"/>
+            <a:ext cx="1650492" cy="4754880"/>
+          </a:xfrm>
+          <a:prstGeom prst="roundRect">
+            <a:avLst/>
+          </a:prstGeom>
+          <a:solidFill>
+            <a:srgbClr val="1A1A2E"/>
+          </a:solidFill>
+          <a:ln>
+            <a:noFill/>
+          </a:ln>
+        </p:spPr>
+        <p:style>
+          <a:lnRef idx="1">
+            <a:schemeClr val="accent1"/>
+          </a:lnRef>
+          <a:fillRef idx="3">
+            <a:schemeClr val="accent1"/>
+          </a:fillRef>
+          <a:effectRef idx="2">
+            <a:schemeClr val="accent1"/>
+          </a:effectRef>
+          <a:fontRef idx="minor">
+            <a:schemeClr val="lt1"/>
+          </a:fontRef>
+        </p:style>
+        <p:txBody>
+          <a:bodyPr rtlCol="0" anchor="ctr"/>
+          <a:lstStyle/>
+          <a:p>
+            <a:pPr algn="ctr"/>
+          </a:p>
+        </p:txBody>
+      </p:sp>
+      <p:sp>
+        <p:nvSpPr>
+          <p:cNvPr id="21" name="TextBox 20"/>
+          <p:cNvSpPr txBox="1"/>
+          <p:nvPr/>
+        </p:nvSpPr>
+        <p:spPr>
+          <a:xfrm>
+            <a:off x="9669780" y="1463040"/>
+            <a:ext cx="1604772" cy="822960"/>
+          </a:xfrm>
+          <a:prstGeom prst="rect">
+            <a:avLst/>
+          </a:prstGeom>
+          <a:noFill/>
+        </p:spPr>
+        <p:txBody>
+          <a:bodyPr wrap="square">
+            <a:spAutoFit/>
+          </a:bodyPr>
+          <a:lstStyle/>
+          <a:p>
+            <a:pPr>
+              <a:defRPr sz="1400" b="1">
+                <a:solidFill>
+                  <a:srgbClr val="553C9A"/>
+                </a:solidFill>
+              </a:defRPr>
+            </a:pPr>
+            <a:r>
+              <a:t>🤝 协作</a:t>
+            </a:r>
+            <a:br/>
+            <a:r>
+              <a:t>共同进化</a:t>
+            </a:r>
+          </a:p>
+        </p:txBody>
+      </p:sp>
+      <p:sp>
+        <p:nvSpPr>
+          <p:cNvPr id="22" name="TextBox 21"/>
+          <p:cNvSpPr txBox="1"/>
+          <p:nvPr/>
+        </p:nvSpPr>
+        <p:spPr>
+          <a:xfrm>
+            <a:off x="9669780" y="2377440"/>
+            <a:ext cx="1604772" cy="3657600"/>
+          </a:xfrm>
+          <a:prstGeom prst="rect">
+            <a:avLst/>
+          </a:prstGeom>
+          <a:noFill/>
+        </p:spPr>
+        <p:txBody>
+          <a:bodyPr wrap="square">
+            <a:spAutoFit/>
+          </a:bodyPr>
+          <a:lstStyle/>
+          <a:p>
+            <a:pPr algn="ctr">
+              <a:defRPr sz="1200">
+                <a:solidFill>
+                  <a:srgbClr val="A0AEC0"/>
+                </a:solidFill>
+              </a:defRPr>
+            </a:pPr>
+            <a:r>
+              <a:t>辩论</a:t>
+            </a:r>
+          </a:p>
+          <a:p>
+            <a:pPr algn="ctr">
+              <a:defRPr sz="1200">
+                <a:solidFill>
+                  <a:srgbClr val="A0AEC0"/>
+                </a:solidFill>
+              </a:defRPr>
+            </a:pPr>
+            <a:r>
+              <a:t>委托</a:t>
+            </a:r>
+          </a:p>
+          <a:p>
+            <a:pPr algn="ctr">
+              <a:defRPr sz="1200">
+                <a:solidFill>
+                  <a:srgbClr val="A0AEC0"/>
+                </a:solidFill>
+              </a:defRPr>
+            </a:pPr>
+            <a:r>
+              <a:t>群体</a:t>
             </a:r>
           </a:p>
         </p:txBody>
@@ -6486,14 +7658,92 @@
       </p:sp>
       <p:sp>
         <p:nvSpPr>
-          <p:cNvPr id="3" name="TextBox 2"/>
+          <p:cNvPr id="3" name="Rectangle 2"/>
+          <p:cNvSpPr/>
+          <p:nvPr/>
+        </p:nvSpPr>
+        <p:spPr>
+          <a:xfrm>
+            <a:off x="0" y="0"/>
+            <a:ext cx="12188952" cy="1097280"/>
+          </a:xfrm>
+          <a:prstGeom prst="rect">
+            <a:avLst/>
+          </a:prstGeom>
+          <a:solidFill>
+            <a:srgbClr val="1A1A2E"/>
+          </a:solidFill>
+          <a:ln>
+            <a:noFill/>
+          </a:ln>
+        </p:spPr>
+        <p:style>
+          <a:lnRef idx="1">
+            <a:schemeClr val="accent1"/>
+          </a:lnRef>
+          <a:fillRef idx="3">
+            <a:schemeClr val="accent1"/>
+          </a:fillRef>
+          <a:effectRef idx="2">
+            <a:schemeClr val="accent1"/>
+          </a:effectRef>
+          <a:fontRef idx="minor">
+            <a:schemeClr val="lt1"/>
+          </a:fontRef>
+        </p:style>
+        <p:txBody>
+          <a:bodyPr rtlCol="0" anchor="ctr"/>
+          <a:lstStyle/>
+          <a:p>
+            <a:pPr algn="ctr"/>
+          </a:p>
+        </p:txBody>
+      </p:sp>
+      <p:sp>
+        <p:nvSpPr>
+          <p:cNvPr id="4" name="TextBox 3"/>
           <p:cNvSpPr txBox="1"/>
           <p:nvPr/>
         </p:nvSpPr>
         <p:spPr>
           <a:xfrm>
-            <a:off x="457200" y="2011680"/>
-            <a:ext cx="11274552" cy="1828800"/>
+            <a:off x="457200" y="228600"/>
+            <a:ext cx="11274552" cy="822960"/>
+          </a:xfrm>
+          <a:prstGeom prst="rect">
+            <a:avLst/>
+          </a:prstGeom>
+          <a:noFill/>
+        </p:spPr>
+        <p:txBody>
+          <a:bodyPr wrap="none">
+            <a:spAutoFit/>
+          </a:bodyPr>
+          <a:lstStyle/>
+          <a:p>
+            <a:pPr>
+              <a:defRPr sz="3200" b="1">
+                <a:solidFill>
+                  <a:srgbClr val="FFFFFF"/>
+                </a:solidFill>
+              </a:defRPr>
+            </a:pPr>
+            <a:r>
+              <a:t>感知模式：看世界</a:t>
+            </a:r>
+          </a:p>
+        </p:txBody>
+      </p:sp>
+      <p:sp>
+        <p:nvSpPr>
+          <p:cNvPr id="5" name="TextBox 4"/>
+          <p:cNvSpPr txBox="1"/>
+          <p:nvPr/>
+        </p:nvSpPr>
+        <p:spPr>
+          <a:xfrm>
+            <a:off x="640080" y="1371600"/>
+            <a:ext cx="10972800" cy="5029200"/>
           </a:xfrm>
           <a:prstGeom prst="rect">
             <a:avLst/>
@@ -6506,15 +7756,78 @@
           </a:bodyPr>
           <a:lstStyle/>
           <a:p>
-            <a:pPr algn="ctr">
-              <a:defRPr sz="2600" i="1">
+            <a:pPr>
+              <a:spcAft>
+                <a:spcPts val="1400"/>
+              </a:spcAft>
+              <a:defRPr sz="2100" b="1">
+                <a:solidFill>
+                  <a:srgbClr val="553C9A"/>
+                </a:solidFill>
+              </a:defRPr>
+            </a:pPr>
+            <a:r>
+              <a:t>• 注意力聚焦 — 构建认知漏斗，用最低 Token 成本换取最高上下文质量</a:t>
+            </a:r>
+          </a:p>
+          <a:p>
+            <a:pPr>
+              <a:spcAft>
+                <a:spcPts val="1400"/>
+              </a:spcAft>
+              <a:defRPr sz="2100" b="0">
                 <a:solidFill>
                   <a:srgbClr val="1A1A2E"/>
                 </a:solidFill>
               </a:defRPr>
             </a:pPr>
             <a:r>
-              <a:t>"智能的最高形态，不在于独立思考，而在于共同进化。"</a:t>
+              <a:t>• 多模态融合 — 建立统一语义场，从「拼接式」向「原生式」演进</a:t>
+            </a:r>
+          </a:p>
+          <a:p>
+            <a:pPr>
+              <a:spcAft>
+                <a:spcPts val="1400"/>
+              </a:spcAft>
+              <a:defRPr sz="2100" b="1">
+                <a:solidFill>
+                  <a:srgbClr val="553C9A"/>
+                </a:solidFill>
+              </a:defRPr>
+            </a:pPr>
+            <a:r>
+              <a:t>• 主动感知 — Agent 从「被动的答题者」转变为「主动的调查员」</a:t>
+            </a:r>
+          </a:p>
+          <a:p>
+            <a:pPr>
+              <a:spcAft>
+                <a:spcPts val="1400"/>
+              </a:spcAft>
+              <a:defRPr sz="2100" b="0">
+                <a:solidFill>
+                  <a:srgbClr val="1A1A2E"/>
+                </a:solidFill>
+              </a:defRPr>
+            </a:pPr>
+            <a:r>
+              <a:t>• 本质：不是「看到所有」，而是「看到关键」并「主动寻找未知」</a:t>
+            </a:r>
+          </a:p>
+          <a:p>
+            <a:pPr>
+              <a:spcAft>
+                <a:spcPts val="1400"/>
+              </a:spcAft>
+              <a:defRPr sz="2100" b="0">
+                <a:solidFill>
+                  <a:srgbClr val="1A1A2E"/>
+                </a:solidFill>
+              </a:defRPr>
+            </a:pPr>
+            <a:r>
+              <a:t>• "不要以它能记住多少为荣，而要以它能精简多少为傲。"</a:t>
             </a:r>
           </a:p>
         </p:txBody>
@@ -6595,7 +7908,7 @@
             <a:avLst/>
           </a:prstGeom>
           <a:solidFill>
-            <a:srgbClr val="553C9A"/>
+            <a:srgbClr val="1A1A2E"/>
           </a:solidFill>
           <a:ln>
             <a:noFill/>
@@ -6632,7 +7945,7 @@
         <p:spPr>
           <a:xfrm>
             <a:off x="457200" y="228600"/>
-            <a:ext cx="11274552" cy="731520"/>
+            <a:ext cx="11274552" cy="822960"/>
           </a:xfrm>
           <a:prstGeom prst="rect">
             <a:avLst/>
@@ -6646,14 +7959,14 @@
           <a:lstStyle/>
           <a:p>
             <a:pPr>
-              <a:defRPr sz="2800" b="1">
+              <a:defRPr sz="3200" b="1">
                 <a:solidFill>
                   <a:srgbClr val="FFFFFF"/>
                 </a:solidFill>
               </a:defRPr>
             </a:pPr>
             <a:r>
-              <a:t>后记：从确定性工程到概率性工程</a:t>
+              <a:t>记忆模式：连接时间</a:t>
             </a:r>
           </a:p>
         </p:txBody>
@@ -6691,7 +8004,37 @@
               </a:defRPr>
             </a:pPr>
             <a:r>
-              <a:t>• 传统软件 = 牛顿力学隐喻：世界如精密钟表，追求零熵，将不确定性视为 bug</a:t>
+              <a:t>• 分层记忆 — L1工作记忆(Context Window) / L2短期缓存(摘要) / L3长期存储(Vector DB+知识图谱)</a:t>
+            </a:r>
+          </a:p>
+          <a:p>
+            <a:pPr>
+              <a:spcAft>
+                <a:spcPts val="1400"/>
+              </a:spcAft>
+              <a:defRPr sz="2100" b="1">
+                <a:solidFill>
+                  <a:srgbClr val="553C9A"/>
+                </a:solidFill>
+              </a:defRPr>
+            </a:pPr>
+            <a:r>
+              <a:t>• RAG — 将「推理能力」(CPU) 与「知识存储」(磁盘) 解耦，极低成本保持时效性</a:t>
+            </a:r>
+          </a:p>
+          <a:p>
+            <a:pPr>
+              <a:spcAft>
+                <a:spcPts val="1400"/>
+              </a:spcAft>
+              <a:defRPr sz="2100" b="1">
+                <a:solidFill>
+                  <a:srgbClr val="553C9A"/>
+                </a:solidFill>
+              </a:defRPr>
+            </a:pPr>
+            <a:r>
+              <a:t>• 情节记忆 — 沉淀 Agent 自身交互产生的动态经验，无需微调即可进化</a:t>
             </a:r>
           </a:p>
           <a:p>
@@ -6706,22 +8049,7 @@
               </a:defRPr>
             </a:pPr>
             <a:r>
-              <a:t>• Agent 时代 = 达尔文逻辑：软件展现生长性（通过 RAG 积累）、适应性（动态调整）、繁殖性（生成新 Prompt）</a:t>
-            </a:r>
-          </a:p>
-          <a:p>
-            <a:pPr>
-              <a:spcAft>
-                <a:spcPts val="1400"/>
-              </a:spcAft>
-              <a:defRPr sz="2100" b="1">
-                <a:solidFill>
-                  <a:srgbClr val="553C9A"/>
-                </a:solidFill>
-              </a:defRPr>
-            </a:pPr>
-            <a:r>
-              <a:t>• 我们正见证硅基生命的「寒武纪大爆发」</a:t>
+              <a:t>• 两种流转：「溢出与巩固」(热→冷) + 「检索与唤醒」(冷→热)</a:t>
             </a:r>
           </a:p>
           <a:p>
@@ -6736,7 +8064,7 @@
               </a:defRPr>
             </a:pPr>
             <a:r>
-              <a:t>• 架构师的新角色 = 熵的园丁：无法命令植物长多高，但可以优化土壤</a:t>
+              <a:t>• "从上下文工程到 MaaS，记忆正从技巧升级为核心基础设施。"</a:t>
             </a:r>
           </a:p>
         </p:txBody>
@@ -6854,7 +8182,7 @@
         <p:spPr>
           <a:xfrm>
             <a:off x="457200" y="228600"/>
-            <a:ext cx="11274552" cy="731520"/>
+            <a:ext cx="11274552" cy="822960"/>
           </a:xfrm>
           <a:prstGeom prst="rect">
             <a:avLst/>
@@ -6875,99 +8203,21 @@
               </a:defRPr>
             </a:pPr>
             <a:r>
-              <a:t>园丁的智慧：懂得「适度失控」</a:t>
-            </a:r>
-          </a:p>
-        </p:txBody>
-      </p:sp>
-      <p:sp>
-        <p:nvSpPr>
-          <p:cNvPr id="5" name="Rounded Rectangle 4"/>
-          <p:cNvSpPr/>
-          <p:nvPr/>
-        </p:nvSpPr>
-        <p:spPr>
-          <a:xfrm>
-            <a:off x="640080" y="1463040"/>
-            <a:ext cx="5271516" cy="1325880"/>
-          </a:xfrm>
-          <a:prstGeom prst="roundRect">
-            <a:avLst/>
-          </a:prstGeom>
-          <a:solidFill>
-            <a:srgbClr val="1A1A2E"/>
-          </a:solidFill>
-          <a:ln>
-            <a:noFill/>
-          </a:ln>
-        </p:spPr>
-        <p:style>
-          <a:lnRef idx="1">
-            <a:schemeClr val="accent1"/>
-          </a:lnRef>
-          <a:fillRef idx="3">
-            <a:schemeClr val="accent1"/>
-          </a:fillRef>
-          <a:effectRef idx="2">
-            <a:schemeClr val="accent1"/>
-          </a:effectRef>
-          <a:fontRef idx="minor">
-            <a:schemeClr val="lt1"/>
-          </a:fontRef>
-        </p:style>
-        <p:txBody>
-          <a:bodyPr rtlCol="0" anchor="ctr"/>
-          <a:lstStyle/>
-          <a:p>
-            <a:pPr algn="ctr"/>
-          </a:p>
-        </p:txBody>
-      </p:sp>
-      <p:sp>
-        <p:nvSpPr>
-          <p:cNvPr id="6" name="TextBox 5"/>
+              <a:t>推理模式：编织逻辑</a:t>
+            </a:r>
+          </a:p>
+        </p:txBody>
+      </p:sp>
+      <p:sp>
+        <p:nvSpPr>
+          <p:cNvPr id="5" name="TextBox 4"/>
           <p:cNvSpPr txBox="1"/>
           <p:nvPr/>
         </p:nvSpPr>
         <p:spPr>
           <a:xfrm>
-            <a:off x="640080" y="1536192"/>
-            <a:ext cx="5180076" cy="365760"/>
-          </a:xfrm>
-          <a:prstGeom prst="rect">
-            <a:avLst/>
-          </a:prstGeom>
-          <a:noFill/>
-        </p:spPr>
-        <p:txBody>
-          <a:bodyPr wrap="none">
-            <a:spAutoFit/>
-          </a:bodyPr>
-          <a:lstStyle/>
-          <a:p>
-            <a:pPr>
-              <a:defRPr sz="1500" b="1">
-                <a:solidFill>
-                  <a:srgbClr val="553C9A"/>
-                </a:solidFill>
-              </a:defRPr>
-            </a:pPr>
-            <a:r>
-              <a:t>🌱 浇水施肥</a:t>
-            </a:r>
-          </a:p>
-        </p:txBody>
-      </p:sp>
-      <p:sp>
-        <p:nvSpPr>
-          <p:cNvPr id="7" name="TextBox 6"/>
-          <p:cNvSpPr txBox="1"/>
-          <p:nvPr/>
-        </p:nvSpPr>
-        <p:spPr>
-          <a:xfrm>
-            <a:off x="640080" y="1901952"/>
-            <a:ext cx="5180076" cy="914400"/>
+            <a:off x="640080" y="1371600"/>
+            <a:ext cx="10972800" cy="5029200"/>
           </a:xfrm>
           <a:prstGeom prst="rect">
             <a:avLst/>
@@ -6981,353 +8231,77 @@
           <a:lstStyle/>
           <a:p>
             <a:pPr>
-              <a:defRPr sz="1100">
-                <a:solidFill>
-                  <a:srgbClr val="A0AEC0"/>
-                </a:solidFill>
-              </a:defRPr>
-            </a:pPr>
-            <a:r>
-              <a:t>优化数据质量，提供知识滋养系统</a:t>
-            </a:r>
-          </a:p>
-        </p:txBody>
-      </p:sp>
-      <p:sp>
-        <p:nvSpPr>
-          <p:cNvPr id="8" name="Rounded Rectangle 7"/>
-          <p:cNvSpPr/>
-          <p:nvPr/>
-        </p:nvSpPr>
-        <p:spPr>
-          <a:xfrm>
-            <a:off x="6094476" y="1463040"/>
-            <a:ext cx="5271516" cy="1325880"/>
-          </a:xfrm>
-          <a:prstGeom prst="roundRect">
-            <a:avLst/>
-          </a:prstGeom>
-          <a:solidFill>
-            <a:srgbClr val="1A1A2E"/>
-          </a:solidFill>
-          <a:ln>
-            <a:noFill/>
-          </a:ln>
-        </p:spPr>
-        <p:style>
-          <a:lnRef idx="1">
-            <a:schemeClr val="accent1"/>
-          </a:lnRef>
-          <a:fillRef idx="3">
-            <a:schemeClr val="accent1"/>
-          </a:fillRef>
-          <a:effectRef idx="2">
-            <a:schemeClr val="accent1"/>
-          </a:effectRef>
-          <a:fontRef idx="minor">
-            <a:schemeClr val="lt1"/>
-          </a:fontRef>
-        </p:style>
-        <p:txBody>
-          <a:bodyPr rtlCol="0" anchor="ctr"/>
-          <a:lstStyle/>
-          <a:p>
-            <a:pPr algn="ctr"/>
-          </a:p>
-        </p:txBody>
-      </p:sp>
-      <p:sp>
-        <p:nvSpPr>
-          <p:cNvPr id="9" name="TextBox 8"/>
-          <p:cNvSpPr txBox="1"/>
-          <p:nvPr/>
-        </p:nvSpPr>
-        <p:spPr>
-          <a:xfrm>
-            <a:off x="6094476" y="1536192"/>
-            <a:ext cx="5180076" cy="365760"/>
-          </a:xfrm>
-          <a:prstGeom prst="rect">
-            <a:avLst/>
-          </a:prstGeom>
-          <a:noFill/>
-        </p:spPr>
-        <p:txBody>
-          <a:bodyPr wrap="none">
-            <a:spAutoFit/>
-          </a:bodyPr>
-          <a:lstStyle/>
+              <a:spcAft>
+                <a:spcPts val="1400"/>
+              </a:spcAft>
+              <a:defRPr sz="2100" b="0">
+                <a:solidFill>
+                  <a:srgbClr val="1A1A2E"/>
+                </a:solidFill>
+              </a:defRPr>
+            </a:pPr>
+            <a:r>
+              <a:t>• System 1 / System 2：快直觉 vs 慢刻意，Agent 需要两者兼顾</a:t>
+            </a:r>
+          </a:p>
           <a:p>
             <a:pPr>
-              <a:defRPr sz="1500" b="1">
+              <a:spcAft>
+                <a:spcPts val="1400"/>
+              </a:spcAft>
+              <a:defRPr sz="2100" b="1">
                 <a:solidFill>
                   <a:srgbClr val="553C9A"/>
                 </a:solidFill>
               </a:defRPr>
             </a:pPr>
             <a:r>
-              <a:t>✂️ 修剪枝叶</a:t>
-            </a:r>
-          </a:p>
-        </p:txBody>
-      </p:sp>
-      <p:sp>
-        <p:nvSpPr>
-          <p:cNvPr id="10" name="TextBox 9"/>
-          <p:cNvSpPr txBox="1"/>
-          <p:nvPr/>
-        </p:nvSpPr>
-        <p:spPr>
-          <a:xfrm>
-            <a:off x="6094476" y="1901952"/>
-            <a:ext cx="5180076" cy="914400"/>
-          </a:xfrm>
-          <a:prstGeom prst="rect">
-            <a:avLst/>
-          </a:prstGeom>
-          <a:noFill/>
-        </p:spPr>
-        <p:txBody>
-          <a:bodyPr wrap="square">
-            <a:spAutoFit/>
-          </a:bodyPr>
-          <a:lstStyle/>
+              <a:t>• 思维链(CoT) — 线性逐步推进，适合数学与逻辑推导（走钢丝）</a:t>
+            </a:r>
+          </a:p>
           <a:p>
             <a:pPr>
-              <a:defRPr sz="1100">
-                <a:solidFill>
-                  <a:srgbClr val="A0AEC0"/>
-                </a:solidFill>
-              </a:defRPr>
-            </a:pPr>
-            <a:r>
-              <a:t>设置护栏，引入批判机制应对幻觉</a:t>
-            </a:r>
-          </a:p>
-        </p:txBody>
-      </p:sp>
-      <p:sp>
-        <p:nvSpPr>
-          <p:cNvPr id="11" name="Rounded Rectangle 10"/>
-          <p:cNvSpPr/>
-          <p:nvPr/>
-        </p:nvSpPr>
-        <p:spPr>
-          <a:xfrm>
-            <a:off x="640080" y="2926080"/>
-            <a:ext cx="5271516" cy="1325880"/>
-          </a:xfrm>
-          <a:prstGeom prst="roundRect">
-            <a:avLst/>
-          </a:prstGeom>
-          <a:solidFill>
-            <a:srgbClr val="1A1A2E"/>
-          </a:solidFill>
-          <a:ln>
-            <a:noFill/>
-          </a:ln>
-        </p:spPr>
-        <p:style>
-          <a:lnRef idx="1">
-            <a:schemeClr val="accent1"/>
-          </a:lnRef>
-          <a:fillRef idx="3">
-            <a:schemeClr val="accent1"/>
-          </a:fillRef>
-          <a:effectRef idx="2">
-            <a:schemeClr val="accent1"/>
-          </a:effectRef>
-          <a:fontRef idx="minor">
-            <a:schemeClr val="lt1"/>
-          </a:fontRef>
-        </p:style>
-        <p:txBody>
-          <a:bodyPr rtlCol="0" anchor="ctr"/>
-          <a:lstStyle/>
-          <a:p>
-            <a:pPr algn="ctr"/>
-          </a:p>
-        </p:txBody>
-      </p:sp>
-      <p:sp>
-        <p:nvSpPr>
-          <p:cNvPr id="12" name="TextBox 11"/>
-          <p:cNvSpPr txBox="1"/>
-          <p:nvPr/>
-        </p:nvSpPr>
-        <p:spPr>
-          <a:xfrm>
-            <a:off x="640080" y="2999232"/>
-            <a:ext cx="5180076" cy="365760"/>
-          </a:xfrm>
-          <a:prstGeom prst="rect">
-            <a:avLst/>
-          </a:prstGeom>
-          <a:noFill/>
-        </p:spPr>
-        <p:txBody>
-          <a:bodyPr wrap="none">
-            <a:spAutoFit/>
-          </a:bodyPr>
-          <a:lstStyle/>
+              <a:spcAft>
+                <a:spcPts val="1400"/>
+              </a:spcAft>
+              <a:defRPr sz="2100" b="1">
+                <a:solidFill>
+                  <a:srgbClr val="553C9A"/>
+                </a:solidFill>
+              </a:defRPr>
+            </a:pPr>
+            <a:r>
+              <a:t>• 思维树(ToT) — 启发式搜索+剪枝回溯，适合多分支权衡（迷宫探路）</a:t>
+            </a:r>
+          </a:p>
           <a:p>
             <a:pPr>
-              <a:defRPr sz="1500" b="1">
-                <a:solidFill>
-                  <a:srgbClr val="553C9A"/>
-                </a:solidFill>
-              </a:defRPr>
-            </a:pPr>
-            <a:r>
-              <a:t>🌍 营造环境</a:t>
-            </a:r>
-          </a:p>
-        </p:txBody>
-      </p:sp>
-      <p:sp>
-        <p:nvSpPr>
-          <p:cNvPr id="13" name="TextBox 12"/>
-          <p:cNvSpPr txBox="1"/>
-          <p:nvPr/>
-        </p:nvSpPr>
-        <p:spPr>
-          <a:xfrm>
-            <a:off x="640080" y="3364992"/>
-            <a:ext cx="5180076" cy="914400"/>
-          </a:xfrm>
-          <a:prstGeom prst="rect">
-            <a:avLst/>
-          </a:prstGeom>
-          <a:noFill/>
-        </p:spPr>
-        <p:txBody>
-          <a:bodyPr wrap="square">
-            <a:spAutoFit/>
-          </a:bodyPr>
-          <a:lstStyle/>
+              <a:spcAft>
+                <a:spcPts val="1400"/>
+              </a:spcAft>
+              <a:defRPr sz="2100" b="0">
+                <a:solidFill>
+                  <a:srgbClr val="1A1A2E"/>
+                </a:solidFill>
+              </a:defRPr>
+            </a:pPr>
+            <a:r>
+              <a:t>• 思维图(GoT) — 图结构编织+多轮迭代，适合复杂依赖整合（织布机）</a:t>
+            </a:r>
+          </a:p>
           <a:p>
             <a:pPr>
-              <a:defRPr sz="1100">
-                <a:solidFill>
-                  <a:srgbClr val="A0AEC0"/>
-                </a:solidFill>
-              </a:defRPr>
-            </a:pPr>
-            <a:r>
-              <a:t>设计 A2A 协议，搭建 Swarm 平台</a:t>
-            </a:r>
-          </a:p>
-        </p:txBody>
-      </p:sp>
-      <p:sp>
-        <p:nvSpPr>
-          <p:cNvPr id="14" name="Rounded Rectangle 13"/>
-          <p:cNvSpPr/>
-          <p:nvPr/>
-        </p:nvSpPr>
-        <p:spPr>
-          <a:xfrm>
-            <a:off x="6094476" y="2926080"/>
-            <a:ext cx="5271516" cy="1325880"/>
-          </a:xfrm>
-          <a:prstGeom prst="roundRect">
-            <a:avLst/>
-          </a:prstGeom>
-          <a:solidFill>
-            <a:srgbClr val="1A1A2E"/>
-          </a:solidFill>
-          <a:ln>
-            <a:noFill/>
-          </a:ln>
-        </p:spPr>
-        <p:style>
-          <a:lnRef idx="1">
-            <a:schemeClr val="accent1"/>
-          </a:lnRef>
-          <a:fillRef idx="3">
-            <a:schemeClr val="accent1"/>
-          </a:fillRef>
-          <a:effectRef idx="2">
-            <a:schemeClr val="accent1"/>
-          </a:effectRef>
-          <a:fontRef idx="minor">
-            <a:schemeClr val="lt1"/>
-          </a:fontRef>
-        </p:style>
-        <p:txBody>
-          <a:bodyPr rtlCol="0" anchor="ctr"/>
-          <a:lstStyle/>
-          <a:p>
-            <a:pPr algn="ctr"/>
-          </a:p>
-        </p:txBody>
-      </p:sp>
-      <p:sp>
-        <p:nvSpPr>
-          <p:cNvPr id="15" name="TextBox 14"/>
-          <p:cNvSpPr txBox="1"/>
-          <p:nvPr/>
-        </p:nvSpPr>
-        <p:spPr>
-          <a:xfrm>
-            <a:off x="6094476" y="2999232"/>
-            <a:ext cx="5180076" cy="365760"/>
-          </a:xfrm>
-          <a:prstGeom prst="rect">
-            <a:avLst/>
-          </a:prstGeom>
-          <a:noFill/>
-        </p:spPr>
-        <p:txBody>
-          <a:bodyPr wrap="none">
-            <a:spAutoFit/>
-          </a:bodyPr>
-          <a:lstStyle/>
-          <a:p>
-            <a:pPr>
-              <a:defRPr sz="1500" b="1">
-                <a:solidFill>
-                  <a:srgbClr val="553C9A"/>
-                </a:solidFill>
-              </a:defRPr>
-            </a:pPr>
-            <a:r>
-              <a:t>💡 容忍混沌</a:t>
-            </a:r>
-          </a:p>
-        </p:txBody>
-      </p:sp>
-      <p:sp>
-        <p:nvSpPr>
-          <p:cNvPr id="16" name="TextBox 15"/>
-          <p:cNvSpPr txBox="1"/>
-          <p:nvPr/>
-        </p:nvSpPr>
-        <p:spPr>
-          <a:xfrm>
-            <a:off x="6094476" y="3364992"/>
-            <a:ext cx="5180076" cy="914400"/>
-          </a:xfrm>
-          <a:prstGeom prst="rect">
-            <a:avLst/>
-          </a:prstGeom>
-          <a:noFill/>
-        </p:spPr>
-        <p:txBody>
-          <a:bodyPr wrap="square">
-            <a:spAutoFit/>
-          </a:bodyPr>
-          <a:lstStyle/>
-          <a:p>
-            <a:pPr>
-              <a:defRPr sz="1100">
-                <a:solidFill>
-                  <a:srgbClr val="A0AEC0"/>
-                </a:solidFill>
-              </a:defRPr>
-            </a:pPr>
-            <a:r>
-              <a:t>唯有在混沌的边缘，智能才会真正涌现</a:t>
+              <a:spcAft>
+                <a:spcPts val="1400"/>
+              </a:spcAft>
+              <a:defRPr sz="2100" b="0">
+                <a:solidFill>
+                  <a:srgbClr val="1A1A2E"/>
+                </a:solidFill>
+              </a:defRPr>
+            </a:pPr>
+            <a:r>
+              <a:t>• "Agent 架构师应善于指挥整支认知乐团，而非迷信单一推理模式。"</a:t>
             </a:r>
           </a:p>
         </p:txBody>
@@ -7395,14 +8369,92 @@
       </p:sp>
       <p:sp>
         <p:nvSpPr>
-          <p:cNvPr id="3" name="TextBox 2"/>
+          <p:cNvPr id="3" name="Rectangle 2"/>
+          <p:cNvSpPr/>
+          <p:nvPr/>
+        </p:nvSpPr>
+        <p:spPr>
+          <a:xfrm>
+            <a:off x="0" y="0"/>
+            <a:ext cx="12188952" cy="1097280"/>
+          </a:xfrm>
+          <a:prstGeom prst="rect">
+            <a:avLst/>
+          </a:prstGeom>
+          <a:solidFill>
+            <a:srgbClr val="1A1A2E"/>
+          </a:solidFill>
+          <a:ln>
+            <a:noFill/>
+          </a:ln>
+        </p:spPr>
+        <p:style>
+          <a:lnRef idx="1">
+            <a:schemeClr val="accent1"/>
+          </a:lnRef>
+          <a:fillRef idx="3">
+            <a:schemeClr val="accent1"/>
+          </a:fillRef>
+          <a:effectRef idx="2">
+            <a:schemeClr val="accent1"/>
+          </a:effectRef>
+          <a:fontRef idx="minor">
+            <a:schemeClr val="lt1"/>
+          </a:fontRef>
+        </p:style>
+        <p:txBody>
+          <a:bodyPr rtlCol="0" anchor="ctr"/>
+          <a:lstStyle/>
+          <a:p>
+            <a:pPr algn="ctr"/>
+          </a:p>
+        </p:txBody>
+      </p:sp>
+      <p:sp>
+        <p:nvSpPr>
+          <p:cNvPr id="4" name="TextBox 3"/>
           <p:cNvSpPr txBox="1"/>
           <p:nvPr/>
         </p:nvSpPr>
         <p:spPr>
           <a:xfrm>
-            <a:off x="457200" y="2011680"/>
-            <a:ext cx="11274552" cy="1828800"/>
+            <a:off x="457200" y="228600"/>
+            <a:ext cx="11274552" cy="822960"/>
+          </a:xfrm>
+          <a:prstGeom prst="rect">
+            <a:avLst/>
+          </a:prstGeom>
+          <a:noFill/>
+        </p:spPr>
+        <p:txBody>
+          <a:bodyPr wrap="none">
+            <a:spAutoFit/>
+          </a:bodyPr>
+          <a:lstStyle/>
+          <a:p>
+            <a:pPr>
+              <a:defRPr sz="3200" b="1">
+                <a:solidFill>
+                  <a:srgbClr val="FFFFFF"/>
+                </a:solidFill>
+              </a:defRPr>
+            </a:pPr>
+            <a:r>
+              <a:t>行动模式：付诸实施</a:t>
+            </a:r>
+          </a:p>
+        </p:txBody>
+      </p:sp>
+      <p:sp>
+        <p:nvSpPr>
+          <p:cNvPr id="5" name="TextBox 4"/>
+          <p:cNvSpPr txBox="1"/>
+          <p:nvPr/>
+        </p:nvSpPr>
+        <p:spPr>
+          <a:xfrm>
+            <a:off x="640080" y="1371600"/>
+            <a:ext cx="10972800" cy="5029200"/>
           </a:xfrm>
           <a:prstGeom prst="rect">
             <a:avLst/>
@@ -7415,15 +8467,63 @@
           </a:bodyPr>
           <a:lstStyle/>
           <a:p>
-            <a:pPr algn="ctr">
-              <a:defRPr sz="2600" i="1">
+            <a:pPr>
+              <a:spcAft>
+                <a:spcPts val="1400"/>
+              </a:spcAft>
+              <a:defRPr sz="2100" b="1">
+                <a:solidFill>
+                  <a:srgbClr val="553C9A"/>
+                </a:solidFill>
+              </a:defRPr>
+            </a:pPr>
+            <a:r>
+              <a:t>• ReAct — 边想边做：Thought → Action → Observation 循环，实时获取环境反馈</a:t>
+            </a:r>
+          </a:p>
+          <a:p>
+            <a:pPr>
+              <a:spcAft>
+                <a:spcPts val="1400"/>
+              </a:spcAft>
+              <a:defRPr sz="2100" b="0">
                 <a:solidFill>
                   <a:srgbClr val="1A1A2E"/>
                 </a:solidFill>
               </a:defRPr>
             </a:pPr>
             <a:r>
-              <a:t>"园丁的智慧，在于懂得「适度失控」。唯有在混沌的边缘，智能才会真正涌现。"</a:t>
+              <a:t>• 规划-执行 — 先制订全局战略，再分解为可执行步骤（运筹帷幄）</a:t>
+            </a:r>
+          </a:p>
+          <a:p>
+            <a:pPr>
+              <a:spcAft>
+                <a:spcPts val="1400"/>
+              </a:spcAft>
+              <a:defRPr sz="2100" b="0">
+                <a:solidFill>
+                  <a:srgbClr val="1A1A2E"/>
+                </a:solidFill>
+              </a:defRPr>
+            </a:pPr>
+            <a:r>
+              <a:t>• 工具编排 — 精准选择、协同调配海量外部工具（调兵遣将）</a:t>
+            </a:r>
+          </a:p>
+          <a:p>
+            <a:pPr>
+              <a:spcAft>
+                <a:spcPts val="1400"/>
+              </a:spcAft>
+              <a:defRPr sz="2100" b="0">
+                <a:solidFill>
+                  <a:srgbClr val="1A1A2E"/>
+                </a:solidFill>
+              </a:defRPr>
+            </a:pPr>
+            <a:r>
+              <a:t>• 自适应策略 — 从「进化论」角度，通过试错+反馈+选择演化出最优决策</a:t>
             </a:r>
           </a:p>
         </p:txBody>
@@ -7461,6 +8561,49 @@
             <a:avLst/>
           </a:prstGeom>
           <a:solidFill>
+            <a:srgbClr val="FFFFFF"/>
+          </a:solidFill>
+          <a:ln>
+            <a:noFill/>
+          </a:ln>
+        </p:spPr>
+        <p:style>
+          <a:lnRef idx="1">
+            <a:schemeClr val="accent1"/>
+          </a:lnRef>
+          <a:fillRef idx="3">
+            <a:schemeClr val="accent1"/>
+          </a:fillRef>
+          <a:effectRef idx="2">
+            <a:schemeClr val="accent1"/>
+          </a:effectRef>
+          <a:fontRef idx="minor">
+            <a:schemeClr val="lt1"/>
+          </a:fontRef>
+        </p:style>
+        <p:txBody>
+          <a:bodyPr rtlCol="0" anchor="ctr"/>
+          <a:lstStyle/>
+          <a:p>
+            <a:pPr algn="ctr"/>
+          </a:p>
+        </p:txBody>
+      </p:sp>
+      <p:sp>
+        <p:nvSpPr>
+          <p:cNvPr id="3" name="Rectangle 2"/>
+          <p:cNvSpPr/>
+          <p:nvPr/>
+        </p:nvSpPr>
+        <p:spPr>
+          <a:xfrm>
+            <a:off x="0" y="0"/>
+            <a:ext cx="12188952" cy="1097280"/>
+          </a:xfrm>
+          <a:prstGeom prst="rect">
+            <a:avLst/>
+          </a:prstGeom>
+          <a:solidFill>
             <a:srgbClr val="1A1A2E"/>
           </a:solidFill>
           <a:ln>
@@ -7491,14 +8634,49 @@
       </p:sp>
       <p:sp>
         <p:nvSpPr>
-          <p:cNvPr id="3" name="TextBox 2"/>
+          <p:cNvPr id="4" name="TextBox 3"/>
           <p:cNvSpPr txBox="1"/>
           <p:nvPr/>
         </p:nvSpPr>
         <p:spPr>
           <a:xfrm>
-            <a:off x="457200" y="2286000"/>
-            <a:ext cx="11274552" cy="1828800"/>
+            <a:off x="457200" y="228600"/>
+            <a:ext cx="11274552" cy="822960"/>
+          </a:xfrm>
+          <a:prstGeom prst="rect">
+            <a:avLst/>
+          </a:prstGeom>
+          <a:noFill/>
+        </p:spPr>
+        <p:txBody>
+          <a:bodyPr wrap="none">
+            <a:spAutoFit/>
+          </a:bodyPr>
+          <a:lstStyle/>
+          <a:p>
+            <a:pPr>
+              <a:defRPr sz="3200" b="1">
+                <a:solidFill>
+                  <a:srgbClr val="FFFFFF"/>
+                </a:solidFill>
+              </a:defRPr>
+            </a:pPr>
+            <a:r>
+              <a:t>反思模式：AI 的灵魂工程学</a:t>
+            </a:r>
+          </a:p>
+        </p:txBody>
+      </p:sp>
+      <p:sp>
+        <p:nvSpPr>
+          <p:cNvPr id="5" name="TextBox 4"/>
+          <p:cNvSpPr txBox="1"/>
+          <p:nvPr/>
+        </p:nvSpPr>
+        <p:spPr>
+          <a:xfrm>
+            <a:off x="640080" y="1371600"/>
+            <a:ext cx="10972800" cy="5029200"/>
           </a:xfrm>
           <a:prstGeom prst="rect">
             <a:avLst/>
@@ -7511,16 +8689,183 @@
           </a:bodyPr>
           <a:lstStyle/>
           <a:p>
-            <a:pPr algn="ctr">
-              <a:defRPr sz="5200" i="0">
-                <a:solidFill>
-                  <a:srgbClr val="FFFFFF"/>
-                </a:solidFill>
-              </a:defRPr>
-            </a:pPr>
-            <a:r>
-              <a:t>谢谢观看</a:t>
-            </a:r>
+            <a:pPr>
+              <a:spcAft>
+                <a:spcPts val="1400"/>
+              </a:spcAft>
+              <a:defRPr sz="2100" b="0">
+                <a:solidFill>
+                  <a:srgbClr val="1A1A2E"/>
+                </a:solidFill>
+              </a:defRPr>
+            </a:pPr>
+            <a:r>
+              <a:t>• 自我修正 — 当下毫秒级，像橡皮擦一样擦除错误（仅限当前任务）</a:t>
+            </a:r>
+          </a:p>
+          <a:p>
+            <a:pPr>
+              <a:spcAft>
+                <a:spcPts val="1400"/>
+              </a:spcAft>
+              <a:defRPr sz="2100" b="0">
+                <a:solidFill>
+                  <a:srgbClr val="1A1A2E"/>
+                </a:solidFill>
+              </a:defRPr>
+            </a:pPr>
+            <a:r>
+              <a:t>• 反思记忆 — 下次分钟级，像错题本一样生成「语言形式的教训」存入长期记忆</a:t>
+            </a:r>
+          </a:p>
+          <a:p>
+            <a:pPr>
+              <a:spcAft>
+                <a:spcPts val="1400"/>
+              </a:spcAft>
+              <a:defRPr sz="2100" b="1">
+                <a:solidFill>
+                  <a:srgbClr val="553C9A"/>
+                </a:solidFill>
+              </a:defRPr>
+            </a:pPr>
+            <a:r>
+              <a:t>• 元学习 — 长远日/周级，像修订教科书一样借助优化器自动迭代 Prompt</a:t>
+            </a:r>
+          </a:p>
+          <a:p>
+            <a:pPr>
+              <a:spcAft>
+                <a:spcPts val="1400"/>
+              </a:spcAft>
+              <a:defRPr sz="2100" b="1">
+                <a:solidFill>
+                  <a:srgbClr val="553C9A"/>
+                </a:solidFill>
+              </a:defRPr>
+            </a:pPr>
+            <a:r>
+              <a:t>• 感知/记忆/推理/行动/反思 = 眼睛/神经/大脑/肌肉/灵魂</a:t>
+            </a:r>
+          </a:p>
+          <a:p>
+            <a:pPr>
+              <a:spcAft>
+                <a:spcPts val="1400"/>
+              </a:spcAft>
+              <a:defRPr sz="2100" b="0">
+                <a:solidFill>
+                  <a:srgbClr val="1A1A2E"/>
+                </a:solidFill>
+              </a:defRPr>
+            </a:pPr>
+            <a:r>
+              <a:t>• "机器何时拥有灵魂？当它开始为自己的错误感到不安时。"</a:t>
+            </a:r>
+          </a:p>
+        </p:txBody>
+      </p:sp>
+    </p:spTree>
+  </p:cSld>
+  <p:clrMapOvr>
+    <a:masterClrMapping/>
+  </p:clrMapOvr>
+</p:sld>
+</file>
+
+<file path=ppt/slides/slide26.xml><?xml version="1.0" encoding="utf-8"?>
+<p:sld xmlns:a="http://schemas.openxmlformats.org/drawingml/2006/main" xmlns:p="http://schemas.openxmlformats.org/presentationml/2006/main" xmlns:r="http://schemas.openxmlformats.org/officeDocument/2006/relationships">
+  <p:cSld>
+    <p:spTree>
+      <p:nvGrpSpPr>
+        <p:cNvPr id="1" name=""/>
+        <p:cNvGrpSpPr/>
+        <p:nvPr/>
+      </p:nvGrpSpPr>
+      <p:grpSpPr/>
+      <p:sp>
+        <p:nvSpPr>
+          <p:cNvPr id="2" name="Rectangle 1"/>
+          <p:cNvSpPr/>
+          <p:nvPr/>
+        </p:nvSpPr>
+        <p:spPr>
+          <a:xfrm>
+            <a:off x="0" y="0"/>
+            <a:ext cx="12188952" cy="6858000"/>
+          </a:xfrm>
+          <a:prstGeom prst="rect">
+            <a:avLst/>
+          </a:prstGeom>
+          <a:solidFill>
+            <a:srgbClr val="FFFFFF"/>
+          </a:solidFill>
+          <a:ln>
+            <a:noFill/>
+          </a:ln>
+        </p:spPr>
+        <p:style>
+          <a:lnRef idx="1">
+            <a:schemeClr val="accent1"/>
+          </a:lnRef>
+          <a:fillRef idx="3">
+            <a:schemeClr val="accent1"/>
+          </a:fillRef>
+          <a:effectRef idx="2">
+            <a:schemeClr val="accent1"/>
+          </a:effectRef>
+          <a:fontRef idx="minor">
+            <a:schemeClr val="lt1"/>
+          </a:fontRef>
+        </p:style>
+        <p:txBody>
+          <a:bodyPr rtlCol="0" anchor="ctr"/>
+          <a:lstStyle/>
+          <a:p>
+            <a:pPr algn="ctr"/>
+          </a:p>
+        </p:txBody>
+      </p:sp>
+      <p:sp>
+        <p:nvSpPr>
+          <p:cNvPr id="3" name="Rectangle 2"/>
+          <p:cNvSpPr/>
+          <p:nvPr/>
+        </p:nvSpPr>
+        <p:spPr>
+          <a:xfrm>
+            <a:off x="0" y="0"/>
+            <a:ext cx="12188952" cy="1097280"/>
+          </a:xfrm>
+          <a:prstGeom prst="rect">
+            <a:avLst/>
+          </a:prstGeom>
+          <a:solidFill>
+            <a:srgbClr val="1A1A2E"/>
+          </a:solidFill>
+          <a:ln>
+            <a:noFill/>
+          </a:ln>
+        </p:spPr>
+        <p:style>
+          <a:lnRef idx="1">
+            <a:schemeClr val="accent1"/>
+          </a:lnRef>
+          <a:fillRef idx="3">
+            <a:schemeClr val="accent1"/>
+          </a:fillRef>
+          <a:effectRef idx="2">
+            <a:schemeClr val="accent1"/>
+          </a:effectRef>
+          <a:fontRef idx="minor">
+            <a:schemeClr val="lt1"/>
+          </a:fontRef>
+        </p:style>
+        <p:txBody>
+          <a:bodyPr rtlCol="0" anchor="ctr"/>
+          <a:lstStyle/>
+          <a:p>
+            <a:pPr algn="ctr"/>
           </a:p>
         </p:txBody>
       </p:sp>
@@ -7532,8 +8877,43 @@
         </p:nvSpPr>
         <p:spPr>
           <a:xfrm>
-            <a:off x="457200" y="3657600"/>
-            <a:ext cx="11274552" cy="1828800"/>
+            <a:off x="457200" y="228600"/>
+            <a:ext cx="11274552" cy="822960"/>
+          </a:xfrm>
+          <a:prstGeom prst="rect">
+            <a:avLst/>
+          </a:prstGeom>
+          <a:noFill/>
+        </p:spPr>
+        <p:txBody>
+          <a:bodyPr wrap="none">
+            <a:spAutoFit/>
+          </a:bodyPr>
+          <a:lstStyle/>
+          <a:p>
+            <a:pPr>
+              <a:defRPr sz="3200" b="1">
+                <a:solidFill>
+                  <a:srgbClr val="FFFFFF"/>
+                </a:solidFill>
+              </a:defRPr>
+            </a:pPr>
+            <a:r>
+              <a:t>协作模式：共同进化</a:t>
+            </a:r>
+          </a:p>
+        </p:txBody>
+      </p:sp>
+      <p:sp>
+        <p:nvSpPr>
+          <p:cNvPr id="5" name="TextBox 4"/>
+          <p:cNvSpPr txBox="1"/>
+          <p:nvPr/>
+        </p:nvSpPr>
+        <p:spPr>
+          <a:xfrm>
+            <a:off x="640080" y="1371600"/>
+            <a:ext cx="10972800" cy="5029200"/>
           </a:xfrm>
           <a:prstGeom prst="rect">
             <a:avLst/>
@@ -7546,29 +8926,181 @@
           </a:bodyPr>
           <a:lstStyle/>
           <a:p>
-            <a:pPr algn="ctr">
-              <a:defRPr sz="2200" i="0">
-                <a:solidFill>
-                  <a:srgbClr val="A0AEC0"/>
-                </a:solidFill>
-              </a:defRPr>
-            </a:pPr>
-            <a:r>
-              <a:t>《Agent设计模式》读书笔记 | Tony老师分享</a:t>
-            </a:r>
-          </a:p>
-        </p:txBody>
-      </p:sp>
-      <p:sp>
-        <p:nvSpPr>
-          <p:cNvPr id="5" name="TextBox 4"/>
+            <a:pPr>
+              <a:spcAft>
+                <a:spcPts val="1400"/>
+              </a:spcAft>
+              <a:defRPr sz="2100" b="0">
+                <a:solidFill>
+                  <a:srgbClr val="1A1A2E"/>
+                </a:solidFill>
+              </a:defRPr>
+            </a:pPr>
+            <a:r>
+              <a:t>• 辩论 — 对抗性推演，真理在多角度交锋中清晰（法庭正反双方）</a:t>
+            </a:r>
+          </a:p>
+          <a:p>
+            <a:pPr>
+              <a:spcAft>
+                <a:spcPts val="1400"/>
+              </a:spcAft>
+              <a:defRPr sz="2100" b="0">
+                <a:solidFill>
+                  <a:srgbClr val="1A1A2E"/>
+                </a:solidFill>
+              </a:defRPr>
+            </a:pPr>
+            <a:r>
+              <a:t>• 委托 — 层级目标分解，经理指挥工人的高效执行</a:t>
+            </a:r>
+          </a:p>
+          <a:p>
+            <a:pPr>
+              <a:spcAft>
+                <a:spcPts val="1400"/>
+              </a:spcAft>
+              <a:defRPr sz="2100" b="0">
+                <a:solidFill>
+                  <a:srgbClr val="1A1A2E"/>
+                </a:solidFill>
+              </a:defRPr>
+            </a:pPr>
+            <a:r>
+              <a:t>• 路由 — 精准分发，像医院分诊台将任务分配给最适合的 Agent</a:t>
+            </a:r>
+          </a:p>
+          <a:p>
+            <a:pPr>
+              <a:spcAft>
+                <a:spcPts val="1400"/>
+              </a:spcAft>
+              <a:defRPr sz="2100" b="1">
+                <a:solidFill>
+                  <a:srgbClr val="553C9A"/>
+                </a:solidFill>
+              </a:defRPr>
+            </a:pPr>
+            <a:r>
+              <a:t>• 群体 — 自组织涌现，像蚁群迁徙无需明确指挥者</a:t>
+            </a:r>
+          </a:p>
+        </p:txBody>
+      </p:sp>
+    </p:spTree>
+  </p:cSld>
+  <p:clrMapOvr>
+    <a:masterClrMapping/>
+  </p:clrMapOvr>
+</p:sld>
+</file>
+
+<file path=ppt/slides/slide27.xml><?xml version="1.0" encoding="utf-8"?>
+<p:sld xmlns:a="http://schemas.openxmlformats.org/drawingml/2006/main" xmlns:p="http://schemas.openxmlformats.org/presentationml/2006/main" xmlns:r="http://schemas.openxmlformats.org/officeDocument/2006/relationships">
+  <p:cSld>
+    <p:spTree>
+      <p:nvGrpSpPr>
+        <p:cNvPr id="1" name=""/>
+        <p:cNvGrpSpPr/>
+        <p:nvPr/>
+      </p:nvGrpSpPr>
+      <p:grpSpPr/>
+      <p:sp>
+        <p:nvSpPr>
+          <p:cNvPr id="2" name="Rectangle 1"/>
+          <p:cNvSpPr/>
+          <p:nvPr/>
+        </p:nvSpPr>
+        <p:spPr>
+          <a:xfrm>
+            <a:off x="0" y="0"/>
+            <a:ext cx="12188952" cy="6858000"/>
+          </a:xfrm>
+          <a:prstGeom prst="rect">
+            <a:avLst/>
+          </a:prstGeom>
+          <a:solidFill>
+            <a:srgbClr val="FFFFFF"/>
+          </a:solidFill>
+          <a:ln>
+            <a:noFill/>
+          </a:ln>
+        </p:spPr>
+        <p:style>
+          <a:lnRef idx="1">
+            <a:schemeClr val="accent1"/>
+          </a:lnRef>
+          <a:fillRef idx="3">
+            <a:schemeClr val="accent1"/>
+          </a:fillRef>
+          <a:effectRef idx="2">
+            <a:schemeClr val="accent1"/>
+          </a:effectRef>
+          <a:fontRef idx="minor">
+            <a:schemeClr val="lt1"/>
+          </a:fontRef>
+        </p:style>
+        <p:txBody>
+          <a:bodyPr rtlCol="0" anchor="ctr"/>
+          <a:lstStyle/>
+          <a:p>
+            <a:pPr algn="ctr"/>
+          </a:p>
+        </p:txBody>
+      </p:sp>
+      <p:sp>
+        <p:nvSpPr>
+          <p:cNvPr id="3" name="Rectangle 2"/>
+          <p:cNvSpPr/>
+          <p:nvPr/>
+        </p:nvSpPr>
+        <p:spPr>
+          <a:xfrm>
+            <a:off x="0" y="0"/>
+            <a:ext cx="12188952" cy="137160"/>
+          </a:xfrm>
+          <a:prstGeom prst="rect">
+            <a:avLst/>
+          </a:prstGeom>
+          <a:solidFill>
+            <a:srgbClr val="1A1A2E"/>
+          </a:solidFill>
+          <a:ln>
+            <a:noFill/>
+          </a:ln>
+        </p:spPr>
+        <p:style>
+          <a:lnRef idx="1">
+            <a:schemeClr val="accent1"/>
+          </a:lnRef>
+          <a:fillRef idx="3">
+            <a:schemeClr val="accent1"/>
+          </a:fillRef>
+          <a:effectRef idx="2">
+            <a:schemeClr val="accent1"/>
+          </a:effectRef>
+          <a:fontRef idx="minor">
+            <a:schemeClr val="lt1"/>
+          </a:fontRef>
+        </p:style>
+        <p:txBody>
+          <a:bodyPr rtlCol="0" anchor="ctr"/>
+          <a:lstStyle/>
+          <a:p>
+            <a:pPr algn="ctr"/>
+          </a:p>
+        </p:txBody>
+      </p:sp>
+      <p:sp>
+        <p:nvSpPr>
+          <p:cNvPr id="4" name="TextBox 3"/>
           <p:cNvSpPr txBox="1"/>
           <p:nvPr/>
         </p:nvSpPr>
         <p:spPr>
           <a:xfrm>
-            <a:off x="457200" y="4754880"/>
-            <a:ext cx="11274552" cy="1828800"/>
+            <a:off x="457200" y="365760"/>
+            <a:ext cx="11274552" cy="2286000"/>
           </a:xfrm>
           <a:prstGeom prst="rect">
             <a:avLst/>
@@ -7582,14 +9114,1583 @@
           <a:lstStyle/>
           <a:p>
             <a:pPr algn="ctr">
-              <a:defRPr sz="1800" i="0">
-                <a:solidFill>
-                  <a:srgbClr val="E94560"/>
-                </a:solidFill>
-              </a:defRPr>
-            </a:pPr>
-            <a:r>
-              <a:t>blog.tanteng.space</a:t>
+              <a:defRPr sz="2800" i="1">
+                <a:solidFill>
+                  <a:srgbClr val="1A1A2E"/>
+                </a:solidFill>
+              </a:defRPr>
+            </a:pPr>
+            <a:r>
+              <a:t>"智能的最高形态，不在于独立思考，而在于共同进化。"</a:t>
+            </a:r>
+          </a:p>
+        </p:txBody>
+      </p:sp>
+      <p:sp>
+        <p:nvSpPr>
+          <p:cNvPr id="5" name="Rounded Rectangle 4"/>
+          <p:cNvSpPr/>
+          <p:nvPr/>
+        </p:nvSpPr>
+        <p:spPr>
+          <a:xfrm>
+            <a:off x="457200" y="1828800"/>
+            <a:ext cx="2103120" cy="4114800"/>
+          </a:xfrm>
+          <a:prstGeom prst="roundRect">
+            <a:avLst/>
+          </a:prstGeom>
+          <a:solidFill>
+            <a:srgbClr val="1A1A2E"/>
+          </a:solidFill>
+          <a:ln>
+            <a:noFill/>
+          </a:ln>
+        </p:spPr>
+        <p:style>
+          <a:lnRef idx="1">
+            <a:schemeClr val="accent1"/>
+          </a:lnRef>
+          <a:fillRef idx="3">
+            <a:schemeClr val="accent1"/>
+          </a:fillRef>
+          <a:effectRef idx="2">
+            <a:schemeClr val="accent1"/>
+          </a:effectRef>
+          <a:fontRef idx="minor">
+            <a:schemeClr val="lt1"/>
+          </a:fontRef>
+        </p:style>
+        <p:txBody>
+          <a:bodyPr rtlCol="0" anchor="ctr"/>
+          <a:lstStyle/>
+          <a:p>
+            <a:pPr algn="ctr"/>
+          </a:p>
+        </p:txBody>
+      </p:sp>
+      <p:sp>
+        <p:nvSpPr>
+          <p:cNvPr id="6" name="TextBox 5"/>
+          <p:cNvSpPr txBox="1"/>
+          <p:nvPr/>
+        </p:nvSpPr>
+        <p:spPr>
+          <a:xfrm>
+            <a:off x="457200" y="2011680"/>
+            <a:ext cx="2103120" cy="1188720"/>
+          </a:xfrm>
+          <a:prstGeom prst="rect">
+            <a:avLst/>
+          </a:prstGeom>
+          <a:noFill/>
+        </p:spPr>
+        <p:txBody>
+          <a:bodyPr wrap="none">
+            <a:spAutoFit/>
+          </a:bodyPr>
+          <a:lstStyle/>
+          <a:p>
+            <a:pPr algn="ctr">
+              <a:defRPr sz="3000" b="0">
+                <a:solidFill>
+                  <a:srgbClr val="FFFFFF"/>
+                </a:solidFill>
+              </a:defRPr>
+            </a:pPr>
+            <a:r>
+              <a:t>👁️ 感知</a:t>
+            </a:r>
+          </a:p>
+        </p:txBody>
+      </p:sp>
+      <p:sp>
+        <p:nvSpPr>
+          <p:cNvPr id="7" name="TextBox 6"/>
+          <p:cNvSpPr txBox="1"/>
+          <p:nvPr/>
+        </p:nvSpPr>
+        <p:spPr>
+          <a:xfrm>
+            <a:off x="457200" y="3291840"/>
+            <a:ext cx="2103120" cy="1188720"/>
+          </a:xfrm>
+          <a:prstGeom prst="rect">
+            <a:avLst/>
+          </a:prstGeom>
+          <a:noFill/>
+        </p:spPr>
+        <p:txBody>
+          <a:bodyPr wrap="none">
+            <a:spAutoFit/>
+          </a:bodyPr>
+          <a:lstStyle/>
+          <a:p>
+            <a:pPr algn="ctr">
+              <a:defRPr sz="2000" b="1">
+                <a:solidFill>
+                  <a:srgbClr val="553C9A"/>
+                </a:solidFill>
+              </a:defRPr>
+            </a:pPr>
+            <a:r>
+              <a:t>眼睛</a:t>
+            </a:r>
+          </a:p>
+        </p:txBody>
+      </p:sp>
+      <p:sp>
+        <p:nvSpPr>
+          <p:cNvPr id="8" name="TextBox 7"/>
+          <p:cNvSpPr txBox="1"/>
+          <p:nvPr/>
+        </p:nvSpPr>
+        <p:spPr>
+          <a:xfrm>
+            <a:off x="457200" y="4572000"/>
+            <a:ext cx="2103120" cy="1188720"/>
+          </a:xfrm>
+          <a:prstGeom prst="rect">
+            <a:avLst/>
+          </a:prstGeom>
+          <a:noFill/>
+        </p:spPr>
+        <p:txBody>
+          <a:bodyPr wrap="none">
+            <a:spAutoFit/>
+          </a:bodyPr>
+          <a:lstStyle/>
+          <a:p>
+            <a:pPr algn="ctr">
+              <a:defRPr sz="1200" b="0">
+                <a:solidFill>
+                  <a:srgbClr val="FFFFFF"/>
+                </a:solidFill>
+              </a:defRPr>
+            </a:pPr>
+            <a:r>
+              <a:t>捕捉世界的信息</a:t>
+            </a:r>
+          </a:p>
+        </p:txBody>
+      </p:sp>
+      <p:sp>
+        <p:nvSpPr>
+          <p:cNvPr id="9" name="Rounded Rectangle 8"/>
+          <p:cNvSpPr/>
+          <p:nvPr/>
+        </p:nvSpPr>
+        <p:spPr>
+          <a:xfrm>
+            <a:off x="2743200" y="1828800"/>
+            <a:ext cx="2103120" cy="4114800"/>
+          </a:xfrm>
+          <a:prstGeom prst="roundRect">
+            <a:avLst/>
+          </a:prstGeom>
+          <a:solidFill>
+            <a:srgbClr val="1A1A2E"/>
+          </a:solidFill>
+          <a:ln>
+            <a:noFill/>
+          </a:ln>
+        </p:spPr>
+        <p:style>
+          <a:lnRef idx="1">
+            <a:schemeClr val="accent1"/>
+          </a:lnRef>
+          <a:fillRef idx="3">
+            <a:schemeClr val="accent1"/>
+          </a:fillRef>
+          <a:effectRef idx="2">
+            <a:schemeClr val="accent1"/>
+          </a:effectRef>
+          <a:fontRef idx="minor">
+            <a:schemeClr val="lt1"/>
+          </a:fontRef>
+        </p:style>
+        <p:txBody>
+          <a:bodyPr rtlCol="0" anchor="ctr"/>
+          <a:lstStyle/>
+          <a:p>
+            <a:pPr algn="ctr"/>
+          </a:p>
+        </p:txBody>
+      </p:sp>
+      <p:sp>
+        <p:nvSpPr>
+          <p:cNvPr id="10" name="TextBox 9"/>
+          <p:cNvSpPr txBox="1"/>
+          <p:nvPr/>
+        </p:nvSpPr>
+        <p:spPr>
+          <a:xfrm>
+            <a:off x="2743200" y="2011680"/>
+            <a:ext cx="2103120" cy="1188720"/>
+          </a:xfrm>
+          <a:prstGeom prst="rect">
+            <a:avLst/>
+          </a:prstGeom>
+          <a:noFill/>
+        </p:spPr>
+        <p:txBody>
+          <a:bodyPr wrap="none">
+            <a:spAutoFit/>
+          </a:bodyPr>
+          <a:lstStyle/>
+          <a:p>
+            <a:pPr algn="ctr">
+              <a:defRPr sz="3000" b="0">
+                <a:solidFill>
+                  <a:srgbClr val="FFFFFF"/>
+                </a:solidFill>
+              </a:defRPr>
+            </a:pPr>
+            <a:r>
+              <a:t>🧠 记忆</a:t>
+            </a:r>
+          </a:p>
+        </p:txBody>
+      </p:sp>
+      <p:sp>
+        <p:nvSpPr>
+          <p:cNvPr id="11" name="TextBox 10"/>
+          <p:cNvSpPr txBox="1"/>
+          <p:nvPr/>
+        </p:nvSpPr>
+        <p:spPr>
+          <a:xfrm>
+            <a:off x="2743200" y="3291840"/>
+            <a:ext cx="2103120" cy="1188720"/>
+          </a:xfrm>
+          <a:prstGeom prst="rect">
+            <a:avLst/>
+          </a:prstGeom>
+          <a:noFill/>
+        </p:spPr>
+        <p:txBody>
+          <a:bodyPr wrap="none">
+            <a:spAutoFit/>
+          </a:bodyPr>
+          <a:lstStyle/>
+          <a:p>
+            <a:pPr algn="ctr">
+              <a:defRPr sz="2000" b="1">
+                <a:solidFill>
+                  <a:srgbClr val="553C9A"/>
+                </a:solidFill>
+              </a:defRPr>
+            </a:pPr>
+            <a:r>
+              <a:t>神经</a:t>
+            </a:r>
+          </a:p>
+        </p:txBody>
+      </p:sp>
+      <p:sp>
+        <p:nvSpPr>
+          <p:cNvPr id="12" name="TextBox 11"/>
+          <p:cNvSpPr txBox="1"/>
+          <p:nvPr/>
+        </p:nvSpPr>
+        <p:spPr>
+          <a:xfrm>
+            <a:off x="2743200" y="4572000"/>
+            <a:ext cx="2103120" cy="1188720"/>
+          </a:xfrm>
+          <a:prstGeom prst="rect">
+            <a:avLst/>
+          </a:prstGeom>
+          <a:noFill/>
+        </p:spPr>
+        <p:txBody>
+          <a:bodyPr wrap="none">
+            <a:spAutoFit/>
+          </a:bodyPr>
+          <a:lstStyle/>
+          <a:p>
+            <a:pPr algn="ctr">
+              <a:defRPr sz="1200" b="0">
+                <a:solidFill>
+                  <a:srgbClr val="FFFFFF"/>
+                </a:solidFill>
+              </a:defRPr>
+            </a:pPr>
+            <a:r>
+              <a:t>承载经验的痕迹</a:t>
+            </a:r>
+          </a:p>
+        </p:txBody>
+      </p:sp>
+      <p:sp>
+        <p:nvSpPr>
+          <p:cNvPr id="13" name="Rounded Rectangle 12"/>
+          <p:cNvSpPr/>
+          <p:nvPr/>
+        </p:nvSpPr>
+        <p:spPr>
+          <a:xfrm>
+            <a:off x="5029200" y="1828800"/>
+            <a:ext cx="2103120" cy="4114800"/>
+          </a:xfrm>
+          <a:prstGeom prst="roundRect">
+            <a:avLst/>
+          </a:prstGeom>
+          <a:solidFill>
+            <a:srgbClr val="1A1A2E"/>
+          </a:solidFill>
+          <a:ln>
+            <a:noFill/>
+          </a:ln>
+        </p:spPr>
+        <p:style>
+          <a:lnRef idx="1">
+            <a:schemeClr val="accent1"/>
+          </a:lnRef>
+          <a:fillRef idx="3">
+            <a:schemeClr val="accent1"/>
+          </a:fillRef>
+          <a:effectRef idx="2">
+            <a:schemeClr val="accent1"/>
+          </a:effectRef>
+          <a:fontRef idx="minor">
+            <a:schemeClr val="lt1"/>
+          </a:fontRef>
+        </p:style>
+        <p:txBody>
+          <a:bodyPr rtlCol="0" anchor="ctr"/>
+          <a:lstStyle/>
+          <a:p>
+            <a:pPr algn="ctr"/>
+          </a:p>
+        </p:txBody>
+      </p:sp>
+      <p:sp>
+        <p:nvSpPr>
+          <p:cNvPr id="14" name="TextBox 13"/>
+          <p:cNvSpPr txBox="1"/>
+          <p:nvPr/>
+        </p:nvSpPr>
+        <p:spPr>
+          <a:xfrm>
+            <a:off x="5029200" y="2011680"/>
+            <a:ext cx="2103120" cy="1188720"/>
+          </a:xfrm>
+          <a:prstGeom prst="rect">
+            <a:avLst/>
+          </a:prstGeom>
+          <a:noFill/>
+        </p:spPr>
+        <p:txBody>
+          <a:bodyPr wrap="none">
+            <a:spAutoFit/>
+          </a:bodyPr>
+          <a:lstStyle/>
+          <a:p>
+            <a:pPr algn="ctr">
+              <a:defRPr sz="3000" b="0">
+                <a:solidFill>
+                  <a:srgbClr val="FFFFFF"/>
+                </a:solidFill>
+              </a:defRPr>
+            </a:pPr>
+            <a:r>
+              <a:t>⚙️ 推理</a:t>
+            </a:r>
+          </a:p>
+        </p:txBody>
+      </p:sp>
+      <p:sp>
+        <p:nvSpPr>
+          <p:cNvPr id="15" name="TextBox 14"/>
+          <p:cNvSpPr txBox="1"/>
+          <p:nvPr/>
+        </p:nvSpPr>
+        <p:spPr>
+          <a:xfrm>
+            <a:off x="5029200" y="3291840"/>
+            <a:ext cx="2103120" cy="1188720"/>
+          </a:xfrm>
+          <a:prstGeom prst="rect">
+            <a:avLst/>
+          </a:prstGeom>
+          <a:noFill/>
+        </p:spPr>
+        <p:txBody>
+          <a:bodyPr wrap="none">
+            <a:spAutoFit/>
+          </a:bodyPr>
+          <a:lstStyle/>
+          <a:p>
+            <a:pPr algn="ctr">
+              <a:defRPr sz="2000" b="1">
+                <a:solidFill>
+                  <a:srgbClr val="553C9A"/>
+                </a:solidFill>
+              </a:defRPr>
+            </a:pPr>
+            <a:r>
+              <a:t>大脑</a:t>
+            </a:r>
+          </a:p>
+        </p:txBody>
+      </p:sp>
+      <p:sp>
+        <p:nvSpPr>
+          <p:cNvPr id="16" name="TextBox 15"/>
+          <p:cNvSpPr txBox="1"/>
+          <p:nvPr/>
+        </p:nvSpPr>
+        <p:spPr>
+          <a:xfrm>
+            <a:off x="5029200" y="4572000"/>
+            <a:ext cx="2103120" cy="1188720"/>
+          </a:xfrm>
+          <a:prstGeom prst="rect">
+            <a:avLst/>
+          </a:prstGeom>
+          <a:noFill/>
+        </p:spPr>
+        <p:txBody>
+          <a:bodyPr wrap="none">
+            <a:spAutoFit/>
+          </a:bodyPr>
+          <a:lstStyle/>
+          <a:p>
+            <a:pPr algn="ctr">
+              <a:defRPr sz="1200" b="0">
+                <a:solidFill>
+                  <a:srgbClr val="FFFFFF"/>
+                </a:solidFill>
+              </a:defRPr>
+            </a:pPr>
+            <a:r>
+              <a:t>编织逻辑的网络</a:t>
+            </a:r>
+          </a:p>
+        </p:txBody>
+      </p:sp>
+      <p:sp>
+        <p:nvSpPr>
+          <p:cNvPr id="17" name="Rounded Rectangle 16"/>
+          <p:cNvSpPr/>
+          <p:nvPr/>
+        </p:nvSpPr>
+        <p:spPr>
+          <a:xfrm>
+            <a:off x="7315200" y="1828800"/>
+            <a:ext cx="2103120" cy="4114800"/>
+          </a:xfrm>
+          <a:prstGeom prst="roundRect">
+            <a:avLst/>
+          </a:prstGeom>
+          <a:solidFill>
+            <a:srgbClr val="1A1A2E"/>
+          </a:solidFill>
+          <a:ln>
+            <a:noFill/>
+          </a:ln>
+        </p:spPr>
+        <p:style>
+          <a:lnRef idx="1">
+            <a:schemeClr val="accent1"/>
+          </a:lnRef>
+          <a:fillRef idx="3">
+            <a:schemeClr val="accent1"/>
+          </a:fillRef>
+          <a:effectRef idx="2">
+            <a:schemeClr val="accent1"/>
+          </a:effectRef>
+          <a:fontRef idx="minor">
+            <a:schemeClr val="lt1"/>
+          </a:fontRef>
+        </p:style>
+        <p:txBody>
+          <a:bodyPr rtlCol="0" anchor="ctr"/>
+          <a:lstStyle/>
+          <a:p>
+            <a:pPr algn="ctr"/>
+          </a:p>
+        </p:txBody>
+      </p:sp>
+      <p:sp>
+        <p:nvSpPr>
+          <p:cNvPr id="18" name="TextBox 17"/>
+          <p:cNvSpPr txBox="1"/>
+          <p:nvPr/>
+        </p:nvSpPr>
+        <p:spPr>
+          <a:xfrm>
+            <a:off x="7315200" y="2011680"/>
+            <a:ext cx="2103120" cy="1188720"/>
+          </a:xfrm>
+          <a:prstGeom prst="rect">
+            <a:avLst/>
+          </a:prstGeom>
+          <a:noFill/>
+        </p:spPr>
+        <p:txBody>
+          <a:bodyPr wrap="none">
+            <a:spAutoFit/>
+          </a:bodyPr>
+          <a:lstStyle/>
+          <a:p>
+            <a:pPr algn="ctr">
+              <a:defRPr sz="3000" b="0">
+                <a:solidFill>
+                  <a:srgbClr val="FFFFFF"/>
+                </a:solidFill>
+              </a:defRPr>
+            </a:pPr>
+            <a:r>
+              <a:t>💪 行动</a:t>
+            </a:r>
+          </a:p>
+        </p:txBody>
+      </p:sp>
+      <p:sp>
+        <p:nvSpPr>
+          <p:cNvPr id="19" name="TextBox 18"/>
+          <p:cNvSpPr txBox="1"/>
+          <p:nvPr/>
+        </p:nvSpPr>
+        <p:spPr>
+          <a:xfrm>
+            <a:off x="7315200" y="3291840"/>
+            <a:ext cx="2103120" cy="1188720"/>
+          </a:xfrm>
+          <a:prstGeom prst="rect">
+            <a:avLst/>
+          </a:prstGeom>
+          <a:noFill/>
+        </p:spPr>
+        <p:txBody>
+          <a:bodyPr wrap="none">
+            <a:spAutoFit/>
+          </a:bodyPr>
+          <a:lstStyle/>
+          <a:p>
+            <a:pPr algn="ctr">
+              <a:defRPr sz="2000" b="1">
+                <a:solidFill>
+                  <a:srgbClr val="553C9A"/>
+                </a:solidFill>
+              </a:defRPr>
+            </a:pPr>
+            <a:r>
+              <a:t>肌肉</a:t>
+            </a:r>
+          </a:p>
+        </p:txBody>
+      </p:sp>
+      <p:sp>
+        <p:nvSpPr>
+          <p:cNvPr id="20" name="TextBox 19"/>
+          <p:cNvSpPr txBox="1"/>
+          <p:nvPr/>
+        </p:nvSpPr>
+        <p:spPr>
+          <a:xfrm>
+            <a:off x="7315200" y="4572000"/>
+            <a:ext cx="2103120" cy="1188720"/>
+          </a:xfrm>
+          <a:prstGeom prst="rect">
+            <a:avLst/>
+          </a:prstGeom>
+          <a:noFill/>
+        </p:spPr>
+        <p:txBody>
+          <a:bodyPr wrap="none">
+            <a:spAutoFit/>
+          </a:bodyPr>
+          <a:lstStyle/>
+          <a:p>
+            <a:pPr algn="ctr">
+              <a:defRPr sz="1200" b="0">
+                <a:solidFill>
+                  <a:srgbClr val="FFFFFF"/>
+                </a:solidFill>
+              </a:defRPr>
+            </a:pPr>
+            <a:r>
+              <a:t>驱动行动的执行</a:t>
+            </a:r>
+          </a:p>
+        </p:txBody>
+      </p:sp>
+      <p:sp>
+        <p:nvSpPr>
+          <p:cNvPr id="21" name="Rounded Rectangle 20"/>
+          <p:cNvSpPr/>
+          <p:nvPr/>
+        </p:nvSpPr>
+        <p:spPr>
+          <a:xfrm>
+            <a:off x="9601200" y="1828800"/>
+            <a:ext cx="2103120" cy="4114800"/>
+          </a:xfrm>
+          <a:prstGeom prst="roundRect">
+            <a:avLst/>
+          </a:prstGeom>
+          <a:solidFill>
+            <a:srgbClr val="1A1A2E"/>
+          </a:solidFill>
+          <a:ln>
+            <a:noFill/>
+          </a:ln>
+        </p:spPr>
+        <p:style>
+          <a:lnRef idx="1">
+            <a:schemeClr val="accent1"/>
+          </a:lnRef>
+          <a:fillRef idx="3">
+            <a:schemeClr val="accent1"/>
+          </a:fillRef>
+          <a:effectRef idx="2">
+            <a:schemeClr val="accent1"/>
+          </a:effectRef>
+          <a:fontRef idx="minor">
+            <a:schemeClr val="lt1"/>
+          </a:fontRef>
+        </p:style>
+        <p:txBody>
+          <a:bodyPr rtlCol="0" anchor="ctr"/>
+          <a:lstStyle/>
+          <a:p>
+            <a:pPr algn="ctr"/>
+          </a:p>
+        </p:txBody>
+      </p:sp>
+      <p:sp>
+        <p:nvSpPr>
+          <p:cNvPr id="22" name="TextBox 21"/>
+          <p:cNvSpPr txBox="1"/>
+          <p:nvPr/>
+        </p:nvSpPr>
+        <p:spPr>
+          <a:xfrm>
+            <a:off x="9601200" y="2011680"/>
+            <a:ext cx="2103120" cy="1188720"/>
+          </a:xfrm>
+          <a:prstGeom prst="rect">
+            <a:avLst/>
+          </a:prstGeom>
+          <a:noFill/>
+        </p:spPr>
+        <p:txBody>
+          <a:bodyPr wrap="none">
+            <a:spAutoFit/>
+          </a:bodyPr>
+          <a:lstStyle/>
+          <a:p>
+            <a:pPr algn="ctr">
+              <a:defRPr sz="3000" b="0">
+                <a:solidFill>
+                  <a:srgbClr val="FFFFFF"/>
+                </a:solidFill>
+              </a:defRPr>
+            </a:pPr>
+            <a:r>
+              <a:t>🔮 反思</a:t>
+            </a:r>
+          </a:p>
+        </p:txBody>
+      </p:sp>
+      <p:sp>
+        <p:nvSpPr>
+          <p:cNvPr id="23" name="TextBox 22"/>
+          <p:cNvSpPr txBox="1"/>
+          <p:nvPr/>
+        </p:nvSpPr>
+        <p:spPr>
+          <a:xfrm>
+            <a:off x="9601200" y="3291840"/>
+            <a:ext cx="2103120" cy="1188720"/>
+          </a:xfrm>
+          <a:prstGeom prst="rect">
+            <a:avLst/>
+          </a:prstGeom>
+          <a:noFill/>
+        </p:spPr>
+        <p:txBody>
+          <a:bodyPr wrap="none">
+            <a:spAutoFit/>
+          </a:bodyPr>
+          <a:lstStyle/>
+          <a:p>
+            <a:pPr algn="ctr">
+              <a:defRPr sz="2000" b="1">
+                <a:solidFill>
+                  <a:srgbClr val="553C9A"/>
+                </a:solidFill>
+              </a:defRPr>
+            </a:pPr>
+            <a:r>
+              <a:t>灵魂</a:t>
+            </a:r>
+          </a:p>
+        </p:txBody>
+      </p:sp>
+      <p:sp>
+        <p:nvSpPr>
+          <p:cNvPr id="24" name="TextBox 23"/>
+          <p:cNvSpPr txBox="1"/>
+          <p:nvPr/>
+        </p:nvSpPr>
+        <p:spPr>
+          <a:xfrm>
+            <a:off x="9601200" y="4572000"/>
+            <a:ext cx="2103120" cy="1188720"/>
+          </a:xfrm>
+          <a:prstGeom prst="rect">
+            <a:avLst/>
+          </a:prstGeom>
+          <a:noFill/>
+        </p:spPr>
+        <p:txBody>
+          <a:bodyPr wrap="none">
+            <a:spAutoFit/>
+          </a:bodyPr>
+          <a:lstStyle/>
+          <a:p>
+            <a:pPr algn="ctr">
+              <a:defRPr sz="1200" b="0">
+                <a:solidFill>
+                  <a:srgbClr val="FFFFFF"/>
+                </a:solidFill>
+              </a:defRPr>
+            </a:pPr>
+            <a:r>
+              <a:t>对自身局限的觉察</a:t>
+            </a:r>
+          </a:p>
+        </p:txBody>
+      </p:sp>
+    </p:spTree>
+  </p:cSld>
+  <p:clrMapOvr>
+    <a:masterClrMapping/>
+  </p:clrMapOvr>
+</p:sld>
+</file>
+
+<file path=ppt/slides/slide28.xml><?xml version="1.0" encoding="utf-8"?>
+<p:sld xmlns:a="http://schemas.openxmlformats.org/drawingml/2006/main" xmlns:p="http://schemas.openxmlformats.org/presentationml/2006/main" xmlns:r="http://schemas.openxmlformats.org/officeDocument/2006/relationships">
+  <p:cSld>
+    <p:spTree>
+      <p:nvGrpSpPr>
+        <p:cNvPr id="1" name=""/>
+        <p:cNvGrpSpPr/>
+        <p:nvPr/>
+      </p:nvGrpSpPr>
+      <p:grpSpPr/>
+      <p:sp>
+        <p:nvSpPr>
+          <p:cNvPr id="2" name="Rectangle 1"/>
+          <p:cNvSpPr/>
+          <p:nvPr/>
+        </p:nvSpPr>
+        <p:spPr>
+          <a:xfrm>
+            <a:off x="0" y="0"/>
+            <a:ext cx="12188952" cy="6858000"/>
+          </a:xfrm>
+          <a:prstGeom prst="rect">
+            <a:avLst/>
+          </a:prstGeom>
+          <a:solidFill>
+            <a:srgbClr val="FFFFFF"/>
+          </a:solidFill>
+          <a:ln>
+            <a:noFill/>
+          </a:ln>
+        </p:spPr>
+        <p:style>
+          <a:lnRef idx="1">
+            <a:schemeClr val="accent1"/>
+          </a:lnRef>
+          <a:fillRef idx="3">
+            <a:schemeClr val="accent1"/>
+          </a:fillRef>
+          <a:effectRef idx="2">
+            <a:schemeClr val="accent1"/>
+          </a:effectRef>
+          <a:fontRef idx="minor">
+            <a:schemeClr val="lt1"/>
+          </a:fontRef>
+        </p:style>
+        <p:txBody>
+          <a:bodyPr rtlCol="0" anchor="ctr"/>
+          <a:lstStyle/>
+          <a:p>
+            <a:pPr algn="ctr"/>
+          </a:p>
+        </p:txBody>
+      </p:sp>
+      <p:sp>
+        <p:nvSpPr>
+          <p:cNvPr id="3" name="Rectangle 2"/>
+          <p:cNvSpPr/>
+          <p:nvPr/>
+        </p:nvSpPr>
+        <p:spPr>
+          <a:xfrm>
+            <a:off x="0" y="0"/>
+            <a:ext cx="12188952" cy="1097280"/>
+          </a:xfrm>
+          <a:prstGeom prst="rect">
+            <a:avLst/>
+          </a:prstGeom>
+          <a:solidFill>
+            <a:srgbClr val="553C9A"/>
+          </a:solidFill>
+          <a:ln>
+            <a:noFill/>
+          </a:ln>
+        </p:spPr>
+        <p:style>
+          <a:lnRef idx="1">
+            <a:schemeClr val="accent1"/>
+          </a:lnRef>
+          <a:fillRef idx="3">
+            <a:schemeClr val="accent1"/>
+          </a:fillRef>
+          <a:effectRef idx="2">
+            <a:schemeClr val="accent1"/>
+          </a:effectRef>
+          <a:fontRef idx="minor">
+            <a:schemeClr val="lt1"/>
+          </a:fontRef>
+        </p:style>
+        <p:txBody>
+          <a:bodyPr rtlCol="0" anchor="ctr"/>
+          <a:lstStyle/>
+          <a:p>
+            <a:pPr algn="ctr"/>
+          </a:p>
+        </p:txBody>
+      </p:sp>
+      <p:sp>
+        <p:nvSpPr>
+          <p:cNvPr id="4" name="TextBox 3"/>
+          <p:cNvSpPr txBox="1"/>
+          <p:nvPr/>
+        </p:nvSpPr>
+        <p:spPr>
+          <a:xfrm>
+            <a:off x="457200" y="228600"/>
+            <a:ext cx="11274552" cy="822960"/>
+          </a:xfrm>
+          <a:prstGeom prst="rect">
+            <a:avLst/>
+          </a:prstGeom>
+          <a:noFill/>
+        </p:spPr>
+        <p:txBody>
+          <a:bodyPr wrap="none">
+            <a:spAutoFit/>
+          </a:bodyPr>
+          <a:lstStyle/>
+          <a:p>
+            <a:pPr>
+              <a:defRPr sz="2800" b="1">
+                <a:solidFill>
+                  <a:srgbClr val="FFFFFF"/>
+                </a:solidFill>
+              </a:defRPr>
+            </a:pPr>
+            <a:r>
+              <a:t>后记：从确定性工程到概率性工程</a:t>
+            </a:r>
+          </a:p>
+        </p:txBody>
+      </p:sp>
+      <p:sp>
+        <p:nvSpPr>
+          <p:cNvPr id="5" name="TextBox 4"/>
+          <p:cNvSpPr txBox="1"/>
+          <p:nvPr/>
+        </p:nvSpPr>
+        <p:spPr>
+          <a:xfrm>
+            <a:off x="640080" y="1371600"/>
+            <a:ext cx="10972800" cy="5029200"/>
+          </a:xfrm>
+          <a:prstGeom prst="rect">
+            <a:avLst/>
+          </a:prstGeom>
+          <a:noFill/>
+        </p:spPr>
+        <p:txBody>
+          <a:bodyPr wrap="square">
+            <a:spAutoFit/>
+          </a:bodyPr>
+          <a:lstStyle/>
+          <a:p>
+            <a:pPr>
+              <a:spcAft>
+                <a:spcPts val="1400"/>
+              </a:spcAft>
+              <a:defRPr sz="2100" b="0">
+                <a:solidFill>
+                  <a:srgbClr val="1A1A2E"/>
+                </a:solidFill>
+              </a:defRPr>
+            </a:pPr>
+            <a:r>
+              <a:t>• 传统软件 = 牛顿力学隐喻：世界如精密钟表，追求零熵，将不确定性视为 bug</a:t>
+            </a:r>
+          </a:p>
+          <a:p>
+            <a:pPr>
+              <a:spcAft>
+                <a:spcPts val="1400"/>
+              </a:spcAft>
+              <a:defRPr sz="2100" b="0">
+                <a:solidFill>
+                  <a:srgbClr val="1A1A2E"/>
+                </a:solidFill>
+              </a:defRPr>
+            </a:pPr>
+            <a:r>
+              <a:t>• Agent 时代 = 达尔文逻辑：软件展现生长性（通过 RAG 积累）、适应性（动态调整）、繁殖性（生成新 Prompt）</a:t>
+            </a:r>
+          </a:p>
+          <a:p>
+            <a:pPr>
+              <a:spcAft>
+                <a:spcPts val="1400"/>
+              </a:spcAft>
+              <a:defRPr sz="2100" b="1">
+                <a:solidFill>
+                  <a:srgbClr val="553C9A"/>
+                </a:solidFill>
+              </a:defRPr>
+            </a:pPr>
+            <a:r>
+              <a:t>• 我们正见证硅基生命的「寒武纪大爆发」</a:t>
+            </a:r>
+          </a:p>
+          <a:p>
+            <a:pPr>
+              <a:spcAft>
+                <a:spcPts val="1400"/>
+              </a:spcAft>
+              <a:defRPr sz="2100" b="0">
+                <a:solidFill>
+                  <a:srgbClr val="1A1A2E"/>
+                </a:solidFill>
+              </a:defRPr>
+            </a:pPr>
+            <a:r>
+              <a:t>• 架构师的新角色 = 熵的园丁：无法命令植物长多高，但可以优化土壤</a:t>
+            </a:r>
+          </a:p>
+        </p:txBody>
+      </p:sp>
+    </p:spTree>
+  </p:cSld>
+  <p:clrMapOvr>
+    <a:masterClrMapping/>
+  </p:clrMapOvr>
+</p:sld>
+</file>
+
+<file path=ppt/slides/slide29.xml><?xml version="1.0" encoding="utf-8"?>
+<p:sld xmlns:a="http://schemas.openxmlformats.org/drawingml/2006/main" xmlns:p="http://schemas.openxmlformats.org/presentationml/2006/main" xmlns:r="http://schemas.openxmlformats.org/officeDocument/2006/relationships">
+  <p:cSld>
+    <p:spTree>
+      <p:nvGrpSpPr>
+        <p:cNvPr id="1" name=""/>
+        <p:cNvGrpSpPr/>
+        <p:nvPr/>
+      </p:nvGrpSpPr>
+      <p:grpSpPr/>
+      <p:sp>
+        <p:nvSpPr>
+          <p:cNvPr id="2" name="Rectangle 1"/>
+          <p:cNvSpPr/>
+          <p:nvPr/>
+        </p:nvSpPr>
+        <p:spPr>
+          <a:xfrm>
+            <a:off x="0" y="0"/>
+            <a:ext cx="12188952" cy="6858000"/>
+          </a:xfrm>
+          <a:prstGeom prst="rect">
+            <a:avLst/>
+          </a:prstGeom>
+          <a:solidFill>
+            <a:srgbClr val="FFFFFF"/>
+          </a:solidFill>
+          <a:ln>
+            <a:noFill/>
+          </a:ln>
+        </p:spPr>
+        <p:style>
+          <a:lnRef idx="1">
+            <a:schemeClr val="accent1"/>
+          </a:lnRef>
+          <a:fillRef idx="3">
+            <a:schemeClr val="accent1"/>
+          </a:fillRef>
+          <a:effectRef idx="2">
+            <a:schemeClr val="accent1"/>
+          </a:effectRef>
+          <a:fontRef idx="minor">
+            <a:schemeClr val="lt1"/>
+          </a:fontRef>
+        </p:style>
+        <p:txBody>
+          <a:bodyPr rtlCol="0" anchor="ctr"/>
+          <a:lstStyle/>
+          <a:p>
+            <a:pPr algn="ctr"/>
+          </a:p>
+        </p:txBody>
+      </p:sp>
+      <p:sp>
+        <p:nvSpPr>
+          <p:cNvPr id="3" name="Rectangle 2"/>
+          <p:cNvSpPr/>
+          <p:nvPr/>
+        </p:nvSpPr>
+        <p:spPr>
+          <a:xfrm>
+            <a:off x="0" y="0"/>
+            <a:ext cx="12188952" cy="1097280"/>
+          </a:xfrm>
+          <a:prstGeom prst="rect">
+            <a:avLst/>
+          </a:prstGeom>
+          <a:solidFill>
+            <a:srgbClr val="1A1A2E"/>
+          </a:solidFill>
+          <a:ln>
+            <a:noFill/>
+          </a:ln>
+        </p:spPr>
+        <p:style>
+          <a:lnRef idx="1">
+            <a:schemeClr val="accent1"/>
+          </a:lnRef>
+          <a:fillRef idx="3">
+            <a:schemeClr val="accent1"/>
+          </a:fillRef>
+          <a:effectRef idx="2">
+            <a:schemeClr val="accent1"/>
+          </a:effectRef>
+          <a:fontRef idx="minor">
+            <a:schemeClr val="lt1"/>
+          </a:fontRef>
+        </p:style>
+        <p:txBody>
+          <a:bodyPr rtlCol="0" anchor="ctr"/>
+          <a:lstStyle/>
+          <a:p>
+            <a:pPr algn="ctr"/>
+          </a:p>
+        </p:txBody>
+      </p:sp>
+      <p:sp>
+        <p:nvSpPr>
+          <p:cNvPr id="4" name="TextBox 3"/>
+          <p:cNvSpPr txBox="1"/>
+          <p:nvPr/>
+        </p:nvSpPr>
+        <p:spPr>
+          <a:xfrm>
+            <a:off x="457200" y="228600"/>
+            <a:ext cx="11274552" cy="822960"/>
+          </a:xfrm>
+          <a:prstGeom prst="rect">
+            <a:avLst/>
+          </a:prstGeom>
+          <a:noFill/>
+        </p:spPr>
+        <p:txBody>
+          <a:bodyPr wrap="none">
+            <a:spAutoFit/>
+          </a:bodyPr>
+          <a:lstStyle/>
+          <a:p>
+            <a:pPr>
+              <a:defRPr sz="3200" b="1">
+                <a:solidFill>
+                  <a:srgbClr val="FFFFFF"/>
+                </a:solidFill>
+              </a:defRPr>
+            </a:pPr>
+            <a:r>
+              <a:t>园丁的智慧：懂得「适度失控」</a:t>
+            </a:r>
+          </a:p>
+        </p:txBody>
+      </p:sp>
+      <p:sp>
+        <p:nvSpPr>
+          <p:cNvPr id="5" name="Rounded Rectangle 4"/>
+          <p:cNvSpPr/>
+          <p:nvPr/>
+        </p:nvSpPr>
+        <p:spPr>
+          <a:xfrm>
+            <a:off x="640080" y="1463040"/>
+            <a:ext cx="5271516" cy="1417320"/>
+          </a:xfrm>
+          <a:prstGeom prst="roundRect">
+            <a:avLst/>
+          </a:prstGeom>
+          <a:solidFill>
+            <a:srgbClr val="1A1A2E"/>
+          </a:solidFill>
+          <a:ln>
+            <a:noFill/>
+          </a:ln>
+        </p:spPr>
+        <p:style>
+          <a:lnRef idx="1">
+            <a:schemeClr val="accent1"/>
+          </a:lnRef>
+          <a:fillRef idx="3">
+            <a:schemeClr val="accent1"/>
+          </a:fillRef>
+          <a:effectRef idx="2">
+            <a:schemeClr val="accent1"/>
+          </a:effectRef>
+          <a:fontRef idx="minor">
+            <a:schemeClr val="lt1"/>
+          </a:fontRef>
+        </p:style>
+        <p:txBody>
+          <a:bodyPr rtlCol="0" anchor="ctr"/>
+          <a:lstStyle/>
+          <a:p>
+            <a:pPr algn="ctr"/>
+          </a:p>
+        </p:txBody>
+      </p:sp>
+      <p:sp>
+        <p:nvSpPr>
+          <p:cNvPr id="6" name="TextBox 5"/>
+          <p:cNvSpPr txBox="1"/>
+          <p:nvPr/>
+        </p:nvSpPr>
+        <p:spPr>
+          <a:xfrm>
+            <a:off x="640080" y="1536192"/>
+            <a:ext cx="5180076" cy="365760"/>
+          </a:xfrm>
+          <a:prstGeom prst="rect">
+            <a:avLst/>
+          </a:prstGeom>
+          <a:noFill/>
+        </p:spPr>
+        <p:txBody>
+          <a:bodyPr wrap="none">
+            <a:spAutoFit/>
+          </a:bodyPr>
+          <a:lstStyle/>
+          <a:p>
+            <a:pPr>
+              <a:defRPr sz="1400" b="1">
+                <a:solidFill>
+                  <a:srgbClr val="553C9A"/>
+                </a:solidFill>
+              </a:defRPr>
+            </a:pPr>
+            <a:r>
+              <a:t>🌱 浇水施肥</a:t>
+            </a:r>
+          </a:p>
+        </p:txBody>
+      </p:sp>
+      <p:sp>
+        <p:nvSpPr>
+          <p:cNvPr id="7" name="TextBox 6"/>
+          <p:cNvSpPr txBox="1"/>
+          <p:nvPr/>
+        </p:nvSpPr>
+        <p:spPr>
+          <a:xfrm>
+            <a:off x="640080" y="1920240"/>
+            <a:ext cx="5180076" cy="1005840"/>
+          </a:xfrm>
+          <a:prstGeom prst="rect">
+            <a:avLst/>
+          </a:prstGeom>
+          <a:noFill/>
+        </p:spPr>
+        <p:txBody>
+          <a:bodyPr wrap="square">
+            <a:spAutoFit/>
+          </a:bodyPr>
+          <a:lstStyle/>
+          <a:p>
+            <a:pPr>
+              <a:defRPr sz="1100">
+                <a:solidFill>
+                  <a:srgbClr val="A0AEC0"/>
+                </a:solidFill>
+              </a:defRPr>
+            </a:pPr>
+            <a:r>
+              <a:t>优化数据质量</a:t>
+            </a:r>
+            <a:br/>
+            <a:r>
+              <a:t>提供知识滋养系统</a:t>
+            </a:r>
+          </a:p>
+        </p:txBody>
+      </p:sp>
+      <p:sp>
+        <p:nvSpPr>
+          <p:cNvPr id="8" name="Rounded Rectangle 7"/>
+          <p:cNvSpPr/>
+          <p:nvPr/>
+        </p:nvSpPr>
+        <p:spPr>
+          <a:xfrm>
+            <a:off x="6094476" y="1463040"/>
+            <a:ext cx="5271516" cy="1417320"/>
+          </a:xfrm>
+          <a:prstGeom prst="roundRect">
+            <a:avLst/>
+          </a:prstGeom>
+          <a:solidFill>
+            <a:srgbClr val="1A1A2E"/>
+          </a:solidFill>
+          <a:ln>
+            <a:noFill/>
+          </a:ln>
+        </p:spPr>
+        <p:style>
+          <a:lnRef idx="1">
+            <a:schemeClr val="accent1"/>
+          </a:lnRef>
+          <a:fillRef idx="3">
+            <a:schemeClr val="accent1"/>
+          </a:fillRef>
+          <a:effectRef idx="2">
+            <a:schemeClr val="accent1"/>
+          </a:effectRef>
+          <a:fontRef idx="minor">
+            <a:schemeClr val="lt1"/>
+          </a:fontRef>
+        </p:style>
+        <p:txBody>
+          <a:bodyPr rtlCol="0" anchor="ctr"/>
+          <a:lstStyle/>
+          <a:p>
+            <a:pPr algn="ctr"/>
+          </a:p>
+        </p:txBody>
+      </p:sp>
+      <p:sp>
+        <p:nvSpPr>
+          <p:cNvPr id="9" name="TextBox 8"/>
+          <p:cNvSpPr txBox="1"/>
+          <p:nvPr/>
+        </p:nvSpPr>
+        <p:spPr>
+          <a:xfrm>
+            <a:off x="6094476" y="1536192"/>
+            <a:ext cx="5180076" cy="365760"/>
+          </a:xfrm>
+          <a:prstGeom prst="rect">
+            <a:avLst/>
+          </a:prstGeom>
+          <a:noFill/>
+        </p:spPr>
+        <p:txBody>
+          <a:bodyPr wrap="none">
+            <a:spAutoFit/>
+          </a:bodyPr>
+          <a:lstStyle/>
+          <a:p>
+            <a:pPr>
+              <a:defRPr sz="1400" b="1">
+                <a:solidFill>
+                  <a:srgbClr val="553C9A"/>
+                </a:solidFill>
+              </a:defRPr>
+            </a:pPr>
+            <a:r>
+              <a:t>✂️ 修剪枝叶</a:t>
+            </a:r>
+          </a:p>
+        </p:txBody>
+      </p:sp>
+      <p:sp>
+        <p:nvSpPr>
+          <p:cNvPr id="10" name="TextBox 9"/>
+          <p:cNvSpPr txBox="1"/>
+          <p:nvPr/>
+        </p:nvSpPr>
+        <p:spPr>
+          <a:xfrm>
+            <a:off x="6094476" y="1920240"/>
+            <a:ext cx="5180076" cy="1005840"/>
+          </a:xfrm>
+          <a:prstGeom prst="rect">
+            <a:avLst/>
+          </a:prstGeom>
+          <a:noFill/>
+        </p:spPr>
+        <p:txBody>
+          <a:bodyPr wrap="square">
+            <a:spAutoFit/>
+          </a:bodyPr>
+          <a:lstStyle/>
+          <a:p>
+            <a:pPr>
+              <a:defRPr sz="1100">
+                <a:solidFill>
+                  <a:srgbClr val="A0AEC0"/>
+                </a:solidFill>
+              </a:defRPr>
+            </a:pPr>
+            <a:r>
+              <a:t>设置护栏</a:t>
+            </a:r>
+            <a:br/>
+            <a:r>
+              <a:t>引入批判机制应对幻觉</a:t>
+            </a:r>
+          </a:p>
+        </p:txBody>
+      </p:sp>
+      <p:sp>
+        <p:nvSpPr>
+          <p:cNvPr id="11" name="Rounded Rectangle 10"/>
+          <p:cNvSpPr/>
+          <p:nvPr/>
+        </p:nvSpPr>
+        <p:spPr>
+          <a:xfrm>
+            <a:off x="640080" y="3017520"/>
+            <a:ext cx="5271516" cy="1417320"/>
+          </a:xfrm>
+          <a:prstGeom prst="roundRect">
+            <a:avLst/>
+          </a:prstGeom>
+          <a:solidFill>
+            <a:srgbClr val="1A1A2E"/>
+          </a:solidFill>
+          <a:ln>
+            <a:noFill/>
+          </a:ln>
+        </p:spPr>
+        <p:style>
+          <a:lnRef idx="1">
+            <a:schemeClr val="accent1"/>
+          </a:lnRef>
+          <a:fillRef idx="3">
+            <a:schemeClr val="accent1"/>
+          </a:fillRef>
+          <a:effectRef idx="2">
+            <a:schemeClr val="accent1"/>
+          </a:effectRef>
+          <a:fontRef idx="minor">
+            <a:schemeClr val="lt1"/>
+          </a:fontRef>
+        </p:style>
+        <p:txBody>
+          <a:bodyPr rtlCol="0" anchor="ctr"/>
+          <a:lstStyle/>
+          <a:p>
+            <a:pPr algn="ctr"/>
+          </a:p>
+        </p:txBody>
+      </p:sp>
+      <p:sp>
+        <p:nvSpPr>
+          <p:cNvPr id="12" name="TextBox 11"/>
+          <p:cNvSpPr txBox="1"/>
+          <p:nvPr/>
+        </p:nvSpPr>
+        <p:spPr>
+          <a:xfrm>
+            <a:off x="640080" y="3090672"/>
+            <a:ext cx="5180076" cy="365760"/>
+          </a:xfrm>
+          <a:prstGeom prst="rect">
+            <a:avLst/>
+          </a:prstGeom>
+          <a:noFill/>
+        </p:spPr>
+        <p:txBody>
+          <a:bodyPr wrap="none">
+            <a:spAutoFit/>
+          </a:bodyPr>
+          <a:lstStyle/>
+          <a:p>
+            <a:pPr>
+              <a:defRPr sz="1400" b="1">
+                <a:solidFill>
+                  <a:srgbClr val="553C9A"/>
+                </a:solidFill>
+              </a:defRPr>
+            </a:pPr>
+            <a:r>
+              <a:t>🌍 营造环境</a:t>
+            </a:r>
+          </a:p>
+        </p:txBody>
+      </p:sp>
+      <p:sp>
+        <p:nvSpPr>
+          <p:cNvPr id="13" name="TextBox 12"/>
+          <p:cNvSpPr txBox="1"/>
+          <p:nvPr/>
+        </p:nvSpPr>
+        <p:spPr>
+          <a:xfrm>
+            <a:off x="640080" y="3474720"/>
+            <a:ext cx="5180076" cy="1005840"/>
+          </a:xfrm>
+          <a:prstGeom prst="rect">
+            <a:avLst/>
+          </a:prstGeom>
+          <a:noFill/>
+        </p:spPr>
+        <p:txBody>
+          <a:bodyPr wrap="square">
+            <a:spAutoFit/>
+          </a:bodyPr>
+          <a:lstStyle/>
+          <a:p>
+            <a:pPr>
+              <a:defRPr sz="1100">
+                <a:solidFill>
+                  <a:srgbClr val="A0AEC0"/>
+                </a:solidFill>
+              </a:defRPr>
+            </a:pPr>
+            <a:r>
+              <a:t>设计 A2A 协议</a:t>
+            </a:r>
+            <a:br/>
+            <a:r>
+              <a:t>搭建 Swarm 平台</a:t>
+            </a:r>
+          </a:p>
+        </p:txBody>
+      </p:sp>
+      <p:sp>
+        <p:nvSpPr>
+          <p:cNvPr id="14" name="Rounded Rectangle 13"/>
+          <p:cNvSpPr/>
+          <p:nvPr/>
+        </p:nvSpPr>
+        <p:spPr>
+          <a:xfrm>
+            <a:off x="6094476" y="3017520"/>
+            <a:ext cx="5271516" cy="1417320"/>
+          </a:xfrm>
+          <a:prstGeom prst="roundRect">
+            <a:avLst/>
+          </a:prstGeom>
+          <a:solidFill>
+            <a:srgbClr val="1A1A2E"/>
+          </a:solidFill>
+          <a:ln>
+            <a:noFill/>
+          </a:ln>
+        </p:spPr>
+        <p:style>
+          <a:lnRef idx="1">
+            <a:schemeClr val="accent1"/>
+          </a:lnRef>
+          <a:fillRef idx="3">
+            <a:schemeClr val="accent1"/>
+          </a:fillRef>
+          <a:effectRef idx="2">
+            <a:schemeClr val="accent1"/>
+          </a:effectRef>
+          <a:fontRef idx="minor">
+            <a:schemeClr val="lt1"/>
+          </a:fontRef>
+        </p:style>
+        <p:txBody>
+          <a:bodyPr rtlCol="0" anchor="ctr"/>
+          <a:lstStyle/>
+          <a:p>
+            <a:pPr algn="ctr"/>
+          </a:p>
+        </p:txBody>
+      </p:sp>
+      <p:sp>
+        <p:nvSpPr>
+          <p:cNvPr id="15" name="TextBox 14"/>
+          <p:cNvSpPr txBox="1"/>
+          <p:nvPr/>
+        </p:nvSpPr>
+        <p:spPr>
+          <a:xfrm>
+            <a:off x="6094476" y="3090672"/>
+            <a:ext cx="5180076" cy="365760"/>
+          </a:xfrm>
+          <a:prstGeom prst="rect">
+            <a:avLst/>
+          </a:prstGeom>
+          <a:noFill/>
+        </p:spPr>
+        <p:txBody>
+          <a:bodyPr wrap="none">
+            <a:spAutoFit/>
+          </a:bodyPr>
+          <a:lstStyle/>
+          <a:p>
+            <a:pPr>
+              <a:defRPr sz="1400" b="1">
+                <a:solidFill>
+                  <a:srgbClr val="553C9A"/>
+                </a:solidFill>
+              </a:defRPr>
+            </a:pPr>
+            <a:r>
+              <a:t>💡 容忍混沌</a:t>
+            </a:r>
+          </a:p>
+        </p:txBody>
+      </p:sp>
+      <p:sp>
+        <p:nvSpPr>
+          <p:cNvPr id="16" name="TextBox 15"/>
+          <p:cNvSpPr txBox="1"/>
+          <p:nvPr/>
+        </p:nvSpPr>
+        <p:spPr>
+          <a:xfrm>
+            <a:off x="6094476" y="3474720"/>
+            <a:ext cx="5180076" cy="1005840"/>
+          </a:xfrm>
+          <a:prstGeom prst="rect">
+            <a:avLst/>
+          </a:prstGeom>
+          <a:noFill/>
+        </p:spPr>
+        <p:txBody>
+          <a:bodyPr wrap="square">
+            <a:spAutoFit/>
+          </a:bodyPr>
+          <a:lstStyle/>
+          <a:p>
+            <a:pPr>
+              <a:defRPr sz="1100">
+                <a:solidFill>
+                  <a:srgbClr val="A0AEC0"/>
+                </a:solidFill>
+              </a:defRPr>
+            </a:pPr>
+            <a:r>
+              <a:t>唯有在混沌的边缘</a:t>
+            </a:r>
+            <a:br/>
+            <a:r>
+              <a:t>智能才会真正涌现</a:t>
             </a:r>
           </a:p>
         </p:txBody>
@@ -7707,7 +10808,7 @@
         <p:spPr>
           <a:xfrm>
             <a:off x="457200" y="228600"/>
-            <a:ext cx="11274552" cy="731520"/>
+            <a:ext cx="11274552" cy="822960"/>
           </a:xfrm>
           <a:prstGeom prst="rect">
             <a:avLst/>
@@ -7781,7 +10882,7 @@
               </a:defRPr>
             </a:pPr>
             <a:r>
-              <a:t>• 下篇：六大类 21 个核心设计模式 — 感知/记忆/推理/行动/反思/协作</a:t>
+              <a:t>• 下篇：六大类 21 个核心设计模式 — 感知 / 记忆 / 推理 / 行动 / 反思 / 协作</a:t>
             </a:r>
           </a:p>
           <a:p>
@@ -7796,7 +10897,7 @@
               </a:defRPr>
             </a:pPr>
             <a:r>
-              <a:t>• 核心方法论：意图优先 + 上下文为王 + 涌现优于规定</a:t>
+              <a:t>• 核心方法论：意图优先 · 上下文为王 · 涌现优于规定</a:t>
             </a:r>
           </a:p>
           <a:p>
@@ -7811,7 +10912,312 @@
               </a:defRPr>
             </a:pPr>
             <a:r>
-              <a:t>• 适合读者：想用大模型构建可靠系统的工程师 / 架构师</a:t>
+              <a:t>• 适合读者：想用大模型构建可靠系统的工程师与架构师</a:t>
+            </a:r>
+          </a:p>
+        </p:txBody>
+      </p:sp>
+    </p:spTree>
+  </p:cSld>
+  <p:clrMapOvr>
+    <a:masterClrMapping/>
+  </p:clrMapOvr>
+</p:sld>
+</file>
+
+<file path=ppt/slides/slide30.xml><?xml version="1.0" encoding="utf-8"?>
+<p:sld xmlns:a="http://schemas.openxmlformats.org/drawingml/2006/main" xmlns:p="http://schemas.openxmlformats.org/presentationml/2006/main" xmlns:r="http://schemas.openxmlformats.org/officeDocument/2006/relationships">
+  <p:cSld>
+    <p:spTree>
+      <p:nvGrpSpPr>
+        <p:cNvPr id="1" name=""/>
+        <p:cNvGrpSpPr/>
+        <p:nvPr/>
+      </p:nvGrpSpPr>
+      <p:grpSpPr/>
+      <p:sp>
+        <p:nvSpPr>
+          <p:cNvPr id="2" name="Rectangle 1"/>
+          <p:cNvSpPr/>
+          <p:nvPr/>
+        </p:nvSpPr>
+        <p:spPr>
+          <a:xfrm>
+            <a:off x="0" y="0"/>
+            <a:ext cx="12188952" cy="6858000"/>
+          </a:xfrm>
+          <a:prstGeom prst="rect">
+            <a:avLst/>
+          </a:prstGeom>
+          <a:solidFill>
+            <a:srgbClr val="FFFFFF"/>
+          </a:solidFill>
+          <a:ln>
+            <a:noFill/>
+          </a:ln>
+        </p:spPr>
+        <p:style>
+          <a:lnRef idx="1">
+            <a:schemeClr val="accent1"/>
+          </a:lnRef>
+          <a:fillRef idx="3">
+            <a:schemeClr val="accent1"/>
+          </a:fillRef>
+          <a:effectRef idx="2">
+            <a:schemeClr val="accent1"/>
+          </a:effectRef>
+          <a:fontRef idx="minor">
+            <a:schemeClr val="lt1"/>
+          </a:fontRef>
+        </p:style>
+        <p:txBody>
+          <a:bodyPr rtlCol="0" anchor="ctr"/>
+          <a:lstStyle/>
+          <a:p>
+            <a:pPr algn="ctr"/>
+          </a:p>
+        </p:txBody>
+      </p:sp>
+      <p:sp>
+        <p:nvSpPr>
+          <p:cNvPr id="3" name="Rectangle 2"/>
+          <p:cNvSpPr/>
+          <p:nvPr/>
+        </p:nvSpPr>
+        <p:spPr>
+          <a:xfrm>
+            <a:off x="0" y="0"/>
+            <a:ext cx="12188952" cy="137160"/>
+          </a:xfrm>
+          <a:prstGeom prst="rect">
+            <a:avLst/>
+          </a:prstGeom>
+          <a:solidFill>
+            <a:srgbClr val="1A1A2E"/>
+          </a:solidFill>
+          <a:ln>
+            <a:noFill/>
+          </a:ln>
+        </p:spPr>
+        <p:style>
+          <a:lnRef idx="1">
+            <a:schemeClr val="accent1"/>
+          </a:lnRef>
+          <a:fillRef idx="3">
+            <a:schemeClr val="accent1"/>
+          </a:fillRef>
+          <a:effectRef idx="2">
+            <a:schemeClr val="accent1"/>
+          </a:effectRef>
+          <a:fontRef idx="minor">
+            <a:schemeClr val="lt1"/>
+          </a:fontRef>
+        </p:style>
+        <p:txBody>
+          <a:bodyPr rtlCol="0" anchor="ctr"/>
+          <a:lstStyle/>
+          <a:p>
+            <a:pPr algn="ctr"/>
+          </a:p>
+        </p:txBody>
+      </p:sp>
+      <p:sp>
+        <p:nvSpPr>
+          <p:cNvPr id="4" name="TextBox 3"/>
+          <p:cNvSpPr txBox="1"/>
+          <p:nvPr/>
+        </p:nvSpPr>
+        <p:spPr>
+          <a:xfrm>
+            <a:off x="457200" y="2011680"/>
+            <a:ext cx="11274552" cy="2286000"/>
+          </a:xfrm>
+          <a:prstGeom prst="rect">
+            <a:avLst/>
+          </a:prstGeom>
+          <a:noFill/>
+        </p:spPr>
+        <p:txBody>
+          <a:bodyPr wrap="square">
+            <a:spAutoFit/>
+          </a:bodyPr>
+          <a:lstStyle/>
+          <a:p>
+            <a:pPr algn="ctr">
+              <a:defRPr sz="2600" i="1">
+                <a:solidFill>
+                  <a:srgbClr val="1A1A2E"/>
+                </a:solidFill>
+              </a:defRPr>
+            </a:pPr>
+            <a:r>
+              <a:t>"园丁的智慧，在于懂得「适度失控」。唯有在混沌的边缘，智能才会真正涌现。"</a:t>
+            </a:r>
+          </a:p>
+        </p:txBody>
+      </p:sp>
+    </p:spTree>
+  </p:cSld>
+  <p:clrMapOvr>
+    <a:masterClrMapping/>
+  </p:clrMapOvr>
+</p:sld>
+</file>
+
+<file path=ppt/slides/slide31.xml><?xml version="1.0" encoding="utf-8"?>
+<p:sld xmlns:a="http://schemas.openxmlformats.org/drawingml/2006/main" xmlns:p="http://schemas.openxmlformats.org/presentationml/2006/main" xmlns:r="http://schemas.openxmlformats.org/officeDocument/2006/relationships">
+  <p:cSld>
+    <p:spTree>
+      <p:nvGrpSpPr>
+        <p:cNvPr id="1" name=""/>
+        <p:cNvGrpSpPr/>
+        <p:nvPr/>
+      </p:nvGrpSpPr>
+      <p:grpSpPr/>
+      <p:sp>
+        <p:nvSpPr>
+          <p:cNvPr id="2" name="Rectangle 1"/>
+          <p:cNvSpPr/>
+          <p:nvPr/>
+        </p:nvSpPr>
+        <p:spPr>
+          <a:xfrm>
+            <a:off x="0" y="0"/>
+            <a:ext cx="12188952" cy="6858000"/>
+          </a:xfrm>
+          <a:prstGeom prst="rect">
+            <a:avLst/>
+          </a:prstGeom>
+          <a:solidFill>
+            <a:srgbClr val="1A1A2E"/>
+          </a:solidFill>
+          <a:ln>
+            <a:noFill/>
+          </a:ln>
+        </p:spPr>
+        <p:style>
+          <a:lnRef idx="1">
+            <a:schemeClr val="accent1"/>
+          </a:lnRef>
+          <a:fillRef idx="3">
+            <a:schemeClr val="accent1"/>
+          </a:fillRef>
+          <a:effectRef idx="2">
+            <a:schemeClr val="accent1"/>
+          </a:effectRef>
+          <a:fontRef idx="minor">
+            <a:schemeClr val="lt1"/>
+          </a:fontRef>
+        </p:style>
+        <p:txBody>
+          <a:bodyPr rtlCol="0" anchor="ctr"/>
+          <a:lstStyle/>
+          <a:p>
+            <a:pPr algn="ctr"/>
+          </a:p>
+        </p:txBody>
+      </p:sp>
+      <p:sp>
+        <p:nvSpPr>
+          <p:cNvPr id="3" name="TextBox 2"/>
+          <p:cNvSpPr txBox="1"/>
+          <p:nvPr/>
+        </p:nvSpPr>
+        <p:spPr>
+          <a:xfrm>
+            <a:off x="457200" y="2286000"/>
+            <a:ext cx="11274552" cy="2286000"/>
+          </a:xfrm>
+          <a:prstGeom prst="rect">
+            <a:avLst/>
+          </a:prstGeom>
+          <a:noFill/>
+        </p:spPr>
+        <p:txBody>
+          <a:bodyPr wrap="square">
+            <a:spAutoFit/>
+          </a:bodyPr>
+          <a:lstStyle/>
+          <a:p>
+            <a:pPr algn="ctr">
+              <a:defRPr sz="5200" i="0">
+                <a:solidFill>
+                  <a:srgbClr val="FFFFFF"/>
+                </a:solidFill>
+              </a:defRPr>
+            </a:pPr>
+            <a:r>
+              <a:t>谢谢观看</a:t>
+            </a:r>
+          </a:p>
+        </p:txBody>
+      </p:sp>
+      <p:sp>
+        <p:nvSpPr>
+          <p:cNvPr id="4" name="TextBox 3"/>
+          <p:cNvSpPr txBox="1"/>
+          <p:nvPr/>
+        </p:nvSpPr>
+        <p:spPr>
+          <a:xfrm>
+            <a:off x="457200" y="3657600"/>
+            <a:ext cx="11274552" cy="2286000"/>
+          </a:xfrm>
+          <a:prstGeom prst="rect">
+            <a:avLst/>
+          </a:prstGeom>
+          <a:noFill/>
+        </p:spPr>
+        <p:txBody>
+          <a:bodyPr wrap="square">
+            <a:spAutoFit/>
+          </a:bodyPr>
+          <a:lstStyle/>
+          <a:p>
+            <a:pPr algn="ctr">
+              <a:defRPr sz="2200" i="0">
+                <a:solidFill>
+                  <a:srgbClr val="A0AEC0"/>
+                </a:solidFill>
+              </a:defRPr>
+            </a:pPr>
+            <a:r>
+              <a:t>《Agent设计模式》读书笔记 | Tony老师分享</a:t>
+            </a:r>
+          </a:p>
+        </p:txBody>
+      </p:sp>
+      <p:sp>
+        <p:nvSpPr>
+          <p:cNvPr id="5" name="TextBox 4"/>
+          <p:cNvSpPr txBox="1"/>
+          <p:nvPr/>
+        </p:nvSpPr>
+        <p:spPr>
+          <a:xfrm>
+            <a:off x="457200" y="4754880"/>
+            <a:ext cx="11274552" cy="2286000"/>
+          </a:xfrm>
+          <a:prstGeom prst="rect">
+            <a:avLst/>
+          </a:prstGeom>
+          <a:noFill/>
+        </p:spPr>
+        <p:txBody>
+          <a:bodyPr wrap="square">
+            <a:spAutoFit/>
+          </a:bodyPr>
+          <a:lstStyle/>
+          <a:p>
+            <a:pPr algn="ctr">
+              <a:defRPr sz="1800" i="0">
+                <a:solidFill>
+                  <a:srgbClr val="E94560"/>
+                </a:solidFill>
+              </a:defRPr>
+            </a:pPr>
+            <a:r>
+              <a:t>blog.tanteng.space</a:t>
             </a:r>
           </a:p>
         </p:txBody>
@@ -7886,7 +11292,7 @@
         <p:spPr>
           <a:xfrm>
             <a:off x="457200" y="2743200"/>
-            <a:ext cx="11274552" cy="1828800"/>
+            <a:ext cx="11274552" cy="2286000"/>
           </a:xfrm>
           <a:prstGeom prst="rect">
             <a:avLst/>
@@ -7945,7 +11351,7 @@
             <a:avLst/>
           </a:prstGeom>
           <a:solidFill>
-            <a:srgbClr val="FFFFFF"/>
+            <a:srgbClr val="0F3460"/>
           </a:solidFill>
           <a:ln>
             <a:noFill/>
@@ -7982,13 +11388,13 @@
         <p:spPr>
           <a:xfrm>
             <a:off x="0" y="0"/>
-            <a:ext cx="12188952" cy="1097280"/>
+            <a:ext cx="12188952" cy="109728"/>
           </a:xfrm>
           <a:prstGeom prst="rect">
             <a:avLst/>
           </a:prstGeom>
           <a:solidFill>
-            <a:srgbClr val="1A1A2E"/>
+            <a:srgbClr val="E94560"/>
           </a:solidFill>
           <a:ln>
             <a:noFill/>
@@ -8024,43 +11430,8 @@
         </p:nvSpPr>
         <p:spPr>
           <a:xfrm>
-            <a:off x="457200" y="228600"/>
-            <a:ext cx="11274552" cy="731520"/>
-          </a:xfrm>
-          <a:prstGeom prst="rect">
-            <a:avLst/>
-          </a:prstGeom>
-          <a:noFill/>
-        </p:spPr>
-        <p:txBody>
-          <a:bodyPr wrap="none">
-            <a:spAutoFit/>
-          </a:bodyPr>
-          <a:lstStyle/>
-          <a:p>
-            <a:pPr>
-              <a:defRPr sz="3200" b="1">
-                <a:solidFill>
-                  <a:srgbClr val="FFFFFF"/>
-                </a:solidFill>
-              </a:defRPr>
-            </a:pPr>
-            <a:r>
-              <a:t>范式迁移：从确定性到概率性</a:t>
-            </a:r>
-          </a:p>
-        </p:txBody>
-      </p:sp>
-      <p:sp>
-        <p:nvSpPr>
-          <p:cNvPr id="5" name="TextBox 4"/>
-          <p:cNvSpPr txBox="1"/>
-          <p:nvPr/>
-        </p:nvSpPr>
-        <p:spPr>
-          <a:xfrm>
-            <a:off x="640080" y="1371600"/>
-            <a:ext cx="10972800" cy="5029200"/>
+            <a:off x="457200" y="274320"/>
+            <a:ext cx="11274552" cy="2286000"/>
           </a:xfrm>
           <a:prstGeom prst="rect">
             <a:avLst/>
@@ -8073,78 +11444,98 @@
           </a:bodyPr>
           <a:lstStyle/>
           <a:p>
-            <a:pPr>
-              <a:spcAft>
-                <a:spcPts val="1400"/>
-              </a:spcAft>
-              <a:defRPr sz="2100" b="0">
-                <a:solidFill>
-                  <a:srgbClr val="1A1A2E"/>
-                </a:solidFill>
-              </a:defRPr>
-            </a:pPr>
-            <a:r>
-              <a:t>• GoF 设计模式 — 诞生于「静态世界」：系统边界清晰、需求可预测</a:t>
-            </a:r>
-          </a:p>
-          <a:p>
-            <a:pPr>
-              <a:spcAft>
-                <a:spcPts val="1400"/>
-              </a:spcAft>
-              <a:defRPr sz="2100" b="0">
-                <a:solidFill>
-                  <a:srgbClr val="1A1A2E"/>
-                </a:solidFill>
-              </a:defRPr>
-            </a:pPr>
-            <a:r>
-              <a:t>• 2012 转折点 — Netflix Chaos Monkey：故障不可避免，就让它进化出免疫力</a:t>
-            </a:r>
-          </a:p>
-          <a:p>
-            <a:pPr>
-              <a:spcAft>
-                <a:spcPts val="1400"/>
-              </a:spcAft>
-              <a:defRPr sz="2100" b="0">
-                <a:solidFill>
-                  <a:srgbClr val="1A1A2E"/>
-                </a:solidFill>
-              </a:defRPr>
-            </a:pPr>
-            <a:r>
-              <a:t>• Google Datacenter as Computer：硬件故障是统计学必然，为「故障常态化」而设计</a:t>
-            </a:r>
-          </a:p>
-          <a:p>
-            <a:pPr>
-              <a:spcAft>
-                <a:spcPts val="1400"/>
-              </a:spcAft>
-              <a:defRPr sz="2100" b="1">
-                <a:solidFill>
-                  <a:srgbClr val="553C9A"/>
-                </a:solidFill>
-              </a:defRPr>
-            </a:pPr>
-            <a:r>
-              <a:t>• 确定性时代终结：软件不再是「瑞士手表」，而是「热带雨林」</a:t>
-            </a:r>
-          </a:p>
-          <a:p>
-            <a:pPr>
-              <a:spcAft>
-                <a:spcPts val="1400"/>
-              </a:spcAft>
-              <a:defRPr sz="2100" b="1">
-                <a:solidFill>
-                  <a:srgbClr val="553C9A"/>
-                </a:solidFill>
-              </a:defRPr>
-            </a:pPr>
-            <a:r>
-              <a:t>• 意图比模式更重要 — Agent 首次将「意图」显式嵌入系统</a:t>
+            <a:pPr algn="ctr">
+              <a:defRPr sz="1800" i="0">
+                <a:solidFill>
+                  <a:srgbClr val="E94560"/>
+                </a:solidFill>
+              </a:defRPr>
+            </a:pPr>
+            <a:r>
+              <a:t>📅 2008 年</a:t>
+            </a:r>
+          </a:p>
+        </p:txBody>
+      </p:sp>
+      <p:sp>
+        <p:nvSpPr>
+          <p:cNvPr id="5" name="TextBox 4"/>
+          <p:cNvSpPr txBox="1"/>
+          <p:nvPr/>
+        </p:nvSpPr>
+        <p:spPr>
+          <a:xfrm>
+            <a:off x="457200" y="822960"/>
+            <a:ext cx="11274552" cy="2286000"/>
+          </a:xfrm>
+          <a:prstGeom prst="rect">
+            <a:avLst/>
+          </a:prstGeom>
+          <a:noFill/>
+        </p:spPr>
+        <p:txBody>
+          <a:bodyPr wrap="square">
+            <a:spAutoFit/>
+          </a:bodyPr>
+          <a:lstStyle/>
+          <a:p>
+            <a:pPr algn="ctr">
+              <a:defRPr sz="4000" i="0">
+                <a:solidFill>
+                  <a:srgbClr val="FFFFFF"/>
+                </a:solidFill>
+              </a:defRPr>
+            </a:pPr>
+            <a:r>
+              <a:t>Twitter 宕机事件</a:t>
+            </a:r>
+          </a:p>
+        </p:txBody>
+      </p:sp>
+      <p:sp>
+        <p:nvSpPr>
+          <p:cNvPr id="6" name="TextBox 5"/>
+          <p:cNvSpPr txBox="1"/>
+          <p:nvPr/>
+        </p:nvSpPr>
+        <p:spPr>
+          <a:xfrm>
+            <a:off x="457200" y="1645920"/>
+            <a:ext cx="11274552" cy="2286000"/>
+          </a:xfrm>
+          <a:prstGeom prst="rect">
+            <a:avLst/>
+          </a:prstGeom>
+          <a:noFill/>
+        </p:spPr>
+        <p:txBody>
+          <a:bodyPr wrap="square">
+            <a:spAutoFit/>
+          </a:bodyPr>
+          <a:lstStyle/>
+          <a:p>
+            <a:pPr algn="ctr">
+              <a:defRPr sz="2200" i="0">
+                <a:solidFill>
+                  <a:srgbClr val="A0AEC0"/>
+                </a:solidFill>
+              </a:defRPr>
+            </a:pPr>
+            <a:r>
+              <a:t>服务器仍在运行，每个组件看似正常，</a:t>
+            </a:r>
+            <a:br/>
+            <a:r>
+              <a:t>但整个系统陷入泥潭，响应时间从毫秒级退化至分钟级。</a:t>
+            </a:r>
+            <a:br/>
+            <a:br/>
+            <a:r>
+              <a:t>开发者发现：每个设计模式都待在它该在的位置——</a:t>
+            </a:r>
+            <a:br/>
+            <a:r>
+              <a:t>但「正确的设计」无法解决「规模」带来的问题。</a:t>
             </a:r>
           </a:p>
         </p:txBody>
@@ -8225,7 +11616,7 @@
             <a:avLst/>
           </a:prstGeom>
           <a:solidFill>
-            <a:srgbClr val="1A1A2E"/>
+            <a:srgbClr val="E94560"/>
           </a:solidFill>
           <a:ln>
             <a:noFill/>
@@ -8262,7 +11653,7 @@
         <p:spPr>
           <a:xfrm>
             <a:off x="457200" y="228600"/>
-            <a:ext cx="11274552" cy="731520"/>
+            <a:ext cx="11274552" cy="822960"/>
           </a:xfrm>
           <a:prstGeom prst="rect">
             <a:avLst/>
@@ -8283,7 +11674,7 @@
               </a:defRPr>
             </a:pPr>
             <a:r>
-              <a:t>2012-2014：四次关键技术演进，奠定 Agent 基石</a:t>
+              <a:t>不确定性的三重奏：21世纪软件工程面临的根本挑战</a:t>
             </a:r>
           </a:p>
         </p:txBody>
@@ -8297,7 +11688,7 @@
         <p:spPr>
           <a:xfrm>
             <a:off x="640080" y="1463040"/>
-            <a:ext cx="5271516" cy="1325880"/>
+            <a:ext cx="3453383" cy="1417320"/>
           </a:xfrm>
           <a:prstGeom prst="roundRect">
             <a:avLst/>
@@ -8340,7 +11731,7 @@
         <p:spPr>
           <a:xfrm>
             <a:off x="640080" y="1536192"/>
-            <a:ext cx="5180076" cy="365760"/>
+            <a:ext cx="3361944" cy="365760"/>
           </a:xfrm>
           <a:prstGeom prst="rect">
             <a:avLst/>
@@ -8354,14 +11745,14 @@
           <a:lstStyle/>
           <a:p>
             <a:pPr>
-              <a:defRPr sz="1500" b="1">
+              <a:defRPr sz="1400" b="1">
                 <a:solidFill>
                   <a:srgbClr val="553C9A"/>
                 </a:solidFill>
               </a:defRPr>
             </a:pPr>
             <a:r>
-              <a:t>🌐 Google Datacenter as Computer</a:t>
+              <a:t>📈 规模不确定性</a:t>
             </a:r>
           </a:p>
         </p:txBody>
@@ -8374,8 +11765,8 @@
         </p:nvSpPr>
         <p:spPr>
           <a:xfrm>
-            <a:off x="640080" y="1901952"/>
-            <a:ext cx="5180076" cy="914400"/>
+            <a:off x="640080" y="1920240"/>
+            <a:ext cx="3361944" cy="1005840"/>
           </a:xfrm>
           <a:prstGeom prst="rect">
             <a:avLst/>
@@ -8396,7 +11787,15 @@
               </a:defRPr>
             </a:pPr>
             <a:r>
-              <a:t>硬件故障是统计学必然，软件为故障常态化设计</a:t>
+              <a:t>用户量从千人跃升至亿人，</a:t>
+            </a:r>
+            <a:br/>
+            <a:r>
+              <a:t>分布式成为常态，</a:t>
+            </a:r>
+            <a:br/>
+            <a:r>
+              <a:t>单体架构触及天花板</a:t>
             </a:r>
           </a:p>
         </p:txBody>
@@ -8409,8 +11808,8 @@
         </p:nvSpPr>
         <p:spPr>
           <a:xfrm>
-            <a:off x="6094476" y="1463040"/>
-            <a:ext cx="5271516" cy="1325880"/>
+            <a:off x="4276344" y="1463040"/>
+            <a:ext cx="3453383" cy="1417320"/>
           </a:xfrm>
           <a:prstGeom prst="roundRect">
             <a:avLst/>
@@ -8452,8 +11851,8 @@
         </p:nvSpPr>
         <p:spPr>
           <a:xfrm>
-            <a:off x="6094476" y="1536192"/>
-            <a:ext cx="5180076" cy="365760"/>
+            <a:off x="4276344" y="1536192"/>
+            <a:ext cx="3361944" cy="365760"/>
           </a:xfrm>
           <a:prstGeom prst="rect">
             <a:avLst/>
@@ -8467,14 +11866,14 @@
           <a:lstStyle/>
           <a:p>
             <a:pPr>
-              <a:defRPr sz="1500" b="1">
+              <a:defRPr sz="1400" b="1">
                 <a:solidFill>
                   <a:srgbClr val="553C9A"/>
                 </a:solidFill>
               </a:defRPr>
             </a:pPr>
             <a:r>
-              <a:t>🐵 Netflix Chaos Monkey</a:t>
+              <a:t>🔄 行为不确定性</a:t>
             </a:r>
           </a:p>
         </p:txBody>
@@ -8487,8 +11886,8 @@
         </p:nvSpPr>
         <p:spPr>
           <a:xfrm>
-            <a:off x="6094476" y="1901952"/>
-            <a:ext cx="5180076" cy="914400"/>
+            <a:off x="4276344" y="1920240"/>
+            <a:ext cx="3361944" cy="1005840"/>
           </a:xfrm>
           <a:prstGeom prst="rect">
             <a:avLst/>
@@ -8509,7 +11908,15 @@
               </a:defRPr>
             </a:pPr>
             <a:r>
-              <a:t>从鲁棒性到反脆弱，系统像免疫系统通过小创伤进化</a:t>
+              <a:t>Web 2.0 时代用户行为不再可预测，</a:t>
+            </a:r>
+            <a:br/>
+            <a:r>
+              <a:t>无法用固定规则应对无限变化，</a:t>
+            </a:r>
+            <a:br/>
+            <a:r>
+              <a:t>系统必须学会适应</a:t>
             </a:r>
           </a:p>
         </p:txBody>
@@ -8522,8 +11929,8 @@
         </p:nvSpPr>
         <p:spPr>
           <a:xfrm>
-            <a:off x="640080" y="2926080"/>
-            <a:ext cx="5271516" cy="1325880"/>
+            <a:off x="7912607" y="1463040"/>
+            <a:ext cx="3453383" cy="1417320"/>
           </a:xfrm>
           <a:prstGeom prst="roundRect">
             <a:avLst/>
@@ -8565,8 +11972,8 @@
         </p:nvSpPr>
         <p:spPr>
           <a:xfrm>
-            <a:off x="640080" y="2999232"/>
-            <a:ext cx="5180076" cy="365760"/>
+            <a:off x="7912607" y="1536192"/>
+            <a:ext cx="3361944" cy="365760"/>
           </a:xfrm>
           <a:prstGeom prst="rect">
             <a:avLst/>
@@ -8580,14 +11987,14 @@
           <a:lstStyle/>
           <a:p>
             <a:pPr>
-              <a:defRPr sz="1500" b="1">
+              <a:defRPr sz="1400" b="1">
                 <a:solidFill>
                   <a:srgbClr val="553C9A"/>
                 </a:solidFill>
               </a:defRPr>
             </a:pPr>
             <a:r>
-              <a:t>📦 Docker</a:t>
+              <a:t>🔀 需求不确定性</a:t>
             </a:r>
           </a:p>
         </p:txBody>
@@ -8600,8 +12007,8 @@
         </p:nvSpPr>
         <p:spPr>
           <a:xfrm>
-            <a:off x="640080" y="3364992"/>
-            <a:ext cx="5180076" cy="914400"/>
+            <a:off x="7912607" y="1920240"/>
+            <a:ext cx="3361944" cy="1005840"/>
           </a:xfrm>
           <a:prstGeom prst="rect">
             <a:avLst/>
@@ -8622,120 +12029,15 @@
               </a:defRPr>
             </a:pPr>
             <a:r>
-              <a:t>不可变基础设施，服务器从资产变成可销毁的耗材</a:t>
-            </a:r>
-          </a:p>
-        </p:txBody>
-      </p:sp>
-      <p:sp>
-        <p:nvSpPr>
-          <p:cNvPr id="14" name="Rounded Rectangle 13"/>
-          <p:cNvSpPr/>
-          <p:nvPr/>
-        </p:nvSpPr>
-        <p:spPr>
-          <a:xfrm>
-            <a:off x="6094476" y="2926080"/>
-            <a:ext cx="5271516" cy="1325880"/>
-          </a:xfrm>
-          <a:prstGeom prst="roundRect">
-            <a:avLst/>
-          </a:prstGeom>
-          <a:solidFill>
-            <a:srgbClr val="1A1A2E"/>
-          </a:solidFill>
-          <a:ln>
-            <a:noFill/>
-          </a:ln>
-        </p:spPr>
-        <p:style>
-          <a:lnRef idx="1">
-            <a:schemeClr val="accent1"/>
-          </a:lnRef>
-          <a:fillRef idx="3">
-            <a:schemeClr val="accent1"/>
-          </a:fillRef>
-          <a:effectRef idx="2">
-            <a:schemeClr val="accent1"/>
-          </a:effectRef>
-          <a:fontRef idx="minor">
-            <a:schemeClr val="lt1"/>
-          </a:fontRef>
-        </p:style>
-        <p:txBody>
-          <a:bodyPr rtlCol="0" anchor="ctr"/>
-          <a:lstStyle/>
-          <a:p>
-            <a:pPr algn="ctr"/>
-          </a:p>
-        </p:txBody>
-      </p:sp>
-      <p:sp>
-        <p:nvSpPr>
-          <p:cNvPr id="15" name="TextBox 14"/>
-          <p:cNvSpPr txBox="1"/>
-          <p:nvPr/>
-        </p:nvSpPr>
-        <p:spPr>
-          <a:xfrm>
-            <a:off x="6094476" y="2999232"/>
-            <a:ext cx="5180076" cy="365760"/>
-          </a:xfrm>
-          <a:prstGeom prst="rect">
-            <a:avLst/>
-          </a:prstGeom>
-          <a:noFill/>
-        </p:spPr>
-        <p:txBody>
-          <a:bodyPr wrap="none">
-            <a:spAutoFit/>
-          </a:bodyPr>
-          <a:lstStyle/>
-          <a:p>
-            <a:pPr>
-              <a:defRPr sz="1500" b="1">
-                <a:solidFill>
-                  <a:srgbClr val="553C9A"/>
-                </a:solidFill>
-              </a:defRPr>
-            </a:pPr>
-            <a:r>
-              <a:t>☸️ Kubernetes</a:t>
-            </a:r>
-          </a:p>
-        </p:txBody>
-      </p:sp>
-      <p:sp>
-        <p:nvSpPr>
-          <p:cNvPr id="16" name="TextBox 15"/>
-          <p:cNvSpPr txBox="1"/>
-          <p:nvPr/>
-        </p:nvSpPr>
-        <p:spPr>
-          <a:xfrm>
-            <a:off x="6094476" y="3364992"/>
-            <a:ext cx="5180076" cy="914400"/>
-          </a:xfrm>
-          <a:prstGeom prst="rect">
-            <a:avLst/>
-          </a:prstGeom>
-          <a:noFill/>
-        </p:spPr>
-        <p:txBody>
-          <a:bodyPr wrap="square">
-            <a:spAutoFit/>
-          </a:bodyPr>
-          <a:lstStyle/>
-          <a:p>
-            <a:pPr>
-              <a:defRPr sz="1100">
-                <a:solidFill>
-                  <a:srgbClr val="A0AEC0"/>
-                </a:solidFill>
-              </a:defRPr>
-            </a:pPr>
-            <a:r>
-              <a:t>声明式API+调解循环，Controller本质上是原始Agent</a:t>
+              <a:t>花数月画 UML 按图施工的模式被打破，</a:t>
+            </a:r>
+            <a:br/>
+            <a:r>
+              <a:t>市场要求快速迭代，</a:t>
+            </a:r>
+            <a:br/>
+            <a:r>
+              <a:t>敏捷革命席卷行业</a:t>
             </a:r>
           </a:p>
         </p:txBody>
@@ -8816,6 +12118,84 @@
             <a:avLst/>
           </a:prstGeom>
           <a:solidFill>
+            <a:srgbClr val="E94560"/>
+          </a:solidFill>
+          <a:ln>
+            <a:noFill/>
+          </a:ln>
+        </p:spPr>
+        <p:style>
+          <a:lnRef idx="1">
+            <a:schemeClr val="accent1"/>
+          </a:lnRef>
+          <a:fillRef idx="3">
+            <a:schemeClr val="accent1"/>
+          </a:fillRef>
+          <a:effectRef idx="2">
+            <a:schemeClr val="accent1"/>
+          </a:effectRef>
+          <a:fontRef idx="minor">
+            <a:schemeClr val="lt1"/>
+          </a:fontRef>
+        </p:style>
+        <p:txBody>
+          <a:bodyPr rtlCol="0" anchor="ctr"/>
+          <a:lstStyle/>
+          <a:p>
+            <a:pPr algn="ctr"/>
+          </a:p>
+        </p:txBody>
+      </p:sp>
+      <p:sp>
+        <p:nvSpPr>
+          <p:cNvPr id="4" name="TextBox 3"/>
+          <p:cNvSpPr txBox="1"/>
+          <p:nvPr/>
+        </p:nvSpPr>
+        <p:spPr>
+          <a:xfrm>
+            <a:off x="457200" y="228600"/>
+            <a:ext cx="11274552" cy="822960"/>
+          </a:xfrm>
+          <a:prstGeom prst="rect">
+            <a:avLst/>
+          </a:prstGeom>
+          <a:noFill/>
+        </p:spPr>
+        <p:txBody>
+          <a:bodyPr wrap="none">
+            <a:spAutoFit/>
+          </a:bodyPr>
+          <a:lstStyle/>
+          <a:p>
+            <a:pPr>
+              <a:defRPr sz="2600" b="1">
+                <a:solidFill>
+                  <a:srgbClr val="FFFFFF"/>
+                </a:solidFill>
+              </a:defRPr>
+            </a:pPr>
+            <a:r>
+              <a:t>经典模式的失效：从『正确设计』到『正确思维』</a:t>
+            </a:r>
+          </a:p>
+        </p:txBody>
+      </p:sp>
+      <p:sp>
+        <p:nvSpPr>
+          <p:cNvPr id="5" name="Rectangle 4"/>
+          <p:cNvSpPr/>
+          <p:nvPr/>
+        </p:nvSpPr>
+        <p:spPr>
+          <a:xfrm>
+            <a:off x="457200" y="1371600"/>
+            <a:ext cx="3200400" cy="457200"/>
+          </a:xfrm>
+          <a:prstGeom prst="rect">
+            <a:avLst/>
+          </a:prstGeom>
+          <a:solidFill>
             <a:srgbClr val="1A1A2E"/>
           </a:solidFill>
           <a:ln>
@@ -8846,14 +12226,14 @@
       </p:sp>
       <p:sp>
         <p:nvSpPr>
-          <p:cNvPr id="4" name="TextBox 3"/>
+          <p:cNvPr id="6" name="TextBox 5"/>
           <p:cNvSpPr txBox="1"/>
           <p:nvPr/>
         </p:nvSpPr>
         <p:spPr>
           <a:xfrm>
-            <a:off x="457200" y="228600"/>
-            <a:ext cx="11274552" cy="731520"/>
+            <a:off x="457200" y="1417320"/>
+            <a:ext cx="3200400" cy="365760"/>
           </a:xfrm>
           <a:prstGeom prst="rect">
             <a:avLst/>
@@ -8866,29 +12246,228 @@
           </a:bodyPr>
           <a:lstStyle/>
           <a:p>
-            <a:pPr>
-              <a:defRPr sz="3200" b="1">
-                <a:solidFill>
-                  <a:srgbClr val="FFFFFF"/>
-                </a:solidFill>
-              </a:defRPr>
-            </a:pPr>
-            <a:r>
-              <a:t>Software 2.0：概率性工程的崛起</a:t>
-            </a:r>
-          </a:p>
-        </p:txBody>
-      </p:sp>
-      <p:sp>
-        <p:nvSpPr>
-          <p:cNvPr id="5" name="TextBox 4"/>
+            <a:pPr algn="ctr">
+              <a:defRPr sz="1400" b="1">
+                <a:solidFill>
+                  <a:srgbClr val="E94560"/>
+                </a:solidFill>
+              </a:defRPr>
+            </a:pPr>
+            <a:r>
+              <a:t>设计模式</a:t>
+            </a:r>
+          </a:p>
+        </p:txBody>
+      </p:sp>
+      <p:sp>
+        <p:nvSpPr>
+          <p:cNvPr id="7" name="Rectangle 6"/>
+          <p:cNvSpPr/>
+          <p:nvPr/>
+        </p:nvSpPr>
+        <p:spPr>
+          <a:xfrm>
+            <a:off x="3840480" y="1371600"/>
+            <a:ext cx="3108960" cy="457200"/>
+          </a:xfrm>
+          <a:prstGeom prst="rect">
+            <a:avLst/>
+          </a:prstGeom>
+          <a:solidFill>
+            <a:srgbClr val="1A1A2E"/>
+          </a:solidFill>
+          <a:ln>
+            <a:noFill/>
+          </a:ln>
+        </p:spPr>
+        <p:style>
+          <a:lnRef idx="1">
+            <a:schemeClr val="accent1"/>
+          </a:lnRef>
+          <a:fillRef idx="3">
+            <a:schemeClr val="accent1"/>
+          </a:fillRef>
+          <a:effectRef idx="2">
+            <a:schemeClr val="accent1"/>
+          </a:effectRef>
+          <a:fontRef idx="minor">
+            <a:schemeClr val="lt1"/>
+          </a:fontRef>
+        </p:style>
+        <p:txBody>
+          <a:bodyPr rtlCol="0" anchor="ctr"/>
+          <a:lstStyle/>
+          <a:p>
+            <a:pPr algn="ctr"/>
+          </a:p>
+        </p:txBody>
+      </p:sp>
+      <p:sp>
+        <p:nvSpPr>
+          <p:cNvPr id="8" name="TextBox 7"/>
           <p:cNvSpPr txBox="1"/>
           <p:nvPr/>
         </p:nvSpPr>
         <p:spPr>
           <a:xfrm>
-            <a:off x="640080" y="1371600"/>
-            <a:ext cx="10972800" cy="5029200"/>
+            <a:off x="3840480" y="1417320"/>
+            <a:ext cx="3108960" cy="365760"/>
+          </a:xfrm>
+          <a:prstGeom prst="rect">
+            <a:avLst/>
+          </a:prstGeom>
+          <a:noFill/>
+        </p:spPr>
+        <p:txBody>
+          <a:bodyPr wrap="none">
+            <a:spAutoFit/>
+          </a:bodyPr>
+          <a:lstStyle/>
+          <a:p>
+            <a:pPr algn="ctr">
+              <a:defRPr sz="1400" b="1">
+                <a:solidFill>
+                  <a:srgbClr val="E94560"/>
+                </a:solidFill>
+              </a:defRPr>
+            </a:pPr>
+            <a:r>
+              <a:t>失效原因</a:t>
+            </a:r>
+          </a:p>
+        </p:txBody>
+      </p:sp>
+      <p:sp>
+        <p:nvSpPr>
+          <p:cNvPr id="9" name="Rectangle 8"/>
+          <p:cNvSpPr/>
+          <p:nvPr/>
+        </p:nvSpPr>
+        <p:spPr>
+          <a:xfrm>
+            <a:off x="7132320" y="1371600"/>
+            <a:ext cx="4572000" cy="457200"/>
+          </a:xfrm>
+          <a:prstGeom prst="rect">
+            <a:avLst/>
+          </a:prstGeom>
+          <a:solidFill>
+            <a:srgbClr val="1A1A2E"/>
+          </a:solidFill>
+          <a:ln>
+            <a:noFill/>
+          </a:ln>
+        </p:spPr>
+        <p:style>
+          <a:lnRef idx="1">
+            <a:schemeClr val="accent1"/>
+          </a:lnRef>
+          <a:fillRef idx="3">
+            <a:schemeClr val="accent1"/>
+          </a:fillRef>
+          <a:effectRef idx="2">
+            <a:schemeClr val="accent1"/>
+          </a:effectRef>
+          <a:fontRef idx="minor">
+            <a:schemeClr val="lt1"/>
+          </a:fontRef>
+        </p:style>
+        <p:txBody>
+          <a:bodyPr rtlCol="0" anchor="ctr"/>
+          <a:lstStyle/>
+          <a:p>
+            <a:pPr algn="ctr"/>
+          </a:p>
+        </p:txBody>
+      </p:sp>
+      <p:sp>
+        <p:nvSpPr>
+          <p:cNvPr id="10" name="TextBox 9"/>
+          <p:cNvSpPr txBox="1"/>
+          <p:nvPr/>
+        </p:nvSpPr>
+        <p:spPr>
+          <a:xfrm>
+            <a:off x="7132320" y="1417320"/>
+            <a:ext cx="4572000" cy="365760"/>
+          </a:xfrm>
+          <a:prstGeom prst="rect">
+            <a:avLst/>
+          </a:prstGeom>
+          <a:noFill/>
+        </p:spPr>
+        <p:txBody>
+          <a:bodyPr wrap="none">
+            <a:spAutoFit/>
+          </a:bodyPr>
+          <a:lstStyle/>
+          <a:p>
+            <a:pPr algn="ctr">
+              <a:defRPr sz="1400" b="1">
+                <a:solidFill>
+                  <a:srgbClr val="E94560"/>
+                </a:solidFill>
+              </a:defRPr>
+            </a:pPr>
+            <a:r>
+              <a:t>业界应对</a:t>
+            </a:r>
+          </a:p>
+        </p:txBody>
+      </p:sp>
+      <p:sp>
+        <p:nvSpPr>
+          <p:cNvPr id="11" name="Rectangle 10"/>
+          <p:cNvSpPr/>
+          <p:nvPr/>
+        </p:nvSpPr>
+        <p:spPr>
+          <a:xfrm>
+            <a:off x="457200" y="1920240"/>
+            <a:ext cx="3200400" cy="1325880"/>
+          </a:xfrm>
+          <a:prstGeom prst="rect">
+            <a:avLst/>
+          </a:prstGeom>
+          <a:solidFill>
+            <a:srgbClr val="1A1A2E"/>
+          </a:solidFill>
+          <a:ln>
+            <a:noFill/>
+          </a:ln>
+        </p:spPr>
+        <p:style>
+          <a:lnRef idx="1">
+            <a:schemeClr val="accent1"/>
+          </a:lnRef>
+          <a:fillRef idx="3">
+            <a:schemeClr val="accent1"/>
+          </a:fillRef>
+          <a:effectRef idx="2">
+            <a:schemeClr val="accent1"/>
+          </a:effectRef>
+          <a:fontRef idx="minor">
+            <a:schemeClr val="lt1"/>
+          </a:fontRef>
+        </p:style>
+        <p:txBody>
+          <a:bodyPr rtlCol="0" anchor="ctr"/>
+          <a:lstStyle/>
+          <a:p>
+            <a:pPr algn="ctr"/>
+          </a:p>
+        </p:txBody>
+      </p:sp>
+      <p:sp>
+        <p:nvSpPr>
+          <p:cNvPr id="12" name="TextBox 11"/>
+          <p:cNvSpPr txBox="1"/>
+          <p:nvPr/>
+        </p:nvSpPr>
+        <p:spPr>
+          <a:xfrm>
+            <a:off x="548640" y="2011680"/>
+            <a:ext cx="3017520" cy="1188720"/>
           </a:xfrm>
           <a:prstGeom prst="rect">
             <a:avLst/>
@@ -8901,63 +12480,663 @@
           </a:bodyPr>
           <a:lstStyle/>
           <a:p>
-            <a:pPr>
-              <a:spcAft>
-                <a:spcPts val="1400"/>
-              </a:spcAft>
-              <a:defRPr sz="2100" b="0">
-                <a:solidFill>
-                  <a:srgbClr val="1A1A2E"/>
-                </a:solidFill>
-              </a:defRPr>
-            </a:pPr>
-            <a:r>
-              <a:t>• 2017年 Andrej Karpathy 提出：软件工程从消除不确定性 → 利用不确定性</a:t>
-            </a:r>
-          </a:p>
-          <a:p>
-            <a:pPr>
-              <a:spcAft>
-                <a:spcPts val="1400"/>
-              </a:spcAft>
-              <a:defRPr sz="2100" b="1">
-                <a:solidFill>
-                  <a:srgbClr val="553C9A"/>
-                </a:solidFill>
-              </a:defRPr>
-            </a:pPr>
-            <a:r>
-              <a:t>• 开发者角色转变：「建筑师」（精确控制每行逻辑）→「园丁」（提供土壤和栅栏）</a:t>
-            </a:r>
-          </a:p>
-          <a:p>
-            <a:pPr>
-              <a:spcAft>
-                <a:spcPts val="1400"/>
-              </a:spcAft>
-              <a:defRPr sz="2100" b="0">
-                <a:solidFill>
-                  <a:srgbClr val="1A1A2E"/>
-                </a:solidFill>
-              </a:defRPr>
-            </a:pPr>
-            <a:r>
-              <a:t>• 逻辑来源：人类写 if-else → 模型从海量数据中自行「涌现」</a:t>
-            </a:r>
-          </a:p>
-          <a:p>
-            <a:pPr>
-              <a:spcAft>
-                <a:spcPts val="1400"/>
-              </a:spcAft>
-              <a:defRPr sz="2100" b="0">
-                <a:solidFill>
-                  <a:srgbClr val="1A1A2E"/>
-                </a:solidFill>
-              </a:defRPr>
-            </a:pPr>
-            <a:r>
-              <a:t>• MLOps 为 AgentOps 铺路：当代码演变为数据（模型权重），DevOps 工具链力不从心</a:t>
+            <a:pPr algn="ctr">
+              <a:defRPr sz="1500" b="1">
+                <a:solidFill>
+                  <a:srgbClr val="E94560"/>
+                </a:solidFill>
+              </a:defRPr>
+            </a:pPr>
+            <a:r>
+              <a:t>单例模式</a:t>
+            </a:r>
+          </a:p>
+        </p:txBody>
+      </p:sp>
+      <p:sp>
+        <p:nvSpPr>
+          <p:cNvPr id="13" name="Rectangle 12"/>
+          <p:cNvSpPr/>
+          <p:nvPr/>
+        </p:nvSpPr>
+        <p:spPr>
+          <a:xfrm>
+            <a:off x="3840480" y="1920240"/>
+            <a:ext cx="3108960" cy="1325880"/>
+          </a:xfrm>
+          <a:prstGeom prst="rect">
+            <a:avLst/>
+          </a:prstGeom>
+          <a:solidFill>
+            <a:srgbClr val="1A1A2E"/>
+          </a:solidFill>
+          <a:ln>
+            <a:noFill/>
+          </a:ln>
+        </p:spPr>
+        <p:style>
+          <a:lnRef idx="1">
+            <a:schemeClr val="accent1"/>
+          </a:lnRef>
+          <a:fillRef idx="3">
+            <a:schemeClr val="accent1"/>
+          </a:fillRef>
+          <a:effectRef idx="2">
+            <a:schemeClr val="accent1"/>
+          </a:effectRef>
+          <a:fontRef idx="minor">
+            <a:schemeClr val="lt1"/>
+          </a:fontRef>
+        </p:style>
+        <p:txBody>
+          <a:bodyPr rtlCol="0" anchor="ctr"/>
+          <a:lstStyle/>
+          <a:p>
+            <a:pPr algn="ctr"/>
+          </a:p>
+        </p:txBody>
+      </p:sp>
+      <p:sp>
+        <p:nvSpPr>
+          <p:cNvPr id="14" name="TextBox 13"/>
+          <p:cNvSpPr txBox="1"/>
+          <p:nvPr/>
+        </p:nvSpPr>
+        <p:spPr>
+          <a:xfrm>
+            <a:off x="3931920" y="2011680"/>
+            <a:ext cx="2926080" cy="1188720"/>
+          </a:xfrm>
+          <a:prstGeom prst="rect">
+            <a:avLst/>
+          </a:prstGeom>
+          <a:noFill/>
+        </p:spPr>
+        <p:txBody>
+          <a:bodyPr wrap="square">
+            <a:spAutoFit/>
+          </a:bodyPr>
+          <a:lstStyle/>
+          <a:p>
+            <a:pPr algn="ctr">
+              <a:defRPr sz="1300" b="0">
+                <a:solidFill>
+                  <a:srgbClr val="FFFFFF"/>
+                </a:solidFill>
+              </a:defRPr>
+            </a:pPr>
+            <a:r>
+              <a:t>分布式时代变瓶颈</a:t>
+            </a:r>
+            <a:br/>
+            <a:r>
+              <a:t>+ 单点故障源</a:t>
+            </a:r>
+          </a:p>
+        </p:txBody>
+      </p:sp>
+      <p:sp>
+        <p:nvSpPr>
+          <p:cNvPr id="15" name="Rectangle 14"/>
+          <p:cNvSpPr/>
+          <p:nvPr/>
+        </p:nvSpPr>
+        <p:spPr>
+          <a:xfrm>
+            <a:off x="7132320" y="1920240"/>
+            <a:ext cx="4572000" cy="1325880"/>
+          </a:xfrm>
+          <a:prstGeom prst="rect">
+            <a:avLst/>
+          </a:prstGeom>
+          <a:solidFill>
+            <a:srgbClr val="1A1A2E"/>
+          </a:solidFill>
+          <a:ln>
+            <a:noFill/>
+          </a:ln>
+        </p:spPr>
+        <p:style>
+          <a:lnRef idx="1">
+            <a:schemeClr val="accent1"/>
+          </a:lnRef>
+          <a:fillRef idx="3">
+            <a:schemeClr val="accent1"/>
+          </a:fillRef>
+          <a:effectRef idx="2">
+            <a:schemeClr val="accent1"/>
+          </a:effectRef>
+          <a:fontRef idx="minor">
+            <a:schemeClr val="lt1"/>
+          </a:fontRef>
+        </p:style>
+        <p:txBody>
+          <a:bodyPr rtlCol="0" anchor="ctr"/>
+          <a:lstStyle/>
+          <a:p>
+            <a:pPr algn="ctr"/>
+          </a:p>
+        </p:txBody>
+      </p:sp>
+      <p:sp>
+        <p:nvSpPr>
+          <p:cNvPr id="16" name="TextBox 15"/>
+          <p:cNvSpPr txBox="1"/>
+          <p:nvPr/>
+        </p:nvSpPr>
+        <p:spPr>
+          <a:xfrm>
+            <a:off x="7223760" y="2011680"/>
+            <a:ext cx="4389120" cy="1188720"/>
+          </a:xfrm>
+          <a:prstGeom prst="rect">
+            <a:avLst/>
+          </a:prstGeom>
+          <a:noFill/>
+        </p:spPr>
+        <p:txBody>
+          <a:bodyPr wrap="square">
+            <a:spAutoFit/>
+          </a:bodyPr>
+          <a:lstStyle/>
+          <a:p>
+            <a:pPr algn="ctr">
+              <a:defRPr sz="1300" b="0">
+                <a:solidFill>
+                  <a:srgbClr val="FFFFFF"/>
+                </a:solidFill>
+              </a:defRPr>
+            </a:pPr>
+            <a:r>
+              <a:t>Netflix：放弃单例</a:t>
+            </a:r>
+            <a:br/>
+            <a:r>
+              <a:t>拥抱冗余，多副本容错</a:t>
+            </a:r>
+          </a:p>
+        </p:txBody>
+      </p:sp>
+      <p:sp>
+        <p:nvSpPr>
+          <p:cNvPr id="17" name="Rectangle 16"/>
+          <p:cNvSpPr/>
+          <p:nvPr/>
+        </p:nvSpPr>
+        <p:spPr>
+          <a:xfrm>
+            <a:off x="457200" y="3337560"/>
+            <a:ext cx="3200400" cy="1325880"/>
+          </a:xfrm>
+          <a:prstGeom prst="rect">
+            <a:avLst/>
+          </a:prstGeom>
+          <a:solidFill>
+            <a:srgbClr val="2D3748"/>
+          </a:solidFill>
+          <a:ln>
+            <a:noFill/>
+          </a:ln>
+        </p:spPr>
+        <p:style>
+          <a:lnRef idx="1">
+            <a:schemeClr val="accent1"/>
+          </a:lnRef>
+          <a:fillRef idx="3">
+            <a:schemeClr val="accent1"/>
+          </a:fillRef>
+          <a:effectRef idx="2">
+            <a:schemeClr val="accent1"/>
+          </a:effectRef>
+          <a:fontRef idx="minor">
+            <a:schemeClr val="lt1"/>
+          </a:fontRef>
+        </p:style>
+        <p:txBody>
+          <a:bodyPr rtlCol="0" anchor="ctr"/>
+          <a:lstStyle/>
+          <a:p>
+            <a:pPr algn="ctr"/>
+          </a:p>
+        </p:txBody>
+      </p:sp>
+      <p:sp>
+        <p:nvSpPr>
+          <p:cNvPr id="18" name="TextBox 17"/>
+          <p:cNvSpPr txBox="1"/>
+          <p:nvPr/>
+        </p:nvSpPr>
+        <p:spPr>
+          <a:xfrm>
+            <a:off x="548640" y="3429000"/>
+            <a:ext cx="3017520" cy="1188720"/>
+          </a:xfrm>
+          <a:prstGeom prst="rect">
+            <a:avLst/>
+          </a:prstGeom>
+          <a:noFill/>
+        </p:spPr>
+        <p:txBody>
+          <a:bodyPr wrap="square">
+            <a:spAutoFit/>
+          </a:bodyPr>
+          <a:lstStyle/>
+          <a:p>
+            <a:pPr algn="ctr">
+              <a:defRPr sz="1500" b="1">
+                <a:solidFill>
+                  <a:srgbClr val="E94560"/>
+                </a:solidFill>
+              </a:defRPr>
+            </a:pPr>
+            <a:r>
+              <a:t>工厂方法模式</a:t>
+            </a:r>
+          </a:p>
+        </p:txBody>
+      </p:sp>
+      <p:sp>
+        <p:nvSpPr>
+          <p:cNvPr id="19" name="Rectangle 18"/>
+          <p:cNvSpPr/>
+          <p:nvPr/>
+        </p:nvSpPr>
+        <p:spPr>
+          <a:xfrm>
+            <a:off x="3840480" y="3337560"/>
+            <a:ext cx="3108960" cy="1325880"/>
+          </a:xfrm>
+          <a:prstGeom prst="rect">
+            <a:avLst/>
+          </a:prstGeom>
+          <a:solidFill>
+            <a:srgbClr val="2D3748"/>
+          </a:solidFill>
+          <a:ln>
+            <a:noFill/>
+          </a:ln>
+        </p:spPr>
+        <p:style>
+          <a:lnRef idx="1">
+            <a:schemeClr val="accent1"/>
+          </a:lnRef>
+          <a:fillRef idx="3">
+            <a:schemeClr val="accent1"/>
+          </a:fillRef>
+          <a:effectRef idx="2">
+            <a:schemeClr val="accent1"/>
+          </a:effectRef>
+          <a:fontRef idx="minor">
+            <a:schemeClr val="lt1"/>
+          </a:fontRef>
+        </p:style>
+        <p:txBody>
+          <a:bodyPr rtlCol="0" anchor="ctr"/>
+          <a:lstStyle/>
+          <a:p>
+            <a:pPr algn="ctr"/>
+          </a:p>
+        </p:txBody>
+      </p:sp>
+      <p:sp>
+        <p:nvSpPr>
+          <p:cNvPr id="20" name="TextBox 19"/>
+          <p:cNvSpPr txBox="1"/>
+          <p:nvPr/>
+        </p:nvSpPr>
+        <p:spPr>
+          <a:xfrm>
+            <a:off x="3931920" y="3429000"/>
+            <a:ext cx="2926080" cy="1188720"/>
+          </a:xfrm>
+          <a:prstGeom prst="rect">
+            <a:avLst/>
+          </a:prstGeom>
+          <a:noFill/>
+        </p:spPr>
+        <p:txBody>
+          <a:bodyPr wrap="square">
+            <a:spAutoFit/>
+          </a:bodyPr>
+          <a:lstStyle/>
+          <a:p>
+            <a:pPr algn="ctr">
+              <a:defRPr sz="1300" b="0">
+                <a:solidFill>
+                  <a:srgbClr val="FFFFFF"/>
+                </a:solidFill>
+              </a:defRPr>
+            </a:pPr>
+            <a:r>
+              <a:t>无法处理</a:t>
+            </a:r>
+            <a:br/>
+            <a:r>
+              <a:t>运行时演化</a:t>
+            </a:r>
+          </a:p>
+        </p:txBody>
+      </p:sp>
+      <p:sp>
+        <p:nvSpPr>
+          <p:cNvPr id="21" name="Rectangle 20"/>
+          <p:cNvSpPr/>
+          <p:nvPr/>
+        </p:nvSpPr>
+        <p:spPr>
+          <a:xfrm>
+            <a:off x="7132320" y="3337560"/>
+            <a:ext cx="4572000" cy="1325880"/>
+          </a:xfrm>
+          <a:prstGeom prst="rect">
+            <a:avLst/>
+          </a:prstGeom>
+          <a:solidFill>
+            <a:srgbClr val="2D3748"/>
+          </a:solidFill>
+          <a:ln>
+            <a:noFill/>
+          </a:ln>
+        </p:spPr>
+        <p:style>
+          <a:lnRef idx="1">
+            <a:schemeClr val="accent1"/>
+          </a:lnRef>
+          <a:fillRef idx="3">
+            <a:schemeClr val="accent1"/>
+          </a:fillRef>
+          <a:effectRef idx="2">
+            <a:schemeClr val="accent1"/>
+          </a:effectRef>
+          <a:fontRef idx="minor">
+            <a:schemeClr val="lt1"/>
+          </a:fontRef>
+        </p:style>
+        <p:txBody>
+          <a:bodyPr rtlCol="0" anchor="ctr"/>
+          <a:lstStyle/>
+          <a:p>
+            <a:pPr algn="ctr"/>
+          </a:p>
+        </p:txBody>
+      </p:sp>
+      <p:sp>
+        <p:nvSpPr>
+          <p:cNvPr id="22" name="TextBox 21"/>
+          <p:cNvSpPr txBox="1"/>
+          <p:nvPr/>
+        </p:nvSpPr>
+        <p:spPr>
+          <a:xfrm>
+            <a:off x="7223760" y="3429000"/>
+            <a:ext cx="4389120" cy="1188720"/>
+          </a:xfrm>
+          <a:prstGeom prst="rect">
+            <a:avLst/>
+          </a:prstGeom>
+          <a:noFill/>
+        </p:spPr>
+        <p:txBody>
+          <a:bodyPr wrap="square">
+            <a:spAutoFit/>
+          </a:bodyPr>
+          <a:lstStyle/>
+          <a:p>
+            <a:pPr algn="ctr">
+              <a:defRPr sz="1300" b="0">
+                <a:solidFill>
+                  <a:srgbClr val="FFFFFF"/>
+                </a:solidFill>
+              </a:defRPr>
+            </a:pPr>
+            <a:r>
+              <a:t>Tesla 自动驾驶</a:t>
+            </a:r>
+            <a:br/>
+            <a:r>
+              <a:t>每天学习新驾驶模式</a:t>
+            </a:r>
+          </a:p>
+        </p:txBody>
+      </p:sp>
+      <p:sp>
+        <p:nvSpPr>
+          <p:cNvPr id="23" name="Rectangle 22"/>
+          <p:cNvSpPr/>
+          <p:nvPr/>
+        </p:nvSpPr>
+        <p:spPr>
+          <a:xfrm>
+            <a:off x="457200" y="4754880"/>
+            <a:ext cx="3200400" cy="1325880"/>
+          </a:xfrm>
+          <a:prstGeom prst="rect">
+            <a:avLst/>
+          </a:prstGeom>
+          <a:solidFill>
+            <a:srgbClr val="1A1A2E"/>
+          </a:solidFill>
+          <a:ln>
+            <a:noFill/>
+          </a:ln>
+        </p:spPr>
+        <p:style>
+          <a:lnRef idx="1">
+            <a:schemeClr val="accent1"/>
+          </a:lnRef>
+          <a:fillRef idx="3">
+            <a:schemeClr val="accent1"/>
+          </a:fillRef>
+          <a:effectRef idx="2">
+            <a:schemeClr val="accent1"/>
+          </a:effectRef>
+          <a:fontRef idx="minor">
+            <a:schemeClr val="lt1"/>
+          </a:fontRef>
+        </p:style>
+        <p:txBody>
+          <a:bodyPr rtlCol="0" anchor="ctr"/>
+          <a:lstStyle/>
+          <a:p>
+            <a:pPr algn="ctr"/>
+          </a:p>
+        </p:txBody>
+      </p:sp>
+      <p:sp>
+        <p:nvSpPr>
+          <p:cNvPr id="24" name="TextBox 23"/>
+          <p:cNvSpPr txBox="1"/>
+          <p:nvPr/>
+        </p:nvSpPr>
+        <p:spPr>
+          <a:xfrm>
+            <a:off x="548640" y="4846320"/>
+            <a:ext cx="3017520" cy="1188720"/>
+          </a:xfrm>
+          <a:prstGeom prst="rect">
+            <a:avLst/>
+          </a:prstGeom>
+          <a:noFill/>
+        </p:spPr>
+        <p:txBody>
+          <a:bodyPr wrap="square">
+            <a:spAutoFit/>
+          </a:bodyPr>
+          <a:lstStyle/>
+          <a:p>
+            <a:pPr algn="ctr">
+              <a:defRPr sz="1500" b="1">
+                <a:solidFill>
+                  <a:srgbClr val="E94560"/>
+                </a:solidFill>
+              </a:defRPr>
+            </a:pPr>
+            <a:r>
+              <a:t>观察者模式</a:t>
+            </a:r>
+          </a:p>
+        </p:txBody>
+      </p:sp>
+      <p:sp>
+        <p:nvSpPr>
+          <p:cNvPr id="25" name="Rectangle 24"/>
+          <p:cNvSpPr/>
+          <p:nvPr/>
+        </p:nvSpPr>
+        <p:spPr>
+          <a:xfrm>
+            <a:off x="3840480" y="4754880"/>
+            <a:ext cx="3108960" cy="1325880"/>
+          </a:xfrm>
+          <a:prstGeom prst="rect">
+            <a:avLst/>
+          </a:prstGeom>
+          <a:solidFill>
+            <a:srgbClr val="1A1A2E"/>
+          </a:solidFill>
+          <a:ln>
+            <a:noFill/>
+          </a:ln>
+        </p:spPr>
+        <p:style>
+          <a:lnRef idx="1">
+            <a:schemeClr val="accent1"/>
+          </a:lnRef>
+          <a:fillRef idx="3">
+            <a:schemeClr val="accent1"/>
+          </a:fillRef>
+          <a:effectRef idx="2">
+            <a:schemeClr val="accent1"/>
+          </a:effectRef>
+          <a:fontRef idx="minor">
+            <a:schemeClr val="lt1"/>
+          </a:fontRef>
+        </p:style>
+        <p:txBody>
+          <a:bodyPr rtlCol="0" anchor="ctr"/>
+          <a:lstStyle/>
+          <a:p>
+            <a:pPr algn="ctr"/>
+          </a:p>
+        </p:txBody>
+      </p:sp>
+      <p:sp>
+        <p:nvSpPr>
+          <p:cNvPr id="26" name="TextBox 25"/>
+          <p:cNvSpPr txBox="1"/>
+          <p:nvPr/>
+        </p:nvSpPr>
+        <p:spPr>
+          <a:xfrm>
+            <a:off x="3931920" y="4846320"/>
+            <a:ext cx="2926080" cy="1188720"/>
+          </a:xfrm>
+          <a:prstGeom prst="rect">
+            <a:avLst/>
+          </a:prstGeom>
+          <a:noFill/>
+        </p:spPr>
+        <p:txBody>
+          <a:bodyPr wrap="square">
+            <a:spAutoFit/>
+          </a:bodyPr>
+          <a:lstStyle/>
+          <a:p>
+            <a:pPr algn="ctr">
+              <a:defRPr sz="1300" b="0">
+                <a:solidFill>
+                  <a:srgbClr val="FFFFFF"/>
+                </a:solidFill>
+              </a:defRPr>
+            </a:pPr>
+            <a:r>
+              <a:t>分布式环境下</a:t>
+            </a:r>
+            <a:br/>
+            <a:r>
+              <a:t>事件链雪崩</a:t>
+            </a:r>
+          </a:p>
+        </p:txBody>
+      </p:sp>
+      <p:sp>
+        <p:nvSpPr>
+          <p:cNvPr id="27" name="Rectangle 26"/>
+          <p:cNvSpPr/>
+          <p:nvPr/>
+        </p:nvSpPr>
+        <p:spPr>
+          <a:xfrm>
+            <a:off x="7132320" y="4754880"/>
+            <a:ext cx="4572000" cy="1325880"/>
+          </a:xfrm>
+          <a:prstGeom prst="rect">
+            <a:avLst/>
+          </a:prstGeom>
+          <a:solidFill>
+            <a:srgbClr val="1A1A2E"/>
+          </a:solidFill>
+          <a:ln>
+            <a:noFill/>
+          </a:ln>
+        </p:spPr>
+        <p:style>
+          <a:lnRef idx="1">
+            <a:schemeClr val="accent1"/>
+          </a:lnRef>
+          <a:fillRef idx="3">
+            <a:schemeClr val="accent1"/>
+          </a:fillRef>
+          <a:effectRef idx="2">
+            <a:schemeClr val="accent1"/>
+          </a:effectRef>
+          <a:fontRef idx="minor">
+            <a:schemeClr val="lt1"/>
+          </a:fontRef>
+        </p:style>
+        <p:txBody>
+          <a:bodyPr rtlCol="0" anchor="ctr"/>
+          <a:lstStyle/>
+          <a:p>
+            <a:pPr algn="ctr"/>
+          </a:p>
+        </p:txBody>
+      </p:sp>
+      <p:sp>
+        <p:nvSpPr>
+          <p:cNvPr id="28" name="TextBox 27"/>
+          <p:cNvSpPr txBox="1"/>
+          <p:nvPr/>
+        </p:nvSpPr>
+        <p:spPr>
+          <a:xfrm>
+            <a:off x="7223760" y="4846320"/>
+            <a:ext cx="4389120" cy="1188720"/>
+          </a:xfrm>
+          <a:prstGeom prst="rect">
+            <a:avLst/>
+          </a:prstGeom>
+          <a:noFill/>
+        </p:spPr>
+        <p:txBody>
+          <a:bodyPr wrap="square">
+            <a:spAutoFit/>
+          </a:bodyPr>
+          <a:lstStyle/>
+          <a:p>
+            <a:pPr algn="ctr">
+              <a:defRPr sz="1300" b="0">
+                <a:solidFill>
+                  <a:srgbClr val="FFFFFF"/>
+                </a:solidFill>
+              </a:defRPr>
+            </a:pPr>
+            <a:r>
+              <a:t>引入异步通信</a:t>
+            </a:r>
+            <a:br/>
+            <a:r>
+              <a:t>+ 背压机制</a:t>
             </a:r>
           </a:p>
         </p:txBody>
@@ -9075,7 +13254,7 @@
         <p:spPr>
           <a:xfrm>
             <a:off x="457200" y="228600"/>
-            <a:ext cx="11274552" cy="731520"/>
+            <a:ext cx="11274552" cy="822960"/>
           </a:xfrm>
           <a:prstGeom prst="rect">
             <a:avLst/>
@@ -9096,21 +13275,103 @@
               </a:defRPr>
             </a:pPr>
             <a:r>
-              <a:t>函数与流：让软件契合 AI 的思考节奏</a:t>
-            </a:r>
-          </a:p>
-        </p:txBody>
-      </p:sp>
-      <p:sp>
-        <p:nvSpPr>
-          <p:cNvPr id="5" name="TextBox 4"/>
+              <a:t>🔄 2012-2014：四次关键变革 — 从『防止故障』到『拥抱故障』</a:t>
+            </a:r>
+          </a:p>
+        </p:txBody>
+      </p:sp>
+      <p:sp>
+        <p:nvSpPr>
+          <p:cNvPr id="5" name="Rounded Rectangle 4"/>
+          <p:cNvSpPr/>
+          <p:nvPr/>
+        </p:nvSpPr>
+        <p:spPr>
+          <a:xfrm>
+            <a:off x="640080" y="1463040"/>
+            <a:ext cx="5271516" cy="1417320"/>
+          </a:xfrm>
+          <a:prstGeom prst="roundRect">
+            <a:avLst/>
+          </a:prstGeom>
+          <a:solidFill>
+            <a:srgbClr val="1A1A2E"/>
+          </a:solidFill>
+          <a:ln>
+            <a:noFill/>
+          </a:ln>
+        </p:spPr>
+        <p:style>
+          <a:lnRef idx="1">
+            <a:schemeClr val="accent1"/>
+          </a:lnRef>
+          <a:fillRef idx="3">
+            <a:schemeClr val="accent1"/>
+          </a:fillRef>
+          <a:effectRef idx="2">
+            <a:schemeClr val="accent1"/>
+          </a:effectRef>
+          <a:fontRef idx="minor">
+            <a:schemeClr val="lt1"/>
+          </a:fontRef>
+        </p:style>
+        <p:txBody>
+          <a:bodyPr rtlCol="0" anchor="ctr"/>
+          <a:lstStyle/>
+          <a:p>
+            <a:pPr algn="ctr"/>
+          </a:p>
+        </p:txBody>
+      </p:sp>
+      <p:sp>
+        <p:nvSpPr>
+          <p:cNvPr id="6" name="TextBox 5"/>
           <p:cNvSpPr txBox="1"/>
           <p:nvPr/>
         </p:nvSpPr>
         <p:spPr>
           <a:xfrm>
-            <a:off x="640080" y="1371600"/>
-            <a:ext cx="10972800" cy="5029200"/>
+            <a:off x="640080" y="1536192"/>
+            <a:ext cx="5180076" cy="365760"/>
+          </a:xfrm>
+          <a:prstGeom prst="rect">
+            <a:avLst/>
+          </a:prstGeom>
+          <a:noFill/>
+        </p:spPr>
+        <p:txBody>
+          <a:bodyPr wrap="none">
+            <a:spAutoFit/>
+          </a:bodyPr>
+          <a:lstStyle/>
+          <a:p>
+            <a:pPr>
+              <a:defRPr sz="1400" b="1">
+                <a:solidFill>
+                  <a:srgbClr val="553C9A"/>
+                </a:solidFill>
+              </a:defRPr>
+            </a:pPr>
+            <a:r>
+              <a:t>🌐 Google</a:t>
+            </a:r>
+            <a:br/>
+            <a:r>
+              <a:t>Datacenter as Computer</a:t>
+            </a:r>
+          </a:p>
+        </p:txBody>
+      </p:sp>
+      <p:sp>
+        <p:nvSpPr>
+          <p:cNvPr id="7" name="TextBox 6"/>
+          <p:cNvSpPr txBox="1"/>
+          <p:nvPr/>
+        </p:nvSpPr>
+        <p:spPr>
+          <a:xfrm>
+            <a:off x="640080" y="1920240"/>
+            <a:ext cx="5180076" cy="1005840"/>
           </a:xfrm>
           <a:prstGeom prst="rect">
             <a:avLst/>
@@ -9124,62 +13385,389 @@
           <a:lstStyle/>
           <a:p>
             <a:pPr>
-              <a:spcAft>
-                <a:spcPts val="1400"/>
-              </a:spcAft>
-              <a:defRPr sz="2100" b="0">
-                <a:solidFill>
-                  <a:srgbClr val="1A1A2E"/>
-                </a:solidFill>
-              </a:defRPr>
-            </a:pPr>
-            <a:r>
-              <a:t>• LLM 本质是无状态的「纯函数」：输入 Prompt → 输出 Token 流</a:t>
-            </a:r>
-          </a:p>
+              <a:defRPr sz="1100">
+                <a:solidFill>
+                  <a:srgbClr val="A0AEC0"/>
+                </a:solidFill>
+              </a:defRPr>
+            </a:pPr>
+            <a:r>
+              <a:t>2012 — 硬件故障是统计学必然</a:t>
+            </a:r>
+            <a:br/>
+            <a:r>
+              <a:t>软件为「故障常态化」而设计</a:t>
+            </a:r>
+            <a:br/>
+            <a:r>
+              <a:t>从「单机精修」到「宏观概率」</a:t>
+            </a:r>
+          </a:p>
+        </p:txBody>
+      </p:sp>
+      <p:sp>
+        <p:nvSpPr>
+          <p:cNvPr id="8" name="Rounded Rectangle 7"/>
+          <p:cNvSpPr/>
+          <p:nvPr/>
+        </p:nvSpPr>
+        <p:spPr>
+          <a:xfrm>
+            <a:off x="6094476" y="1463040"/>
+            <a:ext cx="5271516" cy="1417320"/>
+          </a:xfrm>
+          <a:prstGeom prst="roundRect">
+            <a:avLst/>
+          </a:prstGeom>
+          <a:solidFill>
+            <a:srgbClr val="1A1A2E"/>
+          </a:solidFill>
+          <a:ln>
+            <a:noFill/>
+          </a:ln>
+        </p:spPr>
+        <p:style>
+          <a:lnRef idx="1">
+            <a:schemeClr val="accent1"/>
+          </a:lnRef>
+          <a:fillRef idx="3">
+            <a:schemeClr val="accent1"/>
+          </a:fillRef>
+          <a:effectRef idx="2">
+            <a:schemeClr val="accent1"/>
+          </a:effectRef>
+          <a:fontRef idx="minor">
+            <a:schemeClr val="lt1"/>
+          </a:fontRef>
+        </p:style>
+        <p:txBody>
+          <a:bodyPr rtlCol="0" anchor="ctr"/>
+          <a:lstStyle/>
+          <a:p>
+            <a:pPr algn="ctr"/>
+          </a:p>
+        </p:txBody>
+      </p:sp>
+      <p:sp>
+        <p:nvSpPr>
+          <p:cNvPr id="9" name="TextBox 8"/>
+          <p:cNvSpPr txBox="1"/>
+          <p:nvPr/>
+        </p:nvSpPr>
+        <p:spPr>
+          <a:xfrm>
+            <a:off x="6094476" y="1536192"/>
+            <a:ext cx="5180076" cy="365760"/>
+          </a:xfrm>
+          <a:prstGeom prst="rect">
+            <a:avLst/>
+          </a:prstGeom>
+          <a:noFill/>
+        </p:spPr>
+        <p:txBody>
+          <a:bodyPr wrap="none">
+            <a:spAutoFit/>
+          </a:bodyPr>
+          <a:lstStyle/>
           <a:p>
             <a:pPr>
-              <a:spcAft>
-                <a:spcPts val="1400"/>
-              </a:spcAft>
-              <a:defRPr sz="2100" b="0">
-                <a:solidFill>
-                  <a:srgbClr val="1A1A2E"/>
-                </a:solidFill>
-              </a:defRPr>
-            </a:pPr>
-            <a:r>
-              <a:t>• FP 思想（引用透明 + 管道）与 Agent 数据处理管道完全吻合</a:t>
-            </a:r>
-          </a:p>
+              <a:defRPr sz="1400" b="1">
+                <a:solidFill>
+                  <a:srgbClr val="553C9A"/>
+                </a:solidFill>
+              </a:defRPr>
+            </a:pPr>
+            <a:r>
+              <a:t>🐵 Netflix</a:t>
+            </a:r>
+            <a:br/>
+            <a:r>
+              <a:t>Chaos Monkey</a:t>
+            </a:r>
+          </a:p>
+        </p:txBody>
+      </p:sp>
+      <p:sp>
+        <p:nvSpPr>
+          <p:cNvPr id="10" name="TextBox 9"/>
+          <p:cNvSpPr txBox="1"/>
+          <p:nvPr/>
+        </p:nvSpPr>
+        <p:spPr>
+          <a:xfrm>
+            <a:off x="6094476" y="1920240"/>
+            <a:ext cx="5180076" cy="1005840"/>
+          </a:xfrm>
+          <a:prstGeom prst="rect">
+            <a:avLst/>
+          </a:prstGeom>
+          <a:noFill/>
+        </p:spPr>
+        <p:txBody>
+          <a:bodyPr wrap="square">
+            <a:spAutoFit/>
+          </a:bodyPr>
+          <a:lstStyle/>
           <a:p>
             <a:pPr>
-              <a:spcAft>
-                <a:spcPts val="1400"/>
-              </a:spcAft>
-              <a:defRPr sz="2100" b="1">
+              <a:defRPr sz="1100">
+                <a:solidFill>
+                  <a:srgbClr val="A0AEC0"/>
+                </a:solidFill>
+              </a:defRPr>
+            </a:pPr>
+            <a:r>
+              <a:t>2012 — 专门随机杀死生产服务器</a:t>
+            </a:r>
+            <a:br/>
+            <a:r>
+              <a:t>从「鲁棒性」到「反脆弱」</a:t>
+            </a:r>
+            <a:br/>
+            <a:r>
+              <a:t>系统像免疫系统通过小创伤进化</a:t>
+            </a:r>
+          </a:p>
+        </p:txBody>
+      </p:sp>
+      <p:sp>
+        <p:nvSpPr>
+          <p:cNvPr id="11" name="Rounded Rectangle 10"/>
+          <p:cNvSpPr/>
+          <p:nvPr/>
+        </p:nvSpPr>
+        <p:spPr>
+          <a:xfrm>
+            <a:off x="640080" y="3017520"/>
+            <a:ext cx="5271516" cy="1417320"/>
+          </a:xfrm>
+          <a:prstGeom prst="roundRect">
+            <a:avLst/>
+          </a:prstGeom>
+          <a:solidFill>
+            <a:srgbClr val="1A1A2E"/>
+          </a:solidFill>
+          <a:ln>
+            <a:noFill/>
+          </a:ln>
+        </p:spPr>
+        <p:style>
+          <a:lnRef idx="1">
+            <a:schemeClr val="accent1"/>
+          </a:lnRef>
+          <a:fillRef idx="3">
+            <a:schemeClr val="accent1"/>
+          </a:fillRef>
+          <a:effectRef idx="2">
+            <a:schemeClr val="accent1"/>
+          </a:effectRef>
+          <a:fontRef idx="minor">
+            <a:schemeClr val="lt1"/>
+          </a:fontRef>
+        </p:style>
+        <p:txBody>
+          <a:bodyPr rtlCol="0" anchor="ctr"/>
+          <a:lstStyle/>
+          <a:p>
+            <a:pPr algn="ctr"/>
+          </a:p>
+        </p:txBody>
+      </p:sp>
+      <p:sp>
+        <p:nvSpPr>
+          <p:cNvPr id="12" name="TextBox 11"/>
+          <p:cNvSpPr txBox="1"/>
+          <p:nvPr/>
+        </p:nvSpPr>
+        <p:spPr>
+          <a:xfrm>
+            <a:off x="640080" y="3090672"/>
+            <a:ext cx="5180076" cy="365760"/>
+          </a:xfrm>
+          <a:prstGeom prst="rect">
+            <a:avLst/>
+          </a:prstGeom>
+          <a:noFill/>
+        </p:spPr>
+        <p:txBody>
+          <a:bodyPr wrap="none">
+            <a:spAutoFit/>
+          </a:bodyPr>
+          <a:lstStyle/>
+          <a:p>
+            <a:pPr>
+              <a:defRPr sz="1400" b="1">
                 <a:solidFill>
                   <a:srgbClr val="553C9A"/>
                 </a:solidFill>
               </a:defRPr>
             </a:pPr>
             <a:r>
-              <a:t>• 背压机制（Backpressure）：多 Agent 协作中「搜索 Agent」不会压垮「写作 Agent」</a:t>
-            </a:r>
-          </a:p>
+              <a:t>📦 Docker</a:t>
+            </a:r>
+          </a:p>
+        </p:txBody>
+      </p:sp>
+      <p:sp>
+        <p:nvSpPr>
+          <p:cNvPr id="13" name="TextBox 12"/>
+          <p:cNvSpPr txBox="1"/>
+          <p:nvPr/>
+        </p:nvSpPr>
+        <p:spPr>
+          <a:xfrm>
+            <a:off x="640080" y="3474720"/>
+            <a:ext cx="5180076" cy="1005840"/>
+          </a:xfrm>
+          <a:prstGeom prst="rect">
+            <a:avLst/>
+          </a:prstGeom>
+          <a:noFill/>
+        </p:spPr>
+        <p:txBody>
+          <a:bodyPr wrap="square">
+            <a:spAutoFit/>
+          </a:bodyPr>
+          <a:lstStyle/>
           <a:p>
             <a:pPr>
-              <a:spcAft>
-                <a:spcPts val="1400"/>
-              </a:spcAft>
-              <a:defRPr sz="2100" b="0">
-                <a:solidFill>
-                  <a:srgbClr val="1A1A2E"/>
-                </a:solidFill>
-              </a:defRPr>
-            </a:pPr>
-            <a:r>
-              <a:t>• Serverless：函数平时「沉睡」在云端，Agent 产生意图时通过 API 唤醒</a:t>
+              <a:defRPr sz="1100">
+                <a:solidFill>
+                  <a:srgbClr val="A0AEC0"/>
+                </a:solidFill>
+              </a:defRPr>
+            </a:pPr>
+            <a:r>
+              <a:t>2013 — 不可变基础设施</a:t>
+            </a:r>
+            <a:br/>
+            <a:r>
+              <a:t>服务器从「需要维护的资产」</a:t>
+            </a:r>
+            <a:br/>
+            <a:r>
+              <a:t>变成可销毁的「耗材」</a:t>
+            </a:r>
+          </a:p>
+        </p:txBody>
+      </p:sp>
+      <p:sp>
+        <p:nvSpPr>
+          <p:cNvPr id="14" name="Rounded Rectangle 13"/>
+          <p:cNvSpPr/>
+          <p:nvPr/>
+        </p:nvSpPr>
+        <p:spPr>
+          <a:xfrm>
+            <a:off x="6094476" y="3017520"/>
+            <a:ext cx="5271516" cy="1417320"/>
+          </a:xfrm>
+          <a:prstGeom prst="roundRect">
+            <a:avLst/>
+          </a:prstGeom>
+          <a:solidFill>
+            <a:srgbClr val="1A1A2E"/>
+          </a:solidFill>
+          <a:ln>
+            <a:noFill/>
+          </a:ln>
+        </p:spPr>
+        <p:style>
+          <a:lnRef idx="1">
+            <a:schemeClr val="accent1"/>
+          </a:lnRef>
+          <a:fillRef idx="3">
+            <a:schemeClr val="accent1"/>
+          </a:fillRef>
+          <a:effectRef idx="2">
+            <a:schemeClr val="accent1"/>
+          </a:effectRef>
+          <a:fontRef idx="minor">
+            <a:schemeClr val="lt1"/>
+          </a:fontRef>
+        </p:style>
+        <p:txBody>
+          <a:bodyPr rtlCol="0" anchor="ctr"/>
+          <a:lstStyle/>
+          <a:p>
+            <a:pPr algn="ctr"/>
+          </a:p>
+        </p:txBody>
+      </p:sp>
+      <p:sp>
+        <p:nvSpPr>
+          <p:cNvPr id="15" name="TextBox 14"/>
+          <p:cNvSpPr txBox="1"/>
+          <p:nvPr/>
+        </p:nvSpPr>
+        <p:spPr>
+          <a:xfrm>
+            <a:off x="6094476" y="3090672"/>
+            <a:ext cx="5180076" cy="365760"/>
+          </a:xfrm>
+          <a:prstGeom prst="rect">
+            <a:avLst/>
+          </a:prstGeom>
+          <a:noFill/>
+        </p:spPr>
+        <p:txBody>
+          <a:bodyPr wrap="none">
+            <a:spAutoFit/>
+          </a:bodyPr>
+          <a:lstStyle/>
+          <a:p>
+            <a:pPr>
+              <a:defRPr sz="1400" b="1">
+                <a:solidFill>
+                  <a:srgbClr val="553C9A"/>
+                </a:solidFill>
+              </a:defRPr>
+            </a:pPr>
+            <a:r>
+              <a:t>☸️ Kubernetes</a:t>
+            </a:r>
+          </a:p>
+        </p:txBody>
+      </p:sp>
+      <p:sp>
+        <p:nvSpPr>
+          <p:cNvPr id="16" name="TextBox 15"/>
+          <p:cNvSpPr txBox="1"/>
+          <p:nvPr/>
+        </p:nvSpPr>
+        <p:spPr>
+          <a:xfrm>
+            <a:off x="6094476" y="3474720"/>
+            <a:ext cx="5180076" cy="1005840"/>
+          </a:xfrm>
+          <a:prstGeom prst="rect">
+            <a:avLst/>
+          </a:prstGeom>
+          <a:noFill/>
+        </p:spPr>
+        <p:txBody>
+          <a:bodyPr wrap="square">
+            <a:spAutoFit/>
+          </a:bodyPr>
+          <a:lstStyle/>
+          <a:p>
+            <a:pPr>
+              <a:defRPr sz="1100">
+                <a:solidFill>
+                  <a:srgbClr val="A0AEC0"/>
+                </a:solidFill>
+              </a:defRPr>
+            </a:pPr>
+            <a:r>
+              <a:t>2014 — 声明式API + 调解循环</a:t>
+            </a:r>
+            <a:br/>
+            <a:r>
+              <a:t>Controller 本质上是</a:t>
+            </a:r>
+            <a:br/>
+            <a:r>
+              <a:t>原始的、针对特定任务的 Agent</a:t>
             </a:r>
           </a:p>
         </p:txBody>
@@ -9254,7 +13842,7 @@
         <p:spPr>
           <a:xfrm>
             <a:off x="0" y="0"/>
-            <a:ext cx="12188952" cy="1097280"/>
+            <a:ext cx="12188952" cy="137160"/>
           </a:xfrm>
           <a:prstGeom prst="rect">
             <a:avLst/>
@@ -9296,43 +13884,8 @@
         </p:nvSpPr>
         <p:spPr>
           <a:xfrm>
-            <a:off x="457200" y="228600"/>
-            <a:ext cx="11274552" cy="731520"/>
-          </a:xfrm>
-          <a:prstGeom prst="rect">
-            <a:avLst/>
-          </a:prstGeom>
-          <a:noFill/>
-        </p:spPr>
-        <p:txBody>
-          <a:bodyPr wrap="none">
-            <a:spAutoFit/>
-          </a:bodyPr>
-          <a:lstStyle/>
-          <a:p>
-            <a:pPr>
-              <a:defRPr sz="3200" b="1">
-                <a:solidFill>
-                  <a:srgbClr val="FFFFFF"/>
-                </a:solidFill>
-              </a:defRPr>
-            </a:pPr>
-            <a:r>
-              <a:t>Agent 的本质：从工具到伙伴</a:t>
-            </a:r>
-          </a:p>
-        </p:txBody>
-      </p:sp>
-      <p:sp>
-        <p:nvSpPr>
-          <p:cNvPr id="5" name="TextBox 4"/>
-          <p:cNvSpPr txBox="1"/>
-          <p:nvPr/>
-        </p:nvSpPr>
-        <p:spPr>
-          <a:xfrm>
-            <a:off x="640080" y="1371600"/>
-            <a:ext cx="10972800" cy="5029200"/>
+            <a:off x="457200" y="2011680"/>
+            <a:ext cx="11274552" cy="2286000"/>
           </a:xfrm>
           <a:prstGeom prst="rect">
             <a:avLst/>
@@ -9345,78 +13898,15 @@
           </a:bodyPr>
           <a:lstStyle/>
           <a:p>
-            <a:pPr>
-              <a:spcAft>
-                <a:spcPts val="1400"/>
-              </a:spcAft>
-              <a:defRPr sz="2100" b="0">
+            <a:pPr algn="ctr">
+              <a:defRPr sz="2600" i="1">
                 <a:solidFill>
                   <a:srgbClr val="1A1A2E"/>
                 </a:solidFill>
               </a:defRPr>
             </a:pPr>
             <a:r>
-              <a:t>• 交互原语升维：命令与控制 → 意图与协作</a:t>
-            </a:r>
-          </a:p>
-          <a:p>
-            <a:pPr>
-              <a:spcAft>
-                <a:spcPts val="1400"/>
-              </a:spcAft>
-              <a:defRPr sz="2100" b="1">
-                <a:solidFill>
-                  <a:srgbClr val="553C9A"/>
-                </a:solidFill>
-              </a:defRPr>
-            </a:pPr>
-            <a:r>
-              <a:t>• Agent =「模糊翻译器」：人类模糊的自然语言 → 机器精确的 API 调用</a:t>
-            </a:r>
-          </a:p>
-          <a:p>
-            <a:pPr>
-              <a:spcAft>
-                <a:spcPts val="1400"/>
-              </a:spcAft>
-              <a:defRPr sz="2100" b="1">
-                <a:solidFill>
-                  <a:srgbClr val="553C9A"/>
-                </a:solidFill>
-              </a:defRPr>
-            </a:pPr>
-            <a:r>
-              <a:t>• 记忆与身份：Agent 在对话之间延续「身份」，逐渐形成对用户的深入理解</a:t>
-            </a:r>
-          </a:p>
-          <a:p>
-            <a:pPr>
-              <a:spcAft>
-                <a:spcPts val="1400"/>
-              </a:spcAft>
-              <a:defRPr sz="2100" b="0">
-                <a:solidFill>
-                  <a:srgbClr val="1A1A2E"/>
-                </a:solidFill>
-              </a:defRPr>
-            </a:pPr>
-            <a:r>
-              <a:t>• 上下文工程：「上下文就是 Agent 的整个世界」，失败往往源于上下文有误</a:t>
-            </a:r>
-          </a:p>
-          <a:p>
-            <a:pPr>
-              <a:spcAft>
-                <a:spcPts val="1400"/>
-              </a:spcAft>
-              <a:defRPr sz="2100" b="0">
-                <a:solidFill>
-                  <a:srgbClr val="1A1A2E"/>
-                </a:solidFill>
-              </a:defRPr>
-            </a:pPr>
-            <a:r>
-              <a:t>• 任务分解（Task Decomposition）：把「目标」变为「计划」的能力</a:t>
+              <a:t>"确定性时代终结。软件不再是精密的瑞士手表，而更像自组织的生物群落。"</a:t>
             </a:r>
           </a:p>
         </p:txBody>

--- a/static/reports/agent-design-patterns-book-intro.pptx
+++ b/static/reports/agent-design-patterns-book-intro.pptx
@@ -36,6 +36,8 @@
     <p:sldId id="284" r:id="rId35"/>
     <p:sldId id="285" r:id="rId36"/>
     <p:sldId id="286" r:id="rId37"/>
+    <p:sldId id="287" r:id="rId38"/>
+    <p:sldId id="288" r:id="rId39"/>
   </p:sldIdLst>
   <p:sldSz cx="12188952" cy="6858000" type="screen4x3"/>
   <p:notesSz cx="6858000" cy="9144000"/>
@@ -3400,14 +3402,14 @@
               <a:spcAft>
                 <a:spcPts val="1400"/>
               </a:spcAft>
-              <a:defRPr sz="2100" b="0">
+              <a:defRPr sz="2000" b="0">
                 <a:solidFill>
                   <a:srgbClr val="1A1A2E"/>
                 </a:solidFill>
               </a:defRPr>
             </a:pPr>
             <a:r>
-              <a:t>• 模式思想源自建筑师克里斯托弗·亚历山大的《建筑模式语言》——优秀建筑是「永恒形式」的发现</a:t>
+              <a:t>• GoF（Gang of Four，四人组）：Erich Gamma、Richard Helm、Ralph Johnson、John Vlissides，1994年提炼23种经典模式</a:t>
             </a:r>
           </a:p>
           <a:p>
@@ -3415,14 +3417,14 @@
               <a:spcAft>
                 <a:spcPts val="1400"/>
               </a:spcAft>
-              <a:defRPr sz="2100" b="0">
-                <a:solidFill>
-                  <a:srgbClr val="1A1A2E"/>
-                </a:solidFill>
-              </a:defRPr>
-            </a:pPr>
-            <a:r>
-              <a:t>• 1994 年 GoF《设计模式》：提炼23种模式，构建系统化设计世界观</a:t>
+              <a:defRPr sz="2000" b="1">
+                <a:solidFill>
+                  <a:srgbClr val="553C9A"/>
+                </a:solidFill>
+              </a:defRPr>
+            </a:pPr>
+            <a:r>
+              <a:t>• 模式病 (Patternitis)：过度设计让简单功能淹没在抽象海洋中</a:t>
             </a:r>
           </a:p>
           <a:p>
@@ -3430,14 +3432,14 @@
               <a:spcAft>
                 <a:spcPts val="1400"/>
               </a:spcAft>
-              <a:defRPr sz="2100" b="1">
+              <a:defRPr sz="2000" b="1">
                 <a:solidFill>
                   <a:srgbClr val="553C9A"/>
                 </a:solidFill>
               </a:defRPr>
             </a:pPr>
             <a:r>
-              <a:t>• 「模式病」(Patternitis)：过度设计让简单功能淹没在抽象海洋中</a:t>
+              <a:t>• 追求代码纯洁性筑起高墙——开发者打造完美的水晶球，却忽视了现实世界的灵活性</a:t>
             </a:r>
           </a:p>
           <a:p>
@@ -3445,29 +3447,14 @@
               <a:spcAft>
                 <a:spcPts val="1400"/>
               </a:spcAft>
-              <a:defRPr sz="2100" b="1">
-                <a:solidFill>
-                  <a:srgbClr val="553C9A"/>
-                </a:solidFill>
-              </a:defRPr>
-            </a:pPr>
-            <a:r>
-              <a:t>• 追求代码「纯洁性」筑起高墙——开发者沉醉于打造完美的水晶球，却忽视了现实世界的灵活性</a:t>
-            </a:r>
-          </a:p>
-          <a:p>
-            <a:pPr>
-              <a:spcAft>
-                <a:spcPts val="1400"/>
-              </a:spcAft>
-              <a:defRPr sz="2100" b="0">
+              <a:defRPr sz="2000" b="0">
                 <a:solidFill>
                   <a:srgbClr val="1A1A2E"/>
                 </a:solidFill>
               </a:defRPr>
             </a:pPr>
             <a:r>
-              <a:t>• 经典模式诞生于「静态世界」：系统边界清晰、需求可预测、运行环境稳定</a:t>
+              <a:t>• GoF 模式没有做错任何事——它们只是诞生在了一个错误的时代背景下</a:t>
             </a:r>
           </a:p>
         </p:txBody>
@@ -3637,14 +3624,14 @@
               <a:spcAft>
                 <a:spcPts val="1400"/>
               </a:spcAft>
-              <a:defRPr sz="2100" b="0">
+              <a:defRPr sz="2000" b="0">
                 <a:solidFill>
                   <a:srgbClr val="1A1A2E"/>
                 </a:solidFill>
               </a:defRPr>
             </a:pPr>
             <a:r>
-              <a:t>• LLM 本质是无状态的「纯函数」：输入 Prompt → 输出 Token 流</a:t>
+              <a:t>• LLM 本质是无状态的纯函数：给它一个 Prompt，输出一串 Token，然后恢复空白状态</a:t>
             </a:r>
           </a:p>
           <a:p>
@@ -3652,14 +3639,14 @@
               <a:spcAft>
                 <a:spcPts val="1400"/>
               </a:spcAft>
-              <a:defRPr sz="2100" b="0">
+              <a:defRPr sz="2000" b="0">
                 <a:solidFill>
                   <a:srgbClr val="1A1A2E"/>
                 </a:solidFill>
               </a:defRPr>
             </a:pPr>
             <a:r>
-              <a:t>• FP 思想（引用透明 + 管道）与 Agent 数据处理管道完全吻合</a:t>
+              <a:t>• FP 的引用透明 + 管道思想与 Agent 数据处理管道完全吻合</a:t>
             </a:r>
           </a:p>
           <a:p>
@@ -3667,14 +3654,14 @@
               <a:spcAft>
                 <a:spcPts val="1400"/>
               </a:spcAft>
-              <a:defRPr sz="2100" b="1">
+              <a:defRPr sz="2000" b="1">
                 <a:solidFill>
                   <a:srgbClr val="553C9A"/>
                 </a:solidFill>
               </a:defRPr>
             </a:pPr>
             <a:r>
-              <a:t>• 背压机制（Backpressure）：多 Agent 协作中「搜索 Agent」不会压垮「写作 Agent」</a:t>
+              <a:t>• 背压机制（Backpressure）：多 Agent 协作中搜索 Agent 不会压垮写作 Agent</a:t>
             </a:r>
           </a:p>
           <a:p>
@@ -3682,29 +3669,14 @@
               <a:spcAft>
                 <a:spcPts val="1400"/>
               </a:spcAft>
-              <a:defRPr sz="2100" b="0">
+              <a:defRPr sz="2000" b="0">
                 <a:solidFill>
                   <a:srgbClr val="1A1A2E"/>
                 </a:solidFill>
               </a:defRPr>
             </a:pPr>
             <a:r>
-              <a:t>• Serverless：函数平时「沉睡」在云端，Agent 产生意图时通过 API 唤醒</a:t>
-            </a:r>
-          </a:p>
-          <a:p>
-            <a:pPr>
-              <a:spcAft>
-                <a:spcPts val="1400"/>
-              </a:spcAft>
-              <a:defRPr sz="2100" b="0">
-                <a:solidFill>
-                  <a:srgbClr val="1A1A2E"/>
-                </a:solidFill>
-              </a:defRPr>
-            </a:pPr>
-            <a:r>
-              <a:t>• "智能的本质，是对变化的响应。神经网络响应 Tensor 流，强化学习响应 Reward 流，LLM 响应 Token 流。"</a:t>
+              <a:t>• 智能的本质，是对变化的响应。神经网络响应 Tensor 流，强化学习响应 Reward 流，LLM 响应 Token 流。</a:t>
             </a:r>
           </a:p>
         </p:txBody>
@@ -3836,71 +3808,28 @@
           <a:lstStyle/>
           <a:p>
             <a:pPr>
-              <a:defRPr sz="3200" b="1">
+              <a:defRPr sz="2800" b="1">
                 <a:solidFill>
                   <a:srgbClr val="FFFFFF"/>
                 </a:solidFill>
               </a:defRPr>
             </a:pPr>
             <a:r>
-              <a:t>K8s 与 LLM Agent：同一个心智模型，不同的管理对象</a:t>
-            </a:r>
-          </a:p>
-        </p:txBody>
-      </p:sp>
-      <p:sp>
-        <p:nvSpPr>
-          <p:cNvPr id="5" name="Rectangle 4"/>
-          <p:cNvSpPr/>
-          <p:nvPr/>
-        </p:nvSpPr>
-        <p:spPr>
-          <a:xfrm>
-            <a:off x="457200" y="1280160"/>
-            <a:ext cx="2560320" cy="1234440"/>
-          </a:xfrm>
-          <a:prstGeom prst="rect">
-            <a:avLst/>
-          </a:prstGeom>
-          <a:solidFill>
-            <a:srgbClr val="1A1A2E"/>
-          </a:solidFill>
-          <a:ln>
-            <a:noFill/>
-          </a:ln>
-        </p:spPr>
-        <p:style>
-          <a:lnRef idx="1">
-            <a:schemeClr val="accent1"/>
-          </a:lnRef>
-          <a:fillRef idx="3">
-            <a:schemeClr val="accent1"/>
-          </a:fillRef>
-          <a:effectRef idx="2">
-            <a:schemeClr val="accent1"/>
-          </a:effectRef>
-          <a:fontRef idx="minor">
-            <a:schemeClr val="lt1"/>
-          </a:fontRef>
-        </p:style>
-        <p:txBody>
-          <a:bodyPr rtlCol="0" anchor="ctr"/>
-          <a:lstStyle/>
-          <a:p>
-            <a:pPr algn="ctr"/>
-          </a:p>
-        </p:txBody>
-      </p:sp>
-      <p:sp>
-        <p:nvSpPr>
-          <p:cNvPr id="6" name="TextBox 5"/>
+              <a:t>分布式技术演进与 Agent 的关系</a:t>
+            </a:r>
+          </a:p>
+        </p:txBody>
+      </p:sp>
+      <p:sp>
+        <p:nvSpPr>
+          <p:cNvPr id="5" name="TextBox 4"/>
           <p:cNvSpPr txBox="1"/>
           <p:nvPr/>
         </p:nvSpPr>
         <p:spPr>
           <a:xfrm>
-            <a:off x="548640" y="1371600"/>
-            <a:ext cx="2377440" cy="1097280"/>
+            <a:off x="457200" y="1645920"/>
+            <a:ext cx="11274552" cy="2286000"/>
           </a:xfrm>
           <a:prstGeom prst="rect">
             <a:avLst/>
@@ -3914,877 +3843,18 @@
           <a:lstStyle/>
           <a:p>
             <a:pPr algn="ctr">
-              <a:defRPr sz="1300" b="1">
-                <a:solidFill>
-                  <a:srgbClr val="E94560"/>
-                </a:solidFill>
-              </a:defRPr>
-            </a:pPr>
-          </a:p>
-        </p:txBody>
-      </p:sp>
-      <p:sp>
-        <p:nvSpPr>
-          <p:cNvPr id="7" name="Rectangle 6"/>
-          <p:cNvSpPr/>
-          <p:nvPr/>
-        </p:nvSpPr>
-        <p:spPr>
-          <a:xfrm>
-            <a:off x="3200400" y="1280160"/>
-            <a:ext cx="4389120" cy="1234440"/>
-          </a:xfrm>
-          <a:prstGeom prst="rect">
-            <a:avLst/>
-          </a:prstGeom>
-          <a:solidFill>
-            <a:srgbClr val="1A1A2E"/>
-          </a:solidFill>
-          <a:ln>
-            <a:noFill/>
-          </a:ln>
-        </p:spPr>
-        <p:style>
-          <a:lnRef idx="1">
-            <a:schemeClr val="accent1"/>
-          </a:lnRef>
-          <a:fillRef idx="3">
-            <a:schemeClr val="accent1"/>
-          </a:fillRef>
-          <a:effectRef idx="2">
-            <a:schemeClr val="accent1"/>
-          </a:effectRef>
-          <a:fontRef idx="minor">
-            <a:schemeClr val="lt1"/>
-          </a:fontRef>
-        </p:style>
-        <p:txBody>
-          <a:bodyPr rtlCol="0" anchor="ctr"/>
-          <a:lstStyle/>
-          <a:p>
-            <a:pPr algn="ctr"/>
-          </a:p>
-        </p:txBody>
-      </p:sp>
-      <p:sp>
-        <p:nvSpPr>
-          <p:cNvPr id="8" name="TextBox 7"/>
-          <p:cNvSpPr txBox="1"/>
-          <p:nvPr/>
-        </p:nvSpPr>
-        <p:spPr>
-          <a:xfrm>
-            <a:off x="3291840" y="1371600"/>
-            <a:ext cx="4206240" cy="1097280"/>
-          </a:xfrm>
-          <a:prstGeom prst="rect">
-            <a:avLst/>
-          </a:prstGeom>
-          <a:noFill/>
-        </p:spPr>
-        <p:txBody>
-          <a:bodyPr wrap="square">
-            <a:spAutoFit/>
-          </a:bodyPr>
-          <a:lstStyle/>
-          <a:p>
-            <a:pPr algn="ctr">
-              <a:defRPr sz="1300" b="1">
+              <a:defRPr sz="2200" i="0">
                 <a:solidFill>
                   <a:srgbClr val="553C9A"/>
                 </a:solidFill>
               </a:defRPr>
             </a:pPr>
             <a:r>
-              <a:t>Kubernetes</a:t>
-            </a:r>
-          </a:p>
-        </p:txBody>
-      </p:sp>
-      <p:sp>
-        <p:nvSpPr>
-          <p:cNvPr id="9" name="Rectangle 8"/>
-          <p:cNvSpPr/>
-          <p:nvPr/>
-        </p:nvSpPr>
-        <p:spPr>
-          <a:xfrm>
-            <a:off x="7772400" y="1280160"/>
-            <a:ext cx="4114800" cy="1234440"/>
-          </a:xfrm>
-          <a:prstGeom prst="rect">
-            <a:avLst/>
-          </a:prstGeom>
-          <a:solidFill>
-            <a:srgbClr val="1A1A2E"/>
-          </a:solidFill>
-          <a:ln>
-            <a:noFill/>
-          </a:ln>
-        </p:spPr>
-        <p:style>
-          <a:lnRef idx="1">
-            <a:schemeClr val="accent1"/>
-          </a:lnRef>
-          <a:fillRef idx="3">
-            <a:schemeClr val="accent1"/>
-          </a:fillRef>
-          <a:effectRef idx="2">
-            <a:schemeClr val="accent1"/>
-          </a:effectRef>
-          <a:fontRef idx="minor">
-            <a:schemeClr val="lt1"/>
-          </a:fontRef>
-        </p:style>
-        <p:txBody>
-          <a:bodyPr rtlCol="0" anchor="ctr"/>
-          <a:lstStyle/>
-          <a:p>
-            <a:pPr algn="ctr"/>
-          </a:p>
-        </p:txBody>
-      </p:sp>
-      <p:sp>
-        <p:nvSpPr>
-          <p:cNvPr id="10" name="TextBox 9"/>
-          <p:cNvSpPr txBox="1"/>
-          <p:nvPr/>
-        </p:nvSpPr>
-        <p:spPr>
-          <a:xfrm>
-            <a:off x="7863840" y="1371600"/>
-            <a:ext cx="3931920" cy="1097280"/>
-          </a:xfrm>
-          <a:prstGeom prst="rect">
-            <a:avLst/>
-          </a:prstGeom>
-          <a:noFill/>
-        </p:spPr>
-        <p:txBody>
-          <a:bodyPr wrap="square">
-            <a:spAutoFit/>
-          </a:bodyPr>
-          <a:lstStyle/>
-          <a:p>
-            <a:pPr algn="ctr">
-              <a:defRPr sz="1300" b="1">
-                <a:solidFill>
-                  <a:srgbClr val="553C9A"/>
-                </a:solidFill>
-              </a:defRPr>
-            </a:pPr>
-            <a:r>
-              <a:t>LLM Agent</a:t>
-            </a:r>
-          </a:p>
-        </p:txBody>
-      </p:sp>
-      <p:sp>
-        <p:nvSpPr>
-          <p:cNvPr id="11" name="Rectangle 10"/>
-          <p:cNvSpPr/>
-          <p:nvPr/>
-        </p:nvSpPr>
-        <p:spPr>
-          <a:xfrm>
-            <a:off x="457200" y="2606039"/>
-            <a:ext cx="2560320" cy="1234440"/>
-          </a:xfrm>
-          <a:prstGeom prst="rect">
-            <a:avLst/>
-          </a:prstGeom>
-          <a:solidFill>
-            <a:srgbClr val="1A1A2E"/>
-          </a:solidFill>
-          <a:ln>
-            <a:noFill/>
-          </a:ln>
-        </p:spPr>
-        <p:style>
-          <a:lnRef idx="1">
-            <a:schemeClr val="accent1"/>
-          </a:lnRef>
-          <a:fillRef idx="3">
-            <a:schemeClr val="accent1"/>
-          </a:fillRef>
-          <a:effectRef idx="2">
-            <a:schemeClr val="accent1"/>
-          </a:effectRef>
-          <a:fontRef idx="minor">
-            <a:schemeClr val="lt1"/>
-          </a:fontRef>
-        </p:style>
-        <p:txBody>
-          <a:bodyPr rtlCol="0" anchor="ctr"/>
-          <a:lstStyle/>
-          <a:p>
-            <a:pPr algn="ctr"/>
-          </a:p>
-        </p:txBody>
-      </p:sp>
-      <p:sp>
-        <p:nvSpPr>
-          <p:cNvPr id="12" name="TextBox 11"/>
-          <p:cNvSpPr txBox="1"/>
-          <p:nvPr/>
-        </p:nvSpPr>
-        <p:spPr>
-          <a:xfrm>
-            <a:off x="548640" y="2697479"/>
-            <a:ext cx="2377440" cy="1097280"/>
-          </a:xfrm>
-          <a:prstGeom prst="rect">
-            <a:avLst/>
-          </a:prstGeom>
-          <a:noFill/>
-        </p:spPr>
-        <p:txBody>
-          <a:bodyPr wrap="square">
-            <a:spAutoFit/>
-          </a:bodyPr>
-          <a:lstStyle/>
-          <a:p>
-            <a:pPr algn="ctr">
-              <a:defRPr sz="1300" b="1">
-                <a:solidFill>
-                  <a:srgbClr val="E94560"/>
-                </a:solidFill>
-              </a:defRPr>
-            </a:pPr>
-            <a:r>
-              <a:t>输入</a:t>
-            </a:r>
-          </a:p>
-        </p:txBody>
-      </p:sp>
-      <p:sp>
-        <p:nvSpPr>
-          <p:cNvPr id="13" name="Rectangle 12"/>
-          <p:cNvSpPr/>
-          <p:nvPr/>
-        </p:nvSpPr>
-        <p:spPr>
-          <a:xfrm>
-            <a:off x="3200400" y="2606039"/>
-            <a:ext cx="4389120" cy="1234440"/>
-          </a:xfrm>
-          <a:prstGeom prst="rect">
-            <a:avLst/>
-          </a:prstGeom>
-          <a:solidFill>
-            <a:srgbClr val="1A1A2E"/>
-          </a:solidFill>
-          <a:ln>
-            <a:noFill/>
-          </a:ln>
-        </p:spPr>
-        <p:style>
-          <a:lnRef idx="1">
-            <a:schemeClr val="accent1"/>
-          </a:lnRef>
-          <a:fillRef idx="3">
-            <a:schemeClr val="accent1"/>
-          </a:fillRef>
-          <a:effectRef idx="2">
-            <a:schemeClr val="accent1"/>
-          </a:effectRef>
-          <a:fontRef idx="minor">
-            <a:schemeClr val="lt1"/>
-          </a:fontRef>
-        </p:style>
-        <p:txBody>
-          <a:bodyPr rtlCol="0" anchor="ctr"/>
-          <a:lstStyle/>
-          <a:p>
-            <a:pPr algn="ctr"/>
-          </a:p>
-        </p:txBody>
-      </p:sp>
-      <p:sp>
-        <p:nvSpPr>
-          <p:cNvPr id="14" name="TextBox 13"/>
-          <p:cNvSpPr txBox="1"/>
-          <p:nvPr/>
-        </p:nvSpPr>
-        <p:spPr>
-          <a:xfrm>
-            <a:off x="3291840" y="2697479"/>
-            <a:ext cx="4206240" cy="1097280"/>
-          </a:xfrm>
-          <a:prstGeom prst="rect">
-            <a:avLst/>
-          </a:prstGeom>
-          <a:noFill/>
-        </p:spPr>
-        <p:txBody>
-          <a:bodyPr wrap="square">
-            <a:spAutoFit/>
-          </a:bodyPr>
-          <a:lstStyle/>
-          <a:p>
-            <a:pPr algn="ctr">
-              <a:defRPr sz="1300" b="0">
-                <a:solidFill>
-                  <a:srgbClr val="FFFFFF"/>
-                </a:solidFill>
-              </a:defRPr>
-            </a:pPr>
-            <a:r>
-              <a:t>语法严格的 YAML</a:t>
+              <a:t>正如 Linux 让互联网应用成为可能，</a:t>
             </a:r>
             <a:br/>
             <a:r>
-              <a:t>（静态资源需求）</a:t>
-            </a:r>
-          </a:p>
-        </p:txBody>
-      </p:sp>
-      <p:sp>
-        <p:nvSpPr>
-          <p:cNvPr id="15" name="Rectangle 14"/>
-          <p:cNvSpPr/>
-          <p:nvPr/>
-        </p:nvSpPr>
-        <p:spPr>
-          <a:xfrm>
-            <a:off x="7772400" y="2606039"/>
-            <a:ext cx="4114800" cy="1234440"/>
-          </a:xfrm>
-          <a:prstGeom prst="rect">
-            <a:avLst/>
-          </a:prstGeom>
-          <a:solidFill>
-            <a:srgbClr val="1A1A2E"/>
-          </a:solidFill>
-          <a:ln>
-            <a:noFill/>
-          </a:ln>
-        </p:spPr>
-        <p:style>
-          <a:lnRef idx="1">
-            <a:schemeClr val="accent1"/>
-          </a:lnRef>
-          <a:fillRef idx="3">
-            <a:schemeClr val="accent1"/>
-          </a:fillRef>
-          <a:effectRef idx="2">
-            <a:schemeClr val="accent1"/>
-          </a:effectRef>
-          <a:fontRef idx="minor">
-            <a:schemeClr val="lt1"/>
-          </a:fontRef>
-        </p:style>
-        <p:txBody>
-          <a:bodyPr rtlCol="0" anchor="ctr"/>
-          <a:lstStyle/>
-          <a:p>
-            <a:pPr algn="ctr"/>
-          </a:p>
-        </p:txBody>
-      </p:sp>
-      <p:sp>
-        <p:nvSpPr>
-          <p:cNvPr id="16" name="TextBox 15"/>
-          <p:cNvSpPr txBox="1"/>
-          <p:nvPr/>
-        </p:nvSpPr>
-        <p:spPr>
-          <a:xfrm>
-            <a:off x="7863840" y="2697479"/>
-            <a:ext cx="3931920" cy="1097280"/>
-          </a:xfrm>
-          <a:prstGeom prst="rect">
-            <a:avLst/>
-          </a:prstGeom>
-          <a:noFill/>
-        </p:spPr>
-        <p:txBody>
-          <a:bodyPr wrap="square">
-            <a:spAutoFit/>
-          </a:bodyPr>
-          <a:lstStyle/>
-          <a:p>
-            <a:pPr algn="ctr">
-              <a:defRPr sz="1300" b="0">
-                <a:solidFill>
-                  <a:srgbClr val="FFFFFF"/>
-                </a:solidFill>
-              </a:defRPr>
-            </a:pPr>
-            <a:r>
-              <a:t>模糊多变的自然语言 Prompt</a:t>
-            </a:r>
-            <a:br/>
-            <a:r>
-              <a:t>（动态人类意图）</a:t>
-            </a:r>
-          </a:p>
-        </p:txBody>
-      </p:sp>
-      <p:sp>
-        <p:nvSpPr>
-          <p:cNvPr id="17" name="Rectangle 16"/>
-          <p:cNvSpPr/>
-          <p:nvPr/>
-        </p:nvSpPr>
-        <p:spPr>
-          <a:xfrm>
-            <a:off x="457200" y="3931920"/>
-            <a:ext cx="2560320" cy="1234440"/>
-          </a:xfrm>
-          <a:prstGeom prst="rect">
-            <a:avLst/>
-          </a:prstGeom>
-          <a:solidFill>
-            <a:srgbClr val="2D3748"/>
-          </a:solidFill>
-          <a:ln>
-            <a:noFill/>
-          </a:ln>
-        </p:spPr>
-        <p:style>
-          <a:lnRef idx="1">
-            <a:schemeClr val="accent1"/>
-          </a:lnRef>
-          <a:fillRef idx="3">
-            <a:schemeClr val="accent1"/>
-          </a:fillRef>
-          <a:effectRef idx="2">
-            <a:schemeClr val="accent1"/>
-          </a:effectRef>
-          <a:fontRef idx="minor">
-            <a:schemeClr val="lt1"/>
-          </a:fontRef>
-        </p:style>
-        <p:txBody>
-          <a:bodyPr rtlCol="0" anchor="ctr"/>
-          <a:lstStyle/>
-          <a:p>
-            <a:pPr algn="ctr"/>
-          </a:p>
-        </p:txBody>
-      </p:sp>
-      <p:sp>
-        <p:nvSpPr>
-          <p:cNvPr id="18" name="TextBox 17"/>
-          <p:cNvSpPr txBox="1"/>
-          <p:nvPr/>
-        </p:nvSpPr>
-        <p:spPr>
-          <a:xfrm>
-            <a:off x="548640" y="4023360"/>
-            <a:ext cx="2377440" cy="1097280"/>
-          </a:xfrm>
-          <a:prstGeom prst="rect">
-            <a:avLst/>
-          </a:prstGeom>
-          <a:noFill/>
-        </p:spPr>
-        <p:txBody>
-          <a:bodyPr wrap="square">
-            <a:spAutoFit/>
-          </a:bodyPr>
-          <a:lstStyle/>
-          <a:p>
-            <a:pPr algn="ctr">
-              <a:defRPr sz="1300" b="1">
-                <a:solidFill>
-                  <a:srgbClr val="E94560"/>
-                </a:solidFill>
-              </a:defRPr>
-            </a:pPr>
-            <a:r>
-              <a:t>职责</a:t>
-            </a:r>
-          </a:p>
-        </p:txBody>
-      </p:sp>
-      <p:sp>
-        <p:nvSpPr>
-          <p:cNvPr id="19" name="Rectangle 18"/>
-          <p:cNvSpPr/>
-          <p:nvPr/>
-        </p:nvSpPr>
-        <p:spPr>
-          <a:xfrm>
-            <a:off x="3200400" y="3931920"/>
-            <a:ext cx="4389120" cy="1234440"/>
-          </a:xfrm>
-          <a:prstGeom prst="rect">
-            <a:avLst/>
-          </a:prstGeom>
-          <a:solidFill>
-            <a:srgbClr val="2D3748"/>
-          </a:solidFill>
-          <a:ln>
-            <a:noFill/>
-          </a:ln>
-        </p:spPr>
-        <p:style>
-          <a:lnRef idx="1">
-            <a:schemeClr val="accent1"/>
-          </a:lnRef>
-          <a:fillRef idx="3">
-            <a:schemeClr val="accent1"/>
-          </a:fillRef>
-          <a:effectRef idx="2">
-            <a:schemeClr val="accent1"/>
-          </a:effectRef>
-          <a:fontRef idx="minor">
-            <a:schemeClr val="lt1"/>
-          </a:fontRef>
-        </p:style>
-        <p:txBody>
-          <a:bodyPr rtlCol="0" anchor="ctr"/>
-          <a:lstStyle/>
-          <a:p>
-            <a:pPr algn="ctr"/>
-          </a:p>
-        </p:txBody>
-      </p:sp>
-      <p:sp>
-        <p:nvSpPr>
-          <p:cNvPr id="20" name="TextBox 19"/>
-          <p:cNvSpPr txBox="1"/>
-          <p:nvPr/>
-        </p:nvSpPr>
-        <p:spPr>
-          <a:xfrm>
-            <a:off x="3291840" y="4023360"/>
-            <a:ext cx="4206240" cy="1097280"/>
-          </a:xfrm>
-          <a:prstGeom prst="rect">
-            <a:avLst/>
-          </a:prstGeom>
-          <a:noFill/>
-        </p:spPr>
-        <p:txBody>
-          <a:bodyPr wrap="square">
-            <a:spAutoFit/>
-          </a:bodyPr>
-          <a:lstStyle/>
-          <a:p>
-            <a:pPr algn="ctr">
-              <a:defRPr sz="1300" b="0">
-                <a:solidFill>
-                  <a:srgbClr val="FFFFFF"/>
-                </a:solidFill>
-              </a:defRPr>
-            </a:pPr>
-            <a:r>
-              <a:t>设计精确预设的流程图</a:t>
-            </a:r>
-          </a:p>
-        </p:txBody>
-      </p:sp>
-      <p:sp>
-        <p:nvSpPr>
-          <p:cNvPr id="21" name="Rectangle 20"/>
-          <p:cNvSpPr/>
-          <p:nvPr/>
-        </p:nvSpPr>
-        <p:spPr>
-          <a:xfrm>
-            <a:off x="7772400" y="3931920"/>
-            <a:ext cx="4114800" cy="1234440"/>
-          </a:xfrm>
-          <a:prstGeom prst="rect">
-            <a:avLst/>
-          </a:prstGeom>
-          <a:solidFill>
-            <a:srgbClr val="2D3748"/>
-          </a:solidFill>
-          <a:ln>
-            <a:noFill/>
-          </a:ln>
-        </p:spPr>
-        <p:style>
-          <a:lnRef idx="1">
-            <a:schemeClr val="accent1"/>
-          </a:lnRef>
-          <a:fillRef idx="3">
-            <a:schemeClr val="accent1"/>
-          </a:fillRef>
-          <a:effectRef idx="2">
-            <a:schemeClr val="accent1"/>
-          </a:effectRef>
-          <a:fontRef idx="minor">
-            <a:schemeClr val="lt1"/>
-          </a:fontRef>
-        </p:style>
-        <p:txBody>
-          <a:bodyPr rtlCol="0" anchor="ctr"/>
-          <a:lstStyle/>
-          <a:p>
-            <a:pPr algn="ctr"/>
-          </a:p>
-        </p:txBody>
-      </p:sp>
-      <p:sp>
-        <p:nvSpPr>
-          <p:cNvPr id="22" name="TextBox 21"/>
-          <p:cNvSpPr txBox="1"/>
-          <p:nvPr/>
-        </p:nvSpPr>
-        <p:spPr>
-          <a:xfrm>
-            <a:off x="7863840" y="4023360"/>
-            <a:ext cx="3931920" cy="1097280"/>
-          </a:xfrm>
-          <a:prstGeom prst="rect">
-            <a:avLst/>
-          </a:prstGeom>
-          <a:noFill/>
-        </p:spPr>
-        <p:txBody>
-          <a:bodyPr wrap="square">
-            <a:spAutoFit/>
-          </a:bodyPr>
-          <a:lstStyle/>
-          <a:p>
-            <a:pPr algn="ctr">
-              <a:defRPr sz="1300" b="0">
-                <a:solidFill>
-                  <a:srgbClr val="FFFFFF"/>
-                </a:solidFill>
-              </a:defRPr>
-            </a:pPr>
-            <a:r>
-              <a:t>设计目标函数 + 边界护栏</a:t>
-            </a:r>
-          </a:p>
-        </p:txBody>
-      </p:sp>
-      <p:sp>
-        <p:nvSpPr>
-          <p:cNvPr id="23" name="Rectangle 22"/>
-          <p:cNvSpPr/>
-          <p:nvPr/>
-        </p:nvSpPr>
-        <p:spPr>
-          <a:xfrm>
-            <a:off x="457200" y="5257800"/>
-            <a:ext cx="2560320" cy="1234440"/>
-          </a:xfrm>
-          <a:prstGeom prst="rect">
-            <a:avLst/>
-          </a:prstGeom>
-          <a:solidFill>
-            <a:srgbClr val="1A1A2E"/>
-          </a:solidFill>
-          <a:ln>
-            <a:noFill/>
-          </a:ln>
-        </p:spPr>
-        <p:style>
-          <a:lnRef idx="1">
-            <a:schemeClr val="accent1"/>
-          </a:lnRef>
-          <a:fillRef idx="3">
-            <a:schemeClr val="accent1"/>
-          </a:fillRef>
-          <a:effectRef idx="2">
-            <a:schemeClr val="accent1"/>
-          </a:effectRef>
-          <a:fontRef idx="minor">
-            <a:schemeClr val="lt1"/>
-          </a:fontRef>
-        </p:style>
-        <p:txBody>
-          <a:bodyPr rtlCol="0" anchor="ctr"/>
-          <a:lstStyle/>
-          <a:p>
-            <a:pPr algn="ctr"/>
-          </a:p>
-        </p:txBody>
-      </p:sp>
-      <p:sp>
-        <p:nvSpPr>
-          <p:cNvPr id="24" name="TextBox 23"/>
-          <p:cNvSpPr txBox="1"/>
-          <p:nvPr/>
-        </p:nvSpPr>
-        <p:spPr>
-          <a:xfrm>
-            <a:off x="548640" y="5349240"/>
-            <a:ext cx="2377440" cy="1097280"/>
-          </a:xfrm>
-          <a:prstGeom prst="rect">
-            <a:avLst/>
-          </a:prstGeom>
-          <a:noFill/>
-        </p:spPr>
-        <p:txBody>
-          <a:bodyPr wrap="square">
-            <a:spAutoFit/>
-          </a:bodyPr>
-          <a:lstStyle/>
-          <a:p>
-            <a:pPr algn="ctr">
-              <a:defRPr sz="1300" b="1">
-                <a:solidFill>
-                  <a:srgbClr val="E94560"/>
-                </a:solidFill>
-              </a:defRPr>
-            </a:pPr>
-            <a:r>
-              <a:t>本质</a:t>
-            </a:r>
-          </a:p>
-        </p:txBody>
-      </p:sp>
-      <p:sp>
-        <p:nvSpPr>
-          <p:cNvPr id="25" name="Rectangle 24"/>
-          <p:cNvSpPr/>
-          <p:nvPr/>
-        </p:nvSpPr>
-        <p:spPr>
-          <a:xfrm>
-            <a:off x="3200400" y="5257800"/>
-            <a:ext cx="4389120" cy="1234440"/>
-          </a:xfrm>
-          <a:prstGeom prst="rect">
-            <a:avLst/>
-          </a:prstGeom>
-          <a:solidFill>
-            <a:srgbClr val="1A1A2E"/>
-          </a:solidFill>
-          <a:ln>
-            <a:noFill/>
-          </a:ln>
-        </p:spPr>
-        <p:style>
-          <a:lnRef idx="1">
-            <a:schemeClr val="accent1"/>
-          </a:lnRef>
-          <a:fillRef idx="3">
-            <a:schemeClr val="accent1"/>
-          </a:fillRef>
-          <a:effectRef idx="2">
-            <a:schemeClr val="accent1"/>
-          </a:effectRef>
-          <a:fontRef idx="minor">
-            <a:schemeClr val="lt1"/>
-          </a:fontRef>
-        </p:style>
-        <p:txBody>
-          <a:bodyPr rtlCol="0" anchor="ctr"/>
-          <a:lstStyle/>
-          <a:p>
-            <a:pPr algn="ctr"/>
-          </a:p>
-        </p:txBody>
-      </p:sp>
-      <p:sp>
-        <p:nvSpPr>
-          <p:cNvPr id="26" name="TextBox 25"/>
-          <p:cNvSpPr txBox="1"/>
-          <p:nvPr/>
-        </p:nvSpPr>
-        <p:spPr>
-          <a:xfrm>
-            <a:off x="3291840" y="5349240"/>
-            <a:ext cx="4206240" cy="1097280"/>
-          </a:xfrm>
-          <a:prstGeom prst="rect">
-            <a:avLst/>
-          </a:prstGeom>
-          <a:noFill/>
-        </p:spPr>
-        <p:txBody>
-          <a:bodyPr wrap="square">
-            <a:spAutoFit/>
-          </a:bodyPr>
-          <a:lstStyle/>
-          <a:p>
-            <a:pPr algn="ctr">
-              <a:defRPr sz="1300" b="0">
-                <a:solidFill>
-                  <a:srgbClr val="FFFFFF"/>
-                </a:solidFill>
-              </a:defRPr>
-            </a:pPr>
-            <a:r>
-              <a:t>管理基础设施的 Agent</a:t>
-            </a:r>
-          </a:p>
-        </p:txBody>
-      </p:sp>
-      <p:sp>
-        <p:nvSpPr>
-          <p:cNvPr id="27" name="Rectangle 26"/>
-          <p:cNvSpPr/>
-          <p:nvPr/>
-        </p:nvSpPr>
-        <p:spPr>
-          <a:xfrm>
-            <a:off x="7772400" y="5257800"/>
-            <a:ext cx="4114800" cy="1234440"/>
-          </a:xfrm>
-          <a:prstGeom prst="rect">
-            <a:avLst/>
-          </a:prstGeom>
-          <a:solidFill>
-            <a:srgbClr val="1A1A2E"/>
-          </a:solidFill>
-          <a:ln>
-            <a:noFill/>
-          </a:ln>
-        </p:spPr>
-        <p:style>
-          <a:lnRef idx="1">
-            <a:schemeClr val="accent1"/>
-          </a:lnRef>
-          <a:fillRef idx="3">
-            <a:schemeClr val="accent1"/>
-          </a:fillRef>
-          <a:effectRef idx="2">
-            <a:schemeClr val="accent1"/>
-          </a:effectRef>
-          <a:fontRef idx="minor">
-            <a:schemeClr val="lt1"/>
-          </a:fontRef>
-        </p:style>
-        <p:txBody>
-          <a:bodyPr rtlCol="0" anchor="ctr"/>
-          <a:lstStyle/>
-          <a:p>
-            <a:pPr algn="ctr"/>
-          </a:p>
-        </p:txBody>
-      </p:sp>
-      <p:sp>
-        <p:nvSpPr>
-          <p:cNvPr id="28" name="TextBox 27"/>
-          <p:cNvSpPr txBox="1"/>
-          <p:nvPr/>
-        </p:nvSpPr>
-        <p:spPr>
-          <a:xfrm>
-            <a:off x="7863840" y="5349240"/>
-            <a:ext cx="3931920" cy="1097280"/>
-          </a:xfrm>
-          <a:prstGeom prst="rect">
-            <a:avLst/>
-          </a:prstGeom>
-          <a:noFill/>
-        </p:spPr>
-        <p:txBody>
-          <a:bodyPr wrap="square">
-            <a:spAutoFit/>
-          </a:bodyPr>
-          <a:lstStyle/>
-          <a:p>
-            <a:pPr algn="ctr">
-              <a:defRPr sz="1300" b="0">
-                <a:solidFill>
-                  <a:srgbClr val="FFFFFF"/>
-                </a:solidFill>
-              </a:defRPr>
-            </a:pPr>
-            <a:r>
-              <a:t>管理业务逻辑的 Agent</a:t>
+              <a:t>微服务、容器化和 Serverless 让 Agent 得以长出手脚，在真实世界中行动。</a:t>
             </a:r>
           </a:p>
         </p:txBody>
@@ -4865,7 +3935,7 @@
             <a:avLst/>
           </a:prstGeom>
           <a:solidFill>
-            <a:srgbClr val="1A1A2E"/>
+            <a:srgbClr val="4299E1"/>
           </a:solidFill>
           <a:ln>
             <a:noFill/>
@@ -4916,14 +3986,14 @@
           <a:lstStyle/>
           <a:p>
             <a:pPr>
-              <a:defRPr sz="3200" b="1">
+              <a:defRPr sz="3000" b="1">
                 <a:solidFill>
                   <a:srgbClr val="FFFFFF"/>
                 </a:solidFill>
               </a:defRPr>
             </a:pPr>
             <a:r>
-              <a:t>Software 2.0：2017年 Karpathy 的预言</a:t>
+              <a:t>微服务 API = Agent 的工具箱</a:t>
             </a:r>
           </a:p>
         </p:txBody>
@@ -4954,14 +4024,14 @@
               <a:spcAft>
                 <a:spcPts val="1400"/>
               </a:spcAft>
-              <a:defRPr sz="2100" b="0">
+              <a:defRPr sz="2000" b="0">
                 <a:solidFill>
                   <a:srgbClr val="1A1A2E"/>
                 </a:solidFill>
               </a:defRPr>
             </a:pPr>
             <a:r>
-              <a:t>• 2017年 Andrej Karpathy 提出：此前软件工程致力于消除不确定性；此后，软件工程开始学会利用不确定性</a:t>
+              <a:t>• 微服务将大型应用拆散为独立可部署的服务单元，通过 HTTP/gRPC API 互联</a:t>
             </a:r>
           </a:p>
           <a:p>
@@ -4969,14 +4039,14 @@
               <a:spcAft>
                 <a:spcPts val="1400"/>
               </a:spcAft>
-              <a:defRPr sz="2100" b="1">
-                <a:solidFill>
-                  <a:srgbClr val="553C9A"/>
-                </a:solidFill>
-              </a:defRPr>
-            </a:pPr>
-            <a:r>
-              <a:t>• 开发者角色转变：「建筑师」（精确控制每行逻辑）→「园丁」（提供土壤和栅栏）</a:t>
+              <a:defRPr sz="2000" b="0">
+                <a:solidFill>
+                  <a:srgbClr val="1A1A2E"/>
+                </a:solidFill>
+              </a:defRPr>
+            </a:pPr>
+            <a:r>
+              <a:t>• Agent 需要执行操作时，不需要调用静态函数，而是访问一个网络可达的服务端点</a:t>
             </a:r>
           </a:p>
           <a:p>
@@ -4984,29 +4054,14 @@
               <a:spcAft>
                 <a:spcPts val="1400"/>
               </a:spcAft>
-              <a:defRPr sz="2100" b="0">
-                <a:solidFill>
-                  <a:srgbClr val="1A1A2E"/>
-                </a:solidFill>
-              </a:defRPr>
-            </a:pPr>
-            <a:r>
-              <a:t>• 逻辑来源：人类写 if-else → 模型从海量数据中自行「涌现」</a:t>
-            </a:r>
-          </a:p>
-          <a:p>
-            <a:pPr>
-              <a:spcAft>
-                <a:spcPts val="1400"/>
-              </a:spcAft>
-              <a:defRPr sz="2100" b="0">
-                <a:solidFill>
-                  <a:srgbClr val="1A1A2E"/>
-                </a:solidFill>
-              </a:defRPr>
-            </a:pPr>
-            <a:r>
-              <a:t>• MLOps：为 AgentOps 铺路——当代码演变为数据（模型权重），DevOps 工具链力不从心</a:t>
+              <a:defRPr sz="2000" b="1">
+                <a:solidFill>
+                  <a:srgbClr val="553C9A"/>
+                </a:solidFill>
+              </a:defRPr>
+            </a:pPr>
+            <a:r>
+              <a:t>• 每个外部工具对 Agent 而言就是一个可寻址的 API — Agent 的手延伸到了整个互联网</a:t>
             </a:r>
           </a:p>
         </p:txBody>
@@ -5087,7 +4142,7 @@
             <a:avLst/>
           </a:prstGeom>
           <a:solidFill>
-            <a:srgbClr val="553C9A"/>
+            <a:srgbClr val="1A1A2E"/>
           </a:solidFill>
           <a:ln>
             <a:noFill/>
@@ -5138,30 +4193,30 @@
           <a:lstStyle/>
           <a:p>
             <a:pPr>
-              <a:defRPr sz="3200" b="1">
+              <a:defRPr sz="2400" b="1">
                 <a:solidFill>
                   <a:srgbClr val="FFFFFF"/>
                 </a:solidFill>
               </a:defRPr>
             </a:pPr>
             <a:r>
-              <a:t>范式迁移总览：三大技术演进为 Agent 奠定基石</a:t>
-            </a:r>
-          </a:p>
-        </p:txBody>
-      </p:sp>
-      <p:sp>
-        <p:nvSpPr>
-          <p:cNvPr id="5" name="Rounded Rectangle 4"/>
+              <a:t>Kubernetes vs LLM Agent：同一个心智模型，不同的管理对象</a:t>
+            </a:r>
+          </a:p>
+        </p:txBody>
+      </p:sp>
+      <p:sp>
+        <p:nvSpPr>
+          <p:cNvPr id="5" name="Rectangle 4"/>
           <p:cNvSpPr/>
           <p:nvPr/>
         </p:nvSpPr>
         <p:spPr>
           <a:xfrm>
-            <a:off x="640080" y="1463040"/>
-            <a:ext cx="3453383" cy="1417320"/>
-          </a:xfrm>
-          <a:prstGeom prst="roundRect">
+            <a:off x="457200" y="1280160"/>
+            <a:ext cx="2286000" cy="457200"/>
+          </a:xfrm>
+          <a:prstGeom prst="rect">
             <a:avLst/>
           </a:prstGeom>
           <a:solidFill>
@@ -5201,8 +4256,8 @@
         </p:nvSpPr>
         <p:spPr>
           <a:xfrm>
-            <a:off x="640080" y="1536192"/>
-            <a:ext cx="3361944" cy="365760"/>
+            <a:off x="457200" y="1325880"/>
+            <a:ext cx="2286000" cy="365760"/>
           </a:xfrm>
           <a:prstGeom prst="rect">
             <a:avLst/>
@@ -5215,74 +4270,28 @@
           </a:bodyPr>
           <a:lstStyle/>
           <a:p>
-            <a:pPr>
-              <a:defRPr sz="1400" b="1">
-                <a:solidFill>
-                  <a:srgbClr val="553C9A"/>
-                </a:solidFill>
-              </a:defRPr>
-            </a:pPr>
-            <a:r>
-              <a:t>⚡ 函数与流</a:t>
-            </a:r>
-          </a:p>
-        </p:txBody>
-      </p:sp>
-      <p:sp>
-        <p:nvSpPr>
-          <p:cNvPr id="7" name="TextBox 6"/>
-          <p:cNvSpPr txBox="1"/>
-          <p:nvPr/>
-        </p:nvSpPr>
-        <p:spPr>
-          <a:xfrm>
-            <a:off x="640080" y="1920240"/>
-            <a:ext cx="3361944" cy="1005840"/>
-          </a:xfrm>
-          <a:prstGeom prst="rect">
-            <a:avLst/>
-          </a:prstGeom>
-          <a:noFill/>
-        </p:spPr>
-        <p:txBody>
-          <a:bodyPr wrap="square">
-            <a:spAutoFit/>
-          </a:bodyPr>
-          <a:lstStyle/>
-          <a:p>
-            <a:pPr>
-              <a:defRPr sz="1100">
+            <a:pPr algn="ctr">
+              <a:defRPr sz="1300" b="1">
                 <a:solidFill>
                   <a:srgbClr val="A0AEC0"/>
                 </a:solidFill>
               </a:defRPr>
             </a:pPr>
-            <a:r>
-              <a:t>使软件契合 AI 的思考节奏</a:t>
-            </a:r>
-            <a:br/>
-            <a:r>
-              <a:t>LLM = 无状态纯函数</a:t>
-            </a:r>
-            <a:br/>
-            <a:r>
-              <a:t>背压机制保护协作</a:t>
-            </a:r>
-          </a:p>
-        </p:txBody>
-      </p:sp>
-      <p:sp>
-        <p:nvSpPr>
-          <p:cNvPr id="8" name="Rounded Rectangle 7"/>
+          </a:p>
+        </p:txBody>
+      </p:sp>
+      <p:sp>
+        <p:nvSpPr>
+          <p:cNvPr id="7" name="Rectangle 6"/>
           <p:cNvSpPr/>
           <p:nvPr/>
         </p:nvSpPr>
         <p:spPr>
           <a:xfrm>
-            <a:off x="4276344" y="1463040"/>
-            <a:ext cx="3453383" cy="1417320"/>
-          </a:xfrm>
-          <a:prstGeom prst="roundRect">
+            <a:off x="2926080" y="1280160"/>
+            <a:ext cx="4572000" cy="457200"/>
+          </a:xfrm>
+          <a:prstGeom prst="rect">
             <a:avLst/>
           </a:prstGeom>
           <a:solidFill>
@@ -5316,14 +4325,14 @@
       </p:sp>
       <p:sp>
         <p:nvSpPr>
-          <p:cNvPr id="9" name="TextBox 8"/>
+          <p:cNvPr id="8" name="TextBox 7"/>
           <p:cNvSpPr txBox="1"/>
           <p:nvPr/>
         </p:nvSpPr>
         <p:spPr>
           <a:xfrm>
-            <a:off x="4276344" y="1536192"/>
-            <a:ext cx="3361944" cy="365760"/>
+            <a:off x="2926080" y="1325880"/>
+            <a:ext cx="4572000" cy="365760"/>
           </a:xfrm>
           <a:prstGeom prst="rect">
             <a:avLst/>
@@ -5336,74 +4345,31 @@
           </a:bodyPr>
           <a:lstStyle/>
           <a:p>
-            <a:pPr>
-              <a:defRPr sz="1400" b="1">
+            <a:pPr algn="ctr">
+              <a:defRPr sz="1300" b="1">
                 <a:solidFill>
                   <a:srgbClr val="553C9A"/>
                 </a:solidFill>
               </a:defRPr>
             </a:pPr>
             <a:r>
-              <a:t>🔌 分布式 + Serverless</a:t>
-            </a:r>
-          </a:p>
-        </p:txBody>
-      </p:sp>
-      <p:sp>
-        <p:nvSpPr>
-          <p:cNvPr id="10" name="TextBox 9"/>
-          <p:cNvSpPr txBox="1"/>
-          <p:nvPr/>
-        </p:nvSpPr>
-        <p:spPr>
-          <a:xfrm>
-            <a:off x="4276344" y="1920240"/>
-            <a:ext cx="3361944" cy="1005840"/>
-          </a:xfrm>
-          <a:prstGeom prst="rect">
-            <a:avLst/>
-          </a:prstGeom>
-          <a:noFill/>
-        </p:spPr>
-        <p:txBody>
-          <a:bodyPr wrap="square">
-            <a:spAutoFit/>
-          </a:bodyPr>
-          <a:lstStyle/>
-          <a:p>
-            <a:pPr>
-              <a:defRPr sz="1100">
-                <a:solidFill>
-                  <a:srgbClr val="A0AEC0"/>
-                </a:solidFill>
-              </a:defRPr>
-            </a:pPr>
-            <a:r>
-              <a:t>为 Agent 提供无限延展的「手脚」</a:t>
-            </a:r>
-            <a:br/>
-            <a:r>
-              <a:t>微服务 API 铺平工具调用网络</a:t>
-            </a:r>
-            <a:br/>
-            <a:r>
-              <a:t>Serverless = 沉睡的技能</a:t>
-            </a:r>
-          </a:p>
-        </p:txBody>
-      </p:sp>
-      <p:sp>
-        <p:nvSpPr>
-          <p:cNvPr id="11" name="Rounded Rectangle 10"/>
+              <a:t>Kubernetes Controller</a:t>
+            </a:r>
+          </a:p>
+        </p:txBody>
+      </p:sp>
+      <p:sp>
+        <p:nvSpPr>
+          <p:cNvPr id="9" name="Rectangle 8"/>
           <p:cNvSpPr/>
           <p:nvPr/>
         </p:nvSpPr>
         <p:spPr>
           <a:xfrm>
-            <a:off x="7912607" y="1463040"/>
-            <a:ext cx="3453383" cy="1417320"/>
-          </a:xfrm>
-          <a:prstGeom prst="roundRect">
+            <a:off x="7772400" y="1280160"/>
+            <a:ext cx="4389120" cy="457200"/>
+          </a:xfrm>
+          <a:prstGeom prst="rect">
             <a:avLst/>
           </a:prstGeom>
           <a:solidFill>
@@ -5437,14 +4403,14 @@
       </p:sp>
       <p:sp>
         <p:nvSpPr>
-          <p:cNvPr id="12" name="TextBox 11"/>
+          <p:cNvPr id="10" name="TextBox 9"/>
           <p:cNvSpPr txBox="1"/>
           <p:nvPr/>
         </p:nvSpPr>
         <p:spPr>
           <a:xfrm>
-            <a:off x="7912607" y="1536192"/>
-            <a:ext cx="3361944" cy="365760"/>
+            <a:off x="7772400" y="1325880"/>
+            <a:ext cx="4389120" cy="365760"/>
           </a:xfrm>
           <a:prstGeom prst="rect">
             <a:avLst/>
@@ -5457,29 +4423,72 @@
           </a:bodyPr>
           <a:lstStyle/>
           <a:p>
-            <a:pPr>
-              <a:defRPr sz="1400" b="1">
+            <a:pPr algn="ctr">
+              <a:defRPr sz="1300" b="1">
                 <a:solidFill>
                   <a:srgbClr val="553C9A"/>
                 </a:solidFill>
               </a:defRPr>
             </a:pPr>
             <a:r>
-              <a:t>🧠 软件 2.0</a:t>
-            </a:r>
-          </a:p>
-        </p:txBody>
-      </p:sp>
-      <p:sp>
-        <p:nvSpPr>
-          <p:cNvPr id="13" name="TextBox 12"/>
+              <a:t>LLM Agent</a:t>
+            </a:r>
+          </a:p>
+        </p:txBody>
+      </p:sp>
+      <p:sp>
+        <p:nvSpPr>
+          <p:cNvPr id="11" name="Rectangle 10"/>
+          <p:cNvSpPr/>
+          <p:nvPr/>
+        </p:nvSpPr>
+        <p:spPr>
+          <a:xfrm>
+            <a:off x="457200" y="1828800"/>
+            <a:ext cx="2286000" cy="1143000"/>
+          </a:xfrm>
+          <a:prstGeom prst="rect">
+            <a:avLst/>
+          </a:prstGeom>
+          <a:solidFill>
+            <a:srgbClr val="1A1A2E"/>
+          </a:solidFill>
+          <a:ln>
+            <a:noFill/>
+          </a:ln>
+        </p:spPr>
+        <p:style>
+          <a:lnRef idx="1">
+            <a:schemeClr val="accent1"/>
+          </a:lnRef>
+          <a:fillRef idx="3">
+            <a:schemeClr val="accent1"/>
+          </a:fillRef>
+          <a:effectRef idx="2">
+            <a:schemeClr val="accent1"/>
+          </a:effectRef>
+          <a:fontRef idx="minor">
+            <a:schemeClr val="lt1"/>
+          </a:fontRef>
+        </p:style>
+        <p:txBody>
+          <a:bodyPr rtlCol="0" anchor="ctr"/>
+          <a:lstStyle/>
+          <a:p>
+            <a:pPr algn="ctr"/>
+          </a:p>
+        </p:txBody>
+      </p:sp>
+      <p:sp>
+        <p:nvSpPr>
+          <p:cNvPr id="12" name="TextBox 11"/>
           <p:cNvSpPr txBox="1"/>
           <p:nvPr/>
         </p:nvSpPr>
         <p:spPr>
           <a:xfrm>
-            <a:off x="7912607" y="1920240"/>
-            <a:ext cx="3361944" cy="1005840"/>
+            <a:off x="548640" y="1901952"/>
+            <a:ext cx="2103120" cy="1005840"/>
           </a:xfrm>
           <a:prstGeom prst="rect">
             <a:avLst/>
@@ -5492,23 +4501,889 @@
           </a:bodyPr>
           <a:lstStyle/>
           <a:p>
-            <a:pPr>
-              <a:defRPr sz="1100">
-                <a:solidFill>
-                  <a:srgbClr val="A0AEC0"/>
-                </a:solidFill>
-              </a:defRPr>
-            </a:pPr>
-            <a:r>
-              <a:t>在不确定性中建立对确定性的信心</a:t>
+            <a:pPr algn="ctr">
+              <a:defRPr sz="1200" b="1">
+                <a:solidFill>
+                  <a:srgbClr val="E94560"/>
+                </a:solidFill>
+              </a:defRPr>
+            </a:pPr>
+            <a:r>
+              <a:t>输入</a:t>
+            </a:r>
+          </a:p>
+        </p:txBody>
+      </p:sp>
+      <p:sp>
+        <p:nvSpPr>
+          <p:cNvPr id="13" name="Rectangle 12"/>
+          <p:cNvSpPr/>
+          <p:nvPr/>
+        </p:nvSpPr>
+        <p:spPr>
+          <a:xfrm>
+            <a:off x="2926080" y="1828800"/>
+            <a:ext cx="4572000" cy="1143000"/>
+          </a:xfrm>
+          <a:prstGeom prst="rect">
+            <a:avLst/>
+          </a:prstGeom>
+          <a:solidFill>
+            <a:srgbClr val="1A1A2E"/>
+          </a:solidFill>
+          <a:ln>
+            <a:noFill/>
+          </a:ln>
+        </p:spPr>
+        <p:style>
+          <a:lnRef idx="1">
+            <a:schemeClr val="accent1"/>
+          </a:lnRef>
+          <a:fillRef idx="3">
+            <a:schemeClr val="accent1"/>
+          </a:fillRef>
+          <a:effectRef idx="2">
+            <a:schemeClr val="accent1"/>
+          </a:effectRef>
+          <a:fontRef idx="minor">
+            <a:schemeClr val="lt1"/>
+          </a:fontRef>
+        </p:style>
+        <p:txBody>
+          <a:bodyPr rtlCol="0" anchor="ctr"/>
+          <a:lstStyle/>
+          <a:p>
+            <a:pPr algn="ctr"/>
+          </a:p>
+        </p:txBody>
+      </p:sp>
+      <p:sp>
+        <p:nvSpPr>
+          <p:cNvPr id="14" name="TextBox 13"/>
+          <p:cNvSpPr txBox="1"/>
+          <p:nvPr/>
+        </p:nvSpPr>
+        <p:spPr>
+          <a:xfrm>
+            <a:off x="3017520" y="1901952"/>
+            <a:ext cx="4389120" cy="1005840"/>
+          </a:xfrm>
+          <a:prstGeom prst="rect">
+            <a:avLst/>
+          </a:prstGeom>
+          <a:noFill/>
+        </p:spPr>
+        <p:txBody>
+          <a:bodyPr wrap="square">
+            <a:spAutoFit/>
+          </a:bodyPr>
+          <a:lstStyle/>
+          <a:p>
+            <a:pPr algn="ctr">
+              <a:defRPr sz="1200" b="0">
+                <a:solidFill>
+                  <a:srgbClr val="FFFFFF"/>
+                </a:solidFill>
+              </a:defRPr>
+            </a:pPr>
+            <a:r>
+              <a:t>声明式 YAML</a:t>
             </a:r>
             <a:br/>
             <a:r>
-              <a:t>从消除不确定到利用不确定</a:t>
+              <a:t>（静态资源需求）</a:t>
+            </a:r>
+          </a:p>
+        </p:txBody>
+      </p:sp>
+      <p:sp>
+        <p:nvSpPr>
+          <p:cNvPr id="15" name="Rectangle 14"/>
+          <p:cNvSpPr/>
+          <p:nvPr/>
+        </p:nvSpPr>
+        <p:spPr>
+          <a:xfrm>
+            <a:off x="7772400" y="1828800"/>
+            <a:ext cx="4389120" cy="1143000"/>
+          </a:xfrm>
+          <a:prstGeom prst="rect">
+            <a:avLst/>
+          </a:prstGeom>
+          <a:solidFill>
+            <a:srgbClr val="1A1A2E"/>
+          </a:solidFill>
+          <a:ln>
+            <a:noFill/>
+          </a:ln>
+        </p:spPr>
+        <p:style>
+          <a:lnRef idx="1">
+            <a:schemeClr val="accent1"/>
+          </a:lnRef>
+          <a:fillRef idx="3">
+            <a:schemeClr val="accent1"/>
+          </a:fillRef>
+          <a:effectRef idx="2">
+            <a:schemeClr val="accent1"/>
+          </a:effectRef>
+          <a:fontRef idx="minor">
+            <a:schemeClr val="lt1"/>
+          </a:fontRef>
+        </p:style>
+        <p:txBody>
+          <a:bodyPr rtlCol="0" anchor="ctr"/>
+          <a:lstStyle/>
+          <a:p>
+            <a:pPr algn="ctr"/>
+          </a:p>
+        </p:txBody>
+      </p:sp>
+      <p:sp>
+        <p:nvSpPr>
+          <p:cNvPr id="16" name="TextBox 15"/>
+          <p:cNvSpPr txBox="1"/>
+          <p:nvPr/>
+        </p:nvSpPr>
+        <p:spPr>
+          <a:xfrm>
+            <a:off x="7863840" y="1901952"/>
+            <a:ext cx="4206240" cy="1005840"/>
+          </a:xfrm>
+          <a:prstGeom prst="rect">
+            <a:avLst/>
+          </a:prstGeom>
+          <a:noFill/>
+        </p:spPr>
+        <p:txBody>
+          <a:bodyPr wrap="square">
+            <a:spAutoFit/>
+          </a:bodyPr>
+          <a:lstStyle/>
+          <a:p>
+            <a:pPr algn="ctr">
+              <a:defRPr sz="1200" b="0">
+                <a:solidFill>
+                  <a:srgbClr val="FFFFFF"/>
+                </a:solidFill>
+              </a:defRPr>
+            </a:pPr>
+            <a:r>
+              <a:t>自然语言 Prompt</a:t>
             </a:r>
             <a:br/>
             <a:r>
-              <a:t>园丁 vs 建筑师</a:t>
+              <a:t>（动态人类意图）</a:t>
+            </a:r>
+          </a:p>
+        </p:txBody>
+      </p:sp>
+      <p:sp>
+        <p:nvSpPr>
+          <p:cNvPr id="17" name="Rectangle 16"/>
+          <p:cNvSpPr/>
+          <p:nvPr/>
+        </p:nvSpPr>
+        <p:spPr>
+          <a:xfrm>
+            <a:off x="457200" y="3063240"/>
+            <a:ext cx="2286000" cy="1143000"/>
+          </a:xfrm>
+          <a:prstGeom prst="rect">
+            <a:avLst/>
+          </a:prstGeom>
+          <a:solidFill>
+            <a:srgbClr val="2D3748"/>
+          </a:solidFill>
+          <a:ln>
+            <a:noFill/>
+          </a:ln>
+        </p:spPr>
+        <p:style>
+          <a:lnRef idx="1">
+            <a:schemeClr val="accent1"/>
+          </a:lnRef>
+          <a:fillRef idx="3">
+            <a:schemeClr val="accent1"/>
+          </a:fillRef>
+          <a:effectRef idx="2">
+            <a:schemeClr val="accent1"/>
+          </a:effectRef>
+          <a:fontRef idx="minor">
+            <a:schemeClr val="lt1"/>
+          </a:fontRef>
+        </p:style>
+        <p:txBody>
+          <a:bodyPr rtlCol="0" anchor="ctr"/>
+          <a:lstStyle/>
+          <a:p>
+            <a:pPr algn="ctr"/>
+          </a:p>
+        </p:txBody>
+      </p:sp>
+      <p:sp>
+        <p:nvSpPr>
+          <p:cNvPr id="18" name="TextBox 17"/>
+          <p:cNvSpPr txBox="1"/>
+          <p:nvPr/>
+        </p:nvSpPr>
+        <p:spPr>
+          <a:xfrm>
+            <a:off x="548640" y="3136392"/>
+            <a:ext cx="2103120" cy="1005840"/>
+          </a:xfrm>
+          <a:prstGeom prst="rect">
+            <a:avLst/>
+          </a:prstGeom>
+          <a:noFill/>
+        </p:spPr>
+        <p:txBody>
+          <a:bodyPr wrap="square">
+            <a:spAutoFit/>
+          </a:bodyPr>
+          <a:lstStyle/>
+          <a:p>
+            <a:pPr algn="ctr">
+              <a:defRPr sz="1200" b="1">
+                <a:solidFill>
+                  <a:srgbClr val="E94560"/>
+                </a:solidFill>
+              </a:defRPr>
+            </a:pPr>
+            <a:r>
+              <a:t>控制循环</a:t>
+            </a:r>
+          </a:p>
+        </p:txBody>
+      </p:sp>
+      <p:sp>
+        <p:nvSpPr>
+          <p:cNvPr id="19" name="Rectangle 18"/>
+          <p:cNvSpPr/>
+          <p:nvPr/>
+        </p:nvSpPr>
+        <p:spPr>
+          <a:xfrm>
+            <a:off x="2926080" y="3063240"/>
+            <a:ext cx="4572000" cy="1143000"/>
+          </a:xfrm>
+          <a:prstGeom prst="rect">
+            <a:avLst/>
+          </a:prstGeom>
+          <a:solidFill>
+            <a:srgbClr val="2D3748"/>
+          </a:solidFill>
+          <a:ln>
+            <a:noFill/>
+          </a:ln>
+        </p:spPr>
+        <p:style>
+          <a:lnRef idx="1">
+            <a:schemeClr val="accent1"/>
+          </a:lnRef>
+          <a:fillRef idx="3">
+            <a:schemeClr val="accent1"/>
+          </a:fillRef>
+          <a:effectRef idx="2">
+            <a:schemeClr val="accent1"/>
+          </a:effectRef>
+          <a:fontRef idx="minor">
+            <a:schemeClr val="lt1"/>
+          </a:fontRef>
+        </p:style>
+        <p:txBody>
+          <a:bodyPr rtlCol="0" anchor="ctr"/>
+          <a:lstStyle/>
+          <a:p>
+            <a:pPr algn="ctr"/>
+          </a:p>
+        </p:txBody>
+      </p:sp>
+      <p:sp>
+        <p:nvSpPr>
+          <p:cNvPr id="20" name="TextBox 19"/>
+          <p:cNvSpPr txBox="1"/>
+          <p:nvPr/>
+        </p:nvSpPr>
+        <p:spPr>
+          <a:xfrm>
+            <a:off x="3017520" y="3136392"/>
+            <a:ext cx="4389120" cy="1005840"/>
+          </a:xfrm>
+          <a:prstGeom prst="rect">
+            <a:avLst/>
+          </a:prstGeom>
+          <a:noFill/>
+        </p:spPr>
+        <p:txBody>
+          <a:bodyPr wrap="square">
+            <a:spAutoFit/>
+          </a:bodyPr>
+          <a:lstStyle/>
+          <a:p>
+            <a:pPr algn="ctr">
+              <a:defRPr sz="1200" b="0">
+                <a:solidFill>
+                  <a:srgbClr val="FFFFFF"/>
+                </a:solidFill>
+              </a:defRPr>
+            </a:pPr>
+            <a:r>
+              <a:t>observe decide act</a:t>
+            </a:r>
+            <a:br/>
+            <a:r>
+              <a:t>持续调谐直到达成</a:t>
+            </a:r>
+          </a:p>
+        </p:txBody>
+      </p:sp>
+      <p:sp>
+        <p:nvSpPr>
+          <p:cNvPr id="21" name="Rectangle 20"/>
+          <p:cNvSpPr/>
+          <p:nvPr/>
+        </p:nvSpPr>
+        <p:spPr>
+          <a:xfrm>
+            <a:off x="7772400" y="3063240"/>
+            <a:ext cx="4389120" cy="1143000"/>
+          </a:xfrm>
+          <a:prstGeom prst="rect">
+            <a:avLst/>
+          </a:prstGeom>
+          <a:solidFill>
+            <a:srgbClr val="2D3748"/>
+          </a:solidFill>
+          <a:ln>
+            <a:noFill/>
+          </a:ln>
+        </p:spPr>
+        <p:style>
+          <a:lnRef idx="1">
+            <a:schemeClr val="accent1"/>
+          </a:lnRef>
+          <a:fillRef idx="3">
+            <a:schemeClr val="accent1"/>
+          </a:fillRef>
+          <a:effectRef idx="2">
+            <a:schemeClr val="accent1"/>
+          </a:effectRef>
+          <a:fontRef idx="minor">
+            <a:schemeClr val="lt1"/>
+          </a:fontRef>
+        </p:style>
+        <p:txBody>
+          <a:bodyPr rtlCol="0" anchor="ctr"/>
+          <a:lstStyle/>
+          <a:p>
+            <a:pPr algn="ctr"/>
+          </a:p>
+        </p:txBody>
+      </p:sp>
+      <p:sp>
+        <p:nvSpPr>
+          <p:cNvPr id="22" name="TextBox 21"/>
+          <p:cNvSpPr txBox="1"/>
+          <p:nvPr/>
+        </p:nvSpPr>
+        <p:spPr>
+          <a:xfrm>
+            <a:off x="7863840" y="3136392"/>
+            <a:ext cx="4206240" cy="1005840"/>
+          </a:xfrm>
+          <a:prstGeom prst="rect">
+            <a:avLst/>
+          </a:prstGeom>
+          <a:noFill/>
+        </p:spPr>
+        <p:txBody>
+          <a:bodyPr wrap="square">
+            <a:spAutoFit/>
+          </a:bodyPr>
+          <a:lstStyle/>
+          <a:p>
+            <a:pPr algn="ctr">
+              <a:defRPr sz="1200" b="0">
+                <a:solidFill>
+                  <a:srgbClr val="FFFFFF"/>
+                </a:solidFill>
+              </a:defRPr>
+            </a:pPr>
+            <a:r>
+              <a:t>thought action observation</a:t>
+            </a:r>
+            <a:br/>
+            <a:r>
+              <a:t>循环往复</a:t>
+            </a:r>
+          </a:p>
+        </p:txBody>
+      </p:sp>
+      <p:sp>
+        <p:nvSpPr>
+          <p:cNvPr id="23" name="Rectangle 22"/>
+          <p:cNvSpPr/>
+          <p:nvPr/>
+        </p:nvSpPr>
+        <p:spPr>
+          <a:xfrm>
+            <a:off x="457200" y="4297680"/>
+            <a:ext cx="2286000" cy="1143000"/>
+          </a:xfrm>
+          <a:prstGeom prst="rect">
+            <a:avLst/>
+          </a:prstGeom>
+          <a:solidFill>
+            <a:srgbClr val="1A1A2E"/>
+          </a:solidFill>
+          <a:ln>
+            <a:noFill/>
+          </a:ln>
+        </p:spPr>
+        <p:style>
+          <a:lnRef idx="1">
+            <a:schemeClr val="accent1"/>
+          </a:lnRef>
+          <a:fillRef idx="3">
+            <a:schemeClr val="accent1"/>
+          </a:fillRef>
+          <a:effectRef idx="2">
+            <a:schemeClr val="accent1"/>
+          </a:effectRef>
+          <a:fontRef idx="minor">
+            <a:schemeClr val="lt1"/>
+          </a:fontRef>
+        </p:style>
+        <p:txBody>
+          <a:bodyPr rtlCol="0" anchor="ctr"/>
+          <a:lstStyle/>
+          <a:p>
+            <a:pPr algn="ctr"/>
+          </a:p>
+        </p:txBody>
+      </p:sp>
+      <p:sp>
+        <p:nvSpPr>
+          <p:cNvPr id="24" name="TextBox 23"/>
+          <p:cNvSpPr txBox="1"/>
+          <p:nvPr/>
+        </p:nvSpPr>
+        <p:spPr>
+          <a:xfrm>
+            <a:off x="548640" y="4370832"/>
+            <a:ext cx="2103120" cy="1005840"/>
+          </a:xfrm>
+          <a:prstGeom prst="rect">
+            <a:avLst/>
+          </a:prstGeom>
+          <a:noFill/>
+        </p:spPr>
+        <p:txBody>
+          <a:bodyPr wrap="square">
+            <a:spAutoFit/>
+          </a:bodyPr>
+          <a:lstStyle/>
+          <a:p>
+            <a:pPr algn="ctr">
+              <a:defRPr sz="1200" b="1">
+                <a:solidFill>
+                  <a:srgbClr val="E94560"/>
+                </a:solidFill>
+              </a:defRPr>
+            </a:pPr>
+            <a:r>
+              <a:t>目标</a:t>
+            </a:r>
+          </a:p>
+        </p:txBody>
+      </p:sp>
+      <p:sp>
+        <p:nvSpPr>
+          <p:cNvPr id="25" name="Rectangle 24"/>
+          <p:cNvSpPr/>
+          <p:nvPr/>
+        </p:nvSpPr>
+        <p:spPr>
+          <a:xfrm>
+            <a:off x="2926080" y="4297680"/>
+            <a:ext cx="4572000" cy="1143000"/>
+          </a:xfrm>
+          <a:prstGeom prst="rect">
+            <a:avLst/>
+          </a:prstGeom>
+          <a:solidFill>
+            <a:srgbClr val="1A1A2E"/>
+          </a:solidFill>
+          <a:ln>
+            <a:noFill/>
+          </a:ln>
+        </p:spPr>
+        <p:style>
+          <a:lnRef idx="1">
+            <a:schemeClr val="accent1"/>
+          </a:lnRef>
+          <a:fillRef idx="3">
+            <a:schemeClr val="accent1"/>
+          </a:fillRef>
+          <a:effectRef idx="2">
+            <a:schemeClr val="accent1"/>
+          </a:effectRef>
+          <a:fontRef idx="minor">
+            <a:schemeClr val="lt1"/>
+          </a:fontRef>
+        </p:style>
+        <p:txBody>
+          <a:bodyPr rtlCol="0" anchor="ctr"/>
+          <a:lstStyle/>
+          <a:p>
+            <a:pPr algn="ctr"/>
+          </a:p>
+        </p:txBody>
+      </p:sp>
+      <p:sp>
+        <p:nvSpPr>
+          <p:cNvPr id="26" name="TextBox 25"/>
+          <p:cNvSpPr txBox="1"/>
+          <p:nvPr/>
+        </p:nvSpPr>
+        <p:spPr>
+          <a:xfrm>
+            <a:off x="3017520" y="4370832"/>
+            <a:ext cx="4389120" cy="1005840"/>
+          </a:xfrm>
+          <a:prstGeom prst="rect">
+            <a:avLst/>
+          </a:prstGeom>
+          <a:noFill/>
+        </p:spPr>
+        <p:txBody>
+          <a:bodyPr wrap="square">
+            <a:spAutoFit/>
+          </a:bodyPr>
+          <a:lstStyle/>
+          <a:p>
+            <a:pPr algn="ctr">
+              <a:defRPr sz="1200" b="0">
+                <a:solidFill>
+                  <a:srgbClr val="FFFFFF"/>
+                </a:solidFill>
+              </a:defRPr>
+            </a:pPr>
+            <a:r>
+              <a:t>基础设施达到期望状态</a:t>
+            </a:r>
+          </a:p>
+        </p:txBody>
+      </p:sp>
+      <p:sp>
+        <p:nvSpPr>
+          <p:cNvPr id="27" name="Rectangle 26"/>
+          <p:cNvSpPr/>
+          <p:nvPr/>
+        </p:nvSpPr>
+        <p:spPr>
+          <a:xfrm>
+            <a:off x="7772400" y="4297680"/>
+            <a:ext cx="4389120" cy="1143000"/>
+          </a:xfrm>
+          <a:prstGeom prst="rect">
+            <a:avLst/>
+          </a:prstGeom>
+          <a:solidFill>
+            <a:srgbClr val="1A1A2E"/>
+          </a:solidFill>
+          <a:ln>
+            <a:noFill/>
+          </a:ln>
+        </p:spPr>
+        <p:style>
+          <a:lnRef idx="1">
+            <a:schemeClr val="accent1"/>
+          </a:lnRef>
+          <a:fillRef idx="3">
+            <a:schemeClr val="accent1"/>
+          </a:fillRef>
+          <a:effectRef idx="2">
+            <a:schemeClr val="accent1"/>
+          </a:effectRef>
+          <a:fontRef idx="minor">
+            <a:schemeClr val="lt1"/>
+          </a:fontRef>
+        </p:style>
+        <p:txBody>
+          <a:bodyPr rtlCol="0" anchor="ctr"/>
+          <a:lstStyle/>
+          <a:p>
+            <a:pPr algn="ctr"/>
+          </a:p>
+        </p:txBody>
+      </p:sp>
+      <p:sp>
+        <p:nvSpPr>
+          <p:cNvPr id="28" name="TextBox 27"/>
+          <p:cNvSpPr txBox="1"/>
+          <p:nvPr/>
+        </p:nvSpPr>
+        <p:spPr>
+          <a:xfrm>
+            <a:off x="7863840" y="4370832"/>
+            <a:ext cx="4206240" cy="1005840"/>
+          </a:xfrm>
+          <a:prstGeom prst="rect">
+            <a:avLst/>
+          </a:prstGeom>
+          <a:noFill/>
+        </p:spPr>
+        <p:txBody>
+          <a:bodyPr wrap="square">
+            <a:spAutoFit/>
+          </a:bodyPr>
+          <a:lstStyle/>
+          <a:p>
+            <a:pPr algn="ctr">
+              <a:defRPr sz="1200" b="0">
+                <a:solidFill>
+                  <a:srgbClr val="FFFFFF"/>
+                </a:solidFill>
+              </a:defRPr>
+            </a:pPr>
+            <a:r>
+              <a:t>业务目标被实现</a:t>
+            </a:r>
+          </a:p>
+        </p:txBody>
+      </p:sp>
+      <p:sp>
+        <p:nvSpPr>
+          <p:cNvPr id="29" name="Rectangle 28"/>
+          <p:cNvSpPr/>
+          <p:nvPr/>
+        </p:nvSpPr>
+        <p:spPr>
+          <a:xfrm>
+            <a:off x="457200" y="5532120"/>
+            <a:ext cx="2286000" cy="1143000"/>
+          </a:xfrm>
+          <a:prstGeom prst="rect">
+            <a:avLst/>
+          </a:prstGeom>
+          <a:solidFill>
+            <a:srgbClr val="2D3748"/>
+          </a:solidFill>
+          <a:ln>
+            <a:noFill/>
+          </a:ln>
+        </p:spPr>
+        <p:style>
+          <a:lnRef idx="1">
+            <a:schemeClr val="accent1"/>
+          </a:lnRef>
+          <a:fillRef idx="3">
+            <a:schemeClr val="accent1"/>
+          </a:fillRef>
+          <a:effectRef idx="2">
+            <a:schemeClr val="accent1"/>
+          </a:effectRef>
+          <a:fontRef idx="minor">
+            <a:schemeClr val="lt1"/>
+          </a:fontRef>
+        </p:style>
+        <p:txBody>
+          <a:bodyPr rtlCol="0" anchor="ctr"/>
+          <a:lstStyle/>
+          <a:p>
+            <a:pPr algn="ctr"/>
+          </a:p>
+        </p:txBody>
+      </p:sp>
+      <p:sp>
+        <p:nvSpPr>
+          <p:cNvPr id="30" name="TextBox 29"/>
+          <p:cNvSpPr txBox="1"/>
+          <p:nvPr/>
+        </p:nvSpPr>
+        <p:spPr>
+          <a:xfrm>
+            <a:off x="548640" y="5605272"/>
+            <a:ext cx="2103120" cy="1005840"/>
+          </a:xfrm>
+          <a:prstGeom prst="rect">
+            <a:avLst/>
+          </a:prstGeom>
+          <a:noFill/>
+        </p:spPr>
+        <p:txBody>
+          <a:bodyPr wrap="square">
+            <a:spAutoFit/>
+          </a:bodyPr>
+          <a:lstStyle/>
+          <a:p>
+            <a:pPr algn="ctr">
+              <a:defRPr sz="1200" b="1">
+                <a:solidFill>
+                  <a:srgbClr val="E94560"/>
+                </a:solidFill>
+              </a:defRPr>
+            </a:pPr>
+            <a:r>
+              <a:t>本质</a:t>
+            </a:r>
+          </a:p>
+        </p:txBody>
+      </p:sp>
+      <p:sp>
+        <p:nvSpPr>
+          <p:cNvPr id="31" name="Rectangle 30"/>
+          <p:cNvSpPr/>
+          <p:nvPr/>
+        </p:nvSpPr>
+        <p:spPr>
+          <a:xfrm>
+            <a:off x="2926080" y="5532120"/>
+            <a:ext cx="4572000" cy="1143000"/>
+          </a:xfrm>
+          <a:prstGeom prst="rect">
+            <a:avLst/>
+          </a:prstGeom>
+          <a:solidFill>
+            <a:srgbClr val="2D3748"/>
+          </a:solidFill>
+          <a:ln>
+            <a:noFill/>
+          </a:ln>
+        </p:spPr>
+        <p:style>
+          <a:lnRef idx="1">
+            <a:schemeClr val="accent1"/>
+          </a:lnRef>
+          <a:fillRef idx="3">
+            <a:schemeClr val="accent1"/>
+          </a:fillRef>
+          <a:effectRef idx="2">
+            <a:schemeClr val="accent1"/>
+          </a:effectRef>
+          <a:fontRef idx="minor">
+            <a:schemeClr val="lt1"/>
+          </a:fontRef>
+        </p:style>
+        <p:txBody>
+          <a:bodyPr rtlCol="0" anchor="ctr"/>
+          <a:lstStyle/>
+          <a:p>
+            <a:pPr algn="ctr"/>
+          </a:p>
+        </p:txBody>
+      </p:sp>
+      <p:sp>
+        <p:nvSpPr>
+          <p:cNvPr id="32" name="TextBox 31"/>
+          <p:cNvSpPr txBox="1"/>
+          <p:nvPr/>
+        </p:nvSpPr>
+        <p:spPr>
+          <a:xfrm>
+            <a:off x="3017520" y="5605272"/>
+            <a:ext cx="4389120" cy="1005840"/>
+          </a:xfrm>
+          <a:prstGeom prst="rect">
+            <a:avLst/>
+          </a:prstGeom>
+          <a:noFill/>
+        </p:spPr>
+        <p:txBody>
+          <a:bodyPr wrap="square">
+            <a:spAutoFit/>
+          </a:bodyPr>
+          <a:lstStyle/>
+          <a:p>
+            <a:pPr algn="ctr">
+              <a:defRPr sz="1200" b="0">
+                <a:solidFill>
+                  <a:srgbClr val="FFFFFF"/>
+                </a:solidFill>
+              </a:defRPr>
+            </a:pPr>
+            <a:r>
+              <a:t>管理基础设施的 Agent</a:t>
+            </a:r>
+          </a:p>
+        </p:txBody>
+      </p:sp>
+      <p:sp>
+        <p:nvSpPr>
+          <p:cNvPr id="33" name="Rectangle 32"/>
+          <p:cNvSpPr/>
+          <p:nvPr/>
+        </p:nvSpPr>
+        <p:spPr>
+          <a:xfrm>
+            <a:off x="7772400" y="5532120"/>
+            <a:ext cx="4389120" cy="1143000"/>
+          </a:xfrm>
+          <a:prstGeom prst="rect">
+            <a:avLst/>
+          </a:prstGeom>
+          <a:solidFill>
+            <a:srgbClr val="2D3748"/>
+          </a:solidFill>
+          <a:ln>
+            <a:noFill/>
+          </a:ln>
+        </p:spPr>
+        <p:style>
+          <a:lnRef idx="1">
+            <a:schemeClr val="accent1"/>
+          </a:lnRef>
+          <a:fillRef idx="3">
+            <a:schemeClr val="accent1"/>
+          </a:fillRef>
+          <a:effectRef idx="2">
+            <a:schemeClr val="accent1"/>
+          </a:effectRef>
+          <a:fontRef idx="minor">
+            <a:schemeClr val="lt1"/>
+          </a:fontRef>
+        </p:style>
+        <p:txBody>
+          <a:bodyPr rtlCol="0" anchor="ctr"/>
+          <a:lstStyle/>
+          <a:p>
+            <a:pPr algn="ctr"/>
+          </a:p>
+        </p:txBody>
+      </p:sp>
+      <p:sp>
+        <p:nvSpPr>
+          <p:cNvPr id="34" name="TextBox 33"/>
+          <p:cNvSpPr txBox="1"/>
+          <p:nvPr/>
+        </p:nvSpPr>
+        <p:spPr>
+          <a:xfrm>
+            <a:off x="7863840" y="5605272"/>
+            <a:ext cx="4206240" cy="1005840"/>
+          </a:xfrm>
+          <a:prstGeom prst="rect">
+            <a:avLst/>
+          </a:prstGeom>
+          <a:noFill/>
+        </p:spPr>
+        <p:txBody>
+          <a:bodyPr wrap="square">
+            <a:spAutoFit/>
+          </a:bodyPr>
+          <a:lstStyle/>
+          <a:p>
+            <a:pPr algn="ctr">
+              <a:defRPr sz="1200" b="0">
+                <a:solidFill>
+                  <a:srgbClr val="FFFFFF"/>
+                </a:solidFill>
+              </a:defRPr>
+            </a:pPr>
+            <a:r>
+              <a:t>管理业务逻辑的 Agent</a:t>
             </a:r>
           </a:p>
         </p:txBody>
@@ -5647,7 +5522,7 @@
               </a:defRPr>
             </a:pPr>
             <a:r>
-              <a:t>Agent 的本质：从工具到伙伴</a:t>
+              <a:t>关键洞察：K8s Controller = 原始 Agent</a:t>
             </a:r>
           </a:p>
         </p:txBody>
@@ -5678,14 +5553,14 @@
               <a:spcAft>
                 <a:spcPts val="1400"/>
               </a:spcAft>
-              <a:defRPr sz="2100" b="0">
-                <a:solidFill>
-                  <a:srgbClr val="1A1A2E"/>
-                </a:solidFill>
-              </a:defRPr>
-            </a:pPr>
-            <a:r>
-              <a:t>• 交互原语升维：命令与控制 → 意图与协作</a:t>
+              <a:defRPr sz="2000" b="1">
+                <a:solidFill>
+                  <a:srgbClr val="553C9A"/>
+                </a:solidFill>
+              </a:defRPr>
+            </a:pPr>
+            <a:r>
+              <a:t>• K8s 的 Controller 已经在实践 Agent 的核心思想 — 声明期望状态，持续调谐直到达成</a:t>
             </a:r>
           </a:p>
           <a:p>
@@ -5693,14 +5568,14 @@
               <a:spcAft>
                 <a:spcPts val="1400"/>
               </a:spcAft>
-              <a:defRPr sz="2100" b="1">
-                <a:solidFill>
-                  <a:srgbClr val="553C9A"/>
-                </a:solidFill>
-              </a:defRPr>
-            </a:pPr>
-            <a:r>
-              <a:t>• Agent =「模糊翻译器」：人类模糊的自然语言 → 机器精确的 API 调用（语义→目的→上下文→风险）</a:t>
+              <a:defRPr sz="2000" b="0">
+                <a:solidFill>
+                  <a:srgbClr val="1A1A2E"/>
+                </a:solidFill>
+              </a:defRPr>
+            </a:pPr>
+            <a:r>
+              <a:t>• 只是 Agent 的输入从 YAML 变成了自然语言 Prompt</a:t>
             </a:r>
           </a:p>
           <a:p>
@@ -5708,14 +5583,14 @@
               <a:spcAft>
                 <a:spcPts val="1400"/>
               </a:spcAft>
-              <a:defRPr sz="2100" b="1">
+              <a:defRPr sz="2000" b="1">
                 <a:solidFill>
                   <a:srgbClr val="553C9A"/>
                 </a:solidFill>
               </a:defRPr>
             </a:pPr>
             <a:r>
-              <a:t>• 记忆与身份：Agent 在对话之间延续「身份」，逐渐形成对用户的深入理解</a:t>
+              <a:t>• LLM Agent 不过是把这个模式从基础设施层搬到了业务逻辑层</a:t>
             </a:r>
           </a:p>
           <a:p>
@@ -5723,29 +5598,14 @@
               <a:spcAft>
                 <a:spcPts val="1400"/>
               </a:spcAft>
-              <a:defRPr sz="2100" b="0">
+              <a:defRPr sz="2000" b="0">
                 <a:solidFill>
                   <a:srgbClr val="1A1A2E"/>
                 </a:solidFill>
               </a:defRPr>
             </a:pPr>
             <a:r>
-              <a:t>• 上下文工程：「上下文就是 Agent 的整个世界」，失败往往源于上下文有误</a:t>
-            </a:r>
-          </a:p>
-          <a:p>
-            <a:pPr>
-              <a:spcAft>
-                <a:spcPts val="1400"/>
-              </a:spcAft>
-              <a:defRPr sz="2100" b="0">
-                <a:solidFill>
-                  <a:srgbClr val="1A1A2E"/>
-                </a:solidFill>
-              </a:defRPr>
-            </a:pPr>
-            <a:r>
-              <a:t>• 任务分解（Task Decomposition）：把「目标」变为「计划」的能力——衡量 Agent 智能化水平的关键</a:t>
+              <a:t>• Kubernetes = 管理基础设施的 Agent | LLM Agent = 管理业务逻辑的 Agent</a:t>
             </a:r>
           </a:p>
         </p:txBody>
@@ -5884,7 +5744,7 @@
               </a:defRPr>
             </a:pPr>
             <a:r>
-              <a:t>ReAct：Agent 行动的标准心智模型</a:t>
+              <a:t>Serverless：极致的原子能力</a:t>
             </a:r>
           </a:p>
         </p:txBody>
@@ -5915,14 +5775,14 @@
               <a:spcAft>
                 <a:spcPts val="1400"/>
               </a:spcAft>
-              <a:defRPr sz="2100" b="0">
+              <a:defRPr sz="2000" b="0">
                 <a:solidFill>
                   <a:srgbClr val="1A1A2E"/>
                 </a:solidFill>
               </a:defRPr>
             </a:pPr>
             <a:r>
-              <a:t>• ReAct = Thought → Action → Observation — 推理与行动交织的循环</a:t>
+              <a:t>• Serverless 将计算粒度从服务细化为函数：从维护一口永不干涸的井到按杯取水</a:t>
             </a:r>
           </a:p>
           <a:p>
@@ -5930,14 +5790,14 @@
               <a:spcAft>
                 <a:spcPts val="1400"/>
               </a:spcAft>
-              <a:defRPr sz="2100" b="1">
-                <a:solidFill>
-                  <a:srgbClr val="553C9A"/>
-                </a:solidFill>
-              </a:defRPr>
-            </a:pPr>
-            <a:r>
-              <a:t>• 看图规划（Thought）→ 采取行动（Action）→ 观察反馈（Observation）→ 循环往复</a:t>
+              <a:defRPr sz="2000" b="0">
+                <a:solidFill>
+                  <a:srgbClr val="1A1A2E"/>
+                </a:solidFill>
+              </a:defRPr>
+            </a:pPr>
+            <a:r>
+              <a:t>• 函数平时沉睡在云端，事件触发时才激活 — 极致按需使用</a:t>
             </a:r>
           </a:p>
           <a:p>
@@ -5945,29 +5805,14 @@
               <a:spcAft>
                 <a:spcPts val="1400"/>
               </a:spcAft>
-              <a:defRPr sz="2100" b="0">
-                <a:solidFill>
-                  <a:srgbClr val="1A1A2E"/>
-                </a:solidFill>
-              </a:defRPr>
-            </a:pPr>
-            <a:r>
-              <a:t>• 核心价值：推理轨迹追踪中间决策，行动赋予探索环境获取外部信息的能力</a:t>
-            </a:r>
-          </a:p>
-          <a:p>
-            <a:pPr>
-              <a:spcAft>
-                <a:spcPts val="1400"/>
-              </a:spcAft>
-              <a:defRPr sz="2100" b="0">
-                <a:solidFill>
-                  <a:srgbClr val="1A1A2E"/>
-                </a:solidFill>
-              </a:defRPr>
-            </a:pPr>
-            <a:r>
-              <a:t>• 这是 Agent 与传统程序的核心区别：输出不再是终点，而是环境改变的起点</a:t>
+              <a:defRPr sz="2000" b="1">
+                <a:solidFill>
+                  <a:srgbClr val="553C9A"/>
+                </a:solidFill>
+              </a:defRPr>
+            </a:pPr>
+            <a:r>
+              <a:t>• 在 Agent 架构中，Serverless 函数如同沉睡的技能：成千上万个工具部署为函数，Agent 在产生特定意图的瞬间通过 API 唤醒</a:t>
             </a:r>
           </a:p>
         </p:txBody>
@@ -6106,7 +5951,7 @@
               </a:defRPr>
             </a:pPr>
             <a:r>
-              <a:t>MCP + A2A：双轨制协议</a:t>
+              <a:t>Software 2.0：2017年 Karpathy 的预言</a:t>
             </a:r>
           </a:p>
         </p:txBody>
@@ -6119,8 +5964,121 @@
         </p:nvSpPr>
         <p:spPr>
           <a:xfrm>
-            <a:off x="640080" y="1371600"/>
-            <a:ext cx="10972800" cy="5029200"/>
+            <a:off x="3200400" y="1325880"/>
+            <a:ext cx="5212080" cy="365760"/>
+          </a:xfrm>
+          <a:prstGeom prst="rect">
+            <a:avLst/>
+          </a:prstGeom>
+          <a:noFill/>
+        </p:spPr>
+        <p:txBody>
+          <a:bodyPr wrap="none">
+            <a:spAutoFit/>
+          </a:bodyPr>
+          <a:lstStyle/>
+          <a:p>
+            <a:pPr algn="ctr">
+              <a:defRPr sz="1400" b="1">
+                <a:solidFill>
+                  <a:srgbClr val="553C9A"/>
+                </a:solidFill>
+              </a:defRPr>
+            </a:pPr>
+            <a:r>
+              <a:t>软件 1.0</a:t>
+            </a:r>
+          </a:p>
+        </p:txBody>
+      </p:sp>
+      <p:sp>
+        <p:nvSpPr>
+          <p:cNvPr id="6" name="TextBox 5"/>
+          <p:cNvSpPr txBox="1"/>
+          <p:nvPr/>
+        </p:nvSpPr>
+        <p:spPr>
+          <a:xfrm>
+            <a:off x="8686800" y="1325880"/>
+            <a:ext cx="3200400" cy="365760"/>
+          </a:xfrm>
+          <a:prstGeom prst="rect">
+            <a:avLst/>
+          </a:prstGeom>
+          <a:noFill/>
+        </p:spPr>
+        <p:txBody>
+          <a:bodyPr wrap="none">
+            <a:spAutoFit/>
+          </a:bodyPr>
+          <a:lstStyle/>
+          <a:p>
+            <a:pPr algn="ctr">
+              <a:defRPr sz="1400" b="1">
+                <a:solidFill>
+                  <a:srgbClr val="E94560"/>
+                </a:solidFill>
+              </a:defRPr>
+            </a:pPr>
+            <a:r>
+              <a:t>软件 2.0</a:t>
+            </a:r>
+          </a:p>
+        </p:txBody>
+      </p:sp>
+      <p:sp>
+        <p:nvSpPr>
+          <p:cNvPr id="7" name="Rectangle 6"/>
+          <p:cNvSpPr/>
+          <p:nvPr/>
+        </p:nvSpPr>
+        <p:spPr>
+          <a:xfrm>
+            <a:off x="457200" y="1737360"/>
+            <a:ext cx="2560320" cy="1143000"/>
+          </a:xfrm>
+          <a:prstGeom prst="rect">
+            <a:avLst/>
+          </a:prstGeom>
+          <a:solidFill>
+            <a:srgbClr val="1A1A2E"/>
+          </a:solidFill>
+          <a:ln>
+            <a:noFill/>
+          </a:ln>
+        </p:spPr>
+        <p:style>
+          <a:lnRef idx="1">
+            <a:schemeClr val="accent1"/>
+          </a:lnRef>
+          <a:fillRef idx="3">
+            <a:schemeClr val="accent1"/>
+          </a:fillRef>
+          <a:effectRef idx="2">
+            <a:schemeClr val="accent1"/>
+          </a:effectRef>
+          <a:fontRef idx="minor">
+            <a:schemeClr val="lt1"/>
+          </a:fontRef>
+        </p:style>
+        <p:txBody>
+          <a:bodyPr rtlCol="0" anchor="ctr"/>
+          <a:lstStyle/>
+          <a:p>
+            <a:pPr algn="ctr"/>
+          </a:p>
+        </p:txBody>
+      </p:sp>
+      <p:sp>
+        <p:nvSpPr>
+          <p:cNvPr id="8" name="TextBox 7"/>
+          <p:cNvSpPr txBox="1"/>
+          <p:nvPr/>
+        </p:nvSpPr>
+        <p:spPr>
+          <a:xfrm>
+            <a:off x="548640" y="1828800"/>
+            <a:ext cx="2377440" cy="1005840"/>
           </a:xfrm>
           <a:prstGeom prst="rect">
             <a:avLst/>
@@ -6133,78 +6091,873 @@
           </a:bodyPr>
           <a:lstStyle/>
           <a:p>
-            <a:pPr>
-              <a:spcAft>
-                <a:spcPts val="1400"/>
-              </a:spcAft>
-              <a:defRPr sz="2100" b="1">
+            <a:pPr algn="ctr">
+              <a:defRPr sz="1200" b="1">
+                <a:solidFill>
+                  <a:srgbClr val="E94560"/>
+                </a:solidFill>
+              </a:defRPr>
+            </a:pPr>
+            <a:r>
+              <a:t>开发者角色</a:t>
+            </a:r>
+          </a:p>
+        </p:txBody>
+      </p:sp>
+      <p:sp>
+        <p:nvSpPr>
+          <p:cNvPr id="9" name="Rectangle 8"/>
+          <p:cNvSpPr/>
+          <p:nvPr/>
+        </p:nvSpPr>
+        <p:spPr>
+          <a:xfrm>
+            <a:off x="3200400" y="1737360"/>
+            <a:ext cx="5212080" cy="1143000"/>
+          </a:xfrm>
+          <a:prstGeom prst="rect">
+            <a:avLst/>
+          </a:prstGeom>
+          <a:solidFill>
+            <a:srgbClr val="1A1A2E"/>
+          </a:solidFill>
+          <a:ln>
+            <a:noFill/>
+          </a:ln>
+        </p:spPr>
+        <p:style>
+          <a:lnRef idx="1">
+            <a:schemeClr val="accent1"/>
+          </a:lnRef>
+          <a:fillRef idx="3">
+            <a:schemeClr val="accent1"/>
+          </a:fillRef>
+          <a:effectRef idx="2">
+            <a:schemeClr val="accent1"/>
+          </a:effectRef>
+          <a:fontRef idx="minor">
+            <a:schemeClr val="lt1"/>
+          </a:fontRef>
+        </p:style>
+        <p:txBody>
+          <a:bodyPr rtlCol="0" anchor="ctr"/>
+          <a:lstStyle/>
+          <a:p>
+            <a:pPr algn="ctr"/>
+          </a:p>
+        </p:txBody>
+      </p:sp>
+      <p:sp>
+        <p:nvSpPr>
+          <p:cNvPr id="10" name="TextBox 9"/>
+          <p:cNvSpPr txBox="1"/>
+          <p:nvPr/>
+        </p:nvSpPr>
+        <p:spPr>
+          <a:xfrm>
+            <a:off x="3291840" y="1828800"/>
+            <a:ext cx="5029200" cy="1005840"/>
+          </a:xfrm>
+          <a:prstGeom prst="rect">
+            <a:avLst/>
+          </a:prstGeom>
+          <a:noFill/>
+        </p:spPr>
+        <p:txBody>
+          <a:bodyPr wrap="square">
+            <a:spAutoFit/>
+          </a:bodyPr>
+          <a:lstStyle/>
+          <a:p>
+            <a:pPr algn="ctr">
+              <a:defRPr sz="1200" b="0">
                 <a:solidFill>
                   <a:srgbClr val="553C9A"/>
                 </a:solidFill>
               </a:defRPr>
             </a:pPr>
             <a:r>
-              <a:t>• MCP（Model Context Protocol）— AI 的 USB-C 接口：标准化 Agent 与工具/数据的连接</a:t>
-            </a:r>
-          </a:p>
-          <a:p>
-            <a:pPr>
-              <a:spcAft>
-                <a:spcPts val="1400"/>
-              </a:spcAft>
-              <a:defRPr sz="2100" b="0">
-                <a:solidFill>
-                  <a:srgbClr val="1A1A2E"/>
-                </a:solidFill>
-              </a:defRPr>
-            </a:pPr>
-            <a:r>
-              <a:t>• A2A — Agent 之间的「对讲机协议」：多个 Agent 相互协作</a:t>
-            </a:r>
-          </a:p>
-          <a:p>
-            <a:pPr>
-              <a:spcAft>
-                <a:spcPts val="1400"/>
-              </a:spcAft>
-              <a:defRPr sz="2100" b="0">
-                <a:solidFill>
-                  <a:srgbClr val="1A1A2E"/>
-                </a:solidFill>
-              </a:defRPr>
-            </a:pPr>
-            <a:r>
-              <a:t>• 工具(Tool) = Agent 的「手」— 原子化操作（执行SQL、发送HTTP）</a:t>
-            </a:r>
-          </a:p>
-          <a:p>
-            <a:pPr>
-              <a:spcAft>
-                <a:spcPts val="1400"/>
-              </a:spcAft>
-              <a:defRPr sz="2100" b="0">
-                <a:solidFill>
-                  <a:srgbClr val="1A1A2E"/>
-                </a:solidFill>
-              </a:defRPr>
-            </a:pPr>
-            <a:r>
-              <a:t>• 技能(Skill) = Agent 的「技能书」— 工具 + 领域知识 + SOP</a:t>
-            </a:r>
-          </a:p>
-          <a:p>
-            <a:pPr>
-              <a:spcAft>
-                <a:spcPts val="1400"/>
-              </a:spcAft>
-              <a:defRPr sz="2100" b="0">
-                <a:solidFill>
-                  <a:srgbClr val="1A1A2E"/>
-                </a:solidFill>
-              </a:defRPr>
-            </a:pPr>
-            <a:r>
-              <a:t>• 编排器（Orchestrator）：当 Agent 数量增加，系统需要「大脑」维持秩序</a:t>
+              <a:t>建筑师 — 精确控制每行逻辑</a:t>
+            </a:r>
+          </a:p>
+        </p:txBody>
+      </p:sp>
+      <p:sp>
+        <p:nvSpPr>
+          <p:cNvPr id="11" name="Rectangle 10"/>
+          <p:cNvSpPr/>
+          <p:nvPr/>
+        </p:nvSpPr>
+        <p:spPr>
+          <a:xfrm>
+            <a:off x="8686800" y="1737360"/>
+            <a:ext cx="3200400" cy="1143000"/>
+          </a:xfrm>
+          <a:prstGeom prst="rect">
+            <a:avLst/>
+          </a:prstGeom>
+          <a:solidFill>
+            <a:srgbClr val="1A1A2E"/>
+          </a:solidFill>
+          <a:ln>
+            <a:noFill/>
+          </a:ln>
+        </p:spPr>
+        <p:style>
+          <a:lnRef idx="1">
+            <a:schemeClr val="accent1"/>
+          </a:lnRef>
+          <a:fillRef idx="3">
+            <a:schemeClr val="accent1"/>
+          </a:fillRef>
+          <a:effectRef idx="2">
+            <a:schemeClr val="accent1"/>
+          </a:effectRef>
+          <a:fontRef idx="minor">
+            <a:schemeClr val="lt1"/>
+          </a:fontRef>
+        </p:style>
+        <p:txBody>
+          <a:bodyPr rtlCol="0" anchor="ctr"/>
+          <a:lstStyle/>
+          <a:p>
+            <a:pPr algn="ctr"/>
+          </a:p>
+        </p:txBody>
+      </p:sp>
+      <p:sp>
+        <p:nvSpPr>
+          <p:cNvPr id="12" name="TextBox 11"/>
+          <p:cNvSpPr txBox="1"/>
+          <p:nvPr/>
+        </p:nvSpPr>
+        <p:spPr>
+          <a:xfrm>
+            <a:off x="8778240" y="1828800"/>
+            <a:ext cx="3017520" cy="1005840"/>
+          </a:xfrm>
+          <a:prstGeom prst="rect">
+            <a:avLst/>
+          </a:prstGeom>
+          <a:noFill/>
+        </p:spPr>
+        <p:txBody>
+          <a:bodyPr wrap="square">
+            <a:spAutoFit/>
+          </a:bodyPr>
+          <a:lstStyle/>
+          <a:p>
+            <a:pPr algn="ctr">
+              <a:defRPr sz="1200" b="0">
+                <a:solidFill>
+                  <a:srgbClr val="FFFFFF"/>
+                </a:solidFill>
+              </a:defRPr>
+            </a:pPr>
+            <a:r>
+              <a:t>园丁 — 提供土壤和栅栏</a:t>
+            </a:r>
+          </a:p>
+        </p:txBody>
+      </p:sp>
+      <p:sp>
+        <p:nvSpPr>
+          <p:cNvPr id="13" name="Rectangle 12"/>
+          <p:cNvSpPr/>
+          <p:nvPr/>
+        </p:nvSpPr>
+        <p:spPr>
+          <a:xfrm>
+            <a:off x="457200" y="2971800"/>
+            <a:ext cx="2560320" cy="1143000"/>
+          </a:xfrm>
+          <a:prstGeom prst="rect">
+            <a:avLst/>
+          </a:prstGeom>
+          <a:solidFill>
+            <a:srgbClr val="2D3748"/>
+          </a:solidFill>
+          <a:ln>
+            <a:noFill/>
+          </a:ln>
+        </p:spPr>
+        <p:style>
+          <a:lnRef idx="1">
+            <a:schemeClr val="accent1"/>
+          </a:lnRef>
+          <a:fillRef idx="3">
+            <a:schemeClr val="accent1"/>
+          </a:fillRef>
+          <a:effectRef idx="2">
+            <a:schemeClr val="accent1"/>
+          </a:effectRef>
+          <a:fontRef idx="minor">
+            <a:schemeClr val="lt1"/>
+          </a:fontRef>
+        </p:style>
+        <p:txBody>
+          <a:bodyPr rtlCol="0" anchor="ctr"/>
+          <a:lstStyle/>
+          <a:p>
+            <a:pPr algn="ctr"/>
+          </a:p>
+        </p:txBody>
+      </p:sp>
+      <p:sp>
+        <p:nvSpPr>
+          <p:cNvPr id="14" name="TextBox 13"/>
+          <p:cNvSpPr txBox="1"/>
+          <p:nvPr/>
+        </p:nvSpPr>
+        <p:spPr>
+          <a:xfrm>
+            <a:off x="548640" y="3063240"/>
+            <a:ext cx="2377440" cy="1005840"/>
+          </a:xfrm>
+          <a:prstGeom prst="rect">
+            <a:avLst/>
+          </a:prstGeom>
+          <a:noFill/>
+        </p:spPr>
+        <p:txBody>
+          <a:bodyPr wrap="square">
+            <a:spAutoFit/>
+          </a:bodyPr>
+          <a:lstStyle/>
+          <a:p>
+            <a:pPr algn="ctr">
+              <a:defRPr sz="1200" b="1">
+                <a:solidFill>
+                  <a:srgbClr val="E94560"/>
+                </a:solidFill>
+              </a:defRPr>
+            </a:pPr>
+            <a:r>
+              <a:t>逻辑来源</a:t>
+            </a:r>
+          </a:p>
+        </p:txBody>
+      </p:sp>
+      <p:sp>
+        <p:nvSpPr>
+          <p:cNvPr id="15" name="Rectangle 14"/>
+          <p:cNvSpPr/>
+          <p:nvPr/>
+        </p:nvSpPr>
+        <p:spPr>
+          <a:xfrm>
+            <a:off x="3200400" y="2971800"/>
+            <a:ext cx="5212080" cy="1143000"/>
+          </a:xfrm>
+          <a:prstGeom prst="rect">
+            <a:avLst/>
+          </a:prstGeom>
+          <a:solidFill>
+            <a:srgbClr val="2D3748"/>
+          </a:solidFill>
+          <a:ln>
+            <a:noFill/>
+          </a:ln>
+        </p:spPr>
+        <p:style>
+          <a:lnRef idx="1">
+            <a:schemeClr val="accent1"/>
+          </a:lnRef>
+          <a:fillRef idx="3">
+            <a:schemeClr val="accent1"/>
+          </a:fillRef>
+          <a:effectRef idx="2">
+            <a:schemeClr val="accent1"/>
+          </a:effectRef>
+          <a:fontRef idx="minor">
+            <a:schemeClr val="lt1"/>
+          </a:fontRef>
+        </p:style>
+        <p:txBody>
+          <a:bodyPr rtlCol="0" anchor="ctr"/>
+          <a:lstStyle/>
+          <a:p>
+            <a:pPr algn="ctr"/>
+          </a:p>
+        </p:txBody>
+      </p:sp>
+      <p:sp>
+        <p:nvSpPr>
+          <p:cNvPr id="16" name="TextBox 15"/>
+          <p:cNvSpPr txBox="1"/>
+          <p:nvPr/>
+        </p:nvSpPr>
+        <p:spPr>
+          <a:xfrm>
+            <a:off x="3291840" y="3063240"/>
+            <a:ext cx="5029200" cy="1005840"/>
+          </a:xfrm>
+          <a:prstGeom prst="rect">
+            <a:avLst/>
+          </a:prstGeom>
+          <a:noFill/>
+        </p:spPr>
+        <p:txBody>
+          <a:bodyPr wrap="square">
+            <a:spAutoFit/>
+          </a:bodyPr>
+          <a:lstStyle/>
+          <a:p>
+            <a:pPr algn="ctr">
+              <a:defRPr sz="1200" b="0">
+                <a:solidFill>
+                  <a:srgbClr val="553C9A"/>
+                </a:solidFill>
+              </a:defRPr>
+            </a:pPr>
+            <a:r>
+              <a:t>人类写 if-else</a:t>
+            </a:r>
+          </a:p>
+        </p:txBody>
+      </p:sp>
+      <p:sp>
+        <p:nvSpPr>
+          <p:cNvPr id="17" name="Rectangle 16"/>
+          <p:cNvSpPr/>
+          <p:nvPr/>
+        </p:nvSpPr>
+        <p:spPr>
+          <a:xfrm>
+            <a:off x="8686800" y="2971800"/>
+            <a:ext cx="3200400" cy="1143000"/>
+          </a:xfrm>
+          <a:prstGeom prst="rect">
+            <a:avLst/>
+          </a:prstGeom>
+          <a:solidFill>
+            <a:srgbClr val="2D3748"/>
+          </a:solidFill>
+          <a:ln>
+            <a:noFill/>
+          </a:ln>
+        </p:spPr>
+        <p:style>
+          <a:lnRef idx="1">
+            <a:schemeClr val="accent1"/>
+          </a:lnRef>
+          <a:fillRef idx="3">
+            <a:schemeClr val="accent1"/>
+          </a:fillRef>
+          <a:effectRef idx="2">
+            <a:schemeClr val="accent1"/>
+          </a:effectRef>
+          <a:fontRef idx="minor">
+            <a:schemeClr val="lt1"/>
+          </a:fontRef>
+        </p:style>
+        <p:txBody>
+          <a:bodyPr rtlCol="0" anchor="ctr"/>
+          <a:lstStyle/>
+          <a:p>
+            <a:pPr algn="ctr"/>
+          </a:p>
+        </p:txBody>
+      </p:sp>
+      <p:sp>
+        <p:nvSpPr>
+          <p:cNvPr id="18" name="TextBox 17"/>
+          <p:cNvSpPr txBox="1"/>
+          <p:nvPr/>
+        </p:nvSpPr>
+        <p:spPr>
+          <a:xfrm>
+            <a:off x="8778240" y="3063240"/>
+            <a:ext cx="3017520" cy="1005840"/>
+          </a:xfrm>
+          <a:prstGeom prst="rect">
+            <a:avLst/>
+          </a:prstGeom>
+          <a:noFill/>
+        </p:spPr>
+        <p:txBody>
+          <a:bodyPr wrap="square">
+            <a:spAutoFit/>
+          </a:bodyPr>
+          <a:lstStyle/>
+          <a:p>
+            <a:pPr algn="ctr">
+              <a:defRPr sz="1200" b="0">
+                <a:solidFill>
+                  <a:srgbClr val="FFFFFF"/>
+                </a:solidFill>
+              </a:defRPr>
+            </a:pPr>
+            <a:r>
+              <a:t>模型从海量数据中涌现</a:t>
+            </a:r>
+          </a:p>
+        </p:txBody>
+      </p:sp>
+      <p:sp>
+        <p:nvSpPr>
+          <p:cNvPr id="19" name="Rectangle 18"/>
+          <p:cNvSpPr/>
+          <p:nvPr/>
+        </p:nvSpPr>
+        <p:spPr>
+          <a:xfrm>
+            <a:off x="457200" y="4206240"/>
+            <a:ext cx="2560320" cy="1143000"/>
+          </a:xfrm>
+          <a:prstGeom prst="rect">
+            <a:avLst/>
+          </a:prstGeom>
+          <a:solidFill>
+            <a:srgbClr val="1A1A2E"/>
+          </a:solidFill>
+          <a:ln>
+            <a:noFill/>
+          </a:ln>
+        </p:spPr>
+        <p:style>
+          <a:lnRef idx="1">
+            <a:schemeClr val="accent1"/>
+          </a:lnRef>
+          <a:fillRef idx="3">
+            <a:schemeClr val="accent1"/>
+          </a:fillRef>
+          <a:effectRef idx="2">
+            <a:schemeClr val="accent1"/>
+          </a:effectRef>
+          <a:fontRef idx="minor">
+            <a:schemeClr val="lt1"/>
+          </a:fontRef>
+        </p:style>
+        <p:txBody>
+          <a:bodyPr rtlCol="0" anchor="ctr"/>
+          <a:lstStyle/>
+          <a:p>
+            <a:pPr algn="ctr"/>
+          </a:p>
+        </p:txBody>
+      </p:sp>
+      <p:sp>
+        <p:nvSpPr>
+          <p:cNvPr id="20" name="TextBox 19"/>
+          <p:cNvSpPr txBox="1"/>
+          <p:nvPr/>
+        </p:nvSpPr>
+        <p:spPr>
+          <a:xfrm>
+            <a:off x="548640" y="4297680"/>
+            <a:ext cx="2377440" cy="1005840"/>
+          </a:xfrm>
+          <a:prstGeom prst="rect">
+            <a:avLst/>
+          </a:prstGeom>
+          <a:noFill/>
+        </p:spPr>
+        <p:txBody>
+          <a:bodyPr wrap="square">
+            <a:spAutoFit/>
+          </a:bodyPr>
+          <a:lstStyle/>
+          <a:p>
+            <a:pPr algn="ctr">
+              <a:defRPr sz="1200" b="1">
+                <a:solidFill>
+                  <a:srgbClr val="E94560"/>
+                </a:solidFill>
+              </a:defRPr>
+            </a:pPr>
+            <a:r>
+              <a:t>核心特征</a:t>
+            </a:r>
+          </a:p>
+        </p:txBody>
+      </p:sp>
+      <p:sp>
+        <p:nvSpPr>
+          <p:cNvPr id="21" name="Rectangle 20"/>
+          <p:cNvSpPr/>
+          <p:nvPr/>
+        </p:nvSpPr>
+        <p:spPr>
+          <a:xfrm>
+            <a:off x="3200400" y="4206240"/>
+            <a:ext cx="5212080" cy="1143000"/>
+          </a:xfrm>
+          <a:prstGeom prst="rect">
+            <a:avLst/>
+          </a:prstGeom>
+          <a:solidFill>
+            <a:srgbClr val="1A1A2E"/>
+          </a:solidFill>
+          <a:ln>
+            <a:noFill/>
+          </a:ln>
+        </p:spPr>
+        <p:style>
+          <a:lnRef idx="1">
+            <a:schemeClr val="accent1"/>
+          </a:lnRef>
+          <a:fillRef idx="3">
+            <a:schemeClr val="accent1"/>
+          </a:fillRef>
+          <a:effectRef idx="2">
+            <a:schemeClr val="accent1"/>
+          </a:effectRef>
+          <a:fontRef idx="minor">
+            <a:schemeClr val="lt1"/>
+          </a:fontRef>
+        </p:style>
+        <p:txBody>
+          <a:bodyPr rtlCol="0" anchor="ctr"/>
+          <a:lstStyle/>
+          <a:p>
+            <a:pPr algn="ctr"/>
+          </a:p>
+        </p:txBody>
+      </p:sp>
+      <p:sp>
+        <p:nvSpPr>
+          <p:cNvPr id="22" name="TextBox 21"/>
+          <p:cNvSpPr txBox="1"/>
+          <p:nvPr/>
+        </p:nvSpPr>
+        <p:spPr>
+          <a:xfrm>
+            <a:off x="3291840" y="4297680"/>
+            <a:ext cx="5029200" cy="1005840"/>
+          </a:xfrm>
+          <a:prstGeom prst="rect">
+            <a:avLst/>
+          </a:prstGeom>
+          <a:noFill/>
+        </p:spPr>
+        <p:txBody>
+          <a:bodyPr wrap="square">
+            <a:spAutoFit/>
+          </a:bodyPr>
+          <a:lstStyle/>
+          <a:p>
+            <a:pPr algn="ctr">
+              <a:defRPr sz="1200" b="0">
+                <a:solidFill>
+                  <a:srgbClr val="553C9A"/>
+                </a:solidFill>
+              </a:defRPr>
+            </a:pPr>
+            <a:r>
+              <a:t>确定性</a:t>
+            </a:r>
+          </a:p>
+        </p:txBody>
+      </p:sp>
+      <p:sp>
+        <p:nvSpPr>
+          <p:cNvPr id="23" name="Rectangle 22"/>
+          <p:cNvSpPr/>
+          <p:nvPr/>
+        </p:nvSpPr>
+        <p:spPr>
+          <a:xfrm>
+            <a:off x="8686800" y="4206240"/>
+            <a:ext cx="3200400" cy="1143000"/>
+          </a:xfrm>
+          <a:prstGeom prst="rect">
+            <a:avLst/>
+          </a:prstGeom>
+          <a:solidFill>
+            <a:srgbClr val="1A1A2E"/>
+          </a:solidFill>
+          <a:ln>
+            <a:noFill/>
+          </a:ln>
+        </p:spPr>
+        <p:style>
+          <a:lnRef idx="1">
+            <a:schemeClr val="accent1"/>
+          </a:lnRef>
+          <a:fillRef idx="3">
+            <a:schemeClr val="accent1"/>
+          </a:fillRef>
+          <a:effectRef idx="2">
+            <a:schemeClr val="accent1"/>
+          </a:effectRef>
+          <a:fontRef idx="minor">
+            <a:schemeClr val="lt1"/>
+          </a:fontRef>
+        </p:style>
+        <p:txBody>
+          <a:bodyPr rtlCol="0" anchor="ctr"/>
+          <a:lstStyle/>
+          <a:p>
+            <a:pPr algn="ctr"/>
+          </a:p>
+        </p:txBody>
+      </p:sp>
+      <p:sp>
+        <p:nvSpPr>
+          <p:cNvPr id="24" name="TextBox 23"/>
+          <p:cNvSpPr txBox="1"/>
+          <p:nvPr/>
+        </p:nvSpPr>
+        <p:spPr>
+          <a:xfrm>
+            <a:off x="8778240" y="4297680"/>
+            <a:ext cx="3017520" cy="1005840"/>
+          </a:xfrm>
+          <a:prstGeom prst="rect">
+            <a:avLst/>
+          </a:prstGeom>
+          <a:noFill/>
+        </p:spPr>
+        <p:txBody>
+          <a:bodyPr wrap="square">
+            <a:spAutoFit/>
+          </a:bodyPr>
+          <a:lstStyle/>
+          <a:p>
+            <a:pPr algn="ctr">
+              <a:defRPr sz="1200" b="0">
+                <a:solidFill>
+                  <a:srgbClr val="FFFFFF"/>
+                </a:solidFill>
+              </a:defRPr>
+            </a:pPr>
+            <a:r>
+              <a:t>概率性</a:t>
+            </a:r>
+          </a:p>
+        </p:txBody>
+      </p:sp>
+      <p:sp>
+        <p:nvSpPr>
+          <p:cNvPr id="25" name="Rectangle 24"/>
+          <p:cNvSpPr/>
+          <p:nvPr/>
+        </p:nvSpPr>
+        <p:spPr>
+          <a:xfrm>
+            <a:off x="457200" y="5440680"/>
+            <a:ext cx="2560320" cy="1143000"/>
+          </a:xfrm>
+          <a:prstGeom prst="rect">
+            <a:avLst/>
+          </a:prstGeom>
+          <a:solidFill>
+            <a:srgbClr val="2D3748"/>
+          </a:solidFill>
+          <a:ln>
+            <a:noFill/>
+          </a:ln>
+        </p:spPr>
+        <p:style>
+          <a:lnRef idx="1">
+            <a:schemeClr val="accent1"/>
+          </a:lnRef>
+          <a:fillRef idx="3">
+            <a:schemeClr val="accent1"/>
+          </a:fillRef>
+          <a:effectRef idx="2">
+            <a:schemeClr val="accent1"/>
+          </a:effectRef>
+          <a:fontRef idx="minor">
+            <a:schemeClr val="lt1"/>
+          </a:fontRef>
+        </p:style>
+        <p:txBody>
+          <a:bodyPr rtlCol="0" anchor="ctr"/>
+          <a:lstStyle/>
+          <a:p>
+            <a:pPr algn="ctr"/>
+          </a:p>
+        </p:txBody>
+      </p:sp>
+      <p:sp>
+        <p:nvSpPr>
+          <p:cNvPr id="26" name="TextBox 25"/>
+          <p:cNvSpPr txBox="1"/>
+          <p:nvPr/>
+        </p:nvSpPr>
+        <p:spPr>
+          <a:xfrm>
+            <a:off x="548640" y="5532120"/>
+            <a:ext cx="2377440" cy="1005840"/>
+          </a:xfrm>
+          <a:prstGeom prst="rect">
+            <a:avLst/>
+          </a:prstGeom>
+          <a:noFill/>
+        </p:spPr>
+        <p:txBody>
+          <a:bodyPr wrap="square">
+            <a:spAutoFit/>
+          </a:bodyPr>
+          <a:lstStyle/>
+          <a:p>
+            <a:pPr algn="ctr">
+              <a:defRPr sz="1200" b="1">
+                <a:solidFill>
+                  <a:srgbClr val="E94560"/>
+                </a:solidFill>
+              </a:defRPr>
+            </a:pPr>
+            <a:r>
+              <a:t>系统稳定性</a:t>
+            </a:r>
+          </a:p>
+        </p:txBody>
+      </p:sp>
+      <p:sp>
+        <p:nvSpPr>
+          <p:cNvPr id="27" name="Rectangle 26"/>
+          <p:cNvSpPr/>
+          <p:nvPr/>
+        </p:nvSpPr>
+        <p:spPr>
+          <a:xfrm>
+            <a:off x="3200400" y="5440680"/>
+            <a:ext cx="5212080" cy="1143000"/>
+          </a:xfrm>
+          <a:prstGeom prst="rect">
+            <a:avLst/>
+          </a:prstGeom>
+          <a:solidFill>
+            <a:srgbClr val="2D3748"/>
+          </a:solidFill>
+          <a:ln>
+            <a:noFill/>
+          </a:ln>
+        </p:spPr>
+        <p:style>
+          <a:lnRef idx="1">
+            <a:schemeClr val="accent1"/>
+          </a:lnRef>
+          <a:fillRef idx="3">
+            <a:schemeClr val="accent1"/>
+          </a:fillRef>
+          <a:effectRef idx="2">
+            <a:schemeClr val="accent1"/>
+          </a:effectRef>
+          <a:fontRef idx="minor">
+            <a:schemeClr val="lt1"/>
+          </a:fontRef>
+        </p:style>
+        <p:txBody>
+          <a:bodyPr rtlCol="0" anchor="ctr"/>
+          <a:lstStyle/>
+          <a:p>
+            <a:pPr algn="ctr"/>
+          </a:p>
+        </p:txBody>
+      </p:sp>
+      <p:sp>
+        <p:nvSpPr>
+          <p:cNvPr id="28" name="TextBox 27"/>
+          <p:cNvSpPr txBox="1"/>
+          <p:nvPr/>
+        </p:nvSpPr>
+        <p:spPr>
+          <a:xfrm>
+            <a:off x="3291840" y="5532120"/>
+            <a:ext cx="5029200" cy="1005840"/>
+          </a:xfrm>
+          <a:prstGeom prst="rect">
+            <a:avLst/>
+          </a:prstGeom>
+          <a:noFill/>
+        </p:spPr>
+        <p:txBody>
+          <a:bodyPr wrap="square">
+            <a:spAutoFit/>
+          </a:bodyPr>
+          <a:lstStyle/>
+          <a:p>
+            <a:pPr algn="ctr">
+              <a:defRPr sz="1200" b="0">
+                <a:solidFill>
+                  <a:srgbClr val="553C9A"/>
+                </a:solidFill>
+              </a:defRPr>
+            </a:pPr>
+            <a:r>
+              <a:t>来自精密控制</a:t>
+            </a:r>
+          </a:p>
+        </p:txBody>
+      </p:sp>
+      <p:sp>
+        <p:nvSpPr>
+          <p:cNvPr id="29" name="Rectangle 28"/>
+          <p:cNvSpPr/>
+          <p:nvPr/>
+        </p:nvSpPr>
+        <p:spPr>
+          <a:xfrm>
+            <a:off x="8686800" y="5440680"/>
+            <a:ext cx="3200400" cy="1143000"/>
+          </a:xfrm>
+          <a:prstGeom prst="rect">
+            <a:avLst/>
+          </a:prstGeom>
+          <a:solidFill>
+            <a:srgbClr val="2D3748"/>
+          </a:solidFill>
+          <a:ln>
+            <a:noFill/>
+          </a:ln>
+        </p:spPr>
+        <p:style>
+          <a:lnRef idx="1">
+            <a:schemeClr val="accent1"/>
+          </a:lnRef>
+          <a:fillRef idx="3">
+            <a:schemeClr val="accent1"/>
+          </a:fillRef>
+          <a:effectRef idx="2">
+            <a:schemeClr val="accent1"/>
+          </a:effectRef>
+          <a:fontRef idx="minor">
+            <a:schemeClr val="lt1"/>
+          </a:fontRef>
+        </p:style>
+        <p:txBody>
+          <a:bodyPr rtlCol="0" anchor="ctr"/>
+          <a:lstStyle/>
+          <a:p>
+            <a:pPr algn="ctr"/>
+          </a:p>
+        </p:txBody>
+      </p:sp>
+      <p:sp>
+        <p:nvSpPr>
+          <p:cNvPr id="30" name="TextBox 29"/>
+          <p:cNvSpPr txBox="1"/>
+          <p:nvPr/>
+        </p:nvSpPr>
+        <p:spPr>
+          <a:xfrm>
+            <a:off x="8778240" y="5532120"/>
+            <a:ext cx="3017520" cy="1005840"/>
+          </a:xfrm>
+          <a:prstGeom prst="rect">
+            <a:avLst/>
+          </a:prstGeom>
+          <a:noFill/>
+        </p:spPr>
+        <p:txBody>
+          <a:bodyPr wrap="square">
+            <a:spAutoFit/>
+          </a:bodyPr>
+          <a:lstStyle/>
+          <a:p>
+            <a:pPr algn="ctr">
+              <a:defRPr sz="1200" b="0">
+                <a:solidFill>
+                  <a:srgbClr val="FFFFFF"/>
+                </a:solidFill>
+              </a:defRPr>
+            </a:pPr>
+            <a:r>
+              <a:t>来自自适应</a:t>
             </a:r>
           </a:p>
         </p:txBody>
@@ -6279,13 +7032,13 @@
         <p:spPr>
           <a:xfrm>
             <a:off x="0" y="0"/>
-            <a:ext cx="12188952" cy="137160"/>
+            <a:ext cx="12188952" cy="1097280"/>
           </a:xfrm>
           <a:prstGeom prst="rect">
             <a:avLst/>
           </a:prstGeom>
           <a:solidFill>
-            <a:srgbClr val="1A1A2E"/>
+            <a:srgbClr val="E94560"/>
           </a:solidFill>
           <a:ln>
             <a:noFill/>
@@ -6321,7 +7074,42 @@
         </p:nvSpPr>
         <p:spPr>
           <a:xfrm>
-            <a:off x="457200" y="2011680"/>
+            <a:off x="457200" y="228600"/>
+            <a:ext cx="11274552" cy="822960"/>
+          </a:xfrm>
+          <a:prstGeom prst="rect">
+            <a:avLst/>
+          </a:prstGeom>
+          <a:noFill/>
+        </p:spPr>
+        <p:txBody>
+          <a:bodyPr wrap="none">
+            <a:spAutoFit/>
+          </a:bodyPr>
+          <a:lstStyle/>
+          <a:p>
+            <a:pPr>
+              <a:defRPr sz="2400" b="1">
+                <a:solidFill>
+                  <a:srgbClr val="FFFFFF"/>
+                </a:solidFill>
+              </a:defRPr>
+            </a:pPr>
+            <a:r>
+              <a:t>当代码本身变成数据：DevOps 的假设倒塌了</a:t>
+            </a:r>
+          </a:p>
+        </p:txBody>
+      </p:sp>
+      <p:sp>
+        <p:nvSpPr>
+          <p:cNvPr id="5" name="TextBox 4"/>
+          <p:cNvSpPr txBox="1"/>
+          <p:nvPr/>
+        </p:nvSpPr>
+        <p:spPr>
+          <a:xfrm>
+            <a:off x="457200" y="1645920"/>
             <a:ext cx="11274552" cy="2286000"/>
           </a:xfrm>
           <a:prstGeom prst="rect">
@@ -6336,14 +7124,75 @@
           <a:lstStyle/>
           <a:p>
             <a:pPr algn="ctr">
-              <a:defRPr sz="2600" i="1">
+              <a:defRPr sz="2000" i="0">
                 <a:solidFill>
                   <a:srgbClr val="1A1A2E"/>
                 </a:solidFill>
               </a:defRPr>
             </a:pPr>
             <a:r>
-              <a:t>"从 GoF 的 23 个设计模式到 Agent 的无限可能，我们跨越了软件工程的一个世纪：设计模式并未消亡，而是在进化；软件工程未曾终结，而是在重生；人类的角色没有消失，而是在升华。"</a:t>
+              <a:t>当代码本身演变为数据（模型权重），</a:t>
+            </a:r>
+            <a:br/>
+            <a:r>
+              <a:t>DevOps 的核心假设便轰然倒塌 — 你无法再用传统的服务器指标来定义正常运行，</a:t>
+            </a:r>
+            <a:br/>
+            <a:r>
+              <a:t>因为系统的行为不再由代码决定，而由权重决定。</a:t>
+            </a:r>
+          </a:p>
+        </p:txBody>
+      </p:sp>
+      <p:sp>
+        <p:nvSpPr>
+          <p:cNvPr id="6" name="TextBox 5"/>
+          <p:cNvSpPr txBox="1"/>
+          <p:nvPr/>
+        </p:nvSpPr>
+        <p:spPr>
+          <a:xfrm>
+            <a:off x="640080" y="4389120"/>
+            <a:ext cx="10972800" cy="5029200"/>
+          </a:xfrm>
+          <a:prstGeom prst="rect">
+            <a:avLst/>
+          </a:prstGeom>
+          <a:noFill/>
+        </p:spPr>
+        <p:txBody>
+          <a:bodyPr wrap="square">
+            <a:spAutoFit/>
+          </a:bodyPr>
+          <a:lstStyle/>
+          <a:p>
+            <a:pPr>
+              <a:spcAft>
+                <a:spcPts val="1400"/>
+              </a:spcAft>
+              <a:defRPr sz="2000" b="1">
+                <a:solidFill>
+                  <a:srgbClr val="553C9A"/>
+                </a:solidFill>
+              </a:defRPr>
+            </a:pPr>
+            <a:r>
+              <a:t>• MLOps（Machine Learning Operations）：借鉴 DevOps 思路，为机器学习系统建立从实验到生产的标准化流水线</a:t>
+            </a:r>
+          </a:p>
+          <a:p>
+            <a:pPr>
+              <a:spcAft>
+                <a:spcPts val="1400"/>
+              </a:spcAft>
+              <a:defRPr sz="2000" b="0">
+                <a:solidFill>
+                  <a:srgbClr val="1A1A2E"/>
+                </a:solidFill>
+              </a:defRPr>
+            </a:pPr>
+            <a:r>
+              <a:t>• MLOps 为 AgentOps 铺平了道路</a:t>
             </a:r>
           </a:p>
         </p:txBody>
@@ -6381,6 +7230,49 @@
             <a:avLst/>
           </a:prstGeom>
           <a:solidFill>
+            <a:srgbClr val="FFFFFF"/>
+          </a:solidFill>
+          <a:ln>
+            <a:noFill/>
+          </a:ln>
+        </p:spPr>
+        <p:style>
+          <a:lnRef idx="1">
+            <a:schemeClr val="accent1"/>
+          </a:lnRef>
+          <a:fillRef idx="3">
+            <a:schemeClr val="accent1"/>
+          </a:fillRef>
+          <a:effectRef idx="2">
+            <a:schemeClr val="accent1"/>
+          </a:effectRef>
+          <a:fontRef idx="minor">
+            <a:schemeClr val="lt1"/>
+          </a:fontRef>
+        </p:style>
+        <p:txBody>
+          <a:bodyPr rtlCol="0" anchor="ctr"/>
+          <a:lstStyle/>
+          <a:p>
+            <a:pPr algn="ctr"/>
+          </a:p>
+        </p:txBody>
+      </p:sp>
+      <p:sp>
+        <p:nvSpPr>
+          <p:cNvPr id="3" name="Rectangle 2"/>
+          <p:cNvSpPr/>
+          <p:nvPr/>
+        </p:nvSpPr>
+        <p:spPr>
+          <a:xfrm>
+            <a:off x="0" y="0"/>
+            <a:ext cx="12188952" cy="1097280"/>
+          </a:xfrm>
+          <a:prstGeom prst="rect">
+            <a:avLst/>
+          </a:prstGeom>
+          <a:solidFill>
             <a:srgbClr val="553C9A"/>
           </a:solidFill>
           <a:ln>
@@ -6411,14 +7303,127 @@
       </p:sp>
       <p:sp>
         <p:nvSpPr>
-          <p:cNvPr id="3" name="TextBox 2"/>
+          <p:cNvPr id="4" name="TextBox 3"/>
           <p:cNvSpPr txBox="1"/>
           <p:nvPr/>
         </p:nvSpPr>
         <p:spPr>
           <a:xfrm>
-            <a:off x="457200" y="2743200"/>
-            <a:ext cx="11274552" cy="2286000"/>
+            <a:off x="457200" y="228600"/>
+            <a:ext cx="11274552" cy="822960"/>
+          </a:xfrm>
+          <a:prstGeom prst="rect">
+            <a:avLst/>
+          </a:prstGeom>
+          <a:noFill/>
+        </p:spPr>
+        <p:txBody>
+          <a:bodyPr wrap="none">
+            <a:spAutoFit/>
+          </a:bodyPr>
+          <a:lstStyle/>
+          <a:p>
+            <a:pPr>
+              <a:defRPr sz="3200" b="1">
+                <a:solidFill>
+                  <a:srgbClr val="FFFFFF"/>
+                </a:solidFill>
+              </a:defRPr>
+            </a:pPr>
+            <a:r>
+              <a:t>范式迁移全景：三条技术路线共同为 Agent 奠定基石</a:t>
+            </a:r>
+          </a:p>
+        </p:txBody>
+      </p:sp>
+      <p:sp>
+        <p:nvSpPr>
+          <p:cNvPr id="5" name="Rounded Rectangle 4"/>
+          <p:cNvSpPr/>
+          <p:nvPr/>
+        </p:nvSpPr>
+        <p:spPr>
+          <a:xfrm>
+            <a:off x="640080" y="1463040"/>
+            <a:ext cx="3453383" cy="1417320"/>
+          </a:xfrm>
+          <a:prstGeom prst="roundRect">
+            <a:avLst/>
+          </a:prstGeom>
+          <a:solidFill>
+            <a:srgbClr val="1A1A2E"/>
+          </a:solidFill>
+          <a:ln>
+            <a:noFill/>
+          </a:ln>
+        </p:spPr>
+        <p:style>
+          <a:lnRef idx="1">
+            <a:schemeClr val="accent1"/>
+          </a:lnRef>
+          <a:fillRef idx="3">
+            <a:schemeClr val="accent1"/>
+          </a:fillRef>
+          <a:effectRef idx="2">
+            <a:schemeClr val="accent1"/>
+          </a:effectRef>
+          <a:fontRef idx="minor">
+            <a:schemeClr val="lt1"/>
+          </a:fontRef>
+        </p:style>
+        <p:txBody>
+          <a:bodyPr rtlCol="0" anchor="ctr"/>
+          <a:lstStyle/>
+          <a:p>
+            <a:pPr algn="ctr"/>
+          </a:p>
+        </p:txBody>
+      </p:sp>
+      <p:sp>
+        <p:nvSpPr>
+          <p:cNvPr id="6" name="TextBox 5"/>
+          <p:cNvSpPr txBox="1"/>
+          <p:nvPr/>
+        </p:nvSpPr>
+        <p:spPr>
+          <a:xfrm>
+            <a:off x="640080" y="1536192"/>
+            <a:ext cx="3361944" cy="457200"/>
+          </a:xfrm>
+          <a:prstGeom prst="rect">
+            <a:avLst/>
+          </a:prstGeom>
+          <a:noFill/>
+        </p:spPr>
+        <p:txBody>
+          <a:bodyPr wrap="none">
+            <a:spAutoFit/>
+          </a:bodyPr>
+          <a:lstStyle/>
+          <a:p>
+            <a:pPr>
+              <a:defRPr sz="1400" b="1">
+                <a:solidFill>
+                  <a:srgbClr val="553C9A"/>
+                </a:solidFill>
+              </a:defRPr>
+            </a:pPr>
+            <a:r>
+              <a:t>函数与流</a:t>
+            </a:r>
+          </a:p>
+        </p:txBody>
+      </p:sp>
+      <p:sp>
+        <p:nvSpPr>
+          <p:cNvPr id="7" name="TextBox 6"/>
+          <p:cNvSpPr txBox="1"/>
+          <p:nvPr/>
+        </p:nvSpPr>
+        <p:spPr>
+          <a:xfrm>
+            <a:off x="640080" y="1938528"/>
+            <a:ext cx="3361944" cy="960119"/>
           </a:xfrm>
           <a:prstGeom prst="rect">
             <a:avLst/>
@@ -6431,15 +7436,265 @@
           </a:bodyPr>
           <a:lstStyle/>
           <a:p>
-            <a:pPr algn="ctr">
-              <a:defRPr sz="5000" i="0">
-                <a:solidFill>
-                  <a:srgbClr val="FFFFFF"/>
-                </a:solidFill>
-              </a:defRPr>
-            </a:pPr>
-            <a:r>
-              <a:t>🔮  下篇：六大类 21 个核心设计模式</a:t>
+            <a:pPr>
+              <a:defRPr sz="1100">
+                <a:solidFill>
+                  <a:srgbClr val="A0AEC0"/>
+                </a:solidFill>
+              </a:defRPr>
+            </a:pPr>
+            <a:r>
+              <a:t>使软件契合 AI 的思考节奏</a:t>
+            </a:r>
+            <a:br/>
+            <a:r>
+              <a:t>LLM = 无状态纯函数</a:t>
+            </a:r>
+            <a:br/>
+            <a:r>
+              <a:t>管道处理与 Agent 数据流天然吻合</a:t>
+            </a:r>
+          </a:p>
+        </p:txBody>
+      </p:sp>
+      <p:sp>
+        <p:nvSpPr>
+          <p:cNvPr id="8" name="Rounded Rectangle 7"/>
+          <p:cNvSpPr/>
+          <p:nvPr/>
+        </p:nvSpPr>
+        <p:spPr>
+          <a:xfrm>
+            <a:off x="4276344" y="1463040"/>
+            <a:ext cx="3453383" cy="1417320"/>
+          </a:xfrm>
+          <a:prstGeom prst="roundRect">
+            <a:avLst/>
+          </a:prstGeom>
+          <a:solidFill>
+            <a:srgbClr val="1A1A2E"/>
+          </a:solidFill>
+          <a:ln>
+            <a:noFill/>
+          </a:ln>
+        </p:spPr>
+        <p:style>
+          <a:lnRef idx="1">
+            <a:schemeClr val="accent1"/>
+          </a:lnRef>
+          <a:fillRef idx="3">
+            <a:schemeClr val="accent1"/>
+          </a:fillRef>
+          <a:effectRef idx="2">
+            <a:schemeClr val="accent1"/>
+          </a:effectRef>
+          <a:fontRef idx="minor">
+            <a:schemeClr val="lt1"/>
+          </a:fontRef>
+        </p:style>
+        <p:txBody>
+          <a:bodyPr rtlCol="0" anchor="ctr"/>
+          <a:lstStyle/>
+          <a:p>
+            <a:pPr algn="ctr"/>
+          </a:p>
+        </p:txBody>
+      </p:sp>
+      <p:sp>
+        <p:nvSpPr>
+          <p:cNvPr id="9" name="TextBox 8"/>
+          <p:cNvSpPr txBox="1"/>
+          <p:nvPr/>
+        </p:nvSpPr>
+        <p:spPr>
+          <a:xfrm>
+            <a:off x="4276344" y="1536192"/>
+            <a:ext cx="3361944" cy="457200"/>
+          </a:xfrm>
+          <a:prstGeom prst="rect">
+            <a:avLst/>
+          </a:prstGeom>
+          <a:noFill/>
+        </p:spPr>
+        <p:txBody>
+          <a:bodyPr wrap="none">
+            <a:spAutoFit/>
+          </a:bodyPr>
+          <a:lstStyle/>
+          <a:p>
+            <a:pPr>
+              <a:defRPr sz="1400" b="1">
+                <a:solidFill>
+                  <a:srgbClr val="553C9A"/>
+                </a:solidFill>
+              </a:defRPr>
+            </a:pPr>
+            <a:r>
+              <a:t>分布式 + Serverless</a:t>
+            </a:r>
+          </a:p>
+        </p:txBody>
+      </p:sp>
+      <p:sp>
+        <p:nvSpPr>
+          <p:cNvPr id="10" name="TextBox 9"/>
+          <p:cNvSpPr txBox="1"/>
+          <p:nvPr/>
+        </p:nvSpPr>
+        <p:spPr>
+          <a:xfrm>
+            <a:off x="4276344" y="1938528"/>
+            <a:ext cx="3361944" cy="960119"/>
+          </a:xfrm>
+          <a:prstGeom prst="rect">
+            <a:avLst/>
+          </a:prstGeom>
+          <a:noFill/>
+        </p:spPr>
+        <p:txBody>
+          <a:bodyPr wrap="square">
+            <a:spAutoFit/>
+          </a:bodyPr>
+          <a:lstStyle/>
+          <a:p>
+            <a:pPr>
+              <a:defRPr sz="1100">
+                <a:solidFill>
+                  <a:srgbClr val="A0AEC0"/>
+                </a:solidFill>
+              </a:defRPr>
+            </a:pPr>
+            <a:r>
+              <a:t>为 Agent 提供无限延展的手脚</a:t>
+            </a:r>
+            <a:br/>
+            <a:r>
+              <a:t>微服务 API = 工具箱</a:t>
+            </a:r>
+            <a:br/>
+            <a:r>
+              <a:t>Serverless = 沉睡的技能</a:t>
+            </a:r>
+          </a:p>
+        </p:txBody>
+      </p:sp>
+      <p:sp>
+        <p:nvSpPr>
+          <p:cNvPr id="11" name="Rounded Rectangle 10"/>
+          <p:cNvSpPr/>
+          <p:nvPr/>
+        </p:nvSpPr>
+        <p:spPr>
+          <a:xfrm>
+            <a:off x="7912607" y="1463040"/>
+            <a:ext cx="3453383" cy="1417320"/>
+          </a:xfrm>
+          <a:prstGeom prst="roundRect">
+            <a:avLst/>
+          </a:prstGeom>
+          <a:solidFill>
+            <a:srgbClr val="1A1A2E"/>
+          </a:solidFill>
+          <a:ln>
+            <a:noFill/>
+          </a:ln>
+        </p:spPr>
+        <p:style>
+          <a:lnRef idx="1">
+            <a:schemeClr val="accent1"/>
+          </a:lnRef>
+          <a:fillRef idx="3">
+            <a:schemeClr val="accent1"/>
+          </a:fillRef>
+          <a:effectRef idx="2">
+            <a:schemeClr val="accent1"/>
+          </a:effectRef>
+          <a:fontRef idx="minor">
+            <a:schemeClr val="lt1"/>
+          </a:fontRef>
+        </p:style>
+        <p:txBody>
+          <a:bodyPr rtlCol="0" anchor="ctr"/>
+          <a:lstStyle/>
+          <a:p>
+            <a:pPr algn="ctr"/>
+          </a:p>
+        </p:txBody>
+      </p:sp>
+      <p:sp>
+        <p:nvSpPr>
+          <p:cNvPr id="12" name="TextBox 11"/>
+          <p:cNvSpPr txBox="1"/>
+          <p:nvPr/>
+        </p:nvSpPr>
+        <p:spPr>
+          <a:xfrm>
+            <a:off x="7912607" y="1536192"/>
+            <a:ext cx="3361944" cy="457200"/>
+          </a:xfrm>
+          <a:prstGeom prst="rect">
+            <a:avLst/>
+          </a:prstGeom>
+          <a:noFill/>
+        </p:spPr>
+        <p:txBody>
+          <a:bodyPr wrap="none">
+            <a:spAutoFit/>
+          </a:bodyPr>
+          <a:lstStyle/>
+          <a:p>
+            <a:pPr>
+              <a:defRPr sz="1400" b="1">
+                <a:solidFill>
+                  <a:srgbClr val="553C9A"/>
+                </a:solidFill>
+              </a:defRPr>
+            </a:pPr>
+            <a:r>
+              <a:t>软件 2.0</a:t>
+            </a:r>
+          </a:p>
+        </p:txBody>
+      </p:sp>
+      <p:sp>
+        <p:nvSpPr>
+          <p:cNvPr id="13" name="TextBox 12"/>
+          <p:cNvSpPr txBox="1"/>
+          <p:nvPr/>
+        </p:nvSpPr>
+        <p:spPr>
+          <a:xfrm>
+            <a:off x="7912607" y="1938528"/>
+            <a:ext cx="3361944" cy="960119"/>
+          </a:xfrm>
+          <a:prstGeom prst="rect">
+            <a:avLst/>
+          </a:prstGeom>
+          <a:noFill/>
+        </p:spPr>
+        <p:txBody>
+          <a:bodyPr wrap="square">
+            <a:spAutoFit/>
+          </a:bodyPr>
+          <a:lstStyle/>
+          <a:p>
+            <a:pPr>
+              <a:defRPr sz="1100">
+                <a:solidFill>
+                  <a:srgbClr val="A0AEC0"/>
+                </a:solidFill>
+              </a:defRPr>
+            </a:pPr>
+            <a:r>
+              <a:t>在不确定性中建立对确定性的信心</a:t>
+            </a:r>
+            <a:br/>
+            <a:r>
+              <a:t>从消除不确定到利用不确定</a:t>
+            </a:r>
+            <a:br/>
+            <a:r>
+              <a:t>园丁思维取代建筑师思维</a:t>
             </a:r>
           </a:p>
         </p:txBody>
@@ -6680,7 +7935,7 @@
         <p:spPr>
           <a:xfrm>
             <a:off x="0" y="0"/>
-            <a:ext cx="12188952" cy="1097280"/>
+            <a:ext cx="12188952" cy="137160"/>
           </a:xfrm>
           <a:prstGeom prst="rect">
             <a:avLst/>
@@ -6722,86 +7977,8 @@
         </p:nvSpPr>
         <p:spPr>
           <a:xfrm>
-            <a:off x="457200" y="228600"/>
-            <a:ext cx="11274552" cy="822960"/>
-          </a:xfrm>
-          <a:prstGeom prst="rect">
-            <a:avLst/>
-          </a:prstGeom>
-          <a:noFill/>
-        </p:spPr>
-        <p:txBody>
-          <a:bodyPr wrap="none">
-            <a:spAutoFit/>
-          </a:bodyPr>
-          <a:lstStyle/>
-          <a:p>
-            <a:pPr>
-              <a:defRPr sz="3200" b="1">
-                <a:solidFill>
-                  <a:srgbClr val="FFFFFF"/>
-                </a:solidFill>
-              </a:defRPr>
-            </a:pPr>
-            <a:r>
-              <a:t>完整 Agent = 感知 + 记忆 + 推理 + 行动 + 反思 + 协作</a:t>
-            </a:r>
-          </a:p>
-        </p:txBody>
-      </p:sp>
-      <p:sp>
-        <p:nvSpPr>
-          <p:cNvPr id="5" name="Rounded Rectangle 4"/>
-          <p:cNvSpPr/>
-          <p:nvPr/>
-        </p:nvSpPr>
-        <p:spPr>
-          <a:xfrm>
-            <a:off x="731520" y="1371600"/>
-            <a:ext cx="1650492" cy="4754880"/>
-          </a:xfrm>
-          <a:prstGeom prst="roundRect">
-            <a:avLst/>
-          </a:prstGeom>
-          <a:solidFill>
-            <a:srgbClr val="1A1A2E"/>
-          </a:solidFill>
-          <a:ln>
-            <a:noFill/>
-          </a:ln>
-        </p:spPr>
-        <p:style>
-          <a:lnRef idx="1">
-            <a:schemeClr val="accent1"/>
-          </a:lnRef>
-          <a:fillRef idx="3">
-            <a:schemeClr val="accent1"/>
-          </a:fillRef>
-          <a:effectRef idx="2">
-            <a:schemeClr val="accent1"/>
-          </a:effectRef>
-          <a:fontRef idx="minor">
-            <a:schemeClr val="lt1"/>
-          </a:fontRef>
-        </p:style>
-        <p:txBody>
-          <a:bodyPr rtlCol="0" anchor="ctr"/>
-          <a:lstStyle/>
-          <a:p>
-            <a:pPr algn="ctr"/>
-          </a:p>
-        </p:txBody>
-      </p:sp>
-      <p:sp>
-        <p:nvSpPr>
-          <p:cNvPr id="6" name="TextBox 5"/>
-          <p:cNvSpPr txBox="1"/>
-          <p:nvPr/>
-        </p:nvSpPr>
-        <p:spPr>
-          <a:xfrm>
-            <a:off x="731520" y="1463040"/>
-            <a:ext cx="1604772" cy="822960"/>
+            <a:off x="457200" y="365760"/>
+            <a:ext cx="11274552" cy="2286000"/>
           </a:xfrm>
           <a:prstGeom prst="rect">
             <a:avLst/>
@@ -6814,783 +7991,15 @@
           </a:bodyPr>
           <a:lstStyle/>
           <a:p>
-            <a:pPr>
-              <a:defRPr sz="1400" b="1">
-                <a:solidFill>
-                  <a:srgbClr val="553C9A"/>
-                </a:solidFill>
-              </a:defRPr>
-            </a:pPr>
-            <a:r>
-              <a:t>👁️ 感知</a:t>
-            </a:r>
-            <a:br/>
-            <a:r>
-              <a:t>看世界</a:t>
-            </a:r>
-          </a:p>
-        </p:txBody>
-      </p:sp>
-      <p:sp>
-        <p:nvSpPr>
-          <p:cNvPr id="7" name="TextBox 6"/>
-          <p:cNvSpPr txBox="1"/>
-          <p:nvPr/>
-        </p:nvSpPr>
-        <p:spPr>
-          <a:xfrm>
-            <a:off x="731520" y="2377440"/>
-            <a:ext cx="1604772" cy="3657600"/>
-          </a:xfrm>
-          <a:prstGeom prst="rect">
-            <a:avLst/>
-          </a:prstGeom>
-          <a:noFill/>
-        </p:spPr>
-        <p:txBody>
-          <a:bodyPr wrap="square">
-            <a:spAutoFit/>
-          </a:bodyPr>
-          <a:lstStyle/>
-          <a:p>
             <a:pPr algn="ctr">
-              <a:defRPr sz="1200">
-                <a:solidFill>
-                  <a:srgbClr val="A0AEC0"/>
-                </a:solidFill>
-              </a:defRPr>
-            </a:pPr>
-            <a:r>
-              <a:t>注意力聚焦</a:t>
-            </a:r>
-          </a:p>
-          <a:p>
-            <a:pPr algn="ctr">
-              <a:defRPr sz="1200">
-                <a:solidFill>
-                  <a:srgbClr val="A0AEC0"/>
-                </a:solidFill>
-              </a:defRPr>
-            </a:pPr>
-            <a:r>
-              <a:t>多模态融合</a:t>
-            </a:r>
-          </a:p>
-          <a:p>
-            <a:pPr algn="ctr">
-              <a:defRPr sz="1200">
-                <a:solidFill>
-                  <a:srgbClr val="A0AEC0"/>
-                </a:solidFill>
-              </a:defRPr>
-            </a:pPr>
-            <a:r>
-              <a:t>主动感知</a:t>
-            </a:r>
-          </a:p>
-        </p:txBody>
-      </p:sp>
-      <p:sp>
-        <p:nvSpPr>
-          <p:cNvPr id="8" name="Rounded Rectangle 7"/>
-          <p:cNvSpPr/>
-          <p:nvPr/>
-        </p:nvSpPr>
-        <p:spPr>
-          <a:xfrm>
-            <a:off x="2519172" y="1371600"/>
-            <a:ext cx="1650492" cy="4754880"/>
-          </a:xfrm>
-          <a:prstGeom prst="roundRect">
-            <a:avLst/>
-          </a:prstGeom>
-          <a:solidFill>
-            <a:srgbClr val="1A1A2E"/>
-          </a:solidFill>
-          <a:ln>
-            <a:noFill/>
-          </a:ln>
-        </p:spPr>
-        <p:style>
-          <a:lnRef idx="1">
-            <a:schemeClr val="accent1"/>
-          </a:lnRef>
-          <a:fillRef idx="3">
-            <a:schemeClr val="accent1"/>
-          </a:fillRef>
-          <a:effectRef idx="2">
-            <a:schemeClr val="accent1"/>
-          </a:effectRef>
-          <a:fontRef idx="minor">
-            <a:schemeClr val="lt1"/>
-          </a:fontRef>
-        </p:style>
-        <p:txBody>
-          <a:bodyPr rtlCol="0" anchor="ctr"/>
-          <a:lstStyle/>
-          <a:p>
-            <a:pPr algn="ctr"/>
-          </a:p>
-        </p:txBody>
-      </p:sp>
-      <p:sp>
-        <p:nvSpPr>
-          <p:cNvPr id="9" name="TextBox 8"/>
-          <p:cNvSpPr txBox="1"/>
-          <p:nvPr/>
-        </p:nvSpPr>
-        <p:spPr>
-          <a:xfrm>
-            <a:off x="2519172" y="1463040"/>
-            <a:ext cx="1604772" cy="822960"/>
-          </a:xfrm>
-          <a:prstGeom prst="rect">
-            <a:avLst/>
-          </a:prstGeom>
-          <a:noFill/>
-        </p:spPr>
-        <p:txBody>
-          <a:bodyPr wrap="square">
-            <a:spAutoFit/>
-          </a:bodyPr>
-          <a:lstStyle/>
-          <a:p>
-            <a:pPr>
-              <a:defRPr sz="1400" b="1">
-                <a:solidFill>
-                  <a:srgbClr val="553C9A"/>
-                </a:solidFill>
-              </a:defRPr>
-            </a:pPr>
-            <a:r>
-              <a:t>🧠 记忆</a:t>
-            </a:r>
-            <a:br/>
-            <a:r>
-              <a:t>连接时间</a:t>
-            </a:r>
-          </a:p>
-        </p:txBody>
-      </p:sp>
-      <p:sp>
-        <p:nvSpPr>
-          <p:cNvPr id="10" name="TextBox 9"/>
-          <p:cNvSpPr txBox="1"/>
-          <p:nvPr/>
-        </p:nvSpPr>
-        <p:spPr>
-          <a:xfrm>
-            <a:off x="2519172" y="2377440"/>
-            <a:ext cx="1604772" cy="3657600"/>
-          </a:xfrm>
-          <a:prstGeom prst="rect">
-            <a:avLst/>
-          </a:prstGeom>
-          <a:noFill/>
-        </p:spPr>
-        <p:txBody>
-          <a:bodyPr wrap="square">
-            <a:spAutoFit/>
-          </a:bodyPr>
-          <a:lstStyle/>
-          <a:p>
-            <a:pPr algn="ctr">
-              <a:defRPr sz="1200">
-                <a:solidFill>
-                  <a:srgbClr val="A0AEC0"/>
-                </a:solidFill>
-              </a:defRPr>
-            </a:pPr>
-            <a:r>
-              <a:t>分层记忆</a:t>
-            </a:r>
-          </a:p>
-          <a:p>
-            <a:pPr algn="ctr">
-              <a:defRPr sz="1200">
-                <a:solidFill>
-                  <a:srgbClr val="A0AEC0"/>
-                </a:solidFill>
-              </a:defRPr>
-            </a:pPr>
-            <a:r>
-              <a:t>RAG</a:t>
-            </a:r>
-          </a:p>
-          <a:p>
-            <a:pPr algn="ctr">
-              <a:defRPr sz="1200">
-                <a:solidFill>
-                  <a:srgbClr val="A0AEC0"/>
-                </a:solidFill>
-              </a:defRPr>
-            </a:pPr>
-            <a:r>
-              <a:t>情节记忆</a:t>
-            </a:r>
-          </a:p>
-        </p:txBody>
-      </p:sp>
-      <p:sp>
-        <p:nvSpPr>
-          <p:cNvPr id="11" name="Rounded Rectangle 10"/>
-          <p:cNvSpPr/>
-          <p:nvPr/>
-        </p:nvSpPr>
-        <p:spPr>
-          <a:xfrm>
-            <a:off x="4306824" y="1371600"/>
-            <a:ext cx="1650492" cy="4754880"/>
-          </a:xfrm>
-          <a:prstGeom prst="roundRect">
-            <a:avLst/>
-          </a:prstGeom>
-          <a:solidFill>
-            <a:srgbClr val="1A1A2E"/>
-          </a:solidFill>
-          <a:ln>
-            <a:noFill/>
-          </a:ln>
-        </p:spPr>
-        <p:style>
-          <a:lnRef idx="1">
-            <a:schemeClr val="accent1"/>
-          </a:lnRef>
-          <a:fillRef idx="3">
-            <a:schemeClr val="accent1"/>
-          </a:fillRef>
-          <a:effectRef idx="2">
-            <a:schemeClr val="accent1"/>
-          </a:effectRef>
-          <a:fontRef idx="minor">
-            <a:schemeClr val="lt1"/>
-          </a:fontRef>
-        </p:style>
-        <p:txBody>
-          <a:bodyPr rtlCol="0" anchor="ctr"/>
-          <a:lstStyle/>
-          <a:p>
-            <a:pPr algn="ctr"/>
-          </a:p>
-        </p:txBody>
-      </p:sp>
-      <p:sp>
-        <p:nvSpPr>
-          <p:cNvPr id="12" name="TextBox 11"/>
-          <p:cNvSpPr txBox="1"/>
-          <p:nvPr/>
-        </p:nvSpPr>
-        <p:spPr>
-          <a:xfrm>
-            <a:off x="4306824" y="1463040"/>
-            <a:ext cx="1604772" cy="822960"/>
-          </a:xfrm>
-          <a:prstGeom prst="rect">
-            <a:avLst/>
-          </a:prstGeom>
-          <a:noFill/>
-        </p:spPr>
-        <p:txBody>
-          <a:bodyPr wrap="square">
-            <a:spAutoFit/>
-          </a:bodyPr>
-          <a:lstStyle/>
-          <a:p>
-            <a:pPr>
-              <a:defRPr sz="1400" b="1">
-                <a:solidFill>
-                  <a:srgbClr val="553C9A"/>
-                </a:solidFill>
-              </a:defRPr>
-            </a:pPr>
-            <a:r>
-              <a:t>⚙️ 推理</a:t>
-            </a:r>
-            <a:br/>
-            <a:r>
-              <a:t>编织逻辑</a:t>
-            </a:r>
-          </a:p>
-        </p:txBody>
-      </p:sp>
-      <p:sp>
-        <p:nvSpPr>
-          <p:cNvPr id="13" name="TextBox 12"/>
-          <p:cNvSpPr txBox="1"/>
-          <p:nvPr/>
-        </p:nvSpPr>
-        <p:spPr>
-          <a:xfrm>
-            <a:off x="4306824" y="2377440"/>
-            <a:ext cx="1604772" cy="3657600"/>
-          </a:xfrm>
-          <a:prstGeom prst="rect">
-            <a:avLst/>
-          </a:prstGeom>
-          <a:noFill/>
-        </p:spPr>
-        <p:txBody>
-          <a:bodyPr wrap="square">
-            <a:spAutoFit/>
-          </a:bodyPr>
-          <a:lstStyle/>
-          <a:p>
-            <a:pPr algn="ctr">
-              <a:defRPr sz="1200">
-                <a:solidFill>
-                  <a:srgbClr val="A0AEC0"/>
-                </a:solidFill>
-              </a:defRPr>
-            </a:pPr>
-            <a:r>
-              <a:t>思维链</a:t>
-            </a:r>
-          </a:p>
-          <a:p>
-            <a:pPr algn="ctr">
-              <a:defRPr sz="1200">
-                <a:solidFill>
-                  <a:srgbClr val="A0AEC0"/>
-                </a:solidFill>
-              </a:defRPr>
-            </a:pPr>
-            <a:r>
-              <a:t>思维树</a:t>
-            </a:r>
-          </a:p>
-          <a:p>
-            <a:pPr algn="ctr">
-              <a:defRPr sz="1200">
-                <a:solidFill>
-                  <a:srgbClr val="A0AEC0"/>
-                </a:solidFill>
-              </a:defRPr>
-            </a:pPr>
-            <a:r>
-              <a:t>思维图</a:t>
-            </a:r>
-          </a:p>
-        </p:txBody>
-      </p:sp>
-      <p:sp>
-        <p:nvSpPr>
-          <p:cNvPr id="14" name="Rounded Rectangle 13"/>
-          <p:cNvSpPr/>
-          <p:nvPr/>
-        </p:nvSpPr>
-        <p:spPr>
-          <a:xfrm>
-            <a:off x="6094476" y="1371600"/>
-            <a:ext cx="1650492" cy="4754880"/>
-          </a:xfrm>
-          <a:prstGeom prst="roundRect">
-            <a:avLst/>
-          </a:prstGeom>
-          <a:solidFill>
-            <a:srgbClr val="1A1A2E"/>
-          </a:solidFill>
-          <a:ln>
-            <a:noFill/>
-          </a:ln>
-        </p:spPr>
-        <p:style>
-          <a:lnRef idx="1">
-            <a:schemeClr val="accent1"/>
-          </a:lnRef>
-          <a:fillRef idx="3">
-            <a:schemeClr val="accent1"/>
-          </a:fillRef>
-          <a:effectRef idx="2">
-            <a:schemeClr val="accent1"/>
-          </a:effectRef>
-          <a:fontRef idx="minor">
-            <a:schemeClr val="lt1"/>
-          </a:fontRef>
-        </p:style>
-        <p:txBody>
-          <a:bodyPr rtlCol="0" anchor="ctr"/>
-          <a:lstStyle/>
-          <a:p>
-            <a:pPr algn="ctr"/>
-          </a:p>
-        </p:txBody>
-      </p:sp>
-      <p:sp>
-        <p:nvSpPr>
-          <p:cNvPr id="15" name="TextBox 14"/>
-          <p:cNvSpPr txBox="1"/>
-          <p:nvPr/>
-        </p:nvSpPr>
-        <p:spPr>
-          <a:xfrm>
-            <a:off x="6094476" y="1463040"/>
-            <a:ext cx="1604772" cy="822960"/>
-          </a:xfrm>
-          <a:prstGeom prst="rect">
-            <a:avLst/>
-          </a:prstGeom>
-          <a:noFill/>
-        </p:spPr>
-        <p:txBody>
-          <a:bodyPr wrap="square">
-            <a:spAutoFit/>
-          </a:bodyPr>
-          <a:lstStyle/>
-          <a:p>
-            <a:pPr>
-              <a:defRPr sz="1400" b="1">
-                <a:solidFill>
-                  <a:srgbClr val="553C9A"/>
-                </a:solidFill>
-              </a:defRPr>
-            </a:pPr>
-            <a:r>
-              <a:t>💪 行动</a:t>
-            </a:r>
-            <a:br/>
-            <a:r>
-              <a:t>付诸实施</a:t>
-            </a:r>
-          </a:p>
-        </p:txBody>
-      </p:sp>
-      <p:sp>
-        <p:nvSpPr>
-          <p:cNvPr id="16" name="TextBox 15"/>
-          <p:cNvSpPr txBox="1"/>
-          <p:nvPr/>
-        </p:nvSpPr>
-        <p:spPr>
-          <a:xfrm>
-            <a:off x="6094476" y="2377440"/>
-            <a:ext cx="1604772" cy="3657600"/>
-          </a:xfrm>
-          <a:prstGeom prst="rect">
-            <a:avLst/>
-          </a:prstGeom>
-          <a:noFill/>
-        </p:spPr>
-        <p:txBody>
-          <a:bodyPr wrap="square">
-            <a:spAutoFit/>
-          </a:bodyPr>
-          <a:lstStyle/>
-          <a:p>
-            <a:pPr algn="ctr">
-              <a:defRPr sz="1200">
-                <a:solidFill>
-                  <a:srgbClr val="A0AEC0"/>
-                </a:solidFill>
-              </a:defRPr>
-            </a:pPr>
-            <a:r>
-              <a:t>ReAct</a:t>
-            </a:r>
-          </a:p>
-          <a:p>
-            <a:pPr algn="ctr">
-              <a:defRPr sz="1200">
-                <a:solidFill>
-                  <a:srgbClr val="A0AEC0"/>
-                </a:solidFill>
-              </a:defRPr>
-            </a:pPr>
-            <a:r>
-              <a:t>规划-执行</a:t>
-            </a:r>
-          </a:p>
-          <a:p>
-            <a:pPr algn="ctr">
-              <a:defRPr sz="1200">
-                <a:solidFill>
-                  <a:srgbClr val="A0AEC0"/>
-                </a:solidFill>
-              </a:defRPr>
-            </a:pPr>
-            <a:r>
-              <a:t>工具编排</a:t>
-            </a:r>
-          </a:p>
-        </p:txBody>
-      </p:sp>
-      <p:sp>
-        <p:nvSpPr>
-          <p:cNvPr id="17" name="Rounded Rectangle 16"/>
-          <p:cNvSpPr/>
-          <p:nvPr/>
-        </p:nvSpPr>
-        <p:spPr>
-          <a:xfrm>
-            <a:off x="7882128" y="1371600"/>
-            <a:ext cx="1650492" cy="4754880"/>
-          </a:xfrm>
-          <a:prstGeom prst="roundRect">
-            <a:avLst/>
-          </a:prstGeom>
-          <a:solidFill>
-            <a:srgbClr val="1A1A2E"/>
-          </a:solidFill>
-          <a:ln>
-            <a:noFill/>
-          </a:ln>
-        </p:spPr>
-        <p:style>
-          <a:lnRef idx="1">
-            <a:schemeClr val="accent1"/>
-          </a:lnRef>
-          <a:fillRef idx="3">
-            <a:schemeClr val="accent1"/>
-          </a:fillRef>
-          <a:effectRef idx="2">
-            <a:schemeClr val="accent1"/>
-          </a:effectRef>
-          <a:fontRef idx="minor">
-            <a:schemeClr val="lt1"/>
-          </a:fontRef>
-        </p:style>
-        <p:txBody>
-          <a:bodyPr rtlCol="0" anchor="ctr"/>
-          <a:lstStyle/>
-          <a:p>
-            <a:pPr algn="ctr"/>
-          </a:p>
-        </p:txBody>
-      </p:sp>
-      <p:sp>
-        <p:nvSpPr>
-          <p:cNvPr id="18" name="TextBox 17"/>
-          <p:cNvSpPr txBox="1"/>
-          <p:nvPr/>
-        </p:nvSpPr>
-        <p:spPr>
-          <a:xfrm>
-            <a:off x="7882128" y="1463040"/>
-            <a:ext cx="1604772" cy="822960"/>
-          </a:xfrm>
-          <a:prstGeom prst="rect">
-            <a:avLst/>
-          </a:prstGeom>
-          <a:noFill/>
-        </p:spPr>
-        <p:txBody>
-          <a:bodyPr wrap="square">
-            <a:spAutoFit/>
-          </a:bodyPr>
-          <a:lstStyle/>
-          <a:p>
-            <a:pPr>
-              <a:defRPr sz="1400" b="1">
-                <a:solidFill>
-                  <a:srgbClr val="553C9A"/>
-                </a:solidFill>
-              </a:defRPr>
-            </a:pPr>
-            <a:r>
-              <a:t>🔮 反思</a:t>
-            </a:r>
-            <a:br/>
-            <a:r>
-              <a:t>判断对错</a:t>
-            </a:r>
-          </a:p>
-        </p:txBody>
-      </p:sp>
-      <p:sp>
-        <p:nvSpPr>
-          <p:cNvPr id="19" name="TextBox 18"/>
-          <p:cNvSpPr txBox="1"/>
-          <p:nvPr/>
-        </p:nvSpPr>
-        <p:spPr>
-          <a:xfrm>
-            <a:off x="7882128" y="2377440"/>
-            <a:ext cx="1604772" cy="3657600"/>
-          </a:xfrm>
-          <a:prstGeom prst="rect">
-            <a:avLst/>
-          </a:prstGeom>
-          <a:noFill/>
-        </p:spPr>
-        <p:txBody>
-          <a:bodyPr wrap="square">
-            <a:spAutoFit/>
-          </a:bodyPr>
-          <a:lstStyle/>
-          <a:p>
-            <a:pPr algn="ctr">
-              <a:defRPr sz="1200">
-                <a:solidFill>
-                  <a:srgbClr val="A0AEC0"/>
-                </a:solidFill>
-              </a:defRPr>
-            </a:pPr>
-            <a:r>
-              <a:t>自我修正</a:t>
-            </a:r>
-          </a:p>
-          <a:p>
-            <a:pPr algn="ctr">
-              <a:defRPr sz="1200">
-                <a:solidFill>
-                  <a:srgbClr val="A0AEC0"/>
-                </a:solidFill>
-              </a:defRPr>
-            </a:pPr>
-            <a:r>
-              <a:t>反思记忆</a:t>
-            </a:r>
-          </a:p>
-          <a:p>
-            <a:pPr algn="ctr">
-              <a:defRPr sz="1200">
-                <a:solidFill>
-                  <a:srgbClr val="A0AEC0"/>
-                </a:solidFill>
-              </a:defRPr>
-            </a:pPr>
-            <a:r>
-              <a:t>元学习</a:t>
-            </a:r>
-          </a:p>
-        </p:txBody>
-      </p:sp>
-      <p:sp>
-        <p:nvSpPr>
-          <p:cNvPr id="20" name="Rounded Rectangle 19"/>
-          <p:cNvSpPr/>
-          <p:nvPr/>
-        </p:nvSpPr>
-        <p:spPr>
-          <a:xfrm>
-            <a:off x="9669780" y="1371600"/>
-            <a:ext cx="1650492" cy="4754880"/>
-          </a:xfrm>
-          <a:prstGeom prst="roundRect">
-            <a:avLst/>
-          </a:prstGeom>
-          <a:solidFill>
-            <a:srgbClr val="1A1A2E"/>
-          </a:solidFill>
-          <a:ln>
-            <a:noFill/>
-          </a:ln>
-        </p:spPr>
-        <p:style>
-          <a:lnRef idx="1">
-            <a:schemeClr val="accent1"/>
-          </a:lnRef>
-          <a:fillRef idx="3">
-            <a:schemeClr val="accent1"/>
-          </a:fillRef>
-          <a:effectRef idx="2">
-            <a:schemeClr val="accent1"/>
-          </a:effectRef>
-          <a:fontRef idx="minor">
-            <a:schemeClr val="lt1"/>
-          </a:fontRef>
-        </p:style>
-        <p:txBody>
-          <a:bodyPr rtlCol="0" anchor="ctr"/>
-          <a:lstStyle/>
-          <a:p>
-            <a:pPr algn="ctr"/>
-          </a:p>
-        </p:txBody>
-      </p:sp>
-      <p:sp>
-        <p:nvSpPr>
-          <p:cNvPr id="21" name="TextBox 20"/>
-          <p:cNvSpPr txBox="1"/>
-          <p:nvPr/>
-        </p:nvSpPr>
-        <p:spPr>
-          <a:xfrm>
-            <a:off x="9669780" y="1463040"/>
-            <a:ext cx="1604772" cy="822960"/>
-          </a:xfrm>
-          <a:prstGeom prst="rect">
-            <a:avLst/>
-          </a:prstGeom>
-          <a:noFill/>
-        </p:spPr>
-        <p:txBody>
-          <a:bodyPr wrap="square">
-            <a:spAutoFit/>
-          </a:bodyPr>
-          <a:lstStyle/>
-          <a:p>
-            <a:pPr>
-              <a:defRPr sz="1400" b="1">
-                <a:solidFill>
-                  <a:srgbClr val="553C9A"/>
-                </a:solidFill>
-              </a:defRPr>
-            </a:pPr>
-            <a:r>
-              <a:t>🤝 协作</a:t>
-            </a:r>
-            <a:br/>
-            <a:r>
-              <a:t>共同进化</a:t>
-            </a:r>
-          </a:p>
-        </p:txBody>
-      </p:sp>
-      <p:sp>
-        <p:nvSpPr>
-          <p:cNvPr id="22" name="TextBox 21"/>
-          <p:cNvSpPr txBox="1"/>
-          <p:nvPr/>
-        </p:nvSpPr>
-        <p:spPr>
-          <a:xfrm>
-            <a:off x="9669780" y="2377440"/>
-            <a:ext cx="1604772" cy="3657600"/>
-          </a:xfrm>
-          <a:prstGeom prst="rect">
-            <a:avLst/>
-          </a:prstGeom>
-          <a:noFill/>
-        </p:spPr>
-        <p:txBody>
-          <a:bodyPr wrap="square">
-            <a:spAutoFit/>
-          </a:bodyPr>
-          <a:lstStyle/>
-          <a:p>
-            <a:pPr algn="ctr">
-              <a:defRPr sz="1200">
-                <a:solidFill>
-                  <a:srgbClr val="A0AEC0"/>
-                </a:solidFill>
-              </a:defRPr>
-            </a:pPr>
-            <a:r>
-              <a:t>辩论</a:t>
-            </a:r>
-          </a:p>
-          <a:p>
-            <a:pPr algn="ctr">
-              <a:defRPr sz="1200">
-                <a:solidFill>
-                  <a:srgbClr val="A0AEC0"/>
-                </a:solidFill>
-              </a:defRPr>
-            </a:pPr>
-            <a:r>
-              <a:t>委托</a:t>
-            </a:r>
-          </a:p>
-          <a:p>
-            <a:pPr algn="ctr">
-              <a:defRPr sz="1200">
-                <a:solidFill>
-                  <a:srgbClr val="A0AEC0"/>
-                </a:solidFill>
-              </a:defRPr>
-            </a:pPr>
-            <a:r>
-              <a:t>群体</a:t>
+              <a:defRPr sz="2600" i="1">
+                <a:solidFill>
+                  <a:srgbClr val="1A1A2E"/>
+                </a:solidFill>
+              </a:defRPr>
+            </a:pPr>
+            <a:r>
+              <a:t>"从 GoF 的 23 个设计模式到 Agent 的无限可能，我们跨越了软件工程的一个世纪：设计模式并未消亡，而是在进化；软件工程未曾终结，而是在重生；人类的角色没有消失，而是在升华。"</a:t>
             </a:r>
           </a:p>
         </p:txBody>
@@ -7628,7 +8037,7 @@
             <a:avLst/>
           </a:prstGeom>
           <a:solidFill>
-            <a:srgbClr val="FFFFFF"/>
+            <a:srgbClr val="553C9A"/>
           </a:solidFill>
           <a:ln>
             <a:noFill/>
@@ -7658,92 +8067,14 @@
       </p:sp>
       <p:sp>
         <p:nvSpPr>
-          <p:cNvPr id="3" name="Rectangle 2"/>
-          <p:cNvSpPr/>
-          <p:nvPr/>
-        </p:nvSpPr>
-        <p:spPr>
-          <a:xfrm>
-            <a:off x="0" y="0"/>
-            <a:ext cx="12188952" cy="1097280"/>
-          </a:xfrm>
-          <a:prstGeom prst="rect">
-            <a:avLst/>
-          </a:prstGeom>
-          <a:solidFill>
-            <a:srgbClr val="1A1A2E"/>
-          </a:solidFill>
-          <a:ln>
-            <a:noFill/>
-          </a:ln>
-        </p:spPr>
-        <p:style>
-          <a:lnRef idx="1">
-            <a:schemeClr val="accent1"/>
-          </a:lnRef>
-          <a:fillRef idx="3">
-            <a:schemeClr val="accent1"/>
-          </a:fillRef>
-          <a:effectRef idx="2">
-            <a:schemeClr val="accent1"/>
-          </a:effectRef>
-          <a:fontRef idx="minor">
-            <a:schemeClr val="lt1"/>
-          </a:fontRef>
-        </p:style>
-        <p:txBody>
-          <a:bodyPr rtlCol="0" anchor="ctr"/>
-          <a:lstStyle/>
-          <a:p>
-            <a:pPr algn="ctr"/>
-          </a:p>
-        </p:txBody>
-      </p:sp>
-      <p:sp>
-        <p:nvSpPr>
-          <p:cNvPr id="4" name="TextBox 3"/>
+          <p:cNvPr id="3" name="TextBox 2"/>
           <p:cNvSpPr txBox="1"/>
           <p:nvPr/>
         </p:nvSpPr>
         <p:spPr>
           <a:xfrm>
-            <a:off x="457200" y="228600"/>
-            <a:ext cx="11274552" cy="822960"/>
-          </a:xfrm>
-          <a:prstGeom prst="rect">
-            <a:avLst/>
-          </a:prstGeom>
-          <a:noFill/>
-        </p:spPr>
-        <p:txBody>
-          <a:bodyPr wrap="none">
-            <a:spAutoFit/>
-          </a:bodyPr>
-          <a:lstStyle/>
-          <a:p>
-            <a:pPr>
-              <a:defRPr sz="3200" b="1">
-                <a:solidFill>
-                  <a:srgbClr val="FFFFFF"/>
-                </a:solidFill>
-              </a:defRPr>
-            </a:pPr>
-            <a:r>
-              <a:t>感知模式：看世界</a:t>
-            </a:r>
-          </a:p>
-        </p:txBody>
-      </p:sp>
-      <p:sp>
-        <p:nvSpPr>
-          <p:cNvPr id="5" name="TextBox 4"/>
-          <p:cNvSpPr txBox="1"/>
-          <p:nvPr/>
-        </p:nvSpPr>
-        <p:spPr>
-          <a:xfrm>
-            <a:off x="640080" y="1371600"/>
-            <a:ext cx="10972800" cy="5029200"/>
+            <a:off x="457200" y="2743200"/>
+            <a:ext cx="11274552" cy="2286000"/>
           </a:xfrm>
           <a:prstGeom prst="rect">
             <a:avLst/>
@@ -7756,78 +8087,15 @@
           </a:bodyPr>
           <a:lstStyle/>
           <a:p>
-            <a:pPr>
-              <a:spcAft>
-                <a:spcPts val="1400"/>
-              </a:spcAft>
-              <a:defRPr sz="2100" b="1">
-                <a:solidFill>
-                  <a:srgbClr val="553C9A"/>
-                </a:solidFill>
-              </a:defRPr>
-            </a:pPr>
-            <a:r>
-              <a:t>• 注意力聚焦 — 构建认知漏斗，用最低 Token 成本换取最高上下文质量</a:t>
-            </a:r>
-          </a:p>
-          <a:p>
-            <a:pPr>
-              <a:spcAft>
-                <a:spcPts val="1400"/>
-              </a:spcAft>
-              <a:defRPr sz="2100" b="0">
-                <a:solidFill>
-                  <a:srgbClr val="1A1A2E"/>
-                </a:solidFill>
-              </a:defRPr>
-            </a:pPr>
-            <a:r>
-              <a:t>• 多模态融合 — 建立统一语义场，从「拼接式」向「原生式」演进</a:t>
-            </a:r>
-          </a:p>
-          <a:p>
-            <a:pPr>
-              <a:spcAft>
-                <a:spcPts val="1400"/>
-              </a:spcAft>
-              <a:defRPr sz="2100" b="1">
-                <a:solidFill>
-                  <a:srgbClr val="553C9A"/>
-                </a:solidFill>
-              </a:defRPr>
-            </a:pPr>
-            <a:r>
-              <a:t>• 主动感知 — Agent 从「被动的答题者」转变为「主动的调查员」</a:t>
-            </a:r>
-          </a:p>
-          <a:p>
-            <a:pPr>
-              <a:spcAft>
-                <a:spcPts val="1400"/>
-              </a:spcAft>
-              <a:defRPr sz="2100" b="0">
-                <a:solidFill>
-                  <a:srgbClr val="1A1A2E"/>
-                </a:solidFill>
-              </a:defRPr>
-            </a:pPr>
-            <a:r>
-              <a:t>• 本质：不是「看到所有」，而是「看到关键」并「主动寻找未知」</a:t>
-            </a:r>
-          </a:p>
-          <a:p>
-            <a:pPr>
-              <a:spcAft>
-                <a:spcPts val="1400"/>
-              </a:spcAft>
-              <a:defRPr sz="2100" b="0">
-                <a:solidFill>
-                  <a:srgbClr val="1A1A2E"/>
-                </a:solidFill>
-              </a:defRPr>
-            </a:pPr>
-            <a:r>
-              <a:t>• "不要以它能记住多少为荣，而要以它能精简多少为傲。"</a:t>
+            <a:pPr algn="ctr">
+              <a:defRPr sz="5000" i="0">
+                <a:solidFill>
+                  <a:srgbClr val="FFFFFF"/>
+                </a:solidFill>
+              </a:defRPr>
+            </a:pPr>
+            <a:r>
+              <a:t>🔮  下篇：六大类 21 个核心设计模式</a:t>
             </a:r>
           </a:p>
         </p:txBody>
@@ -7966,21 +8234,64 @@
               </a:defRPr>
             </a:pPr>
             <a:r>
-              <a:t>记忆模式：连接时间</a:t>
-            </a:r>
-          </a:p>
-        </p:txBody>
-      </p:sp>
-      <p:sp>
-        <p:nvSpPr>
-          <p:cNvPr id="5" name="TextBox 4"/>
+              <a:t>完整 Agent = 感知 + 记忆 + 推理 + 行动 + 反思 + 协作</a:t>
+            </a:r>
+          </a:p>
+        </p:txBody>
+      </p:sp>
+      <p:sp>
+        <p:nvSpPr>
+          <p:cNvPr id="5" name="Rounded Rectangle 4"/>
+          <p:cNvSpPr/>
+          <p:nvPr/>
+        </p:nvSpPr>
+        <p:spPr>
+          <a:xfrm>
+            <a:off x="731520" y="1371600"/>
+            <a:ext cx="1650492" cy="4754880"/>
+          </a:xfrm>
+          <a:prstGeom prst="roundRect">
+            <a:avLst/>
+          </a:prstGeom>
+          <a:solidFill>
+            <a:srgbClr val="1A1A2E"/>
+          </a:solidFill>
+          <a:ln>
+            <a:noFill/>
+          </a:ln>
+        </p:spPr>
+        <p:style>
+          <a:lnRef idx="1">
+            <a:schemeClr val="accent1"/>
+          </a:lnRef>
+          <a:fillRef idx="3">
+            <a:schemeClr val="accent1"/>
+          </a:fillRef>
+          <a:effectRef idx="2">
+            <a:schemeClr val="accent1"/>
+          </a:effectRef>
+          <a:fontRef idx="minor">
+            <a:schemeClr val="lt1"/>
+          </a:fontRef>
+        </p:style>
+        <p:txBody>
+          <a:bodyPr rtlCol="0" anchor="ctr"/>
+          <a:lstStyle/>
+          <a:p>
+            <a:pPr algn="ctr"/>
+          </a:p>
+        </p:txBody>
+      </p:sp>
+      <p:sp>
+        <p:nvSpPr>
+          <p:cNvPr id="6" name="TextBox 5"/>
           <p:cNvSpPr txBox="1"/>
           <p:nvPr/>
         </p:nvSpPr>
         <p:spPr>
           <a:xfrm>
-            <a:off x="640080" y="1371600"/>
-            <a:ext cx="10972800" cy="5029200"/>
+            <a:off x="731520" y="1463040"/>
+            <a:ext cx="1604772" cy="822960"/>
           </a:xfrm>
           <a:prstGeom prst="rect">
             <a:avLst/>
@@ -7994,77 +8305,782 @@
           <a:lstStyle/>
           <a:p>
             <a:pPr>
-              <a:spcAft>
-                <a:spcPts val="1400"/>
-              </a:spcAft>
-              <a:defRPr sz="2100" b="0">
-                <a:solidFill>
-                  <a:srgbClr val="1A1A2E"/>
-                </a:solidFill>
-              </a:defRPr>
-            </a:pPr>
-            <a:r>
-              <a:t>• 分层记忆 — L1工作记忆(Context Window) / L2短期缓存(摘要) / L3长期存储(Vector DB+知识图谱)</a:t>
-            </a:r>
-          </a:p>
+              <a:defRPr sz="1400" b="1">
+                <a:solidFill>
+                  <a:srgbClr val="553C9A"/>
+                </a:solidFill>
+              </a:defRPr>
+            </a:pPr>
+            <a:r>
+              <a:t>👁️ 感知</a:t>
+            </a:r>
+            <a:br/>
+            <a:r>
+              <a:t>看世界</a:t>
+            </a:r>
+          </a:p>
+        </p:txBody>
+      </p:sp>
+      <p:sp>
+        <p:nvSpPr>
+          <p:cNvPr id="7" name="TextBox 6"/>
+          <p:cNvSpPr txBox="1"/>
+          <p:nvPr/>
+        </p:nvSpPr>
+        <p:spPr>
+          <a:xfrm>
+            <a:off x="731520" y="2377440"/>
+            <a:ext cx="1604772" cy="3657600"/>
+          </a:xfrm>
+          <a:prstGeom prst="rect">
+            <a:avLst/>
+          </a:prstGeom>
+          <a:noFill/>
+        </p:spPr>
+        <p:txBody>
+          <a:bodyPr wrap="square">
+            <a:spAutoFit/>
+          </a:bodyPr>
+          <a:lstStyle/>
+          <a:p>
+            <a:pPr algn="ctr">
+              <a:defRPr sz="1200">
+                <a:solidFill>
+                  <a:srgbClr val="A0AEC0"/>
+                </a:solidFill>
+              </a:defRPr>
+            </a:pPr>
+            <a:r>
+              <a:t>注意力聚焦</a:t>
+            </a:r>
+          </a:p>
+          <a:p>
+            <a:pPr algn="ctr">
+              <a:defRPr sz="1200">
+                <a:solidFill>
+                  <a:srgbClr val="A0AEC0"/>
+                </a:solidFill>
+              </a:defRPr>
+            </a:pPr>
+            <a:r>
+              <a:t>多模态融合</a:t>
+            </a:r>
+          </a:p>
+          <a:p>
+            <a:pPr algn="ctr">
+              <a:defRPr sz="1200">
+                <a:solidFill>
+                  <a:srgbClr val="A0AEC0"/>
+                </a:solidFill>
+              </a:defRPr>
+            </a:pPr>
+            <a:r>
+              <a:t>主动感知</a:t>
+            </a:r>
+          </a:p>
+        </p:txBody>
+      </p:sp>
+      <p:sp>
+        <p:nvSpPr>
+          <p:cNvPr id="8" name="Rounded Rectangle 7"/>
+          <p:cNvSpPr/>
+          <p:nvPr/>
+        </p:nvSpPr>
+        <p:spPr>
+          <a:xfrm>
+            <a:off x="2519172" y="1371600"/>
+            <a:ext cx="1650492" cy="4754880"/>
+          </a:xfrm>
+          <a:prstGeom prst="roundRect">
+            <a:avLst/>
+          </a:prstGeom>
+          <a:solidFill>
+            <a:srgbClr val="1A1A2E"/>
+          </a:solidFill>
+          <a:ln>
+            <a:noFill/>
+          </a:ln>
+        </p:spPr>
+        <p:style>
+          <a:lnRef idx="1">
+            <a:schemeClr val="accent1"/>
+          </a:lnRef>
+          <a:fillRef idx="3">
+            <a:schemeClr val="accent1"/>
+          </a:fillRef>
+          <a:effectRef idx="2">
+            <a:schemeClr val="accent1"/>
+          </a:effectRef>
+          <a:fontRef idx="minor">
+            <a:schemeClr val="lt1"/>
+          </a:fontRef>
+        </p:style>
+        <p:txBody>
+          <a:bodyPr rtlCol="0" anchor="ctr"/>
+          <a:lstStyle/>
+          <a:p>
+            <a:pPr algn="ctr"/>
+          </a:p>
+        </p:txBody>
+      </p:sp>
+      <p:sp>
+        <p:nvSpPr>
+          <p:cNvPr id="9" name="TextBox 8"/>
+          <p:cNvSpPr txBox="1"/>
+          <p:nvPr/>
+        </p:nvSpPr>
+        <p:spPr>
+          <a:xfrm>
+            <a:off x="2519172" y="1463040"/>
+            <a:ext cx="1604772" cy="822960"/>
+          </a:xfrm>
+          <a:prstGeom prst="rect">
+            <a:avLst/>
+          </a:prstGeom>
+          <a:noFill/>
+        </p:spPr>
+        <p:txBody>
+          <a:bodyPr wrap="square">
+            <a:spAutoFit/>
+          </a:bodyPr>
+          <a:lstStyle/>
           <a:p>
             <a:pPr>
-              <a:spcAft>
-                <a:spcPts val="1400"/>
-              </a:spcAft>
-              <a:defRPr sz="2100" b="1">
+              <a:defRPr sz="1400" b="1">
                 <a:solidFill>
                   <a:srgbClr val="553C9A"/>
                 </a:solidFill>
               </a:defRPr>
             </a:pPr>
             <a:r>
-              <a:t>• RAG — 将「推理能力」(CPU) 与「知识存储」(磁盘) 解耦，极低成本保持时效性</a:t>
-            </a:r>
-          </a:p>
+              <a:t>🧠 记忆</a:t>
+            </a:r>
+            <a:br/>
+            <a:r>
+              <a:t>连接时间</a:t>
+            </a:r>
+          </a:p>
+        </p:txBody>
+      </p:sp>
+      <p:sp>
+        <p:nvSpPr>
+          <p:cNvPr id="10" name="TextBox 9"/>
+          <p:cNvSpPr txBox="1"/>
+          <p:nvPr/>
+        </p:nvSpPr>
+        <p:spPr>
+          <a:xfrm>
+            <a:off x="2519172" y="2377440"/>
+            <a:ext cx="1604772" cy="3657600"/>
+          </a:xfrm>
+          <a:prstGeom prst="rect">
+            <a:avLst/>
+          </a:prstGeom>
+          <a:noFill/>
+        </p:spPr>
+        <p:txBody>
+          <a:bodyPr wrap="square">
+            <a:spAutoFit/>
+          </a:bodyPr>
+          <a:lstStyle/>
+          <a:p>
+            <a:pPr algn="ctr">
+              <a:defRPr sz="1200">
+                <a:solidFill>
+                  <a:srgbClr val="A0AEC0"/>
+                </a:solidFill>
+              </a:defRPr>
+            </a:pPr>
+            <a:r>
+              <a:t>分层记忆</a:t>
+            </a:r>
+          </a:p>
+          <a:p>
+            <a:pPr algn="ctr">
+              <a:defRPr sz="1200">
+                <a:solidFill>
+                  <a:srgbClr val="A0AEC0"/>
+                </a:solidFill>
+              </a:defRPr>
+            </a:pPr>
+            <a:r>
+              <a:t>RAG</a:t>
+            </a:r>
+          </a:p>
+          <a:p>
+            <a:pPr algn="ctr">
+              <a:defRPr sz="1200">
+                <a:solidFill>
+                  <a:srgbClr val="A0AEC0"/>
+                </a:solidFill>
+              </a:defRPr>
+            </a:pPr>
+            <a:r>
+              <a:t>情节记忆</a:t>
+            </a:r>
+          </a:p>
+        </p:txBody>
+      </p:sp>
+      <p:sp>
+        <p:nvSpPr>
+          <p:cNvPr id="11" name="Rounded Rectangle 10"/>
+          <p:cNvSpPr/>
+          <p:nvPr/>
+        </p:nvSpPr>
+        <p:spPr>
+          <a:xfrm>
+            <a:off x="4306824" y="1371600"/>
+            <a:ext cx="1650492" cy="4754880"/>
+          </a:xfrm>
+          <a:prstGeom prst="roundRect">
+            <a:avLst/>
+          </a:prstGeom>
+          <a:solidFill>
+            <a:srgbClr val="1A1A2E"/>
+          </a:solidFill>
+          <a:ln>
+            <a:noFill/>
+          </a:ln>
+        </p:spPr>
+        <p:style>
+          <a:lnRef idx="1">
+            <a:schemeClr val="accent1"/>
+          </a:lnRef>
+          <a:fillRef idx="3">
+            <a:schemeClr val="accent1"/>
+          </a:fillRef>
+          <a:effectRef idx="2">
+            <a:schemeClr val="accent1"/>
+          </a:effectRef>
+          <a:fontRef idx="minor">
+            <a:schemeClr val="lt1"/>
+          </a:fontRef>
+        </p:style>
+        <p:txBody>
+          <a:bodyPr rtlCol="0" anchor="ctr"/>
+          <a:lstStyle/>
+          <a:p>
+            <a:pPr algn="ctr"/>
+          </a:p>
+        </p:txBody>
+      </p:sp>
+      <p:sp>
+        <p:nvSpPr>
+          <p:cNvPr id="12" name="TextBox 11"/>
+          <p:cNvSpPr txBox="1"/>
+          <p:nvPr/>
+        </p:nvSpPr>
+        <p:spPr>
+          <a:xfrm>
+            <a:off x="4306824" y="1463040"/>
+            <a:ext cx="1604772" cy="822960"/>
+          </a:xfrm>
+          <a:prstGeom prst="rect">
+            <a:avLst/>
+          </a:prstGeom>
+          <a:noFill/>
+        </p:spPr>
+        <p:txBody>
+          <a:bodyPr wrap="square">
+            <a:spAutoFit/>
+          </a:bodyPr>
+          <a:lstStyle/>
           <a:p>
             <a:pPr>
-              <a:spcAft>
-                <a:spcPts val="1400"/>
-              </a:spcAft>
-              <a:defRPr sz="2100" b="1">
+              <a:defRPr sz="1400" b="1">
                 <a:solidFill>
                   <a:srgbClr val="553C9A"/>
                 </a:solidFill>
               </a:defRPr>
             </a:pPr>
             <a:r>
-              <a:t>• 情节记忆 — 沉淀 Agent 自身交互产生的动态经验，无需微调即可进化</a:t>
-            </a:r>
-          </a:p>
+              <a:t>⚙️ 推理</a:t>
+            </a:r>
+            <a:br/>
+            <a:r>
+              <a:t>编织逻辑</a:t>
+            </a:r>
+          </a:p>
+        </p:txBody>
+      </p:sp>
+      <p:sp>
+        <p:nvSpPr>
+          <p:cNvPr id="13" name="TextBox 12"/>
+          <p:cNvSpPr txBox="1"/>
+          <p:nvPr/>
+        </p:nvSpPr>
+        <p:spPr>
+          <a:xfrm>
+            <a:off x="4306824" y="2377440"/>
+            <a:ext cx="1604772" cy="3657600"/>
+          </a:xfrm>
+          <a:prstGeom prst="rect">
+            <a:avLst/>
+          </a:prstGeom>
+          <a:noFill/>
+        </p:spPr>
+        <p:txBody>
+          <a:bodyPr wrap="square">
+            <a:spAutoFit/>
+          </a:bodyPr>
+          <a:lstStyle/>
+          <a:p>
+            <a:pPr algn="ctr">
+              <a:defRPr sz="1200">
+                <a:solidFill>
+                  <a:srgbClr val="A0AEC0"/>
+                </a:solidFill>
+              </a:defRPr>
+            </a:pPr>
+            <a:r>
+              <a:t>思维链</a:t>
+            </a:r>
+          </a:p>
+          <a:p>
+            <a:pPr algn="ctr">
+              <a:defRPr sz="1200">
+                <a:solidFill>
+                  <a:srgbClr val="A0AEC0"/>
+                </a:solidFill>
+              </a:defRPr>
+            </a:pPr>
+            <a:r>
+              <a:t>思维树</a:t>
+            </a:r>
+          </a:p>
+          <a:p>
+            <a:pPr algn="ctr">
+              <a:defRPr sz="1200">
+                <a:solidFill>
+                  <a:srgbClr val="A0AEC0"/>
+                </a:solidFill>
+              </a:defRPr>
+            </a:pPr>
+            <a:r>
+              <a:t>思维图</a:t>
+            </a:r>
+          </a:p>
+        </p:txBody>
+      </p:sp>
+      <p:sp>
+        <p:nvSpPr>
+          <p:cNvPr id="14" name="Rounded Rectangle 13"/>
+          <p:cNvSpPr/>
+          <p:nvPr/>
+        </p:nvSpPr>
+        <p:spPr>
+          <a:xfrm>
+            <a:off x="6094476" y="1371600"/>
+            <a:ext cx="1650492" cy="4754880"/>
+          </a:xfrm>
+          <a:prstGeom prst="roundRect">
+            <a:avLst/>
+          </a:prstGeom>
+          <a:solidFill>
+            <a:srgbClr val="1A1A2E"/>
+          </a:solidFill>
+          <a:ln>
+            <a:noFill/>
+          </a:ln>
+        </p:spPr>
+        <p:style>
+          <a:lnRef idx="1">
+            <a:schemeClr val="accent1"/>
+          </a:lnRef>
+          <a:fillRef idx="3">
+            <a:schemeClr val="accent1"/>
+          </a:fillRef>
+          <a:effectRef idx="2">
+            <a:schemeClr val="accent1"/>
+          </a:effectRef>
+          <a:fontRef idx="minor">
+            <a:schemeClr val="lt1"/>
+          </a:fontRef>
+        </p:style>
+        <p:txBody>
+          <a:bodyPr rtlCol="0" anchor="ctr"/>
+          <a:lstStyle/>
+          <a:p>
+            <a:pPr algn="ctr"/>
+          </a:p>
+        </p:txBody>
+      </p:sp>
+      <p:sp>
+        <p:nvSpPr>
+          <p:cNvPr id="15" name="TextBox 14"/>
+          <p:cNvSpPr txBox="1"/>
+          <p:nvPr/>
+        </p:nvSpPr>
+        <p:spPr>
+          <a:xfrm>
+            <a:off x="6094476" y="1463040"/>
+            <a:ext cx="1604772" cy="822960"/>
+          </a:xfrm>
+          <a:prstGeom prst="rect">
+            <a:avLst/>
+          </a:prstGeom>
+          <a:noFill/>
+        </p:spPr>
+        <p:txBody>
+          <a:bodyPr wrap="square">
+            <a:spAutoFit/>
+          </a:bodyPr>
+          <a:lstStyle/>
           <a:p>
             <a:pPr>
-              <a:spcAft>
-                <a:spcPts val="1400"/>
-              </a:spcAft>
-              <a:defRPr sz="2100" b="0">
-                <a:solidFill>
-                  <a:srgbClr val="1A1A2E"/>
-                </a:solidFill>
-              </a:defRPr>
-            </a:pPr>
-            <a:r>
-              <a:t>• 两种流转：「溢出与巩固」(热→冷) + 「检索与唤醒」(冷→热)</a:t>
-            </a:r>
-          </a:p>
+              <a:defRPr sz="1400" b="1">
+                <a:solidFill>
+                  <a:srgbClr val="553C9A"/>
+                </a:solidFill>
+              </a:defRPr>
+            </a:pPr>
+            <a:r>
+              <a:t>💪 行动</a:t>
+            </a:r>
+            <a:br/>
+            <a:r>
+              <a:t>付诸实施</a:t>
+            </a:r>
+          </a:p>
+        </p:txBody>
+      </p:sp>
+      <p:sp>
+        <p:nvSpPr>
+          <p:cNvPr id="16" name="TextBox 15"/>
+          <p:cNvSpPr txBox="1"/>
+          <p:nvPr/>
+        </p:nvSpPr>
+        <p:spPr>
+          <a:xfrm>
+            <a:off x="6094476" y="2377440"/>
+            <a:ext cx="1604772" cy="3657600"/>
+          </a:xfrm>
+          <a:prstGeom prst="rect">
+            <a:avLst/>
+          </a:prstGeom>
+          <a:noFill/>
+        </p:spPr>
+        <p:txBody>
+          <a:bodyPr wrap="square">
+            <a:spAutoFit/>
+          </a:bodyPr>
+          <a:lstStyle/>
+          <a:p>
+            <a:pPr algn="ctr">
+              <a:defRPr sz="1200">
+                <a:solidFill>
+                  <a:srgbClr val="A0AEC0"/>
+                </a:solidFill>
+              </a:defRPr>
+            </a:pPr>
+            <a:r>
+              <a:t>ReAct</a:t>
+            </a:r>
+          </a:p>
+          <a:p>
+            <a:pPr algn="ctr">
+              <a:defRPr sz="1200">
+                <a:solidFill>
+                  <a:srgbClr val="A0AEC0"/>
+                </a:solidFill>
+              </a:defRPr>
+            </a:pPr>
+            <a:r>
+              <a:t>规划-执行</a:t>
+            </a:r>
+          </a:p>
+          <a:p>
+            <a:pPr algn="ctr">
+              <a:defRPr sz="1200">
+                <a:solidFill>
+                  <a:srgbClr val="A0AEC0"/>
+                </a:solidFill>
+              </a:defRPr>
+            </a:pPr>
+            <a:r>
+              <a:t>工具编排</a:t>
+            </a:r>
+          </a:p>
+        </p:txBody>
+      </p:sp>
+      <p:sp>
+        <p:nvSpPr>
+          <p:cNvPr id="17" name="Rounded Rectangle 16"/>
+          <p:cNvSpPr/>
+          <p:nvPr/>
+        </p:nvSpPr>
+        <p:spPr>
+          <a:xfrm>
+            <a:off x="7882128" y="1371600"/>
+            <a:ext cx="1650492" cy="4754880"/>
+          </a:xfrm>
+          <a:prstGeom prst="roundRect">
+            <a:avLst/>
+          </a:prstGeom>
+          <a:solidFill>
+            <a:srgbClr val="1A1A2E"/>
+          </a:solidFill>
+          <a:ln>
+            <a:noFill/>
+          </a:ln>
+        </p:spPr>
+        <p:style>
+          <a:lnRef idx="1">
+            <a:schemeClr val="accent1"/>
+          </a:lnRef>
+          <a:fillRef idx="3">
+            <a:schemeClr val="accent1"/>
+          </a:fillRef>
+          <a:effectRef idx="2">
+            <a:schemeClr val="accent1"/>
+          </a:effectRef>
+          <a:fontRef idx="minor">
+            <a:schemeClr val="lt1"/>
+          </a:fontRef>
+        </p:style>
+        <p:txBody>
+          <a:bodyPr rtlCol="0" anchor="ctr"/>
+          <a:lstStyle/>
+          <a:p>
+            <a:pPr algn="ctr"/>
+          </a:p>
+        </p:txBody>
+      </p:sp>
+      <p:sp>
+        <p:nvSpPr>
+          <p:cNvPr id="18" name="TextBox 17"/>
+          <p:cNvSpPr txBox="1"/>
+          <p:nvPr/>
+        </p:nvSpPr>
+        <p:spPr>
+          <a:xfrm>
+            <a:off x="7882128" y="1463040"/>
+            <a:ext cx="1604772" cy="822960"/>
+          </a:xfrm>
+          <a:prstGeom prst="rect">
+            <a:avLst/>
+          </a:prstGeom>
+          <a:noFill/>
+        </p:spPr>
+        <p:txBody>
+          <a:bodyPr wrap="square">
+            <a:spAutoFit/>
+          </a:bodyPr>
+          <a:lstStyle/>
           <a:p>
             <a:pPr>
-              <a:spcAft>
-                <a:spcPts val="1400"/>
-              </a:spcAft>
-              <a:defRPr sz="2100" b="0">
-                <a:solidFill>
-                  <a:srgbClr val="1A1A2E"/>
-                </a:solidFill>
-              </a:defRPr>
-            </a:pPr>
-            <a:r>
-              <a:t>• "从上下文工程到 MaaS，记忆正从技巧升级为核心基础设施。"</a:t>
+              <a:defRPr sz="1400" b="1">
+                <a:solidFill>
+                  <a:srgbClr val="553C9A"/>
+                </a:solidFill>
+              </a:defRPr>
+            </a:pPr>
+            <a:r>
+              <a:t>🔮 反思</a:t>
+            </a:r>
+            <a:br/>
+            <a:r>
+              <a:t>判断对错</a:t>
+            </a:r>
+          </a:p>
+        </p:txBody>
+      </p:sp>
+      <p:sp>
+        <p:nvSpPr>
+          <p:cNvPr id="19" name="TextBox 18"/>
+          <p:cNvSpPr txBox="1"/>
+          <p:nvPr/>
+        </p:nvSpPr>
+        <p:spPr>
+          <a:xfrm>
+            <a:off x="7882128" y="2377440"/>
+            <a:ext cx="1604772" cy="3657600"/>
+          </a:xfrm>
+          <a:prstGeom prst="rect">
+            <a:avLst/>
+          </a:prstGeom>
+          <a:noFill/>
+        </p:spPr>
+        <p:txBody>
+          <a:bodyPr wrap="square">
+            <a:spAutoFit/>
+          </a:bodyPr>
+          <a:lstStyle/>
+          <a:p>
+            <a:pPr algn="ctr">
+              <a:defRPr sz="1200">
+                <a:solidFill>
+                  <a:srgbClr val="A0AEC0"/>
+                </a:solidFill>
+              </a:defRPr>
+            </a:pPr>
+            <a:r>
+              <a:t>自我修正</a:t>
+            </a:r>
+          </a:p>
+          <a:p>
+            <a:pPr algn="ctr">
+              <a:defRPr sz="1200">
+                <a:solidFill>
+                  <a:srgbClr val="A0AEC0"/>
+                </a:solidFill>
+              </a:defRPr>
+            </a:pPr>
+            <a:r>
+              <a:t>反思记忆</a:t>
+            </a:r>
+          </a:p>
+          <a:p>
+            <a:pPr algn="ctr">
+              <a:defRPr sz="1200">
+                <a:solidFill>
+                  <a:srgbClr val="A0AEC0"/>
+                </a:solidFill>
+              </a:defRPr>
+            </a:pPr>
+            <a:r>
+              <a:t>元学习</a:t>
+            </a:r>
+          </a:p>
+        </p:txBody>
+      </p:sp>
+      <p:sp>
+        <p:nvSpPr>
+          <p:cNvPr id="20" name="Rounded Rectangle 19"/>
+          <p:cNvSpPr/>
+          <p:nvPr/>
+        </p:nvSpPr>
+        <p:spPr>
+          <a:xfrm>
+            <a:off x="9669780" y="1371600"/>
+            <a:ext cx="1650492" cy="4754880"/>
+          </a:xfrm>
+          <a:prstGeom prst="roundRect">
+            <a:avLst/>
+          </a:prstGeom>
+          <a:solidFill>
+            <a:srgbClr val="1A1A2E"/>
+          </a:solidFill>
+          <a:ln>
+            <a:noFill/>
+          </a:ln>
+        </p:spPr>
+        <p:style>
+          <a:lnRef idx="1">
+            <a:schemeClr val="accent1"/>
+          </a:lnRef>
+          <a:fillRef idx="3">
+            <a:schemeClr val="accent1"/>
+          </a:fillRef>
+          <a:effectRef idx="2">
+            <a:schemeClr val="accent1"/>
+          </a:effectRef>
+          <a:fontRef idx="minor">
+            <a:schemeClr val="lt1"/>
+          </a:fontRef>
+        </p:style>
+        <p:txBody>
+          <a:bodyPr rtlCol="0" anchor="ctr"/>
+          <a:lstStyle/>
+          <a:p>
+            <a:pPr algn="ctr"/>
+          </a:p>
+        </p:txBody>
+      </p:sp>
+      <p:sp>
+        <p:nvSpPr>
+          <p:cNvPr id="21" name="TextBox 20"/>
+          <p:cNvSpPr txBox="1"/>
+          <p:nvPr/>
+        </p:nvSpPr>
+        <p:spPr>
+          <a:xfrm>
+            <a:off x="9669780" y="1463040"/>
+            <a:ext cx="1604772" cy="822960"/>
+          </a:xfrm>
+          <a:prstGeom prst="rect">
+            <a:avLst/>
+          </a:prstGeom>
+          <a:noFill/>
+        </p:spPr>
+        <p:txBody>
+          <a:bodyPr wrap="square">
+            <a:spAutoFit/>
+          </a:bodyPr>
+          <a:lstStyle/>
+          <a:p>
+            <a:pPr>
+              <a:defRPr sz="1400" b="1">
+                <a:solidFill>
+                  <a:srgbClr val="553C9A"/>
+                </a:solidFill>
+              </a:defRPr>
+            </a:pPr>
+            <a:r>
+              <a:t>🤝 协作</a:t>
+            </a:r>
+            <a:br/>
+            <a:r>
+              <a:t>共同进化</a:t>
+            </a:r>
+          </a:p>
+        </p:txBody>
+      </p:sp>
+      <p:sp>
+        <p:nvSpPr>
+          <p:cNvPr id="22" name="TextBox 21"/>
+          <p:cNvSpPr txBox="1"/>
+          <p:nvPr/>
+        </p:nvSpPr>
+        <p:spPr>
+          <a:xfrm>
+            <a:off x="9669780" y="2377440"/>
+            <a:ext cx="1604772" cy="3657600"/>
+          </a:xfrm>
+          <a:prstGeom prst="rect">
+            <a:avLst/>
+          </a:prstGeom>
+          <a:noFill/>
+        </p:spPr>
+        <p:txBody>
+          <a:bodyPr wrap="square">
+            <a:spAutoFit/>
+          </a:bodyPr>
+          <a:lstStyle/>
+          <a:p>
+            <a:pPr algn="ctr">
+              <a:defRPr sz="1200">
+                <a:solidFill>
+                  <a:srgbClr val="A0AEC0"/>
+                </a:solidFill>
+              </a:defRPr>
+            </a:pPr>
+            <a:r>
+              <a:t>辩论</a:t>
+            </a:r>
+          </a:p>
+          <a:p>
+            <a:pPr algn="ctr">
+              <a:defRPr sz="1200">
+                <a:solidFill>
+                  <a:srgbClr val="A0AEC0"/>
+                </a:solidFill>
+              </a:defRPr>
+            </a:pPr>
+            <a:r>
+              <a:t>委托</a:t>
+            </a:r>
+          </a:p>
+          <a:p>
+            <a:pPr algn="ctr">
+              <a:defRPr sz="1200">
+                <a:solidFill>
+                  <a:srgbClr val="A0AEC0"/>
+                </a:solidFill>
+              </a:defRPr>
+            </a:pPr>
+            <a:r>
+              <a:t>群体</a:t>
             </a:r>
           </a:p>
         </p:txBody>
@@ -8203,7 +9219,7 @@
               </a:defRPr>
             </a:pPr>
             <a:r>
-              <a:t>推理模式：编织逻辑</a:t>
+              <a:t>👁️ 感知模式：看世界</a:t>
             </a:r>
           </a:p>
         </p:txBody>
@@ -8234,14 +9250,14 @@
               <a:spcAft>
                 <a:spcPts val="1400"/>
               </a:spcAft>
-              <a:defRPr sz="2100" b="0">
-                <a:solidFill>
-                  <a:srgbClr val="1A1A2E"/>
-                </a:solidFill>
-              </a:defRPr>
-            </a:pPr>
-            <a:r>
-              <a:t>• System 1 / System 2：快直觉 vs 慢刻意，Agent 需要两者兼顾</a:t>
+              <a:defRPr sz="2000" b="1">
+                <a:solidFill>
+                  <a:srgbClr val="553C9A"/>
+                </a:solidFill>
+              </a:defRPr>
+            </a:pPr>
+            <a:r>
+              <a:t>• 注意力聚焦 — 构建认知漏斗，用最低 Token 成本换取最高上下文质量</a:t>
             </a:r>
           </a:p>
           <a:p>
@@ -8249,14 +9265,14 @@
               <a:spcAft>
                 <a:spcPts val="1400"/>
               </a:spcAft>
-              <a:defRPr sz="2100" b="1">
-                <a:solidFill>
-                  <a:srgbClr val="553C9A"/>
-                </a:solidFill>
-              </a:defRPr>
-            </a:pPr>
-            <a:r>
-              <a:t>• 思维链(CoT) — 线性逐步推进，适合数学与逻辑推导（走钢丝）</a:t>
+              <a:defRPr sz="2000" b="0">
+                <a:solidFill>
+                  <a:srgbClr val="1A1A2E"/>
+                </a:solidFill>
+              </a:defRPr>
+            </a:pPr>
+            <a:r>
+              <a:t>• 多模态融合 — 建立统一语义场，从拼接式向原生式演进</a:t>
             </a:r>
           </a:p>
           <a:p>
@@ -8264,14 +9280,14 @@
               <a:spcAft>
                 <a:spcPts val="1400"/>
               </a:spcAft>
-              <a:defRPr sz="2100" b="1">
+              <a:defRPr sz="2000" b="1">
                 <a:solidFill>
                   <a:srgbClr val="553C9A"/>
                 </a:solidFill>
               </a:defRPr>
             </a:pPr>
             <a:r>
-              <a:t>• 思维树(ToT) — 启发式搜索+剪枝回溯，适合多分支权衡（迷宫探路）</a:t>
+              <a:t>• 主动感知 — Agent 从被动的答题者转变为主动的调查员</a:t>
             </a:r>
           </a:p>
           <a:p>
@@ -8279,29 +9295,14 @@
               <a:spcAft>
                 <a:spcPts val="1400"/>
               </a:spcAft>
-              <a:defRPr sz="2100" b="0">
+              <a:defRPr sz="2000" b="0">
                 <a:solidFill>
                   <a:srgbClr val="1A1A2E"/>
                 </a:solidFill>
               </a:defRPr>
             </a:pPr>
             <a:r>
-              <a:t>• 思维图(GoT) — 图结构编织+多轮迭代，适合复杂依赖整合（织布机）</a:t>
-            </a:r>
-          </a:p>
-          <a:p>
-            <a:pPr>
-              <a:spcAft>
-                <a:spcPts val="1400"/>
-              </a:spcAft>
-              <a:defRPr sz="2100" b="0">
-                <a:solidFill>
-                  <a:srgbClr val="1A1A2E"/>
-                </a:solidFill>
-              </a:defRPr>
-            </a:pPr>
-            <a:r>
-              <a:t>• "Agent 架构师应善于指挥整支认知乐团，而非迷信单一推理模式。"</a:t>
+              <a:t>• 本质：不是看到所有，而是看到关键并主动寻找未知</a:t>
             </a:r>
           </a:p>
         </p:txBody>
@@ -8440,7 +9441,7 @@
               </a:defRPr>
             </a:pPr>
             <a:r>
-              <a:t>行动模式：付诸实施</a:t>
+              <a:t>🧠 记忆模式：连接时间</a:t>
             </a:r>
           </a:p>
         </p:txBody>
@@ -8471,14 +9472,14 @@
               <a:spcAft>
                 <a:spcPts val="1400"/>
               </a:spcAft>
-              <a:defRPr sz="2100" b="1">
-                <a:solidFill>
-                  <a:srgbClr val="553C9A"/>
-                </a:solidFill>
-              </a:defRPr>
-            </a:pPr>
-            <a:r>
-              <a:t>• ReAct — 边想边做：Thought → Action → Observation 循环，实时获取环境反馈</a:t>
+              <a:defRPr sz="2000" b="0">
+                <a:solidFill>
+                  <a:srgbClr val="1A1A2E"/>
+                </a:solidFill>
+              </a:defRPr>
+            </a:pPr>
+            <a:r>
+              <a:t>• 分层记忆 — L1工作记忆 / L2短期缓存 / L3长期存储(Vector DB+知识图谱)</a:t>
             </a:r>
           </a:p>
           <a:p>
@@ -8486,14 +9487,14 @@
               <a:spcAft>
                 <a:spcPts val="1400"/>
               </a:spcAft>
-              <a:defRPr sz="2100" b="0">
-                <a:solidFill>
-                  <a:srgbClr val="1A1A2E"/>
-                </a:solidFill>
-              </a:defRPr>
-            </a:pPr>
-            <a:r>
-              <a:t>• 规划-执行 — 先制订全局战略，再分解为可执行步骤（运筹帷幄）</a:t>
+              <a:defRPr sz="2000" b="1">
+                <a:solidFill>
+                  <a:srgbClr val="553C9A"/>
+                </a:solidFill>
+              </a:defRPr>
+            </a:pPr>
+            <a:r>
+              <a:t>• RAG — 将推理能力(CPU)与知识存储(磁盘)解耦，极低成本保持时效性</a:t>
             </a:r>
           </a:p>
           <a:p>
@@ -8501,29 +9502,14 @@
               <a:spcAft>
                 <a:spcPts val="1400"/>
               </a:spcAft>
-              <a:defRPr sz="2100" b="0">
-                <a:solidFill>
-                  <a:srgbClr val="1A1A2E"/>
-                </a:solidFill>
-              </a:defRPr>
-            </a:pPr>
-            <a:r>
-              <a:t>• 工具编排 — 精准选择、协同调配海量外部工具（调兵遣将）</a:t>
-            </a:r>
-          </a:p>
-          <a:p>
-            <a:pPr>
-              <a:spcAft>
-                <a:spcPts val="1400"/>
-              </a:spcAft>
-              <a:defRPr sz="2100" b="0">
-                <a:solidFill>
-                  <a:srgbClr val="1A1A2E"/>
-                </a:solidFill>
-              </a:defRPr>
-            </a:pPr>
-            <a:r>
-              <a:t>• 自适应策略 — 从「进化论」角度，通过试错+反馈+选择演化出最优决策</a:t>
+              <a:defRPr sz="2000" b="1">
+                <a:solidFill>
+                  <a:srgbClr val="553C9A"/>
+                </a:solidFill>
+              </a:defRPr>
+            </a:pPr>
+            <a:r>
+              <a:t>• 情节记忆 — 沉淀 Agent 自身交互产生的动态经验，无需微调即可进化</a:t>
             </a:r>
           </a:p>
         </p:txBody>
@@ -8662,7 +9648,7 @@
               </a:defRPr>
             </a:pPr>
             <a:r>
-              <a:t>反思模式：AI 的灵魂工程学</a:t>
+              <a:t>⚙️ 推理模式：编织逻辑</a:t>
             </a:r>
           </a:p>
         </p:txBody>
@@ -8693,14 +9679,14 @@
               <a:spcAft>
                 <a:spcPts val="1400"/>
               </a:spcAft>
-              <a:defRPr sz="2100" b="0">
+              <a:defRPr sz="2000" b="0">
                 <a:solidFill>
                   <a:srgbClr val="1A1A2E"/>
                 </a:solidFill>
               </a:defRPr>
             </a:pPr>
             <a:r>
-              <a:t>• 自我修正 — 当下毫秒级，像橡皮擦一样擦除错误（仅限当前任务）</a:t>
+              <a:t>• System 1 / System 2：快直觉 vs 慢刻意，Agent 需要两者兼顾</a:t>
             </a:r>
           </a:p>
           <a:p>
@@ -8708,14 +9694,14 @@
               <a:spcAft>
                 <a:spcPts val="1400"/>
               </a:spcAft>
-              <a:defRPr sz="2100" b="0">
-                <a:solidFill>
-                  <a:srgbClr val="1A1A2E"/>
-                </a:solidFill>
-              </a:defRPr>
-            </a:pPr>
-            <a:r>
-              <a:t>• 反思记忆 — 下次分钟级，像错题本一样生成「语言形式的教训」存入长期记忆</a:t>
+              <a:defRPr sz="2000" b="1">
+                <a:solidFill>
+                  <a:srgbClr val="553C9A"/>
+                </a:solidFill>
+              </a:defRPr>
+            </a:pPr>
+            <a:r>
+              <a:t>• 思维链(CoT) — 线性逐步推进，适合数学与逻辑推导（走钢丝）</a:t>
             </a:r>
           </a:p>
           <a:p>
@@ -8723,14 +9709,14 @@
               <a:spcAft>
                 <a:spcPts val="1400"/>
               </a:spcAft>
-              <a:defRPr sz="2100" b="1">
+              <a:defRPr sz="2000" b="1">
                 <a:solidFill>
                   <a:srgbClr val="553C9A"/>
                 </a:solidFill>
               </a:defRPr>
             </a:pPr>
             <a:r>
-              <a:t>• 元学习 — 长远日/周级，像修订教科书一样借助优化器自动迭代 Prompt</a:t>
+              <a:t>• 思维树(ToT) — 启发式搜索+剪枝回溯，适合多分支权衡（迷宫探路）</a:t>
             </a:r>
           </a:p>
           <a:p>
@@ -8738,29 +9724,14 @@
               <a:spcAft>
                 <a:spcPts val="1400"/>
               </a:spcAft>
-              <a:defRPr sz="2100" b="1">
-                <a:solidFill>
-                  <a:srgbClr val="553C9A"/>
-                </a:solidFill>
-              </a:defRPr>
-            </a:pPr>
-            <a:r>
-              <a:t>• 感知/记忆/推理/行动/反思 = 眼睛/神经/大脑/肌肉/灵魂</a:t>
-            </a:r>
-          </a:p>
-          <a:p>
-            <a:pPr>
-              <a:spcAft>
-                <a:spcPts val="1400"/>
-              </a:spcAft>
-              <a:defRPr sz="2100" b="0">
+              <a:defRPr sz="2000" b="0">
                 <a:solidFill>
                   <a:srgbClr val="1A1A2E"/>
                 </a:solidFill>
               </a:defRPr>
             </a:pPr>
             <a:r>
-              <a:t>• "机器何时拥有灵魂？当它开始为自己的错误感到不安时。"</a:t>
+              <a:t>• 思维图(GoT) — 图结构编织+多轮迭代，适合复杂依赖整合（织布机）</a:t>
             </a:r>
           </a:p>
         </p:txBody>
@@ -8899,7 +9870,7 @@
               </a:defRPr>
             </a:pPr>
             <a:r>
-              <a:t>协作模式：共同进化</a:t>
+              <a:t>💪 行动模式：付诸实施</a:t>
             </a:r>
           </a:p>
         </p:txBody>
@@ -8930,14 +9901,14 @@
               <a:spcAft>
                 <a:spcPts val="1400"/>
               </a:spcAft>
-              <a:defRPr sz="2100" b="0">
-                <a:solidFill>
-                  <a:srgbClr val="1A1A2E"/>
-                </a:solidFill>
-              </a:defRPr>
-            </a:pPr>
-            <a:r>
-              <a:t>• 辩论 — 对抗性推演，真理在多角度交锋中清晰（法庭正反双方）</a:t>
+              <a:defRPr sz="2000" b="1">
+                <a:solidFill>
+                  <a:srgbClr val="553C9A"/>
+                </a:solidFill>
+              </a:defRPr>
+            </a:pPr>
+            <a:r>
+              <a:t>• ReAct — 边想边做：Thought Action Observation 循环，实时获取环境反馈</a:t>
             </a:r>
           </a:p>
           <a:p>
@@ -8945,14 +9916,14 @@
               <a:spcAft>
                 <a:spcPts val="1400"/>
               </a:spcAft>
-              <a:defRPr sz="2100" b="0">
+              <a:defRPr sz="2000" b="0">
                 <a:solidFill>
                   <a:srgbClr val="1A1A2E"/>
                 </a:solidFill>
               </a:defRPr>
             </a:pPr>
             <a:r>
-              <a:t>• 委托 — 层级目标分解，经理指挥工人的高效执行</a:t>
+              <a:t>• 规划-执行 — 先制订全局战略，再分解为可执行步骤（运筹帷幄）</a:t>
             </a:r>
           </a:p>
           <a:p>
@@ -8960,14 +9931,14 @@
               <a:spcAft>
                 <a:spcPts val="1400"/>
               </a:spcAft>
-              <a:defRPr sz="2100" b="0">
+              <a:defRPr sz="2000" b="0">
                 <a:solidFill>
                   <a:srgbClr val="1A1A2E"/>
                 </a:solidFill>
               </a:defRPr>
             </a:pPr>
             <a:r>
-              <a:t>• 路由 — 精准分发，像医院分诊台将任务分配给最适合的 Agent</a:t>
+              <a:t>• 工具编排 — 精准选择、协同调配海量外部工具（调兵遣将）</a:t>
             </a:r>
           </a:p>
           <a:p>
@@ -8975,14 +9946,14 @@
               <a:spcAft>
                 <a:spcPts val="1400"/>
               </a:spcAft>
-              <a:defRPr sz="2100" b="1">
-                <a:solidFill>
-                  <a:srgbClr val="553C9A"/>
-                </a:solidFill>
-              </a:defRPr>
-            </a:pPr>
-            <a:r>
-              <a:t>• 群体 — 自组织涌现，像蚁群迁徙无需明确指挥者</a:t>
+              <a:defRPr sz="2000" b="0">
+                <a:solidFill>
+                  <a:srgbClr val="1A1A2E"/>
+                </a:solidFill>
+              </a:defRPr>
+            </a:pPr>
+            <a:r>
+              <a:t>• 自适应策略 — 从进化论角度，通过试错+反馈+选择演化出最优决策</a:t>
             </a:r>
           </a:p>
         </p:txBody>
@@ -9057,7 +10028,7 @@
         <p:spPr>
           <a:xfrm>
             <a:off x="0" y="0"/>
-            <a:ext cx="12188952" cy="137160"/>
+            <a:ext cx="12188952" cy="1097280"/>
           </a:xfrm>
           <a:prstGeom prst="rect">
             <a:avLst/>
@@ -9099,8 +10070,43 @@
         </p:nvSpPr>
         <p:spPr>
           <a:xfrm>
-            <a:off x="457200" y="365760"/>
-            <a:ext cx="11274552" cy="2286000"/>
+            <a:off x="457200" y="228600"/>
+            <a:ext cx="11274552" cy="822960"/>
+          </a:xfrm>
+          <a:prstGeom prst="rect">
+            <a:avLst/>
+          </a:prstGeom>
+          <a:noFill/>
+        </p:spPr>
+        <p:txBody>
+          <a:bodyPr wrap="none">
+            <a:spAutoFit/>
+          </a:bodyPr>
+          <a:lstStyle/>
+          <a:p>
+            <a:pPr>
+              <a:defRPr sz="3200" b="1">
+                <a:solidFill>
+                  <a:srgbClr val="FFFFFF"/>
+                </a:solidFill>
+              </a:defRPr>
+            </a:pPr>
+            <a:r>
+              <a:t>🔮 反思模式：AI 的灵魂工程学</a:t>
+            </a:r>
+          </a:p>
+        </p:txBody>
+      </p:sp>
+      <p:sp>
+        <p:nvSpPr>
+          <p:cNvPr id="5" name="TextBox 4"/>
+          <p:cNvSpPr txBox="1"/>
+          <p:nvPr/>
+        </p:nvSpPr>
+        <p:spPr>
+          <a:xfrm>
+            <a:off x="640080" y="1371600"/>
+            <a:ext cx="10972800" cy="5029200"/>
           </a:xfrm>
           <a:prstGeom prst="rect">
             <a:avLst/>
@@ -9113,120 +10119,40 @@
           </a:bodyPr>
           <a:lstStyle/>
           <a:p>
-            <a:pPr algn="ctr">
-              <a:defRPr sz="2800" i="1">
+            <a:pPr>
+              <a:spcAft>
+                <a:spcPts val="1400"/>
+              </a:spcAft>
+              <a:defRPr sz="2000" b="0">
                 <a:solidFill>
                   <a:srgbClr val="1A1A2E"/>
                 </a:solidFill>
               </a:defRPr>
             </a:pPr>
             <a:r>
-              <a:t>"智能的最高形态，不在于独立思考，而在于共同进化。"</a:t>
-            </a:r>
-          </a:p>
-        </p:txBody>
-      </p:sp>
-      <p:sp>
-        <p:nvSpPr>
-          <p:cNvPr id="5" name="Rounded Rectangle 4"/>
-          <p:cNvSpPr/>
-          <p:nvPr/>
-        </p:nvSpPr>
-        <p:spPr>
-          <a:xfrm>
-            <a:off x="457200" y="1828800"/>
-            <a:ext cx="2103120" cy="4114800"/>
-          </a:xfrm>
-          <a:prstGeom prst="roundRect">
-            <a:avLst/>
-          </a:prstGeom>
-          <a:solidFill>
-            <a:srgbClr val="1A1A2E"/>
-          </a:solidFill>
-          <a:ln>
-            <a:noFill/>
-          </a:ln>
-        </p:spPr>
-        <p:style>
-          <a:lnRef idx="1">
-            <a:schemeClr val="accent1"/>
-          </a:lnRef>
-          <a:fillRef idx="3">
-            <a:schemeClr val="accent1"/>
-          </a:fillRef>
-          <a:effectRef idx="2">
-            <a:schemeClr val="accent1"/>
-          </a:effectRef>
-          <a:fontRef idx="minor">
-            <a:schemeClr val="lt1"/>
-          </a:fontRef>
-        </p:style>
-        <p:txBody>
-          <a:bodyPr rtlCol="0" anchor="ctr"/>
-          <a:lstStyle/>
-          <a:p>
-            <a:pPr algn="ctr"/>
-          </a:p>
-        </p:txBody>
-      </p:sp>
-      <p:sp>
-        <p:nvSpPr>
-          <p:cNvPr id="6" name="TextBox 5"/>
-          <p:cNvSpPr txBox="1"/>
-          <p:nvPr/>
-        </p:nvSpPr>
-        <p:spPr>
-          <a:xfrm>
-            <a:off x="457200" y="2011680"/>
-            <a:ext cx="2103120" cy="1188720"/>
-          </a:xfrm>
-          <a:prstGeom prst="rect">
-            <a:avLst/>
-          </a:prstGeom>
-          <a:noFill/>
-        </p:spPr>
-        <p:txBody>
-          <a:bodyPr wrap="none">
-            <a:spAutoFit/>
-          </a:bodyPr>
-          <a:lstStyle/>
-          <a:p>
-            <a:pPr algn="ctr">
-              <a:defRPr sz="3000" b="0">
-                <a:solidFill>
-                  <a:srgbClr val="FFFFFF"/>
-                </a:solidFill>
-              </a:defRPr>
-            </a:pPr>
-            <a:r>
-              <a:t>👁️ 感知</a:t>
-            </a:r>
-          </a:p>
-        </p:txBody>
-      </p:sp>
-      <p:sp>
-        <p:nvSpPr>
-          <p:cNvPr id="7" name="TextBox 6"/>
-          <p:cNvSpPr txBox="1"/>
-          <p:nvPr/>
-        </p:nvSpPr>
-        <p:spPr>
-          <a:xfrm>
-            <a:off x="457200" y="3291840"/>
-            <a:ext cx="2103120" cy="1188720"/>
-          </a:xfrm>
-          <a:prstGeom prst="rect">
-            <a:avLst/>
-          </a:prstGeom>
-          <a:noFill/>
-        </p:spPr>
-        <p:txBody>
-          <a:bodyPr wrap="none">
-            <a:spAutoFit/>
-          </a:bodyPr>
-          <a:lstStyle/>
-          <a:p>
-            <a:pPr algn="ctr">
+              <a:t>• 自我修正 — 当下毫秒级，像橡皮擦一样擦除错误（仅限当前任务）</a:t>
+            </a:r>
+          </a:p>
+          <a:p>
+            <a:pPr>
+              <a:spcAft>
+                <a:spcPts val="1400"/>
+              </a:spcAft>
+              <a:defRPr sz="2000" b="0">
+                <a:solidFill>
+                  <a:srgbClr val="1A1A2E"/>
+                </a:solidFill>
+              </a:defRPr>
+            </a:pPr>
+            <a:r>
+              <a:t>• 反思记忆 — 下次分钟级，像错题本一样生成语言形式的教训存入长期记忆</a:t>
+            </a:r>
+          </a:p>
+          <a:p>
+            <a:pPr>
+              <a:spcAft>
+                <a:spcPts val="1400"/>
+              </a:spcAft>
               <a:defRPr sz="2000" b="1">
                 <a:solidFill>
                   <a:srgbClr val="553C9A"/>
@@ -9234,147 +10160,14 @@
               </a:defRPr>
             </a:pPr>
             <a:r>
-              <a:t>眼睛</a:t>
-            </a:r>
-          </a:p>
-        </p:txBody>
-      </p:sp>
-      <p:sp>
-        <p:nvSpPr>
-          <p:cNvPr id="8" name="TextBox 7"/>
-          <p:cNvSpPr txBox="1"/>
-          <p:nvPr/>
-        </p:nvSpPr>
-        <p:spPr>
-          <a:xfrm>
-            <a:off x="457200" y="4572000"/>
-            <a:ext cx="2103120" cy="1188720"/>
-          </a:xfrm>
-          <a:prstGeom prst="rect">
-            <a:avLst/>
-          </a:prstGeom>
-          <a:noFill/>
-        </p:spPr>
-        <p:txBody>
-          <a:bodyPr wrap="none">
-            <a:spAutoFit/>
-          </a:bodyPr>
-          <a:lstStyle/>
-          <a:p>
-            <a:pPr algn="ctr">
-              <a:defRPr sz="1200" b="0">
-                <a:solidFill>
-                  <a:srgbClr val="FFFFFF"/>
-                </a:solidFill>
-              </a:defRPr>
-            </a:pPr>
-            <a:r>
-              <a:t>捕捉世界的信息</a:t>
-            </a:r>
-          </a:p>
-        </p:txBody>
-      </p:sp>
-      <p:sp>
-        <p:nvSpPr>
-          <p:cNvPr id="9" name="Rounded Rectangle 8"/>
-          <p:cNvSpPr/>
-          <p:nvPr/>
-        </p:nvSpPr>
-        <p:spPr>
-          <a:xfrm>
-            <a:off x="2743200" y="1828800"/>
-            <a:ext cx="2103120" cy="4114800"/>
-          </a:xfrm>
-          <a:prstGeom prst="roundRect">
-            <a:avLst/>
-          </a:prstGeom>
-          <a:solidFill>
-            <a:srgbClr val="1A1A2E"/>
-          </a:solidFill>
-          <a:ln>
-            <a:noFill/>
-          </a:ln>
-        </p:spPr>
-        <p:style>
-          <a:lnRef idx="1">
-            <a:schemeClr val="accent1"/>
-          </a:lnRef>
-          <a:fillRef idx="3">
-            <a:schemeClr val="accent1"/>
-          </a:fillRef>
-          <a:effectRef idx="2">
-            <a:schemeClr val="accent1"/>
-          </a:effectRef>
-          <a:fontRef idx="minor">
-            <a:schemeClr val="lt1"/>
-          </a:fontRef>
-        </p:style>
-        <p:txBody>
-          <a:bodyPr rtlCol="0" anchor="ctr"/>
-          <a:lstStyle/>
-          <a:p>
-            <a:pPr algn="ctr"/>
-          </a:p>
-        </p:txBody>
-      </p:sp>
-      <p:sp>
-        <p:nvSpPr>
-          <p:cNvPr id="10" name="TextBox 9"/>
-          <p:cNvSpPr txBox="1"/>
-          <p:nvPr/>
-        </p:nvSpPr>
-        <p:spPr>
-          <a:xfrm>
-            <a:off x="2743200" y="2011680"/>
-            <a:ext cx="2103120" cy="1188720"/>
-          </a:xfrm>
-          <a:prstGeom prst="rect">
-            <a:avLst/>
-          </a:prstGeom>
-          <a:noFill/>
-        </p:spPr>
-        <p:txBody>
-          <a:bodyPr wrap="none">
-            <a:spAutoFit/>
-          </a:bodyPr>
-          <a:lstStyle/>
-          <a:p>
-            <a:pPr algn="ctr">
-              <a:defRPr sz="3000" b="0">
-                <a:solidFill>
-                  <a:srgbClr val="FFFFFF"/>
-                </a:solidFill>
-              </a:defRPr>
-            </a:pPr>
-            <a:r>
-              <a:t>🧠 记忆</a:t>
-            </a:r>
-          </a:p>
-        </p:txBody>
-      </p:sp>
-      <p:sp>
-        <p:nvSpPr>
-          <p:cNvPr id="11" name="TextBox 10"/>
-          <p:cNvSpPr txBox="1"/>
-          <p:nvPr/>
-        </p:nvSpPr>
-        <p:spPr>
-          <a:xfrm>
-            <a:off x="2743200" y="3291840"/>
-            <a:ext cx="2103120" cy="1188720"/>
-          </a:xfrm>
-          <a:prstGeom prst="rect">
-            <a:avLst/>
-          </a:prstGeom>
-          <a:noFill/>
-        </p:spPr>
-        <p:txBody>
-          <a:bodyPr wrap="none">
-            <a:spAutoFit/>
-          </a:bodyPr>
-          <a:lstStyle/>
-          <a:p>
-            <a:pPr algn="ctr">
+              <a:t>• 元学习 — 长远日/周级，像修订教科书一样借助优化器自动迭代 Prompt</a:t>
+            </a:r>
+          </a:p>
+          <a:p>
+            <a:pPr>
+              <a:spcAft>
+                <a:spcPts val="1400"/>
+              </a:spcAft>
               <a:defRPr sz="2000" b="1">
                 <a:solidFill>
                   <a:srgbClr val="553C9A"/>
@@ -9382,486 +10175,7 @@
               </a:defRPr>
             </a:pPr>
             <a:r>
-              <a:t>神经</a:t>
-            </a:r>
-          </a:p>
-        </p:txBody>
-      </p:sp>
-      <p:sp>
-        <p:nvSpPr>
-          <p:cNvPr id="12" name="TextBox 11"/>
-          <p:cNvSpPr txBox="1"/>
-          <p:nvPr/>
-        </p:nvSpPr>
-        <p:spPr>
-          <a:xfrm>
-            <a:off x="2743200" y="4572000"/>
-            <a:ext cx="2103120" cy="1188720"/>
-          </a:xfrm>
-          <a:prstGeom prst="rect">
-            <a:avLst/>
-          </a:prstGeom>
-          <a:noFill/>
-        </p:spPr>
-        <p:txBody>
-          <a:bodyPr wrap="none">
-            <a:spAutoFit/>
-          </a:bodyPr>
-          <a:lstStyle/>
-          <a:p>
-            <a:pPr algn="ctr">
-              <a:defRPr sz="1200" b="0">
-                <a:solidFill>
-                  <a:srgbClr val="FFFFFF"/>
-                </a:solidFill>
-              </a:defRPr>
-            </a:pPr>
-            <a:r>
-              <a:t>承载经验的痕迹</a:t>
-            </a:r>
-          </a:p>
-        </p:txBody>
-      </p:sp>
-      <p:sp>
-        <p:nvSpPr>
-          <p:cNvPr id="13" name="Rounded Rectangle 12"/>
-          <p:cNvSpPr/>
-          <p:nvPr/>
-        </p:nvSpPr>
-        <p:spPr>
-          <a:xfrm>
-            <a:off x="5029200" y="1828800"/>
-            <a:ext cx="2103120" cy="4114800"/>
-          </a:xfrm>
-          <a:prstGeom prst="roundRect">
-            <a:avLst/>
-          </a:prstGeom>
-          <a:solidFill>
-            <a:srgbClr val="1A1A2E"/>
-          </a:solidFill>
-          <a:ln>
-            <a:noFill/>
-          </a:ln>
-        </p:spPr>
-        <p:style>
-          <a:lnRef idx="1">
-            <a:schemeClr val="accent1"/>
-          </a:lnRef>
-          <a:fillRef idx="3">
-            <a:schemeClr val="accent1"/>
-          </a:fillRef>
-          <a:effectRef idx="2">
-            <a:schemeClr val="accent1"/>
-          </a:effectRef>
-          <a:fontRef idx="minor">
-            <a:schemeClr val="lt1"/>
-          </a:fontRef>
-        </p:style>
-        <p:txBody>
-          <a:bodyPr rtlCol="0" anchor="ctr"/>
-          <a:lstStyle/>
-          <a:p>
-            <a:pPr algn="ctr"/>
-          </a:p>
-        </p:txBody>
-      </p:sp>
-      <p:sp>
-        <p:nvSpPr>
-          <p:cNvPr id="14" name="TextBox 13"/>
-          <p:cNvSpPr txBox="1"/>
-          <p:nvPr/>
-        </p:nvSpPr>
-        <p:spPr>
-          <a:xfrm>
-            <a:off x="5029200" y="2011680"/>
-            <a:ext cx="2103120" cy="1188720"/>
-          </a:xfrm>
-          <a:prstGeom prst="rect">
-            <a:avLst/>
-          </a:prstGeom>
-          <a:noFill/>
-        </p:spPr>
-        <p:txBody>
-          <a:bodyPr wrap="none">
-            <a:spAutoFit/>
-          </a:bodyPr>
-          <a:lstStyle/>
-          <a:p>
-            <a:pPr algn="ctr">
-              <a:defRPr sz="3000" b="0">
-                <a:solidFill>
-                  <a:srgbClr val="FFFFFF"/>
-                </a:solidFill>
-              </a:defRPr>
-            </a:pPr>
-            <a:r>
-              <a:t>⚙️ 推理</a:t>
-            </a:r>
-          </a:p>
-        </p:txBody>
-      </p:sp>
-      <p:sp>
-        <p:nvSpPr>
-          <p:cNvPr id="15" name="TextBox 14"/>
-          <p:cNvSpPr txBox="1"/>
-          <p:nvPr/>
-        </p:nvSpPr>
-        <p:spPr>
-          <a:xfrm>
-            <a:off x="5029200" y="3291840"/>
-            <a:ext cx="2103120" cy="1188720"/>
-          </a:xfrm>
-          <a:prstGeom prst="rect">
-            <a:avLst/>
-          </a:prstGeom>
-          <a:noFill/>
-        </p:spPr>
-        <p:txBody>
-          <a:bodyPr wrap="none">
-            <a:spAutoFit/>
-          </a:bodyPr>
-          <a:lstStyle/>
-          <a:p>
-            <a:pPr algn="ctr">
-              <a:defRPr sz="2000" b="1">
-                <a:solidFill>
-                  <a:srgbClr val="553C9A"/>
-                </a:solidFill>
-              </a:defRPr>
-            </a:pPr>
-            <a:r>
-              <a:t>大脑</a:t>
-            </a:r>
-          </a:p>
-        </p:txBody>
-      </p:sp>
-      <p:sp>
-        <p:nvSpPr>
-          <p:cNvPr id="16" name="TextBox 15"/>
-          <p:cNvSpPr txBox="1"/>
-          <p:nvPr/>
-        </p:nvSpPr>
-        <p:spPr>
-          <a:xfrm>
-            <a:off x="5029200" y="4572000"/>
-            <a:ext cx="2103120" cy="1188720"/>
-          </a:xfrm>
-          <a:prstGeom prst="rect">
-            <a:avLst/>
-          </a:prstGeom>
-          <a:noFill/>
-        </p:spPr>
-        <p:txBody>
-          <a:bodyPr wrap="none">
-            <a:spAutoFit/>
-          </a:bodyPr>
-          <a:lstStyle/>
-          <a:p>
-            <a:pPr algn="ctr">
-              <a:defRPr sz="1200" b="0">
-                <a:solidFill>
-                  <a:srgbClr val="FFFFFF"/>
-                </a:solidFill>
-              </a:defRPr>
-            </a:pPr>
-            <a:r>
-              <a:t>编织逻辑的网络</a:t>
-            </a:r>
-          </a:p>
-        </p:txBody>
-      </p:sp>
-      <p:sp>
-        <p:nvSpPr>
-          <p:cNvPr id="17" name="Rounded Rectangle 16"/>
-          <p:cNvSpPr/>
-          <p:nvPr/>
-        </p:nvSpPr>
-        <p:spPr>
-          <a:xfrm>
-            <a:off x="7315200" y="1828800"/>
-            <a:ext cx="2103120" cy="4114800"/>
-          </a:xfrm>
-          <a:prstGeom prst="roundRect">
-            <a:avLst/>
-          </a:prstGeom>
-          <a:solidFill>
-            <a:srgbClr val="1A1A2E"/>
-          </a:solidFill>
-          <a:ln>
-            <a:noFill/>
-          </a:ln>
-        </p:spPr>
-        <p:style>
-          <a:lnRef idx="1">
-            <a:schemeClr val="accent1"/>
-          </a:lnRef>
-          <a:fillRef idx="3">
-            <a:schemeClr val="accent1"/>
-          </a:fillRef>
-          <a:effectRef idx="2">
-            <a:schemeClr val="accent1"/>
-          </a:effectRef>
-          <a:fontRef idx="minor">
-            <a:schemeClr val="lt1"/>
-          </a:fontRef>
-        </p:style>
-        <p:txBody>
-          <a:bodyPr rtlCol="0" anchor="ctr"/>
-          <a:lstStyle/>
-          <a:p>
-            <a:pPr algn="ctr"/>
-          </a:p>
-        </p:txBody>
-      </p:sp>
-      <p:sp>
-        <p:nvSpPr>
-          <p:cNvPr id="18" name="TextBox 17"/>
-          <p:cNvSpPr txBox="1"/>
-          <p:nvPr/>
-        </p:nvSpPr>
-        <p:spPr>
-          <a:xfrm>
-            <a:off x="7315200" y="2011680"/>
-            <a:ext cx="2103120" cy="1188720"/>
-          </a:xfrm>
-          <a:prstGeom prst="rect">
-            <a:avLst/>
-          </a:prstGeom>
-          <a:noFill/>
-        </p:spPr>
-        <p:txBody>
-          <a:bodyPr wrap="none">
-            <a:spAutoFit/>
-          </a:bodyPr>
-          <a:lstStyle/>
-          <a:p>
-            <a:pPr algn="ctr">
-              <a:defRPr sz="3000" b="0">
-                <a:solidFill>
-                  <a:srgbClr val="FFFFFF"/>
-                </a:solidFill>
-              </a:defRPr>
-            </a:pPr>
-            <a:r>
-              <a:t>💪 行动</a:t>
-            </a:r>
-          </a:p>
-        </p:txBody>
-      </p:sp>
-      <p:sp>
-        <p:nvSpPr>
-          <p:cNvPr id="19" name="TextBox 18"/>
-          <p:cNvSpPr txBox="1"/>
-          <p:nvPr/>
-        </p:nvSpPr>
-        <p:spPr>
-          <a:xfrm>
-            <a:off x="7315200" y="3291840"/>
-            <a:ext cx="2103120" cy="1188720"/>
-          </a:xfrm>
-          <a:prstGeom prst="rect">
-            <a:avLst/>
-          </a:prstGeom>
-          <a:noFill/>
-        </p:spPr>
-        <p:txBody>
-          <a:bodyPr wrap="none">
-            <a:spAutoFit/>
-          </a:bodyPr>
-          <a:lstStyle/>
-          <a:p>
-            <a:pPr algn="ctr">
-              <a:defRPr sz="2000" b="1">
-                <a:solidFill>
-                  <a:srgbClr val="553C9A"/>
-                </a:solidFill>
-              </a:defRPr>
-            </a:pPr>
-            <a:r>
-              <a:t>肌肉</a:t>
-            </a:r>
-          </a:p>
-        </p:txBody>
-      </p:sp>
-      <p:sp>
-        <p:nvSpPr>
-          <p:cNvPr id="20" name="TextBox 19"/>
-          <p:cNvSpPr txBox="1"/>
-          <p:nvPr/>
-        </p:nvSpPr>
-        <p:spPr>
-          <a:xfrm>
-            <a:off x="7315200" y="4572000"/>
-            <a:ext cx="2103120" cy="1188720"/>
-          </a:xfrm>
-          <a:prstGeom prst="rect">
-            <a:avLst/>
-          </a:prstGeom>
-          <a:noFill/>
-        </p:spPr>
-        <p:txBody>
-          <a:bodyPr wrap="none">
-            <a:spAutoFit/>
-          </a:bodyPr>
-          <a:lstStyle/>
-          <a:p>
-            <a:pPr algn="ctr">
-              <a:defRPr sz="1200" b="0">
-                <a:solidFill>
-                  <a:srgbClr val="FFFFFF"/>
-                </a:solidFill>
-              </a:defRPr>
-            </a:pPr>
-            <a:r>
-              <a:t>驱动行动的执行</a:t>
-            </a:r>
-          </a:p>
-        </p:txBody>
-      </p:sp>
-      <p:sp>
-        <p:nvSpPr>
-          <p:cNvPr id="21" name="Rounded Rectangle 20"/>
-          <p:cNvSpPr/>
-          <p:nvPr/>
-        </p:nvSpPr>
-        <p:spPr>
-          <a:xfrm>
-            <a:off x="9601200" y="1828800"/>
-            <a:ext cx="2103120" cy="4114800"/>
-          </a:xfrm>
-          <a:prstGeom prst="roundRect">
-            <a:avLst/>
-          </a:prstGeom>
-          <a:solidFill>
-            <a:srgbClr val="1A1A2E"/>
-          </a:solidFill>
-          <a:ln>
-            <a:noFill/>
-          </a:ln>
-        </p:spPr>
-        <p:style>
-          <a:lnRef idx="1">
-            <a:schemeClr val="accent1"/>
-          </a:lnRef>
-          <a:fillRef idx="3">
-            <a:schemeClr val="accent1"/>
-          </a:fillRef>
-          <a:effectRef idx="2">
-            <a:schemeClr val="accent1"/>
-          </a:effectRef>
-          <a:fontRef idx="minor">
-            <a:schemeClr val="lt1"/>
-          </a:fontRef>
-        </p:style>
-        <p:txBody>
-          <a:bodyPr rtlCol="0" anchor="ctr"/>
-          <a:lstStyle/>
-          <a:p>
-            <a:pPr algn="ctr"/>
-          </a:p>
-        </p:txBody>
-      </p:sp>
-      <p:sp>
-        <p:nvSpPr>
-          <p:cNvPr id="22" name="TextBox 21"/>
-          <p:cNvSpPr txBox="1"/>
-          <p:nvPr/>
-        </p:nvSpPr>
-        <p:spPr>
-          <a:xfrm>
-            <a:off x="9601200" y="2011680"/>
-            <a:ext cx="2103120" cy="1188720"/>
-          </a:xfrm>
-          <a:prstGeom prst="rect">
-            <a:avLst/>
-          </a:prstGeom>
-          <a:noFill/>
-        </p:spPr>
-        <p:txBody>
-          <a:bodyPr wrap="none">
-            <a:spAutoFit/>
-          </a:bodyPr>
-          <a:lstStyle/>
-          <a:p>
-            <a:pPr algn="ctr">
-              <a:defRPr sz="3000" b="0">
-                <a:solidFill>
-                  <a:srgbClr val="FFFFFF"/>
-                </a:solidFill>
-              </a:defRPr>
-            </a:pPr>
-            <a:r>
-              <a:t>🔮 反思</a:t>
-            </a:r>
-          </a:p>
-        </p:txBody>
-      </p:sp>
-      <p:sp>
-        <p:nvSpPr>
-          <p:cNvPr id="23" name="TextBox 22"/>
-          <p:cNvSpPr txBox="1"/>
-          <p:nvPr/>
-        </p:nvSpPr>
-        <p:spPr>
-          <a:xfrm>
-            <a:off x="9601200" y="3291840"/>
-            <a:ext cx="2103120" cy="1188720"/>
-          </a:xfrm>
-          <a:prstGeom prst="rect">
-            <a:avLst/>
-          </a:prstGeom>
-          <a:noFill/>
-        </p:spPr>
-        <p:txBody>
-          <a:bodyPr wrap="none">
-            <a:spAutoFit/>
-          </a:bodyPr>
-          <a:lstStyle/>
-          <a:p>
-            <a:pPr algn="ctr">
-              <a:defRPr sz="2000" b="1">
-                <a:solidFill>
-                  <a:srgbClr val="553C9A"/>
-                </a:solidFill>
-              </a:defRPr>
-            </a:pPr>
-            <a:r>
-              <a:t>灵魂</a:t>
-            </a:r>
-          </a:p>
-        </p:txBody>
-      </p:sp>
-      <p:sp>
-        <p:nvSpPr>
-          <p:cNvPr id="24" name="TextBox 23"/>
-          <p:cNvSpPr txBox="1"/>
-          <p:nvPr/>
-        </p:nvSpPr>
-        <p:spPr>
-          <a:xfrm>
-            <a:off x="9601200" y="4572000"/>
-            <a:ext cx="2103120" cy="1188720"/>
-          </a:xfrm>
-          <a:prstGeom prst="rect">
-            <a:avLst/>
-          </a:prstGeom>
-          <a:noFill/>
-        </p:spPr>
-        <p:txBody>
-          <a:bodyPr wrap="none">
-            <a:spAutoFit/>
-          </a:bodyPr>
-          <a:lstStyle/>
-          <a:p>
-            <a:pPr algn="ctr">
-              <a:defRPr sz="1200" b="0">
-                <a:solidFill>
-                  <a:srgbClr val="FFFFFF"/>
-                </a:solidFill>
-              </a:defRPr>
-            </a:pPr>
-            <a:r>
-              <a:t>对自身局限的觉察</a:t>
+              <a:t>• 感知/记忆/推理/行动/反思 = 眼睛/神经/大脑/肌肉/灵魂</a:t>
             </a:r>
           </a:p>
         </p:txBody>
@@ -9942,7 +10256,7 @@
             <a:avLst/>
           </a:prstGeom>
           <a:solidFill>
-            <a:srgbClr val="553C9A"/>
+            <a:srgbClr val="1A1A2E"/>
           </a:solidFill>
           <a:ln>
             <a:noFill/>
@@ -9993,14 +10307,14 @@
           <a:lstStyle/>
           <a:p>
             <a:pPr>
-              <a:defRPr sz="2800" b="1">
+              <a:defRPr sz="3200" b="1">
                 <a:solidFill>
                   <a:srgbClr val="FFFFFF"/>
                 </a:solidFill>
               </a:defRPr>
             </a:pPr>
             <a:r>
-              <a:t>后记：从确定性工程到概率性工程</a:t>
+              <a:t>🤝 协作模式：共同进化</a:t>
             </a:r>
           </a:p>
         </p:txBody>
@@ -10031,14 +10345,14 @@
               <a:spcAft>
                 <a:spcPts val="1400"/>
               </a:spcAft>
-              <a:defRPr sz="2100" b="0">
+              <a:defRPr sz="2000" b="0">
                 <a:solidFill>
                   <a:srgbClr val="1A1A2E"/>
                 </a:solidFill>
               </a:defRPr>
             </a:pPr>
             <a:r>
-              <a:t>• 传统软件 = 牛顿力学隐喻：世界如精密钟表，追求零熵，将不确定性视为 bug</a:t>
+              <a:t>• 辩论 — 对抗性推演，真理在多角度交锋中清晰（法庭正反双方）</a:t>
             </a:r>
           </a:p>
           <a:p>
@@ -10046,14 +10360,14 @@
               <a:spcAft>
                 <a:spcPts val="1400"/>
               </a:spcAft>
-              <a:defRPr sz="2100" b="0">
+              <a:defRPr sz="2000" b="0">
                 <a:solidFill>
                   <a:srgbClr val="1A1A2E"/>
                 </a:solidFill>
               </a:defRPr>
             </a:pPr>
             <a:r>
-              <a:t>• Agent 时代 = 达尔文逻辑：软件展现生长性（通过 RAG 积累）、适应性（动态调整）、繁殖性（生成新 Prompt）</a:t>
+              <a:t>• 委托 — 层级目标分解，经理指挥工人的高效执行</a:t>
             </a:r>
           </a:p>
           <a:p>
@@ -10061,14 +10375,14 @@
               <a:spcAft>
                 <a:spcPts val="1400"/>
               </a:spcAft>
-              <a:defRPr sz="2100" b="1">
-                <a:solidFill>
-                  <a:srgbClr val="553C9A"/>
-                </a:solidFill>
-              </a:defRPr>
-            </a:pPr>
-            <a:r>
-              <a:t>• 我们正见证硅基生命的「寒武纪大爆发」</a:t>
+              <a:defRPr sz="2000" b="0">
+                <a:solidFill>
+                  <a:srgbClr val="1A1A2E"/>
+                </a:solidFill>
+              </a:defRPr>
+            </a:pPr>
+            <a:r>
+              <a:t>• 路由 — 精准分发，像医院分诊台将任务分配给最适合的 Agent</a:t>
             </a:r>
           </a:p>
           <a:p>
@@ -10076,14 +10390,14 @@
               <a:spcAft>
                 <a:spcPts val="1400"/>
               </a:spcAft>
-              <a:defRPr sz="2100" b="0">
-                <a:solidFill>
-                  <a:srgbClr val="1A1A2E"/>
-                </a:solidFill>
-              </a:defRPr>
-            </a:pPr>
-            <a:r>
-              <a:t>• 架构师的新角色 = 熵的园丁：无法命令植物长多高，但可以优化土壤</a:t>
+              <a:defRPr sz="2000" b="1">
+                <a:solidFill>
+                  <a:srgbClr val="553C9A"/>
+                </a:solidFill>
+              </a:defRPr>
+            </a:pPr>
+            <a:r>
+              <a:t>• 群体 — 自组织涌现，像蚁群迁徙无需明确指挥者</a:t>
             </a:r>
           </a:p>
         </p:txBody>
@@ -10158,7 +10472,7 @@
         <p:spPr>
           <a:xfrm>
             <a:off x="0" y="0"/>
-            <a:ext cx="12188952" cy="1097280"/>
+            <a:ext cx="12188952" cy="137160"/>
           </a:xfrm>
           <a:prstGeom prst="rect">
             <a:avLst/>
@@ -10200,8 +10514,8 @@
         </p:nvSpPr>
         <p:spPr>
           <a:xfrm>
-            <a:off x="457200" y="228600"/>
-            <a:ext cx="11274552" cy="822960"/>
+            <a:off x="457200" y="365760"/>
+            <a:ext cx="11274552" cy="2286000"/>
           </a:xfrm>
           <a:prstGeom prst="rect">
             <a:avLst/>
@@ -10209,20 +10523,20 @@
           <a:noFill/>
         </p:spPr>
         <p:txBody>
-          <a:bodyPr wrap="none">
+          <a:bodyPr wrap="square">
             <a:spAutoFit/>
           </a:bodyPr>
           <a:lstStyle/>
           <a:p>
-            <a:pPr>
-              <a:defRPr sz="3200" b="1">
-                <a:solidFill>
-                  <a:srgbClr val="FFFFFF"/>
-                </a:solidFill>
-              </a:defRPr>
-            </a:pPr>
-            <a:r>
-              <a:t>园丁的智慧：懂得「适度失控」</a:t>
+            <a:pPr algn="ctr">
+              <a:defRPr sz="2800" i="1">
+                <a:solidFill>
+                  <a:srgbClr val="1A1A2E"/>
+                </a:solidFill>
+              </a:defRPr>
+            </a:pPr>
+            <a:r>
+              <a:t>"智能的最高形态，不在于独立思考，而在于共同进化。"</a:t>
             </a:r>
           </a:p>
         </p:txBody>
@@ -10235,8 +10549,8 @@
         </p:nvSpPr>
         <p:spPr>
           <a:xfrm>
-            <a:off x="640080" y="1463040"/>
-            <a:ext cx="5271516" cy="1417320"/>
+            <a:off x="457200" y="1828800"/>
+            <a:ext cx="2103120" cy="4114800"/>
           </a:xfrm>
           <a:prstGeom prst="roundRect">
             <a:avLst/>
@@ -10278,8 +10592,8 @@
         </p:nvSpPr>
         <p:spPr>
           <a:xfrm>
-            <a:off x="640080" y="1536192"/>
-            <a:ext cx="5180076" cy="365760"/>
+            <a:off x="457200" y="2011680"/>
+            <a:ext cx="2103120" cy="1188720"/>
           </a:xfrm>
           <a:prstGeom prst="rect">
             <a:avLst/>
@@ -10292,15 +10606,15 @@
           </a:bodyPr>
           <a:lstStyle/>
           <a:p>
-            <a:pPr>
-              <a:defRPr sz="1400" b="1">
-                <a:solidFill>
-                  <a:srgbClr val="553C9A"/>
-                </a:solidFill>
-              </a:defRPr>
-            </a:pPr>
-            <a:r>
-              <a:t>🌱 浇水施肥</a:t>
+            <a:pPr algn="ctr">
+              <a:defRPr sz="3000" b="0">
+                <a:solidFill>
+                  <a:srgbClr val="FFFFFF"/>
+                </a:solidFill>
+              </a:defRPr>
+            </a:pPr>
+            <a:r>
+              <a:t>👁️ 感知</a:t>
             </a:r>
           </a:p>
         </p:txBody>
@@ -10313,8 +10627,8 @@
         </p:nvSpPr>
         <p:spPr>
           <a:xfrm>
-            <a:off x="640080" y="1920240"/>
-            <a:ext cx="5180076" cy="1005840"/>
+            <a:off x="457200" y="3291840"/>
+            <a:ext cx="2103120" cy="1188720"/>
           </a:xfrm>
           <a:prstGeom prst="rect">
             <a:avLst/>
@@ -10322,38 +10636,69 @@
           <a:noFill/>
         </p:spPr>
         <p:txBody>
-          <a:bodyPr wrap="square">
+          <a:bodyPr wrap="none">
             <a:spAutoFit/>
           </a:bodyPr>
           <a:lstStyle/>
           <a:p>
-            <a:pPr>
-              <a:defRPr sz="1100">
-                <a:solidFill>
-                  <a:srgbClr val="A0AEC0"/>
-                </a:solidFill>
-              </a:defRPr>
-            </a:pPr>
-            <a:r>
-              <a:t>优化数据质量</a:t>
-            </a:r>
-            <a:br/>
-            <a:r>
-              <a:t>提供知识滋养系统</a:t>
-            </a:r>
-          </a:p>
-        </p:txBody>
-      </p:sp>
-      <p:sp>
-        <p:nvSpPr>
-          <p:cNvPr id="8" name="Rounded Rectangle 7"/>
+            <a:pPr algn="ctr">
+              <a:defRPr sz="2000" b="1">
+                <a:solidFill>
+                  <a:srgbClr val="553C9A"/>
+                </a:solidFill>
+              </a:defRPr>
+            </a:pPr>
+            <a:r>
+              <a:t>眼睛</a:t>
+            </a:r>
+          </a:p>
+        </p:txBody>
+      </p:sp>
+      <p:sp>
+        <p:nvSpPr>
+          <p:cNvPr id="8" name="TextBox 7"/>
+          <p:cNvSpPr txBox="1"/>
+          <p:nvPr/>
+        </p:nvSpPr>
+        <p:spPr>
+          <a:xfrm>
+            <a:off x="457200" y="4572000"/>
+            <a:ext cx="2103120" cy="1188720"/>
+          </a:xfrm>
+          <a:prstGeom prst="rect">
+            <a:avLst/>
+          </a:prstGeom>
+          <a:noFill/>
+        </p:spPr>
+        <p:txBody>
+          <a:bodyPr wrap="none">
+            <a:spAutoFit/>
+          </a:bodyPr>
+          <a:lstStyle/>
+          <a:p>
+            <a:pPr algn="ctr">
+              <a:defRPr sz="1200" b="0">
+                <a:solidFill>
+                  <a:srgbClr val="FFFFFF"/>
+                </a:solidFill>
+              </a:defRPr>
+            </a:pPr>
+            <a:r>
+              <a:t>捕捉世界的信息</a:t>
+            </a:r>
+          </a:p>
+        </p:txBody>
+      </p:sp>
+      <p:sp>
+        <p:nvSpPr>
+          <p:cNvPr id="9" name="Rounded Rectangle 8"/>
           <p:cNvSpPr/>
           <p:nvPr/>
         </p:nvSpPr>
         <p:spPr>
           <a:xfrm>
-            <a:off x="6094476" y="1463040"/>
-            <a:ext cx="5271516" cy="1417320"/>
+            <a:off x="2743200" y="1828800"/>
+            <a:ext cx="2103120" cy="4114800"/>
           </a:xfrm>
           <a:prstGeom prst="roundRect">
             <a:avLst/>
@@ -10389,14 +10734,14 @@
       </p:sp>
       <p:sp>
         <p:nvSpPr>
-          <p:cNvPr id="9" name="TextBox 8"/>
+          <p:cNvPr id="10" name="TextBox 9"/>
           <p:cNvSpPr txBox="1"/>
           <p:nvPr/>
         </p:nvSpPr>
         <p:spPr>
           <a:xfrm>
-            <a:off x="6094476" y="1536192"/>
-            <a:ext cx="5180076" cy="365760"/>
+            <a:off x="2743200" y="2011680"/>
+            <a:ext cx="2103120" cy="1188720"/>
           </a:xfrm>
           <a:prstGeom prst="rect">
             <a:avLst/>
@@ -10409,29 +10754,29 @@
           </a:bodyPr>
           <a:lstStyle/>
           <a:p>
-            <a:pPr>
-              <a:defRPr sz="1400" b="1">
-                <a:solidFill>
-                  <a:srgbClr val="553C9A"/>
-                </a:solidFill>
-              </a:defRPr>
-            </a:pPr>
-            <a:r>
-              <a:t>✂️ 修剪枝叶</a:t>
-            </a:r>
-          </a:p>
-        </p:txBody>
-      </p:sp>
-      <p:sp>
-        <p:nvSpPr>
-          <p:cNvPr id="10" name="TextBox 9"/>
+            <a:pPr algn="ctr">
+              <a:defRPr sz="3000" b="0">
+                <a:solidFill>
+                  <a:srgbClr val="FFFFFF"/>
+                </a:solidFill>
+              </a:defRPr>
+            </a:pPr>
+            <a:r>
+              <a:t>🧠 记忆</a:t>
+            </a:r>
+          </a:p>
+        </p:txBody>
+      </p:sp>
+      <p:sp>
+        <p:nvSpPr>
+          <p:cNvPr id="11" name="TextBox 10"/>
           <p:cNvSpPr txBox="1"/>
           <p:nvPr/>
         </p:nvSpPr>
         <p:spPr>
           <a:xfrm>
-            <a:off x="6094476" y="1920240"/>
-            <a:ext cx="5180076" cy="1005840"/>
+            <a:off x="2743200" y="3291840"/>
+            <a:ext cx="2103120" cy="1188720"/>
           </a:xfrm>
           <a:prstGeom prst="rect">
             <a:avLst/>
@@ -10439,38 +10784,69 @@
           <a:noFill/>
         </p:spPr>
         <p:txBody>
-          <a:bodyPr wrap="square">
+          <a:bodyPr wrap="none">
             <a:spAutoFit/>
           </a:bodyPr>
           <a:lstStyle/>
           <a:p>
-            <a:pPr>
-              <a:defRPr sz="1100">
-                <a:solidFill>
-                  <a:srgbClr val="A0AEC0"/>
-                </a:solidFill>
-              </a:defRPr>
-            </a:pPr>
-            <a:r>
-              <a:t>设置护栏</a:t>
-            </a:r>
-            <a:br/>
-            <a:r>
-              <a:t>引入批判机制应对幻觉</a:t>
-            </a:r>
-          </a:p>
-        </p:txBody>
-      </p:sp>
-      <p:sp>
-        <p:nvSpPr>
-          <p:cNvPr id="11" name="Rounded Rectangle 10"/>
+            <a:pPr algn="ctr">
+              <a:defRPr sz="2000" b="1">
+                <a:solidFill>
+                  <a:srgbClr val="553C9A"/>
+                </a:solidFill>
+              </a:defRPr>
+            </a:pPr>
+            <a:r>
+              <a:t>神经</a:t>
+            </a:r>
+          </a:p>
+        </p:txBody>
+      </p:sp>
+      <p:sp>
+        <p:nvSpPr>
+          <p:cNvPr id="12" name="TextBox 11"/>
+          <p:cNvSpPr txBox="1"/>
+          <p:nvPr/>
+        </p:nvSpPr>
+        <p:spPr>
+          <a:xfrm>
+            <a:off x="2743200" y="4572000"/>
+            <a:ext cx="2103120" cy="1188720"/>
+          </a:xfrm>
+          <a:prstGeom prst="rect">
+            <a:avLst/>
+          </a:prstGeom>
+          <a:noFill/>
+        </p:spPr>
+        <p:txBody>
+          <a:bodyPr wrap="none">
+            <a:spAutoFit/>
+          </a:bodyPr>
+          <a:lstStyle/>
+          <a:p>
+            <a:pPr algn="ctr">
+              <a:defRPr sz="1200" b="0">
+                <a:solidFill>
+                  <a:srgbClr val="FFFFFF"/>
+                </a:solidFill>
+              </a:defRPr>
+            </a:pPr>
+            <a:r>
+              <a:t>承载经验的痕迹</a:t>
+            </a:r>
+          </a:p>
+        </p:txBody>
+      </p:sp>
+      <p:sp>
+        <p:nvSpPr>
+          <p:cNvPr id="13" name="Rounded Rectangle 12"/>
           <p:cNvSpPr/>
           <p:nvPr/>
         </p:nvSpPr>
         <p:spPr>
           <a:xfrm>
-            <a:off x="640080" y="3017520"/>
-            <a:ext cx="5271516" cy="1417320"/>
+            <a:off x="5029200" y="1828800"/>
+            <a:ext cx="2103120" cy="4114800"/>
           </a:xfrm>
           <a:prstGeom prst="roundRect">
             <a:avLst/>
@@ -10506,14 +10882,14 @@
       </p:sp>
       <p:sp>
         <p:nvSpPr>
-          <p:cNvPr id="12" name="TextBox 11"/>
+          <p:cNvPr id="14" name="TextBox 13"/>
           <p:cNvSpPr txBox="1"/>
           <p:nvPr/>
         </p:nvSpPr>
         <p:spPr>
           <a:xfrm>
-            <a:off x="640080" y="3090672"/>
-            <a:ext cx="5180076" cy="365760"/>
+            <a:off x="5029200" y="2011680"/>
+            <a:ext cx="2103120" cy="1188720"/>
           </a:xfrm>
           <a:prstGeom prst="rect">
             <a:avLst/>
@@ -10526,29 +10902,29 @@
           </a:bodyPr>
           <a:lstStyle/>
           <a:p>
-            <a:pPr>
-              <a:defRPr sz="1400" b="1">
-                <a:solidFill>
-                  <a:srgbClr val="553C9A"/>
-                </a:solidFill>
-              </a:defRPr>
-            </a:pPr>
-            <a:r>
-              <a:t>🌍 营造环境</a:t>
-            </a:r>
-          </a:p>
-        </p:txBody>
-      </p:sp>
-      <p:sp>
-        <p:nvSpPr>
-          <p:cNvPr id="13" name="TextBox 12"/>
+            <a:pPr algn="ctr">
+              <a:defRPr sz="3000" b="0">
+                <a:solidFill>
+                  <a:srgbClr val="FFFFFF"/>
+                </a:solidFill>
+              </a:defRPr>
+            </a:pPr>
+            <a:r>
+              <a:t>⚙️ 推理</a:t>
+            </a:r>
+          </a:p>
+        </p:txBody>
+      </p:sp>
+      <p:sp>
+        <p:nvSpPr>
+          <p:cNvPr id="15" name="TextBox 14"/>
           <p:cNvSpPr txBox="1"/>
           <p:nvPr/>
         </p:nvSpPr>
         <p:spPr>
           <a:xfrm>
-            <a:off x="640080" y="3474720"/>
-            <a:ext cx="5180076" cy="1005840"/>
+            <a:off x="5029200" y="3291840"/>
+            <a:ext cx="2103120" cy="1188720"/>
           </a:xfrm>
           <a:prstGeom prst="rect">
             <a:avLst/>
@@ -10556,38 +10932,69 @@
           <a:noFill/>
         </p:spPr>
         <p:txBody>
-          <a:bodyPr wrap="square">
+          <a:bodyPr wrap="none">
             <a:spAutoFit/>
           </a:bodyPr>
           <a:lstStyle/>
           <a:p>
-            <a:pPr>
-              <a:defRPr sz="1100">
-                <a:solidFill>
-                  <a:srgbClr val="A0AEC0"/>
-                </a:solidFill>
-              </a:defRPr>
-            </a:pPr>
-            <a:r>
-              <a:t>设计 A2A 协议</a:t>
-            </a:r>
-            <a:br/>
-            <a:r>
-              <a:t>搭建 Swarm 平台</a:t>
-            </a:r>
-          </a:p>
-        </p:txBody>
-      </p:sp>
-      <p:sp>
-        <p:nvSpPr>
-          <p:cNvPr id="14" name="Rounded Rectangle 13"/>
+            <a:pPr algn="ctr">
+              <a:defRPr sz="2000" b="1">
+                <a:solidFill>
+                  <a:srgbClr val="553C9A"/>
+                </a:solidFill>
+              </a:defRPr>
+            </a:pPr>
+            <a:r>
+              <a:t>大脑</a:t>
+            </a:r>
+          </a:p>
+        </p:txBody>
+      </p:sp>
+      <p:sp>
+        <p:nvSpPr>
+          <p:cNvPr id="16" name="TextBox 15"/>
+          <p:cNvSpPr txBox="1"/>
+          <p:nvPr/>
+        </p:nvSpPr>
+        <p:spPr>
+          <a:xfrm>
+            <a:off x="5029200" y="4572000"/>
+            <a:ext cx="2103120" cy="1188720"/>
+          </a:xfrm>
+          <a:prstGeom prst="rect">
+            <a:avLst/>
+          </a:prstGeom>
+          <a:noFill/>
+        </p:spPr>
+        <p:txBody>
+          <a:bodyPr wrap="none">
+            <a:spAutoFit/>
+          </a:bodyPr>
+          <a:lstStyle/>
+          <a:p>
+            <a:pPr algn="ctr">
+              <a:defRPr sz="1200" b="0">
+                <a:solidFill>
+                  <a:srgbClr val="FFFFFF"/>
+                </a:solidFill>
+              </a:defRPr>
+            </a:pPr>
+            <a:r>
+              <a:t>编织逻辑的网络</a:t>
+            </a:r>
+          </a:p>
+        </p:txBody>
+      </p:sp>
+      <p:sp>
+        <p:nvSpPr>
+          <p:cNvPr id="17" name="Rounded Rectangle 16"/>
           <p:cNvSpPr/>
           <p:nvPr/>
         </p:nvSpPr>
         <p:spPr>
           <a:xfrm>
-            <a:off x="6094476" y="3017520"/>
-            <a:ext cx="5271516" cy="1417320"/>
+            <a:off x="7315200" y="1828800"/>
+            <a:ext cx="2103120" cy="4114800"/>
           </a:xfrm>
           <a:prstGeom prst="roundRect">
             <a:avLst/>
@@ -10623,14 +11030,14 @@
       </p:sp>
       <p:sp>
         <p:nvSpPr>
-          <p:cNvPr id="15" name="TextBox 14"/>
+          <p:cNvPr id="18" name="TextBox 17"/>
           <p:cNvSpPr txBox="1"/>
           <p:nvPr/>
         </p:nvSpPr>
         <p:spPr>
           <a:xfrm>
-            <a:off x="6094476" y="3090672"/>
-            <a:ext cx="5180076" cy="365760"/>
+            <a:off x="7315200" y="2011680"/>
+            <a:ext cx="2103120" cy="1188720"/>
           </a:xfrm>
           <a:prstGeom prst="rect">
             <a:avLst/>
@@ -10643,29 +11050,29 @@
           </a:bodyPr>
           <a:lstStyle/>
           <a:p>
-            <a:pPr>
-              <a:defRPr sz="1400" b="1">
-                <a:solidFill>
-                  <a:srgbClr val="553C9A"/>
-                </a:solidFill>
-              </a:defRPr>
-            </a:pPr>
-            <a:r>
-              <a:t>💡 容忍混沌</a:t>
-            </a:r>
-          </a:p>
-        </p:txBody>
-      </p:sp>
-      <p:sp>
-        <p:nvSpPr>
-          <p:cNvPr id="16" name="TextBox 15"/>
+            <a:pPr algn="ctr">
+              <a:defRPr sz="3000" b="0">
+                <a:solidFill>
+                  <a:srgbClr val="FFFFFF"/>
+                </a:solidFill>
+              </a:defRPr>
+            </a:pPr>
+            <a:r>
+              <a:t>💪 行动</a:t>
+            </a:r>
+          </a:p>
+        </p:txBody>
+      </p:sp>
+      <p:sp>
+        <p:nvSpPr>
+          <p:cNvPr id="19" name="TextBox 18"/>
           <p:cNvSpPr txBox="1"/>
           <p:nvPr/>
         </p:nvSpPr>
         <p:spPr>
           <a:xfrm>
-            <a:off x="6094476" y="3474720"/>
-            <a:ext cx="5180076" cy="1005840"/>
+            <a:off x="7315200" y="3291840"/>
+            <a:ext cx="2103120" cy="1188720"/>
           </a:xfrm>
           <a:prstGeom prst="rect">
             <a:avLst/>
@@ -10673,24 +11080,203 @@
           <a:noFill/>
         </p:spPr>
         <p:txBody>
-          <a:bodyPr wrap="square">
+          <a:bodyPr wrap="none">
             <a:spAutoFit/>
           </a:bodyPr>
           <a:lstStyle/>
           <a:p>
-            <a:pPr>
-              <a:defRPr sz="1100">
-                <a:solidFill>
-                  <a:srgbClr val="A0AEC0"/>
-                </a:solidFill>
-              </a:defRPr>
-            </a:pPr>
-            <a:r>
-              <a:t>唯有在混沌的边缘</a:t>
-            </a:r>
-            <a:br/>
-            <a:r>
-              <a:t>智能才会真正涌现</a:t>
+            <a:pPr algn="ctr">
+              <a:defRPr sz="2000" b="1">
+                <a:solidFill>
+                  <a:srgbClr val="553C9A"/>
+                </a:solidFill>
+              </a:defRPr>
+            </a:pPr>
+            <a:r>
+              <a:t>肌肉</a:t>
+            </a:r>
+          </a:p>
+        </p:txBody>
+      </p:sp>
+      <p:sp>
+        <p:nvSpPr>
+          <p:cNvPr id="20" name="TextBox 19"/>
+          <p:cNvSpPr txBox="1"/>
+          <p:nvPr/>
+        </p:nvSpPr>
+        <p:spPr>
+          <a:xfrm>
+            <a:off x="7315200" y="4572000"/>
+            <a:ext cx="2103120" cy="1188720"/>
+          </a:xfrm>
+          <a:prstGeom prst="rect">
+            <a:avLst/>
+          </a:prstGeom>
+          <a:noFill/>
+        </p:spPr>
+        <p:txBody>
+          <a:bodyPr wrap="none">
+            <a:spAutoFit/>
+          </a:bodyPr>
+          <a:lstStyle/>
+          <a:p>
+            <a:pPr algn="ctr">
+              <a:defRPr sz="1200" b="0">
+                <a:solidFill>
+                  <a:srgbClr val="FFFFFF"/>
+                </a:solidFill>
+              </a:defRPr>
+            </a:pPr>
+            <a:r>
+              <a:t>驱动行动的执行</a:t>
+            </a:r>
+          </a:p>
+        </p:txBody>
+      </p:sp>
+      <p:sp>
+        <p:nvSpPr>
+          <p:cNvPr id="21" name="Rounded Rectangle 20"/>
+          <p:cNvSpPr/>
+          <p:nvPr/>
+        </p:nvSpPr>
+        <p:spPr>
+          <a:xfrm>
+            <a:off x="9601200" y="1828800"/>
+            <a:ext cx="2103120" cy="4114800"/>
+          </a:xfrm>
+          <a:prstGeom prst="roundRect">
+            <a:avLst/>
+          </a:prstGeom>
+          <a:solidFill>
+            <a:srgbClr val="1A1A2E"/>
+          </a:solidFill>
+          <a:ln>
+            <a:noFill/>
+          </a:ln>
+        </p:spPr>
+        <p:style>
+          <a:lnRef idx="1">
+            <a:schemeClr val="accent1"/>
+          </a:lnRef>
+          <a:fillRef idx="3">
+            <a:schemeClr val="accent1"/>
+          </a:fillRef>
+          <a:effectRef idx="2">
+            <a:schemeClr val="accent1"/>
+          </a:effectRef>
+          <a:fontRef idx="minor">
+            <a:schemeClr val="lt1"/>
+          </a:fontRef>
+        </p:style>
+        <p:txBody>
+          <a:bodyPr rtlCol="0" anchor="ctr"/>
+          <a:lstStyle/>
+          <a:p>
+            <a:pPr algn="ctr"/>
+          </a:p>
+        </p:txBody>
+      </p:sp>
+      <p:sp>
+        <p:nvSpPr>
+          <p:cNvPr id="22" name="TextBox 21"/>
+          <p:cNvSpPr txBox="1"/>
+          <p:nvPr/>
+        </p:nvSpPr>
+        <p:spPr>
+          <a:xfrm>
+            <a:off x="9601200" y="2011680"/>
+            <a:ext cx="2103120" cy="1188720"/>
+          </a:xfrm>
+          <a:prstGeom prst="rect">
+            <a:avLst/>
+          </a:prstGeom>
+          <a:noFill/>
+        </p:spPr>
+        <p:txBody>
+          <a:bodyPr wrap="none">
+            <a:spAutoFit/>
+          </a:bodyPr>
+          <a:lstStyle/>
+          <a:p>
+            <a:pPr algn="ctr">
+              <a:defRPr sz="3000" b="0">
+                <a:solidFill>
+                  <a:srgbClr val="FFFFFF"/>
+                </a:solidFill>
+              </a:defRPr>
+            </a:pPr>
+            <a:r>
+              <a:t>🔮 反思</a:t>
+            </a:r>
+          </a:p>
+        </p:txBody>
+      </p:sp>
+      <p:sp>
+        <p:nvSpPr>
+          <p:cNvPr id="23" name="TextBox 22"/>
+          <p:cNvSpPr txBox="1"/>
+          <p:nvPr/>
+        </p:nvSpPr>
+        <p:spPr>
+          <a:xfrm>
+            <a:off x="9601200" y="3291840"/>
+            <a:ext cx="2103120" cy="1188720"/>
+          </a:xfrm>
+          <a:prstGeom prst="rect">
+            <a:avLst/>
+          </a:prstGeom>
+          <a:noFill/>
+        </p:spPr>
+        <p:txBody>
+          <a:bodyPr wrap="none">
+            <a:spAutoFit/>
+          </a:bodyPr>
+          <a:lstStyle/>
+          <a:p>
+            <a:pPr algn="ctr">
+              <a:defRPr sz="2000" b="1">
+                <a:solidFill>
+                  <a:srgbClr val="553C9A"/>
+                </a:solidFill>
+              </a:defRPr>
+            </a:pPr>
+            <a:r>
+              <a:t>灵魂</a:t>
+            </a:r>
+          </a:p>
+        </p:txBody>
+      </p:sp>
+      <p:sp>
+        <p:nvSpPr>
+          <p:cNvPr id="24" name="TextBox 23"/>
+          <p:cNvSpPr txBox="1"/>
+          <p:nvPr/>
+        </p:nvSpPr>
+        <p:spPr>
+          <a:xfrm>
+            <a:off x="9601200" y="4572000"/>
+            <a:ext cx="2103120" cy="1188720"/>
+          </a:xfrm>
+          <a:prstGeom prst="rect">
+            <a:avLst/>
+          </a:prstGeom>
+          <a:noFill/>
+        </p:spPr>
+        <p:txBody>
+          <a:bodyPr wrap="none">
+            <a:spAutoFit/>
+          </a:bodyPr>
+          <a:lstStyle/>
+          <a:p>
+            <a:pPr algn="ctr">
+              <a:defRPr sz="1200" b="0">
+                <a:solidFill>
+                  <a:srgbClr val="FFFFFF"/>
+                </a:solidFill>
+              </a:defRPr>
+            </a:pPr>
+            <a:r>
+              <a:t>对自身局限的觉察</a:t>
             </a:r>
           </a:p>
         </p:txBody>
@@ -10860,7 +11446,7 @@
               <a:spcAft>
                 <a:spcPts val="1400"/>
               </a:spcAft>
-              <a:defRPr sz="2100" b="0">
+              <a:defRPr sz="2000" b="0">
                 <a:solidFill>
                   <a:srgbClr val="1A1A2E"/>
                 </a:solidFill>
@@ -10875,7 +11461,7 @@
               <a:spcAft>
                 <a:spcPts val="1400"/>
               </a:spcAft>
-              <a:defRPr sz="2100" b="0">
+              <a:defRPr sz="2000" b="0">
                 <a:solidFill>
                   <a:srgbClr val="1A1A2E"/>
                 </a:solidFill>
@@ -10890,7 +11476,7 @@
               <a:spcAft>
                 <a:spcPts val="1400"/>
               </a:spcAft>
-              <a:defRPr sz="2100" b="1">
+              <a:defRPr sz="2000" b="1">
                 <a:solidFill>
                   <a:srgbClr val="553C9A"/>
                 </a:solidFill>
@@ -10905,7 +11491,7 @@
               <a:spcAft>
                 <a:spcPts val="1400"/>
               </a:spcAft>
-              <a:defRPr sz="2100" b="0">
+              <a:defRPr sz="2000" b="0">
                 <a:solidFill>
                   <a:srgbClr val="1A1A2E"/>
                 </a:solidFill>
@@ -10987,13 +11573,13 @@
         <p:spPr>
           <a:xfrm>
             <a:off x="0" y="0"/>
-            <a:ext cx="12188952" cy="137160"/>
+            <a:ext cx="12188952" cy="1097280"/>
           </a:xfrm>
           <a:prstGeom prst="rect">
             <a:avLst/>
           </a:prstGeom>
           <a:solidFill>
-            <a:srgbClr val="1A1A2E"/>
+            <a:srgbClr val="553C9A"/>
           </a:solidFill>
           <a:ln>
             <a:noFill/>
@@ -11029,8 +11615,43 @@
         </p:nvSpPr>
         <p:spPr>
           <a:xfrm>
-            <a:off x="457200" y="2011680"/>
-            <a:ext cx="11274552" cy="2286000"/>
+            <a:off x="457200" y="228600"/>
+            <a:ext cx="11274552" cy="822960"/>
+          </a:xfrm>
+          <a:prstGeom prst="rect">
+            <a:avLst/>
+          </a:prstGeom>
+          <a:noFill/>
+        </p:spPr>
+        <p:txBody>
+          <a:bodyPr wrap="none">
+            <a:spAutoFit/>
+          </a:bodyPr>
+          <a:lstStyle/>
+          <a:p>
+            <a:pPr>
+              <a:defRPr sz="2800" b="1">
+                <a:solidFill>
+                  <a:srgbClr val="FFFFFF"/>
+                </a:solidFill>
+              </a:defRPr>
+            </a:pPr>
+            <a:r>
+              <a:t>后记：从确定性工程到概率性工程</a:t>
+            </a:r>
+          </a:p>
+        </p:txBody>
+      </p:sp>
+      <p:sp>
+        <p:nvSpPr>
+          <p:cNvPr id="5" name="TextBox 4"/>
+          <p:cNvSpPr txBox="1"/>
+          <p:nvPr/>
+        </p:nvSpPr>
+        <p:spPr>
+          <a:xfrm>
+            <a:off x="640080" y="1371600"/>
+            <a:ext cx="10972800" cy="5029200"/>
           </a:xfrm>
           <a:prstGeom prst="rect">
             <a:avLst/>
@@ -11043,15 +11664,63 @@
           </a:bodyPr>
           <a:lstStyle/>
           <a:p>
-            <a:pPr algn="ctr">
-              <a:defRPr sz="2600" i="1">
+            <a:pPr>
+              <a:spcAft>
+                <a:spcPts val="1400"/>
+              </a:spcAft>
+              <a:defRPr sz="2000" b="0">
                 <a:solidFill>
                   <a:srgbClr val="1A1A2E"/>
                 </a:solidFill>
               </a:defRPr>
             </a:pPr>
             <a:r>
-              <a:t>"园丁的智慧，在于懂得「适度失控」。唯有在混沌的边缘，智能才会真正涌现。"</a:t>
+              <a:t>• 传统软件 = 牛顿力学隐喻：世界如精密钟表，追求零熵，将不确定性视为 bug</a:t>
+            </a:r>
+          </a:p>
+          <a:p>
+            <a:pPr>
+              <a:spcAft>
+                <a:spcPts val="1400"/>
+              </a:spcAft>
+              <a:defRPr sz="2000" b="0">
+                <a:solidFill>
+                  <a:srgbClr val="1A1A2E"/>
+                </a:solidFill>
+              </a:defRPr>
+            </a:pPr>
+            <a:r>
+              <a:t>• Agent 时代 = 达尔文逻辑：软件展现生长性（通过 RAG 积累）、适应性（动态调整）、繁殖性（生成新 Prompt）</a:t>
+            </a:r>
+          </a:p>
+          <a:p>
+            <a:pPr>
+              <a:spcAft>
+                <a:spcPts val="1400"/>
+              </a:spcAft>
+              <a:defRPr sz="2000" b="1">
+                <a:solidFill>
+                  <a:srgbClr val="553C9A"/>
+                </a:solidFill>
+              </a:defRPr>
+            </a:pPr>
+            <a:r>
+              <a:t>• 我们正见证硅基生命的寒武纪大爆发</a:t>
+            </a:r>
+          </a:p>
+          <a:p>
+            <a:pPr>
+              <a:spcAft>
+                <a:spcPts val="1400"/>
+              </a:spcAft>
+              <a:defRPr sz="2000" b="0">
+                <a:solidFill>
+                  <a:srgbClr val="1A1A2E"/>
+                </a:solidFill>
+              </a:defRPr>
+            </a:pPr>
+            <a:r>
+              <a:t>• 架构师的新角色 = 熵的园丁：无法命令植物长多高，但可以优化土壤</a:t>
             </a:r>
           </a:p>
         </p:txBody>
@@ -11089,6 +11758,752 @@
             <a:avLst/>
           </a:prstGeom>
           <a:solidFill>
+            <a:srgbClr val="FFFFFF"/>
+          </a:solidFill>
+          <a:ln>
+            <a:noFill/>
+          </a:ln>
+        </p:spPr>
+        <p:style>
+          <a:lnRef idx="1">
+            <a:schemeClr val="accent1"/>
+          </a:lnRef>
+          <a:fillRef idx="3">
+            <a:schemeClr val="accent1"/>
+          </a:fillRef>
+          <a:effectRef idx="2">
+            <a:schemeClr val="accent1"/>
+          </a:effectRef>
+          <a:fontRef idx="minor">
+            <a:schemeClr val="lt1"/>
+          </a:fontRef>
+        </p:style>
+        <p:txBody>
+          <a:bodyPr rtlCol="0" anchor="ctr"/>
+          <a:lstStyle/>
+          <a:p>
+            <a:pPr algn="ctr"/>
+          </a:p>
+        </p:txBody>
+      </p:sp>
+      <p:sp>
+        <p:nvSpPr>
+          <p:cNvPr id="3" name="Rectangle 2"/>
+          <p:cNvSpPr/>
+          <p:nvPr/>
+        </p:nvSpPr>
+        <p:spPr>
+          <a:xfrm>
+            <a:off x="0" y="0"/>
+            <a:ext cx="12188952" cy="1097280"/>
+          </a:xfrm>
+          <a:prstGeom prst="rect">
+            <a:avLst/>
+          </a:prstGeom>
+          <a:solidFill>
+            <a:srgbClr val="1A1A2E"/>
+          </a:solidFill>
+          <a:ln>
+            <a:noFill/>
+          </a:ln>
+        </p:spPr>
+        <p:style>
+          <a:lnRef idx="1">
+            <a:schemeClr val="accent1"/>
+          </a:lnRef>
+          <a:fillRef idx="3">
+            <a:schemeClr val="accent1"/>
+          </a:fillRef>
+          <a:effectRef idx="2">
+            <a:schemeClr val="accent1"/>
+          </a:effectRef>
+          <a:fontRef idx="minor">
+            <a:schemeClr val="lt1"/>
+          </a:fontRef>
+        </p:style>
+        <p:txBody>
+          <a:bodyPr rtlCol="0" anchor="ctr"/>
+          <a:lstStyle/>
+          <a:p>
+            <a:pPr algn="ctr"/>
+          </a:p>
+        </p:txBody>
+      </p:sp>
+      <p:sp>
+        <p:nvSpPr>
+          <p:cNvPr id="4" name="TextBox 3"/>
+          <p:cNvSpPr txBox="1"/>
+          <p:nvPr/>
+        </p:nvSpPr>
+        <p:spPr>
+          <a:xfrm>
+            <a:off x="457200" y="228600"/>
+            <a:ext cx="11274552" cy="822960"/>
+          </a:xfrm>
+          <a:prstGeom prst="rect">
+            <a:avLst/>
+          </a:prstGeom>
+          <a:noFill/>
+        </p:spPr>
+        <p:txBody>
+          <a:bodyPr wrap="none">
+            <a:spAutoFit/>
+          </a:bodyPr>
+          <a:lstStyle/>
+          <a:p>
+            <a:pPr>
+              <a:defRPr sz="3200" b="1">
+                <a:solidFill>
+                  <a:srgbClr val="FFFFFF"/>
+                </a:solidFill>
+              </a:defRPr>
+            </a:pPr>
+            <a:r>
+              <a:t>园丁的智慧：懂得适度失控</a:t>
+            </a:r>
+          </a:p>
+        </p:txBody>
+      </p:sp>
+      <p:sp>
+        <p:nvSpPr>
+          <p:cNvPr id="5" name="Rounded Rectangle 4"/>
+          <p:cNvSpPr/>
+          <p:nvPr/>
+        </p:nvSpPr>
+        <p:spPr>
+          <a:xfrm>
+            <a:off x="640080" y="1463040"/>
+            <a:ext cx="5271516" cy="1417320"/>
+          </a:xfrm>
+          <a:prstGeom prst="roundRect">
+            <a:avLst/>
+          </a:prstGeom>
+          <a:solidFill>
+            <a:srgbClr val="1A1A2E"/>
+          </a:solidFill>
+          <a:ln>
+            <a:noFill/>
+          </a:ln>
+        </p:spPr>
+        <p:style>
+          <a:lnRef idx="1">
+            <a:schemeClr val="accent1"/>
+          </a:lnRef>
+          <a:fillRef idx="3">
+            <a:schemeClr val="accent1"/>
+          </a:fillRef>
+          <a:effectRef idx="2">
+            <a:schemeClr val="accent1"/>
+          </a:effectRef>
+          <a:fontRef idx="minor">
+            <a:schemeClr val="lt1"/>
+          </a:fontRef>
+        </p:style>
+        <p:txBody>
+          <a:bodyPr rtlCol="0" anchor="ctr"/>
+          <a:lstStyle/>
+          <a:p>
+            <a:pPr algn="ctr"/>
+          </a:p>
+        </p:txBody>
+      </p:sp>
+      <p:sp>
+        <p:nvSpPr>
+          <p:cNvPr id="6" name="TextBox 5"/>
+          <p:cNvSpPr txBox="1"/>
+          <p:nvPr/>
+        </p:nvSpPr>
+        <p:spPr>
+          <a:xfrm>
+            <a:off x="640080" y="1536192"/>
+            <a:ext cx="5180076" cy="457200"/>
+          </a:xfrm>
+          <a:prstGeom prst="rect">
+            <a:avLst/>
+          </a:prstGeom>
+          <a:noFill/>
+        </p:spPr>
+        <p:txBody>
+          <a:bodyPr wrap="none">
+            <a:spAutoFit/>
+          </a:bodyPr>
+          <a:lstStyle/>
+          <a:p>
+            <a:pPr>
+              <a:defRPr sz="1400" b="1">
+                <a:solidFill>
+                  <a:srgbClr val="553C9A"/>
+                </a:solidFill>
+              </a:defRPr>
+            </a:pPr>
+            <a:r>
+              <a:t>🌱 浇水施肥</a:t>
+            </a:r>
+          </a:p>
+        </p:txBody>
+      </p:sp>
+      <p:sp>
+        <p:nvSpPr>
+          <p:cNvPr id="7" name="TextBox 6"/>
+          <p:cNvSpPr txBox="1"/>
+          <p:nvPr/>
+        </p:nvSpPr>
+        <p:spPr>
+          <a:xfrm>
+            <a:off x="640080" y="1938528"/>
+            <a:ext cx="5180076" cy="960119"/>
+          </a:xfrm>
+          <a:prstGeom prst="rect">
+            <a:avLst/>
+          </a:prstGeom>
+          <a:noFill/>
+        </p:spPr>
+        <p:txBody>
+          <a:bodyPr wrap="square">
+            <a:spAutoFit/>
+          </a:bodyPr>
+          <a:lstStyle/>
+          <a:p>
+            <a:pPr>
+              <a:defRPr sz="1100">
+                <a:solidFill>
+                  <a:srgbClr val="A0AEC0"/>
+                </a:solidFill>
+              </a:defRPr>
+            </a:pPr>
+            <a:r>
+              <a:t>优化数据质量</a:t>
+            </a:r>
+            <a:br/>
+            <a:r>
+              <a:t>提供知识滋养系统</a:t>
+            </a:r>
+          </a:p>
+        </p:txBody>
+      </p:sp>
+      <p:sp>
+        <p:nvSpPr>
+          <p:cNvPr id="8" name="Rounded Rectangle 7"/>
+          <p:cNvSpPr/>
+          <p:nvPr/>
+        </p:nvSpPr>
+        <p:spPr>
+          <a:xfrm>
+            <a:off x="6094476" y="1463040"/>
+            <a:ext cx="5271516" cy="1417320"/>
+          </a:xfrm>
+          <a:prstGeom prst="roundRect">
+            <a:avLst/>
+          </a:prstGeom>
+          <a:solidFill>
+            <a:srgbClr val="1A1A2E"/>
+          </a:solidFill>
+          <a:ln>
+            <a:noFill/>
+          </a:ln>
+        </p:spPr>
+        <p:style>
+          <a:lnRef idx="1">
+            <a:schemeClr val="accent1"/>
+          </a:lnRef>
+          <a:fillRef idx="3">
+            <a:schemeClr val="accent1"/>
+          </a:fillRef>
+          <a:effectRef idx="2">
+            <a:schemeClr val="accent1"/>
+          </a:effectRef>
+          <a:fontRef idx="minor">
+            <a:schemeClr val="lt1"/>
+          </a:fontRef>
+        </p:style>
+        <p:txBody>
+          <a:bodyPr rtlCol="0" anchor="ctr"/>
+          <a:lstStyle/>
+          <a:p>
+            <a:pPr algn="ctr"/>
+          </a:p>
+        </p:txBody>
+      </p:sp>
+      <p:sp>
+        <p:nvSpPr>
+          <p:cNvPr id="9" name="TextBox 8"/>
+          <p:cNvSpPr txBox="1"/>
+          <p:nvPr/>
+        </p:nvSpPr>
+        <p:spPr>
+          <a:xfrm>
+            <a:off x="6094476" y="1536192"/>
+            <a:ext cx="5180076" cy="457200"/>
+          </a:xfrm>
+          <a:prstGeom prst="rect">
+            <a:avLst/>
+          </a:prstGeom>
+          <a:noFill/>
+        </p:spPr>
+        <p:txBody>
+          <a:bodyPr wrap="none">
+            <a:spAutoFit/>
+          </a:bodyPr>
+          <a:lstStyle/>
+          <a:p>
+            <a:pPr>
+              <a:defRPr sz="1400" b="1">
+                <a:solidFill>
+                  <a:srgbClr val="553C9A"/>
+                </a:solidFill>
+              </a:defRPr>
+            </a:pPr>
+            <a:r>
+              <a:t>✂️ 修剪枝叶</a:t>
+            </a:r>
+          </a:p>
+        </p:txBody>
+      </p:sp>
+      <p:sp>
+        <p:nvSpPr>
+          <p:cNvPr id="10" name="TextBox 9"/>
+          <p:cNvSpPr txBox="1"/>
+          <p:nvPr/>
+        </p:nvSpPr>
+        <p:spPr>
+          <a:xfrm>
+            <a:off x="6094476" y="1938528"/>
+            <a:ext cx="5180076" cy="960119"/>
+          </a:xfrm>
+          <a:prstGeom prst="rect">
+            <a:avLst/>
+          </a:prstGeom>
+          <a:noFill/>
+        </p:spPr>
+        <p:txBody>
+          <a:bodyPr wrap="square">
+            <a:spAutoFit/>
+          </a:bodyPr>
+          <a:lstStyle/>
+          <a:p>
+            <a:pPr>
+              <a:defRPr sz="1100">
+                <a:solidFill>
+                  <a:srgbClr val="A0AEC0"/>
+                </a:solidFill>
+              </a:defRPr>
+            </a:pPr>
+            <a:r>
+              <a:t>设置护栏</a:t>
+            </a:r>
+            <a:br/>
+            <a:r>
+              <a:t>引入批判机制应对幻觉</a:t>
+            </a:r>
+          </a:p>
+        </p:txBody>
+      </p:sp>
+      <p:sp>
+        <p:nvSpPr>
+          <p:cNvPr id="11" name="Rounded Rectangle 10"/>
+          <p:cNvSpPr/>
+          <p:nvPr/>
+        </p:nvSpPr>
+        <p:spPr>
+          <a:xfrm>
+            <a:off x="640080" y="3017520"/>
+            <a:ext cx="5271516" cy="1417320"/>
+          </a:xfrm>
+          <a:prstGeom prst="roundRect">
+            <a:avLst/>
+          </a:prstGeom>
+          <a:solidFill>
+            <a:srgbClr val="1A1A2E"/>
+          </a:solidFill>
+          <a:ln>
+            <a:noFill/>
+          </a:ln>
+        </p:spPr>
+        <p:style>
+          <a:lnRef idx="1">
+            <a:schemeClr val="accent1"/>
+          </a:lnRef>
+          <a:fillRef idx="3">
+            <a:schemeClr val="accent1"/>
+          </a:fillRef>
+          <a:effectRef idx="2">
+            <a:schemeClr val="accent1"/>
+          </a:effectRef>
+          <a:fontRef idx="minor">
+            <a:schemeClr val="lt1"/>
+          </a:fontRef>
+        </p:style>
+        <p:txBody>
+          <a:bodyPr rtlCol="0" anchor="ctr"/>
+          <a:lstStyle/>
+          <a:p>
+            <a:pPr algn="ctr"/>
+          </a:p>
+        </p:txBody>
+      </p:sp>
+      <p:sp>
+        <p:nvSpPr>
+          <p:cNvPr id="12" name="TextBox 11"/>
+          <p:cNvSpPr txBox="1"/>
+          <p:nvPr/>
+        </p:nvSpPr>
+        <p:spPr>
+          <a:xfrm>
+            <a:off x="640080" y="3090672"/>
+            <a:ext cx="5180076" cy="457200"/>
+          </a:xfrm>
+          <a:prstGeom prst="rect">
+            <a:avLst/>
+          </a:prstGeom>
+          <a:noFill/>
+        </p:spPr>
+        <p:txBody>
+          <a:bodyPr wrap="none">
+            <a:spAutoFit/>
+          </a:bodyPr>
+          <a:lstStyle/>
+          <a:p>
+            <a:pPr>
+              <a:defRPr sz="1400" b="1">
+                <a:solidFill>
+                  <a:srgbClr val="553C9A"/>
+                </a:solidFill>
+              </a:defRPr>
+            </a:pPr>
+            <a:r>
+              <a:t>🌍 营造环境</a:t>
+            </a:r>
+          </a:p>
+        </p:txBody>
+      </p:sp>
+      <p:sp>
+        <p:nvSpPr>
+          <p:cNvPr id="13" name="TextBox 12"/>
+          <p:cNvSpPr txBox="1"/>
+          <p:nvPr/>
+        </p:nvSpPr>
+        <p:spPr>
+          <a:xfrm>
+            <a:off x="640080" y="3493008"/>
+            <a:ext cx="5180076" cy="960119"/>
+          </a:xfrm>
+          <a:prstGeom prst="rect">
+            <a:avLst/>
+          </a:prstGeom>
+          <a:noFill/>
+        </p:spPr>
+        <p:txBody>
+          <a:bodyPr wrap="square">
+            <a:spAutoFit/>
+          </a:bodyPr>
+          <a:lstStyle/>
+          <a:p>
+            <a:pPr>
+              <a:defRPr sz="1100">
+                <a:solidFill>
+                  <a:srgbClr val="A0AEC0"/>
+                </a:solidFill>
+              </a:defRPr>
+            </a:pPr>
+            <a:r>
+              <a:t>设计 A2A 协议</a:t>
+            </a:r>
+            <a:br/>
+            <a:r>
+              <a:t>搭建 Swarm 平台</a:t>
+            </a:r>
+          </a:p>
+        </p:txBody>
+      </p:sp>
+      <p:sp>
+        <p:nvSpPr>
+          <p:cNvPr id="14" name="Rounded Rectangle 13"/>
+          <p:cNvSpPr/>
+          <p:nvPr/>
+        </p:nvSpPr>
+        <p:spPr>
+          <a:xfrm>
+            <a:off x="6094476" y="3017520"/>
+            <a:ext cx="5271516" cy="1417320"/>
+          </a:xfrm>
+          <a:prstGeom prst="roundRect">
+            <a:avLst/>
+          </a:prstGeom>
+          <a:solidFill>
+            <a:srgbClr val="1A1A2E"/>
+          </a:solidFill>
+          <a:ln>
+            <a:noFill/>
+          </a:ln>
+        </p:spPr>
+        <p:style>
+          <a:lnRef idx="1">
+            <a:schemeClr val="accent1"/>
+          </a:lnRef>
+          <a:fillRef idx="3">
+            <a:schemeClr val="accent1"/>
+          </a:fillRef>
+          <a:effectRef idx="2">
+            <a:schemeClr val="accent1"/>
+          </a:effectRef>
+          <a:fontRef idx="minor">
+            <a:schemeClr val="lt1"/>
+          </a:fontRef>
+        </p:style>
+        <p:txBody>
+          <a:bodyPr rtlCol="0" anchor="ctr"/>
+          <a:lstStyle/>
+          <a:p>
+            <a:pPr algn="ctr"/>
+          </a:p>
+        </p:txBody>
+      </p:sp>
+      <p:sp>
+        <p:nvSpPr>
+          <p:cNvPr id="15" name="TextBox 14"/>
+          <p:cNvSpPr txBox="1"/>
+          <p:nvPr/>
+        </p:nvSpPr>
+        <p:spPr>
+          <a:xfrm>
+            <a:off x="6094476" y="3090672"/>
+            <a:ext cx="5180076" cy="457200"/>
+          </a:xfrm>
+          <a:prstGeom prst="rect">
+            <a:avLst/>
+          </a:prstGeom>
+          <a:noFill/>
+        </p:spPr>
+        <p:txBody>
+          <a:bodyPr wrap="none">
+            <a:spAutoFit/>
+          </a:bodyPr>
+          <a:lstStyle/>
+          <a:p>
+            <a:pPr>
+              <a:defRPr sz="1400" b="1">
+                <a:solidFill>
+                  <a:srgbClr val="553C9A"/>
+                </a:solidFill>
+              </a:defRPr>
+            </a:pPr>
+            <a:r>
+              <a:t>💡 容忍混沌</a:t>
+            </a:r>
+          </a:p>
+        </p:txBody>
+      </p:sp>
+      <p:sp>
+        <p:nvSpPr>
+          <p:cNvPr id="16" name="TextBox 15"/>
+          <p:cNvSpPr txBox="1"/>
+          <p:nvPr/>
+        </p:nvSpPr>
+        <p:spPr>
+          <a:xfrm>
+            <a:off x="6094476" y="3493008"/>
+            <a:ext cx="5180076" cy="960119"/>
+          </a:xfrm>
+          <a:prstGeom prst="rect">
+            <a:avLst/>
+          </a:prstGeom>
+          <a:noFill/>
+        </p:spPr>
+        <p:txBody>
+          <a:bodyPr wrap="square">
+            <a:spAutoFit/>
+          </a:bodyPr>
+          <a:lstStyle/>
+          <a:p>
+            <a:pPr>
+              <a:defRPr sz="1100">
+                <a:solidFill>
+                  <a:srgbClr val="A0AEC0"/>
+                </a:solidFill>
+              </a:defRPr>
+            </a:pPr>
+            <a:r>
+              <a:t>唯有在混沌的边缘</a:t>
+            </a:r>
+            <a:br/>
+            <a:r>
+              <a:t>智能才会真正涌现</a:t>
+            </a:r>
+          </a:p>
+        </p:txBody>
+      </p:sp>
+    </p:spTree>
+  </p:cSld>
+  <p:clrMapOvr>
+    <a:masterClrMapping/>
+  </p:clrMapOvr>
+</p:sld>
+</file>
+
+<file path=ppt/slides/slide32.xml><?xml version="1.0" encoding="utf-8"?>
+<p:sld xmlns:a="http://schemas.openxmlformats.org/drawingml/2006/main" xmlns:p="http://schemas.openxmlformats.org/presentationml/2006/main" xmlns:r="http://schemas.openxmlformats.org/officeDocument/2006/relationships">
+  <p:cSld>
+    <p:spTree>
+      <p:nvGrpSpPr>
+        <p:cNvPr id="1" name=""/>
+        <p:cNvGrpSpPr/>
+        <p:nvPr/>
+      </p:nvGrpSpPr>
+      <p:grpSpPr/>
+      <p:sp>
+        <p:nvSpPr>
+          <p:cNvPr id="2" name="Rectangle 1"/>
+          <p:cNvSpPr/>
+          <p:nvPr/>
+        </p:nvSpPr>
+        <p:spPr>
+          <a:xfrm>
+            <a:off x="0" y="0"/>
+            <a:ext cx="12188952" cy="6858000"/>
+          </a:xfrm>
+          <a:prstGeom prst="rect">
+            <a:avLst/>
+          </a:prstGeom>
+          <a:solidFill>
+            <a:srgbClr val="FFFFFF"/>
+          </a:solidFill>
+          <a:ln>
+            <a:noFill/>
+          </a:ln>
+        </p:spPr>
+        <p:style>
+          <a:lnRef idx="1">
+            <a:schemeClr val="accent1"/>
+          </a:lnRef>
+          <a:fillRef idx="3">
+            <a:schemeClr val="accent1"/>
+          </a:fillRef>
+          <a:effectRef idx="2">
+            <a:schemeClr val="accent1"/>
+          </a:effectRef>
+          <a:fontRef idx="minor">
+            <a:schemeClr val="lt1"/>
+          </a:fontRef>
+        </p:style>
+        <p:txBody>
+          <a:bodyPr rtlCol="0" anchor="ctr"/>
+          <a:lstStyle/>
+          <a:p>
+            <a:pPr algn="ctr"/>
+          </a:p>
+        </p:txBody>
+      </p:sp>
+      <p:sp>
+        <p:nvSpPr>
+          <p:cNvPr id="3" name="Rectangle 2"/>
+          <p:cNvSpPr/>
+          <p:nvPr/>
+        </p:nvSpPr>
+        <p:spPr>
+          <a:xfrm>
+            <a:off x="0" y="0"/>
+            <a:ext cx="12188952" cy="137160"/>
+          </a:xfrm>
+          <a:prstGeom prst="rect">
+            <a:avLst/>
+          </a:prstGeom>
+          <a:solidFill>
+            <a:srgbClr val="1A1A2E"/>
+          </a:solidFill>
+          <a:ln>
+            <a:noFill/>
+          </a:ln>
+        </p:spPr>
+        <p:style>
+          <a:lnRef idx="1">
+            <a:schemeClr val="accent1"/>
+          </a:lnRef>
+          <a:fillRef idx="3">
+            <a:schemeClr val="accent1"/>
+          </a:fillRef>
+          <a:effectRef idx="2">
+            <a:schemeClr val="accent1"/>
+          </a:effectRef>
+          <a:fontRef idx="minor">
+            <a:schemeClr val="lt1"/>
+          </a:fontRef>
+        </p:style>
+        <p:txBody>
+          <a:bodyPr rtlCol="0" anchor="ctr"/>
+          <a:lstStyle/>
+          <a:p>
+            <a:pPr algn="ctr"/>
+          </a:p>
+        </p:txBody>
+      </p:sp>
+      <p:sp>
+        <p:nvSpPr>
+          <p:cNvPr id="4" name="TextBox 3"/>
+          <p:cNvSpPr txBox="1"/>
+          <p:nvPr/>
+        </p:nvSpPr>
+        <p:spPr>
+          <a:xfrm>
+            <a:off x="457200" y="365760"/>
+            <a:ext cx="11274552" cy="2286000"/>
+          </a:xfrm>
+          <a:prstGeom prst="rect">
+            <a:avLst/>
+          </a:prstGeom>
+          <a:noFill/>
+        </p:spPr>
+        <p:txBody>
+          <a:bodyPr wrap="square">
+            <a:spAutoFit/>
+          </a:bodyPr>
+          <a:lstStyle/>
+          <a:p>
+            <a:pPr algn="ctr">
+              <a:defRPr sz="2600" i="1">
+                <a:solidFill>
+                  <a:srgbClr val="1A1A2E"/>
+                </a:solidFill>
+              </a:defRPr>
+            </a:pPr>
+            <a:r>
+              <a:t>"园丁的智慧，在于懂得适度失控。唯有在混沌的边缘，智能才会真正涌现。"</a:t>
+            </a:r>
+          </a:p>
+        </p:txBody>
+      </p:sp>
+    </p:spTree>
+  </p:cSld>
+  <p:clrMapOvr>
+    <a:masterClrMapping/>
+  </p:clrMapOvr>
+</p:sld>
+</file>
+
+<file path=ppt/slides/slide33.xml><?xml version="1.0" encoding="utf-8"?>
+<p:sld xmlns:a="http://schemas.openxmlformats.org/drawingml/2006/main" xmlns:p="http://schemas.openxmlformats.org/presentationml/2006/main" xmlns:r="http://schemas.openxmlformats.org/officeDocument/2006/relationships">
+  <p:cSld>
+    <p:spTree>
+      <p:nvGrpSpPr>
+        <p:cNvPr id="1" name=""/>
+        <p:cNvGrpSpPr/>
+        <p:nvPr/>
+      </p:nvGrpSpPr>
+      <p:grpSpPr/>
+      <p:sp>
+        <p:nvSpPr>
+          <p:cNvPr id="2" name="Rectangle 1"/>
+          <p:cNvSpPr/>
+          <p:nvPr/>
+        </p:nvSpPr>
+        <p:spPr>
+          <a:xfrm>
+            <a:off x="0" y="0"/>
+            <a:ext cx="12188952" cy="6858000"/>
+          </a:xfrm>
+          <a:prstGeom prst="rect">
+            <a:avLst/>
+          </a:prstGeom>
+          <a:solidFill>
             <a:srgbClr val="1A1A2E"/>
           </a:solidFill>
           <a:ln>
@@ -11731,7 +13146,7 @@
         <p:spPr>
           <a:xfrm>
             <a:off x="640080" y="1536192"/>
-            <a:ext cx="3361944" cy="365760"/>
+            <a:ext cx="3361944" cy="457200"/>
           </a:xfrm>
           <a:prstGeom prst="rect">
             <a:avLst/>
@@ -11765,8 +13180,8 @@
         </p:nvSpPr>
         <p:spPr>
           <a:xfrm>
-            <a:off x="640080" y="1920240"/>
-            <a:ext cx="3361944" cy="1005840"/>
+            <a:off x="640080" y="1938528"/>
+            <a:ext cx="3361944" cy="960119"/>
           </a:xfrm>
           <a:prstGeom prst="rect">
             <a:avLst/>
@@ -11852,7 +13267,7 @@
         <p:spPr>
           <a:xfrm>
             <a:off x="4276344" y="1536192"/>
-            <a:ext cx="3361944" cy="365760"/>
+            <a:ext cx="3361944" cy="457200"/>
           </a:xfrm>
           <a:prstGeom prst="rect">
             <a:avLst/>
@@ -11886,8 +13301,8 @@
         </p:nvSpPr>
         <p:spPr>
           <a:xfrm>
-            <a:off x="4276344" y="1920240"/>
-            <a:ext cx="3361944" cy="1005840"/>
+            <a:off x="4276344" y="1938528"/>
+            <a:ext cx="3361944" cy="960119"/>
           </a:xfrm>
           <a:prstGeom prst="rect">
             <a:avLst/>
@@ -11973,7 +13388,7 @@
         <p:spPr>
           <a:xfrm>
             <a:off x="7912607" y="1536192"/>
-            <a:ext cx="3361944" cy="365760"/>
+            <a:ext cx="3361944" cy="457200"/>
           </a:xfrm>
           <a:prstGeom prst="rect">
             <a:avLst/>
@@ -12007,8 +13422,8 @@
         </p:nvSpPr>
         <p:spPr>
           <a:xfrm>
-            <a:off x="7912607" y="1920240"/>
-            <a:ext cx="3361944" cy="1005840"/>
+            <a:off x="7912607" y="1938528"/>
+            <a:ext cx="3361944" cy="960119"/>
           </a:xfrm>
           <a:prstGeom prst="rect">
             <a:avLst/>
@@ -12169,14 +13584,14 @@
           <a:lstStyle/>
           <a:p>
             <a:pPr>
-              <a:defRPr sz="2600" b="1">
+              <a:defRPr sz="2400" b="1">
                 <a:solidFill>
                   <a:srgbClr val="FFFFFF"/>
                 </a:solidFill>
               </a:defRPr>
             </a:pPr>
             <a:r>
-              <a:t>经典模式的失效：从『正确设计』到『正确思维』</a:t>
+              <a:t>经典模式的失效：从正确设计到正确思维</a:t>
             </a:r>
           </a:p>
         </p:txBody>
@@ -12332,7 +13747,7 @@
               </a:defRPr>
             </a:pPr>
             <a:r>
-              <a:t>失效原因</a:t>
+              <a:t>为什么会失效</a:t>
             </a:r>
           </a:p>
         </p:txBody>
@@ -12410,7 +13825,7 @@
               </a:defRPr>
             </a:pPr>
             <a:r>
-              <a:t>业界应对</a:t>
+              <a:t>业界如何应对</a:t>
             </a:r>
           </a:p>
         </p:txBody>
@@ -12424,7 +13839,7 @@
         <p:spPr>
           <a:xfrm>
             <a:off x="457200" y="1920240"/>
-            <a:ext cx="3200400" cy="1325880"/>
+            <a:ext cx="3200400" cy="1280160"/>
           </a:xfrm>
           <a:prstGeom prst="rect">
             <a:avLst/>
@@ -12466,7 +13881,7 @@
         </p:nvSpPr>
         <p:spPr>
           <a:xfrm>
-            <a:off x="548640" y="2011680"/>
+            <a:off x="548640" y="1993392"/>
             <a:ext cx="3017520" cy="1188720"/>
           </a:xfrm>
           <a:prstGeom prst="rect">
@@ -12502,7 +13917,7 @@
         <p:spPr>
           <a:xfrm>
             <a:off x="3840480" y="1920240"/>
-            <a:ext cx="3108960" cy="1325880"/>
+            <a:ext cx="3108960" cy="1280160"/>
           </a:xfrm>
           <a:prstGeom prst="rect">
             <a:avLst/>
@@ -12544,7 +13959,7 @@
         </p:nvSpPr>
         <p:spPr>
           <a:xfrm>
-            <a:off x="3931920" y="2011680"/>
+            <a:off x="3931920" y="1993392"/>
             <a:ext cx="2926080" cy="1188720"/>
           </a:xfrm>
           <a:prstGeom prst="rect">
@@ -12584,7 +13999,7 @@
         <p:spPr>
           <a:xfrm>
             <a:off x="7132320" y="1920240"/>
-            <a:ext cx="4572000" cy="1325880"/>
+            <a:ext cx="4572000" cy="1280160"/>
           </a:xfrm>
           <a:prstGeom prst="rect">
             <a:avLst/>
@@ -12626,7 +14041,7 @@
         </p:nvSpPr>
         <p:spPr>
           <a:xfrm>
-            <a:off x="7223760" y="2011680"/>
+            <a:off x="7223760" y="1993392"/>
             <a:ext cx="4389120" cy="1188720"/>
           </a:xfrm>
           <a:prstGeom prst="rect">
@@ -12648,11 +14063,11 @@
               </a:defRPr>
             </a:pPr>
             <a:r>
-              <a:t>Netflix：放弃单例</a:t>
+              <a:t>Netflix：彻底放弃单例</a:t>
             </a:r>
             <a:br/>
             <a:r>
-              <a:t>拥抱冗余，多副本容错</a:t>
+              <a:t>拥抱多副本冗余</a:t>
             </a:r>
           </a:p>
         </p:txBody>
@@ -12665,8 +14080,8 @@
         </p:nvSpPr>
         <p:spPr>
           <a:xfrm>
-            <a:off x="457200" y="3337560"/>
-            <a:ext cx="3200400" cy="1325880"/>
+            <a:off x="457200" y="3291840"/>
+            <a:ext cx="3200400" cy="1280160"/>
           </a:xfrm>
           <a:prstGeom prst="rect">
             <a:avLst/>
@@ -12708,7 +14123,7 @@
         </p:nvSpPr>
         <p:spPr>
           <a:xfrm>
-            <a:off x="548640" y="3429000"/>
+            <a:off x="548640" y="3364992"/>
             <a:ext cx="3017520" cy="1188720"/>
           </a:xfrm>
           <a:prstGeom prst="rect">
@@ -12743,8 +14158,8 @@
         </p:nvSpPr>
         <p:spPr>
           <a:xfrm>
-            <a:off x="3840480" y="3337560"/>
-            <a:ext cx="3108960" cy="1325880"/>
+            <a:off x="3840480" y="3291840"/>
+            <a:ext cx="3108960" cy="1280160"/>
           </a:xfrm>
           <a:prstGeom prst="rect">
             <a:avLst/>
@@ -12786,7 +14201,7 @@
         </p:nvSpPr>
         <p:spPr>
           <a:xfrm>
-            <a:off x="3931920" y="3429000"/>
+            <a:off x="3931920" y="3364992"/>
             <a:ext cx="2926080" cy="1188720"/>
           </a:xfrm>
           <a:prstGeom prst="rect">
@@ -12812,7 +14227,7 @@
             </a:r>
             <a:br/>
             <a:r>
-              <a:t>运行时演化</a:t>
+              <a:t>运行时持续演化</a:t>
             </a:r>
           </a:p>
         </p:txBody>
@@ -12825,8 +14240,8 @@
         </p:nvSpPr>
         <p:spPr>
           <a:xfrm>
-            <a:off x="7132320" y="3337560"/>
-            <a:ext cx="4572000" cy="1325880"/>
+            <a:off x="7132320" y="3291840"/>
+            <a:ext cx="4572000" cy="1280160"/>
           </a:xfrm>
           <a:prstGeom prst="rect">
             <a:avLst/>
@@ -12868,7 +14283,7 @@
         </p:nvSpPr>
         <p:spPr>
           <a:xfrm>
-            <a:off x="7223760" y="3429000"/>
+            <a:off x="7223760" y="3364992"/>
             <a:ext cx="4389120" cy="1188720"/>
           </a:xfrm>
           <a:prstGeom prst="rect">
@@ -12907,8 +14322,8 @@
         </p:nvSpPr>
         <p:spPr>
           <a:xfrm>
-            <a:off x="457200" y="4754880"/>
-            <a:ext cx="3200400" cy="1325880"/>
+            <a:off x="457200" y="4663440"/>
+            <a:ext cx="3200400" cy="1280160"/>
           </a:xfrm>
           <a:prstGeom prst="rect">
             <a:avLst/>
@@ -12950,7 +14365,7 @@
         </p:nvSpPr>
         <p:spPr>
           <a:xfrm>
-            <a:off x="548640" y="4846320"/>
+            <a:off x="548640" y="4736592"/>
             <a:ext cx="3017520" cy="1188720"/>
           </a:xfrm>
           <a:prstGeom prst="rect">
@@ -12985,8 +14400,8 @@
         </p:nvSpPr>
         <p:spPr>
           <a:xfrm>
-            <a:off x="3840480" y="4754880"/>
-            <a:ext cx="3108960" cy="1325880"/>
+            <a:off x="3840480" y="4663440"/>
+            <a:ext cx="3108960" cy="1280160"/>
           </a:xfrm>
           <a:prstGeom prst="rect">
             <a:avLst/>
@@ -13028,7 +14443,7 @@
         </p:nvSpPr>
         <p:spPr>
           <a:xfrm>
-            <a:off x="3931920" y="4846320"/>
+            <a:off x="3931920" y="4736592"/>
             <a:ext cx="2926080" cy="1188720"/>
           </a:xfrm>
           <a:prstGeom prst="rect">
@@ -13067,8 +14482,8 @@
         </p:nvSpPr>
         <p:spPr>
           <a:xfrm>
-            <a:off x="7132320" y="4754880"/>
-            <a:ext cx="4572000" cy="1325880"/>
+            <a:off x="7132320" y="4663440"/>
+            <a:ext cx="4572000" cy="1280160"/>
           </a:xfrm>
           <a:prstGeom prst="rect">
             <a:avLst/>
@@ -13110,7 +14525,7 @@
         </p:nvSpPr>
         <p:spPr>
           <a:xfrm>
-            <a:off x="7223760" y="4846320"/>
+            <a:off x="7223760" y="4736592"/>
             <a:ext cx="4389120" cy="1188720"/>
           </a:xfrm>
           <a:prstGeom prst="rect">
@@ -13132,7 +14547,7 @@
               </a:defRPr>
             </a:pPr>
             <a:r>
-              <a:t>引入异步通信</a:t>
+              <a:t>引入异步消息队列</a:t>
             </a:r>
             <a:br/>
             <a:r>
@@ -13275,7 +14690,7 @@
               </a:defRPr>
             </a:pPr>
             <a:r>
-              <a:t>🔄 2012-2014：四次关键变革 — 从『防止故障』到『拥抱故障』</a:t>
+              <a:t>2012-2014：四次关键变革，从防止故障到拥抱故障</a:t>
             </a:r>
           </a:p>
         </p:txBody>
@@ -13332,7 +14747,7 @@
         <p:spPr>
           <a:xfrm>
             <a:off x="640080" y="1536192"/>
-            <a:ext cx="5180076" cy="365760"/>
+            <a:ext cx="5180076" cy="457200"/>
           </a:xfrm>
           <a:prstGeom prst="rect">
             <a:avLst/>
@@ -13353,11 +14768,7 @@
               </a:defRPr>
             </a:pPr>
             <a:r>
-              <a:t>🌐 Google</a:t>
-            </a:r>
-            <a:br/>
-            <a:r>
-              <a:t>Datacenter as Computer</a:t>
+              <a:t>🌐 Google Datacenter as Computer</a:t>
             </a:r>
           </a:p>
         </p:txBody>
@@ -13370,8 +14781,8 @@
         </p:nvSpPr>
         <p:spPr>
           <a:xfrm>
-            <a:off x="640080" y="1920240"/>
-            <a:ext cx="5180076" cy="1005840"/>
+            <a:off x="640080" y="1938528"/>
+            <a:ext cx="5180076" cy="960119"/>
           </a:xfrm>
           <a:prstGeom prst="rect">
             <a:avLst/>
@@ -13392,15 +14803,7 @@
               </a:defRPr>
             </a:pPr>
             <a:r>
-              <a:t>2012 — 硬件故障是统计学必然</a:t>
-            </a:r>
-            <a:br/>
-            <a:r>
-              <a:t>软件为「故障常态化」而设计</a:t>
-            </a:r>
-            <a:br/>
-            <a:r>
-              <a:t>从「单机精修」到「宏观概率」</a:t>
+              <a:t>2012 — 硬件故障是统计学必然，软件为故障常态化设计，从单机精修到宏观概率</a:t>
             </a:r>
           </a:p>
         </p:txBody>
@@ -13457,7 +14860,7 @@
         <p:spPr>
           <a:xfrm>
             <a:off x="6094476" y="1536192"/>
-            <a:ext cx="5180076" cy="365760"/>
+            <a:ext cx="5180076" cy="457200"/>
           </a:xfrm>
           <a:prstGeom prst="rect">
             <a:avLst/>
@@ -13478,11 +14881,7 @@
               </a:defRPr>
             </a:pPr>
             <a:r>
-              <a:t>🐵 Netflix</a:t>
-            </a:r>
-            <a:br/>
-            <a:r>
-              <a:t>Chaos Monkey</a:t>
+              <a:t>🐵 Netflix Chaos Monkey</a:t>
             </a:r>
           </a:p>
         </p:txBody>
@@ -13495,8 +14894,8 @@
         </p:nvSpPr>
         <p:spPr>
           <a:xfrm>
-            <a:off x="6094476" y="1920240"/>
-            <a:ext cx="5180076" cy="1005840"/>
+            <a:off x="6094476" y="1938528"/>
+            <a:ext cx="5180076" cy="960119"/>
           </a:xfrm>
           <a:prstGeom prst="rect">
             <a:avLst/>
@@ -13517,15 +14916,7 @@
               </a:defRPr>
             </a:pPr>
             <a:r>
-              <a:t>2012 — 专门随机杀死生产服务器</a:t>
-            </a:r>
-            <a:br/>
-            <a:r>
-              <a:t>从「鲁棒性」到「反脆弱」</a:t>
-            </a:r>
-            <a:br/>
-            <a:r>
-              <a:t>系统像免疫系统通过小创伤进化</a:t>
+              <a:t>2012 — 专门随机杀死生产服务器，从鲁棒性到反脆弱，系统像免疫系统进化</a:t>
             </a:r>
           </a:p>
         </p:txBody>
@@ -13582,7 +14973,7 @@
         <p:spPr>
           <a:xfrm>
             <a:off x="640080" y="3090672"/>
-            <a:ext cx="5180076" cy="365760"/>
+            <a:ext cx="5180076" cy="457200"/>
           </a:xfrm>
           <a:prstGeom prst="rect">
             <a:avLst/>
@@ -13616,8 +15007,8 @@
         </p:nvSpPr>
         <p:spPr>
           <a:xfrm>
-            <a:off x="640080" y="3474720"/>
-            <a:ext cx="5180076" cy="1005840"/>
+            <a:off x="640080" y="3493008"/>
+            <a:ext cx="5180076" cy="960119"/>
           </a:xfrm>
           <a:prstGeom prst="rect">
             <a:avLst/>
@@ -13638,15 +15029,7 @@
               </a:defRPr>
             </a:pPr>
             <a:r>
-              <a:t>2013 — 不可变基础设施</a:t>
-            </a:r>
-            <a:br/>
-            <a:r>
-              <a:t>服务器从「需要维护的资产」</a:t>
-            </a:r>
-            <a:br/>
-            <a:r>
-              <a:t>变成可销毁的「耗材」</a:t>
+              <a:t>2013 — 不可变基础设施，服务器从需要维护的资产变成可销毁的耗材</a:t>
             </a:r>
           </a:p>
         </p:txBody>
@@ -13703,7 +15086,7 @@
         <p:spPr>
           <a:xfrm>
             <a:off x="6094476" y="3090672"/>
-            <a:ext cx="5180076" cy="365760"/>
+            <a:ext cx="5180076" cy="457200"/>
           </a:xfrm>
           <a:prstGeom prst="rect">
             <a:avLst/>
@@ -13737,8 +15120,8 @@
         </p:nvSpPr>
         <p:spPr>
           <a:xfrm>
-            <a:off x="6094476" y="3474720"/>
-            <a:ext cx="5180076" cy="1005840"/>
+            <a:off x="6094476" y="3493008"/>
+            <a:ext cx="5180076" cy="960119"/>
           </a:xfrm>
           <a:prstGeom prst="rect">
             <a:avLst/>
@@ -13759,15 +15142,7 @@
               </a:defRPr>
             </a:pPr>
             <a:r>
-              <a:t>2014 — 声明式API + 调解循环</a:t>
-            </a:r>
-            <a:br/>
-            <a:r>
-              <a:t>Controller 本质上是</a:t>
-            </a:r>
-            <a:br/>
-            <a:r>
-              <a:t>原始的、针对特定任务的 Agent</a:t>
+              <a:t>2014 — 声明式API+调解循环，Controller本质上是原始的、特定任务的 Agent</a:t>
             </a:r>
           </a:p>
         </p:txBody>
@@ -13884,7 +15259,7 @@
         </p:nvSpPr>
         <p:spPr>
           <a:xfrm>
-            <a:off x="457200" y="2011680"/>
+            <a:off x="457200" y="365760"/>
             <a:ext cx="11274552" cy="2286000"/>
           </a:xfrm>
           <a:prstGeom prst="rect">

--- a/static/reports/agent-design-patterns-book-intro.pptx
+++ b/static/reports/agent-design-patterns-book-intro.pptx
@@ -38,6 +38,7 @@
     <p:sldId id="286" r:id="rId37"/>
     <p:sldId id="287" r:id="rId38"/>
     <p:sldId id="288" r:id="rId39"/>
+    <p:sldId id="289" r:id="rId40"/>
   </p:sldIdLst>
   <p:sldSz cx="12188952" cy="6858000" type="screen4x3"/>
   <p:notesSz cx="6858000" cy="9144000"/>
@@ -9219,90 +9220,3115 @@
               </a:defRPr>
             </a:pPr>
             <a:r>
-              <a:t>👁️ 感知模式：看世界</a:t>
-            </a:r>
-          </a:p>
-        </p:txBody>
-      </p:sp>
-      <p:sp>
-        <p:nvSpPr>
-          <p:cNvPr id="5" name="TextBox 4"/>
-          <p:cNvSpPr txBox="1"/>
-          <p:nvPr/>
-        </p:nvSpPr>
-        <p:spPr>
-          <a:xfrm>
-            <a:off x="640080" y="1371600"/>
-            <a:ext cx="10972800" cy="5029200"/>
-          </a:xfrm>
-          <a:prstGeom prst="rect">
-            <a:avLst/>
-          </a:prstGeom>
-          <a:noFill/>
-        </p:spPr>
-        <p:txBody>
-          <a:bodyPr wrap="square">
+              <a:t>21 个设计模式一览</a:t>
+            </a:r>
+          </a:p>
+        </p:txBody>
+      </p:sp>
+      <p:sp>
+        <p:nvSpPr>
+          <p:cNvPr id="5" name="Rounded Rectangle 4"/>
+          <p:cNvSpPr/>
+          <p:nvPr/>
+        </p:nvSpPr>
+        <p:spPr>
+          <a:xfrm>
+            <a:off x="365760" y="1143000"/>
+            <a:ext cx="594360" cy="196596"/>
+          </a:xfrm>
+          <a:prstGeom prst="roundRect">
+            <a:avLst/>
+          </a:prstGeom>
+          <a:solidFill>
+            <a:srgbClr val="42A3E1"/>
+          </a:solidFill>
+          <a:ln>
+            <a:noFill/>
+          </a:ln>
+        </p:spPr>
+        <p:style>
+          <a:lnRef idx="1">
+            <a:schemeClr val="accent1"/>
+          </a:lnRef>
+          <a:fillRef idx="3">
+            <a:schemeClr val="accent1"/>
+          </a:fillRef>
+          <a:effectRef idx="2">
+            <a:schemeClr val="accent1"/>
+          </a:effectRef>
+          <a:fontRef idx="minor">
+            <a:schemeClr val="lt1"/>
+          </a:fontRef>
+        </p:style>
+        <p:txBody>
+          <a:bodyPr rtlCol="0" anchor="ctr"/>
+          <a:lstStyle/>
+          <a:p>
+            <a:pPr algn="ctr"/>
+          </a:p>
+        </p:txBody>
+      </p:sp>
+      <p:sp>
+        <p:nvSpPr>
+          <p:cNvPr id="6" name="TextBox 5"/>
+          <p:cNvSpPr txBox="1"/>
+          <p:nvPr/>
+        </p:nvSpPr>
+        <p:spPr>
+          <a:xfrm>
+            <a:off x="365760" y="1152144"/>
+            <a:ext cx="594360" cy="178308"/>
+          </a:xfrm>
+          <a:prstGeom prst="rect">
+            <a:avLst/>
+          </a:prstGeom>
+          <a:noFill/>
+        </p:spPr>
+        <p:txBody>
+          <a:bodyPr wrap="none">
+            <a:spAutoFit/>
+          </a:bodyPr>
+          <a:lstStyle/>
+          <a:p>
+            <a:pPr algn="ctr">
+              <a:defRPr sz="800" b="1">
+                <a:solidFill>
+                  <a:srgbClr val="FFFFFF"/>
+                </a:solidFill>
+              </a:defRPr>
+            </a:pPr>
+            <a:r>
+              <a:t>感知</a:t>
+            </a:r>
+          </a:p>
+        </p:txBody>
+      </p:sp>
+      <p:sp>
+        <p:nvSpPr>
+          <p:cNvPr id="7" name="TextBox 6"/>
+          <p:cNvSpPr txBox="1"/>
+          <p:nvPr/>
+        </p:nvSpPr>
+        <p:spPr>
+          <a:xfrm>
+            <a:off x="987552" y="1152144"/>
+            <a:ext cx="1371600" cy="178308"/>
+          </a:xfrm>
+          <a:prstGeom prst="rect">
+            <a:avLst/>
+          </a:prstGeom>
+          <a:noFill/>
+        </p:spPr>
+        <p:txBody>
+          <a:bodyPr wrap="none">
             <a:spAutoFit/>
           </a:bodyPr>
           <a:lstStyle/>
           <a:p>
             <a:pPr>
-              <a:spcAft>
-                <a:spcPts val="1400"/>
-              </a:spcAft>
-              <a:defRPr sz="2000" b="1">
-                <a:solidFill>
-                  <a:srgbClr val="553C9A"/>
-                </a:solidFill>
-              </a:defRPr>
-            </a:pPr>
-            <a:r>
-              <a:t>• 注意力聚焦 — 构建认知漏斗，用最低 Token 成本换取最高上下文质量</a:t>
-            </a:r>
-          </a:p>
+              <a:defRPr sz="800" b="1">
+                <a:solidFill>
+                  <a:srgbClr val="1A1A2E"/>
+                </a:solidFill>
+              </a:defRPr>
+            </a:pPr>
+            <a:r>
+              <a:t>注意力聚焦模式</a:t>
+            </a:r>
+          </a:p>
+        </p:txBody>
+      </p:sp>
+      <p:sp>
+        <p:nvSpPr>
+          <p:cNvPr id="8" name="TextBox 7"/>
+          <p:cNvSpPr txBox="1"/>
+          <p:nvPr/>
+        </p:nvSpPr>
+        <p:spPr>
+          <a:xfrm>
+            <a:off x="2359152" y="1152144"/>
+            <a:ext cx="1536192" cy="178308"/>
+          </a:xfrm>
+          <a:prstGeom prst="rect">
+            <a:avLst/>
+          </a:prstGeom>
+          <a:noFill/>
+        </p:spPr>
+        <p:txBody>
+          <a:bodyPr wrap="none">
+            <a:spAutoFit/>
+          </a:bodyPr>
+          <a:lstStyle/>
           <a:p>
             <a:pPr>
-              <a:spcAft>
-                <a:spcPts val="1400"/>
-              </a:spcAft>
-              <a:defRPr sz="2000" b="0">
+              <a:defRPr sz="700">
+                <a:solidFill>
+                  <a:srgbClr val="4A5568"/>
+                </a:solidFill>
+              </a:defRPr>
+            </a:pPr>
+            <a:r>
+              <a:t>构建认知漏斗，用最低 Token 成本换取最高价值信息</a:t>
+            </a:r>
+          </a:p>
+        </p:txBody>
+      </p:sp>
+      <p:sp>
+        <p:nvSpPr>
+          <p:cNvPr id="9" name="Rounded Rectangle 8"/>
+          <p:cNvSpPr/>
+          <p:nvPr/>
+        </p:nvSpPr>
+        <p:spPr>
+          <a:xfrm>
+            <a:off x="4114800" y="1143000"/>
+            <a:ext cx="594360" cy="196596"/>
+          </a:xfrm>
+          <a:prstGeom prst="roundRect">
+            <a:avLst/>
+          </a:prstGeom>
+          <a:solidFill>
+            <a:srgbClr val="42A3E1"/>
+          </a:solidFill>
+          <a:ln>
+            <a:noFill/>
+          </a:ln>
+        </p:spPr>
+        <p:style>
+          <a:lnRef idx="1">
+            <a:schemeClr val="accent1"/>
+          </a:lnRef>
+          <a:fillRef idx="3">
+            <a:schemeClr val="accent1"/>
+          </a:fillRef>
+          <a:effectRef idx="2">
+            <a:schemeClr val="accent1"/>
+          </a:effectRef>
+          <a:fontRef idx="minor">
+            <a:schemeClr val="lt1"/>
+          </a:fontRef>
+        </p:style>
+        <p:txBody>
+          <a:bodyPr rtlCol="0" anchor="ctr"/>
+          <a:lstStyle/>
+          <a:p>
+            <a:pPr algn="ctr"/>
+          </a:p>
+        </p:txBody>
+      </p:sp>
+      <p:sp>
+        <p:nvSpPr>
+          <p:cNvPr id="10" name="TextBox 9"/>
+          <p:cNvSpPr txBox="1"/>
+          <p:nvPr/>
+        </p:nvSpPr>
+        <p:spPr>
+          <a:xfrm>
+            <a:off x="4114800" y="1152144"/>
+            <a:ext cx="594360" cy="178308"/>
+          </a:xfrm>
+          <a:prstGeom prst="rect">
+            <a:avLst/>
+          </a:prstGeom>
+          <a:noFill/>
+        </p:spPr>
+        <p:txBody>
+          <a:bodyPr wrap="none">
+            <a:spAutoFit/>
+          </a:bodyPr>
+          <a:lstStyle/>
+          <a:p>
+            <a:pPr algn="ctr">
+              <a:defRPr sz="800" b="1">
+                <a:solidFill>
+                  <a:srgbClr val="FFFFFF"/>
+                </a:solidFill>
+              </a:defRPr>
+            </a:pPr>
+            <a:r>
+              <a:t>感知</a:t>
+            </a:r>
+          </a:p>
+        </p:txBody>
+      </p:sp>
+      <p:sp>
+        <p:nvSpPr>
+          <p:cNvPr id="11" name="TextBox 10"/>
+          <p:cNvSpPr txBox="1"/>
+          <p:nvPr/>
+        </p:nvSpPr>
+        <p:spPr>
+          <a:xfrm>
+            <a:off x="4736592" y="1152144"/>
+            <a:ext cx="1371600" cy="178308"/>
+          </a:xfrm>
+          <a:prstGeom prst="rect">
+            <a:avLst/>
+          </a:prstGeom>
+          <a:noFill/>
+        </p:spPr>
+        <p:txBody>
+          <a:bodyPr wrap="none">
+            <a:spAutoFit/>
+          </a:bodyPr>
+          <a:lstStyle/>
+          <a:p>
+            <a:pPr>
+              <a:defRPr sz="800" b="1">
                 <a:solidFill>
                   <a:srgbClr val="1A1A2E"/>
                 </a:solidFill>
               </a:defRPr>
             </a:pPr>
             <a:r>
-              <a:t>• 多模态融合 — 建立统一语义场，从拼接式向原生式演进</a:t>
-            </a:r>
-          </a:p>
+              <a:t>多模态融合模式</a:t>
+            </a:r>
+          </a:p>
+        </p:txBody>
+      </p:sp>
+      <p:sp>
+        <p:nvSpPr>
+          <p:cNvPr id="12" name="TextBox 11"/>
+          <p:cNvSpPr txBox="1"/>
+          <p:nvPr/>
+        </p:nvSpPr>
+        <p:spPr>
+          <a:xfrm>
+            <a:off x="6108192" y="1152144"/>
+            <a:ext cx="1536192" cy="178308"/>
+          </a:xfrm>
+          <a:prstGeom prst="rect">
+            <a:avLst/>
+          </a:prstGeom>
+          <a:noFill/>
+        </p:spPr>
+        <p:txBody>
+          <a:bodyPr wrap="none">
+            <a:spAutoFit/>
+          </a:bodyPr>
+          <a:lstStyle/>
           <a:p>
             <a:pPr>
-              <a:spcAft>
-                <a:spcPts val="1400"/>
-              </a:spcAft>
-              <a:defRPr sz="2000" b="1">
-                <a:solidFill>
-                  <a:srgbClr val="553C9A"/>
-                </a:solidFill>
-              </a:defRPr>
-            </a:pPr>
-            <a:r>
-              <a:t>• 主动感知 — Agent 从被动的答题者转变为主动的调查员</a:t>
-            </a:r>
-          </a:p>
+              <a:defRPr sz="700">
+                <a:solidFill>
+                  <a:srgbClr val="4A5568"/>
+                </a:solidFill>
+              </a:defRPr>
+            </a:pPr>
+            <a:r>
+              <a:t>打破图像/文字/语音的模态孤岛，建立统一语义场</a:t>
+            </a:r>
+          </a:p>
+        </p:txBody>
+      </p:sp>
+      <p:sp>
+        <p:nvSpPr>
+          <p:cNvPr id="13" name="Rounded Rectangle 12"/>
+          <p:cNvSpPr/>
+          <p:nvPr/>
+        </p:nvSpPr>
+        <p:spPr>
+          <a:xfrm>
+            <a:off x="7863840" y="1143000"/>
+            <a:ext cx="594360" cy="196596"/>
+          </a:xfrm>
+          <a:prstGeom prst="roundRect">
+            <a:avLst/>
+          </a:prstGeom>
+          <a:solidFill>
+            <a:srgbClr val="42A3E1"/>
+          </a:solidFill>
+          <a:ln>
+            <a:noFill/>
+          </a:ln>
+        </p:spPr>
+        <p:style>
+          <a:lnRef idx="1">
+            <a:schemeClr val="accent1"/>
+          </a:lnRef>
+          <a:fillRef idx="3">
+            <a:schemeClr val="accent1"/>
+          </a:fillRef>
+          <a:effectRef idx="2">
+            <a:schemeClr val="accent1"/>
+          </a:effectRef>
+          <a:fontRef idx="minor">
+            <a:schemeClr val="lt1"/>
+          </a:fontRef>
+        </p:style>
+        <p:txBody>
+          <a:bodyPr rtlCol="0" anchor="ctr"/>
+          <a:lstStyle/>
+          <a:p>
+            <a:pPr algn="ctr"/>
+          </a:p>
+        </p:txBody>
+      </p:sp>
+      <p:sp>
+        <p:nvSpPr>
+          <p:cNvPr id="14" name="TextBox 13"/>
+          <p:cNvSpPr txBox="1"/>
+          <p:nvPr/>
+        </p:nvSpPr>
+        <p:spPr>
+          <a:xfrm>
+            <a:off x="7863840" y="1152144"/>
+            <a:ext cx="594360" cy="178308"/>
+          </a:xfrm>
+          <a:prstGeom prst="rect">
+            <a:avLst/>
+          </a:prstGeom>
+          <a:noFill/>
+        </p:spPr>
+        <p:txBody>
+          <a:bodyPr wrap="none">
+            <a:spAutoFit/>
+          </a:bodyPr>
+          <a:lstStyle/>
+          <a:p>
+            <a:pPr algn="ctr">
+              <a:defRPr sz="800" b="1">
+                <a:solidFill>
+                  <a:srgbClr val="FFFFFF"/>
+                </a:solidFill>
+              </a:defRPr>
+            </a:pPr>
+            <a:r>
+              <a:t>感知</a:t>
+            </a:r>
+          </a:p>
+        </p:txBody>
+      </p:sp>
+      <p:sp>
+        <p:nvSpPr>
+          <p:cNvPr id="15" name="TextBox 14"/>
+          <p:cNvSpPr txBox="1"/>
+          <p:nvPr/>
+        </p:nvSpPr>
+        <p:spPr>
+          <a:xfrm>
+            <a:off x="8485632" y="1152144"/>
+            <a:ext cx="1371600" cy="178308"/>
+          </a:xfrm>
+          <a:prstGeom prst="rect">
+            <a:avLst/>
+          </a:prstGeom>
+          <a:noFill/>
+        </p:spPr>
+        <p:txBody>
+          <a:bodyPr wrap="none">
+            <a:spAutoFit/>
+          </a:bodyPr>
+          <a:lstStyle/>
           <a:p>
             <a:pPr>
-              <a:spcAft>
-                <a:spcPts val="1400"/>
-              </a:spcAft>
-              <a:defRPr sz="2000" b="0">
+              <a:defRPr sz="800" b="1">
                 <a:solidFill>
                   <a:srgbClr val="1A1A2E"/>
                 </a:solidFill>
               </a:defRPr>
             </a:pPr>
             <a:r>
-              <a:t>• 本质：不是看到所有，而是看到关键并主动寻找未知</a:t>
+              <a:t>主动感知模式</a:t>
+            </a:r>
+          </a:p>
+        </p:txBody>
+      </p:sp>
+      <p:sp>
+        <p:nvSpPr>
+          <p:cNvPr id="16" name="TextBox 15"/>
+          <p:cNvSpPr txBox="1"/>
+          <p:nvPr/>
+        </p:nvSpPr>
+        <p:spPr>
+          <a:xfrm>
+            <a:off x="9857232" y="1152144"/>
+            <a:ext cx="1536192" cy="178308"/>
+          </a:xfrm>
+          <a:prstGeom prst="rect">
+            <a:avLst/>
+          </a:prstGeom>
+          <a:noFill/>
+        </p:spPr>
+        <p:txBody>
+          <a:bodyPr wrap="none">
+            <a:spAutoFit/>
+          </a:bodyPr>
+          <a:lstStyle/>
+          <a:p>
+            <a:pPr>
+              <a:defRPr sz="700">
+                <a:solidFill>
+                  <a:srgbClr val="4A5568"/>
+                </a:solidFill>
+              </a:defRPr>
+            </a:pPr>
+            <a:r>
+              <a:t>Agent 从被动的答题者变为主动的调查员</a:t>
+            </a:r>
+          </a:p>
+        </p:txBody>
+      </p:sp>
+      <p:sp>
+        <p:nvSpPr>
+          <p:cNvPr id="17" name="Rounded Rectangle 16"/>
+          <p:cNvSpPr/>
+          <p:nvPr/>
+        </p:nvSpPr>
+        <p:spPr>
+          <a:xfrm>
+            <a:off x="365760" y="1357884"/>
+            <a:ext cx="594360" cy="196596"/>
+          </a:xfrm>
+          <a:prstGeom prst="roundRect">
+            <a:avLst/>
+          </a:prstGeom>
+          <a:solidFill>
+            <a:srgbClr val="38A369"/>
+          </a:solidFill>
+          <a:ln>
+            <a:noFill/>
+          </a:ln>
+        </p:spPr>
+        <p:style>
+          <a:lnRef idx="1">
+            <a:schemeClr val="accent1"/>
+          </a:lnRef>
+          <a:fillRef idx="3">
+            <a:schemeClr val="accent1"/>
+          </a:fillRef>
+          <a:effectRef idx="2">
+            <a:schemeClr val="accent1"/>
+          </a:effectRef>
+          <a:fontRef idx="minor">
+            <a:schemeClr val="lt1"/>
+          </a:fontRef>
+        </p:style>
+        <p:txBody>
+          <a:bodyPr rtlCol="0" anchor="ctr"/>
+          <a:lstStyle/>
+          <a:p>
+            <a:pPr algn="ctr"/>
+          </a:p>
+        </p:txBody>
+      </p:sp>
+      <p:sp>
+        <p:nvSpPr>
+          <p:cNvPr id="18" name="TextBox 17"/>
+          <p:cNvSpPr txBox="1"/>
+          <p:nvPr/>
+        </p:nvSpPr>
+        <p:spPr>
+          <a:xfrm>
+            <a:off x="365760" y="1367028"/>
+            <a:ext cx="594360" cy="178308"/>
+          </a:xfrm>
+          <a:prstGeom prst="rect">
+            <a:avLst/>
+          </a:prstGeom>
+          <a:noFill/>
+        </p:spPr>
+        <p:txBody>
+          <a:bodyPr wrap="none">
+            <a:spAutoFit/>
+          </a:bodyPr>
+          <a:lstStyle/>
+          <a:p>
+            <a:pPr algn="ctr">
+              <a:defRPr sz="800" b="1">
+                <a:solidFill>
+                  <a:srgbClr val="FFFFFF"/>
+                </a:solidFill>
+              </a:defRPr>
+            </a:pPr>
+            <a:r>
+              <a:t>记忆</a:t>
+            </a:r>
+          </a:p>
+        </p:txBody>
+      </p:sp>
+      <p:sp>
+        <p:nvSpPr>
+          <p:cNvPr id="19" name="TextBox 18"/>
+          <p:cNvSpPr txBox="1"/>
+          <p:nvPr/>
+        </p:nvSpPr>
+        <p:spPr>
+          <a:xfrm>
+            <a:off x="987552" y="1367028"/>
+            <a:ext cx="1371600" cy="178308"/>
+          </a:xfrm>
+          <a:prstGeom prst="rect">
+            <a:avLst/>
+          </a:prstGeom>
+          <a:noFill/>
+        </p:spPr>
+        <p:txBody>
+          <a:bodyPr wrap="none">
+            <a:spAutoFit/>
+          </a:bodyPr>
+          <a:lstStyle/>
+          <a:p>
+            <a:pPr>
+              <a:defRPr sz="800" b="1">
+                <a:solidFill>
+                  <a:srgbClr val="1A1A2E"/>
+                </a:solidFill>
+              </a:defRPr>
+            </a:pPr>
+            <a:r>
+              <a:t>分层记忆模式</a:t>
+            </a:r>
+          </a:p>
+        </p:txBody>
+      </p:sp>
+      <p:sp>
+        <p:nvSpPr>
+          <p:cNvPr id="20" name="TextBox 19"/>
+          <p:cNvSpPr txBox="1"/>
+          <p:nvPr/>
+        </p:nvSpPr>
+        <p:spPr>
+          <a:xfrm>
+            <a:off x="2359152" y="1367028"/>
+            <a:ext cx="1536192" cy="178308"/>
+          </a:xfrm>
+          <a:prstGeom prst="rect">
+            <a:avLst/>
+          </a:prstGeom>
+          <a:noFill/>
+        </p:spPr>
+        <p:txBody>
+          <a:bodyPr wrap="none">
+            <a:spAutoFit/>
+          </a:bodyPr>
+          <a:lstStyle/>
+          <a:p>
+            <a:pPr>
+              <a:defRPr sz="700">
+                <a:solidFill>
+                  <a:srgbClr val="4A5568"/>
+                </a:solidFill>
+              </a:defRPr>
+            </a:pPr>
+            <a:r>
+              <a:t>L1工作记忆 / L2短期缓存 / L3长期存储，信息在冷热间自动流转</a:t>
+            </a:r>
+          </a:p>
+        </p:txBody>
+      </p:sp>
+      <p:sp>
+        <p:nvSpPr>
+          <p:cNvPr id="21" name="Rounded Rectangle 20"/>
+          <p:cNvSpPr/>
+          <p:nvPr/>
+        </p:nvSpPr>
+        <p:spPr>
+          <a:xfrm>
+            <a:off x="4114800" y="1357884"/>
+            <a:ext cx="594360" cy="196596"/>
+          </a:xfrm>
+          <a:prstGeom prst="roundRect">
+            <a:avLst/>
+          </a:prstGeom>
+          <a:solidFill>
+            <a:srgbClr val="38A369"/>
+          </a:solidFill>
+          <a:ln>
+            <a:noFill/>
+          </a:ln>
+        </p:spPr>
+        <p:style>
+          <a:lnRef idx="1">
+            <a:schemeClr val="accent1"/>
+          </a:lnRef>
+          <a:fillRef idx="3">
+            <a:schemeClr val="accent1"/>
+          </a:fillRef>
+          <a:effectRef idx="2">
+            <a:schemeClr val="accent1"/>
+          </a:effectRef>
+          <a:fontRef idx="minor">
+            <a:schemeClr val="lt1"/>
+          </a:fontRef>
+        </p:style>
+        <p:txBody>
+          <a:bodyPr rtlCol="0" anchor="ctr"/>
+          <a:lstStyle/>
+          <a:p>
+            <a:pPr algn="ctr"/>
+          </a:p>
+        </p:txBody>
+      </p:sp>
+      <p:sp>
+        <p:nvSpPr>
+          <p:cNvPr id="22" name="TextBox 21"/>
+          <p:cNvSpPr txBox="1"/>
+          <p:nvPr/>
+        </p:nvSpPr>
+        <p:spPr>
+          <a:xfrm>
+            <a:off x="4114800" y="1367028"/>
+            <a:ext cx="594360" cy="178308"/>
+          </a:xfrm>
+          <a:prstGeom prst="rect">
+            <a:avLst/>
+          </a:prstGeom>
+          <a:noFill/>
+        </p:spPr>
+        <p:txBody>
+          <a:bodyPr wrap="none">
+            <a:spAutoFit/>
+          </a:bodyPr>
+          <a:lstStyle/>
+          <a:p>
+            <a:pPr algn="ctr">
+              <a:defRPr sz="800" b="1">
+                <a:solidFill>
+                  <a:srgbClr val="FFFFFF"/>
+                </a:solidFill>
+              </a:defRPr>
+            </a:pPr>
+            <a:r>
+              <a:t>记忆</a:t>
+            </a:r>
+          </a:p>
+        </p:txBody>
+      </p:sp>
+      <p:sp>
+        <p:nvSpPr>
+          <p:cNvPr id="23" name="TextBox 22"/>
+          <p:cNvSpPr txBox="1"/>
+          <p:nvPr/>
+        </p:nvSpPr>
+        <p:spPr>
+          <a:xfrm>
+            <a:off x="4736592" y="1367028"/>
+            <a:ext cx="1371600" cy="178308"/>
+          </a:xfrm>
+          <a:prstGeom prst="rect">
+            <a:avLst/>
+          </a:prstGeom>
+          <a:noFill/>
+        </p:spPr>
+        <p:txBody>
+          <a:bodyPr wrap="none">
+            <a:spAutoFit/>
+          </a:bodyPr>
+          <a:lstStyle/>
+          <a:p>
+            <a:pPr>
+              <a:defRPr sz="800" b="1">
+                <a:solidFill>
+                  <a:srgbClr val="1A1A2E"/>
+                </a:solidFill>
+              </a:defRPr>
+            </a:pPr>
+            <a:r>
+              <a:t>RAG模式</a:t>
+            </a:r>
+          </a:p>
+        </p:txBody>
+      </p:sp>
+      <p:sp>
+        <p:nvSpPr>
+          <p:cNvPr id="24" name="TextBox 23"/>
+          <p:cNvSpPr txBox="1"/>
+          <p:nvPr/>
+        </p:nvSpPr>
+        <p:spPr>
+          <a:xfrm>
+            <a:off x="6108192" y="1367028"/>
+            <a:ext cx="1536192" cy="178308"/>
+          </a:xfrm>
+          <a:prstGeom prst="rect">
+            <a:avLst/>
+          </a:prstGeom>
+          <a:noFill/>
+        </p:spPr>
+        <p:txBody>
+          <a:bodyPr wrap="none">
+            <a:spAutoFit/>
+          </a:bodyPr>
+          <a:lstStyle/>
+          <a:p>
+            <a:pPr>
+              <a:defRPr sz="700">
+                <a:solidFill>
+                  <a:srgbClr val="4A5568"/>
+                </a:solidFill>
+              </a:defRPr>
+            </a:pPr>
+            <a:r>
+              <a:t>将推理能力(CPU)与知识存储(磁盘)解耦，无需重新训练</a:t>
+            </a:r>
+          </a:p>
+        </p:txBody>
+      </p:sp>
+      <p:sp>
+        <p:nvSpPr>
+          <p:cNvPr id="25" name="Rounded Rectangle 24"/>
+          <p:cNvSpPr/>
+          <p:nvPr/>
+        </p:nvSpPr>
+        <p:spPr>
+          <a:xfrm>
+            <a:off x="7863840" y="1357884"/>
+            <a:ext cx="594360" cy="196596"/>
+          </a:xfrm>
+          <a:prstGeom prst="roundRect">
+            <a:avLst/>
+          </a:prstGeom>
+          <a:solidFill>
+            <a:srgbClr val="38A369"/>
+          </a:solidFill>
+          <a:ln>
+            <a:noFill/>
+          </a:ln>
+        </p:spPr>
+        <p:style>
+          <a:lnRef idx="1">
+            <a:schemeClr val="accent1"/>
+          </a:lnRef>
+          <a:fillRef idx="3">
+            <a:schemeClr val="accent1"/>
+          </a:fillRef>
+          <a:effectRef idx="2">
+            <a:schemeClr val="accent1"/>
+          </a:effectRef>
+          <a:fontRef idx="minor">
+            <a:schemeClr val="lt1"/>
+          </a:fontRef>
+        </p:style>
+        <p:txBody>
+          <a:bodyPr rtlCol="0" anchor="ctr"/>
+          <a:lstStyle/>
+          <a:p>
+            <a:pPr algn="ctr"/>
+          </a:p>
+        </p:txBody>
+      </p:sp>
+      <p:sp>
+        <p:nvSpPr>
+          <p:cNvPr id="26" name="TextBox 25"/>
+          <p:cNvSpPr txBox="1"/>
+          <p:nvPr/>
+        </p:nvSpPr>
+        <p:spPr>
+          <a:xfrm>
+            <a:off x="7863840" y="1367028"/>
+            <a:ext cx="594360" cy="178308"/>
+          </a:xfrm>
+          <a:prstGeom prst="rect">
+            <a:avLst/>
+          </a:prstGeom>
+          <a:noFill/>
+        </p:spPr>
+        <p:txBody>
+          <a:bodyPr wrap="none">
+            <a:spAutoFit/>
+          </a:bodyPr>
+          <a:lstStyle/>
+          <a:p>
+            <a:pPr algn="ctr">
+              <a:defRPr sz="800" b="1">
+                <a:solidFill>
+                  <a:srgbClr val="FFFFFF"/>
+                </a:solidFill>
+              </a:defRPr>
+            </a:pPr>
+            <a:r>
+              <a:t>记忆</a:t>
+            </a:r>
+          </a:p>
+        </p:txBody>
+      </p:sp>
+      <p:sp>
+        <p:nvSpPr>
+          <p:cNvPr id="27" name="TextBox 26"/>
+          <p:cNvSpPr txBox="1"/>
+          <p:nvPr/>
+        </p:nvSpPr>
+        <p:spPr>
+          <a:xfrm>
+            <a:off x="8485632" y="1367028"/>
+            <a:ext cx="1371600" cy="178308"/>
+          </a:xfrm>
+          <a:prstGeom prst="rect">
+            <a:avLst/>
+          </a:prstGeom>
+          <a:noFill/>
+        </p:spPr>
+        <p:txBody>
+          <a:bodyPr wrap="none">
+            <a:spAutoFit/>
+          </a:bodyPr>
+          <a:lstStyle/>
+          <a:p>
+            <a:pPr>
+              <a:defRPr sz="800" b="1">
+                <a:solidFill>
+                  <a:srgbClr val="1A1A2E"/>
+                </a:solidFill>
+              </a:defRPr>
+            </a:pPr>
+            <a:r>
+              <a:t>情节记忆模式</a:t>
+            </a:r>
+          </a:p>
+        </p:txBody>
+      </p:sp>
+      <p:sp>
+        <p:nvSpPr>
+          <p:cNvPr id="28" name="TextBox 27"/>
+          <p:cNvSpPr txBox="1"/>
+          <p:nvPr/>
+        </p:nvSpPr>
+        <p:spPr>
+          <a:xfrm>
+            <a:off x="9857232" y="1367028"/>
+            <a:ext cx="1536192" cy="178308"/>
+          </a:xfrm>
+          <a:prstGeom prst="rect">
+            <a:avLst/>
+          </a:prstGeom>
+          <a:noFill/>
+        </p:spPr>
+        <p:txBody>
+          <a:bodyPr wrap="none">
+            <a:spAutoFit/>
+          </a:bodyPr>
+          <a:lstStyle/>
+          <a:p>
+            <a:pPr>
+              <a:defRPr sz="700">
+                <a:solidFill>
+                  <a:srgbClr val="4A5568"/>
+                </a:solidFill>
+              </a:defRPr>
+            </a:pPr>
+            <a:r>
+              <a:t>沉淀 Agent 自身交互产生的动态经验，无需微调即可进化</a:t>
+            </a:r>
+          </a:p>
+        </p:txBody>
+      </p:sp>
+      <p:sp>
+        <p:nvSpPr>
+          <p:cNvPr id="29" name="Rounded Rectangle 28"/>
+          <p:cNvSpPr/>
+          <p:nvPr/>
+        </p:nvSpPr>
+        <p:spPr>
+          <a:xfrm>
+            <a:off x="365760" y="1572768"/>
+            <a:ext cx="594360" cy="196596"/>
+          </a:xfrm>
+          <a:prstGeom prst="roundRect">
+            <a:avLst/>
+          </a:prstGeom>
+          <a:solidFill>
+            <a:srgbClr val="DD6B20"/>
+          </a:solidFill>
+          <a:ln>
+            <a:noFill/>
+          </a:ln>
+        </p:spPr>
+        <p:style>
+          <a:lnRef idx="1">
+            <a:schemeClr val="accent1"/>
+          </a:lnRef>
+          <a:fillRef idx="3">
+            <a:schemeClr val="accent1"/>
+          </a:fillRef>
+          <a:effectRef idx="2">
+            <a:schemeClr val="accent1"/>
+          </a:effectRef>
+          <a:fontRef idx="minor">
+            <a:schemeClr val="lt1"/>
+          </a:fontRef>
+        </p:style>
+        <p:txBody>
+          <a:bodyPr rtlCol="0" anchor="ctr"/>
+          <a:lstStyle/>
+          <a:p>
+            <a:pPr algn="ctr"/>
+          </a:p>
+        </p:txBody>
+      </p:sp>
+      <p:sp>
+        <p:nvSpPr>
+          <p:cNvPr id="30" name="TextBox 29"/>
+          <p:cNvSpPr txBox="1"/>
+          <p:nvPr/>
+        </p:nvSpPr>
+        <p:spPr>
+          <a:xfrm>
+            <a:off x="365760" y="1581912"/>
+            <a:ext cx="594360" cy="178308"/>
+          </a:xfrm>
+          <a:prstGeom prst="rect">
+            <a:avLst/>
+          </a:prstGeom>
+          <a:noFill/>
+        </p:spPr>
+        <p:txBody>
+          <a:bodyPr wrap="none">
+            <a:spAutoFit/>
+          </a:bodyPr>
+          <a:lstStyle/>
+          <a:p>
+            <a:pPr algn="ctr">
+              <a:defRPr sz="800" b="1">
+                <a:solidFill>
+                  <a:srgbClr val="FFFFFF"/>
+                </a:solidFill>
+              </a:defRPr>
+            </a:pPr>
+            <a:r>
+              <a:t>推理</a:t>
+            </a:r>
+          </a:p>
+        </p:txBody>
+      </p:sp>
+      <p:sp>
+        <p:nvSpPr>
+          <p:cNvPr id="31" name="TextBox 30"/>
+          <p:cNvSpPr txBox="1"/>
+          <p:nvPr/>
+        </p:nvSpPr>
+        <p:spPr>
+          <a:xfrm>
+            <a:off x="987552" y="1581912"/>
+            <a:ext cx="1371600" cy="178308"/>
+          </a:xfrm>
+          <a:prstGeom prst="rect">
+            <a:avLst/>
+          </a:prstGeom>
+          <a:noFill/>
+        </p:spPr>
+        <p:txBody>
+          <a:bodyPr wrap="none">
+            <a:spAutoFit/>
+          </a:bodyPr>
+          <a:lstStyle/>
+          <a:p>
+            <a:pPr>
+              <a:defRPr sz="800" b="1">
+                <a:solidFill>
+                  <a:srgbClr val="1A1A2E"/>
+                </a:solidFill>
+              </a:defRPr>
+            </a:pPr>
+            <a:r>
+              <a:t>思维链模式</a:t>
+            </a:r>
+          </a:p>
+        </p:txBody>
+      </p:sp>
+      <p:sp>
+        <p:nvSpPr>
+          <p:cNvPr id="32" name="TextBox 31"/>
+          <p:cNvSpPr txBox="1"/>
+          <p:nvPr/>
+        </p:nvSpPr>
+        <p:spPr>
+          <a:xfrm>
+            <a:off x="2359152" y="1581912"/>
+            <a:ext cx="1536192" cy="178308"/>
+          </a:xfrm>
+          <a:prstGeom prst="rect">
+            <a:avLst/>
+          </a:prstGeom>
+          <a:noFill/>
+        </p:spPr>
+        <p:txBody>
+          <a:bodyPr wrap="none">
+            <a:spAutoFit/>
+          </a:bodyPr>
+          <a:lstStyle/>
+          <a:p>
+            <a:pPr>
+              <a:defRPr sz="700">
+                <a:solidFill>
+                  <a:srgbClr val="4A5568"/>
+                </a:solidFill>
+              </a:defRPr>
+            </a:pPr>
+            <a:r>
+              <a:t>线性逐步推进，适合数学与逻辑推导（走钢丝）</a:t>
+            </a:r>
+          </a:p>
+        </p:txBody>
+      </p:sp>
+      <p:sp>
+        <p:nvSpPr>
+          <p:cNvPr id="33" name="Rounded Rectangle 32"/>
+          <p:cNvSpPr/>
+          <p:nvPr/>
+        </p:nvSpPr>
+        <p:spPr>
+          <a:xfrm>
+            <a:off x="4114800" y="1572768"/>
+            <a:ext cx="594360" cy="196596"/>
+          </a:xfrm>
+          <a:prstGeom prst="roundRect">
+            <a:avLst/>
+          </a:prstGeom>
+          <a:solidFill>
+            <a:srgbClr val="DD6B20"/>
+          </a:solidFill>
+          <a:ln>
+            <a:noFill/>
+          </a:ln>
+        </p:spPr>
+        <p:style>
+          <a:lnRef idx="1">
+            <a:schemeClr val="accent1"/>
+          </a:lnRef>
+          <a:fillRef idx="3">
+            <a:schemeClr val="accent1"/>
+          </a:fillRef>
+          <a:effectRef idx="2">
+            <a:schemeClr val="accent1"/>
+          </a:effectRef>
+          <a:fontRef idx="minor">
+            <a:schemeClr val="lt1"/>
+          </a:fontRef>
+        </p:style>
+        <p:txBody>
+          <a:bodyPr rtlCol="0" anchor="ctr"/>
+          <a:lstStyle/>
+          <a:p>
+            <a:pPr algn="ctr"/>
+          </a:p>
+        </p:txBody>
+      </p:sp>
+      <p:sp>
+        <p:nvSpPr>
+          <p:cNvPr id="34" name="TextBox 33"/>
+          <p:cNvSpPr txBox="1"/>
+          <p:nvPr/>
+        </p:nvSpPr>
+        <p:spPr>
+          <a:xfrm>
+            <a:off x="4114800" y="1581912"/>
+            <a:ext cx="594360" cy="178308"/>
+          </a:xfrm>
+          <a:prstGeom prst="rect">
+            <a:avLst/>
+          </a:prstGeom>
+          <a:noFill/>
+        </p:spPr>
+        <p:txBody>
+          <a:bodyPr wrap="none">
+            <a:spAutoFit/>
+          </a:bodyPr>
+          <a:lstStyle/>
+          <a:p>
+            <a:pPr algn="ctr">
+              <a:defRPr sz="800" b="1">
+                <a:solidFill>
+                  <a:srgbClr val="FFFFFF"/>
+                </a:solidFill>
+              </a:defRPr>
+            </a:pPr>
+            <a:r>
+              <a:t>推理</a:t>
+            </a:r>
+          </a:p>
+        </p:txBody>
+      </p:sp>
+      <p:sp>
+        <p:nvSpPr>
+          <p:cNvPr id="35" name="TextBox 34"/>
+          <p:cNvSpPr txBox="1"/>
+          <p:nvPr/>
+        </p:nvSpPr>
+        <p:spPr>
+          <a:xfrm>
+            <a:off x="4736592" y="1581912"/>
+            <a:ext cx="1371600" cy="178308"/>
+          </a:xfrm>
+          <a:prstGeom prst="rect">
+            <a:avLst/>
+          </a:prstGeom>
+          <a:noFill/>
+        </p:spPr>
+        <p:txBody>
+          <a:bodyPr wrap="none">
+            <a:spAutoFit/>
+          </a:bodyPr>
+          <a:lstStyle/>
+          <a:p>
+            <a:pPr>
+              <a:defRPr sz="800" b="1">
+                <a:solidFill>
+                  <a:srgbClr val="1A1A2E"/>
+                </a:solidFill>
+              </a:defRPr>
+            </a:pPr>
+            <a:r>
+              <a:t>思维树模式</a:t>
+            </a:r>
+          </a:p>
+        </p:txBody>
+      </p:sp>
+      <p:sp>
+        <p:nvSpPr>
+          <p:cNvPr id="36" name="TextBox 35"/>
+          <p:cNvSpPr txBox="1"/>
+          <p:nvPr/>
+        </p:nvSpPr>
+        <p:spPr>
+          <a:xfrm>
+            <a:off x="6108192" y="1581912"/>
+            <a:ext cx="1536192" cy="178308"/>
+          </a:xfrm>
+          <a:prstGeom prst="rect">
+            <a:avLst/>
+          </a:prstGeom>
+          <a:noFill/>
+        </p:spPr>
+        <p:txBody>
+          <a:bodyPr wrap="none">
+            <a:spAutoFit/>
+          </a:bodyPr>
+          <a:lstStyle/>
+          <a:p>
+            <a:pPr>
+              <a:defRPr sz="700">
+                <a:solidFill>
+                  <a:srgbClr val="4A5568"/>
+                </a:solidFill>
+              </a:defRPr>
+            </a:pPr>
+            <a:r>
+              <a:t>启发式搜索+剪枝回溯，适合多分支权衡（迷宫探路）</a:t>
+            </a:r>
+          </a:p>
+        </p:txBody>
+      </p:sp>
+      <p:sp>
+        <p:nvSpPr>
+          <p:cNvPr id="37" name="Rounded Rectangle 36"/>
+          <p:cNvSpPr/>
+          <p:nvPr/>
+        </p:nvSpPr>
+        <p:spPr>
+          <a:xfrm>
+            <a:off x="7863840" y="1572768"/>
+            <a:ext cx="594360" cy="196596"/>
+          </a:xfrm>
+          <a:prstGeom prst="roundRect">
+            <a:avLst/>
+          </a:prstGeom>
+          <a:solidFill>
+            <a:srgbClr val="DD6B20"/>
+          </a:solidFill>
+          <a:ln>
+            <a:noFill/>
+          </a:ln>
+        </p:spPr>
+        <p:style>
+          <a:lnRef idx="1">
+            <a:schemeClr val="accent1"/>
+          </a:lnRef>
+          <a:fillRef idx="3">
+            <a:schemeClr val="accent1"/>
+          </a:fillRef>
+          <a:effectRef idx="2">
+            <a:schemeClr val="accent1"/>
+          </a:effectRef>
+          <a:fontRef idx="minor">
+            <a:schemeClr val="lt1"/>
+          </a:fontRef>
+        </p:style>
+        <p:txBody>
+          <a:bodyPr rtlCol="0" anchor="ctr"/>
+          <a:lstStyle/>
+          <a:p>
+            <a:pPr algn="ctr"/>
+          </a:p>
+        </p:txBody>
+      </p:sp>
+      <p:sp>
+        <p:nvSpPr>
+          <p:cNvPr id="38" name="TextBox 37"/>
+          <p:cNvSpPr txBox="1"/>
+          <p:nvPr/>
+        </p:nvSpPr>
+        <p:spPr>
+          <a:xfrm>
+            <a:off x="7863840" y="1581912"/>
+            <a:ext cx="594360" cy="178308"/>
+          </a:xfrm>
+          <a:prstGeom prst="rect">
+            <a:avLst/>
+          </a:prstGeom>
+          <a:noFill/>
+        </p:spPr>
+        <p:txBody>
+          <a:bodyPr wrap="none">
+            <a:spAutoFit/>
+          </a:bodyPr>
+          <a:lstStyle/>
+          <a:p>
+            <a:pPr algn="ctr">
+              <a:defRPr sz="800" b="1">
+                <a:solidFill>
+                  <a:srgbClr val="FFFFFF"/>
+                </a:solidFill>
+              </a:defRPr>
+            </a:pPr>
+            <a:r>
+              <a:t>推理</a:t>
+            </a:r>
+          </a:p>
+        </p:txBody>
+      </p:sp>
+      <p:sp>
+        <p:nvSpPr>
+          <p:cNvPr id="39" name="TextBox 38"/>
+          <p:cNvSpPr txBox="1"/>
+          <p:nvPr/>
+        </p:nvSpPr>
+        <p:spPr>
+          <a:xfrm>
+            <a:off x="8485632" y="1581912"/>
+            <a:ext cx="1371600" cy="178308"/>
+          </a:xfrm>
+          <a:prstGeom prst="rect">
+            <a:avLst/>
+          </a:prstGeom>
+          <a:noFill/>
+        </p:spPr>
+        <p:txBody>
+          <a:bodyPr wrap="none">
+            <a:spAutoFit/>
+          </a:bodyPr>
+          <a:lstStyle/>
+          <a:p>
+            <a:pPr>
+              <a:defRPr sz="800" b="1">
+                <a:solidFill>
+                  <a:srgbClr val="1A1A2E"/>
+                </a:solidFill>
+              </a:defRPr>
+            </a:pPr>
+            <a:r>
+              <a:t>思维图模式</a:t>
+            </a:r>
+          </a:p>
+        </p:txBody>
+      </p:sp>
+      <p:sp>
+        <p:nvSpPr>
+          <p:cNvPr id="40" name="TextBox 39"/>
+          <p:cNvSpPr txBox="1"/>
+          <p:nvPr/>
+        </p:nvSpPr>
+        <p:spPr>
+          <a:xfrm>
+            <a:off x="9857232" y="1581912"/>
+            <a:ext cx="1536192" cy="178308"/>
+          </a:xfrm>
+          <a:prstGeom prst="rect">
+            <a:avLst/>
+          </a:prstGeom>
+          <a:noFill/>
+        </p:spPr>
+        <p:txBody>
+          <a:bodyPr wrap="none">
+            <a:spAutoFit/>
+          </a:bodyPr>
+          <a:lstStyle/>
+          <a:p>
+            <a:pPr>
+              <a:defRPr sz="700">
+                <a:solidFill>
+                  <a:srgbClr val="4A5568"/>
+                </a:solidFill>
+              </a:defRPr>
+            </a:pPr>
+            <a:r>
+              <a:t>图结构编织+多轮迭代，适合复杂依赖整合（织布机）</a:t>
+            </a:r>
+          </a:p>
+        </p:txBody>
+      </p:sp>
+      <p:sp>
+        <p:nvSpPr>
+          <p:cNvPr id="41" name="Rounded Rectangle 40"/>
+          <p:cNvSpPr/>
+          <p:nvPr/>
+        </p:nvSpPr>
+        <p:spPr>
+          <a:xfrm>
+            <a:off x="365760" y="1787652"/>
+            <a:ext cx="594360" cy="196596"/>
+          </a:xfrm>
+          <a:prstGeom prst="roundRect">
+            <a:avLst/>
+          </a:prstGeom>
+          <a:solidFill>
+            <a:srgbClr val="DD6B20"/>
+          </a:solidFill>
+          <a:ln>
+            <a:noFill/>
+          </a:ln>
+        </p:spPr>
+        <p:style>
+          <a:lnRef idx="1">
+            <a:schemeClr val="accent1"/>
+          </a:lnRef>
+          <a:fillRef idx="3">
+            <a:schemeClr val="accent1"/>
+          </a:fillRef>
+          <a:effectRef idx="2">
+            <a:schemeClr val="accent1"/>
+          </a:effectRef>
+          <a:fontRef idx="minor">
+            <a:schemeClr val="lt1"/>
+          </a:fontRef>
+        </p:style>
+        <p:txBody>
+          <a:bodyPr rtlCol="0" anchor="ctr"/>
+          <a:lstStyle/>
+          <a:p>
+            <a:pPr algn="ctr"/>
+          </a:p>
+        </p:txBody>
+      </p:sp>
+      <p:sp>
+        <p:nvSpPr>
+          <p:cNvPr id="42" name="TextBox 41"/>
+          <p:cNvSpPr txBox="1"/>
+          <p:nvPr/>
+        </p:nvSpPr>
+        <p:spPr>
+          <a:xfrm>
+            <a:off x="365760" y="1796796"/>
+            <a:ext cx="594360" cy="178308"/>
+          </a:xfrm>
+          <a:prstGeom prst="rect">
+            <a:avLst/>
+          </a:prstGeom>
+          <a:noFill/>
+        </p:spPr>
+        <p:txBody>
+          <a:bodyPr wrap="none">
+            <a:spAutoFit/>
+          </a:bodyPr>
+          <a:lstStyle/>
+          <a:p>
+            <a:pPr algn="ctr">
+              <a:defRPr sz="800" b="1">
+                <a:solidFill>
+                  <a:srgbClr val="FFFFFF"/>
+                </a:solidFill>
+              </a:defRPr>
+            </a:pPr>
+            <a:r>
+              <a:t>推理</a:t>
+            </a:r>
+          </a:p>
+        </p:txBody>
+      </p:sp>
+      <p:sp>
+        <p:nvSpPr>
+          <p:cNvPr id="43" name="TextBox 42"/>
+          <p:cNvSpPr txBox="1"/>
+          <p:nvPr/>
+        </p:nvSpPr>
+        <p:spPr>
+          <a:xfrm>
+            <a:off x="987552" y="1796796"/>
+            <a:ext cx="1371600" cy="178308"/>
+          </a:xfrm>
+          <a:prstGeom prst="rect">
+            <a:avLst/>
+          </a:prstGeom>
+          <a:noFill/>
+        </p:spPr>
+        <p:txBody>
+          <a:bodyPr wrap="none">
+            <a:spAutoFit/>
+          </a:bodyPr>
+          <a:lstStyle/>
+          <a:p>
+            <a:pPr>
+              <a:defRPr sz="800" b="1">
+                <a:solidFill>
+                  <a:srgbClr val="1A1A2E"/>
+                </a:solidFill>
+              </a:defRPr>
+            </a:pPr>
+            <a:r>
+              <a:t>类比推理模式</a:t>
+            </a:r>
+          </a:p>
+        </p:txBody>
+      </p:sp>
+      <p:sp>
+        <p:nvSpPr>
+          <p:cNvPr id="44" name="TextBox 43"/>
+          <p:cNvSpPr txBox="1"/>
+          <p:nvPr/>
+        </p:nvSpPr>
+        <p:spPr>
+          <a:xfrm>
+            <a:off x="2359152" y="1796796"/>
+            <a:ext cx="1536192" cy="178308"/>
+          </a:xfrm>
+          <a:prstGeom prst="rect">
+            <a:avLst/>
+          </a:prstGeom>
+          <a:noFill/>
+        </p:spPr>
+        <p:txBody>
+          <a:bodyPr wrap="none">
+            <a:spAutoFit/>
+          </a:bodyPr>
+          <a:lstStyle/>
+          <a:p>
+            <a:pPr>
+              <a:defRPr sz="700">
+                <a:solidFill>
+                  <a:srgbClr val="4A5568"/>
+                </a:solidFill>
+              </a:defRPr>
+            </a:pPr>
+            <a:r>
+              <a:t>以已知推未知，适合新颖问题和小样本场景</a:t>
+            </a:r>
+          </a:p>
+        </p:txBody>
+      </p:sp>
+      <p:sp>
+        <p:nvSpPr>
+          <p:cNvPr id="45" name="Rounded Rectangle 44"/>
+          <p:cNvSpPr/>
+          <p:nvPr/>
+        </p:nvSpPr>
+        <p:spPr>
+          <a:xfrm>
+            <a:off x="4114800" y="1787652"/>
+            <a:ext cx="594360" cy="196596"/>
+          </a:xfrm>
+          <a:prstGeom prst="roundRect">
+            <a:avLst/>
+          </a:prstGeom>
+          <a:solidFill>
+            <a:srgbClr val="E94560"/>
+          </a:solidFill>
+          <a:ln>
+            <a:noFill/>
+          </a:ln>
+        </p:spPr>
+        <p:style>
+          <a:lnRef idx="1">
+            <a:schemeClr val="accent1"/>
+          </a:lnRef>
+          <a:fillRef idx="3">
+            <a:schemeClr val="accent1"/>
+          </a:fillRef>
+          <a:effectRef idx="2">
+            <a:schemeClr val="accent1"/>
+          </a:effectRef>
+          <a:fontRef idx="minor">
+            <a:schemeClr val="lt1"/>
+          </a:fontRef>
+        </p:style>
+        <p:txBody>
+          <a:bodyPr rtlCol="0" anchor="ctr"/>
+          <a:lstStyle/>
+          <a:p>
+            <a:pPr algn="ctr"/>
+          </a:p>
+        </p:txBody>
+      </p:sp>
+      <p:sp>
+        <p:nvSpPr>
+          <p:cNvPr id="46" name="TextBox 45"/>
+          <p:cNvSpPr txBox="1"/>
+          <p:nvPr/>
+        </p:nvSpPr>
+        <p:spPr>
+          <a:xfrm>
+            <a:off x="4114800" y="1796796"/>
+            <a:ext cx="594360" cy="178308"/>
+          </a:xfrm>
+          <a:prstGeom prst="rect">
+            <a:avLst/>
+          </a:prstGeom>
+          <a:noFill/>
+        </p:spPr>
+        <p:txBody>
+          <a:bodyPr wrap="none">
+            <a:spAutoFit/>
+          </a:bodyPr>
+          <a:lstStyle/>
+          <a:p>
+            <a:pPr algn="ctr">
+              <a:defRPr sz="800" b="1">
+                <a:solidFill>
+                  <a:srgbClr val="FFFFFF"/>
+                </a:solidFill>
+              </a:defRPr>
+            </a:pPr>
+            <a:r>
+              <a:t>行动</a:t>
+            </a:r>
+          </a:p>
+        </p:txBody>
+      </p:sp>
+      <p:sp>
+        <p:nvSpPr>
+          <p:cNvPr id="47" name="TextBox 46"/>
+          <p:cNvSpPr txBox="1"/>
+          <p:nvPr/>
+        </p:nvSpPr>
+        <p:spPr>
+          <a:xfrm>
+            <a:off x="4736592" y="1796796"/>
+            <a:ext cx="1371600" cy="178308"/>
+          </a:xfrm>
+          <a:prstGeom prst="rect">
+            <a:avLst/>
+          </a:prstGeom>
+          <a:noFill/>
+        </p:spPr>
+        <p:txBody>
+          <a:bodyPr wrap="none">
+            <a:spAutoFit/>
+          </a:bodyPr>
+          <a:lstStyle/>
+          <a:p>
+            <a:pPr>
+              <a:defRPr sz="800" b="1">
+                <a:solidFill>
+                  <a:srgbClr val="1A1A2E"/>
+                </a:solidFill>
+              </a:defRPr>
+            </a:pPr>
+            <a:r>
+              <a:t>ReAct模式</a:t>
+            </a:r>
+          </a:p>
+        </p:txBody>
+      </p:sp>
+      <p:sp>
+        <p:nvSpPr>
+          <p:cNvPr id="48" name="TextBox 47"/>
+          <p:cNvSpPr txBox="1"/>
+          <p:nvPr/>
+        </p:nvSpPr>
+        <p:spPr>
+          <a:xfrm>
+            <a:off x="6108192" y="1796796"/>
+            <a:ext cx="1536192" cy="178308"/>
+          </a:xfrm>
+          <a:prstGeom prst="rect">
+            <a:avLst/>
+          </a:prstGeom>
+          <a:noFill/>
+        </p:spPr>
+        <p:txBody>
+          <a:bodyPr wrap="none">
+            <a:spAutoFit/>
+          </a:bodyPr>
+          <a:lstStyle/>
+          <a:p>
+            <a:pPr>
+              <a:defRPr sz="700">
+                <a:solidFill>
+                  <a:srgbClr val="4A5568"/>
+                </a:solidFill>
+              </a:defRPr>
+            </a:pPr>
+            <a:r>
+              <a:t>Thought Action Observation 循环，实时获取环境反馈</a:t>
+            </a:r>
+          </a:p>
+        </p:txBody>
+      </p:sp>
+      <p:sp>
+        <p:nvSpPr>
+          <p:cNvPr id="49" name="Rounded Rectangle 48"/>
+          <p:cNvSpPr/>
+          <p:nvPr/>
+        </p:nvSpPr>
+        <p:spPr>
+          <a:xfrm>
+            <a:off x="7863840" y="1787652"/>
+            <a:ext cx="594360" cy="196596"/>
+          </a:xfrm>
+          <a:prstGeom prst="roundRect">
+            <a:avLst/>
+          </a:prstGeom>
+          <a:solidFill>
+            <a:srgbClr val="E94560"/>
+          </a:solidFill>
+          <a:ln>
+            <a:noFill/>
+          </a:ln>
+        </p:spPr>
+        <p:style>
+          <a:lnRef idx="1">
+            <a:schemeClr val="accent1"/>
+          </a:lnRef>
+          <a:fillRef idx="3">
+            <a:schemeClr val="accent1"/>
+          </a:fillRef>
+          <a:effectRef idx="2">
+            <a:schemeClr val="accent1"/>
+          </a:effectRef>
+          <a:fontRef idx="minor">
+            <a:schemeClr val="lt1"/>
+          </a:fontRef>
+        </p:style>
+        <p:txBody>
+          <a:bodyPr rtlCol="0" anchor="ctr"/>
+          <a:lstStyle/>
+          <a:p>
+            <a:pPr algn="ctr"/>
+          </a:p>
+        </p:txBody>
+      </p:sp>
+      <p:sp>
+        <p:nvSpPr>
+          <p:cNvPr id="50" name="TextBox 49"/>
+          <p:cNvSpPr txBox="1"/>
+          <p:nvPr/>
+        </p:nvSpPr>
+        <p:spPr>
+          <a:xfrm>
+            <a:off x="7863840" y="1796796"/>
+            <a:ext cx="594360" cy="178308"/>
+          </a:xfrm>
+          <a:prstGeom prst="rect">
+            <a:avLst/>
+          </a:prstGeom>
+          <a:noFill/>
+        </p:spPr>
+        <p:txBody>
+          <a:bodyPr wrap="none">
+            <a:spAutoFit/>
+          </a:bodyPr>
+          <a:lstStyle/>
+          <a:p>
+            <a:pPr algn="ctr">
+              <a:defRPr sz="800" b="1">
+                <a:solidFill>
+                  <a:srgbClr val="FFFFFF"/>
+                </a:solidFill>
+              </a:defRPr>
+            </a:pPr>
+            <a:r>
+              <a:t>行动</a:t>
+            </a:r>
+          </a:p>
+        </p:txBody>
+      </p:sp>
+      <p:sp>
+        <p:nvSpPr>
+          <p:cNvPr id="51" name="TextBox 50"/>
+          <p:cNvSpPr txBox="1"/>
+          <p:nvPr/>
+        </p:nvSpPr>
+        <p:spPr>
+          <a:xfrm>
+            <a:off x="8485632" y="1796796"/>
+            <a:ext cx="1371600" cy="178308"/>
+          </a:xfrm>
+          <a:prstGeom prst="rect">
+            <a:avLst/>
+          </a:prstGeom>
+          <a:noFill/>
+        </p:spPr>
+        <p:txBody>
+          <a:bodyPr wrap="none">
+            <a:spAutoFit/>
+          </a:bodyPr>
+          <a:lstStyle/>
+          <a:p>
+            <a:pPr>
+              <a:defRPr sz="800" b="1">
+                <a:solidFill>
+                  <a:srgbClr val="1A1A2E"/>
+                </a:solidFill>
+              </a:defRPr>
+            </a:pPr>
+            <a:r>
+              <a:t>规划-执行模式</a:t>
+            </a:r>
+          </a:p>
+        </p:txBody>
+      </p:sp>
+      <p:sp>
+        <p:nvSpPr>
+          <p:cNvPr id="52" name="TextBox 51"/>
+          <p:cNvSpPr txBox="1"/>
+          <p:nvPr/>
+        </p:nvSpPr>
+        <p:spPr>
+          <a:xfrm>
+            <a:off x="9857232" y="1796796"/>
+            <a:ext cx="1536192" cy="178308"/>
+          </a:xfrm>
+          <a:prstGeom prst="rect">
+            <a:avLst/>
+          </a:prstGeom>
+          <a:noFill/>
+        </p:spPr>
+        <p:txBody>
+          <a:bodyPr wrap="none">
+            <a:spAutoFit/>
+          </a:bodyPr>
+          <a:lstStyle/>
+          <a:p>
+            <a:pPr>
+              <a:defRPr sz="700">
+                <a:solidFill>
+                  <a:srgbClr val="4A5568"/>
+                </a:solidFill>
+              </a:defRPr>
+            </a:pPr>
+            <a:r>
+              <a:t>先运筹帷幄制订全局战略，再分解为可执行步骤</a:t>
+            </a:r>
+          </a:p>
+        </p:txBody>
+      </p:sp>
+      <p:sp>
+        <p:nvSpPr>
+          <p:cNvPr id="53" name="Rounded Rectangle 52"/>
+          <p:cNvSpPr/>
+          <p:nvPr/>
+        </p:nvSpPr>
+        <p:spPr>
+          <a:xfrm>
+            <a:off x="365760" y="2002536"/>
+            <a:ext cx="594360" cy="196596"/>
+          </a:xfrm>
+          <a:prstGeom prst="roundRect">
+            <a:avLst/>
+          </a:prstGeom>
+          <a:solidFill>
+            <a:srgbClr val="E94560"/>
+          </a:solidFill>
+          <a:ln>
+            <a:noFill/>
+          </a:ln>
+        </p:spPr>
+        <p:style>
+          <a:lnRef idx="1">
+            <a:schemeClr val="accent1"/>
+          </a:lnRef>
+          <a:fillRef idx="3">
+            <a:schemeClr val="accent1"/>
+          </a:fillRef>
+          <a:effectRef idx="2">
+            <a:schemeClr val="accent1"/>
+          </a:effectRef>
+          <a:fontRef idx="minor">
+            <a:schemeClr val="lt1"/>
+          </a:fontRef>
+        </p:style>
+        <p:txBody>
+          <a:bodyPr rtlCol="0" anchor="ctr"/>
+          <a:lstStyle/>
+          <a:p>
+            <a:pPr algn="ctr"/>
+          </a:p>
+        </p:txBody>
+      </p:sp>
+      <p:sp>
+        <p:nvSpPr>
+          <p:cNvPr id="54" name="TextBox 53"/>
+          <p:cNvSpPr txBox="1"/>
+          <p:nvPr/>
+        </p:nvSpPr>
+        <p:spPr>
+          <a:xfrm>
+            <a:off x="365760" y="2011680"/>
+            <a:ext cx="594360" cy="178308"/>
+          </a:xfrm>
+          <a:prstGeom prst="rect">
+            <a:avLst/>
+          </a:prstGeom>
+          <a:noFill/>
+        </p:spPr>
+        <p:txBody>
+          <a:bodyPr wrap="none">
+            <a:spAutoFit/>
+          </a:bodyPr>
+          <a:lstStyle/>
+          <a:p>
+            <a:pPr algn="ctr">
+              <a:defRPr sz="800" b="1">
+                <a:solidFill>
+                  <a:srgbClr val="FFFFFF"/>
+                </a:solidFill>
+              </a:defRPr>
+            </a:pPr>
+            <a:r>
+              <a:t>行动</a:t>
+            </a:r>
+          </a:p>
+        </p:txBody>
+      </p:sp>
+      <p:sp>
+        <p:nvSpPr>
+          <p:cNvPr id="55" name="TextBox 54"/>
+          <p:cNvSpPr txBox="1"/>
+          <p:nvPr/>
+        </p:nvSpPr>
+        <p:spPr>
+          <a:xfrm>
+            <a:off x="987552" y="2011680"/>
+            <a:ext cx="1371600" cy="178308"/>
+          </a:xfrm>
+          <a:prstGeom prst="rect">
+            <a:avLst/>
+          </a:prstGeom>
+          <a:noFill/>
+        </p:spPr>
+        <p:txBody>
+          <a:bodyPr wrap="none">
+            <a:spAutoFit/>
+          </a:bodyPr>
+          <a:lstStyle/>
+          <a:p>
+            <a:pPr>
+              <a:defRPr sz="800" b="1">
+                <a:solidFill>
+                  <a:srgbClr val="1A1A2E"/>
+                </a:solidFill>
+              </a:defRPr>
+            </a:pPr>
+            <a:r>
+              <a:t>工具编排模式</a:t>
+            </a:r>
+          </a:p>
+        </p:txBody>
+      </p:sp>
+      <p:sp>
+        <p:nvSpPr>
+          <p:cNvPr id="56" name="TextBox 55"/>
+          <p:cNvSpPr txBox="1"/>
+          <p:nvPr/>
+        </p:nvSpPr>
+        <p:spPr>
+          <a:xfrm>
+            <a:off x="2359152" y="2011680"/>
+            <a:ext cx="1536192" cy="178308"/>
+          </a:xfrm>
+          <a:prstGeom prst="rect">
+            <a:avLst/>
+          </a:prstGeom>
+          <a:noFill/>
+        </p:spPr>
+        <p:txBody>
+          <a:bodyPr wrap="none">
+            <a:spAutoFit/>
+          </a:bodyPr>
+          <a:lstStyle/>
+          <a:p>
+            <a:pPr>
+              <a:defRPr sz="700">
+                <a:solidFill>
+                  <a:srgbClr val="4A5568"/>
+                </a:solidFill>
+              </a:defRPr>
+            </a:pPr>
+            <a:r>
+              <a:t>精准选择、协同调配海量外部工具（调兵遣将）</a:t>
+            </a:r>
+          </a:p>
+        </p:txBody>
+      </p:sp>
+      <p:sp>
+        <p:nvSpPr>
+          <p:cNvPr id="57" name="Rounded Rectangle 56"/>
+          <p:cNvSpPr/>
+          <p:nvPr/>
+        </p:nvSpPr>
+        <p:spPr>
+          <a:xfrm>
+            <a:off x="4114800" y="2002536"/>
+            <a:ext cx="594360" cy="196596"/>
+          </a:xfrm>
+          <a:prstGeom prst="roundRect">
+            <a:avLst/>
+          </a:prstGeom>
+          <a:solidFill>
+            <a:srgbClr val="E94560"/>
+          </a:solidFill>
+          <a:ln>
+            <a:noFill/>
+          </a:ln>
+        </p:spPr>
+        <p:style>
+          <a:lnRef idx="1">
+            <a:schemeClr val="accent1"/>
+          </a:lnRef>
+          <a:fillRef idx="3">
+            <a:schemeClr val="accent1"/>
+          </a:fillRef>
+          <a:effectRef idx="2">
+            <a:schemeClr val="accent1"/>
+          </a:effectRef>
+          <a:fontRef idx="minor">
+            <a:schemeClr val="lt1"/>
+          </a:fontRef>
+        </p:style>
+        <p:txBody>
+          <a:bodyPr rtlCol="0" anchor="ctr"/>
+          <a:lstStyle/>
+          <a:p>
+            <a:pPr algn="ctr"/>
+          </a:p>
+        </p:txBody>
+      </p:sp>
+      <p:sp>
+        <p:nvSpPr>
+          <p:cNvPr id="58" name="TextBox 57"/>
+          <p:cNvSpPr txBox="1"/>
+          <p:nvPr/>
+        </p:nvSpPr>
+        <p:spPr>
+          <a:xfrm>
+            <a:off x="4114800" y="2011680"/>
+            <a:ext cx="594360" cy="178308"/>
+          </a:xfrm>
+          <a:prstGeom prst="rect">
+            <a:avLst/>
+          </a:prstGeom>
+          <a:noFill/>
+        </p:spPr>
+        <p:txBody>
+          <a:bodyPr wrap="none">
+            <a:spAutoFit/>
+          </a:bodyPr>
+          <a:lstStyle/>
+          <a:p>
+            <a:pPr algn="ctr">
+              <a:defRPr sz="800" b="1">
+                <a:solidFill>
+                  <a:srgbClr val="FFFFFF"/>
+                </a:solidFill>
+              </a:defRPr>
+            </a:pPr>
+            <a:r>
+              <a:t>行动</a:t>
+            </a:r>
+          </a:p>
+        </p:txBody>
+      </p:sp>
+      <p:sp>
+        <p:nvSpPr>
+          <p:cNvPr id="59" name="TextBox 58"/>
+          <p:cNvSpPr txBox="1"/>
+          <p:nvPr/>
+        </p:nvSpPr>
+        <p:spPr>
+          <a:xfrm>
+            <a:off x="4736592" y="2011680"/>
+            <a:ext cx="1371600" cy="178308"/>
+          </a:xfrm>
+          <a:prstGeom prst="rect">
+            <a:avLst/>
+          </a:prstGeom>
+          <a:noFill/>
+        </p:spPr>
+        <p:txBody>
+          <a:bodyPr wrap="none">
+            <a:spAutoFit/>
+          </a:bodyPr>
+          <a:lstStyle/>
+          <a:p>
+            <a:pPr>
+              <a:defRPr sz="800" b="1">
+                <a:solidFill>
+                  <a:srgbClr val="1A1A2E"/>
+                </a:solidFill>
+              </a:defRPr>
+            </a:pPr>
+            <a:r>
+              <a:t>自适应策略模式</a:t>
+            </a:r>
+          </a:p>
+        </p:txBody>
+      </p:sp>
+      <p:sp>
+        <p:nvSpPr>
+          <p:cNvPr id="60" name="TextBox 59"/>
+          <p:cNvSpPr txBox="1"/>
+          <p:nvPr/>
+        </p:nvSpPr>
+        <p:spPr>
+          <a:xfrm>
+            <a:off x="6108192" y="2011680"/>
+            <a:ext cx="1536192" cy="178308"/>
+          </a:xfrm>
+          <a:prstGeom prst="rect">
+            <a:avLst/>
+          </a:prstGeom>
+          <a:noFill/>
+        </p:spPr>
+        <p:txBody>
+          <a:bodyPr wrap="none">
+            <a:spAutoFit/>
+          </a:bodyPr>
+          <a:lstStyle/>
+          <a:p>
+            <a:pPr>
+              <a:defRPr sz="700">
+                <a:solidFill>
+                  <a:srgbClr val="4A5568"/>
+                </a:solidFill>
+              </a:defRPr>
+            </a:pPr>
+            <a:r>
+              <a:t>通过试错+反馈+选择演化出最优决策</a:t>
+            </a:r>
+          </a:p>
+        </p:txBody>
+      </p:sp>
+      <p:sp>
+        <p:nvSpPr>
+          <p:cNvPr id="61" name="Rounded Rectangle 60"/>
+          <p:cNvSpPr/>
+          <p:nvPr/>
+        </p:nvSpPr>
+        <p:spPr>
+          <a:xfrm>
+            <a:off x="7863840" y="2002536"/>
+            <a:ext cx="594360" cy="196596"/>
+          </a:xfrm>
+          <a:prstGeom prst="roundRect">
+            <a:avLst/>
+          </a:prstGeom>
+          <a:solidFill>
+            <a:srgbClr val="9F7AEA"/>
+          </a:solidFill>
+          <a:ln>
+            <a:noFill/>
+          </a:ln>
+        </p:spPr>
+        <p:style>
+          <a:lnRef idx="1">
+            <a:schemeClr val="accent1"/>
+          </a:lnRef>
+          <a:fillRef idx="3">
+            <a:schemeClr val="accent1"/>
+          </a:fillRef>
+          <a:effectRef idx="2">
+            <a:schemeClr val="accent1"/>
+          </a:effectRef>
+          <a:fontRef idx="minor">
+            <a:schemeClr val="lt1"/>
+          </a:fontRef>
+        </p:style>
+        <p:txBody>
+          <a:bodyPr rtlCol="0" anchor="ctr"/>
+          <a:lstStyle/>
+          <a:p>
+            <a:pPr algn="ctr"/>
+          </a:p>
+        </p:txBody>
+      </p:sp>
+      <p:sp>
+        <p:nvSpPr>
+          <p:cNvPr id="62" name="TextBox 61"/>
+          <p:cNvSpPr txBox="1"/>
+          <p:nvPr/>
+        </p:nvSpPr>
+        <p:spPr>
+          <a:xfrm>
+            <a:off x="7863840" y="2011680"/>
+            <a:ext cx="594360" cy="178308"/>
+          </a:xfrm>
+          <a:prstGeom prst="rect">
+            <a:avLst/>
+          </a:prstGeom>
+          <a:noFill/>
+        </p:spPr>
+        <p:txBody>
+          <a:bodyPr wrap="none">
+            <a:spAutoFit/>
+          </a:bodyPr>
+          <a:lstStyle/>
+          <a:p>
+            <a:pPr algn="ctr">
+              <a:defRPr sz="800" b="1">
+                <a:solidFill>
+                  <a:srgbClr val="FFFFFF"/>
+                </a:solidFill>
+              </a:defRPr>
+            </a:pPr>
+            <a:r>
+              <a:t>反思</a:t>
+            </a:r>
+          </a:p>
+        </p:txBody>
+      </p:sp>
+      <p:sp>
+        <p:nvSpPr>
+          <p:cNvPr id="63" name="TextBox 62"/>
+          <p:cNvSpPr txBox="1"/>
+          <p:nvPr/>
+        </p:nvSpPr>
+        <p:spPr>
+          <a:xfrm>
+            <a:off x="8485632" y="2011680"/>
+            <a:ext cx="1371600" cy="178308"/>
+          </a:xfrm>
+          <a:prstGeom prst="rect">
+            <a:avLst/>
+          </a:prstGeom>
+          <a:noFill/>
+        </p:spPr>
+        <p:txBody>
+          <a:bodyPr wrap="none">
+            <a:spAutoFit/>
+          </a:bodyPr>
+          <a:lstStyle/>
+          <a:p>
+            <a:pPr>
+              <a:defRPr sz="800" b="1">
+                <a:solidFill>
+                  <a:srgbClr val="1A1A2E"/>
+                </a:solidFill>
+              </a:defRPr>
+            </a:pPr>
+            <a:r>
+              <a:t>自我修正模式</a:t>
+            </a:r>
+          </a:p>
+        </p:txBody>
+      </p:sp>
+      <p:sp>
+        <p:nvSpPr>
+          <p:cNvPr id="64" name="TextBox 63"/>
+          <p:cNvSpPr txBox="1"/>
+          <p:nvPr/>
+        </p:nvSpPr>
+        <p:spPr>
+          <a:xfrm>
+            <a:off x="9857232" y="2011680"/>
+            <a:ext cx="1536192" cy="178308"/>
+          </a:xfrm>
+          <a:prstGeom prst="rect">
+            <a:avLst/>
+          </a:prstGeom>
+          <a:noFill/>
+        </p:spPr>
+        <p:txBody>
+          <a:bodyPr wrap="none">
+            <a:spAutoFit/>
+          </a:bodyPr>
+          <a:lstStyle/>
+          <a:p>
+            <a:pPr>
+              <a:defRPr sz="700">
+                <a:solidFill>
+                  <a:srgbClr val="4A5568"/>
+                </a:solidFill>
+              </a:defRPr>
+            </a:pPr>
+            <a:r>
+              <a:t>当下毫秒级，像橡皮擦一样擦除错误</a:t>
+            </a:r>
+          </a:p>
+        </p:txBody>
+      </p:sp>
+      <p:sp>
+        <p:nvSpPr>
+          <p:cNvPr id="65" name="Rounded Rectangle 64"/>
+          <p:cNvSpPr/>
+          <p:nvPr/>
+        </p:nvSpPr>
+        <p:spPr>
+          <a:xfrm>
+            <a:off x="365760" y="2217420"/>
+            <a:ext cx="594360" cy="196596"/>
+          </a:xfrm>
+          <a:prstGeom prst="roundRect">
+            <a:avLst/>
+          </a:prstGeom>
+          <a:solidFill>
+            <a:srgbClr val="9F7AEA"/>
+          </a:solidFill>
+          <a:ln>
+            <a:noFill/>
+          </a:ln>
+        </p:spPr>
+        <p:style>
+          <a:lnRef idx="1">
+            <a:schemeClr val="accent1"/>
+          </a:lnRef>
+          <a:fillRef idx="3">
+            <a:schemeClr val="accent1"/>
+          </a:fillRef>
+          <a:effectRef idx="2">
+            <a:schemeClr val="accent1"/>
+          </a:effectRef>
+          <a:fontRef idx="minor">
+            <a:schemeClr val="lt1"/>
+          </a:fontRef>
+        </p:style>
+        <p:txBody>
+          <a:bodyPr rtlCol="0" anchor="ctr"/>
+          <a:lstStyle/>
+          <a:p>
+            <a:pPr algn="ctr"/>
+          </a:p>
+        </p:txBody>
+      </p:sp>
+      <p:sp>
+        <p:nvSpPr>
+          <p:cNvPr id="66" name="TextBox 65"/>
+          <p:cNvSpPr txBox="1"/>
+          <p:nvPr/>
+        </p:nvSpPr>
+        <p:spPr>
+          <a:xfrm>
+            <a:off x="365760" y="2226564"/>
+            <a:ext cx="594360" cy="178308"/>
+          </a:xfrm>
+          <a:prstGeom prst="rect">
+            <a:avLst/>
+          </a:prstGeom>
+          <a:noFill/>
+        </p:spPr>
+        <p:txBody>
+          <a:bodyPr wrap="none">
+            <a:spAutoFit/>
+          </a:bodyPr>
+          <a:lstStyle/>
+          <a:p>
+            <a:pPr algn="ctr">
+              <a:defRPr sz="800" b="1">
+                <a:solidFill>
+                  <a:srgbClr val="FFFFFF"/>
+                </a:solidFill>
+              </a:defRPr>
+            </a:pPr>
+            <a:r>
+              <a:t>反思</a:t>
+            </a:r>
+          </a:p>
+        </p:txBody>
+      </p:sp>
+      <p:sp>
+        <p:nvSpPr>
+          <p:cNvPr id="67" name="TextBox 66"/>
+          <p:cNvSpPr txBox="1"/>
+          <p:nvPr/>
+        </p:nvSpPr>
+        <p:spPr>
+          <a:xfrm>
+            <a:off x="987552" y="2226564"/>
+            <a:ext cx="1371600" cy="178308"/>
+          </a:xfrm>
+          <a:prstGeom prst="rect">
+            <a:avLst/>
+          </a:prstGeom>
+          <a:noFill/>
+        </p:spPr>
+        <p:txBody>
+          <a:bodyPr wrap="none">
+            <a:spAutoFit/>
+          </a:bodyPr>
+          <a:lstStyle/>
+          <a:p>
+            <a:pPr>
+              <a:defRPr sz="800" b="1">
+                <a:solidFill>
+                  <a:srgbClr val="1A1A2E"/>
+                </a:solidFill>
+              </a:defRPr>
+            </a:pPr>
+            <a:r>
+              <a:t>反思记忆模式</a:t>
+            </a:r>
+          </a:p>
+        </p:txBody>
+      </p:sp>
+      <p:sp>
+        <p:nvSpPr>
+          <p:cNvPr id="68" name="TextBox 67"/>
+          <p:cNvSpPr txBox="1"/>
+          <p:nvPr/>
+        </p:nvSpPr>
+        <p:spPr>
+          <a:xfrm>
+            <a:off x="2359152" y="2226564"/>
+            <a:ext cx="1536192" cy="178308"/>
+          </a:xfrm>
+          <a:prstGeom prst="rect">
+            <a:avLst/>
+          </a:prstGeom>
+          <a:noFill/>
+        </p:spPr>
+        <p:txBody>
+          <a:bodyPr wrap="none">
+            <a:spAutoFit/>
+          </a:bodyPr>
+          <a:lstStyle/>
+          <a:p>
+            <a:pPr>
+              <a:defRPr sz="700">
+                <a:solidFill>
+                  <a:srgbClr val="4A5568"/>
+                </a:solidFill>
+              </a:defRPr>
+            </a:pPr>
+            <a:r>
+              <a:t>下次分钟级，像错题本一样将教训存入长期记忆</a:t>
+            </a:r>
+          </a:p>
+        </p:txBody>
+      </p:sp>
+      <p:sp>
+        <p:nvSpPr>
+          <p:cNvPr id="69" name="Rounded Rectangle 68"/>
+          <p:cNvSpPr/>
+          <p:nvPr/>
+        </p:nvSpPr>
+        <p:spPr>
+          <a:xfrm>
+            <a:off x="4114800" y="2217420"/>
+            <a:ext cx="594360" cy="196596"/>
+          </a:xfrm>
+          <a:prstGeom prst="roundRect">
+            <a:avLst/>
+          </a:prstGeom>
+          <a:solidFill>
+            <a:srgbClr val="9F7AEA"/>
+          </a:solidFill>
+          <a:ln>
+            <a:noFill/>
+          </a:ln>
+        </p:spPr>
+        <p:style>
+          <a:lnRef idx="1">
+            <a:schemeClr val="accent1"/>
+          </a:lnRef>
+          <a:fillRef idx="3">
+            <a:schemeClr val="accent1"/>
+          </a:fillRef>
+          <a:effectRef idx="2">
+            <a:schemeClr val="accent1"/>
+          </a:effectRef>
+          <a:fontRef idx="minor">
+            <a:schemeClr val="lt1"/>
+          </a:fontRef>
+        </p:style>
+        <p:txBody>
+          <a:bodyPr rtlCol="0" anchor="ctr"/>
+          <a:lstStyle/>
+          <a:p>
+            <a:pPr algn="ctr"/>
+          </a:p>
+        </p:txBody>
+      </p:sp>
+      <p:sp>
+        <p:nvSpPr>
+          <p:cNvPr id="70" name="TextBox 69"/>
+          <p:cNvSpPr txBox="1"/>
+          <p:nvPr/>
+        </p:nvSpPr>
+        <p:spPr>
+          <a:xfrm>
+            <a:off x="4114800" y="2226564"/>
+            <a:ext cx="594360" cy="178308"/>
+          </a:xfrm>
+          <a:prstGeom prst="rect">
+            <a:avLst/>
+          </a:prstGeom>
+          <a:noFill/>
+        </p:spPr>
+        <p:txBody>
+          <a:bodyPr wrap="none">
+            <a:spAutoFit/>
+          </a:bodyPr>
+          <a:lstStyle/>
+          <a:p>
+            <a:pPr algn="ctr">
+              <a:defRPr sz="800" b="1">
+                <a:solidFill>
+                  <a:srgbClr val="FFFFFF"/>
+                </a:solidFill>
+              </a:defRPr>
+            </a:pPr>
+            <a:r>
+              <a:t>反思</a:t>
+            </a:r>
+          </a:p>
+        </p:txBody>
+      </p:sp>
+      <p:sp>
+        <p:nvSpPr>
+          <p:cNvPr id="71" name="TextBox 70"/>
+          <p:cNvSpPr txBox="1"/>
+          <p:nvPr/>
+        </p:nvSpPr>
+        <p:spPr>
+          <a:xfrm>
+            <a:off x="4736592" y="2226564"/>
+            <a:ext cx="1371600" cy="178308"/>
+          </a:xfrm>
+          <a:prstGeom prst="rect">
+            <a:avLst/>
+          </a:prstGeom>
+          <a:noFill/>
+        </p:spPr>
+        <p:txBody>
+          <a:bodyPr wrap="none">
+            <a:spAutoFit/>
+          </a:bodyPr>
+          <a:lstStyle/>
+          <a:p>
+            <a:pPr>
+              <a:defRPr sz="800" b="1">
+                <a:solidFill>
+                  <a:srgbClr val="1A1A2E"/>
+                </a:solidFill>
+              </a:defRPr>
+            </a:pPr>
+            <a:r>
+              <a:t>元学习模式</a:t>
+            </a:r>
+          </a:p>
+        </p:txBody>
+      </p:sp>
+      <p:sp>
+        <p:nvSpPr>
+          <p:cNvPr id="72" name="TextBox 71"/>
+          <p:cNvSpPr txBox="1"/>
+          <p:nvPr/>
+        </p:nvSpPr>
+        <p:spPr>
+          <a:xfrm>
+            <a:off x="6108192" y="2226564"/>
+            <a:ext cx="1536192" cy="178308"/>
+          </a:xfrm>
+          <a:prstGeom prst="rect">
+            <a:avLst/>
+          </a:prstGeom>
+          <a:noFill/>
+        </p:spPr>
+        <p:txBody>
+          <a:bodyPr wrap="none">
+            <a:spAutoFit/>
+          </a:bodyPr>
+          <a:lstStyle/>
+          <a:p>
+            <a:pPr>
+              <a:defRPr sz="700">
+                <a:solidFill>
+                  <a:srgbClr val="4A5568"/>
+                </a:solidFill>
+              </a:defRPr>
+            </a:pPr>
+            <a:r>
+              <a:t>长远日/周级，像修订教科书一样迭代 Prompt</a:t>
+            </a:r>
+          </a:p>
+        </p:txBody>
+      </p:sp>
+      <p:sp>
+        <p:nvSpPr>
+          <p:cNvPr id="73" name="Rounded Rectangle 72"/>
+          <p:cNvSpPr/>
+          <p:nvPr/>
+        </p:nvSpPr>
+        <p:spPr>
+          <a:xfrm>
+            <a:off x="7863840" y="2217420"/>
+            <a:ext cx="594360" cy="196596"/>
+          </a:xfrm>
+          <a:prstGeom prst="roundRect">
+            <a:avLst/>
+          </a:prstGeom>
+          <a:solidFill>
+            <a:srgbClr val="48BB78"/>
+          </a:solidFill>
+          <a:ln>
+            <a:noFill/>
+          </a:ln>
+        </p:spPr>
+        <p:style>
+          <a:lnRef idx="1">
+            <a:schemeClr val="accent1"/>
+          </a:lnRef>
+          <a:fillRef idx="3">
+            <a:schemeClr val="accent1"/>
+          </a:fillRef>
+          <a:effectRef idx="2">
+            <a:schemeClr val="accent1"/>
+          </a:effectRef>
+          <a:fontRef idx="minor">
+            <a:schemeClr val="lt1"/>
+          </a:fontRef>
+        </p:style>
+        <p:txBody>
+          <a:bodyPr rtlCol="0" anchor="ctr"/>
+          <a:lstStyle/>
+          <a:p>
+            <a:pPr algn="ctr"/>
+          </a:p>
+        </p:txBody>
+      </p:sp>
+      <p:sp>
+        <p:nvSpPr>
+          <p:cNvPr id="74" name="TextBox 73"/>
+          <p:cNvSpPr txBox="1"/>
+          <p:nvPr/>
+        </p:nvSpPr>
+        <p:spPr>
+          <a:xfrm>
+            <a:off x="7863840" y="2226564"/>
+            <a:ext cx="594360" cy="178308"/>
+          </a:xfrm>
+          <a:prstGeom prst="rect">
+            <a:avLst/>
+          </a:prstGeom>
+          <a:noFill/>
+        </p:spPr>
+        <p:txBody>
+          <a:bodyPr wrap="none">
+            <a:spAutoFit/>
+          </a:bodyPr>
+          <a:lstStyle/>
+          <a:p>
+            <a:pPr algn="ctr">
+              <a:defRPr sz="800" b="1">
+                <a:solidFill>
+                  <a:srgbClr val="FFFFFF"/>
+                </a:solidFill>
+              </a:defRPr>
+            </a:pPr>
+            <a:r>
+              <a:t>协作</a:t>
+            </a:r>
+          </a:p>
+        </p:txBody>
+      </p:sp>
+      <p:sp>
+        <p:nvSpPr>
+          <p:cNvPr id="75" name="TextBox 74"/>
+          <p:cNvSpPr txBox="1"/>
+          <p:nvPr/>
+        </p:nvSpPr>
+        <p:spPr>
+          <a:xfrm>
+            <a:off x="8485632" y="2226564"/>
+            <a:ext cx="1371600" cy="178308"/>
+          </a:xfrm>
+          <a:prstGeom prst="rect">
+            <a:avLst/>
+          </a:prstGeom>
+          <a:noFill/>
+        </p:spPr>
+        <p:txBody>
+          <a:bodyPr wrap="none">
+            <a:spAutoFit/>
+          </a:bodyPr>
+          <a:lstStyle/>
+          <a:p>
+            <a:pPr>
+              <a:defRPr sz="800" b="1">
+                <a:solidFill>
+                  <a:srgbClr val="1A1A2E"/>
+                </a:solidFill>
+              </a:defRPr>
+            </a:pPr>
+            <a:r>
+              <a:t>辩论模式</a:t>
+            </a:r>
+          </a:p>
+        </p:txBody>
+      </p:sp>
+      <p:sp>
+        <p:nvSpPr>
+          <p:cNvPr id="76" name="TextBox 75"/>
+          <p:cNvSpPr txBox="1"/>
+          <p:nvPr/>
+        </p:nvSpPr>
+        <p:spPr>
+          <a:xfrm>
+            <a:off x="9857232" y="2226564"/>
+            <a:ext cx="1536192" cy="178308"/>
+          </a:xfrm>
+          <a:prstGeom prst="rect">
+            <a:avLst/>
+          </a:prstGeom>
+          <a:noFill/>
+        </p:spPr>
+        <p:txBody>
+          <a:bodyPr wrap="none">
+            <a:spAutoFit/>
+          </a:bodyPr>
+          <a:lstStyle/>
+          <a:p>
+            <a:pPr>
+              <a:defRPr sz="700">
+                <a:solidFill>
+                  <a:srgbClr val="4A5568"/>
+                </a:solidFill>
+              </a:defRPr>
+            </a:pPr>
+            <a:r>
+              <a:t>对抗性推演，真理在多角度交锋中清晰</a:t>
+            </a:r>
+          </a:p>
+        </p:txBody>
+      </p:sp>
+      <p:sp>
+        <p:nvSpPr>
+          <p:cNvPr id="77" name="Rounded Rectangle 76"/>
+          <p:cNvSpPr/>
+          <p:nvPr/>
+        </p:nvSpPr>
+        <p:spPr>
+          <a:xfrm>
+            <a:off x="365760" y="2432304"/>
+            <a:ext cx="594360" cy="196596"/>
+          </a:xfrm>
+          <a:prstGeom prst="roundRect">
+            <a:avLst/>
+          </a:prstGeom>
+          <a:solidFill>
+            <a:srgbClr val="48BB78"/>
+          </a:solidFill>
+          <a:ln>
+            <a:noFill/>
+          </a:ln>
+        </p:spPr>
+        <p:style>
+          <a:lnRef idx="1">
+            <a:schemeClr val="accent1"/>
+          </a:lnRef>
+          <a:fillRef idx="3">
+            <a:schemeClr val="accent1"/>
+          </a:fillRef>
+          <a:effectRef idx="2">
+            <a:schemeClr val="accent1"/>
+          </a:effectRef>
+          <a:fontRef idx="minor">
+            <a:schemeClr val="lt1"/>
+          </a:fontRef>
+        </p:style>
+        <p:txBody>
+          <a:bodyPr rtlCol="0" anchor="ctr"/>
+          <a:lstStyle/>
+          <a:p>
+            <a:pPr algn="ctr"/>
+          </a:p>
+        </p:txBody>
+      </p:sp>
+      <p:sp>
+        <p:nvSpPr>
+          <p:cNvPr id="78" name="TextBox 77"/>
+          <p:cNvSpPr txBox="1"/>
+          <p:nvPr/>
+        </p:nvSpPr>
+        <p:spPr>
+          <a:xfrm>
+            <a:off x="365760" y="2441448"/>
+            <a:ext cx="594360" cy="178308"/>
+          </a:xfrm>
+          <a:prstGeom prst="rect">
+            <a:avLst/>
+          </a:prstGeom>
+          <a:noFill/>
+        </p:spPr>
+        <p:txBody>
+          <a:bodyPr wrap="none">
+            <a:spAutoFit/>
+          </a:bodyPr>
+          <a:lstStyle/>
+          <a:p>
+            <a:pPr algn="ctr">
+              <a:defRPr sz="800" b="1">
+                <a:solidFill>
+                  <a:srgbClr val="FFFFFF"/>
+                </a:solidFill>
+              </a:defRPr>
+            </a:pPr>
+            <a:r>
+              <a:t>协作</a:t>
+            </a:r>
+          </a:p>
+        </p:txBody>
+      </p:sp>
+      <p:sp>
+        <p:nvSpPr>
+          <p:cNvPr id="79" name="TextBox 78"/>
+          <p:cNvSpPr txBox="1"/>
+          <p:nvPr/>
+        </p:nvSpPr>
+        <p:spPr>
+          <a:xfrm>
+            <a:off x="987552" y="2441448"/>
+            <a:ext cx="1371600" cy="178308"/>
+          </a:xfrm>
+          <a:prstGeom prst="rect">
+            <a:avLst/>
+          </a:prstGeom>
+          <a:noFill/>
+        </p:spPr>
+        <p:txBody>
+          <a:bodyPr wrap="none">
+            <a:spAutoFit/>
+          </a:bodyPr>
+          <a:lstStyle/>
+          <a:p>
+            <a:pPr>
+              <a:defRPr sz="800" b="1">
+                <a:solidFill>
+                  <a:srgbClr val="1A1A2E"/>
+                </a:solidFill>
+              </a:defRPr>
+            </a:pPr>
+            <a:r>
+              <a:t>委托模式</a:t>
+            </a:r>
+          </a:p>
+        </p:txBody>
+      </p:sp>
+      <p:sp>
+        <p:nvSpPr>
+          <p:cNvPr id="80" name="TextBox 79"/>
+          <p:cNvSpPr txBox="1"/>
+          <p:nvPr/>
+        </p:nvSpPr>
+        <p:spPr>
+          <a:xfrm>
+            <a:off x="2359152" y="2441448"/>
+            <a:ext cx="1536192" cy="178308"/>
+          </a:xfrm>
+          <a:prstGeom prst="rect">
+            <a:avLst/>
+          </a:prstGeom>
+          <a:noFill/>
+        </p:spPr>
+        <p:txBody>
+          <a:bodyPr wrap="none">
+            <a:spAutoFit/>
+          </a:bodyPr>
+          <a:lstStyle/>
+          <a:p>
+            <a:pPr>
+              <a:defRPr sz="700">
+                <a:solidFill>
+                  <a:srgbClr val="4A5568"/>
+                </a:solidFill>
+              </a:defRPr>
+            </a:pPr>
+            <a:r>
+              <a:t>层级目标分解，经理指挥工人的高效执行</a:t>
+            </a:r>
+          </a:p>
+        </p:txBody>
+      </p:sp>
+      <p:sp>
+        <p:nvSpPr>
+          <p:cNvPr id="81" name="Rounded Rectangle 80"/>
+          <p:cNvSpPr/>
+          <p:nvPr/>
+        </p:nvSpPr>
+        <p:spPr>
+          <a:xfrm>
+            <a:off x="4114800" y="2432304"/>
+            <a:ext cx="594360" cy="196596"/>
+          </a:xfrm>
+          <a:prstGeom prst="roundRect">
+            <a:avLst/>
+          </a:prstGeom>
+          <a:solidFill>
+            <a:srgbClr val="48BB78"/>
+          </a:solidFill>
+          <a:ln>
+            <a:noFill/>
+          </a:ln>
+        </p:spPr>
+        <p:style>
+          <a:lnRef idx="1">
+            <a:schemeClr val="accent1"/>
+          </a:lnRef>
+          <a:fillRef idx="3">
+            <a:schemeClr val="accent1"/>
+          </a:fillRef>
+          <a:effectRef idx="2">
+            <a:schemeClr val="accent1"/>
+          </a:effectRef>
+          <a:fontRef idx="minor">
+            <a:schemeClr val="lt1"/>
+          </a:fontRef>
+        </p:style>
+        <p:txBody>
+          <a:bodyPr rtlCol="0" anchor="ctr"/>
+          <a:lstStyle/>
+          <a:p>
+            <a:pPr algn="ctr"/>
+          </a:p>
+        </p:txBody>
+      </p:sp>
+      <p:sp>
+        <p:nvSpPr>
+          <p:cNvPr id="82" name="TextBox 81"/>
+          <p:cNvSpPr txBox="1"/>
+          <p:nvPr/>
+        </p:nvSpPr>
+        <p:spPr>
+          <a:xfrm>
+            <a:off x="4114800" y="2441448"/>
+            <a:ext cx="594360" cy="178308"/>
+          </a:xfrm>
+          <a:prstGeom prst="rect">
+            <a:avLst/>
+          </a:prstGeom>
+          <a:noFill/>
+        </p:spPr>
+        <p:txBody>
+          <a:bodyPr wrap="none">
+            <a:spAutoFit/>
+          </a:bodyPr>
+          <a:lstStyle/>
+          <a:p>
+            <a:pPr algn="ctr">
+              <a:defRPr sz="800" b="1">
+                <a:solidFill>
+                  <a:srgbClr val="FFFFFF"/>
+                </a:solidFill>
+              </a:defRPr>
+            </a:pPr>
+            <a:r>
+              <a:t>协作</a:t>
+            </a:r>
+          </a:p>
+        </p:txBody>
+      </p:sp>
+      <p:sp>
+        <p:nvSpPr>
+          <p:cNvPr id="83" name="TextBox 82"/>
+          <p:cNvSpPr txBox="1"/>
+          <p:nvPr/>
+        </p:nvSpPr>
+        <p:spPr>
+          <a:xfrm>
+            <a:off x="4736592" y="2441448"/>
+            <a:ext cx="1371600" cy="178308"/>
+          </a:xfrm>
+          <a:prstGeom prst="rect">
+            <a:avLst/>
+          </a:prstGeom>
+          <a:noFill/>
+        </p:spPr>
+        <p:txBody>
+          <a:bodyPr wrap="none">
+            <a:spAutoFit/>
+          </a:bodyPr>
+          <a:lstStyle/>
+          <a:p>
+            <a:pPr>
+              <a:defRPr sz="800" b="1">
+                <a:solidFill>
+                  <a:srgbClr val="1A1A2E"/>
+                </a:solidFill>
+              </a:defRPr>
+            </a:pPr>
+            <a:r>
+              <a:t>路由模式</a:t>
+            </a:r>
+          </a:p>
+        </p:txBody>
+      </p:sp>
+      <p:sp>
+        <p:nvSpPr>
+          <p:cNvPr id="84" name="TextBox 83"/>
+          <p:cNvSpPr txBox="1"/>
+          <p:nvPr/>
+        </p:nvSpPr>
+        <p:spPr>
+          <a:xfrm>
+            <a:off x="6108192" y="2441448"/>
+            <a:ext cx="1536192" cy="178308"/>
+          </a:xfrm>
+          <a:prstGeom prst="rect">
+            <a:avLst/>
+          </a:prstGeom>
+          <a:noFill/>
+        </p:spPr>
+        <p:txBody>
+          <a:bodyPr wrap="none">
+            <a:spAutoFit/>
+          </a:bodyPr>
+          <a:lstStyle/>
+          <a:p>
+            <a:pPr>
+              <a:defRPr sz="700">
+                <a:solidFill>
+                  <a:srgbClr val="4A5568"/>
+                </a:solidFill>
+              </a:defRPr>
+            </a:pPr>
+            <a:r>
+              <a:t>精准分发，像医院分诊台分配任务</a:t>
+            </a:r>
+          </a:p>
+        </p:txBody>
+      </p:sp>
+      <p:sp>
+        <p:nvSpPr>
+          <p:cNvPr id="85" name="Rounded Rectangle 84"/>
+          <p:cNvSpPr/>
+          <p:nvPr/>
+        </p:nvSpPr>
+        <p:spPr>
+          <a:xfrm>
+            <a:off x="7863840" y="2432304"/>
+            <a:ext cx="594360" cy="196596"/>
+          </a:xfrm>
+          <a:prstGeom prst="roundRect">
+            <a:avLst/>
+          </a:prstGeom>
+          <a:solidFill>
+            <a:srgbClr val="48BB78"/>
+          </a:solidFill>
+          <a:ln>
+            <a:noFill/>
+          </a:ln>
+        </p:spPr>
+        <p:style>
+          <a:lnRef idx="1">
+            <a:schemeClr val="accent1"/>
+          </a:lnRef>
+          <a:fillRef idx="3">
+            <a:schemeClr val="accent1"/>
+          </a:fillRef>
+          <a:effectRef idx="2">
+            <a:schemeClr val="accent1"/>
+          </a:effectRef>
+          <a:fontRef idx="minor">
+            <a:schemeClr val="lt1"/>
+          </a:fontRef>
+        </p:style>
+        <p:txBody>
+          <a:bodyPr rtlCol="0" anchor="ctr"/>
+          <a:lstStyle/>
+          <a:p>
+            <a:pPr algn="ctr"/>
+          </a:p>
+        </p:txBody>
+      </p:sp>
+      <p:sp>
+        <p:nvSpPr>
+          <p:cNvPr id="86" name="TextBox 85"/>
+          <p:cNvSpPr txBox="1"/>
+          <p:nvPr/>
+        </p:nvSpPr>
+        <p:spPr>
+          <a:xfrm>
+            <a:off x="7863840" y="2441448"/>
+            <a:ext cx="594360" cy="178308"/>
+          </a:xfrm>
+          <a:prstGeom prst="rect">
+            <a:avLst/>
+          </a:prstGeom>
+          <a:noFill/>
+        </p:spPr>
+        <p:txBody>
+          <a:bodyPr wrap="none">
+            <a:spAutoFit/>
+          </a:bodyPr>
+          <a:lstStyle/>
+          <a:p>
+            <a:pPr algn="ctr">
+              <a:defRPr sz="800" b="1">
+                <a:solidFill>
+                  <a:srgbClr val="FFFFFF"/>
+                </a:solidFill>
+              </a:defRPr>
+            </a:pPr>
+            <a:r>
+              <a:t>协作</a:t>
+            </a:r>
+          </a:p>
+        </p:txBody>
+      </p:sp>
+      <p:sp>
+        <p:nvSpPr>
+          <p:cNvPr id="87" name="TextBox 86"/>
+          <p:cNvSpPr txBox="1"/>
+          <p:nvPr/>
+        </p:nvSpPr>
+        <p:spPr>
+          <a:xfrm>
+            <a:off x="8485632" y="2441448"/>
+            <a:ext cx="1371600" cy="178308"/>
+          </a:xfrm>
+          <a:prstGeom prst="rect">
+            <a:avLst/>
+          </a:prstGeom>
+          <a:noFill/>
+        </p:spPr>
+        <p:txBody>
+          <a:bodyPr wrap="none">
+            <a:spAutoFit/>
+          </a:bodyPr>
+          <a:lstStyle/>
+          <a:p>
+            <a:pPr>
+              <a:defRPr sz="800" b="1">
+                <a:solidFill>
+                  <a:srgbClr val="1A1A2E"/>
+                </a:solidFill>
+              </a:defRPr>
+            </a:pPr>
+            <a:r>
+              <a:t>群体模式</a:t>
+            </a:r>
+          </a:p>
+        </p:txBody>
+      </p:sp>
+      <p:sp>
+        <p:nvSpPr>
+          <p:cNvPr id="88" name="TextBox 87"/>
+          <p:cNvSpPr txBox="1"/>
+          <p:nvPr/>
+        </p:nvSpPr>
+        <p:spPr>
+          <a:xfrm>
+            <a:off x="9857232" y="2441448"/>
+            <a:ext cx="1536192" cy="178308"/>
+          </a:xfrm>
+          <a:prstGeom prst="rect">
+            <a:avLst/>
+          </a:prstGeom>
+          <a:noFill/>
+        </p:spPr>
+        <p:txBody>
+          <a:bodyPr wrap="none">
+            <a:spAutoFit/>
+          </a:bodyPr>
+          <a:lstStyle/>
+          <a:p>
+            <a:pPr>
+              <a:defRPr sz="700">
+                <a:solidFill>
+                  <a:srgbClr val="4A5568"/>
+                </a:solidFill>
+              </a:defRPr>
+            </a:pPr>
+            <a:r>
+              <a:t>自组织涌现，像蚁群迁徙展现集体智慧</a:t>
             </a:r>
           </a:p>
         </p:txBody>
@@ -9441,7 +12467,7 @@
               </a:defRPr>
             </a:pPr>
             <a:r>
-              <a:t>🧠 记忆模式：连接时间</a:t>
+              <a:t>👁️ 感知模式：看世界</a:t>
             </a:r>
           </a:p>
         </p:txBody>
@@ -9467,6 +12493,21 @@
             <a:spAutoFit/>
           </a:bodyPr>
           <a:lstStyle/>
+          <a:p>
+            <a:pPr>
+              <a:spcAft>
+                <a:spcPts val="1400"/>
+              </a:spcAft>
+              <a:defRPr sz="2000" b="1">
+                <a:solidFill>
+                  <a:srgbClr val="553C9A"/>
+                </a:solidFill>
+              </a:defRPr>
+            </a:pPr>
+            <a:r>
+              <a:t>• 注意力聚焦 — 构建认知漏斗，用最低 Token 成本换取最高上下文质量</a:t>
+            </a:r>
+          </a:p>
           <a:p>
             <a:pPr>
               <a:spcAft>
@@ -9479,7 +12520,7 @@
               </a:defRPr>
             </a:pPr>
             <a:r>
-              <a:t>• 分层记忆 — L1工作记忆 / L2短期缓存 / L3长期存储(Vector DB+知识图谱)</a:t>
+              <a:t>• 多模态融合 — 建立统一语义场，从拼接式向原生式演进</a:t>
             </a:r>
           </a:p>
           <a:p>
@@ -9494,7 +12535,7 @@
               </a:defRPr>
             </a:pPr>
             <a:r>
-              <a:t>• RAG — 将推理能力(CPU)与知识存储(磁盘)解耦，极低成本保持时效性</a:t>
+              <a:t>• 主动感知 — Agent 从被动的答题者转变为主动的调查员</a:t>
             </a:r>
           </a:p>
           <a:p>
@@ -9502,14 +12543,14 @@
               <a:spcAft>
                 <a:spcPts val="1400"/>
               </a:spcAft>
-              <a:defRPr sz="2000" b="1">
-                <a:solidFill>
-                  <a:srgbClr val="553C9A"/>
-                </a:solidFill>
-              </a:defRPr>
-            </a:pPr>
-            <a:r>
-              <a:t>• 情节记忆 — 沉淀 Agent 自身交互产生的动态经验，无需微调即可进化</a:t>
+              <a:defRPr sz="2000" b="0">
+                <a:solidFill>
+                  <a:srgbClr val="1A1A2E"/>
+                </a:solidFill>
+              </a:defRPr>
+            </a:pPr>
+            <a:r>
+              <a:t>• 本质：不是看到所有，而是看到关键并主动寻找未知</a:t>
             </a:r>
           </a:p>
         </p:txBody>
@@ -9648,7 +12689,7 @@
               </a:defRPr>
             </a:pPr>
             <a:r>
-              <a:t>⚙️ 推理模式：编织逻辑</a:t>
+              <a:t>🧠 记忆模式：连接时间</a:t>
             </a:r>
           </a:p>
         </p:txBody>
@@ -9686,7 +12727,7 @@
               </a:defRPr>
             </a:pPr>
             <a:r>
-              <a:t>• System 1 / System 2：快直觉 vs 慢刻意，Agent 需要两者兼顾</a:t>
+              <a:t>• 分层记忆 — L1工作记忆 / L2短期缓存 / L3长期存储(Vector DB+知识图谱)</a:t>
             </a:r>
           </a:p>
           <a:p>
@@ -9701,7 +12742,7 @@
               </a:defRPr>
             </a:pPr>
             <a:r>
-              <a:t>• 思维链(CoT) — 线性逐步推进，适合数学与逻辑推导（走钢丝）</a:t>
+              <a:t>• RAG — 将推理能力(CPU)与知识存储(磁盘)解耦，极低成本保持时效性</a:t>
             </a:r>
           </a:p>
           <a:p>
@@ -9716,22 +12757,7 @@
               </a:defRPr>
             </a:pPr>
             <a:r>
-              <a:t>• 思维树(ToT) — 启发式搜索+剪枝回溯，适合多分支权衡（迷宫探路）</a:t>
-            </a:r>
-          </a:p>
-          <a:p>
-            <a:pPr>
-              <a:spcAft>
-                <a:spcPts val="1400"/>
-              </a:spcAft>
-              <a:defRPr sz="2000" b="0">
-                <a:solidFill>
-                  <a:srgbClr val="1A1A2E"/>
-                </a:solidFill>
-              </a:defRPr>
-            </a:pPr>
-            <a:r>
-              <a:t>• 思维图(GoT) — 图结构编织+多轮迭代，适合复杂依赖整合（织布机）</a:t>
+              <a:t>• 情节记忆 — 沉淀 Agent 自身交互产生的动态经验，无需微调即可进化</a:t>
             </a:r>
           </a:p>
         </p:txBody>
@@ -9870,7 +12896,7 @@
               </a:defRPr>
             </a:pPr>
             <a:r>
-              <a:t>💪 行动模式：付诸实施</a:t>
+              <a:t>⚙️ 推理模式：编织逻辑</a:t>
             </a:r>
           </a:p>
         </p:txBody>
@@ -9896,6 +12922,21 @@
             <a:spAutoFit/>
           </a:bodyPr>
           <a:lstStyle/>
+          <a:p>
+            <a:pPr>
+              <a:spcAft>
+                <a:spcPts val="1400"/>
+              </a:spcAft>
+              <a:defRPr sz="2000" b="0">
+                <a:solidFill>
+                  <a:srgbClr val="1A1A2E"/>
+                </a:solidFill>
+              </a:defRPr>
+            </a:pPr>
+            <a:r>
+              <a:t>• System 1 / System 2：快直觉 vs 慢刻意，Agent 需要两者兼顾</a:t>
+            </a:r>
+          </a:p>
           <a:p>
             <a:pPr>
               <a:spcAft>
@@ -9908,7 +12949,22 @@
               </a:defRPr>
             </a:pPr>
             <a:r>
-              <a:t>• ReAct — 边想边做：Thought Action Observation 循环，实时获取环境反馈</a:t>
+              <a:t>• 思维链(CoT) — 线性逐步推进，适合数学与逻辑推导（走钢丝）</a:t>
+            </a:r>
+          </a:p>
+          <a:p>
+            <a:pPr>
+              <a:spcAft>
+                <a:spcPts val="1400"/>
+              </a:spcAft>
+              <a:defRPr sz="2000" b="1">
+                <a:solidFill>
+                  <a:srgbClr val="553C9A"/>
+                </a:solidFill>
+              </a:defRPr>
+            </a:pPr>
+            <a:r>
+              <a:t>• 思维树(ToT) — 启发式搜索+剪枝回溯，适合多分支权衡（迷宫探路）</a:t>
             </a:r>
           </a:p>
           <a:p>
@@ -9923,37 +12979,7 @@
               </a:defRPr>
             </a:pPr>
             <a:r>
-              <a:t>• 规划-执行 — 先制订全局战略，再分解为可执行步骤（运筹帷幄）</a:t>
-            </a:r>
-          </a:p>
-          <a:p>
-            <a:pPr>
-              <a:spcAft>
-                <a:spcPts val="1400"/>
-              </a:spcAft>
-              <a:defRPr sz="2000" b="0">
-                <a:solidFill>
-                  <a:srgbClr val="1A1A2E"/>
-                </a:solidFill>
-              </a:defRPr>
-            </a:pPr>
-            <a:r>
-              <a:t>• 工具编排 — 精准选择、协同调配海量外部工具（调兵遣将）</a:t>
-            </a:r>
-          </a:p>
-          <a:p>
-            <a:pPr>
-              <a:spcAft>
-                <a:spcPts val="1400"/>
-              </a:spcAft>
-              <a:defRPr sz="2000" b="0">
-                <a:solidFill>
-                  <a:srgbClr val="1A1A2E"/>
-                </a:solidFill>
-              </a:defRPr>
-            </a:pPr>
-            <a:r>
-              <a:t>• 自适应策略 — 从进化论角度，通过试错+反馈+选择演化出最优决策</a:t>
+              <a:t>• 思维图(GoT) — 图结构编织+多轮迭代，适合复杂依赖整合（织布机）</a:t>
             </a:r>
           </a:p>
         </p:txBody>
@@ -10092,7 +13118,7 @@
               </a:defRPr>
             </a:pPr>
             <a:r>
-              <a:t>🔮 反思模式：AI 的灵魂工程学</a:t>
+              <a:t>💪 行动模式：付诸实施</a:t>
             </a:r>
           </a:p>
         </p:txBody>
@@ -10118,6 +13144,21 @@
             <a:spAutoFit/>
           </a:bodyPr>
           <a:lstStyle/>
+          <a:p>
+            <a:pPr>
+              <a:spcAft>
+                <a:spcPts val="1400"/>
+              </a:spcAft>
+              <a:defRPr sz="2000" b="1">
+                <a:solidFill>
+                  <a:srgbClr val="553C9A"/>
+                </a:solidFill>
+              </a:defRPr>
+            </a:pPr>
+            <a:r>
+              <a:t>• ReAct — 边想边做：Thought Action Observation 循环，实时获取环境反馈</a:t>
+            </a:r>
+          </a:p>
           <a:p>
             <a:pPr>
               <a:spcAft>
@@ -10130,7 +13171,7 @@
               </a:defRPr>
             </a:pPr>
             <a:r>
-              <a:t>• 自我修正 — 当下毫秒级，像橡皮擦一样擦除错误（仅限当前任务）</a:t>
+              <a:t>• 规划-执行 — 先制订全局战略，再分解为可执行步骤（运筹帷幄）</a:t>
             </a:r>
           </a:p>
           <a:p>
@@ -10145,7 +13186,7 @@
               </a:defRPr>
             </a:pPr>
             <a:r>
-              <a:t>• 反思记忆 — 下次分钟级，像错题本一样生成语言形式的教训存入长期记忆</a:t>
+              <a:t>• 工具编排 — 精准选择、协同调配海量外部工具（调兵遣将）</a:t>
             </a:r>
           </a:p>
           <a:p>
@@ -10153,29 +13194,14 @@
               <a:spcAft>
                 <a:spcPts val="1400"/>
               </a:spcAft>
-              <a:defRPr sz="2000" b="1">
-                <a:solidFill>
-                  <a:srgbClr val="553C9A"/>
-                </a:solidFill>
-              </a:defRPr>
-            </a:pPr>
-            <a:r>
-              <a:t>• 元学习 — 长远日/周级，像修订教科书一样借助优化器自动迭代 Prompt</a:t>
-            </a:r>
-          </a:p>
-          <a:p>
-            <a:pPr>
-              <a:spcAft>
-                <a:spcPts val="1400"/>
-              </a:spcAft>
-              <a:defRPr sz="2000" b="1">
-                <a:solidFill>
-                  <a:srgbClr val="553C9A"/>
-                </a:solidFill>
-              </a:defRPr>
-            </a:pPr>
-            <a:r>
-              <a:t>• 感知/记忆/推理/行动/反思 = 眼睛/神经/大脑/肌肉/灵魂</a:t>
+              <a:defRPr sz="2000" b="0">
+                <a:solidFill>
+                  <a:srgbClr val="1A1A2E"/>
+                </a:solidFill>
+              </a:defRPr>
+            </a:pPr>
+            <a:r>
+              <a:t>• 自适应策略 — 从进化论角度，通过试错+反馈+选择演化出最优决策</a:t>
             </a:r>
           </a:p>
         </p:txBody>
@@ -10314,7 +13340,7 @@
               </a:defRPr>
             </a:pPr>
             <a:r>
-              <a:t>🤝 协作模式：共同进化</a:t>
+              <a:t>🔮 反思模式：AI 的灵魂工程学</a:t>
             </a:r>
           </a:p>
         </p:txBody>
@@ -10352,7 +13378,7 @@
               </a:defRPr>
             </a:pPr>
             <a:r>
-              <a:t>• 辩论 — 对抗性推演，真理在多角度交锋中清晰（法庭正反双方）</a:t>
+              <a:t>• 自我修正 — 当下毫秒级，像橡皮擦一样擦除错误（仅限当前任务）</a:t>
             </a:r>
           </a:p>
           <a:p>
@@ -10367,22 +13393,7 @@
               </a:defRPr>
             </a:pPr>
             <a:r>
-              <a:t>• 委托 — 层级目标分解，经理指挥工人的高效执行</a:t>
-            </a:r>
-          </a:p>
-          <a:p>
-            <a:pPr>
-              <a:spcAft>
-                <a:spcPts val="1400"/>
-              </a:spcAft>
-              <a:defRPr sz="2000" b="0">
-                <a:solidFill>
-                  <a:srgbClr val="1A1A2E"/>
-                </a:solidFill>
-              </a:defRPr>
-            </a:pPr>
-            <a:r>
-              <a:t>• 路由 — 精准分发，像医院分诊台将任务分配给最适合的 Agent</a:t>
+              <a:t>• 反思记忆 — 下次分钟级，像错题本一样生成语言形式的教训存入长期记忆</a:t>
             </a:r>
           </a:p>
           <a:p>
@@ -10397,7 +13408,22 @@
               </a:defRPr>
             </a:pPr>
             <a:r>
-              <a:t>• 群体 — 自组织涌现，像蚁群迁徙无需明确指挥者</a:t>
+              <a:t>• 元学习 — 长远日/周级，像修订教科书一样借助优化器自动迭代 Prompt</a:t>
+            </a:r>
+          </a:p>
+          <a:p>
+            <a:pPr>
+              <a:spcAft>
+                <a:spcPts val="1400"/>
+              </a:spcAft>
+              <a:defRPr sz="2000" b="1">
+                <a:solidFill>
+                  <a:srgbClr val="553C9A"/>
+                </a:solidFill>
+              </a:defRPr>
+            </a:pPr>
+            <a:r>
+              <a:t>• 感知/记忆/推理/行动/反思 = 眼睛/神经/大脑/肌肉/灵魂</a:t>
             </a:r>
           </a:p>
         </p:txBody>
@@ -10472,7 +13498,7 @@
         <p:spPr>
           <a:xfrm>
             <a:off x="0" y="0"/>
-            <a:ext cx="12188952" cy="137160"/>
+            <a:ext cx="12188952" cy="1097280"/>
           </a:xfrm>
           <a:prstGeom prst="rect">
             <a:avLst/>
@@ -10514,8 +13540,43 @@
         </p:nvSpPr>
         <p:spPr>
           <a:xfrm>
-            <a:off x="457200" y="365760"/>
-            <a:ext cx="11274552" cy="2286000"/>
+            <a:off x="457200" y="228600"/>
+            <a:ext cx="11274552" cy="822960"/>
+          </a:xfrm>
+          <a:prstGeom prst="rect">
+            <a:avLst/>
+          </a:prstGeom>
+          <a:noFill/>
+        </p:spPr>
+        <p:txBody>
+          <a:bodyPr wrap="none">
+            <a:spAutoFit/>
+          </a:bodyPr>
+          <a:lstStyle/>
+          <a:p>
+            <a:pPr>
+              <a:defRPr sz="3200" b="1">
+                <a:solidFill>
+                  <a:srgbClr val="FFFFFF"/>
+                </a:solidFill>
+              </a:defRPr>
+            </a:pPr>
+            <a:r>
+              <a:t>🤝 协作模式：共同进化</a:t>
+            </a:r>
+          </a:p>
+        </p:txBody>
+      </p:sp>
+      <p:sp>
+        <p:nvSpPr>
+          <p:cNvPr id="5" name="TextBox 4"/>
+          <p:cNvSpPr txBox="1"/>
+          <p:nvPr/>
+        </p:nvSpPr>
+        <p:spPr>
+          <a:xfrm>
+            <a:off x="640080" y="1371600"/>
+            <a:ext cx="10972800" cy="5029200"/>
           </a:xfrm>
           <a:prstGeom prst="rect">
             <a:avLst/>
@@ -10528,120 +13589,55 @@
           </a:bodyPr>
           <a:lstStyle/>
           <a:p>
-            <a:pPr algn="ctr">
-              <a:defRPr sz="2800" i="1">
+            <a:pPr>
+              <a:spcAft>
+                <a:spcPts val="1400"/>
+              </a:spcAft>
+              <a:defRPr sz="2000" b="0">
                 <a:solidFill>
                   <a:srgbClr val="1A1A2E"/>
                 </a:solidFill>
               </a:defRPr>
             </a:pPr>
             <a:r>
-              <a:t>"智能的最高形态，不在于独立思考，而在于共同进化。"</a:t>
-            </a:r>
-          </a:p>
-        </p:txBody>
-      </p:sp>
-      <p:sp>
-        <p:nvSpPr>
-          <p:cNvPr id="5" name="Rounded Rectangle 4"/>
-          <p:cNvSpPr/>
-          <p:nvPr/>
-        </p:nvSpPr>
-        <p:spPr>
-          <a:xfrm>
-            <a:off x="457200" y="1828800"/>
-            <a:ext cx="2103120" cy="4114800"/>
-          </a:xfrm>
-          <a:prstGeom prst="roundRect">
-            <a:avLst/>
-          </a:prstGeom>
-          <a:solidFill>
-            <a:srgbClr val="1A1A2E"/>
-          </a:solidFill>
-          <a:ln>
-            <a:noFill/>
-          </a:ln>
-        </p:spPr>
-        <p:style>
-          <a:lnRef idx="1">
-            <a:schemeClr val="accent1"/>
-          </a:lnRef>
-          <a:fillRef idx="3">
-            <a:schemeClr val="accent1"/>
-          </a:fillRef>
-          <a:effectRef idx="2">
-            <a:schemeClr val="accent1"/>
-          </a:effectRef>
-          <a:fontRef idx="minor">
-            <a:schemeClr val="lt1"/>
-          </a:fontRef>
-        </p:style>
-        <p:txBody>
-          <a:bodyPr rtlCol="0" anchor="ctr"/>
-          <a:lstStyle/>
-          <a:p>
-            <a:pPr algn="ctr"/>
-          </a:p>
-        </p:txBody>
-      </p:sp>
-      <p:sp>
-        <p:nvSpPr>
-          <p:cNvPr id="6" name="TextBox 5"/>
-          <p:cNvSpPr txBox="1"/>
-          <p:nvPr/>
-        </p:nvSpPr>
-        <p:spPr>
-          <a:xfrm>
-            <a:off x="457200" y="2011680"/>
-            <a:ext cx="2103120" cy="1188720"/>
-          </a:xfrm>
-          <a:prstGeom prst="rect">
-            <a:avLst/>
-          </a:prstGeom>
-          <a:noFill/>
-        </p:spPr>
-        <p:txBody>
-          <a:bodyPr wrap="none">
-            <a:spAutoFit/>
-          </a:bodyPr>
-          <a:lstStyle/>
-          <a:p>
-            <a:pPr algn="ctr">
-              <a:defRPr sz="3000" b="0">
-                <a:solidFill>
-                  <a:srgbClr val="FFFFFF"/>
-                </a:solidFill>
-              </a:defRPr>
-            </a:pPr>
-            <a:r>
-              <a:t>👁️ 感知</a:t>
-            </a:r>
-          </a:p>
-        </p:txBody>
-      </p:sp>
-      <p:sp>
-        <p:nvSpPr>
-          <p:cNvPr id="7" name="TextBox 6"/>
-          <p:cNvSpPr txBox="1"/>
-          <p:nvPr/>
-        </p:nvSpPr>
-        <p:spPr>
-          <a:xfrm>
-            <a:off x="457200" y="3291840"/>
-            <a:ext cx="2103120" cy="1188720"/>
-          </a:xfrm>
-          <a:prstGeom prst="rect">
-            <a:avLst/>
-          </a:prstGeom>
-          <a:noFill/>
-        </p:spPr>
-        <p:txBody>
-          <a:bodyPr wrap="none">
-            <a:spAutoFit/>
-          </a:bodyPr>
-          <a:lstStyle/>
-          <a:p>
-            <a:pPr algn="ctr">
+              <a:t>• 辩论 — 对抗性推演，真理在多角度交锋中清晰（法庭正反双方）</a:t>
+            </a:r>
+          </a:p>
+          <a:p>
+            <a:pPr>
+              <a:spcAft>
+                <a:spcPts val="1400"/>
+              </a:spcAft>
+              <a:defRPr sz="2000" b="0">
+                <a:solidFill>
+                  <a:srgbClr val="1A1A2E"/>
+                </a:solidFill>
+              </a:defRPr>
+            </a:pPr>
+            <a:r>
+              <a:t>• 委托 — 层级目标分解，经理指挥工人的高效执行</a:t>
+            </a:r>
+          </a:p>
+          <a:p>
+            <a:pPr>
+              <a:spcAft>
+                <a:spcPts val="1400"/>
+              </a:spcAft>
+              <a:defRPr sz="2000" b="0">
+                <a:solidFill>
+                  <a:srgbClr val="1A1A2E"/>
+                </a:solidFill>
+              </a:defRPr>
+            </a:pPr>
+            <a:r>
+              <a:t>• 路由 — 精准分发，像医院分诊台将任务分配给最适合的 Agent</a:t>
+            </a:r>
+          </a:p>
+          <a:p>
+            <a:pPr>
+              <a:spcAft>
+                <a:spcPts val="1400"/>
+              </a:spcAft>
               <a:defRPr sz="2000" b="1">
                 <a:solidFill>
                   <a:srgbClr val="553C9A"/>
@@ -10649,634 +13645,7 @@
               </a:defRPr>
             </a:pPr>
             <a:r>
-              <a:t>眼睛</a:t>
-            </a:r>
-          </a:p>
-        </p:txBody>
-      </p:sp>
-      <p:sp>
-        <p:nvSpPr>
-          <p:cNvPr id="8" name="TextBox 7"/>
-          <p:cNvSpPr txBox="1"/>
-          <p:nvPr/>
-        </p:nvSpPr>
-        <p:spPr>
-          <a:xfrm>
-            <a:off x="457200" y="4572000"/>
-            <a:ext cx="2103120" cy="1188720"/>
-          </a:xfrm>
-          <a:prstGeom prst="rect">
-            <a:avLst/>
-          </a:prstGeom>
-          <a:noFill/>
-        </p:spPr>
-        <p:txBody>
-          <a:bodyPr wrap="none">
-            <a:spAutoFit/>
-          </a:bodyPr>
-          <a:lstStyle/>
-          <a:p>
-            <a:pPr algn="ctr">
-              <a:defRPr sz="1200" b="0">
-                <a:solidFill>
-                  <a:srgbClr val="FFFFFF"/>
-                </a:solidFill>
-              </a:defRPr>
-            </a:pPr>
-            <a:r>
-              <a:t>捕捉世界的信息</a:t>
-            </a:r>
-          </a:p>
-        </p:txBody>
-      </p:sp>
-      <p:sp>
-        <p:nvSpPr>
-          <p:cNvPr id="9" name="Rounded Rectangle 8"/>
-          <p:cNvSpPr/>
-          <p:nvPr/>
-        </p:nvSpPr>
-        <p:spPr>
-          <a:xfrm>
-            <a:off x="2743200" y="1828800"/>
-            <a:ext cx="2103120" cy="4114800"/>
-          </a:xfrm>
-          <a:prstGeom prst="roundRect">
-            <a:avLst/>
-          </a:prstGeom>
-          <a:solidFill>
-            <a:srgbClr val="1A1A2E"/>
-          </a:solidFill>
-          <a:ln>
-            <a:noFill/>
-          </a:ln>
-        </p:spPr>
-        <p:style>
-          <a:lnRef idx="1">
-            <a:schemeClr val="accent1"/>
-          </a:lnRef>
-          <a:fillRef idx="3">
-            <a:schemeClr val="accent1"/>
-          </a:fillRef>
-          <a:effectRef idx="2">
-            <a:schemeClr val="accent1"/>
-          </a:effectRef>
-          <a:fontRef idx="minor">
-            <a:schemeClr val="lt1"/>
-          </a:fontRef>
-        </p:style>
-        <p:txBody>
-          <a:bodyPr rtlCol="0" anchor="ctr"/>
-          <a:lstStyle/>
-          <a:p>
-            <a:pPr algn="ctr"/>
-          </a:p>
-        </p:txBody>
-      </p:sp>
-      <p:sp>
-        <p:nvSpPr>
-          <p:cNvPr id="10" name="TextBox 9"/>
-          <p:cNvSpPr txBox="1"/>
-          <p:nvPr/>
-        </p:nvSpPr>
-        <p:spPr>
-          <a:xfrm>
-            <a:off x="2743200" y="2011680"/>
-            <a:ext cx="2103120" cy="1188720"/>
-          </a:xfrm>
-          <a:prstGeom prst="rect">
-            <a:avLst/>
-          </a:prstGeom>
-          <a:noFill/>
-        </p:spPr>
-        <p:txBody>
-          <a:bodyPr wrap="none">
-            <a:spAutoFit/>
-          </a:bodyPr>
-          <a:lstStyle/>
-          <a:p>
-            <a:pPr algn="ctr">
-              <a:defRPr sz="3000" b="0">
-                <a:solidFill>
-                  <a:srgbClr val="FFFFFF"/>
-                </a:solidFill>
-              </a:defRPr>
-            </a:pPr>
-            <a:r>
-              <a:t>🧠 记忆</a:t>
-            </a:r>
-          </a:p>
-        </p:txBody>
-      </p:sp>
-      <p:sp>
-        <p:nvSpPr>
-          <p:cNvPr id="11" name="TextBox 10"/>
-          <p:cNvSpPr txBox="1"/>
-          <p:nvPr/>
-        </p:nvSpPr>
-        <p:spPr>
-          <a:xfrm>
-            <a:off x="2743200" y="3291840"/>
-            <a:ext cx="2103120" cy="1188720"/>
-          </a:xfrm>
-          <a:prstGeom prst="rect">
-            <a:avLst/>
-          </a:prstGeom>
-          <a:noFill/>
-        </p:spPr>
-        <p:txBody>
-          <a:bodyPr wrap="none">
-            <a:spAutoFit/>
-          </a:bodyPr>
-          <a:lstStyle/>
-          <a:p>
-            <a:pPr algn="ctr">
-              <a:defRPr sz="2000" b="1">
-                <a:solidFill>
-                  <a:srgbClr val="553C9A"/>
-                </a:solidFill>
-              </a:defRPr>
-            </a:pPr>
-            <a:r>
-              <a:t>神经</a:t>
-            </a:r>
-          </a:p>
-        </p:txBody>
-      </p:sp>
-      <p:sp>
-        <p:nvSpPr>
-          <p:cNvPr id="12" name="TextBox 11"/>
-          <p:cNvSpPr txBox="1"/>
-          <p:nvPr/>
-        </p:nvSpPr>
-        <p:spPr>
-          <a:xfrm>
-            <a:off x="2743200" y="4572000"/>
-            <a:ext cx="2103120" cy="1188720"/>
-          </a:xfrm>
-          <a:prstGeom prst="rect">
-            <a:avLst/>
-          </a:prstGeom>
-          <a:noFill/>
-        </p:spPr>
-        <p:txBody>
-          <a:bodyPr wrap="none">
-            <a:spAutoFit/>
-          </a:bodyPr>
-          <a:lstStyle/>
-          <a:p>
-            <a:pPr algn="ctr">
-              <a:defRPr sz="1200" b="0">
-                <a:solidFill>
-                  <a:srgbClr val="FFFFFF"/>
-                </a:solidFill>
-              </a:defRPr>
-            </a:pPr>
-            <a:r>
-              <a:t>承载经验的痕迹</a:t>
-            </a:r>
-          </a:p>
-        </p:txBody>
-      </p:sp>
-      <p:sp>
-        <p:nvSpPr>
-          <p:cNvPr id="13" name="Rounded Rectangle 12"/>
-          <p:cNvSpPr/>
-          <p:nvPr/>
-        </p:nvSpPr>
-        <p:spPr>
-          <a:xfrm>
-            <a:off x="5029200" y="1828800"/>
-            <a:ext cx="2103120" cy="4114800"/>
-          </a:xfrm>
-          <a:prstGeom prst="roundRect">
-            <a:avLst/>
-          </a:prstGeom>
-          <a:solidFill>
-            <a:srgbClr val="1A1A2E"/>
-          </a:solidFill>
-          <a:ln>
-            <a:noFill/>
-          </a:ln>
-        </p:spPr>
-        <p:style>
-          <a:lnRef idx="1">
-            <a:schemeClr val="accent1"/>
-          </a:lnRef>
-          <a:fillRef idx="3">
-            <a:schemeClr val="accent1"/>
-          </a:fillRef>
-          <a:effectRef idx="2">
-            <a:schemeClr val="accent1"/>
-          </a:effectRef>
-          <a:fontRef idx="minor">
-            <a:schemeClr val="lt1"/>
-          </a:fontRef>
-        </p:style>
-        <p:txBody>
-          <a:bodyPr rtlCol="0" anchor="ctr"/>
-          <a:lstStyle/>
-          <a:p>
-            <a:pPr algn="ctr"/>
-          </a:p>
-        </p:txBody>
-      </p:sp>
-      <p:sp>
-        <p:nvSpPr>
-          <p:cNvPr id="14" name="TextBox 13"/>
-          <p:cNvSpPr txBox="1"/>
-          <p:nvPr/>
-        </p:nvSpPr>
-        <p:spPr>
-          <a:xfrm>
-            <a:off x="5029200" y="2011680"/>
-            <a:ext cx="2103120" cy="1188720"/>
-          </a:xfrm>
-          <a:prstGeom prst="rect">
-            <a:avLst/>
-          </a:prstGeom>
-          <a:noFill/>
-        </p:spPr>
-        <p:txBody>
-          <a:bodyPr wrap="none">
-            <a:spAutoFit/>
-          </a:bodyPr>
-          <a:lstStyle/>
-          <a:p>
-            <a:pPr algn="ctr">
-              <a:defRPr sz="3000" b="0">
-                <a:solidFill>
-                  <a:srgbClr val="FFFFFF"/>
-                </a:solidFill>
-              </a:defRPr>
-            </a:pPr>
-            <a:r>
-              <a:t>⚙️ 推理</a:t>
-            </a:r>
-          </a:p>
-        </p:txBody>
-      </p:sp>
-      <p:sp>
-        <p:nvSpPr>
-          <p:cNvPr id="15" name="TextBox 14"/>
-          <p:cNvSpPr txBox="1"/>
-          <p:nvPr/>
-        </p:nvSpPr>
-        <p:spPr>
-          <a:xfrm>
-            <a:off x="5029200" y="3291840"/>
-            <a:ext cx="2103120" cy="1188720"/>
-          </a:xfrm>
-          <a:prstGeom prst="rect">
-            <a:avLst/>
-          </a:prstGeom>
-          <a:noFill/>
-        </p:spPr>
-        <p:txBody>
-          <a:bodyPr wrap="none">
-            <a:spAutoFit/>
-          </a:bodyPr>
-          <a:lstStyle/>
-          <a:p>
-            <a:pPr algn="ctr">
-              <a:defRPr sz="2000" b="1">
-                <a:solidFill>
-                  <a:srgbClr val="553C9A"/>
-                </a:solidFill>
-              </a:defRPr>
-            </a:pPr>
-            <a:r>
-              <a:t>大脑</a:t>
-            </a:r>
-          </a:p>
-        </p:txBody>
-      </p:sp>
-      <p:sp>
-        <p:nvSpPr>
-          <p:cNvPr id="16" name="TextBox 15"/>
-          <p:cNvSpPr txBox="1"/>
-          <p:nvPr/>
-        </p:nvSpPr>
-        <p:spPr>
-          <a:xfrm>
-            <a:off x="5029200" y="4572000"/>
-            <a:ext cx="2103120" cy="1188720"/>
-          </a:xfrm>
-          <a:prstGeom prst="rect">
-            <a:avLst/>
-          </a:prstGeom>
-          <a:noFill/>
-        </p:spPr>
-        <p:txBody>
-          <a:bodyPr wrap="none">
-            <a:spAutoFit/>
-          </a:bodyPr>
-          <a:lstStyle/>
-          <a:p>
-            <a:pPr algn="ctr">
-              <a:defRPr sz="1200" b="0">
-                <a:solidFill>
-                  <a:srgbClr val="FFFFFF"/>
-                </a:solidFill>
-              </a:defRPr>
-            </a:pPr>
-            <a:r>
-              <a:t>编织逻辑的网络</a:t>
-            </a:r>
-          </a:p>
-        </p:txBody>
-      </p:sp>
-      <p:sp>
-        <p:nvSpPr>
-          <p:cNvPr id="17" name="Rounded Rectangle 16"/>
-          <p:cNvSpPr/>
-          <p:nvPr/>
-        </p:nvSpPr>
-        <p:spPr>
-          <a:xfrm>
-            <a:off x="7315200" y="1828800"/>
-            <a:ext cx="2103120" cy="4114800"/>
-          </a:xfrm>
-          <a:prstGeom prst="roundRect">
-            <a:avLst/>
-          </a:prstGeom>
-          <a:solidFill>
-            <a:srgbClr val="1A1A2E"/>
-          </a:solidFill>
-          <a:ln>
-            <a:noFill/>
-          </a:ln>
-        </p:spPr>
-        <p:style>
-          <a:lnRef idx="1">
-            <a:schemeClr val="accent1"/>
-          </a:lnRef>
-          <a:fillRef idx="3">
-            <a:schemeClr val="accent1"/>
-          </a:fillRef>
-          <a:effectRef idx="2">
-            <a:schemeClr val="accent1"/>
-          </a:effectRef>
-          <a:fontRef idx="minor">
-            <a:schemeClr val="lt1"/>
-          </a:fontRef>
-        </p:style>
-        <p:txBody>
-          <a:bodyPr rtlCol="0" anchor="ctr"/>
-          <a:lstStyle/>
-          <a:p>
-            <a:pPr algn="ctr"/>
-          </a:p>
-        </p:txBody>
-      </p:sp>
-      <p:sp>
-        <p:nvSpPr>
-          <p:cNvPr id="18" name="TextBox 17"/>
-          <p:cNvSpPr txBox="1"/>
-          <p:nvPr/>
-        </p:nvSpPr>
-        <p:spPr>
-          <a:xfrm>
-            <a:off x="7315200" y="2011680"/>
-            <a:ext cx="2103120" cy="1188720"/>
-          </a:xfrm>
-          <a:prstGeom prst="rect">
-            <a:avLst/>
-          </a:prstGeom>
-          <a:noFill/>
-        </p:spPr>
-        <p:txBody>
-          <a:bodyPr wrap="none">
-            <a:spAutoFit/>
-          </a:bodyPr>
-          <a:lstStyle/>
-          <a:p>
-            <a:pPr algn="ctr">
-              <a:defRPr sz="3000" b="0">
-                <a:solidFill>
-                  <a:srgbClr val="FFFFFF"/>
-                </a:solidFill>
-              </a:defRPr>
-            </a:pPr>
-            <a:r>
-              <a:t>💪 行动</a:t>
-            </a:r>
-          </a:p>
-        </p:txBody>
-      </p:sp>
-      <p:sp>
-        <p:nvSpPr>
-          <p:cNvPr id="19" name="TextBox 18"/>
-          <p:cNvSpPr txBox="1"/>
-          <p:nvPr/>
-        </p:nvSpPr>
-        <p:spPr>
-          <a:xfrm>
-            <a:off x="7315200" y="3291840"/>
-            <a:ext cx="2103120" cy="1188720"/>
-          </a:xfrm>
-          <a:prstGeom prst="rect">
-            <a:avLst/>
-          </a:prstGeom>
-          <a:noFill/>
-        </p:spPr>
-        <p:txBody>
-          <a:bodyPr wrap="none">
-            <a:spAutoFit/>
-          </a:bodyPr>
-          <a:lstStyle/>
-          <a:p>
-            <a:pPr algn="ctr">
-              <a:defRPr sz="2000" b="1">
-                <a:solidFill>
-                  <a:srgbClr val="553C9A"/>
-                </a:solidFill>
-              </a:defRPr>
-            </a:pPr>
-            <a:r>
-              <a:t>肌肉</a:t>
-            </a:r>
-          </a:p>
-        </p:txBody>
-      </p:sp>
-      <p:sp>
-        <p:nvSpPr>
-          <p:cNvPr id="20" name="TextBox 19"/>
-          <p:cNvSpPr txBox="1"/>
-          <p:nvPr/>
-        </p:nvSpPr>
-        <p:spPr>
-          <a:xfrm>
-            <a:off x="7315200" y="4572000"/>
-            <a:ext cx="2103120" cy="1188720"/>
-          </a:xfrm>
-          <a:prstGeom prst="rect">
-            <a:avLst/>
-          </a:prstGeom>
-          <a:noFill/>
-        </p:spPr>
-        <p:txBody>
-          <a:bodyPr wrap="none">
-            <a:spAutoFit/>
-          </a:bodyPr>
-          <a:lstStyle/>
-          <a:p>
-            <a:pPr algn="ctr">
-              <a:defRPr sz="1200" b="0">
-                <a:solidFill>
-                  <a:srgbClr val="FFFFFF"/>
-                </a:solidFill>
-              </a:defRPr>
-            </a:pPr>
-            <a:r>
-              <a:t>驱动行动的执行</a:t>
-            </a:r>
-          </a:p>
-        </p:txBody>
-      </p:sp>
-      <p:sp>
-        <p:nvSpPr>
-          <p:cNvPr id="21" name="Rounded Rectangle 20"/>
-          <p:cNvSpPr/>
-          <p:nvPr/>
-        </p:nvSpPr>
-        <p:spPr>
-          <a:xfrm>
-            <a:off x="9601200" y="1828800"/>
-            <a:ext cx="2103120" cy="4114800"/>
-          </a:xfrm>
-          <a:prstGeom prst="roundRect">
-            <a:avLst/>
-          </a:prstGeom>
-          <a:solidFill>
-            <a:srgbClr val="1A1A2E"/>
-          </a:solidFill>
-          <a:ln>
-            <a:noFill/>
-          </a:ln>
-        </p:spPr>
-        <p:style>
-          <a:lnRef idx="1">
-            <a:schemeClr val="accent1"/>
-          </a:lnRef>
-          <a:fillRef idx="3">
-            <a:schemeClr val="accent1"/>
-          </a:fillRef>
-          <a:effectRef idx="2">
-            <a:schemeClr val="accent1"/>
-          </a:effectRef>
-          <a:fontRef idx="minor">
-            <a:schemeClr val="lt1"/>
-          </a:fontRef>
-        </p:style>
-        <p:txBody>
-          <a:bodyPr rtlCol="0" anchor="ctr"/>
-          <a:lstStyle/>
-          <a:p>
-            <a:pPr algn="ctr"/>
-          </a:p>
-        </p:txBody>
-      </p:sp>
-      <p:sp>
-        <p:nvSpPr>
-          <p:cNvPr id="22" name="TextBox 21"/>
-          <p:cNvSpPr txBox="1"/>
-          <p:nvPr/>
-        </p:nvSpPr>
-        <p:spPr>
-          <a:xfrm>
-            <a:off x="9601200" y="2011680"/>
-            <a:ext cx="2103120" cy="1188720"/>
-          </a:xfrm>
-          <a:prstGeom prst="rect">
-            <a:avLst/>
-          </a:prstGeom>
-          <a:noFill/>
-        </p:spPr>
-        <p:txBody>
-          <a:bodyPr wrap="none">
-            <a:spAutoFit/>
-          </a:bodyPr>
-          <a:lstStyle/>
-          <a:p>
-            <a:pPr algn="ctr">
-              <a:defRPr sz="3000" b="0">
-                <a:solidFill>
-                  <a:srgbClr val="FFFFFF"/>
-                </a:solidFill>
-              </a:defRPr>
-            </a:pPr>
-            <a:r>
-              <a:t>🔮 反思</a:t>
-            </a:r>
-          </a:p>
-        </p:txBody>
-      </p:sp>
-      <p:sp>
-        <p:nvSpPr>
-          <p:cNvPr id="23" name="TextBox 22"/>
-          <p:cNvSpPr txBox="1"/>
-          <p:nvPr/>
-        </p:nvSpPr>
-        <p:spPr>
-          <a:xfrm>
-            <a:off x="9601200" y="3291840"/>
-            <a:ext cx="2103120" cy="1188720"/>
-          </a:xfrm>
-          <a:prstGeom prst="rect">
-            <a:avLst/>
-          </a:prstGeom>
-          <a:noFill/>
-        </p:spPr>
-        <p:txBody>
-          <a:bodyPr wrap="none">
-            <a:spAutoFit/>
-          </a:bodyPr>
-          <a:lstStyle/>
-          <a:p>
-            <a:pPr algn="ctr">
-              <a:defRPr sz="2000" b="1">
-                <a:solidFill>
-                  <a:srgbClr val="553C9A"/>
-                </a:solidFill>
-              </a:defRPr>
-            </a:pPr>
-            <a:r>
-              <a:t>灵魂</a:t>
-            </a:r>
-          </a:p>
-        </p:txBody>
-      </p:sp>
-      <p:sp>
-        <p:nvSpPr>
-          <p:cNvPr id="24" name="TextBox 23"/>
-          <p:cNvSpPr txBox="1"/>
-          <p:nvPr/>
-        </p:nvSpPr>
-        <p:spPr>
-          <a:xfrm>
-            <a:off x="9601200" y="4572000"/>
-            <a:ext cx="2103120" cy="1188720"/>
-          </a:xfrm>
-          <a:prstGeom prst="rect">
-            <a:avLst/>
-          </a:prstGeom>
-          <a:noFill/>
-        </p:spPr>
-        <p:txBody>
-          <a:bodyPr wrap="none">
-            <a:spAutoFit/>
-          </a:bodyPr>
-          <a:lstStyle/>
-          <a:p>
-            <a:pPr algn="ctr">
-              <a:defRPr sz="1200" b="0">
-                <a:solidFill>
-                  <a:srgbClr val="FFFFFF"/>
-                </a:solidFill>
-              </a:defRPr>
-            </a:pPr>
-            <a:r>
-              <a:t>对自身局限的觉察</a:t>
+              <a:t>• 群体 — 自组织涌现，像蚁群迁徙无需明确指挥者</a:t>
             </a:r>
           </a:p>
         </p:txBody>
@@ -11573,13 +13942,13 @@
         <p:spPr>
           <a:xfrm>
             <a:off x="0" y="0"/>
-            <a:ext cx="12188952" cy="1097280"/>
+            <a:ext cx="12188952" cy="137160"/>
           </a:xfrm>
           <a:prstGeom prst="rect">
             <a:avLst/>
           </a:prstGeom>
           <a:solidFill>
-            <a:srgbClr val="553C9A"/>
+            <a:srgbClr val="1A1A2E"/>
           </a:solidFill>
           <a:ln>
             <a:noFill/>
@@ -11615,8 +13984,86 @@
         </p:nvSpPr>
         <p:spPr>
           <a:xfrm>
-            <a:off x="457200" y="228600"/>
-            <a:ext cx="11274552" cy="822960"/>
+            <a:off x="457200" y="365760"/>
+            <a:ext cx="11274552" cy="2286000"/>
+          </a:xfrm>
+          <a:prstGeom prst="rect">
+            <a:avLst/>
+          </a:prstGeom>
+          <a:noFill/>
+        </p:spPr>
+        <p:txBody>
+          <a:bodyPr wrap="square">
+            <a:spAutoFit/>
+          </a:bodyPr>
+          <a:lstStyle/>
+          <a:p>
+            <a:pPr algn="ctr">
+              <a:defRPr sz="2800" i="1">
+                <a:solidFill>
+                  <a:srgbClr val="1A1A2E"/>
+                </a:solidFill>
+              </a:defRPr>
+            </a:pPr>
+            <a:r>
+              <a:t>"智能的最高形态，不在于独立思考，而在于共同进化。"</a:t>
+            </a:r>
+          </a:p>
+        </p:txBody>
+      </p:sp>
+      <p:sp>
+        <p:nvSpPr>
+          <p:cNvPr id="5" name="Rounded Rectangle 4"/>
+          <p:cNvSpPr/>
+          <p:nvPr/>
+        </p:nvSpPr>
+        <p:spPr>
+          <a:xfrm>
+            <a:off x="457200" y="1828800"/>
+            <a:ext cx="2103120" cy="4114800"/>
+          </a:xfrm>
+          <a:prstGeom prst="roundRect">
+            <a:avLst/>
+          </a:prstGeom>
+          <a:solidFill>
+            <a:srgbClr val="1A1A2E"/>
+          </a:solidFill>
+          <a:ln>
+            <a:noFill/>
+          </a:ln>
+        </p:spPr>
+        <p:style>
+          <a:lnRef idx="1">
+            <a:schemeClr val="accent1"/>
+          </a:lnRef>
+          <a:fillRef idx="3">
+            <a:schemeClr val="accent1"/>
+          </a:fillRef>
+          <a:effectRef idx="2">
+            <a:schemeClr val="accent1"/>
+          </a:effectRef>
+          <a:fontRef idx="minor">
+            <a:schemeClr val="lt1"/>
+          </a:fontRef>
+        </p:style>
+        <p:txBody>
+          <a:bodyPr rtlCol="0" anchor="ctr"/>
+          <a:lstStyle/>
+          <a:p>
+            <a:pPr algn="ctr"/>
+          </a:p>
+        </p:txBody>
+      </p:sp>
+      <p:sp>
+        <p:nvSpPr>
+          <p:cNvPr id="6" name="TextBox 5"/>
+          <p:cNvSpPr txBox="1"/>
+          <p:nvPr/>
+        </p:nvSpPr>
+        <p:spPr>
+          <a:xfrm>
+            <a:off x="457200" y="2011680"/>
+            <a:ext cx="2103120" cy="1188720"/>
           </a:xfrm>
           <a:prstGeom prst="rect">
             <a:avLst/>
@@ -11629,75 +14076,42 @@
           </a:bodyPr>
           <a:lstStyle/>
           <a:p>
-            <a:pPr>
-              <a:defRPr sz="2800" b="1">
+            <a:pPr algn="ctr">
+              <a:defRPr sz="3000" b="0">
                 <a:solidFill>
                   <a:srgbClr val="FFFFFF"/>
                 </a:solidFill>
               </a:defRPr>
             </a:pPr>
             <a:r>
-              <a:t>后记：从确定性工程到概率性工程</a:t>
-            </a:r>
-          </a:p>
-        </p:txBody>
-      </p:sp>
-      <p:sp>
-        <p:nvSpPr>
-          <p:cNvPr id="5" name="TextBox 4"/>
-          <p:cNvSpPr txBox="1"/>
-          <p:nvPr/>
-        </p:nvSpPr>
-        <p:spPr>
-          <a:xfrm>
-            <a:off x="640080" y="1371600"/>
-            <a:ext cx="10972800" cy="5029200"/>
-          </a:xfrm>
-          <a:prstGeom prst="rect">
-            <a:avLst/>
-          </a:prstGeom>
-          <a:noFill/>
-        </p:spPr>
-        <p:txBody>
-          <a:bodyPr wrap="square">
-            <a:spAutoFit/>
-          </a:bodyPr>
-          <a:lstStyle/>
-          <a:p>
-            <a:pPr>
-              <a:spcAft>
-                <a:spcPts val="1400"/>
-              </a:spcAft>
-              <a:defRPr sz="2000" b="0">
-                <a:solidFill>
-                  <a:srgbClr val="1A1A2E"/>
-                </a:solidFill>
-              </a:defRPr>
-            </a:pPr>
-            <a:r>
-              <a:t>• 传统软件 = 牛顿力学隐喻：世界如精密钟表，追求零熵，将不确定性视为 bug</a:t>
-            </a:r>
-          </a:p>
-          <a:p>
-            <a:pPr>
-              <a:spcAft>
-                <a:spcPts val="1400"/>
-              </a:spcAft>
-              <a:defRPr sz="2000" b="0">
-                <a:solidFill>
-                  <a:srgbClr val="1A1A2E"/>
-                </a:solidFill>
-              </a:defRPr>
-            </a:pPr>
-            <a:r>
-              <a:t>• Agent 时代 = 达尔文逻辑：软件展现生长性（通过 RAG 积累）、适应性（动态调整）、繁殖性（生成新 Prompt）</a:t>
-            </a:r>
-          </a:p>
-          <a:p>
-            <a:pPr>
-              <a:spcAft>
-                <a:spcPts val="1400"/>
-              </a:spcAft>
+              <a:t>👁️ 感知</a:t>
+            </a:r>
+          </a:p>
+        </p:txBody>
+      </p:sp>
+      <p:sp>
+        <p:nvSpPr>
+          <p:cNvPr id="7" name="TextBox 6"/>
+          <p:cNvSpPr txBox="1"/>
+          <p:nvPr/>
+        </p:nvSpPr>
+        <p:spPr>
+          <a:xfrm>
+            <a:off x="457200" y="3291840"/>
+            <a:ext cx="2103120" cy="1188720"/>
+          </a:xfrm>
+          <a:prstGeom prst="rect">
+            <a:avLst/>
+          </a:prstGeom>
+          <a:noFill/>
+        </p:spPr>
+        <p:txBody>
+          <a:bodyPr wrap="none">
+            <a:spAutoFit/>
+          </a:bodyPr>
+          <a:lstStyle/>
+          <a:p>
+            <a:pPr algn="ctr">
               <a:defRPr sz="2000" b="1">
                 <a:solidFill>
                   <a:srgbClr val="553C9A"/>
@@ -11705,22 +14119,634 @@
               </a:defRPr>
             </a:pPr>
             <a:r>
-              <a:t>• 我们正见证硅基生命的寒武纪大爆发</a:t>
-            </a:r>
-          </a:p>
-          <a:p>
-            <a:pPr>
-              <a:spcAft>
-                <a:spcPts val="1400"/>
-              </a:spcAft>
-              <a:defRPr sz="2000" b="0">
-                <a:solidFill>
-                  <a:srgbClr val="1A1A2E"/>
-                </a:solidFill>
-              </a:defRPr>
-            </a:pPr>
-            <a:r>
-              <a:t>• 架构师的新角色 = 熵的园丁：无法命令植物长多高，但可以优化土壤</a:t>
+              <a:t>眼睛</a:t>
+            </a:r>
+          </a:p>
+        </p:txBody>
+      </p:sp>
+      <p:sp>
+        <p:nvSpPr>
+          <p:cNvPr id="8" name="TextBox 7"/>
+          <p:cNvSpPr txBox="1"/>
+          <p:nvPr/>
+        </p:nvSpPr>
+        <p:spPr>
+          <a:xfrm>
+            <a:off x="457200" y="4572000"/>
+            <a:ext cx="2103120" cy="1188720"/>
+          </a:xfrm>
+          <a:prstGeom prst="rect">
+            <a:avLst/>
+          </a:prstGeom>
+          <a:noFill/>
+        </p:spPr>
+        <p:txBody>
+          <a:bodyPr wrap="none">
+            <a:spAutoFit/>
+          </a:bodyPr>
+          <a:lstStyle/>
+          <a:p>
+            <a:pPr algn="ctr">
+              <a:defRPr sz="1200" b="0">
+                <a:solidFill>
+                  <a:srgbClr val="FFFFFF"/>
+                </a:solidFill>
+              </a:defRPr>
+            </a:pPr>
+            <a:r>
+              <a:t>捕捉世界的信息</a:t>
+            </a:r>
+          </a:p>
+        </p:txBody>
+      </p:sp>
+      <p:sp>
+        <p:nvSpPr>
+          <p:cNvPr id="9" name="Rounded Rectangle 8"/>
+          <p:cNvSpPr/>
+          <p:nvPr/>
+        </p:nvSpPr>
+        <p:spPr>
+          <a:xfrm>
+            <a:off x="2743200" y="1828800"/>
+            <a:ext cx="2103120" cy="4114800"/>
+          </a:xfrm>
+          <a:prstGeom prst="roundRect">
+            <a:avLst/>
+          </a:prstGeom>
+          <a:solidFill>
+            <a:srgbClr val="1A1A2E"/>
+          </a:solidFill>
+          <a:ln>
+            <a:noFill/>
+          </a:ln>
+        </p:spPr>
+        <p:style>
+          <a:lnRef idx="1">
+            <a:schemeClr val="accent1"/>
+          </a:lnRef>
+          <a:fillRef idx="3">
+            <a:schemeClr val="accent1"/>
+          </a:fillRef>
+          <a:effectRef idx="2">
+            <a:schemeClr val="accent1"/>
+          </a:effectRef>
+          <a:fontRef idx="minor">
+            <a:schemeClr val="lt1"/>
+          </a:fontRef>
+        </p:style>
+        <p:txBody>
+          <a:bodyPr rtlCol="0" anchor="ctr"/>
+          <a:lstStyle/>
+          <a:p>
+            <a:pPr algn="ctr"/>
+          </a:p>
+        </p:txBody>
+      </p:sp>
+      <p:sp>
+        <p:nvSpPr>
+          <p:cNvPr id="10" name="TextBox 9"/>
+          <p:cNvSpPr txBox="1"/>
+          <p:nvPr/>
+        </p:nvSpPr>
+        <p:spPr>
+          <a:xfrm>
+            <a:off x="2743200" y="2011680"/>
+            <a:ext cx="2103120" cy="1188720"/>
+          </a:xfrm>
+          <a:prstGeom prst="rect">
+            <a:avLst/>
+          </a:prstGeom>
+          <a:noFill/>
+        </p:spPr>
+        <p:txBody>
+          <a:bodyPr wrap="none">
+            <a:spAutoFit/>
+          </a:bodyPr>
+          <a:lstStyle/>
+          <a:p>
+            <a:pPr algn="ctr">
+              <a:defRPr sz="3000" b="0">
+                <a:solidFill>
+                  <a:srgbClr val="FFFFFF"/>
+                </a:solidFill>
+              </a:defRPr>
+            </a:pPr>
+            <a:r>
+              <a:t>🧠 记忆</a:t>
+            </a:r>
+          </a:p>
+        </p:txBody>
+      </p:sp>
+      <p:sp>
+        <p:nvSpPr>
+          <p:cNvPr id="11" name="TextBox 10"/>
+          <p:cNvSpPr txBox="1"/>
+          <p:nvPr/>
+        </p:nvSpPr>
+        <p:spPr>
+          <a:xfrm>
+            <a:off x="2743200" y="3291840"/>
+            <a:ext cx="2103120" cy="1188720"/>
+          </a:xfrm>
+          <a:prstGeom prst="rect">
+            <a:avLst/>
+          </a:prstGeom>
+          <a:noFill/>
+        </p:spPr>
+        <p:txBody>
+          <a:bodyPr wrap="none">
+            <a:spAutoFit/>
+          </a:bodyPr>
+          <a:lstStyle/>
+          <a:p>
+            <a:pPr algn="ctr">
+              <a:defRPr sz="2000" b="1">
+                <a:solidFill>
+                  <a:srgbClr val="553C9A"/>
+                </a:solidFill>
+              </a:defRPr>
+            </a:pPr>
+            <a:r>
+              <a:t>神经</a:t>
+            </a:r>
+          </a:p>
+        </p:txBody>
+      </p:sp>
+      <p:sp>
+        <p:nvSpPr>
+          <p:cNvPr id="12" name="TextBox 11"/>
+          <p:cNvSpPr txBox="1"/>
+          <p:nvPr/>
+        </p:nvSpPr>
+        <p:spPr>
+          <a:xfrm>
+            <a:off x="2743200" y="4572000"/>
+            <a:ext cx="2103120" cy="1188720"/>
+          </a:xfrm>
+          <a:prstGeom prst="rect">
+            <a:avLst/>
+          </a:prstGeom>
+          <a:noFill/>
+        </p:spPr>
+        <p:txBody>
+          <a:bodyPr wrap="none">
+            <a:spAutoFit/>
+          </a:bodyPr>
+          <a:lstStyle/>
+          <a:p>
+            <a:pPr algn="ctr">
+              <a:defRPr sz="1200" b="0">
+                <a:solidFill>
+                  <a:srgbClr val="FFFFFF"/>
+                </a:solidFill>
+              </a:defRPr>
+            </a:pPr>
+            <a:r>
+              <a:t>承载经验的痕迹</a:t>
+            </a:r>
+          </a:p>
+        </p:txBody>
+      </p:sp>
+      <p:sp>
+        <p:nvSpPr>
+          <p:cNvPr id="13" name="Rounded Rectangle 12"/>
+          <p:cNvSpPr/>
+          <p:nvPr/>
+        </p:nvSpPr>
+        <p:spPr>
+          <a:xfrm>
+            <a:off x="5029200" y="1828800"/>
+            <a:ext cx="2103120" cy="4114800"/>
+          </a:xfrm>
+          <a:prstGeom prst="roundRect">
+            <a:avLst/>
+          </a:prstGeom>
+          <a:solidFill>
+            <a:srgbClr val="1A1A2E"/>
+          </a:solidFill>
+          <a:ln>
+            <a:noFill/>
+          </a:ln>
+        </p:spPr>
+        <p:style>
+          <a:lnRef idx="1">
+            <a:schemeClr val="accent1"/>
+          </a:lnRef>
+          <a:fillRef idx="3">
+            <a:schemeClr val="accent1"/>
+          </a:fillRef>
+          <a:effectRef idx="2">
+            <a:schemeClr val="accent1"/>
+          </a:effectRef>
+          <a:fontRef idx="minor">
+            <a:schemeClr val="lt1"/>
+          </a:fontRef>
+        </p:style>
+        <p:txBody>
+          <a:bodyPr rtlCol="0" anchor="ctr"/>
+          <a:lstStyle/>
+          <a:p>
+            <a:pPr algn="ctr"/>
+          </a:p>
+        </p:txBody>
+      </p:sp>
+      <p:sp>
+        <p:nvSpPr>
+          <p:cNvPr id="14" name="TextBox 13"/>
+          <p:cNvSpPr txBox="1"/>
+          <p:nvPr/>
+        </p:nvSpPr>
+        <p:spPr>
+          <a:xfrm>
+            <a:off x="5029200" y="2011680"/>
+            <a:ext cx="2103120" cy="1188720"/>
+          </a:xfrm>
+          <a:prstGeom prst="rect">
+            <a:avLst/>
+          </a:prstGeom>
+          <a:noFill/>
+        </p:spPr>
+        <p:txBody>
+          <a:bodyPr wrap="none">
+            <a:spAutoFit/>
+          </a:bodyPr>
+          <a:lstStyle/>
+          <a:p>
+            <a:pPr algn="ctr">
+              <a:defRPr sz="3000" b="0">
+                <a:solidFill>
+                  <a:srgbClr val="FFFFFF"/>
+                </a:solidFill>
+              </a:defRPr>
+            </a:pPr>
+            <a:r>
+              <a:t>⚙️ 推理</a:t>
+            </a:r>
+          </a:p>
+        </p:txBody>
+      </p:sp>
+      <p:sp>
+        <p:nvSpPr>
+          <p:cNvPr id="15" name="TextBox 14"/>
+          <p:cNvSpPr txBox="1"/>
+          <p:nvPr/>
+        </p:nvSpPr>
+        <p:spPr>
+          <a:xfrm>
+            <a:off x="5029200" y="3291840"/>
+            <a:ext cx="2103120" cy="1188720"/>
+          </a:xfrm>
+          <a:prstGeom prst="rect">
+            <a:avLst/>
+          </a:prstGeom>
+          <a:noFill/>
+        </p:spPr>
+        <p:txBody>
+          <a:bodyPr wrap="none">
+            <a:spAutoFit/>
+          </a:bodyPr>
+          <a:lstStyle/>
+          <a:p>
+            <a:pPr algn="ctr">
+              <a:defRPr sz="2000" b="1">
+                <a:solidFill>
+                  <a:srgbClr val="553C9A"/>
+                </a:solidFill>
+              </a:defRPr>
+            </a:pPr>
+            <a:r>
+              <a:t>大脑</a:t>
+            </a:r>
+          </a:p>
+        </p:txBody>
+      </p:sp>
+      <p:sp>
+        <p:nvSpPr>
+          <p:cNvPr id="16" name="TextBox 15"/>
+          <p:cNvSpPr txBox="1"/>
+          <p:nvPr/>
+        </p:nvSpPr>
+        <p:spPr>
+          <a:xfrm>
+            <a:off x="5029200" y="4572000"/>
+            <a:ext cx="2103120" cy="1188720"/>
+          </a:xfrm>
+          <a:prstGeom prst="rect">
+            <a:avLst/>
+          </a:prstGeom>
+          <a:noFill/>
+        </p:spPr>
+        <p:txBody>
+          <a:bodyPr wrap="none">
+            <a:spAutoFit/>
+          </a:bodyPr>
+          <a:lstStyle/>
+          <a:p>
+            <a:pPr algn="ctr">
+              <a:defRPr sz="1200" b="0">
+                <a:solidFill>
+                  <a:srgbClr val="FFFFFF"/>
+                </a:solidFill>
+              </a:defRPr>
+            </a:pPr>
+            <a:r>
+              <a:t>编织逻辑的网络</a:t>
+            </a:r>
+          </a:p>
+        </p:txBody>
+      </p:sp>
+      <p:sp>
+        <p:nvSpPr>
+          <p:cNvPr id="17" name="Rounded Rectangle 16"/>
+          <p:cNvSpPr/>
+          <p:nvPr/>
+        </p:nvSpPr>
+        <p:spPr>
+          <a:xfrm>
+            <a:off x="7315200" y="1828800"/>
+            <a:ext cx="2103120" cy="4114800"/>
+          </a:xfrm>
+          <a:prstGeom prst="roundRect">
+            <a:avLst/>
+          </a:prstGeom>
+          <a:solidFill>
+            <a:srgbClr val="1A1A2E"/>
+          </a:solidFill>
+          <a:ln>
+            <a:noFill/>
+          </a:ln>
+        </p:spPr>
+        <p:style>
+          <a:lnRef idx="1">
+            <a:schemeClr val="accent1"/>
+          </a:lnRef>
+          <a:fillRef idx="3">
+            <a:schemeClr val="accent1"/>
+          </a:fillRef>
+          <a:effectRef idx="2">
+            <a:schemeClr val="accent1"/>
+          </a:effectRef>
+          <a:fontRef idx="minor">
+            <a:schemeClr val="lt1"/>
+          </a:fontRef>
+        </p:style>
+        <p:txBody>
+          <a:bodyPr rtlCol="0" anchor="ctr"/>
+          <a:lstStyle/>
+          <a:p>
+            <a:pPr algn="ctr"/>
+          </a:p>
+        </p:txBody>
+      </p:sp>
+      <p:sp>
+        <p:nvSpPr>
+          <p:cNvPr id="18" name="TextBox 17"/>
+          <p:cNvSpPr txBox="1"/>
+          <p:nvPr/>
+        </p:nvSpPr>
+        <p:spPr>
+          <a:xfrm>
+            <a:off x="7315200" y="2011680"/>
+            <a:ext cx="2103120" cy="1188720"/>
+          </a:xfrm>
+          <a:prstGeom prst="rect">
+            <a:avLst/>
+          </a:prstGeom>
+          <a:noFill/>
+        </p:spPr>
+        <p:txBody>
+          <a:bodyPr wrap="none">
+            <a:spAutoFit/>
+          </a:bodyPr>
+          <a:lstStyle/>
+          <a:p>
+            <a:pPr algn="ctr">
+              <a:defRPr sz="3000" b="0">
+                <a:solidFill>
+                  <a:srgbClr val="FFFFFF"/>
+                </a:solidFill>
+              </a:defRPr>
+            </a:pPr>
+            <a:r>
+              <a:t>💪 行动</a:t>
+            </a:r>
+          </a:p>
+        </p:txBody>
+      </p:sp>
+      <p:sp>
+        <p:nvSpPr>
+          <p:cNvPr id="19" name="TextBox 18"/>
+          <p:cNvSpPr txBox="1"/>
+          <p:nvPr/>
+        </p:nvSpPr>
+        <p:spPr>
+          <a:xfrm>
+            <a:off x="7315200" y="3291840"/>
+            <a:ext cx="2103120" cy="1188720"/>
+          </a:xfrm>
+          <a:prstGeom prst="rect">
+            <a:avLst/>
+          </a:prstGeom>
+          <a:noFill/>
+        </p:spPr>
+        <p:txBody>
+          <a:bodyPr wrap="none">
+            <a:spAutoFit/>
+          </a:bodyPr>
+          <a:lstStyle/>
+          <a:p>
+            <a:pPr algn="ctr">
+              <a:defRPr sz="2000" b="1">
+                <a:solidFill>
+                  <a:srgbClr val="553C9A"/>
+                </a:solidFill>
+              </a:defRPr>
+            </a:pPr>
+            <a:r>
+              <a:t>肌肉</a:t>
+            </a:r>
+          </a:p>
+        </p:txBody>
+      </p:sp>
+      <p:sp>
+        <p:nvSpPr>
+          <p:cNvPr id="20" name="TextBox 19"/>
+          <p:cNvSpPr txBox="1"/>
+          <p:nvPr/>
+        </p:nvSpPr>
+        <p:spPr>
+          <a:xfrm>
+            <a:off x="7315200" y="4572000"/>
+            <a:ext cx="2103120" cy="1188720"/>
+          </a:xfrm>
+          <a:prstGeom prst="rect">
+            <a:avLst/>
+          </a:prstGeom>
+          <a:noFill/>
+        </p:spPr>
+        <p:txBody>
+          <a:bodyPr wrap="none">
+            <a:spAutoFit/>
+          </a:bodyPr>
+          <a:lstStyle/>
+          <a:p>
+            <a:pPr algn="ctr">
+              <a:defRPr sz="1200" b="0">
+                <a:solidFill>
+                  <a:srgbClr val="FFFFFF"/>
+                </a:solidFill>
+              </a:defRPr>
+            </a:pPr>
+            <a:r>
+              <a:t>驱动行动的执行</a:t>
+            </a:r>
+          </a:p>
+        </p:txBody>
+      </p:sp>
+      <p:sp>
+        <p:nvSpPr>
+          <p:cNvPr id="21" name="Rounded Rectangle 20"/>
+          <p:cNvSpPr/>
+          <p:nvPr/>
+        </p:nvSpPr>
+        <p:spPr>
+          <a:xfrm>
+            <a:off x="9601200" y="1828800"/>
+            <a:ext cx="2103120" cy="4114800"/>
+          </a:xfrm>
+          <a:prstGeom prst="roundRect">
+            <a:avLst/>
+          </a:prstGeom>
+          <a:solidFill>
+            <a:srgbClr val="1A1A2E"/>
+          </a:solidFill>
+          <a:ln>
+            <a:noFill/>
+          </a:ln>
+        </p:spPr>
+        <p:style>
+          <a:lnRef idx="1">
+            <a:schemeClr val="accent1"/>
+          </a:lnRef>
+          <a:fillRef idx="3">
+            <a:schemeClr val="accent1"/>
+          </a:fillRef>
+          <a:effectRef idx="2">
+            <a:schemeClr val="accent1"/>
+          </a:effectRef>
+          <a:fontRef idx="minor">
+            <a:schemeClr val="lt1"/>
+          </a:fontRef>
+        </p:style>
+        <p:txBody>
+          <a:bodyPr rtlCol="0" anchor="ctr"/>
+          <a:lstStyle/>
+          <a:p>
+            <a:pPr algn="ctr"/>
+          </a:p>
+        </p:txBody>
+      </p:sp>
+      <p:sp>
+        <p:nvSpPr>
+          <p:cNvPr id="22" name="TextBox 21"/>
+          <p:cNvSpPr txBox="1"/>
+          <p:nvPr/>
+        </p:nvSpPr>
+        <p:spPr>
+          <a:xfrm>
+            <a:off x="9601200" y="2011680"/>
+            <a:ext cx="2103120" cy="1188720"/>
+          </a:xfrm>
+          <a:prstGeom prst="rect">
+            <a:avLst/>
+          </a:prstGeom>
+          <a:noFill/>
+        </p:spPr>
+        <p:txBody>
+          <a:bodyPr wrap="none">
+            <a:spAutoFit/>
+          </a:bodyPr>
+          <a:lstStyle/>
+          <a:p>
+            <a:pPr algn="ctr">
+              <a:defRPr sz="3000" b="0">
+                <a:solidFill>
+                  <a:srgbClr val="FFFFFF"/>
+                </a:solidFill>
+              </a:defRPr>
+            </a:pPr>
+            <a:r>
+              <a:t>🔮 反思</a:t>
+            </a:r>
+          </a:p>
+        </p:txBody>
+      </p:sp>
+      <p:sp>
+        <p:nvSpPr>
+          <p:cNvPr id="23" name="TextBox 22"/>
+          <p:cNvSpPr txBox="1"/>
+          <p:nvPr/>
+        </p:nvSpPr>
+        <p:spPr>
+          <a:xfrm>
+            <a:off x="9601200" y="3291840"/>
+            <a:ext cx="2103120" cy="1188720"/>
+          </a:xfrm>
+          <a:prstGeom prst="rect">
+            <a:avLst/>
+          </a:prstGeom>
+          <a:noFill/>
+        </p:spPr>
+        <p:txBody>
+          <a:bodyPr wrap="none">
+            <a:spAutoFit/>
+          </a:bodyPr>
+          <a:lstStyle/>
+          <a:p>
+            <a:pPr algn="ctr">
+              <a:defRPr sz="2000" b="1">
+                <a:solidFill>
+                  <a:srgbClr val="553C9A"/>
+                </a:solidFill>
+              </a:defRPr>
+            </a:pPr>
+            <a:r>
+              <a:t>灵魂</a:t>
+            </a:r>
+          </a:p>
+        </p:txBody>
+      </p:sp>
+      <p:sp>
+        <p:nvSpPr>
+          <p:cNvPr id="24" name="TextBox 23"/>
+          <p:cNvSpPr txBox="1"/>
+          <p:nvPr/>
+        </p:nvSpPr>
+        <p:spPr>
+          <a:xfrm>
+            <a:off x="9601200" y="4572000"/>
+            <a:ext cx="2103120" cy="1188720"/>
+          </a:xfrm>
+          <a:prstGeom prst="rect">
+            <a:avLst/>
+          </a:prstGeom>
+          <a:noFill/>
+        </p:spPr>
+        <p:txBody>
+          <a:bodyPr wrap="none">
+            <a:spAutoFit/>
+          </a:bodyPr>
+          <a:lstStyle/>
+          <a:p>
+            <a:pPr algn="ctr">
+              <a:defRPr sz="1200" b="0">
+                <a:solidFill>
+                  <a:srgbClr val="FFFFFF"/>
+                </a:solidFill>
+              </a:defRPr>
+            </a:pPr>
+            <a:r>
+              <a:t>对自身局限的觉察</a:t>
             </a:r>
           </a:p>
         </p:txBody>
@@ -11801,7 +14827,7 @@
             <a:avLst/>
           </a:prstGeom>
           <a:solidFill>
-            <a:srgbClr val="1A1A2E"/>
+            <a:srgbClr val="553C9A"/>
           </a:solidFill>
           <a:ln>
             <a:noFill/>
@@ -11852,482 +14878,97 @@
           <a:lstStyle/>
           <a:p>
             <a:pPr>
-              <a:defRPr sz="3200" b="1">
+              <a:defRPr sz="2800" b="1">
                 <a:solidFill>
                   <a:srgbClr val="FFFFFF"/>
                 </a:solidFill>
               </a:defRPr>
             </a:pPr>
             <a:r>
-              <a:t>园丁的智慧：懂得适度失控</a:t>
-            </a:r>
-          </a:p>
-        </p:txBody>
-      </p:sp>
-      <p:sp>
-        <p:nvSpPr>
-          <p:cNvPr id="5" name="Rounded Rectangle 4"/>
-          <p:cNvSpPr/>
-          <p:nvPr/>
-        </p:nvSpPr>
-        <p:spPr>
-          <a:xfrm>
-            <a:off x="640080" y="1463040"/>
-            <a:ext cx="5271516" cy="1417320"/>
-          </a:xfrm>
-          <a:prstGeom prst="roundRect">
-            <a:avLst/>
-          </a:prstGeom>
-          <a:solidFill>
-            <a:srgbClr val="1A1A2E"/>
-          </a:solidFill>
-          <a:ln>
-            <a:noFill/>
-          </a:ln>
-        </p:spPr>
-        <p:style>
-          <a:lnRef idx="1">
-            <a:schemeClr val="accent1"/>
-          </a:lnRef>
-          <a:fillRef idx="3">
-            <a:schemeClr val="accent1"/>
-          </a:fillRef>
-          <a:effectRef idx="2">
-            <a:schemeClr val="accent1"/>
-          </a:effectRef>
-          <a:fontRef idx="minor">
-            <a:schemeClr val="lt1"/>
-          </a:fontRef>
-        </p:style>
-        <p:txBody>
-          <a:bodyPr rtlCol="0" anchor="ctr"/>
-          <a:lstStyle/>
-          <a:p>
-            <a:pPr algn="ctr"/>
-          </a:p>
-        </p:txBody>
-      </p:sp>
-      <p:sp>
-        <p:nvSpPr>
-          <p:cNvPr id="6" name="TextBox 5"/>
-          <p:cNvSpPr txBox="1"/>
-          <p:nvPr/>
-        </p:nvSpPr>
-        <p:spPr>
-          <a:xfrm>
-            <a:off x="640080" y="1536192"/>
-            <a:ext cx="5180076" cy="457200"/>
-          </a:xfrm>
-          <a:prstGeom prst="rect">
-            <a:avLst/>
-          </a:prstGeom>
-          <a:noFill/>
-        </p:spPr>
-        <p:txBody>
-          <a:bodyPr wrap="none">
+              <a:t>后记：从确定性工程到概率性工程</a:t>
+            </a:r>
+          </a:p>
+        </p:txBody>
+      </p:sp>
+      <p:sp>
+        <p:nvSpPr>
+          <p:cNvPr id="5" name="TextBox 4"/>
+          <p:cNvSpPr txBox="1"/>
+          <p:nvPr/>
+        </p:nvSpPr>
+        <p:spPr>
+          <a:xfrm>
+            <a:off x="640080" y="1371600"/>
+            <a:ext cx="10972800" cy="5029200"/>
+          </a:xfrm>
+          <a:prstGeom prst="rect">
+            <a:avLst/>
+          </a:prstGeom>
+          <a:noFill/>
+        </p:spPr>
+        <p:txBody>
+          <a:bodyPr wrap="square">
             <a:spAutoFit/>
           </a:bodyPr>
           <a:lstStyle/>
           <a:p>
             <a:pPr>
-              <a:defRPr sz="1400" b="1">
+              <a:spcAft>
+                <a:spcPts val="1400"/>
+              </a:spcAft>
+              <a:defRPr sz="2000" b="0">
+                <a:solidFill>
+                  <a:srgbClr val="1A1A2E"/>
+                </a:solidFill>
+              </a:defRPr>
+            </a:pPr>
+            <a:r>
+              <a:t>• 传统软件 = 牛顿力学隐喻：世界如精密钟表，追求零熵，将不确定性视为 bug</a:t>
+            </a:r>
+          </a:p>
+          <a:p>
+            <a:pPr>
+              <a:spcAft>
+                <a:spcPts val="1400"/>
+              </a:spcAft>
+              <a:defRPr sz="2000" b="0">
+                <a:solidFill>
+                  <a:srgbClr val="1A1A2E"/>
+                </a:solidFill>
+              </a:defRPr>
+            </a:pPr>
+            <a:r>
+              <a:t>• Agent 时代 = 达尔文逻辑：软件展现生长性（通过 RAG 积累）、适应性（动态调整）、繁殖性（生成新 Prompt）</a:t>
+            </a:r>
+          </a:p>
+          <a:p>
+            <a:pPr>
+              <a:spcAft>
+                <a:spcPts val="1400"/>
+              </a:spcAft>
+              <a:defRPr sz="2000" b="1">
                 <a:solidFill>
                   <a:srgbClr val="553C9A"/>
                 </a:solidFill>
               </a:defRPr>
             </a:pPr>
             <a:r>
-              <a:t>🌱 浇水施肥</a:t>
-            </a:r>
-          </a:p>
-        </p:txBody>
-      </p:sp>
-      <p:sp>
-        <p:nvSpPr>
-          <p:cNvPr id="7" name="TextBox 6"/>
-          <p:cNvSpPr txBox="1"/>
-          <p:nvPr/>
-        </p:nvSpPr>
-        <p:spPr>
-          <a:xfrm>
-            <a:off x="640080" y="1938528"/>
-            <a:ext cx="5180076" cy="960119"/>
-          </a:xfrm>
-          <a:prstGeom prst="rect">
-            <a:avLst/>
-          </a:prstGeom>
-          <a:noFill/>
-        </p:spPr>
-        <p:txBody>
-          <a:bodyPr wrap="square">
-            <a:spAutoFit/>
-          </a:bodyPr>
-          <a:lstStyle/>
+              <a:t>• 我们正见证硅基生命的寒武纪大爆发</a:t>
+            </a:r>
+          </a:p>
           <a:p>
             <a:pPr>
-              <a:defRPr sz="1100">
-                <a:solidFill>
-                  <a:srgbClr val="A0AEC0"/>
-                </a:solidFill>
-              </a:defRPr>
-            </a:pPr>
-            <a:r>
-              <a:t>优化数据质量</a:t>
-            </a:r>
-            <a:br/>
-            <a:r>
-              <a:t>提供知识滋养系统</a:t>
-            </a:r>
-          </a:p>
-        </p:txBody>
-      </p:sp>
-      <p:sp>
-        <p:nvSpPr>
-          <p:cNvPr id="8" name="Rounded Rectangle 7"/>
-          <p:cNvSpPr/>
-          <p:nvPr/>
-        </p:nvSpPr>
-        <p:spPr>
-          <a:xfrm>
-            <a:off x="6094476" y="1463040"/>
-            <a:ext cx="5271516" cy="1417320"/>
-          </a:xfrm>
-          <a:prstGeom prst="roundRect">
-            <a:avLst/>
-          </a:prstGeom>
-          <a:solidFill>
-            <a:srgbClr val="1A1A2E"/>
-          </a:solidFill>
-          <a:ln>
-            <a:noFill/>
-          </a:ln>
-        </p:spPr>
-        <p:style>
-          <a:lnRef idx="1">
-            <a:schemeClr val="accent1"/>
-          </a:lnRef>
-          <a:fillRef idx="3">
-            <a:schemeClr val="accent1"/>
-          </a:fillRef>
-          <a:effectRef idx="2">
-            <a:schemeClr val="accent1"/>
-          </a:effectRef>
-          <a:fontRef idx="minor">
-            <a:schemeClr val="lt1"/>
-          </a:fontRef>
-        </p:style>
-        <p:txBody>
-          <a:bodyPr rtlCol="0" anchor="ctr"/>
-          <a:lstStyle/>
-          <a:p>
-            <a:pPr algn="ctr"/>
-          </a:p>
-        </p:txBody>
-      </p:sp>
-      <p:sp>
-        <p:nvSpPr>
-          <p:cNvPr id="9" name="TextBox 8"/>
-          <p:cNvSpPr txBox="1"/>
-          <p:nvPr/>
-        </p:nvSpPr>
-        <p:spPr>
-          <a:xfrm>
-            <a:off x="6094476" y="1536192"/>
-            <a:ext cx="5180076" cy="457200"/>
-          </a:xfrm>
-          <a:prstGeom prst="rect">
-            <a:avLst/>
-          </a:prstGeom>
-          <a:noFill/>
-        </p:spPr>
-        <p:txBody>
-          <a:bodyPr wrap="none">
-            <a:spAutoFit/>
-          </a:bodyPr>
-          <a:lstStyle/>
-          <a:p>
-            <a:pPr>
-              <a:defRPr sz="1400" b="1">
-                <a:solidFill>
-                  <a:srgbClr val="553C9A"/>
-                </a:solidFill>
-              </a:defRPr>
-            </a:pPr>
-            <a:r>
-              <a:t>✂️ 修剪枝叶</a:t>
-            </a:r>
-          </a:p>
-        </p:txBody>
-      </p:sp>
-      <p:sp>
-        <p:nvSpPr>
-          <p:cNvPr id="10" name="TextBox 9"/>
-          <p:cNvSpPr txBox="1"/>
-          <p:nvPr/>
-        </p:nvSpPr>
-        <p:spPr>
-          <a:xfrm>
-            <a:off x="6094476" y="1938528"/>
-            <a:ext cx="5180076" cy="960119"/>
-          </a:xfrm>
-          <a:prstGeom prst="rect">
-            <a:avLst/>
-          </a:prstGeom>
-          <a:noFill/>
-        </p:spPr>
-        <p:txBody>
-          <a:bodyPr wrap="square">
-            <a:spAutoFit/>
-          </a:bodyPr>
-          <a:lstStyle/>
-          <a:p>
-            <a:pPr>
-              <a:defRPr sz="1100">
-                <a:solidFill>
-                  <a:srgbClr val="A0AEC0"/>
-                </a:solidFill>
-              </a:defRPr>
-            </a:pPr>
-            <a:r>
-              <a:t>设置护栏</a:t>
-            </a:r>
-            <a:br/>
-            <a:r>
-              <a:t>引入批判机制应对幻觉</a:t>
-            </a:r>
-          </a:p>
-        </p:txBody>
-      </p:sp>
-      <p:sp>
-        <p:nvSpPr>
-          <p:cNvPr id="11" name="Rounded Rectangle 10"/>
-          <p:cNvSpPr/>
-          <p:nvPr/>
-        </p:nvSpPr>
-        <p:spPr>
-          <a:xfrm>
-            <a:off x="640080" y="3017520"/>
-            <a:ext cx="5271516" cy="1417320"/>
-          </a:xfrm>
-          <a:prstGeom prst="roundRect">
-            <a:avLst/>
-          </a:prstGeom>
-          <a:solidFill>
-            <a:srgbClr val="1A1A2E"/>
-          </a:solidFill>
-          <a:ln>
-            <a:noFill/>
-          </a:ln>
-        </p:spPr>
-        <p:style>
-          <a:lnRef idx="1">
-            <a:schemeClr val="accent1"/>
-          </a:lnRef>
-          <a:fillRef idx="3">
-            <a:schemeClr val="accent1"/>
-          </a:fillRef>
-          <a:effectRef idx="2">
-            <a:schemeClr val="accent1"/>
-          </a:effectRef>
-          <a:fontRef idx="minor">
-            <a:schemeClr val="lt1"/>
-          </a:fontRef>
-        </p:style>
-        <p:txBody>
-          <a:bodyPr rtlCol="0" anchor="ctr"/>
-          <a:lstStyle/>
-          <a:p>
-            <a:pPr algn="ctr"/>
-          </a:p>
-        </p:txBody>
-      </p:sp>
-      <p:sp>
-        <p:nvSpPr>
-          <p:cNvPr id="12" name="TextBox 11"/>
-          <p:cNvSpPr txBox="1"/>
-          <p:nvPr/>
-        </p:nvSpPr>
-        <p:spPr>
-          <a:xfrm>
-            <a:off x="640080" y="3090672"/>
-            <a:ext cx="5180076" cy="457200"/>
-          </a:xfrm>
-          <a:prstGeom prst="rect">
-            <a:avLst/>
-          </a:prstGeom>
-          <a:noFill/>
-        </p:spPr>
-        <p:txBody>
-          <a:bodyPr wrap="none">
-            <a:spAutoFit/>
-          </a:bodyPr>
-          <a:lstStyle/>
-          <a:p>
-            <a:pPr>
-              <a:defRPr sz="1400" b="1">
-                <a:solidFill>
-                  <a:srgbClr val="553C9A"/>
-                </a:solidFill>
-              </a:defRPr>
-            </a:pPr>
-            <a:r>
-              <a:t>🌍 营造环境</a:t>
-            </a:r>
-          </a:p>
-        </p:txBody>
-      </p:sp>
-      <p:sp>
-        <p:nvSpPr>
-          <p:cNvPr id="13" name="TextBox 12"/>
-          <p:cNvSpPr txBox="1"/>
-          <p:nvPr/>
-        </p:nvSpPr>
-        <p:spPr>
-          <a:xfrm>
-            <a:off x="640080" y="3493008"/>
-            <a:ext cx="5180076" cy="960119"/>
-          </a:xfrm>
-          <a:prstGeom prst="rect">
-            <a:avLst/>
-          </a:prstGeom>
-          <a:noFill/>
-        </p:spPr>
-        <p:txBody>
-          <a:bodyPr wrap="square">
-            <a:spAutoFit/>
-          </a:bodyPr>
-          <a:lstStyle/>
-          <a:p>
-            <a:pPr>
-              <a:defRPr sz="1100">
-                <a:solidFill>
-                  <a:srgbClr val="A0AEC0"/>
-                </a:solidFill>
-              </a:defRPr>
-            </a:pPr>
-            <a:r>
-              <a:t>设计 A2A 协议</a:t>
-            </a:r>
-            <a:br/>
-            <a:r>
-              <a:t>搭建 Swarm 平台</a:t>
-            </a:r>
-          </a:p>
-        </p:txBody>
-      </p:sp>
-      <p:sp>
-        <p:nvSpPr>
-          <p:cNvPr id="14" name="Rounded Rectangle 13"/>
-          <p:cNvSpPr/>
-          <p:nvPr/>
-        </p:nvSpPr>
-        <p:spPr>
-          <a:xfrm>
-            <a:off x="6094476" y="3017520"/>
-            <a:ext cx="5271516" cy="1417320"/>
-          </a:xfrm>
-          <a:prstGeom prst="roundRect">
-            <a:avLst/>
-          </a:prstGeom>
-          <a:solidFill>
-            <a:srgbClr val="1A1A2E"/>
-          </a:solidFill>
-          <a:ln>
-            <a:noFill/>
-          </a:ln>
-        </p:spPr>
-        <p:style>
-          <a:lnRef idx="1">
-            <a:schemeClr val="accent1"/>
-          </a:lnRef>
-          <a:fillRef idx="3">
-            <a:schemeClr val="accent1"/>
-          </a:fillRef>
-          <a:effectRef idx="2">
-            <a:schemeClr val="accent1"/>
-          </a:effectRef>
-          <a:fontRef idx="minor">
-            <a:schemeClr val="lt1"/>
-          </a:fontRef>
-        </p:style>
-        <p:txBody>
-          <a:bodyPr rtlCol="0" anchor="ctr"/>
-          <a:lstStyle/>
-          <a:p>
-            <a:pPr algn="ctr"/>
-          </a:p>
-        </p:txBody>
-      </p:sp>
-      <p:sp>
-        <p:nvSpPr>
-          <p:cNvPr id="15" name="TextBox 14"/>
-          <p:cNvSpPr txBox="1"/>
-          <p:nvPr/>
-        </p:nvSpPr>
-        <p:spPr>
-          <a:xfrm>
-            <a:off x="6094476" y="3090672"/>
-            <a:ext cx="5180076" cy="457200"/>
-          </a:xfrm>
-          <a:prstGeom prst="rect">
-            <a:avLst/>
-          </a:prstGeom>
-          <a:noFill/>
-        </p:spPr>
-        <p:txBody>
-          <a:bodyPr wrap="none">
-            <a:spAutoFit/>
-          </a:bodyPr>
-          <a:lstStyle/>
-          <a:p>
-            <a:pPr>
-              <a:defRPr sz="1400" b="1">
-                <a:solidFill>
-                  <a:srgbClr val="553C9A"/>
-                </a:solidFill>
-              </a:defRPr>
-            </a:pPr>
-            <a:r>
-              <a:t>💡 容忍混沌</a:t>
-            </a:r>
-          </a:p>
-        </p:txBody>
-      </p:sp>
-      <p:sp>
-        <p:nvSpPr>
-          <p:cNvPr id="16" name="TextBox 15"/>
-          <p:cNvSpPr txBox="1"/>
-          <p:nvPr/>
-        </p:nvSpPr>
-        <p:spPr>
-          <a:xfrm>
-            <a:off x="6094476" y="3493008"/>
-            <a:ext cx="5180076" cy="960119"/>
-          </a:xfrm>
-          <a:prstGeom prst="rect">
-            <a:avLst/>
-          </a:prstGeom>
-          <a:noFill/>
-        </p:spPr>
-        <p:txBody>
-          <a:bodyPr wrap="square">
-            <a:spAutoFit/>
-          </a:bodyPr>
-          <a:lstStyle/>
-          <a:p>
-            <a:pPr>
-              <a:defRPr sz="1100">
-                <a:solidFill>
-                  <a:srgbClr val="A0AEC0"/>
-                </a:solidFill>
-              </a:defRPr>
-            </a:pPr>
-            <a:r>
-              <a:t>唯有在混沌的边缘</a:t>
-            </a:r>
-            <a:br/>
-            <a:r>
-              <a:t>智能才会真正涌现</a:t>
+              <a:spcAft>
+                <a:spcPts val="1400"/>
+              </a:spcAft>
+              <a:defRPr sz="2000" b="0">
+                <a:solidFill>
+                  <a:srgbClr val="1A1A2E"/>
+                </a:solidFill>
+              </a:defRPr>
+            </a:pPr>
+            <a:r>
+              <a:t>• 架构师的新角色 = 熵的园丁：无法命令植物长多高，但可以优化土壤</a:t>
             </a:r>
           </a:p>
         </p:txBody>
@@ -12402,7 +15043,7 @@
         <p:spPr>
           <a:xfrm>
             <a:off x="0" y="0"/>
-            <a:ext cx="12188952" cy="137160"/>
+            <a:ext cx="12188952" cy="1097280"/>
           </a:xfrm>
           <a:prstGeom prst="rect">
             <a:avLst/>
@@ -12444,8 +15085,121 @@
         </p:nvSpPr>
         <p:spPr>
           <a:xfrm>
-            <a:off x="457200" y="365760"/>
-            <a:ext cx="11274552" cy="2286000"/>
+            <a:off x="457200" y="228600"/>
+            <a:ext cx="11274552" cy="822960"/>
+          </a:xfrm>
+          <a:prstGeom prst="rect">
+            <a:avLst/>
+          </a:prstGeom>
+          <a:noFill/>
+        </p:spPr>
+        <p:txBody>
+          <a:bodyPr wrap="none">
+            <a:spAutoFit/>
+          </a:bodyPr>
+          <a:lstStyle/>
+          <a:p>
+            <a:pPr>
+              <a:defRPr sz="3200" b="1">
+                <a:solidFill>
+                  <a:srgbClr val="FFFFFF"/>
+                </a:solidFill>
+              </a:defRPr>
+            </a:pPr>
+            <a:r>
+              <a:t>园丁的智慧：懂得适度失控</a:t>
+            </a:r>
+          </a:p>
+        </p:txBody>
+      </p:sp>
+      <p:sp>
+        <p:nvSpPr>
+          <p:cNvPr id="5" name="Rounded Rectangle 4"/>
+          <p:cNvSpPr/>
+          <p:nvPr/>
+        </p:nvSpPr>
+        <p:spPr>
+          <a:xfrm>
+            <a:off x="640080" y="1463040"/>
+            <a:ext cx="5271516" cy="1417320"/>
+          </a:xfrm>
+          <a:prstGeom prst="roundRect">
+            <a:avLst/>
+          </a:prstGeom>
+          <a:solidFill>
+            <a:srgbClr val="1A1A2E"/>
+          </a:solidFill>
+          <a:ln>
+            <a:noFill/>
+          </a:ln>
+        </p:spPr>
+        <p:style>
+          <a:lnRef idx="1">
+            <a:schemeClr val="accent1"/>
+          </a:lnRef>
+          <a:fillRef idx="3">
+            <a:schemeClr val="accent1"/>
+          </a:fillRef>
+          <a:effectRef idx="2">
+            <a:schemeClr val="accent1"/>
+          </a:effectRef>
+          <a:fontRef idx="minor">
+            <a:schemeClr val="lt1"/>
+          </a:fontRef>
+        </p:style>
+        <p:txBody>
+          <a:bodyPr rtlCol="0" anchor="ctr"/>
+          <a:lstStyle/>
+          <a:p>
+            <a:pPr algn="ctr"/>
+          </a:p>
+        </p:txBody>
+      </p:sp>
+      <p:sp>
+        <p:nvSpPr>
+          <p:cNvPr id="6" name="TextBox 5"/>
+          <p:cNvSpPr txBox="1"/>
+          <p:nvPr/>
+        </p:nvSpPr>
+        <p:spPr>
+          <a:xfrm>
+            <a:off x="640080" y="1536192"/>
+            <a:ext cx="5180076" cy="457200"/>
+          </a:xfrm>
+          <a:prstGeom prst="rect">
+            <a:avLst/>
+          </a:prstGeom>
+          <a:noFill/>
+        </p:spPr>
+        <p:txBody>
+          <a:bodyPr wrap="none">
+            <a:spAutoFit/>
+          </a:bodyPr>
+          <a:lstStyle/>
+          <a:p>
+            <a:pPr>
+              <a:defRPr sz="1400" b="1">
+                <a:solidFill>
+                  <a:srgbClr val="553C9A"/>
+                </a:solidFill>
+              </a:defRPr>
+            </a:pPr>
+            <a:r>
+              <a:t>🌱 浇水施肥</a:t>
+            </a:r>
+          </a:p>
+        </p:txBody>
+      </p:sp>
+      <p:sp>
+        <p:nvSpPr>
+          <p:cNvPr id="7" name="TextBox 6"/>
+          <p:cNvSpPr txBox="1"/>
+          <p:nvPr/>
+        </p:nvSpPr>
+        <p:spPr>
+          <a:xfrm>
+            <a:off x="640080" y="1938528"/>
+            <a:ext cx="5180076" cy="960119"/>
           </a:xfrm>
           <a:prstGeom prst="rect">
             <a:avLst/>
@@ -12458,15 +15212,370 @@
           </a:bodyPr>
           <a:lstStyle/>
           <a:p>
-            <a:pPr algn="ctr">
-              <a:defRPr sz="2600" i="1">
-                <a:solidFill>
-                  <a:srgbClr val="1A1A2E"/>
-                </a:solidFill>
-              </a:defRPr>
-            </a:pPr>
-            <a:r>
-              <a:t>"园丁的智慧，在于懂得适度失控。唯有在混沌的边缘，智能才会真正涌现。"</a:t>
+            <a:pPr>
+              <a:defRPr sz="1100">
+                <a:solidFill>
+                  <a:srgbClr val="A0AEC0"/>
+                </a:solidFill>
+              </a:defRPr>
+            </a:pPr>
+            <a:r>
+              <a:t>优化数据质量</a:t>
+            </a:r>
+            <a:br/>
+            <a:r>
+              <a:t>提供知识滋养系统</a:t>
+            </a:r>
+          </a:p>
+        </p:txBody>
+      </p:sp>
+      <p:sp>
+        <p:nvSpPr>
+          <p:cNvPr id="8" name="Rounded Rectangle 7"/>
+          <p:cNvSpPr/>
+          <p:nvPr/>
+        </p:nvSpPr>
+        <p:spPr>
+          <a:xfrm>
+            <a:off x="6094476" y="1463040"/>
+            <a:ext cx="5271516" cy="1417320"/>
+          </a:xfrm>
+          <a:prstGeom prst="roundRect">
+            <a:avLst/>
+          </a:prstGeom>
+          <a:solidFill>
+            <a:srgbClr val="1A1A2E"/>
+          </a:solidFill>
+          <a:ln>
+            <a:noFill/>
+          </a:ln>
+        </p:spPr>
+        <p:style>
+          <a:lnRef idx="1">
+            <a:schemeClr val="accent1"/>
+          </a:lnRef>
+          <a:fillRef idx="3">
+            <a:schemeClr val="accent1"/>
+          </a:fillRef>
+          <a:effectRef idx="2">
+            <a:schemeClr val="accent1"/>
+          </a:effectRef>
+          <a:fontRef idx="minor">
+            <a:schemeClr val="lt1"/>
+          </a:fontRef>
+        </p:style>
+        <p:txBody>
+          <a:bodyPr rtlCol="0" anchor="ctr"/>
+          <a:lstStyle/>
+          <a:p>
+            <a:pPr algn="ctr"/>
+          </a:p>
+        </p:txBody>
+      </p:sp>
+      <p:sp>
+        <p:nvSpPr>
+          <p:cNvPr id="9" name="TextBox 8"/>
+          <p:cNvSpPr txBox="1"/>
+          <p:nvPr/>
+        </p:nvSpPr>
+        <p:spPr>
+          <a:xfrm>
+            <a:off x="6094476" y="1536192"/>
+            <a:ext cx="5180076" cy="457200"/>
+          </a:xfrm>
+          <a:prstGeom prst="rect">
+            <a:avLst/>
+          </a:prstGeom>
+          <a:noFill/>
+        </p:spPr>
+        <p:txBody>
+          <a:bodyPr wrap="none">
+            <a:spAutoFit/>
+          </a:bodyPr>
+          <a:lstStyle/>
+          <a:p>
+            <a:pPr>
+              <a:defRPr sz="1400" b="1">
+                <a:solidFill>
+                  <a:srgbClr val="553C9A"/>
+                </a:solidFill>
+              </a:defRPr>
+            </a:pPr>
+            <a:r>
+              <a:t>✂️ 修剪枝叶</a:t>
+            </a:r>
+          </a:p>
+        </p:txBody>
+      </p:sp>
+      <p:sp>
+        <p:nvSpPr>
+          <p:cNvPr id="10" name="TextBox 9"/>
+          <p:cNvSpPr txBox="1"/>
+          <p:nvPr/>
+        </p:nvSpPr>
+        <p:spPr>
+          <a:xfrm>
+            <a:off x="6094476" y="1938528"/>
+            <a:ext cx="5180076" cy="960119"/>
+          </a:xfrm>
+          <a:prstGeom prst="rect">
+            <a:avLst/>
+          </a:prstGeom>
+          <a:noFill/>
+        </p:spPr>
+        <p:txBody>
+          <a:bodyPr wrap="square">
+            <a:spAutoFit/>
+          </a:bodyPr>
+          <a:lstStyle/>
+          <a:p>
+            <a:pPr>
+              <a:defRPr sz="1100">
+                <a:solidFill>
+                  <a:srgbClr val="A0AEC0"/>
+                </a:solidFill>
+              </a:defRPr>
+            </a:pPr>
+            <a:r>
+              <a:t>设置护栏</a:t>
+            </a:r>
+            <a:br/>
+            <a:r>
+              <a:t>引入批判机制应对幻觉</a:t>
+            </a:r>
+          </a:p>
+        </p:txBody>
+      </p:sp>
+      <p:sp>
+        <p:nvSpPr>
+          <p:cNvPr id="11" name="Rounded Rectangle 10"/>
+          <p:cNvSpPr/>
+          <p:nvPr/>
+        </p:nvSpPr>
+        <p:spPr>
+          <a:xfrm>
+            <a:off x="640080" y="3017520"/>
+            <a:ext cx="5271516" cy="1417320"/>
+          </a:xfrm>
+          <a:prstGeom prst="roundRect">
+            <a:avLst/>
+          </a:prstGeom>
+          <a:solidFill>
+            <a:srgbClr val="1A1A2E"/>
+          </a:solidFill>
+          <a:ln>
+            <a:noFill/>
+          </a:ln>
+        </p:spPr>
+        <p:style>
+          <a:lnRef idx="1">
+            <a:schemeClr val="accent1"/>
+          </a:lnRef>
+          <a:fillRef idx="3">
+            <a:schemeClr val="accent1"/>
+          </a:fillRef>
+          <a:effectRef idx="2">
+            <a:schemeClr val="accent1"/>
+          </a:effectRef>
+          <a:fontRef idx="minor">
+            <a:schemeClr val="lt1"/>
+          </a:fontRef>
+        </p:style>
+        <p:txBody>
+          <a:bodyPr rtlCol="0" anchor="ctr"/>
+          <a:lstStyle/>
+          <a:p>
+            <a:pPr algn="ctr"/>
+          </a:p>
+        </p:txBody>
+      </p:sp>
+      <p:sp>
+        <p:nvSpPr>
+          <p:cNvPr id="12" name="TextBox 11"/>
+          <p:cNvSpPr txBox="1"/>
+          <p:nvPr/>
+        </p:nvSpPr>
+        <p:spPr>
+          <a:xfrm>
+            <a:off x="640080" y="3090672"/>
+            <a:ext cx="5180076" cy="457200"/>
+          </a:xfrm>
+          <a:prstGeom prst="rect">
+            <a:avLst/>
+          </a:prstGeom>
+          <a:noFill/>
+        </p:spPr>
+        <p:txBody>
+          <a:bodyPr wrap="none">
+            <a:spAutoFit/>
+          </a:bodyPr>
+          <a:lstStyle/>
+          <a:p>
+            <a:pPr>
+              <a:defRPr sz="1400" b="1">
+                <a:solidFill>
+                  <a:srgbClr val="553C9A"/>
+                </a:solidFill>
+              </a:defRPr>
+            </a:pPr>
+            <a:r>
+              <a:t>🌍 营造环境</a:t>
+            </a:r>
+          </a:p>
+        </p:txBody>
+      </p:sp>
+      <p:sp>
+        <p:nvSpPr>
+          <p:cNvPr id="13" name="TextBox 12"/>
+          <p:cNvSpPr txBox="1"/>
+          <p:nvPr/>
+        </p:nvSpPr>
+        <p:spPr>
+          <a:xfrm>
+            <a:off x="640080" y="3493008"/>
+            <a:ext cx="5180076" cy="960119"/>
+          </a:xfrm>
+          <a:prstGeom prst="rect">
+            <a:avLst/>
+          </a:prstGeom>
+          <a:noFill/>
+        </p:spPr>
+        <p:txBody>
+          <a:bodyPr wrap="square">
+            <a:spAutoFit/>
+          </a:bodyPr>
+          <a:lstStyle/>
+          <a:p>
+            <a:pPr>
+              <a:defRPr sz="1100">
+                <a:solidFill>
+                  <a:srgbClr val="A0AEC0"/>
+                </a:solidFill>
+              </a:defRPr>
+            </a:pPr>
+            <a:r>
+              <a:t>设计 A2A 协议</a:t>
+            </a:r>
+            <a:br/>
+            <a:r>
+              <a:t>搭建 Swarm 平台</a:t>
+            </a:r>
+          </a:p>
+        </p:txBody>
+      </p:sp>
+      <p:sp>
+        <p:nvSpPr>
+          <p:cNvPr id="14" name="Rounded Rectangle 13"/>
+          <p:cNvSpPr/>
+          <p:nvPr/>
+        </p:nvSpPr>
+        <p:spPr>
+          <a:xfrm>
+            <a:off x="6094476" y="3017520"/>
+            <a:ext cx="5271516" cy="1417320"/>
+          </a:xfrm>
+          <a:prstGeom prst="roundRect">
+            <a:avLst/>
+          </a:prstGeom>
+          <a:solidFill>
+            <a:srgbClr val="1A1A2E"/>
+          </a:solidFill>
+          <a:ln>
+            <a:noFill/>
+          </a:ln>
+        </p:spPr>
+        <p:style>
+          <a:lnRef idx="1">
+            <a:schemeClr val="accent1"/>
+          </a:lnRef>
+          <a:fillRef idx="3">
+            <a:schemeClr val="accent1"/>
+          </a:fillRef>
+          <a:effectRef idx="2">
+            <a:schemeClr val="accent1"/>
+          </a:effectRef>
+          <a:fontRef idx="minor">
+            <a:schemeClr val="lt1"/>
+          </a:fontRef>
+        </p:style>
+        <p:txBody>
+          <a:bodyPr rtlCol="0" anchor="ctr"/>
+          <a:lstStyle/>
+          <a:p>
+            <a:pPr algn="ctr"/>
+          </a:p>
+        </p:txBody>
+      </p:sp>
+      <p:sp>
+        <p:nvSpPr>
+          <p:cNvPr id="15" name="TextBox 14"/>
+          <p:cNvSpPr txBox="1"/>
+          <p:nvPr/>
+        </p:nvSpPr>
+        <p:spPr>
+          <a:xfrm>
+            <a:off x="6094476" y="3090672"/>
+            <a:ext cx="5180076" cy="457200"/>
+          </a:xfrm>
+          <a:prstGeom prst="rect">
+            <a:avLst/>
+          </a:prstGeom>
+          <a:noFill/>
+        </p:spPr>
+        <p:txBody>
+          <a:bodyPr wrap="none">
+            <a:spAutoFit/>
+          </a:bodyPr>
+          <a:lstStyle/>
+          <a:p>
+            <a:pPr>
+              <a:defRPr sz="1400" b="1">
+                <a:solidFill>
+                  <a:srgbClr val="553C9A"/>
+                </a:solidFill>
+              </a:defRPr>
+            </a:pPr>
+            <a:r>
+              <a:t>💡 容忍混沌</a:t>
+            </a:r>
+          </a:p>
+        </p:txBody>
+      </p:sp>
+      <p:sp>
+        <p:nvSpPr>
+          <p:cNvPr id="16" name="TextBox 15"/>
+          <p:cNvSpPr txBox="1"/>
+          <p:nvPr/>
+        </p:nvSpPr>
+        <p:spPr>
+          <a:xfrm>
+            <a:off x="6094476" y="3493008"/>
+            <a:ext cx="5180076" cy="960119"/>
+          </a:xfrm>
+          <a:prstGeom prst="rect">
+            <a:avLst/>
+          </a:prstGeom>
+          <a:noFill/>
+        </p:spPr>
+        <p:txBody>
+          <a:bodyPr wrap="square">
+            <a:spAutoFit/>
+          </a:bodyPr>
+          <a:lstStyle/>
+          <a:p>
+            <a:pPr>
+              <a:defRPr sz="1100">
+                <a:solidFill>
+                  <a:srgbClr val="A0AEC0"/>
+                </a:solidFill>
+              </a:defRPr>
+            </a:pPr>
+            <a:r>
+              <a:t>唯有在混沌的边缘</a:t>
+            </a:r>
+            <a:br/>
+            <a:r>
+              <a:t>智能才会真正涌现</a:t>
             </a:r>
           </a:p>
         </p:txBody>
@@ -12480,6 +15589,145 @@
 </file>
 
 <file path=ppt/slides/slide33.xml><?xml version="1.0" encoding="utf-8"?>
+<p:sld xmlns:a="http://schemas.openxmlformats.org/drawingml/2006/main" xmlns:p="http://schemas.openxmlformats.org/presentationml/2006/main" xmlns:r="http://schemas.openxmlformats.org/officeDocument/2006/relationships">
+  <p:cSld>
+    <p:spTree>
+      <p:nvGrpSpPr>
+        <p:cNvPr id="1" name=""/>
+        <p:cNvGrpSpPr/>
+        <p:nvPr/>
+      </p:nvGrpSpPr>
+      <p:grpSpPr/>
+      <p:sp>
+        <p:nvSpPr>
+          <p:cNvPr id="2" name="Rectangle 1"/>
+          <p:cNvSpPr/>
+          <p:nvPr/>
+        </p:nvSpPr>
+        <p:spPr>
+          <a:xfrm>
+            <a:off x="0" y="0"/>
+            <a:ext cx="12188952" cy="6858000"/>
+          </a:xfrm>
+          <a:prstGeom prst="rect">
+            <a:avLst/>
+          </a:prstGeom>
+          <a:solidFill>
+            <a:srgbClr val="FFFFFF"/>
+          </a:solidFill>
+          <a:ln>
+            <a:noFill/>
+          </a:ln>
+        </p:spPr>
+        <p:style>
+          <a:lnRef idx="1">
+            <a:schemeClr val="accent1"/>
+          </a:lnRef>
+          <a:fillRef idx="3">
+            <a:schemeClr val="accent1"/>
+          </a:fillRef>
+          <a:effectRef idx="2">
+            <a:schemeClr val="accent1"/>
+          </a:effectRef>
+          <a:fontRef idx="minor">
+            <a:schemeClr val="lt1"/>
+          </a:fontRef>
+        </p:style>
+        <p:txBody>
+          <a:bodyPr rtlCol="0" anchor="ctr"/>
+          <a:lstStyle/>
+          <a:p>
+            <a:pPr algn="ctr"/>
+          </a:p>
+        </p:txBody>
+      </p:sp>
+      <p:sp>
+        <p:nvSpPr>
+          <p:cNvPr id="3" name="Rectangle 2"/>
+          <p:cNvSpPr/>
+          <p:nvPr/>
+        </p:nvSpPr>
+        <p:spPr>
+          <a:xfrm>
+            <a:off x="0" y="0"/>
+            <a:ext cx="12188952" cy="137160"/>
+          </a:xfrm>
+          <a:prstGeom prst="rect">
+            <a:avLst/>
+          </a:prstGeom>
+          <a:solidFill>
+            <a:srgbClr val="1A1A2E"/>
+          </a:solidFill>
+          <a:ln>
+            <a:noFill/>
+          </a:ln>
+        </p:spPr>
+        <p:style>
+          <a:lnRef idx="1">
+            <a:schemeClr val="accent1"/>
+          </a:lnRef>
+          <a:fillRef idx="3">
+            <a:schemeClr val="accent1"/>
+          </a:fillRef>
+          <a:effectRef idx="2">
+            <a:schemeClr val="accent1"/>
+          </a:effectRef>
+          <a:fontRef idx="minor">
+            <a:schemeClr val="lt1"/>
+          </a:fontRef>
+        </p:style>
+        <p:txBody>
+          <a:bodyPr rtlCol="0" anchor="ctr"/>
+          <a:lstStyle/>
+          <a:p>
+            <a:pPr algn="ctr"/>
+          </a:p>
+        </p:txBody>
+      </p:sp>
+      <p:sp>
+        <p:nvSpPr>
+          <p:cNvPr id="4" name="TextBox 3"/>
+          <p:cNvSpPr txBox="1"/>
+          <p:nvPr/>
+        </p:nvSpPr>
+        <p:spPr>
+          <a:xfrm>
+            <a:off x="457200" y="365760"/>
+            <a:ext cx="11274552" cy="2286000"/>
+          </a:xfrm>
+          <a:prstGeom prst="rect">
+            <a:avLst/>
+          </a:prstGeom>
+          <a:noFill/>
+        </p:spPr>
+        <p:txBody>
+          <a:bodyPr wrap="square">
+            <a:spAutoFit/>
+          </a:bodyPr>
+          <a:lstStyle/>
+          <a:p>
+            <a:pPr algn="ctr">
+              <a:defRPr sz="2600" i="1">
+                <a:solidFill>
+                  <a:srgbClr val="1A1A2E"/>
+                </a:solidFill>
+              </a:defRPr>
+            </a:pPr>
+            <a:r>
+              <a:t>"园丁的智慧，在于懂得适度失控。唯有在混沌的边缘，智能才会真正涌现。"</a:t>
+            </a:r>
+          </a:p>
+        </p:txBody>
+      </p:sp>
+    </p:spTree>
+  </p:cSld>
+  <p:clrMapOvr>
+    <a:masterClrMapping/>
+  </p:clrMapOvr>
+</p:sld>
+</file>
+
+<file path=ppt/slides/slide34.xml><?xml version="1.0" encoding="utf-8"?>
 <p:sld xmlns:a="http://schemas.openxmlformats.org/drawingml/2006/main" xmlns:p="http://schemas.openxmlformats.org/presentationml/2006/main" xmlns:r="http://schemas.openxmlformats.org/officeDocument/2006/relationships">
   <p:cSld>
     <p:spTree>
